--- a/PPT/optic.pptx
+++ b/PPT/optic.pptx
@@ -13,11 +13,12 @@
     <p:sldId id="259" r:id="rId7"/>
     <p:sldId id="262" r:id="rId8"/>
     <p:sldId id="263" r:id="rId9"/>
+    <p:sldId id="264" r:id="rId10"/>
   </p:sldIdLst>
   <p:sldSz cx="12192000" cy="6858000"/>
   <p:notesSz cx="6858000" cy="9144000"/>
   <p:custDataLst>
-    <p:tags r:id="rId10"/>
+    <p:tags r:id="rId11"/>
   </p:custDataLst>
   <p:defaultTextStyle>
     <a:defPPr>
@@ -251,7 +252,7 @@
           <a:p>
             <a:fld id="{D997B5FA-0921-464F-AAE1-844C04324D75}" type="datetimeFigureOut">
               <a:rPr lang="zh-CN" altLang="en-US" smtClean="0"/>
-              <a:t>2025-07-09</a:t>
+              <a:t>2026-03-15</a:t>
             </a:fld>
             <a:endParaRPr lang="zh-CN" altLang="en-US"/>
           </a:p>
@@ -414,7 +415,7 @@
           <a:p>
             <a:fld id="{D997B5FA-0921-464F-AAE1-844C04324D75}" type="datetimeFigureOut">
               <a:rPr lang="zh-CN" altLang="en-US" smtClean="0"/>
-              <a:t>2025-07-09</a:t>
+              <a:t>2026-03-15</a:t>
             </a:fld>
             <a:endParaRPr lang="zh-CN" altLang="en-US"/>
           </a:p>
@@ -587,7 +588,7 @@
           <a:p>
             <a:fld id="{D997B5FA-0921-464F-AAE1-844C04324D75}" type="datetimeFigureOut">
               <a:rPr lang="zh-CN" altLang="en-US" smtClean="0"/>
-              <a:t>2025-07-09</a:t>
+              <a:t>2026-03-15</a:t>
             </a:fld>
             <a:endParaRPr lang="zh-CN" altLang="en-US"/>
           </a:p>
@@ -750,7 +751,7 @@
           <a:p>
             <a:fld id="{D997B5FA-0921-464F-AAE1-844C04324D75}" type="datetimeFigureOut">
               <a:rPr lang="zh-CN" altLang="en-US" smtClean="0"/>
-              <a:t>2025-07-09</a:t>
+              <a:t>2026-03-15</a:t>
             </a:fld>
             <a:endParaRPr lang="zh-CN" altLang="en-US"/>
           </a:p>
@@ -990,7 +991,7 @@
           <a:p>
             <a:fld id="{D997B5FA-0921-464F-AAE1-844C04324D75}" type="datetimeFigureOut">
               <a:rPr lang="zh-CN" altLang="en-US" smtClean="0"/>
-              <a:t>2025-07-09</a:t>
+              <a:t>2026-03-15</a:t>
             </a:fld>
             <a:endParaRPr lang="zh-CN" altLang="en-US"/>
           </a:p>
@@ -1214,7 +1215,7 @@
           <a:p>
             <a:fld id="{D997B5FA-0921-464F-AAE1-844C04324D75}" type="datetimeFigureOut">
               <a:rPr lang="zh-CN" altLang="en-US" smtClean="0"/>
-              <a:t>2025-07-09</a:t>
+              <a:t>2026-03-15</a:t>
             </a:fld>
             <a:endParaRPr lang="zh-CN" altLang="en-US"/>
           </a:p>
@@ -1573,7 +1574,7 @@
           <a:p>
             <a:fld id="{D997B5FA-0921-464F-AAE1-844C04324D75}" type="datetimeFigureOut">
               <a:rPr lang="zh-CN" altLang="en-US" smtClean="0"/>
-              <a:t>2025-07-09</a:t>
+              <a:t>2026-03-15</a:t>
             </a:fld>
             <a:endParaRPr lang="zh-CN" altLang="en-US"/>
           </a:p>
@@ -1685,7 +1686,7 @@
           <a:p>
             <a:fld id="{D997B5FA-0921-464F-AAE1-844C04324D75}" type="datetimeFigureOut">
               <a:rPr lang="zh-CN" altLang="en-US" smtClean="0"/>
-              <a:t>2025-07-09</a:t>
+              <a:t>2026-03-15</a:t>
             </a:fld>
             <a:endParaRPr lang="zh-CN" altLang="en-US"/>
           </a:p>
@@ -1775,7 +1776,7 @@
           <a:p>
             <a:fld id="{D997B5FA-0921-464F-AAE1-844C04324D75}" type="datetimeFigureOut">
               <a:rPr lang="zh-CN" altLang="en-US" smtClean="0"/>
-              <a:t>2025-07-09</a:t>
+              <a:t>2026-03-15</a:t>
             </a:fld>
             <a:endParaRPr lang="zh-CN" altLang="en-US"/>
           </a:p>
@@ -2045,7 +2046,7 @@
           <a:p>
             <a:fld id="{D997B5FA-0921-464F-AAE1-844C04324D75}" type="datetimeFigureOut">
               <a:rPr lang="zh-CN" altLang="en-US" smtClean="0"/>
-              <a:t>2025-07-09</a:t>
+              <a:t>2026-03-15</a:t>
             </a:fld>
             <a:endParaRPr lang="zh-CN" altLang="en-US"/>
           </a:p>
@@ -2292,7 +2293,7 @@
           <a:p>
             <a:fld id="{D997B5FA-0921-464F-AAE1-844C04324D75}" type="datetimeFigureOut">
               <a:rPr lang="zh-CN" altLang="en-US" smtClean="0"/>
-              <a:t>2025-07-09</a:t>
+              <a:t>2026-03-15</a:t>
             </a:fld>
             <a:endParaRPr lang="zh-CN" altLang="en-US"/>
           </a:p>
@@ -2498,7 +2499,7 @@
           <a:p>
             <a:fld id="{D997B5FA-0921-464F-AAE1-844C04324D75}" type="datetimeFigureOut">
               <a:rPr lang="zh-CN" altLang="en-US" smtClean="0"/>
-              <a:t>2025-07-09</a:t>
+              <a:t>2026-03-15</a:t>
             </a:fld>
             <a:endParaRPr lang="zh-CN" altLang="en-US"/>
           </a:p>
@@ -16208,8 +16209,8 @@
             </a:fontRef>
           </p:style>
         </p:cxnSp>
-        <mc:AlternateContent xmlns:mc="http://schemas.openxmlformats.org/markup-compatibility/2006">
-          <mc:Choice xmlns:a14="http://schemas.microsoft.com/office/drawing/2010/main" Requires="a14">
+        <mc:AlternateContent xmlns:mc="http://schemas.openxmlformats.org/markup-compatibility/2006" xmlns:a14="http://schemas.microsoft.com/office/drawing/2010/main">
+          <mc:Choice Requires="a14">
             <p:sp>
               <p:nvSpPr>
                 <p:cNvPr id="32" name="文本框 31">
@@ -16319,7 +16320,7 @@
               </p:txBody>
             </p:sp>
           </mc:Choice>
-          <mc:Fallback>
+          <mc:Fallback xmlns="">
             <p:sp>
               <p:nvSpPr>
                 <p:cNvPr id="32" name="文本框 31">
@@ -16364,8 +16365,8 @@
             </p:sp>
           </mc:Fallback>
         </mc:AlternateContent>
-        <mc:AlternateContent xmlns:mc="http://schemas.openxmlformats.org/markup-compatibility/2006">
-          <mc:Choice xmlns:a14="http://schemas.microsoft.com/office/drawing/2010/main" Requires="a14">
+        <mc:AlternateContent xmlns:mc="http://schemas.openxmlformats.org/markup-compatibility/2006" xmlns:a14="http://schemas.microsoft.com/office/drawing/2010/main">
+          <mc:Choice Requires="a14">
             <p:sp>
               <p:nvSpPr>
                 <p:cNvPr id="33" name="文本框 32">
@@ -16422,7 +16423,7 @@
               </p:txBody>
             </p:sp>
           </mc:Choice>
-          <mc:Fallback>
+          <mc:Fallback xmlns="">
             <p:sp>
               <p:nvSpPr>
                 <p:cNvPr id="33" name="文本框 32">
@@ -16467,8 +16468,8 @@
             </p:sp>
           </mc:Fallback>
         </mc:AlternateContent>
-        <mc:AlternateContent xmlns:mc="http://schemas.openxmlformats.org/markup-compatibility/2006">
-          <mc:Choice xmlns:a14="http://schemas.microsoft.com/office/drawing/2010/main" Requires="a14">
+        <mc:AlternateContent xmlns:mc="http://schemas.openxmlformats.org/markup-compatibility/2006" xmlns:a14="http://schemas.microsoft.com/office/drawing/2010/main">
+          <mc:Choice Requires="a14">
             <p:sp>
               <p:nvSpPr>
                 <p:cNvPr id="34" name="文本框 33">
@@ -16525,7 +16526,7 @@
               </p:txBody>
             </p:sp>
           </mc:Choice>
-          <mc:Fallback>
+          <mc:Fallback xmlns="">
             <p:sp>
               <p:nvSpPr>
                 <p:cNvPr id="34" name="文本框 33">
@@ -16570,8 +16571,8 @@
             </p:sp>
           </mc:Fallback>
         </mc:AlternateContent>
-        <mc:AlternateContent xmlns:mc="http://schemas.openxmlformats.org/markup-compatibility/2006">
-          <mc:Choice xmlns:a14="http://schemas.microsoft.com/office/drawing/2010/main" Requires="a14">
+        <mc:AlternateContent xmlns:mc="http://schemas.openxmlformats.org/markup-compatibility/2006" xmlns:a14="http://schemas.microsoft.com/office/drawing/2010/main">
+          <mc:Choice Requires="a14">
             <p:sp>
               <p:nvSpPr>
                 <p:cNvPr id="35" name="文本框 34">
@@ -16631,7 +16632,7 @@
               </p:txBody>
             </p:sp>
           </mc:Choice>
-          <mc:Fallback>
+          <mc:Fallback xmlns="">
             <p:sp>
               <p:nvSpPr>
                 <p:cNvPr id="35" name="文本框 34">
@@ -17205,8 +17206,8 @@
             </a:fontRef>
           </p:style>
         </p:cxnSp>
-        <mc:AlternateContent xmlns:mc="http://schemas.openxmlformats.org/markup-compatibility/2006">
-          <mc:Choice xmlns:a14="http://schemas.microsoft.com/office/drawing/2010/main" Requires="a14">
+        <mc:AlternateContent xmlns:mc="http://schemas.openxmlformats.org/markup-compatibility/2006" xmlns:a14="http://schemas.microsoft.com/office/drawing/2010/main">
+          <mc:Choice Requires="a14">
             <p:sp>
               <p:nvSpPr>
                 <p:cNvPr id="52" name="文本框 51">
@@ -17316,7 +17317,7 @@
               </p:txBody>
             </p:sp>
           </mc:Choice>
-          <mc:Fallback>
+          <mc:Fallback xmlns="">
             <p:sp>
               <p:nvSpPr>
                 <p:cNvPr id="52" name="文本框 51">
@@ -17361,8 +17362,8 @@
             </p:sp>
           </mc:Fallback>
         </mc:AlternateContent>
-        <mc:AlternateContent xmlns:mc="http://schemas.openxmlformats.org/markup-compatibility/2006">
-          <mc:Choice xmlns:a14="http://schemas.microsoft.com/office/drawing/2010/main" Requires="a14">
+        <mc:AlternateContent xmlns:mc="http://schemas.openxmlformats.org/markup-compatibility/2006" xmlns:a14="http://schemas.microsoft.com/office/drawing/2010/main">
+          <mc:Choice Requires="a14">
             <p:sp>
               <p:nvSpPr>
                 <p:cNvPr id="53" name="文本框 52">
@@ -17419,7 +17420,7 @@
               </p:txBody>
             </p:sp>
           </mc:Choice>
-          <mc:Fallback>
+          <mc:Fallback xmlns="">
             <p:sp>
               <p:nvSpPr>
                 <p:cNvPr id="53" name="文本框 52">
@@ -17464,8 +17465,8 @@
             </p:sp>
           </mc:Fallback>
         </mc:AlternateContent>
-        <mc:AlternateContent xmlns:mc="http://schemas.openxmlformats.org/markup-compatibility/2006">
-          <mc:Choice xmlns:a14="http://schemas.microsoft.com/office/drawing/2010/main" Requires="a14">
+        <mc:AlternateContent xmlns:mc="http://schemas.openxmlformats.org/markup-compatibility/2006" xmlns:a14="http://schemas.microsoft.com/office/drawing/2010/main">
+          <mc:Choice Requires="a14">
             <p:sp>
               <p:nvSpPr>
                 <p:cNvPr id="54" name="文本框 53">
@@ -17522,7 +17523,7 @@
               </p:txBody>
             </p:sp>
           </mc:Choice>
-          <mc:Fallback>
+          <mc:Fallback xmlns="">
             <p:sp>
               <p:nvSpPr>
                 <p:cNvPr id="54" name="文本框 53">
@@ -17567,8 +17568,8 @@
             </p:sp>
           </mc:Fallback>
         </mc:AlternateContent>
-        <mc:AlternateContent xmlns:mc="http://schemas.openxmlformats.org/markup-compatibility/2006">
-          <mc:Choice xmlns:a14="http://schemas.microsoft.com/office/drawing/2010/main" Requires="a14">
+        <mc:AlternateContent xmlns:mc="http://schemas.openxmlformats.org/markup-compatibility/2006" xmlns:a14="http://schemas.microsoft.com/office/drawing/2010/main">
+          <mc:Choice Requires="a14">
             <p:sp>
               <p:nvSpPr>
                 <p:cNvPr id="55" name="文本框 54">
@@ -17628,7 +17629,7 @@
               </p:txBody>
             </p:sp>
           </mc:Choice>
-          <mc:Fallback>
+          <mc:Fallback xmlns="">
             <p:sp>
               <p:nvSpPr>
                 <p:cNvPr id="55" name="文本框 54">
@@ -17678,6 +17679,669 @@
     <p:extLst>
       <p:ext uri="{BB962C8B-B14F-4D97-AF65-F5344CB8AC3E}">
         <p14:creationId xmlns:p14="http://schemas.microsoft.com/office/powerpoint/2010/main" val="2097771787"/>
+      </p:ext>
+    </p:extLst>
+  </p:cSld>
+  <p:clrMapOvr>
+    <a:masterClrMapping/>
+  </p:clrMapOvr>
+</p:sld>
+</file>
+
+<file path=ppt/slides/slide9.xml><?xml version="1.0" encoding="utf-8"?>
+<p:sld xmlns:a="http://schemas.openxmlformats.org/drawingml/2006/main" xmlns:r="http://schemas.openxmlformats.org/officeDocument/2006/relationships" xmlns:p="http://schemas.openxmlformats.org/presentationml/2006/main">
+  <p:cSld>
+    <p:spTree>
+      <p:nvGrpSpPr>
+        <p:cNvPr id="1" name=""/>
+        <p:cNvGrpSpPr/>
+        <p:nvPr/>
+      </p:nvGrpSpPr>
+      <p:grpSpPr>
+        <a:xfrm>
+          <a:off x="0" y="0"/>
+          <a:ext cx="0" cy="0"/>
+          <a:chOff x="0" y="0"/>
+          <a:chExt cx="0" cy="0"/>
+        </a:xfrm>
+      </p:grpSpPr>
+      <p:grpSp>
+        <p:nvGrpSpPr>
+          <p:cNvPr id="8" name="组合 7">
+            <a:extLst>
+              <a:ext uri="{FF2B5EF4-FFF2-40B4-BE49-F238E27FC236}">
+                <a16:creationId xmlns:a16="http://schemas.microsoft.com/office/drawing/2014/main" id="{FEC57DBE-BBB9-2444-7AC5-D114CCBB97B6}"/>
+              </a:ext>
+            </a:extLst>
+          </p:cNvPr>
+          <p:cNvGrpSpPr/>
+          <p:nvPr/>
+        </p:nvGrpSpPr>
+        <p:grpSpPr>
+          <a:xfrm>
+            <a:off x="5190822" y="2135646"/>
+            <a:ext cx="1909101" cy="3663737"/>
+            <a:chOff x="5190822" y="2135646"/>
+            <a:chExt cx="1909101" cy="3663737"/>
+          </a:xfrm>
+        </p:grpSpPr>
+        <p:cxnSp>
+          <p:nvCxnSpPr>
+            <p:cNvPr id="6" name="直接连接符 5">
+              <a:extLst>
+                <a:ext uri="{FF2B5EF4-FFF2-40B4-BE49-F238E27FC236}">
+                  <a16:creationId xmlns:a16="http://schemas.microsoft.com/office/drawing/2014/main" id="{3FF7E0E4-8871-ED45-13B0-6F48EBC053B0}"/>
+                </a:ext>
+              </a:extLst>
+            </p:cNvPr>
+            <p:cNvCxnSpPr/>
+            <p:nvPr/>
+          </p:nvCxnSpPr>
+          <p:spPr>
+            <a:xfrm>
+              <a:off x="5557485" y="3099138"/>
+              <a:ext cx="0" cy="2520000"/>
+            </a:xfrm>
+            <a:prstGeom prst="line">
+              <a:avLst/>
+            </a:prstGeom>
+            <a:ln w="25400">
+              <a:solidFill>
+                <a:schemeClr val="tx1"/>
+              </a:solidFill>
+            </a:ln>
+          </p:spPr>
+          <p:style>
+            <a:lnRef idx="1">
+              <a:schemeClr val="accent1"/>
+            </a:lnRef>
+            <a:fillRef idx="0">
+              <a:schemeClr val="accent1"/>
+            </a:fillRef>
+            <a:effectRef idx="0">
+              <a:schemeClr val="accent1"/>
+            </a:effectRef>
+            <a:fontRef idx="minor">
+              <a:schemeClr val="tx1"/>
+            </a:fontRef>
+          </p:style>
+        </p:cxnSp>
+        <p:cxnSp>
+          <p:nvCxnSpPr>
+            <p:cNvPr id="7" name="直接连接符 6">
+              <a:extLst>
+                <a:ext uri="{FF2B5EF4-FFF2-40B4-BE49-F238E27FC236}">
+                  <a16:creationId xmlns:a16="http://schemas.microsoft.com/office/drawing/2014/main" id="{28C2DA7E-E142-BE5B-59BA-143833FA46EA}"/>
+                </a:ext>
+              </a:extLst>
+            </p:cNvPr>
+            <p:cNvCxnSpPr/>
+            <p:nvPr/>
+          </p:nvCxnSpPr>
+          <p:spPr>
+            <a:xfrm>
+              <a:off x="6635536" y="2379138"/>
+              <a:ext cx="0" cy="2520000"/>
+            </a:xfrm>
+            <a:prstGeom prst="line">
+              <a:avLst/>
+            </a:prstGeom>
+            <a:ln w="25400">
+              <a:solidFill>
+                <a:schemeClr val="tx1"/>
+              </a:solidFill>
+            </a:ln>
+          </p:spPr>
+          <p:style>
+            <a:lnRef idx="1">
+              <a:schemeClr val="accent1"/>
+            </a:lnRef>
+            <a:fillRef idx="0">
+              <a:schemeClr val="accent1"/>
+            </a:fillRef>
+            <a:effectRef idx="0">
+              <a:schemeClr val="accent1"/>
+            </a:effectRef>
+            <a:fontRef idx="minor">
+              <a:schemeClr val="tx1"/>
+            </a:fontRef>
+          </p:style>
+        </p:cxnSp>
+        <p:cxnSp>
+          <p:nvCxnSpPr>
+            <p:cNvPr id="9" name="直接连接符 8">
+              <a:extLst>
+                <a:ext uri="{FF2B5EF4-FFF2-40B4-BE49-F238E27FC236}">
+                  <a16:creationId xmlns:a16="http://schemas.microsoft.com/office/drawing/2014/main" id="{E85DA2BF-E4D0-CC56-09DD-0823CE398008}"/>
+                </a:ext>
+              </a:extLst>
+            </p:cNvPr>
+            <p:cNvCxnSpPr>
+              <a:cxnSpLocks/>
+            </p:cNvCxnSpPr>
+            <p:nvPr/>
+          </p:nvCxnSpPr>
+          <p:spPr>
+            <a:xfrm flipV="1">
+              <a:off x="5557485" y="4899138"/>
+              <a:ext cx="1079074" cy="720000"/>
+            </a:xfrm>
+            <a:prstGeom prst="line">
+              <a:avLst/>
+            </a:prstGeom>
+            <a:ln w="25400">
+              <a:solidFill>
+                <a:schemeClr val="tx1"/>
+              </a:solidFill>
+            </a:ln>
+          </p:spPr>
+          <p:style>
+            <a:lnRef idx="1">
+              <a:schemeClr val="accent1"/>
+            </a:lnRef>
+            <a:fillRef idx="0">
+              <a:schemeClr val="accent1"/>
+            </a:fillRef>
+            <a:effectRef idx="0">
+              <a:schemeClr val="accent1"/>
+            </a:effectRef>
+            <a:fontRef idx="minor">
+              <a:schemeClr val="tx1"/>
+            </a:fontRef>
+          </p:style>
+        </p:cxnSp>
+        <p:cxnSp>
+          <p:nvCxnSpPr>
+            <p:cNvPr id="12" name="直接连接符 11">
+              <a:extLst>
+                <a:ext uri="{FF2B5EF4-FFF2-40B4-BE49-F238E27FC236}">
+                  <a16:creationId xmlns:a16="http://schemas.microsoft.com/office/drawing/2014/main" id="{CAF4409C-A1CA-DC6B-9080-4570B8A97DE1}"/>
+                </a:ext>
+              </a:extLst>
+            </p:cNvPr>
+            <p:cNvCxnSpPr>
+              <a:cxnSpLocks/>
+            </p:cNvCxnSpPr>
+            <p:nvPr/>
+          </p:nvCxnSpPr>
+          <p:spPr>
+            <a:xfrm flipV="1">
+              <a:off x="5557485" y="2379138"/>
+              <a:ext cx="1079074" cy="720000"/>
+            </a:xfrm>
+            <a:prstGeom prst="line">
+              <a:avLst/>
+            </a:prstGeom>
+            <a:ln w="25400">
+              <a:solidFill>
+                <a:schemeClr val="tx1"/>
+              </a:solidFill>
+            </a:ln>
+          </p:spPr>
+          <p:style>
+            <a:lnRef idx="1">
+              <a:schemeClr val="accent1"/>
+            </a:lnRef>
+            <a:fillRef idx="0">
+              <a:schemeClr val="accent1"/>
+            </a:fillRef>
+            <a:effectRef idx="0">
+              <a:schemeClr val="accent1"/>
+            </a:effectRef>
+            <a:fontRef idx="minor">
+              <a:schemeClr val="tx1"/>
+            </a:fontRef>
+          </p:style>
+        </p:cxnSp>
+        <p:cxnSp>
+          <p:nvCxnSpPr>
+            <p:cNvPr id="16" name="直接连接符 15">
+              <a:extLst>
+                <a:ext uri="{FF2B5EF4-FFF2-40B4-BE49-F238E27FC236}">
+                  <a16:creationId xmlns:a16="http://schemas.microsoft.com/office/drawing/2014/main" id="{3946D192-8373-7F89-AD4A-C1011AE7ED5D}"/>
+                </a:ext>
+              </a:extLst>
+            </p:cNvPr>
+            <p:cNvCxnSpPr/>
+            <p:nvPr/>
+          </p:nvCxnSpPr>
+          <p:spPr>
+            <a:xfrm flipH="1" flipV="1">
+              <a:off x="5202104" y="3018442"/>
+              <a:ext cx="360000" cy="90000"/>
+            </a:xfrm>
+            <a:prstGeom prst="line">
+              <a:avLst/>
+            </a:prstGeom>
+            <a:ln w="25400">
+              <a:solidFill>
+                <a:schemeClr val="tx1"/>
+              </a:solidFill>
+            </a:ln>
+          </p:spPr>
+          <p:style>
+            <a:lnRef idx="1">
+              <a:schemeClr val="accent1"/>
+            </a:lnRef>
+            <a:fillRef idx="0">
+              <a:schemeClr val="accent1"/>
+            </a:fillRef>
+            <a:effectRef idx="0">
+              <a:schemeClr val="accent1"/>
+            </a:effectRef>
+            <a:fontRef idx="minor">
+              <a:schemeClr val="tx1"/>
+            </a:fontRef>
+          </p:style>
+        </p:cxnSp>
+        <p:cxnSp>
+          <p:nvCxnSpPr>
+            <p:cNvPr id="17" name="直接连接符 16">
+              <a:extLst>
+                <a:ext uri="{FF2B5EF4-FFF2-40B4-BE49-F238E27FC236}">
+                  <a16:creationId xmlns:a16="http://schemas.microsoft.com/office/drawing/2014/main" id="{0BD890D2-CC90-62C4-00A9-72A474B25FC5}"/>
+                </a:ext>
+              </a:extLst>
+            </p:cNvPr>
+            <p:cNvCxnSpPr/>
+            <p:nvPr/>
+          </p:nvCxnSpPr>
+          <p:spPr>
+            <a:xfrm flipH="1" flipV="1">
+              <a:off x="6274514" y="2289138"/>
+              <a:ext cx="360000" cy="90000"/>
+            </a:xfrm>
+            <a:prstGeom prst="line">
+              <a:avLst/>
+            </a:prstGeom>
+            <a:ln w="25400">
+              <a:solidFill>
+                <a:schemeClr val="tx1"/>
+              </a:solidFill>
+            </a:ln>
+          </p:spPr>
+          <p:style>
+            <a:lnRef idx="1">
+              <a:schemeClr val="accent1"/>
+            </a:lnRef>
+            <a:fillRef idx="0">
+              <a:schemeClr val="accent1"/>
+            </a:fillRef>
+            <a:effectRef idx="0">
+              <a:schemeClr val="accent1"/>
+            </a:effectRef>
+            <a:fontRef idx="minor">
+              <a:schemeClr val="tx1"/>
+            </a:fontRef>
+          </p:style>
+        </p:cxnSp>
+        <p:cxnSp>
+          <p:nvCxnSpPr>
+            <p:cNvPr id="18" name="直接连接符 17">
+              <a:extLst>
+                <a:ext uri="{FF2B5EF4-FFF2-40B4-BE49-F238E27FC236}">
+                  <a16:creationId xmlns:a16="http://schemas.microsoft.com/office/drawing/2014/main" id="{46C4CAA8-2A33-CC0C-C728-3DA4442BAB09}"/>
+                </a:ext>
+              </a:extLst>
+            </p:cNvPr>
+            <p:cNvCxnSpPr>
+              <a:cxnSpLocks/>
+            </p:cNvCxnSpPr>
+            <p:nvPr/>
+          </p:nvCxnSpPr>
+          <p:spPr>
+            <a:xfrm flipH="1" flipV="1">
+              <a:off x="5190822" y="5510530"/>
+              <a:ext cx="360000" cy="90000"/>
+            </a:xfrm>
+            <a:prstGeom prst="line">
+              <a:avLst/>
+            </a:prstGeom>
+            <a:ln w="25400">
+              <a:solidFill>
+                <a:schemeClr val="tx1"/>
+              </a:solidFill>
+            </a:ln>
+          </p:spPr>
+          <p:style>
+            <a:lnRef idx="1">
+              <a:schemeClr val="accent1"/>
+            </a:lnRef>
+            <a:fillRef idx="0">
+              <a:schemeClr val="accent1"/>
+            </a:fillRef>
+            <a:effectRef idx="0">
+              <a:schemeClr val="accent1"/>
+            </a:effectRef>
+            <a:fontRef idx="minor">
+              <a:schemeClr val="tx1"/>
+            </a:fontRef>
+          </p:style>
+        </p:cxnSp>
+        <p:cxnSp>
+          <p:nvCxnSpPr>
+            <p:cNvPr id="20" name="直接连接符 19">
+              <a:extLst>
+                <a:ext uri="{FF2B5EF4-FFF2-40B4-BE49-F238E27FC236}">
+                  <a16:creationId xmlns:a16="http://schemas.microsoft.com/office/drawing/2014/main" id="{F60BCAA1-8B20-587A-0D2D-907C459F6A2E}"/>
+                </a:ext>
+              </a:extLst>
+            </p:cNvPr>
+            <p:cNvCxnSpPr/>
+            <p:nvPr/>
+          </p:nvCxnSpPr>
+          <p:spPr>
+            <a:xfrm>
+              <a:off x="5202104" y="2990530"/>
+              <a:ext cx="0" cy="2520000"/>
+            </a:xfrm>
+            <a:prstGeom prst="line">
+              <a:avLst/>
+            </a:prstGeom>
+            <a:ln w="25400">
+              <a:solidFill>
+                <a:schemeClr val="tx1"/>
+              </a:solidFill>
+            </a:ln>
+          </p:spPr>
+          <p:style>
+            <a:lnRef idx="1">
+              <a:schemeClr val="accent1"/>
+            </a:lnRef>
+            <a:fillRef idx="0">
+              <a:schemeClr val="accent1"/>
+            </a:fillRef>
+            <a:effectRef idx="0">
+              <a:schemeClr val="accent1"/>
+            </a:effectRef>
+            <a:fontRef idx="minor">
+              <a:schemeClr val="tx1"/>
+            </a:fontRef>
+          </p:style>
+        </p:cxnSp>
+        <p:cxnSp>
+          <p:nvCxnSpPr>
+            <p:cNvPr id="21" name="直接连接符 20">
+              <a:extLst>
+                <a:ext uri="{FF2B5EF4-FFF2-40B4-BE49-F238E27FC236}">
+                  <a16:creationId xmlns:a16="http://schemas.microsoft.com/office/drawing/2014/main" id="{F15CA071-B6A4-EDE4-B8B6-8563143B5B9E}"/>
+                </a:ext>
+              </a:extLst>
+            </p:cNvPr>
+            <p:cNvCxnSpPr>
+              <a:cxnSpLocks/>
+            </p:cNvCxnSpPr>
+            <p:nvPr/>
+          </p:nvCxnSpPr>
+          <p:spPr>
+            <a:xfrm flipV="1">
+              <a:off x="5193395" y="2298442"/>
+              <a:ext cx="1079074" cy="720000"/>
+            </a:xfrm>
+            <a:prstGeom prst="line">
+              <a:avLst/>
+            </a:prstGeom>
+            <a:ln w="25400">
+              <a:solidFill>
+                <a:schemeClr val="tx1"/>
+              </a:solidFill>
+            </a:ln>
+          </p:spPr>
+          <p:style>
+            <a:lnRef idx="1">
+              <a:schemeClr val="accent1"/>
+            </a:lnRef>
+            <a:fillRef idx="0">
+              <a:schemeClr val="accent1"/>
+            </a:fillRef>
+            <a:effectRef idx="0">
+              <a:schemeClr val="accent1"/>
+            </a:effectRef>
+            <a:fontRef idx="minor">
+              <a:schemeClr val="tx1"/>
+            </a:fontRef>
+          </p:style>
+        </p:cxnSp>
+        <p:cxnSp>
+          <p:nvCxnSpPr>
+            <p:cNvPr id="25" name="直接箭头连接符 24">
+              <a:extLst>
+                <a:ext uri="{FF2B5EF4-FFF2-40B4-BE49-F238E27FC236}">
+                  <a16:creationId xmlns:a16="http://schemas.microsoft.com/office/drawing/2014/main" id="{7B5F31E8-438D-3DAE-7DC1-7247B91E3086}"/>
+                </a:ext>
+              </a:extLst>
+            </p:cNvPr>
+            <p:cNvCxnSpPr>
+              <a:cxnSpLocks/>
+            </p:cNvCxnSpPr>
+            <p:nvPr/>
+          </p:nvCxnSpPr>
+          <p:spPr>
+            <a:xfrm>
+              <a:off x="6096000" y="4050030"/>
+              <a:ext cx="992265" cy="265477"/>
+            </a:xfrm>
+            <a:prstGeom prst="straightConnector1">
+              <a:avLst/>
+            </a:prstGeom>
+            <a:ln w="25400">
+              <a:solidFill>
+                <a:schemeClr val="tx1"/>
+              </a:solidFill>
+              <a:tailEnd type="triangle"/>
+            </a:ln>
+          </p:spPr>
+          <p:style>
+            <a:lnRef idx="1">
+              <a:schemeClr val="accent1"/>
+            </a:lnRef>
+            <a:fillRef idx="0">
+              <a:schemeClr val="accent1"/>
+            </a:fillRef>
+            <a:effectRef idx="0">
+              <a:schemeClr val="accent1"/>
+            </a:effectRef>
+            <a:fontRef idx="minor">
+              <a:schemeClr val="tx1"/>
+            </a:fontRef>
+          </p:style>
+        </p:cxnSp>
+        <p:cxnSp>
+          <p:nvCxnSpPr>
+            <p:cNvPr id="29" name="直接连接符 28">
+              <a:extLst>
+                <a:ext uri="{FF2B5EF4-FFF2-40B4-BE49-F238E27FC236}">
+                  <a16:creationId xmlns:a16="http://schemas.microsoft.com/office/drawing/2014/main" id="{845D1BA2-7A1F-17B5-A9E2-B5790BD88F3F}"/>
+                </a:ext>
+              </a:extLst>
+            </p:cNvPr>
+            <p:cNvCxnSpPr>
+              <a:cxnSpLocks/>
+            </p:cNvCxnSpPr>
+            <p:nvPr/>
+          </p:nvCxnSpPr>
+          <p:spPr>
+            <a:xfrm>
+              <a:off x="6096000" y="2135646"/>
+              <a:ext cx="0" cy="3663737"/>
+            </a:xfrm>
+            <a:prstGeom prst="line">
+              <a:avLst/>
+            </a:prstGeom>
+            <a:ln w="25400">
+              <a:solidFill>
+                <a:srgbClr val="FF0000"/>
+              </a:solidFill>
+              <a:prstDash val="dash"/>
+            </a:ln>
+          </p:spPr>
+          <p:style>
+            <a:lnRef idx="1">
+              <a:schemeClr val="accent1"/>
+            </a:lnRef>
+            <a:fillRef idx="0">
+              <a:schemeClr val="accent1"/>
+            </a:fillRef>
+            <a:effectRef idx="0">
+              <a:schemeClr val="accent1"/>
+            </a:effectRef>
+            <a:fontRef idx="minor">
+              <a:schemeClr val="tx1"/>
+            </a:fontRef>
+          </p:style>
+        </p:cxnSp>
+        <mc:AlternateContent xmlns:mc="http://schemas.openxmlformats.org/markup-compatibility/2006">
+          <mc:Choice xmlns:a14="http://schemas.microsoft.com/office/drawing/2010/main" Requires="a14">
+            <p:sp>
+              <p:nvSpPr>
+                <p:cNvPr id="32" name="文本框 31">
+                  <a:extLst>
+                    <a:ext uri="{FF2B5EF4-FFF2-40B4-BE49-F238E27FC236}">
+                      <a16:creationId xmlns:a16="http://schemas.microsoft.com/office/drawing/2014/main" id="{F2D2D722-273E-31F6-33E5-82BDEC020C97}"/>
+                    </a:ext>
+                  </a:extLst>
+                </p:cNvPr>
+                <p:cNvSpPr txBox="1"/>
+                <p:nvPr/>
+              </p:nvSpPr>
+              <p:spPr>
+                <a:xfrm>
+                  <a:off x="6688228" y="3896459"/>
+                  <a:ext cx="262059" cy="553998"/>
+                </a:xfrm>
+                <a:prstGeom prst="rect">
+                  <a:avLst/>
+                </a:prstGeom>
+                <a:noFill/>
+              </p:spPr>
+              <p:txBody>
+                <a:bodyPr wrap="none" lIns="0" tIns="0" rIns="0" bIns="0" rtlCol="0">
+                  <a:spAutoFit/>
+                </a:bodyPr>
+                <a:lstStyle/>
+                <a:p>
+                  <a:pPr/>
+                  <a14:m>
+                    <m:oMathPara xmlns:m="http://schemas.openxmlformats.org/officeDocument/2006/math">
+                      <m:oMathParaPr>
+                        <m:jc m:val="centerGroup"/>
+                      </m:oMathParaPr>
+                      <m:oMath xmlns:m="http://schemas.openxmlformats.org/officeDocument/2006/math">
+                        <m:r>
+                          <a:rPr lang="en-US" altLang="zh-CN" b="0" i="1" smtClean="0">
+                            <a:latin typeface="Cambria Math" panose="02040503050406030204" pitchFamily="18" charset="0"/>
+                          </a:rPr>
+                          <m:t>𝐤</m:t>
+                        </m:r>
+                      </m:oMath>
+                    </m:oMathPara>
+                  </a14:m>
+                  <a:endParaRPr lang="en-US" altLang="zh-CN" b="0" dirty="0"/>
+                </a:p>
+                <a:p>
+                  <a:endParaRPr lang="zh-CN" altLang="en-US" dirty="0"/>
+                </a:p>
+              </p:txBody>
+            </p:sp>
+          </mc:Choice>
+          <mc:Fallback>
+            <p:sp>
+              <p:nvSpPr>
+                <p:cNvPr id="32" name="文本框 31">
+                  <a:extLst>
+                    <a:ext uri="{FF2B5EF4-FFF2-40B4-BE49-F238E27FC236}">
+                      <a16:creationId xmlns:a16="http://schemas.microsoft.com/office/drawing/2014/main" id="{F2D2D722-273E-31F6-33E5-82BDEC020C97}"/>
+                    </a:ext>
+                  </a:extLst>
+                </p:cNvPr>
+                <p:cNvSpPr txBox="1">
+                  <a:spLocks noRot="1" noChangeAspect="1" noMove="1" noResize="1" noEditPoints="1" noAdjustHandles="1" noChangeArrowheads="1" noChangeShapeType="1" noTextEdit="1"/>
+                </p:cNvSpPr>
+                <p:nvPr/>
+              </p:nvSpPr>
+              <p:spPr>
+                <a:xfrm>
+                  <a:off x="6688228" y="3896459"/>
+                  <a:ext cx="262059" cy="553998"/>
+                </a:xfrm>
+                <a:prstGeom prst="rect">
+                  <a:avLst/>
+                </a:prstGeom>
+                <a:blipFill>
+                  <a:blip r:embed="rId2"/>
+                  <a:stretch>
+                    <a:fillRect l="-9302" r="-11628"/>
+                  </a:stretch>
+                </a:blipFill>
+              </p:spPr>
+              <p:txBody>
+                <a:bodyPr/>
+                <a:lstStyle/>
+                <a:p>
+                  <a:r>
+                    <a:rPr lang="zh-CN" altLang="en-US">
+                      <a:noFill/>
+                    </a:rPr>
+                    <a:t> </a:t>
+                  </a:r>
+                </a:p>
+              </p:txBody>
+            </p:sp>
+          </mc:Fallback>
+        </mc:AlternateContent>
+        <p:sp>
+          <p:nvSpPr>
+            <p:cNvPr id="33" name="文本框 32">
+              <a:extLst>
+                <a:ext uri="{FF2B5EF4-FFF2-40B4-BE49-F238E27FC236}">
+                  <a16:creationId xmlns:a16="http://schemas.microsoft.com/office/drawing/2014/main" id="{06BB3025-07BB-19BB-9CEF-1B20898772F2}"/>
+                </a:ext>
+              </a:extLst>
+            </p:cNvPr>
+            <p:cNvSpPr txBox="1"/>
+            <p:nvPr/>
+          </p:nvSpPr>
+          <p:spPr>
+            <a:xfrm>
+              <a:off x="6173197" y="5370864"/>
+              <a:ext cx="926726" cy="369332"/>
+            </a:xfrm>
+            <a:prstGeom prst="rect">
+              <a:avLst/>
+            </a:prstGeom>
+            <a:noFill/>
+          </p:spPr>
+          <p:txBody>
+            <a:bodyPr wrap="square" rtlCol="0">
+              <a:spAutoFit/>
+            </a:bodyPr>
+            <a:lstStyle/>
+            <a:p>
+              <a:r>
+                <a:rPr lang="zh-CN" altLang="en-US" dirty="0">
+                  <a:solidFill>
+                    <a:srgbClr val="FF0000"/>
+                  </a:solidFill>
+                  <a:latin typeface="楷体" panose="02010609060101010101" pitchFamily="49" charset="-122"/>
+                  <a:ea typeface="楷体" panose="02010609060101010101" pitchFamily="49" charset="-122"/>
+                </a:rPr>
+                <a:t>光轴</a:t>
+              </a:r>
+              <a:endParaRPr lang="en-US" altLang="zh-CN" dirty="0">
+                <a:solidFill>
+                  <a:srgbClr val="FF0000"/>
+                </a:solidFill>
+                <a:latin typeface="楷体" panose="02010609060101010101" pitchFamily="49" charset="-122"/>
+                <a:ea typeface="楷体" panose="02010609060101010101" pitchFamily="49" charset="-122"/>
+              </a:endParaRPr>
+            </a:p>
+          </p:txBody>
+        </p:sp>
+      </p:grpSp>
+    </p:spTree>
+    <p:extLst>
+      <p:ext uri="{BB962C8B-B14F-4D97-AF65-F5344CB8AC3E}">
+        <p14:creationId xmlns:p14="http://schemas.microsoft.com/office/powerpoint/2010/main" val="61691279"/>
       </p:ext>
     </p:extLst>
   </p:cSld>

--- a/PPT/optic.pptx
+++ b/PPT/optic.pptx
@@ -5,20 +5,21 @@
     <p:sldMasterId id="2147483648" r:id="rId1"/>
   </p:sldMasterIdLst>
   <p:sldIdLst>
-    <p:sldId id="256" r:id="rId2"/>
-    <p:sldId id="257" r:id="rId3"/>
-    <p:sldId id="258" r:id="rId4"/>
-    <p:sldId id="261" r:id="rId5"/>
-    <p:sldId id="260" r:id="rId6"/>
-    <p:sldId id="259" r:id="rId7"/>
-    <p:sldId id="262" r:id="rId8"/>
-    <p:sldId id="263" r:id="rId9"/>
-    <p:sldId id="264" r:id="rId10"/>
+    <p:sldId id="256" r:id="rId3"/>
+    <p:sldId id="257" r:id="rId4"/>
+    <p:sldId id="258" r:id="rId5"/>
+    <p:sldId id="261" r:id="rId6"/>
+    <p:sldId id="260" r:id="rId7"/>
+    <p:sldId id="259" r:id="rId8"/>
+    <p:sldId id="262" r:id="rId9"/>
+    <p:sldId id="263" r:id="rId10"/>
+    <p:sldId id="265" r:id="rId11"/>
+    <p:sldId id="264" r:id="rId12"/>
   </p:sldIdLst>
   <p:sldSz cx="12192000" cy="6858000"/>
   <p:notesSz cx="6858000" cy="9144000"/>
   <p:custDataLst>
-    <p:tags r:id="rId11"/>
+    <p:tags r:id="rId16"/>
   </p:custDataLst>
   <p:defaultTextStyle>
     <a:defPPr>
@@ -115,11 +116,6 @@
       </a:defRPr>
     </a:lvl9pPr>
   </p:defaultTextStyle>
-  <p:extLst>
-    <p:ext uri="{EFAFB233-063F-42B5-8137-9DF3F51BA10A}">
-      <p15:sldGuideLst xmlns:p15="http://schemas.microsoft.com/office/powerpoint/2012/main"/>
-    </p:ext>
-  </p:extLst>
 </p:presentation>
 </file>
 
@@ -168,6 +164,7 @@
               <a:rPr lang="zh-CN" altLang="en-US"/>
               <a:t>单击此处编辑母版标题样式</a:t>
             </a:r>
+            <a:endParaRPr lang="zh-CN" altLang="en-US"/>
           </a:p>
         </p:txBody>
       </p:sp>
@@ -232,6 +229,7 @@
               <a:rPr lang="zh-CN" altLang="en-US"/>
               <a:t>单击此处编辑母版副标题样式</a:t>
             </a:r>
+            <a:endParaRPr lang="zh-CN" altLang="en-US"/>
           </a:p>
         </p:txBody>
       </p:sp>
@@ -252,7 +250,6 @@
           <a:p>
             <a:fld id="{D997B5FA-0921-464F-AAE1-844C04324D75}" type="datetimeFigureOut">
               <a:rPr lang="zh-CN" altLang="en-US" smtClean="0"/>
-              <a:t>2026-03-15</a:t>
             </a:fld>
             <a:endParaRPr lang="zh-CN" altLang="en-US"/>
           </a:p>
@@ -294,7 +291,6 @@
           <a:p>
             <a:fld id="{565CE74E-AB26-4998-AD42-012C4C1AD076}" type="slidenum">
               <a:rPr lang="zh-CN" altLang="en-US" smtClean="0"/>
-              <a:t>‹#›</a:t>
             </a:fld>
             <a:endParaRPr lang="zh-CN" altLang="en-US"/>
           </a:p>
@@ -344,6 +340,7 @@
               <a:rPr lang="zh-CN" altLang="en-US"/>
               <a:t>单击此处编辑母版标题样式</a:t>
             </a:r>
+            <a:endParaRPr lang="zh-CN" altLang="en-US"/>
           </a:p>
         </p:txBody>
       </p:sp>
@@ -367,6 +364,7 @@
               <a:rPr lang="zh-CN" altLang="en-US"/>
               <a:t>单击此处编辑母版文本样式</a:t>
             </a:r>
+            <a:endParaRPr lang="zh-CN" altLang="en-US"/>
           </a:p>
           <a:p>
             <a:pPr lvl="1"/>
@@ -374,6 +372,7 @@
               <a:rPr lang="zh-CN" altLang="en-US"/>
               <a:t>第二级</a:t>
             </a:r>
+            <a:endParaRPr lang="zh-CN" altLang="en-US"/>
           </a:p>
           <a:p>
             <a:pPr lvl="2"/>
@@ -381,6 +380,7 @@
               <a:rPr lang="zh-CN" altLang="en-US"/>
               <a:t>第三级</a:t>
             </a:r>
+            <a:endParaRPr lang="zh-CN" altLang="en-US"/>
           </a:p>
           <a:p>
             <a:pPr lvl="3"/>
@@ -388,6 +388,7 @@
               <a:rPr lang="zh-CN" altLang="en-US"/>
               <a:t>第四级</a:t>
             </a:r>
+            <a:endParaRPr lang="zh-CN" altLang="en-US"/>
           </a:p>
           <a:p>
             <a:pPr lvl="4"/>
@@ -395,6 +396,7 @@
               <a:rPr lang="zh-CN" altLang="en-US"/>
               <a:t>第五级</a:t>
             </a:r>
+            <a:endParaRPr lang="zh-CN" altLang="en-US"/>
           </a:p>
         </p:txBody>
       </p:sp>
@@ -415,7 +417,6 @@
           <a:p>
             <a:fld id="{D997B5FA-0921-464F-AAE1-844C04324D75}" type="datetimeFigureOut">
               <a:rPr lang="zh-CN" altLang="en-US" smtClean="0"/>
-              <a:t>2026-03-15</a:t>
             </a:fld>
             <a:endParaRPr lang="zh-CN" altLang="en-US"/>
           </a:p>
@@ -457,7 +458,6 @@
           <a:p>
             <a:fld id="{565CE74E-AB26-4998-AD42-012C4C1AD076}" type="slidenum">
               <a:rPr lang="zh-CN" altLang="en-US" smtClean="0"/>
-              <a:t>‹#›</a:t>
             </a:fld>
             <a:endParaRPr lang="zh-CN" altLang="en-US"/>
           </a:p>
@@ -512,6 +512,7 @@
               <a:rPr lang="zh-CN" altLang="en-US"/>
               <a:t>单击此处编辑母版标题样式</a:t>
             </a:r>
+            <a:endParaRPr lang="zh-CN" altLang="en-US"/>
           </a:p>
         </p:txBody>
       </p:sp>
@@ -540,6 +541,7 @@
               <a:rPr lang="zh-CN" altLang="en-US"/>
               <a:t>单击此处编辑母版文本样式</a:t>
             </a:r>
+            <a:endParaRPr lang="zh-CN" altLang="en-US"/>
           </a:p>
           <a:p>
             <a:pPr lvl="1"/>
@@ -547,6 +549,7 @@
               <a:rPr lang="zh-CN" altLang="en-US"/>
               <a:t>第二级</a:t>
             </a:r>
+            <a:endParaRPr lang="zh-CN" altLang="en-US"/>
           </a:p>
           <a:p>
             <a:pPr lvl="2"/>
@@ -554,6 +557,7 @@
               <a:rPr lang="zh-CN" altLang="en-US"/>
               <a:t>第三级</a:t>
             </a:r>
+            <a:endParaRPr lang="zh-CN" altLang="en-US"/>
           </a:p>
           <a:p>
             <a:pPr lvl="3"/>
@@ -561,6 +565,7 @@
               <a:rPr lang="zh-CN" altLang="en-US"/>
               <a:t>第四级</a:t>
             </a:r>
+            <a:endParaRPr lang="zh-CN" altLang="en-US"/>
           </a:p>
           <a:p>
             <a:pPr lvl="4"/>
@@ -568,6 +573,7 @@
               <a:rPr lang="zh-CN" altLang="en-US"/>
               <a:t>第五级</a:t>
             </a:r>
+            <a:endParaRPr lang="zh-CN" altLang="en-US"/>
           </a:p>
         </p:txBody>
       </p:sp>
@@ -588,7 +594,6 @@
           <a:p>
             <a:fld id="{D997B5FA-0921-464F-AAE1-844C04324D75}" type="datetimeFigureOut">
               <a:rPr lang="zh-CN" altLang="en-US" smtClean="0"/>
-              <a:t>2026-03-15</a:t>
             </a:fld>
             <a:endParaRPr lang="zh-CN" altLang="en-US"/>
           </a:p>
@@ -630,7 +635,6 @@
           <a:p>
             <a:fld id="{565CE74E-AB26-4998-AD42-012C4C1AD076}" type="slidenum">
               <a:rPr lang="zh-CN" altLang="en-US" smtClean="0"/>
-              <a:t>‹#›</a:t>
             </a:fld>
             <a:endParaRPr lang="zh-CN" altLang="en-US"/>
           </a:p>
@@ -680,6 +684,7 @@
               <a:rPr lang="zh-CN" altLang="en-US"/>
               <a:t>单击此处编辑母版标题样式</a:t>
             </a:r>
+            <a:endParaRPr lang="zh-CN" altLang="en-US"/>
           </a:p>
         </p:txBody>
       </p:sp>
@@ -703,6 +708,7 @@
               <a:rPr lang="zh-CN" altLang="en-US"/>
               <a:t>单击此处编辑母版文本样式</a:t>
             </a:r>
+            <a:endParaRPr lang="zh-CN" altLang="en-US"/>
           </a:p>
           <a:p>
             <a:pPr lvl="1"/>
@@ -710,6 +716,7 @@
               <a:rPr lang="zh-CN" altLang="en-US"/>
               <a:t>第二级</a:t>
             </a:r>
+            <a:endParaRPr lang="zh-CN" altLang="en-US"/>
           </a:p>
           <a:p>
             <a:pPr lvl="2"/>
@@ -717,6 +724,7 @@
               <a:rPr lang="zh-CN" altLang="en-US"/>
               <a:t>第三级</a:t>
             </a:r>
+            <a:endParaRPr lang="zh-CN" altLang="en-US"/>
           </a:p>
           <a:p>
             <a:pPr lvl="3"/>
@@ -724,6 +732,7 @@
               <a:rPr lang="zh-CN" altLang="en-US"/>
               <a:t>第四级</a:t>
             </a:r>
+            <a:endParaRPr lang="zh-CN" altLang="en-US"/>
           </a:p>
           <a:p>
             <a:pPr lvl="4"/>
@@ -731,6 +740,7 @@
               <a:rPr lang="zh-CN" altLang="en-US"/>
               <a:t>第五级</a:t>
             </a:r>
+            <a:endParaRPr lang="zh-CN" altLang="en-US"/>
           </a:p>
         </p:txBody>
       </p:sp>
@@ -751,7 +761,6 @@
           <a:p>
             <a:fld id="{D997B5FA-0921-464F-AAE1-844C04324D75}" type="datetimeFigureOut">
               <a:rPr lang="zh-CN" altLang="en-US" smtClean="0"/>
-              <a:t>2026-03-15</a:t>
             </a:fld>
             <a:endParaRPr lang="zh-CN" altLang="en-US"/>
           </a:p>
@@ -793,7 +802,6 @@
           <a:p>
             <a:fld id="{565CE74E-AB26-4998-AD42-012C4C1AD076}" type="slidenum">
               <a:rPr lang="zh-CN" altLang="en-US" smtClean="0"/>
-              <a:t>‹#›</a:t>
             </a:fld>
             <a:endParaRPr lang="zh-CN" altLang="en-US"/>
           </a:p>
@@ -852,6 +860,7 @@
               <a:rPr lang="zh-CN" altLang="en-US"/>
               <a:t>单击此处编辑母版标题样式</a:t>
             </a:r>
+            <a:endParaRPr lang="zh-CN" altLang="en-US"/>
           </a:p>
         </p:txBody>
       </p:sp>
@@ -971,6 +980,7 @@
               <a:rPr lang="zh-CN" altLang="en-US"/>
               <a:t>单击此处编辑母版文本样式</a:t>
             </a:r>
+            <a:endParaRPr lang="zh-CN" altLang="en-US"/>
           </a:p>
         </p:txBody>
       </p:sp>
@@ -991,7 +1001,6 @@
           <a:p>
             <a:fld id="{D997B5FA-0921-464F-AAE1-844C04324D75}" type="datetimeFigureOut">
               <a:rPr lang="zh-CN" altLang="en-US" smtClean="0"/>
-              <a:t>2026-03-15</a:t>
             </a:fld>
             <a:endParaRPr lang="zh-CN" altLang="en-US"/>
           </a:p>
@@ -1033,7 +1042,6 @@
           <a:p>
             <a:fld id="{565CE74E-AB26-4998-AD42-012C4C1AD076}" type="slidenum">
               <a:rPr lang="zh-CN" altLang="en-US" smtClean="0"/>
-              <a:t>‹#›</a:t>
             </a:fld>
             <a:endParaRPr lang="zh-CN" altLang="en-US"/>
           </a:p>
@@ -1083,6 +1091,7 @@
               <a:rPr lang="zh-CN" altLang="en-US"/>
               <a:t>单击此处编辑母版标题样式</a:t>
             </a:r>
+            <a:endParaRPr lang="zh-CN" altLang="en-US"/>
           </a:p>
         </p:txBody>
       </p:sp>
@@ -1111,6 +1120,7 @@
               <a:rPr lang="zh-CN" altLang="en-US"/>
               <a:t>单击此处编辑母版文本样式</a:t>
             </a:r>
+            <a:endParaRPr lang="zh-CN" altLang="en-US"/>
           </a:p>
           <a:p>
             <a:pPr lvl="1"/>
@@ -1118,6 +1128,7 @@
               <a:rPr lang="zh-CN" altLang="en-US"/>
               <a:t>第二级</a:t>
             </a:r>
+            <a:endParaRPr lang="zh-CN" altLang="en-US"/>
           </a:p>
           <a:p>
             <a:pPr lvl="2"/>
@@ -1125,6 +1136,7 @@
               <a:rPr lang="zh-CN" altLang="en-US"/>
               <a:t>第三级</a:t>
             </a:r>
+            <a:endParaRPr lang="zh-CN" altLang="en-US"/>
           </a:p>
           <a:p>
             <a:pPr lvl="3"/>
@@ -1132,6 +1144,7 @@
               <a:rPr lang="zh-CN" altLang="en-US"/>
               <a:t>第四级</a:t>
             </a:r>
+            <a:endParaRPr lang="zh-CN" altLang="en-US"/>
           </a:p>
           <a:p>
             <a:pPr lvl="4"/>
@@ -1139,6 +1152,7 @@
               <a:rPr lang="zh-CN" altLang="en-US"/>
               <a:t>第五级</a:t>
             </a:r>
+            <a:endParaRPr lang="zh-CN" altLang="en-US"/>
           </a:p>
         </p:txBody>
       </p:sp>
@@ -1167,6 +1181,7 @@
               <a:rPr lang="zh-CN" altLang="en-US"/>
               <a:t>单击此处编辑母版文本样式</a:t>
             </a:r>
+            <a:endParaRPr lang="zh-CN" altLang="en-US"/>
           </a:p>
           <a:p>
             <a:pPr lvl="1"/>
@@ -1174,6 +1189,7 @@
               <a:rPr lang="zh-CN" altLang="en-US"/>
               <a:t>第二级</a:t>
             </a:r>
+            <a:endParaRPr lang="zh-CN" altLang="en-US"/>
           </a:p>
           <a:p>
             <a:pPr lvl="2"/>
@@ -1181,6 +1197,7 @@
               <a:rPr lang="zh-CN" altLang="en-US"/>
               <a:t>第三级</a:t>
             </a:r>
+            <a:endParaRPr lang="zh-CN" altLang="en-US"/>
           </a:p>
           <a:p>
             <a:pPr lvl="3"/>
@@ -1188,6 +1205,7 @@
               <a:rPr lang="zh-CN" altLang="en-US"/>
               <a:t>第四级</a:t>
             </a:r>
+            <a:endParaRPr lang="zh-CN" altLang="en-US"/>
           </a:p>
           <a:p>
             <a:pPr lvl="4"/>
@@ -1195,6 +1213,7 @@
               <a:rPr lang="zh-CN" altLang="en-US"/>
               <a:t>第五级</a:t>
             </a:r>
+            <a:endParaRPr lang="zh-CN" altLang="en-US"/>
           </a:p>
         </p:txBody>
       </p:sp>
@@ -1215,7 +1234,6 @@
           <a:p>
             <a:fld id="{D997B5FA-0921-464F-AAE1-844C04324D75}" type="datetimeFigureOut">
               <a:rPr lang="zh-CN" altLang="en-US" smtClean="0"/>
-              <a:t>2026-03-15</a:t>
             </a:fld>
             <a:endParaRPr lang="zh-CN" altLang="en-US"/>
           </a:p>
@@ -1257,7 +1275,6 @@
           <a:p>
             <a:fld id="{565CE74E-AB26-4998-AD42-012C4C1AD076}" type="slidenum">
               <a:rPr lang="zh-CN" altLang="en-US" smtClean="0"/>
-              <a:t>‹#›</a:t>
             </a:fld>
             <a:endParaRPr lang="zh-CN" altLang="en-US"/>
           </a:p>
@@ -1312,6 +1329,7 @@
               <a:rPr lang="zh-CN" altLang="en-US"/>
               <a:t>单击此处编辑母版标题样式</a:t>
             </a:r>
+            <a:endParaRPr lang="zh-CN" altLang="en-US"/>
           </a:p>
         </p:txBody>
       </p:sp>
@@ -1377,6 +1395,7 @@
               <a:rPr lang="zh-CN" altLang="en-US"/>
               <a:t>单击此处编辑母版文本样式</a:t>
             </a:r>
+            <a:endParaRPr lang="zh-CN" altLang="en-US"/>
           </a:p>
         </p:txBody>
       </p:sp>
@@ -1405,6 +1424,7 @@
               <a:rPr lang="zh-CN" altLang="en-US"/>
               <a:t>单击此处编辑母版文本样式</a:t>
             </a:r>
+            <a:endParaRPr lang="zh-CN" altLang="en-US"/>
           </a:p>
           <a:p>
             <a:pPr lvl="1"/>
@@ -1412,6 +1432,7 @@
               <a:rPr lang="zh-CN" altLang="en-US"/>
               <a:t>第二级</a:t>
             </a:r>
+            <a:endParaRPr lang="zh-CN" altLang="en-US"/>
           </a:p>
           <a:p>
             <a:pPr lvl="2"/>
@@ -1419,6 +1440,7 @@
               <a:rPr lang="zh-CN" altLang="en-US"/>
               <a:t>第三级</a:t>
             </a:r>
+            <a:endParaRPr lang="zh-CN" altLang="en-US"/>
           </a:p>
           <a:p>
             <a:pPr lvl="3"/>
@@ -1426,6 +1448,7 @@
               <a:rPr lang="zh-CN" altLang="en-US"/>
               <a:t>第四级</a:t>
             </a:r>
+            <a:endParaRPr lang="zh-CN" altLang="en-US"/>
           </a:p>
           <a:p>
             <a:pPr lvl="4"/>
@@ -1433,6 +1456,7 @@
               <a:rPr lang="zh-CN" altLang="en-US"/>
               <a:t>第五级</a:t>
             </a:r>
+            <a:endParaRPr lang="zh-CN" altLang="en-US"/>
           </a:p>
         </p:txBody>
       </p:sp>
@@ -1498,6 +1522,7 @@
               <a:rPr lang="zh-CN" altLang="en-US"/>
               <a:t>单击此处编辑母版文本样式</a:t>
             </a:r>
+            <a:endParaRPr lang="zh-CN" altLang="en-US"/>
           </a:p>
         </p:txBody>
       </p:sp>
@@ -1526,6 +1551,7 @@
               <a:rPr lang="zh-CN" altLang="en-US"/>
               <a:t>单击此处编辑母版文本样式</a:t>
             </a:r>
+            <a:endParaRPr lang="zh-CN" altLang="en-US"/>
           </a:p>
           <a:p>
             <a:pPr lvl="1"/>
@@ -1533,6 +1559,7 @@
               <a:rPr lang="zh-CN" altLang="en-US"/>
               <a:t>第二级</a:t>
             </a:r>
+            <a:endParaRPr lang="zh-CN" altLang="en-US"/>
           </a:p>
           <a:p>
             <a:pPr lvl="2"/>
@@ -1540,6 +1567,7 @@
               <a:rPr lang="zh-CN" altLang="en-US"/>
               <a:t>第三级</a:t>
             </a:r>
+            <a:endParaRPr lang="zh-CN" altLang="en-US"/>
           </a:p>
           <a:p>
             <a:pPr lvl="3"/>
@@ -1547,6 +1575,7 @@
               <a:rPr lang="zh-CN" altLang="en-US"/>
               <a:t>第四级</a:t>
             </a:r>
+            <a:endParaRPr lang="zh-CN" altLang="en-US"/>
           </a:p>
           <a:p>
             <a:pPr lvl="4"/>
@@ -1554,6 +1583,7 @@
               <a:rPr lang="zh-CN" altLang="en-US"/>
               <a:t>第五级</a:t>
             </a:r>
+            <a:endParaRPr lang="zh-CN" altLang="en-US"/>
           </a:p>
         </p:txBody>
       </p:sp>
@@ -1574,7 +1604,6 @@
           <a:p>
             <a:fld id="{D997B5FA-0921-464F-AAE1-844C04324D75}" type="datetimeFigureOut">
               <a:rPr lang="zh-CN" altLang="en-US" smtClean="0"/>
-              <a:t>2026-03-15</a:t>
             </a:fld>
             <a:endParaRPr lang="zh-CN" altLang="en-US"/>
           </a:p>
@@ -1616,7 +1645,6 @@
           <a:p>
             <a:fld id="{565CE74E-AB26-4998-AD42-012C4C1AD076}" type="slidenum">
               <a:rPr lang="zh-CN" altLang="en-US" smtClean="0"/>
-              <a:t>‹#›</a:t>
             </a:fld>
             <a:endParaRPr lang="zh-CN" altLang="en-US"/>
           </a:p>
@@ -1666,6 +1694,7 @@
               <a:rPr lang="zh-CN" altLang="en-US"/>
               <a:t>单击此处编辑母版标题样式</a:t>
             </a:r>
+            <a:endParaRPr lang="zh-CN" altLang="en-US"/>
           </a:p>
         </p:txBody>
       </p:sp>
@@ -1686,7 +1715,6 @@
           <a:p>
             <a:fld id="{D997B5FA-0921-464F-AAE1-844C04324D75}" type="datetimeFigureOut">
               <a:rPr lang="zh-CN" altLang="en-US" smtClean="0"/>
-              <a:t>2026-03-15</a:t>
             </a:fld>
             <a:endParaRPr lang="zh-CN" altLang="en-US"/>
           </a:p>
@@ -1728,7 +1756,6 @@
           <a:p>
             <a:fld id="{565CE74E-AB26-4998-AD42-012C4C1AD076}" type="slidenum">
               <a:rPr lang="zh-CN" altLang="en-US" smtClean="0"/>
-              <a:t>‹#›</a:t>
             </a:fld>
             <a:endParaRPr lang="zh-CN" altLang="en-US"/>
           </a:p>
@@ -1776,7 +1803,6 @@
           <a:p>
             <a:fld id="{D997B5FA-0921-464F-AAE1-844C04324D75}" type="datetimeFigureOut">
               <a:rPr lang="zh-CN" altLang="en-US" smtClean="0"/>
-              <a:t>2026-03-15</a:t>
             </a:fld>
             <a:endParaRPr lang="zh-CN" altLang="en-US"/>
           </a:p>
@@ -1818,7 +1844,6 @@
           <a:p>
             <a:fld id="{565CE74E-AB26-4998-AD42-012C4C1AD076}" type="slidenum">
               <a:rPr lang="zh-CN" altLang="en-US" smtClean="0"/>
-              <a:t>‹#›</a:t>
             </a:fld>
             <a:endParaRPr lang="zh-CN" altLang="en-US"/>
           </a:p>
@@ -1877,6 +1902,7 @@
               <a:rPr lang="zh-CN" altLang="en-US"/>
               <a:t>单击此处编辑母版标题样式</a:t>
             </a:r>
+            <a:endParaRPr lang="zh-CN" altLang="en-US"/>
           </a:p>
         </p:txBody>
       </p:sp>
@@ -1933,6 +1959,7 @@
               <a:rPr lang="zh-CN" altLang="en-US"/>
               <a:t>单击此处编辑母版文本样式</a:t>
             </a:r>
+            <a:endParaRPr lang="zh-CN" altLang="en-US"/>
           </a:p>
           <a:p>
             <a:pPr lvl="1"/>
@@ -1940,6 +1967,7 @@
               <a:rPr lang="zh-CN" altLang="en-US"/>
               <a:t>第二级</a:t>
             </a:r>
+            <a:endParaRPr lang="zh-CN" altLang="en-US"/>
           </a:p>
           <a:p>
             <a:pPr lvl="2"/>
@@ -1947,6 +1975,7 @@
               <a:rPr lang="zh-CN" altLang="en-US"/>
               <a:t>第三级</a:t>
             </a:r>
+            <a:endParaRPr lang="zh-CN" altLang="en-US"/>
           </a:p>
           <a:p>
             <a:pPr lvl="3"/>
@@ -1954,6 +1983,7 @@
               <a:rPr lang="zh-CN" altLang="en-US"/>
               <a:t>第四级</a:t>
             </a:r>
+            <a:endParaRPr lang="zh-CN" altLang="en-US"/>
           </a:p>
           <a:p>
             <a:pPr lvl="4"/>
@@ -1961,6 +1991,7 @@
               <a:rPr lang="zh-CN" altLang="en-US"/>
               <a:t>第五级</a:t>
             </a:r>
+            <a:endParaRPr lang="zh-CN" altLang="en-US"/>
           </a:p>
         </p:txBody>
       </p:sp>
@@ -2026,6 +2057,7 @@
               <a:rPr lang="zh-CN" altLang="en-US"/>
               <a:t>单击此处编辑母版文本样式</a:t>
             </a:r>
+            <a:endParaRPr lang="zh-CN" altLang="en-US"/>
           </a:p>
         </p:txBody>
       </p:sp>
@@ -2046,7 +2078,6 @@
           <a:p>
             <a:fld id="{D997B5FA-0921-464F-AAE1-844C04324D75}" type="datetimeFigureOut">
               <a:rPr lang="zh-CN" altLang="en-US" smtClean="0"/>
-              <a:t>2026-03-15</a:t>
             </a:fld>
             <a:endParaRPr lang="zh-CN" altLang="en-US"/>
           </a:p>
@@ -2088,7 +2119,6 @@
           <a:p>
             <a:fld id="{565CE74E-AB26-4998-AD42-012C4C1AD076}" type="slidenum">
               <a:rPr lang="zh-CN" altLang="en-US" smtClean="0"/>
-              <a:t>‹#›</a:t>
             </a:fld>
             <a:endParaRPr lang="zh-CN" altLang="en-US"/>
           </a:p>
@@ -2147,6 +2177,7 @@
               <a:rPr lang="zh-CN" altLang="en-US"/>
               <a:t>单击此处编辑母版标题样式</a:t>
             </a:r>
+            <a:endParaRPr lang="zh-CN" altLang="en-US"/>
           </a:p>
         </p:txBody>
       </p:sp>
@@ -2273,6 +2304,7 @@
               <a:rPr lang="zh-CN" altLang="en-US"/>
               <a:t>单击此处编辑母版文本样式</a:t>
             </a:r>
+            <a:endParaRPr lang="zh-CN" altLang="en-US"/>
           </a:p>
         </p:txBody>
       </p:sp>
@@ -2293,7 +2325,6 @@
           <a:p>
             <a:fld id="{D997B5FA-0921-464F-AAE1-844C04324D75}" type="datetimeFigureOut">
               <a:rPr lang="zh-CN" altLang="en-US" smtClean="0"/>
-              <a:t>2026-03-15</a:t>
             </a:fld>
             <a:endParaRPr lang="zh-CN" altLang="en-US"/>
           </a:p>
@@ -2335,7 +2366,6 @@
           <a:p>
             <a:fld id="{565CE74E-AB26-4998-AD42-012C4C1AD076}" type="slidenum">
               <a:rPr lang="zh-CN" altLang="en-US" smtClean="0"/>
-              <a:t>‹#›</a:t>
             </a:fld>
             <a:endParaRPr lang="zh-CN" altLang="en-US"/>
           </a:p>
@@ -2400,6 +2430,7 @@
               <a:rPr lang="zh-CN" altLang="en-US"/>
               <a:t>单击此处编辑母版标题样式</a:t>
             </a:r>
+            <a:endParaRPr lang="zh-CN" altLang="en-US"/>
           </a:p>
         </p:txBody>
       </p:sp>
@@ -2433,6 +2464,7 @@
               <a:rPr lang="zh-CN" altLang="en-US"/>
               <a:t>单击此处编辑母版文本样式</a:t>
             </a:r>
+            <a:endParaRPr lang="zh-CN" altLang="en-US"/>
           </a:p>
           <a:p>
             <a:pPr lvl="1"/>
@@ -2440,6 +2472,7 @@
               <a:rPr lang="zh-CN" altLang="en-US"/>
               <a:t>第二级</a:t>
             </a:r>
+            <a:endParaRPr lang="zh-CN" altLang="en-US"/>
           </a:p>
           <a:p>
             <a:pPr lvl="2"/>
@@ -2447,6 +2480,7 @@
               <a:rPr lang="zh-CN" altLang="en-US"/>
               <a:t>第三级</a:t>
             </a:r>
+            <a:endParaRPr lang="zh-CN" altLang="en-US"/>
           </a:p>
           <a:p>
             <a:pPr lvl="3"/>
@@ -2454,6 +2488,7 @@
               <a:rPr lang="zh-CN" altLang="en-US"/>
               <a:t>第四级</a:t>
             </a:r>
+            <a:endParaRPr lang="zh-CN" altLang="en-US"/>
           </a:p>
           <a:p>
             <a:pPr lvl="4"/>
@@ -2461,6 +2496,7 @@
               <a:rPr lang="zh-CN" altLang="en-US"/>
               <a:t>第五级</a:t>
             </a:r>
+            <a:endParaRPr lang="zh-CN" altLang="en-US"/>
           </a:p>
         </p:txBody>
       </p:sp>
@@ -2499,7 +2535,6 @@
           <a:p>
             <a:fld id="{D997B5FA-0921-464F-AAE1-844C04324D75}" type="datetimeFigureOut">
               <a:rPr lang="zh-CN" altLang="en-US" smtClean="0"/>
-              <a:t>2026-03-15</a:t>
             </a:fld>
             <a:endParaRPr lang="zh-CN" altLang="en-US"/>
           </a:p>
@@ -2577,7 +2612,6 @@
           <a:p>
             <a:fld id="{565CE74E-AB26-4998-AD42-012C4C1AD076}" type="slidenum">
               <a:rPr lang="zh-CN" altLang="en-US" smtClean="0"/>
-              <a:t>‹#›</a:t>
             </a:fld>
             <a:endParaRPr lang="zh-CN" altLang="en-US"/>
           </a:p>
@@ -2901,13 +2935,7 @@
       </p:grpSpPr>
       <p:cxnSp>
         <p:nvCxnSpPr>
-          <p:cNvPr id="3" name="直接连接符 2">
-            <a:extLst>
-              <a:ext uri="{FF2B5EF4-FFF2-40B4-BE49-F238E27FC236}">
-                <a16:creationId xmlns:a16="http://schemas.microsoft.com/office/drawing/2014/main" id="{B24BA897-0641-7FE2-4D98-E6A8E3C32D8B}"/>
-              </a:ext>
-            </a:extLst>
-          </p:cNvPr>
+          <p:cNvPr id="3" name="直接连接符 2"/>
           <p:cNvCxnSpPr/>
           <p:nvPr/>
         </p:nvCxnSpPr>
@@ -2945,16 +2973,8 @@
       </p:cxnSp>
       <p:cxnSp>
         <p:nvCxnSpPr>
-          <p:cNvPr id="5" name="直接连接符 4">
-            <a:extLst>
-              <a:ext uri="{FF2B5EF4-FFF2-40B4-BE49-F238E27FC236}">
-                <a16:creationId xmlns:a16="http://schemas.microsoft.com/office/drawing/2014/main" id="{9727CD76-DD28-F0A9-763A-54C20CCDBF41}"/>
-              </a:ext>
-            </a:extLst>
-          </p:cNvPr>
-          <p:cNvCxnSpPr>
-            <a:cxnSpLocks/>
-          </p:cNvCxnSpPr>
+          <p:cNvPr id="5" name="直接连接符 4"/>
+          <p:cNvCxnSpPr/>
           <p:nvPr/>
         </p:nvCxnSpPr>
         <p:spPr>
@@ -2992,13 +3012,7 @@
       </p:cxnSp>
       <p:cxnSp>
         <p:nvCxnSpPr>
-          <p:cNvPr id="9" name="直接连接符 8">
-            <a:extLst>
-              <a:ext uri="{FF2B5EF4-FFF2-40B4-BE49-F238E27FC236}">
-                <a16:creationId xmlns:a16="http://schemas.microsoft.com/office/drawing/2014/main" id="{8BFA0588-DD63-42F0-B756-E09D398162D6}"/>
-              </a:ext>
-            </a:extLst>
-          </p:cNvPr>
+          <p:cNvPr id="9" name="直接连接符 8"/>
           <p:cNvCxnSpPr/>
           <p:nvPr/>
         </p:nvCxnSpPr>
@@ -3036,13 +3050,7 @@
       </p:cxnSp>
       <p:cxnSp>
         <p:nvCxnSpPr>
-          <p:cNvPr id="10" name="直接连接符 9">
-            <a:extLst>
-              <a:ext uri="{FF2B5EF4-FFF2-40B4-BE49-F238E27FC236}">
-                <a16:creationId xmlns:a16="http://schemas.microsoft.com/office/drawing/2014/main" id="{B4C96AAC-BCBE-DB8D-5F98-37F52C594AE6}"/>
-              </a:ext>
-            </a:extLst>
-          </p:cNvPr>
+          <p:cNvPr id="10" name="直接连接符 9"/>
           <p:cNvCxnSpPr/>
           <p:nvPr/>
         </p:nvCxnSpPr>
@@ -3080,13 +3088,7 @@
       </p:cxnSp>
       <p:cxnSp>
         <p:nvCxnSpPr>
-          <p:cNvPr id="11" name="直接连接符 10">
-            <a:extLst>
-              <a:ext uri="{FF2B5EF4-FFF2-40B4-BE49-F238E27FC236}">
-                <a16:creationId xmlns:a16="http://schemas.microsoft.com/office/drawing/2014/main" id="{782F9C0C-D5C2-A985-B26C-0F202B65704D}"/>
-              </a:ext>
-            </a:extLst>
-          </p:cNvPr>
+          <p:cNvPr id="11" name="直接连接符 10"/>
           <p:cNvCxnSpPr/>
           <p:nvPr/>
         </p:nvCxnSpPr>
@@ -3124,13 +3126,7 @@
       </p:cxnSp>
       <p:cxnSp>
         <p:nvCxnSpPr>
-          <p:cNvPr id="12" name="直接连接符 11">
-            <a:extLst>
-              <a:ext uri="{FF2B5EF4-FFF2-40B4-BE49-F238E27FC236}">
-                <a16:creationId xmlns:a16="http://schemas.microsoft.com/office/drawing/2014/main" id="{4104C45A-67FE-D7CF-5CAD-432E698EACE3}"/>
-              </a:ext>
-            </a:extLst>
-          </p:cNvPr>
+          <p:cNvPr id="12" name="直接连接符 11"/>
           <p:cNvCxnSpPr/>
           <p:nvPr/>
         </p:nvCxnSpPr>
@@ -3168,13 +3164,7 @@
       </p:cxnSp>
       <p:cxnSp>
         <p:nvCxnSpPr>
-          <p:cNvPr id="13" name="直接连接符 12">
-            <a:extLst>
-              <a:ext uri="{FF2B5EF4-FFF2-40B4-BE49-F238E27FC236}">
-                <a16:creationId xmlns:a16="http://schemas.microsoft.com/office/drawing/2014/main" id="{926B83E7-95A0-A918-E228-4136AE541340}"/>
-              </a:ext>
-            </a:extLst>
-          </p:cNvPr>
+          <p:cNvPr id="13" name="直接连接符 12"/>
           <p:cNvCxnSpPr/>
           <p:nvPr/>
         </p:nvCxnSpPr>
@@ -3212,13 +3202,7 @@
       </p:cxnSp>
       <p:cxnSp>
         <p:nvCxnSpPr>
-          <p:cNvPr id="14" name="直接连接符 13">
-            <a:extLst>
-              <a:ext uri="{FF2B5EF4-FFF2-40B4-BE49-F238E27FC236}">
-                <a16:creationId xmlns:a16="http://schemas.microsoft.com/office/drawing/2014/main" id="{CA4B7145-8054-72ED-FE82-3C915CD224DF}"/>
-              </a:ext>
-            </a:extLst>
-          </p:cNvPr>
+          <p:cNvPr id="14" name="直接连接符 13"/>
           <p:cNvCxnSpPr/>
           <p:nvPr/>
         </p:nvCxnSpPr>
@@ -3256,16 +3240,8 @@
       </p:cxnSp>
       <p:cxnSp>
         <p:nvCxnSpPr>
-          <p:cNvPr id="18" name="直接箭头连接符 17">
-            <a:extLst>
-              <a:ext uri="{FF2B5EF4-FFF2-40B4-BE49-F238E27FC236}">
-                <a16:creationId xmlns:a16="http://schemas.microsoft.com/office/drawing/2014/main" id="{9B93A26C-F174-5BEC-AD41-AEB0B82C9AA7}"/>
-              </a:ext>
-            </a:extLst>
-          </p:cNvPr>
-          <p:cNvCxnSpPr>
-            <a:cxnSpLocks/>
-          </p:cNvCxnSpPr>
+          <p:cNvPr id="18" name="直接箭头连接符 17"/>
+          <p:cNvCxnSpPr/>
           <p:nvPr/>
         </p:nvCxnSpPr>
         <p:spPr>
@@ -3303,16 +3279,8 @@
       </p:cxnSp>
       <p:cxnSp>
         <p:nvCxnSpPr>
-          <p:cNvPr id="20" name="直接箭头连接符 19">
-            <a:extLst>
-              <a:ext uri="{FF2B5EF4-FFF2-40B4-BE49-F238E27FC236}">
-                <a16:creationId xmlns:a16="http://schemas.microsoft.com/office/drawing/2014/main" id="{F3625A4D-FC5E-D0F1-D633-A45E62BC7027}"/>
-              </a:ext>
-            </a:extLst>
-          </p:cNvPr>
-          <p:cNvCxnSpPr>
-            <a:cxnSpLocks/>
-          </p:cNvCxnSpPr>
+          <p:cNvPr id="20" name="直接箭头连接符 19"/>
+          <p:cNvCxnSpPr/>
           <p:nvPr/>
         </p:nvCxnSpPr>
         <p:spPr>
@@ -3351,13 +3319,7 @@
       </p:cxnSp>
       <p:cxnSp>
         <p:nvCxnSpPr>
-          <p:cNvPr id="23" name="直接连接符 22">
-            <a:extLst>
-              <a:ext uri="{FF2B5EF4-FFF2-40B4-BE49-F238E27FC236}">
-                <a16:creationId xmlns:a16="http://schemas.microsoft.com/office/drawing/2014/main" id="{23DF81D1-9BFA-E58F-788D-F9E9905427F7}"/>
-              </a:ext>
-            </a:extLst>
-          </p:cNvPr>
+          <p:cNvPr id="23" name="直接连接符 22"/>
           <p:cNvCxnSpPr/>
           <p:nvPr/>
         </p:nvCxnSpPr>
@@ -3396,16 +3358,8 @@
       </p:cxnSp>
       <p:cxnSp>
         <p:nvCxnSpPr>
-          <p:cNvPr id="31" name="直接箭头连接符 30">
-            <a:extLst>
-              <a:ext uri="{FF2B5EF4-FFF2-40B4-BE49-F238E27FC236}">
-                <a16:creationId xmlns:a16="http://schemas.microsoft.com/office/drawing/2014/main" id="{57080073-5B2F-3EB9-0587-A5FB0D1B7D34}"/>
-              </a:ext>
-            </a:extLst>
-          </p:cNvPr>
-          <p:cNvCxnSpPr>
-            <a:cxnSpLocks/>
-          </p:cNvCxnSpPr>
+          <p:cNvPr id="31" name="直接箭头连接符 30"/>
+          <p:cNvCxnSpPr/>
           <p:nvPr/>
         </p:nvCxnSpPr>
         <p:spPr>
@@ -3444,13 +3398,7 @@
       </p:cxnSp>
       <p:cxnSp>
         <p:nvCxnSpPr>
-          <p:cNvPr id="64" name="直接连接符 63">
-            <a:extLst>
-              <a:ext uri="{FF2B5EF4-FFF2-40B4-BE49-F238E27FC236}">
-                <a16:creationId xmlns:a16="http://schemas.microsoft.com/office/drawing/2014/main" id="{B24BA897-0641-7FE2-4D98-E6A8E3C32D8B}"/>
-              </a:ext>
-            </a:extLst>
-          </p:cNvPr>
+          <p:cNvPr id="64" name="直接连接符 63"/>
           <p:cNvCxnSpPr/>
           <p:nvPr/>
         </p:nvCxnSpPr>
@@ -3488,16 +3436,8 @@
       </p:cxnSp>
       <p:cxnSp>
         <p:nvCxnSpPr>
-          <p:cNvPr id="65" name="直接连接符 64">
-            <a:extLst>
-              <a:ext uri="{FF2B5EF4-FFF2-40B4-BE49-F238E27FC236}">
-                <a16:creationId xmlns:a16="http://schemas.microsoft.com/office/drawing/2014/main" id="{9727CD76-DD28-F0A9-763A-54C20CCDBF41}"/>
-              </a:ext>
-            </a:extLst>
-          </p:cNvPr>
-          <p:cNvCxnSpPr>
-            <a:cxnSpLocks/>
-          </p:cNvCxnSpPr>
+          <p:cNvPr id="65" name="直接连接符 64"/>
+          <p:cNvCxnSpPr/>
           <p:nvPr/>
         </p:nvCxnSpPr>
         <p:spPr>
@@ -3535,13 +3475,7 @@
       </p:cxnSp>
       <p:cxnSp>
         <p:nvCxnSpPr>
-          <p:cNvPr id="66" name="直接连接符 65">
-            <a:extLst>
-              <a:ext uri="{FF2B5EF4-FFF2-40B4-BE49-F238E27FC236}">
-                <a16:creationId xmlns:a16="http://schemas.microsoft.com/office/drawing/2014/main" id="{8BFA0588-DD63-42F0-B756-E09D398162D6}"/>
-              </a:ext>
-            </a:extLst>
-          </p:cNvPr>
+          <p:cNvPr id="66" name="直接连接符 65"/>
           <p:cNvCxnSpPr/>
           <p:nvPr/>
         </p:nvCxnSpPr>
@@ -3579,13 +3513,7 @@
       </p:cxnSp>
       <p:cxnSp>
         <p:nvCxnSpPr>
-          <p:cNvPr id="67" name="直接连接符 66">
-            <a:extLst>
-              <a:ext uri="{FF2B5EF4-FFF2-40B4-BE49-F238E27FC236}">
-                <a16:creationId xmlns:a16="http://schemas.microsoft.com/office/drawing/2014/main" id="{B4C96AAC-BCBE-DB8D-5F98-37F52C594AE6}"/>
-              </a:ext>
-            </a:extLst>
-          </p:cNvPr>
+          <p:cNvPr id="67" name="直接连接符 66"/>
           <p:cNvCxnSpPr/>
           <p:nvPr/>
         </p:nvCxnSpPr>
@@ -3623,13 +3551,7 @@
       </p:cxnSp>
       <p:cxnSp>
         <p:nvCxnSpPr>
-          <p:cNvPr id="68" name="直接连接符 67">
-            <a:extLst>
-              <a:ext uri="{FF2B5EF4-FFF2-40B4-BE49-F238E27FC236}">
-                <a16:creationId xmlns:a16="http://schemas.microsoft.com/office/drawing/2014/main" id="{782F9C0C-D5C2-A985-B26C-0F202B65704D}"/>
-              </a:ext>
-            </a:extLst>
-          </p:cNvPr>
+          <p:cNvPr id="68" name="直接连接符 67"/>
           <p:cNvCxnSpPr/>
           <p:nvPr/>
         </p:nvCxnSpPr>
@@ -3667,13 +3589,7 @@
       </p:cxnSp>
       <p:cxnSp>
         <p:nvCxnSpPr>
-          <p:cNvPr id="69" name="直接连接符 68">
-            <a:extLst>
-              <a:ext uri="{FF2B5EF4-FFF2-40B4-BE49-F238E27FC236}">
-                <a16:creationId xmlns:a16="http://schemas.microsoft.com/office/drawing/2014/main" id="{4104C45A-67FE-D7CF-5CAD-432E698EACE3}"/>
-              </a:ext>
-            </a:extLst>
-          </p:cNvPr>
+          <p:cNvPr id="69" name="直接连接符 68"/>
           <p:cNvCxnSpPr/>
           <p:nvPr/>
         </p:nvCxnSpPr>
@@ -3711,13 +3627,7 @@
       </p:cxnSp>
       <p:cxnSp>
         <p:nvCxnSpPr>
-          <p:cNvPr id="70" name="直接连接符 69">
-            <a:extLst>
-              <a:ext uri="{FF2B5EF4-FFF2-40B4-BE49-F238E27FC236}">
-                <a16:creationId xmlns:a16="http://schemas.microsoft.com/office/drawing/2014/main" id="{926B83E7-95A0-A918-E228-4136AE541340}"/>
-              </a:ext>
-            </a:extLst>
-          </p:cNvPr>
+          <p:cNvPr id="70" name="直接连接符 69"/>
           <p:cNvCxnSpPr/>
           <p:nvPr/>
         </p:nvCxnSpPr>
@@ -3755,13 +3665,7 @@
       </p:cxnSp>
       <p:cxnSp>
         <p:nvCxnSpPr>
-          <p:cNvPr id="71" name="直接连接符 70">
-            <a:extLst>
-              <a:ext uri="{FF2B5EF4-FFF2-40B4-BE49-F238E27FC236}">
-                <a16:creationId xmlns:a16="http://schemas.microsoft.com/office/drawing/2014/main" id="{CA4B7145-8054-72ED-FE82-3C915CD224DF}"/>
-              </a:ext>
-            </a:extLst>
-          </p:cNvPr>
+          <p:cNvPr id="71" name="直接连接符 70"/>
           <p:cNvCxnSpPr/>
           <p:nvPr/>
         </p:nvCxnSpPr>
@@ -3799,16 +3703,8 @@
       </p:cxnSp>
       <p:cxnSp>
         <p:nvCxnSpPr>
-          <p:cNvPr id="72" name="直接箭头连接符 71">
-            <a:extLst>
-              <a:ext uri="{FF2B5EF4-FFF2-40B4-BE49-F238E27FC236}">
-                <a16:creationId xmlns:a16="http://schemas.microsoft.com/office/drawing/2014/main" id="{9B93A26C-F174-5BEC-AD41-AEB0B82C9AA7}"/>
-              </a:ext>
-            </a:extLst>
-          </p:cNvPr>
-          <p:cNvCxnSpPr>
-            <a:cxnSpLocks/>
-          </p:cNvCxnSpPr>
+          <p:cNvPr id="72" name="直接箭头连接符 71"/>
+          <p:cNvCxnSpPr/>
           <p:nvPr/>
         </p:nvCxnSpPr>
         <p:spPr>
@@ -3847,16 +3743,8 @@
       </p:cxnSp>
       <p:cxnSp>
         <p:nvCxnSpPr>
-          <p:cNvPr id="73" name="直接箭头连接符 72">
-            <a:extLst>
-              <a:ext uri="{FF2B5EF4-FFF2-40B4-BE49-F238E27FC236}">
-                <a16:creationId xmlns:a16="http://schemas.microsoft.com/office/drawing/2014/main" id="{F3625A4D-FC5E-D0F1-D633-A45E62BC7027}"/>
-              </a:ext>
-            </a:extLst>
-          </p:cNvPr>
-          <p:cNvCxnSpPr>
-            <a:cxnSpLocks/>
-          </p:cNvCxnSpPr>
+          <p:cNvPr id="73" name="直接箭头连接符 72"/>
+          <p:cNvCxnSpPr/>
           <p:nvPr/>
         </p:nvCxnSpPr>
         <p:spPr>
@@ -3895,13 +3783,7 @@
       </p:cxnSp>
       <p:sp>
         <p:nvSpPr>
-          <p:cNvPr id="80" name="弧形 79">
-            <a:extLst>
-              <a:ext uri="{FF2B5EF4-FFF2-40B4-BE49-F238E27FC236}">
-                <a16:creationId xmlns:a16="http://schemas.microsoft.com/office/drawing/2014/main" id="{2BF12983-74F6-4A64-055B-371E31A4D621}"/>
-              </a:ext>
-            </a:extLst>
-          </p:cNvPr>
+          <p:cNvPr id="80" name="弧形 79"/>
           <p:cNvSpPr/>
           <p:nvPr/>
         </p:nvSpPr>
@@ -3950,13 +3832,7 @@
       </p:sp>
       <p:sp>
         <p:nvSpPr>
-          <p:cNvPr id="82" name="弧形 81">
-            <a:extLst>
-              <a:ext uri="{FF2B5EF4-FFF2-40B4-BE49-F238E27FC236}">
-                <a16:creationId xmlns:a16="http://schemas.microsoft.com/office/drawing/2014/main" id="{00DA0B8B-7032-41FF-7115-60B17B2AF922}"/>
-              </a:ext>
-            </a:extLst>
-          </p:cNvPr>
+          <p:cNvPr id="82" name="弧形 81"/>
           <p:cNvSpPr/>
           <p:nvPr/>
         </p:nvSpPr>
@@ -4003,17 +3879,11 @@
           </a:p>
         </p:txBody>
       </p:sp>
-      <mc:AlternateContent xmlns:mc="http://schemas.openxmlformats.org/markup-compatibility/2006" xmlns:a14="http://schemas.microsoft.com/office/drawing/2010/main">
-        <mc:Choice Requires="a14">
+      <mc:AlternateContent xmlns:mc="http://schemas.openxmlformats.org/markup-compatibility/2006">
+        <mc:Choice xmlns:a14="http://schemas.microsoft.com/office/drawing/2010/main" Requires="a14">
           <p:sp>
             <p:nvSpPr>
-              <p:cNvPr id="83" name="文本框 82">
-                <a:extLst>
-                  <a:ext uri="{FF2B5EF4-FFF2-40B4-BE49-F238E27FC236}">
-                    <a16:creationId xmlns:a16="http://schemas.microsoft.com/office/drawing/2014/main" id="{5D43C72D-3E0D-13E2-10EF-B84C30302719}"/>
-                  </a:ext>
-                </a:extLst>
-              </p:cNvPr>
+              <p:cNvPr id="83" name="文本框 82"/>
               <p:cNvSpPr txBox="1"/>
               <p:nvPr/>
             </p:nvSpPr>
@@ -4033,7 +3903,6 @@
               </a:bodyPr>
               <a:lstStyle/>
               <a:p>
-                <a:pPr/>
                 <a14:m>
                   <m:oMathPara xmlns:m="http://schemas.openxmlformats.org/officeDocument/2006/math">
                     <m:oMathParaPr>
@@ -4070,16 +3939,10 @@
             </p:txBody>
           </p:sp>
         </mc:Choice>
-        <mc:Fallback xmlns="">
+        <mc:Fallback>
           <p:sp>
             <p:nvSpPr>
-              <p:cNvPr id="83" name="文本框 82">
-                <a:extLst>
-                  <a:ext uri="{FF2B5EF4-FFF2-40B4-BE49-F238E27FC236}">
-                    <a16:creationId xmlns:a16="http://schemas.microsoft.com/office/drawing/2014/main" id="{5D43C72D-3E0D-13E2-10EF-B84C30302719}"/>
-                  </a:ext>
-                </a:extLst>
-              </p:cNvPr>
+              <p:cNvPr id="83" name="文本框 82"/>
               <p:cNvSpPr txBox="1">
                 <a:spLocks noRot="1" noChangeAspect="1" noMove="1" noResize="1" noEditPoints="1" noAdjustHandles="1" noChangeArrowheads="1" noChangeShapeType="1" noTextEdit="1"/>
               </p:cNvSpPr>
@@ -4093,10 +3956,10 @@
               <a:prstGeom prst="rect">
                 <a:avLst/>
               </a:prstGeom>
-              <a:blipFill>
-                <a:blip r:embed="rId2"/>
+              <a:blipFill rotWithShape="1">
+                <a:blip r:embed="rId1"/>
                 <a:stretch>
-                  <a:fillRect r="-11111"/>
+                  <a:fillRect l="-209" t="-83" r="136" b="18"/>
                 </a:stretch>
               </a:blipFill>
             </p:spPr>
@@ -4115,17 +3978,11 @@
           </p:sp>
         </mc:Fallback>
       </mc:AlternateContent>
-      <mc:AlternateContent xmlns:mc="http://schemas.openxmlformats.org/markup-compatibility/2006" xmlns:a14="http://schemas.microsoft.com/office/drawing/2010/main">
-        <mc:Choice Requires="a14">
+      <mc:AlternateContent xmlns:mc="http://schemas.openxmlformats.org/markup-compatibility/2006">
+        <mc:Choice xmlns:a14="http://schemas.microsoft.com/office/drawing/2010/main" Requires="a14">
           <p:sp>
             <p:nvSpPr>
-              <p:cNvPr id="84" name="文本框 83">
-                <a:extLst>
-                  <a:ext uri="{FF2B5EF4-FFF2-40B4-BE49-F238E27FC236}">
-                    <a16:creationId xmlns:a16="http://schemas.microsoft.com/office/drawing/2014/main" id="{20B6851D-F33A-8FC1-9675-BF5DAB1DD7F5}"/>
-                  </a:ext>
-                </a:extLst>
-              </p:cNvPr>
+              <p:cNvPr id="84" name="文本框 83"/>
               <p:cNvSpPr txBox="1"/>
               <p:nvPr/>
             </p:nvSpPr>
@@ -4145,7 +4002,6 @@
               </a:bodyPr>
               <a:lstStyle/>
               <a:p>
-                <a:pPr/>
                 <a14:m>
                   <m:oMathPara xmlns:m="http://schemas.openxmlformats.org/officeDocument/2006/math">
                     <m:oMathParaPr>
@@ -4182,16 +4038,10 @@
             </p:txBody>
           </p:sp>
         </mc:Choice>
-        <mc:Fallback xmlns="">
+        <mc:Fallback>
           <p:sp>
             <p:nvSpPr>
-              <p:cNvPr id="84" name="文本框 83">
-                <a:extLst>
-                  <a:ext uri="{FF2B5EF4-FFF2-40B4-BE49-F238E27FC236}">
-                    <a16:creationId xmlns:a16="http://schemas.microsoft.com/office/drawing/2014/main" id="{20B6851D-F33A-8FC1-9675-BF5DAB1DD7F5}"/>
-                  </a:ext>
-                </a:extLst>
-              </p:cNvPr>
+              <p:cNvPr id="84" name="文本框 83"/>
               <p:cNvSpPr txBox="1">
                 <a:spLocks noRot="1" noChangeAspect="1" noMove="1" noResize="1" noEditPoints="1" noAdjustHandles="1" noChangeArrowheads="1" noChangeShapeType="1" noTextEdit="1"/>
               </p:cNvSpPr>
@@ -4205,10 +4055,10 @@
               <a:prstGeom prst="rect">
                 <a:avLst/>
               </a:prstGeom>
-              <a:blipFill>
-                <a:blip r:embed="rId3"/>
+              <a:blipFill rotWithShape="1">
+                <a:blip r:embed="rId1"/>
                 <a:stretch>
-                  <a:fillRect r="-8696"/>
+                  <a:fillRect l="-195" t="-139" r="121" b="75"/>
                 </a:stretch>
               </a:blipFill>
             </p:spPr>
@@ -4229,13 +4079,7 @@
       </mc:AlternateContent>
       <p:cxnSp>
         <p:nvCxnSpPr>
-          <p:cNvPr id="86" name="直接箭头连接符 85">
-            <a:extLst>
-              <a:ext uri="{FF2B5EF4-FFF2-40B4-BE49-F238E27FC236}">
-                <a16:creationId xmlns:a16="http://schemas.microsoft.com/office/drawing/2014/main" id="{04F60D39-26A4-9FA4-689F-BC524A13644F}"/>
-              </a:ext>
-            </a:extLst>
-          </p:cNvPr>
+          <p:cNvPr id="86" name="直接箭头连接符 85"/>
           <p:cNvCxnSpPr/>
           <p:nvPr/>
         </p:nvCxnSpPr>
@@ -4274,16 +4118,8 @@
       </p:cxnSp>
       <p:cxnSp>
         <p:nvCxnSpPr>
-          <p:cNvPr id="89" name="直接连接符 88">
-            <a:extLst>
-              <a:ext uri="{FF2B5EF4-FFF2-40B4-BE49-F238E27FC236}">
-                <a16:creationId xmlns:a16="http://schemas.microsoft.com/office/drawing/2014/main" id="{45A1E8FD-472B-A47D-7F68-147BD4805543}"/>
-              </a:ext>
-            </a:extLst>
-          </p:cNvPr>
-          <p:cNvCxnSpPr>
-            <a:cxnSpLocks/>
-          </p:cNvCxnSpPr>
+          <p:cNvPr id="89" name="直接连接符 88"/>
+          <p:cNvCxnSpPr/>
           <p:nvPr/>
         </p:nvCxnSpPr>
         <p:spPr>
@@ -4321,16 +4157,8 @@
       </p:cxnSp>
       <p:cxnSp>
         <p:nvCxnSpPr>
-          <p:cNvPr id="90" name="直接箭头连接符 89">
-            <a:extLst>
-              <a:ext uri="{FF2B5EF4-FFF2-40B4-BE49-F238E27FC236}">
-                <a16:creationId xmlns:a16="http://schemas.microsoft.com/office/drawing/2014/main" id="{C90F81C6-D317-3730-2707-33E8FE36C6E2}"/>
-              </a:ext>
-            </a:extLst>
-          </p:cNvPr>
-          <p:cNvCxnSpPr>
-            <a:cxnSpLocks/>
-          </p:cNvCxnSpPr>
+          <p:cNvPr id="90" name="直接箭头连接符 89"/>
+          <p:cNvCxnSpPr/>
           <p:nvPr/>
         </p:nvCxnSpPr>
         <p:spPr>
@@ -4368,13 +4196,7 @@
       </p:cxnSp>
       <p:sp>
         <p:nvSpPr>
-          <p:cNvPr id="91" name="弧形 90">
-            <a:extLst>
-              <a:ext uri="{FF2B5EF4-FFF2-40B4-BE49-F238E27FC236}">
-                <a16:creationId xmlns:a16="http://schemas.microsoft.com/office/drawing/2014/main" id="{CA4FF2C4-91BB-38DC-DD4E-A7A4B46DF252}"/>
-              </a:ext>
-            </a:extLst>
-          </p:cNvPr>
+          <p:cNvPr id="91" name="弧形 90"/>
           <p:cNvSpPr/>
           <p:nvPr/>
         </p:nvSpPr>
@@ -4428,17 +4250,11 @@
           </a:p>
         </p:txBody>
       </p:sp>
-      <mc:AlternateContent xmlns:mc="http://schemas.openxmlformats.org/markup-compatibility/2006" xmlns:a14="http://schemas.microsoft.com/office/drawing/2010/main">
-        <mc:Choice Requires="a14">
+      <mc:AlternateContent xmlns:mc="http://schemas.openxmlformats.org/markup-compatibility/2006">
+        <mc:Choice xmlns:a14="http://schemas.microsoft.com/office/drawing/2010/main" Requires="a14">
           <p:sp>
             <p:nvSpPr>
-              <p:cNvPr id="92" name="文本框 91">
-                <a:extLst>
-                  <a:ext uri="{FF2B5EF4-FFF2-40B4-BE49-F238E27FC236}">
-                    <a16:creationId xmlns:a16="http://schemas.microsoft.com/office/drawing/2014/main" id="{298EB55C-A027-5B5C-4229-DBAB9BA937A4}"/>
-                  </a:ext>
-                </a:extLst>
-              </p:cNvPr>
+              <p:cNvPr id="92" name="文本框 91"/>
               <p:cNvSpPr txBox="1"/>
               <p:nvPr/>
             </p:nvSpPr>
@@ -4458,7 +4274,6 @@
               </a:bodyPr>
               <a:lstStyle/>
               <a:p>
-                <a:pPr/>
                 <a14:m>
                   <m:oMathPara xmlns:m="http://schemas.openxmlformats.org/officeDocument/2006/math">
                     <m:oMathParaPr>
@@ -4495,16 +4310,10 @@
             </p:txBody>
           </p:sp>
         </mc:Choice>
-        <mc:Fallback xmlns="">
+        <mc:Fallback>
           <p:sp>
             <p:nvSpPr>
-              <p:cNvPr id="92" name="文本框 91">
-                <a:extLst>
-                  <a:ext uri="{FF2B5EF4-FFF2-40B4-BE49-F238E27FC236}">
-                    <a16:creationId xmlns:a16="http://schemas.microsoft.com/office/drawing/2014/main" id="{298EB55C-A027-5B5C-4229-DBAB9BA937A4}"/>
-                  </a:ext>
-                </a:extLst>
-              </p:cNvPr>
+              <p:cNvPr id="92" name="文本框 91"/>
               <p:cNvSpPr txBox="1">
                 <a:spLocks noRot="1" noChangeAspect="1" noMove="1" noResize="1" noEditPoints="1" noAdjustHandles="1" noChangeArrowheads="1" noChangeShapeType="1" noTextEdit="1"/>
               </p:cNvSpPr>
@@ -4518,10 +4327,10 @@
               <a:prstGeom prst="rect">
                 <a:avLst/>
               </a:prstGeom>
-              <a:blipFill>
-                <a:blip r:embed="rId4"/>
+              <a:blipFill rotWithShape="1">
+                <a:blip r:embed="rId2"/>
                 <a:stretch>
-                  <a:fillRect/>
+                  <a:fillRect l="-83" t="-69" r="14" b="4"/>
                 </a:stretch>
               </a:blipFill>
             </p:spPr>
@@ -4542,13 +4351,7 @@
       </mc:AlternateContent>
       <p:sp>
         <p:nvSpPr>
-          <p:cNvPr id="93" name="弧形 92">
-            <a:extLst>
-              <a:ext uri="{FF2B5EF4-FFF2-40B4-BE49-F238E27FC236}">
-                <a16:creationId xmlns:a16="http://schemas.microsoft.com/office/drawing/2014/main" id="{5E24BD55-DE99-8CE6-4BAF-F5A8E8B1307F}"/>
-              </a:ext>
-            </a:extLst>
-          </p:cNvPr>
+          <p:cNvPr id="93" name="弧形 92"/>
           <p:cNvSpPr/>
           <p:nvPr/>
         </p:nvSpPr>
@@ -4595,17 +4398,11 @@
           </a:p>
         </p:txBody>
       </p:sp>
-      <mc:AlternateContent xmlns:mc="http://schemas.openxmlformats.org/markup-compatibility/2006" xmlns:a14="http://schemas.microsoft.com/office/drawing/2010/main">
-        <mc:Choice Requires="a14">
+      <mc:AlternateContent xmlns:mc="http://schemas.openxmlformats.org/markup-compatibility/2006">
+        <mc:Choice xmlns:a14="http://schemas.microsoft.com/office/drawing/2010/main" Requires="a14">
           <p:sp>
             <p:nvSpPr>
-              <p:cNvPr id="94" name="文本框 93">
-                <a:extLst>
-                  <a:ext uri="{FF2B5EF4-FFF2-40B4-BE49-F238E27FC236}">
-                    <a16:creationId xmlns:a16="http://schemas.microsoft.com/office/drawing/2014/main" id="{6C914551-DCEF-0D02-301B-517EB5FA862B}"/>
-                  </a:ext>
-                </a:extLst>
-              </p:cNvPr>
+              <p:cNvPr id="94" name="文本框 93"/>
               <p:cNvSpPr txBox="1"/>
               <p:nvPr/>
             </p:nvSpPr>
@@ -4625,7 +4422,6 @@
               </a:bodyPr>
               <a:lstStyle/>
               <a:p>
-                <a:pPr/>
                 <a14:m>
                   <m:oMathPara xmlns:m="http://schemas.openxmlformats.org/officeDocument/2006/math">
                     <m:oMathParaPr>
@@ -4662,16 +4458,10 @@
             </p:txBody>
           </p:sp>
         </mc:Choice>
-        <mc:Fallback xmlns="">
+        <mc:Fallback>
           <p:sp>
             <p:nvSpPr>
-              <p:cNvPr id="94" name="文本框 93">
-                <a:extLst>
-                  <a:ext uri="{FF2B5EF4-FFF2-40B4-BE49-F238E27FC236}">
-                    <a16:creationId xmlns:a16="http://schemas.microsoft.com/office/drawing/2014/main" id="{6C914551-DCEF-0D02-301B-517EB5FA862B}"/>
-                  </a:ext>
-                </a:extLst>
-              </p:cNvPr>
+              <p:cNvPr id="94" name="文本框 93"/>
               <p:cNvSpPr txBox="1">
                 <a:spLocks noRot="1" noChangeAspect="1" noMove="1" noResize="1" noEditPoints="1" noAdjustHandles="1" noChangeArrowheads="1" noChangeShapeType="1" noTextEdit="1"/>
               </p:cNvSpPr>
@@ -4685,10 +4475,10 @@
               <a:prstGeom prst="rect">
                 <a:avLst/>
               </a:prstGeom>
-              <a:blipFill>
-                <a:blip r:embed="rId5"/>
+              <a:blipFill rotWithShape="1">
+                <a:blip r:embed="rId1"/>
                 <a:stretch>
-                  <a:fillRect r="-11111"/>
+                  <a:fillRect l="-107" t="-77" r="34" b="12"/>
                 </a:stretch>
               </a:blipFill>
             </p:spPr>
@@ -4709,13 +4499,7 @@
       </mc:AlternateContent>
       <p:sp>
         <p:nvSpPr>
-          <p:cNvPr id="2" name="弧形 1">
-            <a:extLst>
-              <a:ext uri="{FF2B5EF4-FFF2-40B4-BE49-F238E27FC236}">
-                <a16:creationId xmlns:a16="http://schemas.microsoft.com/office/drawing/2014/main" id="{9938E944-C5BF-8FB8-D18A-985E1A09C836}"/>
-              </a:ext>
-            </a:extLst>
-          </p:cNvPr>
+          <p:cNvPr id="2" name="弧形 1"/>
           <p:cNvSpPr/>
           <p:nvPr/>
         </p:nvSpPr>
@@ -4762,17 +4546,11 @@
           </a:p>
         </p:txBody>
       </p:sp>
-      <mc:AlternateContent xmlns:mc="http://schemas.openxmlformats.org/markup-compatibility/2006" xmlns:a14="http://schemas.microsoft.com/office/drawing/2010/main">
-        <mc:Choice Requires="a14">
+      <mc:AlternateContent xmlns:mc="http://schemas.openxmlformats.org/markup-compatibility/2006">
+        <mc:Choice xmlns:a14="http://schemas.microsoft.com/office/drawing/2010/main" Requires="a14">
           <p:sp>
             <p:nvSpPr>
-              <p:cNvPr id="4" name="文本框 3">
-                <a:extLst>
-                  <a:ext uri="{FF2B5EF4-FFF2-40B4-BE49-F238E27FC236}">
-                    <a16:creationId xmlns:a16="http://schemas.microsoft.com/office/drawing/2014/main" id="{0DBADEEE-CA36-8E0B-BF85-AA9AF8E63C98}"/>
-                  </a:ext>
-                </a:extLst>
-              </p:cNvPr>
+              <p:cNvPr id="4" name="文本框 3"/>
               <p:cNvSpPr txBox="1"/>
               <p:nvPr/>
             </p:nvSpPr>
@@ -4792,7 +4570,6 @@
               </a:bodyPr>
               <a:lstStyle/>
               <a:p>
-                <a:pPr/>
                 <a14:m>
                   <m:oMathPara xmlns:m="http://schemas.openxmlformats.org/officeDocument/2006/math">
                     <m:oMathParaPr>
@@ -4841,16 +4618,10 @@
             </p:txBody>
           </p:sp>
         </mc:Choice>
-        <mc:Fallback xmlns="">
+        <mc:Fallback>
           <p:sp>
             <p:nvSpPr>
-              <p:cNvPr id="4" name="文本框 3">
-                <a:extLst>
-                  <a:ext uri="{FF2B5EF4-FFF2-40B4-BE49-F238E27FC236}">
-                    <a16:creationId xmlns:a16="http://schemas.microsoft.com/office/drawing/2014/main" id="{0DBADEEE-CA36-8E0B-BF85-AA9AF8E63C98}"/>
-                  </a:ext>
-                </a:extLst>
-              </p:cNvPr>
+              <p:cNvPr id="4" name="文本框 3"/>
               <p:cNvSpPr txBox="1">
                 <a:spLocks noRot="1" noChangeAspect="1" noMove="1" noResize="1" noEditPoints="1" noAdjustHandles="1" noChangeArrowheads="1" noChangeShapeType="1" noTextEdit="1"/>
               </p:cNvSpPr>
@@ -4864,10 +4635,10 @@
               <a:prstGeom prst="rect">
                 <a:avLst/>
               </a:prstGeom>
-              <a:blipFill>
-                <a:blip r:embed="rId6"/>
+              <a:blipFill rotWithShape="1">
+                <a:blip r:embed="rId3"/>
                 <a:stretch>
-                  <a:fillRect r="-57778"/>
+                  <a:fillRect l="-80" t="-90" r="-23865" b="26"/>
                 </a:stretch>
               </a:blipFill>
             </p:spPr>
@@ -4886,6 +4657,558 @@
           </p:sp>
         </mc:Fallback>
       </mc:AlternateContent>
+    </p:spTree>
+  </p:cSld>
+  <p:clrMapOvr>
+    <a:masterClrMapping/>
+  </p:clrMapOvr>
+</p:sld>
+</file>
+
+<file path=ppt/slides/slide10.xml><?xml version="1.0" encoding="utf-8"?>
+<p:sld xmlns:a="http://schemas.openxmlformats.org/drawingml/2006/main" xmlns:r="http://schemas.openxmlformats.org/officeDocument/2006/relationships" xmlns:p="http://schemas.openxmlformats.org/presentationml/2006/main">
+  <p:cSld>
+    <p:spTree>
+      <p:nvGrpSpPr>
+        <p:cNvPr id="1" name=""/>
+        <p:cNvGrpSpPr/>
+        <p:nvPr/>
+      </p:nvGrpSpPr>
+      <p:grpSpPr>
+        <a:xfrm>
+          <a:off x="0" y="0"/>
+          <a:ext cx="0" cy="0"/>
+          <a:chOff x="0" y="0"/>
+          <a:chExt cx="0" cy="0"/>
+        </a:xfrm>
+      </p:grpSpPr>
+      <p:grpSp>
+        <p:nvGrpSpPr>
+          <p:cNvPr id="8" name="组合 7"/>
+          <p:cNvGrpSpPr/>
+          <p:nvPr/>
+        </p:nvGrpSpPr>
+        <p:grpSpPr>
+          <a:xfrm>
+            <a:off x="5190822" y="2135646"/>
+            <a:ext cx="1909101" cy="3663737"/>
+            <a:chOff x="5190822" y="2135646"/>
+            <a:chExt cx="1909101" cy="3663737"/>
+          </a:xfrm>
+        </p:grpSpPr>
+        <p:cxnSp>
+          <p:nvCxnSpPr>
+            <p:cNvPr id="6" name="直接连接符 5"/>
+            <p:cNvCxnSpPr/>
+            <p:nvPr/>
+          </p:nvCxnSpPr>
+          <p:spPr>
+            <a:xfrm>
+              <a:off x="5557485" y="3099138"/>
+              <a:ext cx="0" cy="2520000"/>
+            </a:xfrm>
+            <a:prstGeom prst="line">
+              <a:avLst/>
+            </a:prstGeom>
+            <a:ln w="25400">
+              <a:solidFill>
+                <a:schemeClr val="tx1"/>
+              </a:solidFill>
+            </a:ln>
+          </p:spPr>
+          <p:style>
+            <a:lnRef idx="1">
+              <a:schemeClr val="accent1"/>
+            </a:lnRef>
+            <a:fillRef idx="0">
+              <a:schemeClr val="accent1"/>
+            </a:fillRef>
+            <a:effectRef idx="0">
+              <a:schemeClr val="accent1"/>
+            </a:effectRef>
+            <a:fontRef idx="minor">
+              <a:schemeClr val="tx1"/>
+            </a:fontRef>
+          </p:style>
+        </p:cxnSp>
+        <p:cxnSp>
+          <p:nvCxnSpPr>
+            <p:cNvPr id="7" name="直接连接符 6"/>
+            <p:cNvCxnSpPr/>
+            <p:nvPr/>
+          </p:nvCxnSpPr>
+          <p:spPr>
+            <a:xfrm>
+              <a:off x="6635536" y="2379138"/>
+              <a:ext cx="0" cy="2520000"/>
+            </a:xfrm>
+            <a:prstGeom prst="line">
+              <a:avLst/>
+            </a:prstGeom>
+            <a:ln w="25400">
+              <a:solidFill>
+                <a:schemeClr val="tx1"/>
+              </a:solidFill>
+            </a:ln>
+          </p:spPr>
+          <p:style>
+            <a:lnRef idx="1">
+              <a:schemeClr val="accent1"/>
+            </a:lnRef>
+            <a:fillRef idx="0">
+              <a:schemeClr val="accent1"/>
+            </a:fillRef>
+            <a:effectRef idx="0">
+              <a:schemeClr val="accent1"/>
+            </a:effectRef>
+            <a:fontRef idx="minor">
+              <a:schemeClr val="tx1"/>
+            </a:fontRef>
+          </p:style>
+        </p:cxnSp>
+        <p:cxnSp>
+          <p:nvCxnSpPr>
+            <p:cNvPr id="9" name="直接连接符 8"/>
+            <p:cNvCxnSpPr/>
+            <p:nvPr/>
+          </p:nvCxnSpPr>
+          <p:spPr>
+            <a:xfrm flipV="1">
+              <a:off x="5557485" y="4899138"/>
+              <a:ext cx="1079074" cy="720000"/>
+            </a:xfrm>
+            <a:prstGeom prst="line">
+              <a:avLst/>
+            </a:prstGeom>
+            <a:ln w="25400">
+              <a:solidFill>
+                <a:schemeClr val="tx1"/>
+              </a:solidFill>
+            </a:ln>
+          </p:spPr>
+          <p:style>
+            <a:lnRef idx="1">
+              <a:schemeClr val="accent1"/>
+            </a:lnRef>
+            <a:fillRef idx="0">
+              <a:schemeClr val="accent1"/>
+            </a:fillRef>
+            <a:effectRef idx="0">
+              <a:schemeClr val="accent1"/>
+            </a:effectRef>
+            <a:fontRef idx="minor">
+              <a:schemeClr val="tx1"/>
+            </a:fontRef>
+          </p:style>
+        </p:cxnSp>
+        <p:cxnSp>
+          <p:nvCxnSpPr>
+            <p:cNvPr id="12" name="直接连接符 11"/>
+            <p:cNvCxnSpPr/>
+            <p:nvPr/>
+          </p:nvCxnSpPr>
+          <p:spPr>
+            <a:xfrm flipV="1">
+              <a:off x="5557485" y="2379138"/>
+              <a:ext cx="1079074" cy="720000"/>
+            </a:xfrm>
+            <a:prstGeom prst="line">
+              <a:avLst/>
+            </a:prstGeom>
+            <a:ln w="25400">
+              <a:solidFill>
+                <a:schemeClr val="tx1"/>
+              </a:solidFill>
+            </a:ln>
+          </p:spPr>
+          <p:style>
+            <a:lnRef idx="1">
+              <a:schemeClr val="accent1"/>
+            </a:lnRef>
+            <a:fillRef idx="0">
+              <a:schemeClr val="accent1"/>
+            </a:fillRef>
+            <a:effectRef idx="0">
+              <a:schemeClr val="accent1"/>
+            </a:effectRef>
+            <a:fontRef idx="minor">
+              <a:schemeClr val="tx1"/>
+            </a:fontRef>
+          </p:style>
+        </p:cxnSp>
+        <p:cxnSp>
+          <p:nvCxnSpPr>
+            <p:cNvPr id="16" name="直接连接符 15"/>
+            <p:cNvCxnSpPr/>
+            <p:nvPr/>
+          </p:nvCxnSpPr>
+          <p:spPr>
+            <a:xfrm flipH="1" flipV="1">
+              <a:off x="5202104" y="3018442"/>
+              <a:ext cx="360000" cy="90000"/>
+            </a:xfrm>
+            <a:prstGeom prst="line">
+              <a:avLst/>
+            </a:prstGeom>
+            <a:ln w="25400">
+              <a:solidFill>
+                <a:schemeClr val="tx1"/>
+              </a:solidFill>
+            </a:ln>
+          </p:spPr>
+          <p:style>
+            <a:lnRef idx="1">
+              <a:schemeClr val="accent1"/>
+            </a:lnRef>
+            <a:fillRef idx="0">
+              <a:schemeClr val="accent1"/>
+            </a:fillRef>
+            <a:effectRef idx="0">
+              <a:schemeClr val="accent1"/>
+            </a:effectRef>
+            <a:fontRef idx="minor">
+              <a:schemeClr val="tx1"/>
+            </a:fontRef>
+          </p:style>
+        </p:cxnSp>
+        <p:cxnSp>
+          <p:nvCxnSpPr>
+            <p:cNvPr id="17" name="直接连接符 16"/>
+            <p:cNvCxnSpPr/>
+            <p:nvPr/>
+          </p:nvCxnSpPr>
+          <p:spPr>
+            <a:xfrm flipH="1" flipV="1">
+              <a:off x="6274514" y="2289138"/>
+              <a:ext cx="360000" cy="90000"/>
+            </a:xfrm>
+            <a:prstGeom prst="line">
+              <a:avLst/>
+            </a:prstGeom>
+            <a:ln w="25400">
+              <a:solidFill>
+                <a:schemeClr val="tx1"/>
+              </a:solidFill>
+            </a:ln>
+          </p:spPr>
+          <p:style>
+            <a:lnRef idx="1">
+              <a:schemeClr val="accent1"/>
+            </a:lnRef>
+            <a:fillRef idx="0">
+              <a:schemeClr val="accent1"/>
+            </a:fillRef>
+            <a:effectRef idx="0">
+              <a:schemeClr val="accent1"/>
+            </a:effectRef>
+            <a:fontRef idx="minor">
+              <a:schemeClr val="tx1"/>
+            </a:fontRef>
+          </p:style>
+        </p:cxnSp>
+        <p:cxnSp>
+          <p:nvCxnSpPr>
+            <p:cNvPr id="18" name="直接连接符 17"/>
+            <p:cNvCxnSpPr/>
+            <p:nvPr/>
+          </p:nvCxnSpPr>
+          <p:spPr>
+            <a:xfrm flipH="1" flipV="1">
+              <a:off x="5190822" y="5510530"/>
+              <a:ext cx="360000" cy="90000"/>
+            </a:xfrm>
+            <a:prstGeom prst="line">
+              <a:avLst/>
+            </a:prstGeom>
+            <a:ln w="25400">
+              <a:solidFill>
+                <a:schemeClr val="tx1"/>
+              </a:solidFill>
+            </a:ln>
+          </p:spPr>
+          <p:style>
+            <a:lnRef idx="1">
+              <a:schemeClr val="accent1"/>
+            </a:lnRef>
+            <a:fillRef idx="0">
+              <a:schemeClr val="accent1"/>
+            </a:fillRef>
+            <a:effectRef idx="0">
+              <a:schemeClr val="accent1"/>
+            </a:effectRef>
+            <a:fontRef idx="minor">
+              <a:schemeClr val="tx1"/>
+            </a:fontRef>
+          </p:style>
+        </p:cxnSp>
+        <p:cxnSp>
+          <p:nvCxnSpPr>
+            <p:cNvPr id="20" name="直接连接符 19"/>
+            <p:cNvCxnSpPr/>
+            <p:nvPr/>
+          </p:nvCxnSpPr>
+          <p:spPr>
+            <a:xfrm>
+              <a:off x="5202104" y="2990530"/>
+              <a:ext cx="0" cy="2520000"/>
+            </a:xfrm>
+            <a:prstGeom prst="line">
+              <a:avLst/>
+            </a:prstGeom>
+            <a:ln w="25400">
+              <a:solidFill>
+                <a:schemeClr val="tx1"/>
+              </a:solidFill>
+            </a:ln>
+          </p:spPr>
+          <p:style>
+            <a:lnRef idx="1">
+              <a:schemeClr val="accent1"/>
+            </a:lnRef>
+            <a:fillRef idx="0">
+              <a:schemeClr val="accent1"/>
+            </a:fillRef>
+            <a:effectRef idx="0">
+              <a:schemeClr val="accent1"/>
+            </a:effectRef>
+            <a:fontRef idx="minor">
+              <a:schemeClr val="tx1"/>
+            </a:fontRef>
+          </p:style>
+        </p:cxnSp>
+        <p:cxnSp>
+          <p:nvCxnSpPr>
+            <p:cNvPr id="21" name="直接连接符 20"/>
+            <p:cNvCxnSpPr/>
+            <p:nvPr/>
+          </p:nvCxnSpPr>
+          <p:spPr>
+            <a:xfrm flipV="1">
+              <a:off x="5193395" y="2298442"/>
+              <a:ext cx="1079074" cy="720000"/>
+            </a:xfrm>
+            <a:prstGeom prst="line">
+              <a:avLst/>
+            </a:prstGeom>
+            <a:ln w="25400">
+              <a:solidFill>
+                <a:schemeClr val="tx1"/>
+              </a:solidFill>
+            </a:ln>
+          </p:spPr>
+          <p:style>
+            <a:lnRef idx="1">
+              <a:schemeClr val="accent1"/>
+            </a:lnRef>
+            <a:fillRef idx="0">
+              <a:schemeClr val="accent1"/>
+            </a:fillRef>
+            <a:effectRef idx="0">
+              <a:schemeClr val="accent1"/>
+            </a:effectRef>
+            <a:fontRef idx="minor">
+              <a:schemeClr val="tx1"/>
+            </a:fontRef>
+          </p:style>
+        </p:cxnSp>
+        <p:cxnSp>
+          <p:nvCxnSpPr>
+            <p:cNvPr id="25" name="直接箭头连接符 24"/>
+            <p:cNvCxnSpPr/>
+            <p:nvPr/>
+          </p:nvCxnSpPr>
+          <p:spPr>
+            <a:xfrm>
+              <a:off x="6096000" y="4050030"/>
+              <a:ext cx="992265" cy="265477"/>
+            </a:xfrm>
+            <a:prstGeom prst="straightConnector1">
+              <a:avLst/>
+            </a:prstGeom>
+            <a:ln w="25400">
+              <a:solidFill>
+                <a:schemeClr val="tx1"/>
+              </a:solidFill>
+              <a:tailEnd type="triangle"/>
+            </a:ln>
+          </p:spPr>
+          <p:style>
+            <a:lnRef idx="1">
+              <a:schemeClr val="accent1"/>
+            </a:lnRef>
+            <a:fillRef idx="0">
+              <a:schemeClr val="accent1"/>
+            </a:fillRef>
+            <a:effectRef idx="0">
+              <a:schemeClr val="accent1"/>
+            </a:effectRef>
+            <a:fontRef idx="minor">
+              <a:schemeClr val="tx1"/>
+            </a:fontRef>
+          </p:style>
+        </p:cxnSp>
+        <p:cxnSp>
+          <p:nvCxnSpPr>
+            <p:cNvPr id="29" name="直接连接符 28"/>
+            <p:cNvCxnSpPr/>
+            <p:nvPr/>
+          </p:nvCxnSpPr>
+          <p:spPr>
+            <a:xfrm>
+              <a:off x="6096000" y="2135646"/>
+              <a:ext cx="0" cy="3663737"/>
+            </a:xfrm>
+            <a:prstGeom prst="line">
+              <a:avLst/>
+            </a:prstGeom>
+            <a:ln w="25400">
+              <a:solidFill>
+                <a:srgbClr val="FF0000"/>
+              </a:solidFill>
+              <a:prstDash val="dash"/>
+            </a:ln>
+          </p:spPr>
+          <p:style>
+            <a:lnRef idx="1">
+              <a:schemeClr val="accent1"/>
+            </a:lnRef>
+            <a:fillRef idx="0">
+              <a:schemeClr val="accent1"/>
+            </a:fillRef>
+            <a:effectRef idx="0">
+              <a:schemeClr val="accent1"/>
+            </a:effectRef>
+            <a:fontRef idx="minor">
+              <a:schemeClr val="tx1"/>
+            </a:fontRef>
+          </p:style>
+        </p:cxnSp>
+        <mc:AlternateContent xmlns:mc="http://schemas.openxmlformats.org/markup-compatibility/2006">
+          <mc:Choice xmlns:a14="http://schemas.microsoft.com/office/drawing/2010/main" Requires="a14">
+            <p:sp>
+              <p:nvSpPr>
+                <p:cNvPr id="32" name="文本框 31"/>
+                <p:cNvSpPr txBox="1"/>
+                <p:nvPr/>
+              </p:nvSpPr>
+              <p:spPr>
+                <a:xfrm>
+                  <a:off x="6688228" y="3896459"/>
+                  <a:ext cx="262059" cy="553998"/>
+                </a:xfrm>
+                <a:prstGeom prst="rect">
+                  <a:avLst/>
+                </a:prstGeom>
+                <a:noFill/>
+              </p:spPr>
+              <p:txBody>
+                <a:bodyPr wrap="none" lIns="0" tIns="0" rIns="0" bIns="0" rtlCol="0">
+                  <a:spAutoFit/>
+                </a:bodyPr>
+                <a:lstStyle/>
+                <a:p>
+                  <a14:m>
+                    <m:oMathPara xmlns:m="http://schemas.openxmlformats.org/officeDocument/2006/math">
+                      <m:oMathParaPr>
+                        <m:jc m:val="centerGroup"/>
+                      </m:oMathParaPr>
+                      <m:oMath xmlns:m="http://schemas.openxmlformats.org/officeDocument/2006/math">
+                        <m:r>
+                          <a:rPr lang="en-US" altLang="zh-CN" b="0" i="1" smtClean="0">
+                            <a:latin typeface="Cambria Math" panose="02040503050406030204" pitchFamily="18" charset="0"/>
+                          </a:rPr>
+                          <m:t>𝐤</m:t>
+                        </m:r>
+                      </m:oMath>
+                    </m:oMathPara>
+                  </a14:m>
+                  <a:endParaRPr lang="en-US" altLang="zh-CN" b="0" dirty="0"/>
+                </a:p>
+                <a:p>
+                  <a:endParaRPr lang="zh-CN" altLang="en-US" dirty="0"/>
+                </a:p>
+              </p:txBody>
+            </p:sp>
+          </mc:Choice>
+          <mc:Fallback>
+            <p:sp>
+              <p:nvSpPr>
+                <p:cNvPr id="32" name="文本框 31"/>
+                <p:cNvSpPr txBox="1">
+                  <a:spLocks noRot="1" noChangeAspect="1" noMove="1" noResize="1" noEditPoints="1" noAdjustHandles="1" noChangeArrowheads="1" noChangeShapeType="1" noTextEdit="1"/>
+                </p:cNvSpPr>
+                <p:nvPr/>
+              </p:nvSpPr>
+              <p:spPr>
+                <a:xfrm>
+                  <a:off x="6688228" y="3896459"/>
+                  <a:ext cx="262059" cy="553998"/>
+                </a:xfrm>
+                <a:prstGeom prst="rect">
+                  <a:avLst/>
+                </a:prstGeom>
+                <a:blipFill rotWithShape="1">
+                  <a:blip r:embed="rId1"/>
+                </a:blipFill>
+              </p:spPr>
+              <p:txBody>
+                <a:bodyPr/>
+                <a:lstStyle/>
+                <a:p>
+                  <a:r>
+                    <a:rPr lang="zh-CN" altLang="en-US">
+                      <a:noFill/>
+                    </a:rPr>
+                    <a:t> </a:t>
+                  </a:r>
+                </a:p>
+              </p:txBody>
+            </p:sp>
+          </mc:Fallback>
+        </mc:AlternateContent>
+        <p:sp>
+          <p:nvSpPr>
+            <p:cNvPr id="33" name="文本框 32"/>
+            <p:cNvSpPr txBox="1"/>
+            <p:nvPr/>
+          </p:nvSpPr>
+          <p:spPr>
+            <a:xfrm>
+              <a:off x="6173197" y="5370864"/>
+              <a:ext cx="926726" cy="369332"/>
+            </a:xfrm>
+            <a:prstGeom prst="rect">
+              <a:avLst/>
+            </a:prstGeom>
+            <a:noFill/>
+          </p:spPr>
+          <p:txBody>
+            <a:bodyPr wrap="square" rtlCol="0">
+              <a:spAutoFit/>
+            </a:bodyPr>
+            <a:lstStyle/>
+            <a:p>
+              <a:r>
+                <a:rPr lang="zh-CN" altLang="en-US" dirty="0">
+                  <a:solidFill>
+                    <a:srgbClr val="FF0000"/>
+                  </a:solidFill>
+                  <a:latin typeface="楷体" panose="02010609060101010101" pitchFamily="49" charset="-122"/>
+                  <a:ea typeface="楷体" panose="02010609060101010101" pitchFamily="49" charset="-122"/>
+                </a:rPr>
+                <a:t>光轴</a:t>
+              </a:r>
+              <a:endParaRPr lang="en-US" altLang="zh-CN" dirty="0">
+                <a:solidFill>
+                  <a:srgbClr val="FF0000"/>
+                </a:solidFill>
+                <a:latin typeface="楷体" panose="02010609060101010101" pitchFamily="49" charset="-122"/>
+                <a:ea typeface="楷体" panose="02010609060101010101" pitchFamily="49" charset="-122"/>
+              </a:endParaRPr>
+            </a:p>
+          </p:txBody>
+        </p:sp>
+      </p:grpSp>
     </p:spTree>
   </p:cSld>
   <p:clrMapOvr>
@@ -4913,16 +5236,8 @@
       </p:grpSpPr>
       <p:grpSp>
         <p:nvGrpSpPr>
-          <p:cNvPr id="5" name="Group 5">
-            <a:extLst>
-              <a:ext uri="{FF2B5EF4-FFF2-40B4-BE49-F238E27FC236}">
-                <a16:creationId xmlns:a16="http://schemas.microsoft.com/office/drawing/2014/main" id="{6A39FA14-9923-55CE-84A1-8B3DDF4A61BF}"/>
-              </a:ext>
-            </a:extLst>
-          </p:cNvPr>
-          <p:cNvGrpSpPr>
-            <a:grpSpLocks/>
-          </p:cNvGrpSpPr>
+          <p:cNvPr id="5" name="Group 5"/>
+          <p:cNvGrpSpPr/>
           <p:nvPr/>
         </p:nvGrpSpPr>
         <p:grpSpPr bwMode="auto">
@@ -4935,13 +5250,7 @@
         </p:grpSpPr>
         <p:sp>
           <p:nvSpPr>
-            <p:cNvPr id="35" name="Line 6">
-              <a:extLst>
-                <a:ext uri="{FF2B5EF4-FFF2-40B4-BE49-F238E27FC236}">
-                  <a16:creationId xmlns:a16="http://schemas.microsoft.com/office/drawing/2014/main" id="{AA3534C5-4504-D858-BA23-579454E17E59}"/>
-                </a:ext>
-              </a:extLst>
-            </p:cNvPr>
+            <p:cNvPr id="35" name="Line 6"/>
             <p:cNvSpPr>
               <a:spLocks noChangeShapeType="1"/>
             </p:cNvSpPr>
@@ -4962,7 +5271,6 @@
               </a:solidFill>
               <a:round/>
               <a:headEnd type="stealth" w="sm" len="lg"/>
-              <a:tailEnd/>
             </a:ln>
             <a:extLst>
               <a:ext uri="{909E8E84-426E-40DD-AFC4-6F175D3DCCD1}">
@@ -4982,13 +5290,7 @@
         </p:sp>
         <p:sp>
           <p:nvSpPr>
-            <p:cNvPr id="36" name="Line 7">
-              <a:extLst>
-                <a:ext uri="{FF2B5EF4-FFF2-40B4-BE49-F238E27FC236}">
-                  <a16:creationId xmlns:a16="http://schemas.microsoft.com/office/drawing/2014/main" id="{B5FE78FA-9B12-7339-B550-F9E764F6666C}"/>
-                </a:ext>
-              </a:extLst>
-            </p:cNvPr>
+            <p:cNvPr id="36" name="Line 7"/>
             <p:cNvSpPr>
               <a:spLocks noChangeShapeType="1"/>
             </p:cNvSpPr>
@@ -5009,7 +5311,6 @@
               </a:solidFill>
               <a:round/>
               <a:headEnd type="stealth" w="sm" len="lg"/>
-              <a:tailEnd/>
             </a:ln>
             <a:extLst>
               <a:ext uri="{909E8E84-426E-40DD-AFC4-6F175D3DCCD1}">
@@ -5030,16 +5331,8 @@
       </p:grpSp>
       <p:grpSp>
         <p:nvGrpSpPr>
-          <p:cNvPr id="6" name="Group 8">
-            <a:extLst>
-              <a:ext uri="{FF2B5EF4-FFF2-40B4-BE49-F238E27FC236}">
-                <a16:creationId xmlns:a16="http://schemas.microsoft.com/office/drawing/2014/main" id="{67C7066B-A683-5558-1D8E-68209D75122C}"/>
-              </a:ext>
-            </a:extLst>
-          </p:cNvPr>
-          <p:cNvGrpSpPr>
-            <a:grpSpLocks/>
-          </p:cNvGrpSpPr>
+          <p:cNvPr id="6" name="Group 8"/>
+          <p:cNvGrpSpPr/>
           <p:nvPr/>
         </p:nvGrpSpPr>
         <p:grpSpPr bwMode="auto">
@@ -5052,13 +5345,7 @@
         </p:grpSpPr>
         <p:sp>
           <p:nvSpPr>
-            <p:cNvPr id="33" name="Line 9">
-              <a:extLst>
-                <a:ext uri="{FF2B5EF4-FFF2-40B4-BE49-F238E27FC236}">
-                  <a16:creationId xmlns:a16="http://schemas.microsoft.com/office/drawing/2014/main" id="{ACD44285-2915-AF1E-BDFA-F7EB8DF485B9}"/>
-                </a:ext>
-              </a:extLst>
-            </p:cNvPr>
+            <p:cNvPr id="33" name="Line 9"/>
             <p:cNvSpPr>
               <a:spLocks noChangeShapeType="1"/>
             </p:cNvSpPr>
@@ -5079,7 +5366,6 @@
               </a:solidFill>
               <a:round/>
               <a:headEnd type="stealth" w="sm" len="lg"/>
-              <a:tailEnd/>
             </a:ln>
             <a:extLst>
               <a:ext uri="{909E8E84-426E-40DD-AFC4-6F175D3DCCD1}">
@@ -5099,13 +5385,7 @@
         </p:sp>
         <p:sp>
           <p:nvSpPr>
-            <p:cNvPr id="34" name="Line 10">
-              <a:extLst>
-                <a:ext uri="{FF2B5EF4-FFF2-40B4-BE49-F238E27FC236}">
-                  <a16:creationId xmlns:a16="http://schemas.microsoft.com/office/drawing/2014/main" id="{FDEFC458-1295-7663-BFD3-D1CFA5DF6C1C}"/>
-                </a:ext>
-              </a:extLst>
-            </p:cNvPr>
+            <p:cNvPr id="34" name="Line 10"/>
             <p:cNvSpPr>
               <a:spLocks noChangeShapeType="1"/>
             </p:cNvSpPr>
@@ -5126,7 +5406,6 @@
               </a:solidFill>
               <a:round/>
               <a:headEnd type="stealth" w="sm" len="lg"/>
-              <a:tailEnd/>
             </a:ln>
             <a:extLst>
               <a:ext uri="{909E8E84-426E-40DD-AFC4-6F175D3DCCD1}">
@@ -5147,16 +5426,8 @@
       </p:grpSp>
       <p:grpSp>
         <p:nvGrpSpPr>
-          <p:cNvPr id="7" name="Group 11">
-            <a:extLst>
-              <a:ext uri="{FF2B5EF4-FFF2-40B4-BE49-F238E27FC236}">
-                <a16:creationId xmlns:a16="http://schemas.microsoft.com/office/drawing/2014/main" id="{2678DE2D-C855-E906-E08B-15AA852CFAF8}"/>
-              </a:ext>
-            </a:extLst>
-          </p:cNvPr>
-          <p:cNvGrpSpPr>
-            <a:grpSpLocks/>
-          </p:cNvGrpSpPr>
+          <p:cNvPr id="7" name="Group 11"/>
+          <p:cNvGrpSpPr/>
           <p:nvPr/>
         </p:nvGrpSpPr>
         <p:grpSpPr bwMode="auto">
@@ -5169,13 +5440,7 @@
         </p:grpSpPr>
         <p:sp>
           <p:nvSpPr>
-            <p:cNvPr id="31" name="Line 12">
-              <a:extLst>
-                <a:ext uri="{FF2B5EF4-FFF2-40B4-BE49-F238E27FC236}">
-                  <a16:creationId xmlns:a16="http://schemas.microsoft.com/office/drawing/2014/main" id="{003B18C5-EDAE-C3FB-918B-92762A8B6BA6}"/>
-                </a:ext>
-              </a:extLst>
-            </p:cNvPr>
+            <p:cNvPr id="31" name="Line 12"/>
             <p:cNvSpPr>
               <a:spLocks noChangeShapeType="1"/>
             </p:cNvSpPr>
@@ -5196,7 +5461,6 @@
               </a:solidFill>
               <a:round/>
               <a:headEnd type="stealth" w="sm" len="lg"/>
-              <a:tailEnd/>
             </a:ln>
             <a:extLst>
               <a:ext uri="{909E8E84-426E-40DD-AFC4-6F175D3DCCD1}">
@@ -5216,13 +5480,7 @@
         </p:sp>
         <p:sp>
           <p:nvSpPr>
-            <p:cNvPr id="32" name="Line 13">
-              <a:extLst>
-                <a:ext uri="{FF2B5EF4-FFF2-40B4-BE49-F238E27FC236}">
-                  <a16:creationId xmlns:a16="http://schemas.microsoft.com/office/drawing/2014/main" id="{A7E6C7ED-77FF-B6F3-6E76-DF75C3B96642}"/>
-                </a:ext>
-              </a:extLst>
-            </p:cNvPr>
+            <p:cNvPr id="32" name="Line 13"/>
             <p:cNvSpPr>
               <a:spLocks noChangeShapeType="1"/>
             </p:cNvSpPr>
@@ -5243,7 +5501,6 @@
               </a:solidFill>
               <a:round/>
               <a:headEnd type="stealth" w="sm" len="lg"/>
-              <a:tailEnd/>
             </a:ln>
             <a:extLst>
               <a:ext uri="{909E8E84-426E-40DD-AFC4-6F175D3DCCD1}">
@@ -5264,16 +5521,8 @@
       </p:grpSp>
       <p:grpSp>
         <p:nvGrpSpPr>
-          <p:cNvPr id="8" name="Group 14">
-            <a:extLst>
-              <a:ext uri="{FF2B5EF4-FFF2-40B4-BE49-F238E27FC236}">
-                <a16:creationId xmlns:a16="http://schemas.microsoft.com/office/drawing/2014/main" id="{43444BEA-50D5-5994-63DE-B67EFAD0CAB2}"/>
-              </a:ext>
-            </a:extLst>
-          </p:cNvPr>
-          <p:cNvGrpSpPr>
-            <a:grpSpLocks/>
-          </p:cNvGrpSpPr>
+          <p:cNvPr id="8" name="Group 14"/>
+          <p:cNvGrpSpPr/>
           <p:nvPr/>
         </p:nvGrpSpPr>
         <p:grpSpPr bwMode="auto">
@@ -5286,13 +5535,7 @@
         </p:grpSpPr>
         <p:sp>
           <p:nvSpPr>
-            <p:cNvPr id="29" name="Line 15">
-              <a:extLst>
-                <a:ext uri="{FF2B5EF4-FFF2-40B4-BE49-F238E27FC236}">
-                  <a16:creationId xmlns:a16="http://schemas.microsoft.com/office/drawing/2014/main" id="{44CCE168-79E3-1DF2-09F5-63ECFA1873E8}"/>
-                </a:ext>
-              </a:extLst>
-            </p:cNvPr>
+            <p:cNvPr id="29" name="Line 15"/>
             <p:cNvSpPr>
               <a:spLocks noChangeShapeType="1"/>
             </p:cNvSpPr>
@@ -5313,7 +5556,6 @@
               </a:solidFill>
               <a:round/>
               <a:headEnd type="stealth" w="sm" len="lg"/>
-              <a:tailEnd/>
             </a:ln>
             <a:extLst>
               <a:ext uri="{909E8E84-426E-40DD-AFC4-6F175D3DCCD1}">
@@ -5333,13 +5575,7 @@
         </p:sp>
         <p:sp>
           <p:nvSpPr>
-            <p:cNvPr id="30" name="Line 16">
-              <a:extLst>
-                <a:ext uri="{FF2B5EF4-FFF2-40B4-BE49-F238E27FC236}">
-                  <a16:creationId xmlns:a16="http://schemas.microsoft.com/office/drawing/2014/main" id="{6DFB76F0-894A-003A-2931-287FAFCA9A8B}"/>
-                </a:ext>
-              </a:extLst>
-            </p:cNvPr>
+            <p:cNvPr id="30" name="Line 16"/>
             <p:cNvSpPr>
               <a:spLocks noChangeShapeType="1"/>
             </p:cNvSpPr>
@@ -5360,7 +5596,6 @@
               </a:solidFill>
               <a:round/>
               <a:headEnd type="stealth" w="sm" len="lg"/>
-              <a:tailEnd/>
             </a:ln>
             <a:extLst>
               <a:ext uri="{909E8E84-426E-40DD-AFC4-6F175D3DCCD1}">
@@ -5381,13 +5616,7 @@
       </p:grpSp>
       <p:sp>
         <p:nvSpPr>
-          <p:cNvPr id="9" name="Line 17">
-            <a:extLst>
-              <a:ext uri="{FF2B5EF4-FFF2-40B4-BE49-F238E27FC236}">
-                <a16:creationId xmlns:a16="http://schemas.microsoft.com/office/drawing/2014/main" id="{C4FAF7CF-FB09-46B2-1E44-C0AC4AB47E67}"/>
-              </a:ext>
-            </a:extLst>
-          </p:cNvPr>
+          <p:cNvPr id="9" name="Line 17"/>
           <p:cNvSpPr>
             <a:spLocks noChangeShapeType="1"/>
           </p:cNvSpPr>
@@ -5407,8 +5636,6 @@
               <a:schemeClr val="tx1"/>
             </a:solidFill>
             <a:round/>
-            <a:headEnd/>
-            <a:tailEnd/>
           </a:ln>
           <a:extLst>
             <a:ext uri="{909E8E84-426E-40DD-AFC4-6F175D3DCCD1}">
@@ -5428,13 +5655,7 @@
       </p:sp>
       <p:sp>
         <p:nvSpPr>
-          <p:cNvPr id="10" name="Line 18">
-            <a:extLst>
-              <a:ext uri="{FF2B5EF4-FFF2-40B4-BE49-F238E27FC236}">
-                <a16:creationId xmlns:a16="http://schemas.microsoft.com/office/drawing/2014/main" id="{10EAB954-95B7-E873-9A71-55A4F1FC94C6}"/>
-              </a:ext>
-            </a:extLst>
-          </p:cNvPr>
+          <p:cNvPr id="10" name="Line 18"/>
           <p:cNvSpPr>
             <a:spLocks noChangeShapeType="1"/>
           </p:cNvSpPr>
@@ -5454,8 +5675,6 @@
               <a:schemeClr val="tx1"/>
             </a:solidFill>
             <a:round/>
-            <a:headEnd/>
-            <a:tailEnd/>
           </a:ln>
           <a:extLst>
             <a:ext uri="{909E8E84-426E-40DD-AFC4-6F175D3DCCD1}">
@@ -5475,13 +5694,7 @@
       </p:sp>
       <p:sp>
         <p:nvSpPr>
-          <p:cNvPr id="11" name="Line 19">
-            <a:extLst>
-              <a:ext uri="{FF2B5EF4-FFF2-40B4-BE49-F238E27FC236}">
-                <a16:creationId xmlns:a16="http://schemas.microsoft.com/office/drawing/2014/main" id="{F53518A5-5A3F-BC5C-6C85-3F27319F657F}"/>
-              </a:ext>
-            </a:extLst>
-          </p:cNvPr>
+          <p:cNvPr id="11" name="Line 19"/>
           <p:cNvSpPr>
             <a:spLocks noChangeShapeType="1"/>
           </p:cNvSpPr>
@@ -5501,8 +5714,6 @@
               <a:schemeClr val="tx1"/>
             </a:solidFill>
             <a:round/>
-            <a:headEnd/>
-            <a:tailEnd/>
           </a:ln>
           <a:extLst>
             <a:ext uri="{909E8E84-426E-40DD-AFC4-6F175D3DCCD1}">
@@ -5522,13 +5733,7 @@
       </p:sp>
       <p:sp>
         <p:nvSpPr>
-          <p:cNvPr id="12" name="Rectangle 20">
-            <a:extLst>
-              <a:ext uri="{FF2B5EF4-FFF2-40B4-BE49-F238E27FC236}">
-                <a16:creationId xmlns:a16="http://schemas.microsoft.com/office/drawing/2014/main" id="{2C5F6171-343F-42A7-0A3D-775BD1474400}"/>
-              </a:ext>
-            </a:extLst>
-          </p:cNvPr>
+          <p:cNvPr id="12" name="Rectangle 20"/>
           <p:cNvSpPr>
             <a:spLocks noChangeArrowheads="1"/>
           </p:cNvSpPr>
@@ -5548,8 +5753,6 @@
               <a:schemeClr val="tx1"/>
             </a:solidFill>
             <a:miter lim="800000"/>
-            <a:headEnd/>
-            <a:tailEnd/>
           </a:ln>
           <a:extLst>
             <a:ext uri="{909E8E84-426E-40DD-AFC4-6F175D3DCCD1}">
@@ -5702,13 +5905,7 @@
       </p:sp>
       <p:sp>
         <p:nvSpPr>
-          <p:cNvPr id="13" name="Rectangle 21">
-            <a:extLst>
-              <a:ext uri="{FF2B5EF4-FFF2-40B4-BE49-F238E27FC236}">
-                <a16:creationId xmlns:a16="http://schemas.microsoft.com/office/drawing/2014/main" id="{33A8E864-061D-C1E3-CC58-C90649C5C05B}"/>
-              </a:ext>
-            </a:extLst>
-          </p:cNvPr>
+          <p:cNvPr id="13" name="Rectangle 21"/>
           <p:cNvSpPr>
             <a:spLocks noChangeArrowheads="1"/>
           </p:cNvSpPr>
@@ -5728,8 +5925,6 @@
               <a:schemeClr val="tx1"/>
             </a:solidFill>
             <a:miter lim="800000"/>
-            <a:headEnd/>
-            <a:tailEnd/>
           </a:ln>
           <a:extLst>
             <a:ext uri="{909E8E84-426E-40DD-AFC4-6F175D3DCCD1}">
@@ -5882,16 +6077,8 @@
       </p:sp>
       <p:sp>
         <p:nvSpPr>
-          <p:cNvPr id="14" name="Freeform 22">
-            <a:extLst>
-              <a:ext uri="{FF2B5EF4-FFF2-40B4-BE49-F238E27FC236}">
-                <a16:creationId xmlns:a16="http://schemas.microsoft.com/office/drawing/2014/main" id="{9B404414-5F52-4E4A-A0E6-747E7D9E0E39}"/>
-              </a:ext>
-            </a:extLst>
-          </p:cNvPr>
-          <p:cNvSpPr>
-            <a:spLocks/>
-          </p:cNvSpPr>
+          <p:cNvPr id="14" name="Freeform 22"/>
+          <p:cNvSpPr/>
           <p:nvPr/>
         </p:nvSpPr>
         <p:spPr bwMode="auto">
@@ -5975,8 +6162,6 @@
               <a:schemeClr val="tx1"/>
             </a:solidFill>
             <a:round/>
-            <a:headEnd/>
-            <a:tailEnd/>
           </a:ln>
           <a:extLst>
             <a:ext uri="{909E8E84-426E-40DD-AFC4-6F175D3DCCD1}">
@@ -6129,13 +6314,7 @@
       </p:sp>
       <p:sp>
         <p:nvSpPr>
-          <p:cNvPr id="15" name="Line 23">
-            <a:extLst>
-              <a:ext uri="{FF2B5EF4-FFF2-40B4-BE49-F238E27FC236}">
-                <a16:creationId xmlns:a16="http://schemas.microsoft.com/office/drawing/2014/main" id="{8AF1244F-0918-2097-9211-2CCECB9D20A3}"/>
-              </a:ext>
-            </a:extLst>
-          </p:cNvPr>
+          <p:cNvPr id="15" name="Line 23"/>
           <p:cNvSpPr>
             <a:spLocks noChangeShapeType="1"/>
           </p:cNvSpPr>
@@ -6155,8 +6334,6 @@
               <a:schemeClr val="tx1"/>
             </a:solidFill>
             <a:round/>
-            <a:headEnd/>
-            <a:tailEnd/>
           </a:ln>
           <a:extLst>
             <a:ext uri="{909E8E84-426E-40DD-AFC4-6F175D3DCCD1}">
@@ -6176,13 +6353,7 @@
       </p:sp>
       <p:sp>
         <p:nvSpPr>
-          <p:cNvPr id="16" name="Line 24">
-            <a:extLst>
-              <a:ext uri="{FF2B5EF4-FFF2-40B4-BE49-F238E27FC236}">
-                <a16:creationId xmlns:a16="http://schemas.microsoft.com/office/drawing/2014/main" id="{9E3BB936-5A8A-0B5C-8750-54CECDB10814}"/>
-              </a:ext>
-            </a:extLst>
-          </p:cNvPr>
+          <p:cNvPr id="16" name="Line 24"/>
           <p:cNvSpPr>
             <a:spLocks noChangeShapeType="1"/>
           </p:cNvSpPr>
@@ -6202,8 +6373,6 @@
               <a:schemeClr val="tx1"/>
             </a:solidFill>
             <a:round/>
-            <a:headEnd/>
-            <a:tailEnd/>
           </a:ln>
           <a:extLst>
             <a:ext uri="{909E8E84-426E-40DD-AFC4-6F175D3DCCD1}">
@@ -6223,13 +6392,7 @@
       </p:sp>
       <p:sp>
         <p:nvSpPr>
-          <p:cNvPr id="17" name="Line 25">
-            <a:extLst>
-              <a:ext uri="{FF2B5EF4-FFF2-40B4-BE49-F238E27FC236}">
-                <a16:creationId xmlns:a16="http://schemas.microsoft.com/office/drawing/2014/main" id="{9CC659FB-41C3-2541-AAA6-18C6CFAD2ABB}"/>
-              </a:ext>
-            </a:extLst>
-          </p:cNvPr>
+          <p:cNvPr id="17" name="Line 25"/>
           <p:cNvSpPr>
             <a:spLocks noChangeShapeType="1"/>
           </p:cNvSpPr>
@@ -6249,8 +6412,6 @@
               <a:schemeClr val="tx1"/>
             </a:solidFill>
             <a:round/>
-            <a:headEnd/>
-            <a:tailEnd/>
           </a:ln>
           <a:extLst>
             <a:ext uri="{909E8E84-426E-40DD-AFC4-6F175D3DCCD1}">
@@ -6270,13 +6431,7 @@
       </p:sp>
       <p:sp>
         <p:nvSpPr>
-          <p:cNvPr id="18" name="Line 26">
-            <a:extLst>
-              <a:ext uri="{FF2B5EF4-FFF2-40B4-BE49-F238E27FC236}">
-                <a16:creationId xmlns:a16="http://schemas.microsoft.com/office/drawing/2014/main" id="{2B9047C1-6574-649F-BEE5-0F83761982A4}"/>
-              </a:ext>
-            </a:extLst>
-          </p:cNvPr>
+          <p:cNvPr id="18" name="Line 26"/>
           <p:cNvSpPr>
             <a:spLocks noChangeShapeType="1"/>
           </p:cNvSpPr>
@@ -6296,8 +6451,6 @@
               <a:schemeClr val="tx1"/>
             </a:solidFill>
             <a:round/>
-            <a:headEnd/>
-            <a:tailEnd/>
           </a:ln>
           <a:extLst>
             <a:ext uri="{909E8E84-426E-40DD-AFC4-6F175D3DCCD1}">
@@ -6317,13 +6470,7 @@
       </p:sp>
       <p:sp>
         <p:nvSpPr>
-          <p:cNvPr id="19" name="Line 27">
-            <a:extLst>
-              <a:ext uri="{FF2B5EF4-FFF2-40B4-BE49-F238E27FC236}">
-                <a16:creationId xmlns:a16="http://schemas.microsoft.com/office/drawing/2014/main" id="{D829D1FC-DC62-7D19-90AE-AF720ECA3BE7}"/>
-              </a:ext>
-            </a:extLst>
-          </p:cNvPr>
+          <p:cNvPr id="19" name="Line 27"/>
           <p:cNvSpPr>
             <a:spLocks noChangeShapeType="1"/>
           </p:cNvSpPr>
@@ -6343,8 +6490,6 @@
               <a:schemeClr val="tx1"/>
             </a:solidFill>
             <a:round/>
-            <a:headEnd/>
-            <a:tailEnd/>
           </a:ln>
           <a:extLst>
             <a:ext uri="{909E8E84-426E-40DD-AFC4-6F175D3DCCD1}">
@@ -6364,16 +6509,8 @@
       </p:sp>
       <p:sp>
         <p:nvSpPr>
-          <p:cNvPr id="20" name="Freeform 28">
-            <a:extLst>
-              <a:ext uri="{FF2B5EF4-FFF2-40B4-BE49-F238E27FC236}">
-                <a16:creationId xmlns:a16="http://schemas.microsoft.com/office/drawing/2014/main" id="{1697E2AD-E734-7870-8CAB-F73F6A0A5F60}"/>
-              </a:ext>
-            </a:extLst>
-          </p:cNvPr>
-          <p:cNvSpPr>
-            <a:spLocks/>
-          </p:cNvSpPr>
+          <p:cNvPr id="20" name="Freeform 28"/>
+          <p:cNvSpPr/>
           <p:nvPr/>
         </p:nvSpPr>
         <p:spPr bwMode="auto">
@@ -6490,8 +6627,6 @@
               <a:schemeClr val="tx1"/>
             </a:solidFill>
             <a:round/>
-            <a:headEnd/>
-            <a:tailEnd/>
           </a:ln>
           <a:extLst>
             <a:ext uri="{909E8E84-426E-40DD-AFC4-6F175D3DCCD1}">
@@ -6644,13 +6779,7 @@
       </p:sp>
       <p:sp>
         <p:nvSpPr>
-          <p:cNvPr id="21" name="Text Box 29">
-            <a:extLst>
-              <a:ext uri="{FF2B5EF4-FFF2-40B4-BE49-F238E27FC236}">
-                <a16:creationId xmlns:a16="http://schemas.microsoft.com/office/drawing/2014/main" id="{337785DC-896F-DA70-1908-E8B84E35BCC9}"/>
-              </a:ext>
-            </a:extLst>
-          </p:cNvPr>
+          <p:cNvPr id="21" name="Text Box 29"/>
           <p:cNvSpPr txBox="1">
             <a:spLocks noChangeArrowheads="1"/>
           </p:cNvSpPr>
@@ -6670,8 +6799,6 @@
               <a:schemeClr val="bg1"/>
             </a:solidFill>
             <a:miter lim="800000"/>
-            <a:headEnd/>
-            <a:tailEnd/>
           </a:ln>
           <a:extLst>
             <a:ext uri="{909E8E84-426E-40DD-AFC4-6F175D3DCCD1}">
@@ -6770,18 +6897,13 @@
               <a:rPr lang="el-GR" altLang="zh-CN" dirty="0"/>
               <a:t>λ</a:t>
             </a:r>
+            <a:endParaRPr lang="el-GR" altLang="zh-CN" dirty="0"/>
           </a:p>
         </p:txBody>
       </p:sp>
       <p:sp>
         <p:nvSpPr>
-          <p:cNvPr id="22" name="Text Box 30">
-            <a:extLst>
-              <a:ext uri="{FF2B5EF4-FFF2-40B4-BE49-F238E27FC236}">
-                <a16:creationId xmlns:a16="http://schemas.microsoft.com/office/drawing/2014/main" id="{0431C266-CF9F-D71E-C88B-F36866C61307}"/>
-              </a:ext>
-            </a:extLst>
-          </p:cNvPr>
+          <p:cNvPr id="22" name="Text Box 30"/>
           <p:cNvSpPr txBox="1">
             <a:spLocks noChangeArrowheads="1"/>
           </p:cNvSpPr>
@@ -6801,8 +6923,6 @@
               <a:schemeClr val="bg1"/>
             </a:solidFill>
             <a:miter lim="800000"/>
-            <a:headEnd/>
-            <a:tailEnd/>
           </a:ln>
           <a:extLst>
             <a:ext uri="{909E8E84-426E-40DD-AFC4-6F175D3DCCD1}">
@@ -6901,18 +7021,13 @@
               <a:rPr lang="el-GR" altLang="zh-CN" dirty="0"/>
               <a:t>λ</a:t>
             </a:r>
+            <a:endParaRPr lang="el-GR" altLang="zh-CN" dirty="0"/>
           </a:p>
         </p:txBody>
       </p:sp>
       <p:sp>
         <p:nvSpPr>
-          <p:cNvPr id="23" name="Text Box 31">
-            <a:extLst>
-              <a:ext uri="{FF2B5EF4-FFF2-40B4-BE49-F238E27FC236}">
-                <a16:creationId xmlns:a16="http://schemas.microsoft.com/office/drawing/2014/main" id="{BF5A8698-A5D0-EDEE-454F-A96811C0314F}"/>
-              </a:ext>
-            </a:extLst>
-          </p:cNvPr>
+          <p:cNvPr id="23" name="Text Box 31"/>
           <p:cNvSpPr txBox="1">
             <a:spLocks noChangeArrowheads="1"/>
           </p:cNvSpPr>
@@ -6932,8 +7047,6 @@
               <a:schemeClr val="bg1"/>
             </a:solidFill>
             <a:miter lim="800000"/>
-            <a:headEnd/>
-            <a:tailEnd/>
           </a:ln>
           <a:extLst>
             <a:ext uri="{909E8E84-426E-40DD-AFC4-6F175D3DCCD1}">
@@ -7032,18 +7145,13 @@
               <a:rPr lang="el-GR" altLang="zh-CN" dirty="0"/>
               <a:t>λ</a:t>
             </a:r>
+            <a:endParaRPr lang="el-GR" altLang="zh-CN" dirty="0"/>
           </a:p>
         </p:txBody>
       </p:sp>
       <p:sp>
         <p:nvSpPr>
-          <p:cNvPr id="24" name="Text Box 32">
-            <a:extLst>
-              <a:ext uri="{FF2B5EF4-FFF2-40B4-BE49-F238E27FC236}">
-                <a16:creationId xmlns:a16="http://schemas.microsoft.com/office/drawing/2014/main" id="{7281B036-E1FD-3A9F-2C3C-18AAAB991926}"/>
-              </a:ext>
-            </a:extLst>
-          </p:cNvPr>
+          <p:cNvPr id="24" name="Text Box 32"/>
           <p:cNvSpPr txBox="1">
             <a:spLocks noChangeArrowheads="1"/>
           </p:cNvSpPr>
@@ -7063,8 +7171,6 @@
               <a:schemeClr val="bg1"/>
             </a:solidFill>
             <a:miter lim="800000"/>
-            <a:headEnd/>
-            <a:tailEnd/>
           </a:ln>
           <a:extLst>
             <a:ext uri="{909E8E84-426E-40DD-AFC4-6F175D3DCCD1}">
@@ -7163,20 +7269,15 @@
               <a:rPr lang="el-GR" altLang="zh-CN" dirty="0"/>
               <a:t>λ</a:t>
             </a:r>
+            <a:endParaRPr lang="el-GR" altLang="zh-CN" dirty="0"/>
           </a:p>
         </p:txBody>
       </p:sp>
-      <mc:AlternateContent xmlns:mc="http://schemas.openxmlformats.org/markup-compatibility/2006" xmlns:a14="http://schemas.microsoft.com/office/drawing/2010/main">
-        <mc:Choice Requires="a14">
+      <mc:AlternateContent xmlns:mc="http://schemas.openxmlformats.org/markup-compatibility/2006">
+        <mc:Choice xmlns:a14="http://schemas.microsoft.com/office/drawing/2010/main" Requires="a14">
           <p:sp>
             <p:nvSpPr>
-              <p:cNvPr id="28" name="Text Box 36">
-                <a:extLst>
-                  <a:ext uri="{FF2B5EF4-FFF2-40B4-BE49-F238E27FC236}">
-                    <a16:creationId xmlns:a16="http://schemas.microsoft.com/office/drawing/2014/main" id="{1E5F7DFA-B27D-C24C-AD76-874B5508C824}"/>
-                  </a:ext>
-                </a:extLst>
-              </p:cNvPr>
+              <p:cNvPr id="28" name="Text Box 36"/>
               <p:cNvSpPr txBox="1">
                 <a:spLocks noChangeArrowheads="1"/>
               </p:cNvSpPr>
@@ -7196,12 +7297,10 @@
                   <a:schemeClr val="bg1"/>
                 </a:solidFill>
                 <a:miter lim="800000"/>
-                <a:headEnd/>
-                <a:tailEnd/>
               </a:ln>
               <a:extLst>
                 <a:ext uri="{909E8E84-426E-40DD-AFC4-6F175D3DCCD1}">
-                  <a14:hiddenFill>
+                  <a14:hiddenFill xmlns:a14="http://schemas.microsoft.com/office/drawing/2010/main">
                     <a:solidFill>
                       <a:srgbClr val="FFFFFF"/>
                     </a:solidFill>
@@ -7292,7 +7391,6 @@
                 </a:lvl9pPr>
               </a:lstStyle>
               <a:p>
-                <a:pPr/>
                 <a14:m>
                   <m:oMathPara xmlns:m="http://schemas.openxmlformats.org/officeDocument/2006/math">
                     <m:oMathParaPr>
@@ -7333,16 +7431,10 @@
             </p:txBody>
           </p:sp>
         </mc:Choice>
-        <mc:Fallback xmlns="">
+        <mc:Fallback>
           <p:sp>
             <p:nvSpPr>
-              <p:cNvPr id="28" name="Text Box 36">
-                <a:extLst>
-                  <a:ext uri="{FF2B5EF4-FFF2-40B4-BE49-F238E27FC236}">
-                    <a16:creationId xmlns:a16="http://schemas.microsoft.com/office/drawing/2014/main" id="{1E5F7DFA-B27D-C24C-AD76-874B5508C824}"/>
-                  </a:ext>
-                </a:extLst>
-              </p:cNvPr>
+              <p:cNvPr id="28" name="Text Box 36"/>
               <p:cNvSpPr txBox="1">
                 <a:spLocks noRot="1" noChangeAspect="1" noMove="1" noResize="1" noEditPoints="1" noAdjustHandles="1" noChangeArrowheads="1" noChangeShapeType="1" noTextEdit="1"/>
               </p:cNvSpPr>
@@ -7356,10 +7448,10 @@
               <a:prstGeom prst="rect">
                 <a:avLst/>
               </a:prstGeom>
-              <a:blipFill>
-                <a:blip r:embed="rId2"/>
+              <a:blipFill rotWithShape="1">
+                <a:blip r:embed="rId1"/>
                 <a:stretch>
-                  <a:fillRect/>
+                  <a:fillRect l="-564" t="-1462" r="-488" b="-1322"/>
                 </a:stretch>
               </a:blipFill>
               <a:ln w="9525">
@@ -7367,8 +7459,6 @@
                   <a:schemeClr val="bg1"/>
                 </a:solidFill>
                 <a:miter lim="800000"/>
-                <a:headEnd/>
-                <a:tailEnd/>
               </a:ln>
               <a:extLst>
                 <a:ext uri="{909E8E84-426E-40DD-AFC4-6F175D3DCCD1}">
@@ -7395,17 +7485,11 @@
           </p:sp>
         </mc:Fallback>
       </mc:AlternateContent>
-      <mc:AlternateContent xmlns:mc="http://schemas.openxmlformats.org/markup-compatibility/2006" xmlns:a14="http://schemas.microsoft.com/office/drawing/2010/main">
-        <mc:Choice Requires="a14">
+      <mc:AlternateContent xmlns:mc="http://schemas.openxmlformats.org/markup-compatibility/2006">
+        <mc:Choice xmlns:a14="http://schemas.microsoft.com/office/drawing/2010/main" Requires="a14">
           <p:sp>
             <p:nvSpPr>
-              <p:cNvPr id="37" name="Text Box 30">
-                <a:extLst>
-                  <a:ext uri="{FF2B5EF4-FFF2-40B4-BE49-F238E27FC236}">
-                    <a16:creationId xmlns:a16="http://schemas.microsoft.com/office/drawing/2014/main" id="{DA5127CC-1F2B-5390-DCB7-44BC0B420BE2}"/>
-                  </a:ext>
-                </a:extLst>
-              </p:cNvPr>
+              <p:cNvPr id="37" name="Text Box 30"/>
               <p:cNvSpPr txBox="1">
                 <a:spLocks noChangeArrowheads="1"/>
               </p:cNvSpPr>
@@ -7425,12 +7509,10 @@
                   <a:schemeClr val="bg1"/>
                 </a:solidFill>
                 <a:miter lim="800000"/>
-                <a:headEnd/>
-                <a:tailEnd/>
               </a:ln>
               <a:extLst>
                 <a:ext uri="{909E8E84-426E-40DD-AFC4-6F175D3DCCD1}">
-                  <a14:hiddenFill>
+                  <a14:hiddenFill xmlns:a14="http://schemas.microsoft.com/office/drawing/2010/main">
                     <a:solidFill>
                       <a:srgbClr val="FFFFFF"/>
                     </a:solidFill>
@@ -7521,7 +7603,6 @@
                 </a:lvl9pPr>
               </a:lstStyle>
               <a:p>
-                <a:pPr/>
                 <a14:m>
                   <m:oMathPara xmlns:m="http://schemas.openxmlformats.org/officeDocument/2006/math">
                     <m:oMathParaPr>
@@ -7542,16 +7623,10 @@
             </p:txBody>
           </p:sp>
         </mc:Choice>
-        <mc:Fallback xmlns="">
+        <mc:Fallback>
           <p:sp>
             <p:nvSpPr>
-              <p:cNvPr id="37" name="Text Box 30">
-                <a:extLst>
-                  <a:ext uri="{FF2B5EF4-FFF2-40B4-BE49-F238E27FC236}">
-                    <a16:creationId xmlns:a16="http://schemas.microsoft.com/office/drawing/2014/main" id="{DA5127CC-1F2B-5390-DCB7-44BC0B420BE2}"/>
-                  </a:ext>
-                </a:extLst>
-              </p:cNvPr>
+              <p:cNvPr id="37" name="Text Box 30"/>
               <p:cNvSpPr txBox="1">
                 <a:spLocks noRot="1" noChangeAspect="1" noMove="1" noResize="1" noEditPoints="1" noAdjustHandles="1" noChangeArrowheads="1" noChangeShapeType="1" noTextEdit="1"/>
               </p:cNvSpPr>
@@ -7565,10 +7640,10 @@
               <a:prstGeom prst="rect">
                 <a:avLst/>
               </a:prstGeom>
-              <a:blipFill>
-                <a:blip r:embed="rId3"/>
+              <a:blipFill rotWithShape="1">
+                <a:blip r:embed="rId2"/>
                 <a:stretch>
-                  <a:fillRect/>
+                  <a:fillRect l="-657" t="-1454" r="-716" b="-1330"/>
                 </a:stretch>
               </a:blipFill>
               <a:ln w="9525">
@@ -7576,8 +7651,6 @@
                   <a:schemeClr val="bg1"/>
                 </a:solidFill>
                 <a:miter lim="800000"/>
-                <a:headEnd/>
-                <a:tailEnd/>
               </a:ln>
               <a:extLst>
                 <a:ext uri="{909E8E84-426E-40DD-AFC4-6F175D3DCCD1}">
@@ -7604,17 +7677,11 @@
           </p:sp>
         </mc:Fallback>
       </mc:AlternateContent>
-      <mc:AlternateContent xmlns:mc="http://schemas.openxmlformats.org/markup-compatibility/2006" xmlns:a14="http://schemas.microsoft.com/office/drawing/2010/main">
-        <mc:Choice Requires="a14">
+      <mc:AlternateContent xmlns:mc="http://schemas.openxmlformats.org/markup-compatibility/2006">
+        <mc:Choice xmlns:a14="http://schemas.microsoft.com/office/drawing/2010/main" Requires="a14">
           <p:sp>
             <p:nvSpPr>
-              <p:cNvPr id="38" name="Text Box 30">
-                <a:extLst>
-                  <a:ext uri="{FF2B5EF4-FFF2-40B4-BE49-F238E27FC236}">
-                    <a16:creationId xmlns:a16="http://schemas.microsoft.com/office/drawing/2014/main" id="{9E95DDA6-2FD9-C572-5B5B-2F6EE1D36AC4}"/>
-                  </a:ext>
-                </a:extLst>
-              </p:cNvPr>
+              <p:cNvPr id="38" name="Text Box 30"/>
               <p:cNvSpPr txBox="1">
                 <a:spLocks noChangeArrowheads="1"/>
               </p:cNvSpPr>
@@ -7634,12 +7701,10 @@
                   <a:schemeClr val="bg1"/>
                 </a:solidFill>
                 <a:miter lim="800000"/>
-                <a:headEnd/>
-                <a:tailEnd/>
               </a:ln>
               <a:extLst>
                 <a:ext uri="{909E8E84-426E-40DD-AFC4-6F175D3DCCD1}">
-                  <a14:hiddenFill>
+                  <a14:hiddenFill xmlns:a14="http://schemas.microsoft.com/office/drawing/2010/main">
                     <a:solidFill>
                       <a:srgbClr val="FFFFFF"/>
                     </a:solidFill>
@@ -7730,7 +7795,6 @@
                 </a:lvl9pPr>
               </a:lstStyle>
               <a:p>
-                <a:pPr/>
                 <a14:m>
                   <m:oMathPara xmlns:m="http://schemas.openxmlformats.org/officeDocument/2006/math">
                     <m:oMathParaPr>
@@ -7751,16 +7815,10 @@
             </p:txBody>
           </p:sp>
         </mc:Choice>
-        <mc:Fallback xmlns="">
+        <mc:Fallback>
           <p:sp>
             <p:nvSpPr>
-              <p:cNvPr id="38" name="Text Box 30">
-                <a:extLst>
-                  <a:ext uri="{FF2B5EF4-FFF2-40B4-BE49-F238E27FC236}">
-                    <a16:creationId xmlns:a16="http://schemas.microsoft.com/office/drawing/2014/main" id="{9E95DDA6-2FD9-C572-5B5B-2F6EE1D36AC4}"/>
-                  </a:ext>
-                </a:extLst>
-              </p:cNvPr>
+              <p:cNvPr id="38" name="Text Box 30"/>
               <p:cNvSpPr txBox="1">
                 <a:spLocks noRot="1" noChangeAspect="1" noMove="1" noResize="1" noEditPoints="1" noAdjustHandles="1" noChangeArrowheads="1" noChangeShapeType="1" noTextEdit="1"/>
               </p:cNvSpPr>
@@ -7774,10 +7832,10 @@
               <a:prstGeom prst="rect">
                 <a:avLst/>
               </a:prstGeom>
-              <a:blipFill>
-                <a:blip r:embed="rId4"/>
+              <a:blipFill rotWithShape="1">
+                <a:blip r:embed="rId2"/>
                 <a:stretch>
-                  <a:fillRect/>
+                  <a:fillRect l="-745" t="-1581" r="-725" b="-1391"/>
                 </a:stretch>
               </a:blipFill>
               <a:ln w="9525">
@@ -7785,8 +7843,6 @@
                   <a:schemeClr val="bg1"/>
                 </a:solidFill>
                 <a:miter lim="800000"/>
-                <a:headEnd/>
-                <a:tailEnd/>
               </a:ln>
               <a:extLst>
                 <a:ext uri="{909E8E84-426E-40DD-AFC4-6F175D3DCCD1}">
@@ -7813,17 +7869,11 @@
           </p:sp>
         </mc:Fallback>
       </mc:AlternateContent>
-      <mc:AlternateContent xmlns:mc="http://schemas.openxmlformats.org/markup-compatibility/2006" xmlns:a14="http://schemas.microsoft.com/office/drawing/2010/main">
-        <mc:Choice Requires="a14">
+      <mc:AlternateContent xmlns:mc="http://schemas.openxmlformats.org/markup-compatibility/2006">
+        <mc:Choice xmlns:a14="http://schemas.microsoft.com/office/drawing/2010/main" Requires="a14">
           <p:sp>
             <p:nvSpPr>
-              <p:cNvPr id="39" name="Text Box 30">
-                <a:extLst>
-                  <a:ext uri="{FF2B5EF4-FFF2-40B4-BE49-F238E27FC236}">
-                    <a16:creationId xmlns:a16="http://schemas.microsoft.com/office/drawing/2014/main" id="{0A959128-7EEE-AE57-DB31-FCF79F646EC5}"/>
-                  </a:ext>
-                </a:extLst>
-              </p:cNvPr>
+              <p:cNvPr id="39" name="Text Box 30"/>
               <p:cNvSpPr txBox="1">
                 <a:spLocks noChangeArrowheads="1"/>
               </p:cNvSpPr>
@@ -7843,12 +7893,10 @@
                   <a:schemeClr val="bg1"/>
                 </a:solidFill>
                 <a:miter lim="800000"/>
-                <a:headEnd/>
-                <a:tailEnd/>
               </a:ln>
               <a:extLst>
                 <a:ext uri="{909E8E84-426E-40DD-AFC4-6F175D3DCCD1}">
-                  <a14:hiddenFill>
+                  <a14:hiddenFill xmlns:a14="http://schemas.microsoft.com/office/drawing/2010/main">
                     <a:solidFill>
                       <a:srgbClr val="FFFFFF"/>
                     </a:solidFill>
@@ -7939,7 +7987,6 @@
                 </a:lvl9pPr>
               </a:lstStyle>
               <a:p>
-                <a:pPr/>
                 <a14:m>
                   <m:oMathPara xmlns:m="http://schemas.openxmlformats.org/officeDocument/2006/math">
                     <m:oMathParaPr>
@@ -7960,16 +8007,10 @@
             </p:txBody>
           </p:sp>
         </mc:Choice>
-        <mc:Fallback xmlns="">
+        <mc:Fallback>
           <p:sp>
             <p:nvSpPr>
-              <p:cNvPr id="39" name="Text Box 30">
-                <a:extLst>
-                  <a:ext uri="{FF2B5EF4-FFF2-40B4-BE49-F238E27FC236}">
-                    <a16:creationId xmlns:a16="http://schemas.microsoft.com/office/drawing/2014/main" id="{0A959128-7EEE-AE57-DB31-FCF79F646EC5}"/>
-                  </a:ext>
-                </a:extLst>
-              </p:cNvPr>
+              <p:cNvPr id="39" name="Text Box 30"/>
               <p:cNvSpPr txBox="1">
                 <a:spLocks noRot="1" noChangeAspect="1" noMove="1" noResize="1" noEditPoints="1" noAdjustHandles="1" noChangeArrowheads="1" noChangeShapeType="1" noTextEdit="1"/>
               </p:cNvSpPr>
@@ -7983,10 +8024,10 @@
               <a:prstGeom prst="rect">
                 <a:avLst/>
               </a:prstGeom>
-              <a:blipFill>
-                <a:blip r:embed="rId5"/>
+              <a:blipFill rotWithShape="1">
+                <a:blip r:embed="rId2"/>
                 <a:stretch>
-                  <a:fillRect/>
+                  <a:fillRect l="-824" t="-1445" r="-647" b="-1340"/>
                 </a:stretch>
               </a:blipFill>
               <a:ln w="9525">
@@ -7994,8 +8035,6 @@
                   <a:schemeClr val="bg1"/>
                 </a:solidFill>
                 <a:miter lim="800000"/>
-                <a:headEnd/>
-                <a:tailEnd/>
               </a:ln>
               <a:extLst>
                 <a:ext uri="{909E8E84-426E-40DD-AFC4-6F175D3DCCD1}">
@@ -8022,17 +8061,11 @@
           </p:sp>
         </mc:Fallback>
       </mc:AlternateContent>
-      <mc:AlternateContent xmlns:mc="http://schemas.openxmlformats.org/markup-compatibility/2006" xmlns:a14="http://schemas.microsoft.com/office/drawing/2010/main">
-        <mc:Choice Requires="a14">
+      <mc:AlternateContent xmlns:mc="http://schemas.openxmlformats.org/markup-compatibility/2006">
+        <mc:Choice xmlns:a14="http://schemas.microsoft.com/office/drawing/2010/main" Requires="a14">
           <p:sp>
             <p:nvSpPr>
-              <p:cNvPr id="40" name="Text Box 30">
-                <a:extLst>
-                  <a:ext uri="{FF2B5EF4-FFF2-40B4-BE49-F238E27FC236}">
-                    <a16:creationId xmlns:a16="http://schemas.microsoft.com/office/drawing/2014/main" id="{3319FB92-7A4E-9AEA-7636-C8152309A4E2}"/>
-                  </a:ext>
-                </a:extLst>
-              </p:cNvPr>
+              <p:cNvPr id="40" name="Text Box 30"/>
               <p:cNvSpPr txBox="1">
                 <a:spLocks noChangeArrowheads="1"/>
               </p:cNvSpPr>
@@ -8052,12 +8085,10 @@
                   <a:schemeClr val="bg1"/>
                 </a:solidFill>
                 <a:miter lim="800000"/>
-                <a:headEnd/>
-                <a:tailEnd/>
               </a:ln>
               <a:extLst>
                 <a:ext uri="{909E8E84-426E-40DD-AFC4-6F175D3DCCD1}">
-                  <a14:hiddenFill>
+                  <a14:hiddenFill xmlns:a14="http://schemas.microsoft.com/office/drawing/2010/main">
                     <a:solidFill>
                       <a:srgbClr val="FFFFFF"/>
                     </a:solidFill>
@@ -8148,7 +8179,6 @@
                 </a:lvl9pPr>
               </a:lstStyle>
               <a:p>
-                <a:pPr/>
                 <a14:m>
                   <m:oMathPara xmlns:m="http://schemas.openxmlformats.org/officeDocument/2006/math">
                     <m:oMathParaPr>
@@ -8169,16 +8199,10 @@
             </p:txBody>
           </p:sp>
         </mc:Choice>
-        <mc:Fallback xmlns="">
+        <mc:Fallback>
           <p:sp>
             <p:nvSpPr>
-              <p:cNvPr id="40" name="Text Box 30">
-                <a:extLst>
-                  <a:ext uri="{FF2B5EF4-FFF2-40B4-BE49-F238E27FC236}">
-                    <a16:creationId xmlns:a16="http://schemas.microsoft.com/office/drawing/2014/main" id="{3319FB92-7A4E-9AEA-7636-C8152309A4E2}"/>
-                  </a:ext>
-                </a:extLst>
-              </p:cNvPr>
+              <p:cNvPr id="40" name="Text Box 30"/>
               <p:cNvSpPr txBox="1">
                 <a:spLocks noRot="1" noChangeAspect="1" noMove="1" noResize="1" noEditPoints="1" noAdjustHandles="1" noChangeArrowheads="1" noChangeShapeType="1" noTextEdit="1"/>
               </p:cNvSpPr>
@@ -8192,10 +8216,10 @@
               <a:prstGeom prst="rect">
                 <a:avLst/>
               </a:prstGeom>
-              <a:blipFill>
-                <a:blip r:embed="rId6"/>
+              <a:blipFill rotWithShape="1">
+                <a:blip r:embed="rId2"/>
                 <a:stretch>
-                  <a:fillRect/>
+                  <a:fillRect l="-815" t="-1425" r="-656" b="-1359"/>
                 </a:stretch>
               </a:blipFill>
               <a:ln w="9525">
@@ -8203,8 +8227,6 @@
                   <a:schemeClr val="bg1"/>
                 </a:solidFill>
                 <a:miter lim="800000"/>
-                <a:headEnd/>
-                <a:tailEnd/>
               </a:ln>
               <a:extLst>
                 <a:ext uri="{909E8E84-426E-40DD-AFC4-6F175D3DCCD1}">
@@ -8231,17 +8253,11 @@
           </p:sp>
         </mc:Fallback>
       </mc:AlternateContent>
-      <mc:AlternateContent xmlns:mc="http://schemas.openxmlformats.org/markup-compatibility/2006" xmlns:a14="http://schemas.microsoft.com/office/drawing/2010/main">
-        <mc:Choice Requires="a14">
+      <mc:AlternateContent xmlns:mc="http://schemas.openxmlformats.org/markup-compatibility/2006">
+        <mc:Choice xmlns:a14="http://schemas.microsoft.com/office/drawing/2010/main" Requires="a14">
           <p:sp>
             <p:nvSpPr>
-              <p:cNvPr id="41" name="Text Box 36">
-                <a:extLst>
-                  <a:ext uri="{FF2B5EF4-FFF2-40B4-BE49-F238E27FC236}">
-                    <a16:creationId xmlns:a16="http://schemas.microsoft.com/office/drawing/2014/main" id="{3CA93047-1EFF-1CBA-8DDA-D012D5B11CA3}"/>
-                  </a:ext>
-                </a:extLst>
-              </p:cNvPr>
+              <p:cNvPr id="41" name="Text Box 36"/>
               <p:cNvSpPr txBox="1">
                 <a:spLocks noChangeArrowheads="1"/>
               </p:cNvSpPr>
@@ -8261,12 +8277,10 @@
                   <a:schemeClr val="bg1"/>
                 </a:solidFill>
                 <a:miter lim="800000"/>
-                <a:headEnd/>
-                <a:tailEnd/>
               </a:ln>
               <a:extLst>
                 <a:ext uri="{909E8E84-426E-40DD-AFC4-6F175D3DCCD1}">
-                  <a14:hiddenFill>
+                  <a14:hiddenFill xmlns:a14="http://schemas.microsoft.com/office/drawing/2010/main">
                     <a:solidFill>
                       <a:srgbClr val="FFFFFF"/>
                     </a:solidFill>
@@ -8357,7 +8371,6 @@
                 </a:lvl9pPr>
               </a:lstStyle>
               <a:p>
-                <a:pPr/>
                 <a14:m>
                   <m:oMathPara xmlns:m="http://schemas.openxmlformats.org/officeDocument/2006/math">
                     <m:oMathParaPr>
@@ -8398,16 +8411,10 @@
             </p:txBody>
           </p:sp>
         </mc:Choice>
-        <mc:Fallback xmlns="">
+        <mc:Fallback>
           <p:sp>
             <p:nvSpPr>
-              <p:cNvPr id="41" name="Text Box 36">
-                <a:extLst>
-                  <a:ext uri="{FF2B5EF4-FFF2-40B4-BE49-F238E27FC236}">
-                    <a16:creationId xmlns:a16="http://schemas.microsoft.com/office/drawing/2014/main" id="{3CA93047-1EFF-1CBA-8DDA-D012D5B11CA3}"/>
-                  </a:ext>
-                </a:extLst>
-              </p:cNvPr>
+              <p:cNvPr id="41" name="Text Box 36"/>
               <p:cNvSpPr txBox="1">
                 <a:spLocks noRot="1" noChangeAspect="1" noMove="1" noResize="1" noEditPoints="1" noAdjustHandles="1" noChangeArrowheads="1" noChangeShapeType="1" noTextEdit="1"/>
               </p:cNvSpPr>
@@ -8421,10 +8428,10 @@
               <a:prstGeom prst="rect">
                 <a:avLst/>
               </a:prstGeom>
-              <a:blipFill>
-                <a:blip r:embed="rId7"/>
+              <a:blipFill rotWithShape="1">
+                <a:blip r:embed="rId1"/>
                 <a:stretch>
-                  <a:fillRect/>
+                  <a:fillRect l="-526" t="-1509" r="-459" b="-1275"/>
                 </a:stretch>
               </a:blipFill>
               <a:ln w="9525">
@@ -8432,8 +8439,6 @@
                   <a:schemeClr val="bg1"/>
                 </a:solidFill>
                 <a:miter lim="800000"/>
-                <a:headEnd/>
-                <a:tailEnd/>
               </a:ln>
               <a:extLst>
                 <a:ext uri="{909E8E84-426E-40DD-AFC4-6F175D3DCCD1}">
@@ -8460,17 +8465,11 @@
           </p:sp>
         </mc:Fallback>
       </mc:AlternateContent>
-      <mc:AlternateContent xmlns:mc="http://schemas.openxmlformats.org/markup-compatibility/2006" xmlns:a14="http://schemas.microsoft.com/office/drawing/2010/main">
-        <mc:Choice Requires="a14">
+      <mc:AlternateContent xmlns:mc="http://schemas.openxmlformats.org/markup-compatibility/2006">
+        <mc:Choice xmlns:a14="http://schemas.microsoft.com/office/drawing/2010/main" Requires="a14">
           <p:sp>
             <p:nvSpPr>
-              <p:cNvPr id="42" name="Text Box 36">
-                <a:extLst>
-                  <a:ext uri="{FF2B5EF4-FFF2-40B4-BE49-F238E27FC236}">
-                    <a16:creationId xmlns:a16="http://schemas.microsoft.com/office/drawing/2014/main" id="{D7C7B028-77D2-35E1-9A22-B9ED04E1AEE5}"/>
-                  </a:ext>
-                </a:extLst>
-              </p:cNvPr>
+              <p:cNvPr id="42" name="Text Box 36"/>
               <p:cNvSpPr txBox="1">
                 <a:spLocks noChangeArrowheads="1"/>
               </p:cNvSpPr>
@@ -8490,12 +8489,10 @@
                   <a:schemeClr val="bg1"/>
                 </a:solidFill>
                 <a:miter lim="800000"/>
-                <a:headEnd/>
-                <a:tailEnd/>
               </a:ln>
               <a:extLst>
                 <a:ext uri="{909E8E84-426E-40DD-AFC4-6F175D3DCCD1}">
-                  <a14:hiddenFill>
+                  <a14:hiddenFill xmlns:a14="http://schemas.microsoft.com/office/drawing/2010/main">
                     <a:solidFill>
                       <a:srgbClr val="FFFFFF"/>
                     </a:solidFill>
@@ -8586,7 +8583,6 @@
                 </a:lvl9pPr>
               </a:lstStyle>
               <a:p>
-                <a:pPr/>
                 <a14:m>
                   <m:oMathPara xmlns:m="http://schemas.openxmlformats.org/officeDocument/2006/math">
                     <m:oMathParaPr>
@@ -8627,16 +8623,10 @@
             </p:txBody>
           </p:sp>
         </mc:Choice>
-        <mc:Fallback xmlns="">
+        <mc:Fallback>
           <p:sp>
             <p:nvSpPr>
-              <p:cNvPr id="42" name="Text Box 36">
-                <a:extLst>
-                  <a:ext uri="{FF2B5EF4-FFF2-40B4-BE49-F238E27FC236}">
-                    <a16:creationId xmlns:a16="http://schemas.microsoft.com/office/drawing/2014/main" id="{D7C7B028-77D2-35E1-9A22-B9ED04E1AEE5}"/>
-                  </a:ext>
-                </a:extLst>
-              </p:cNvPr>
+              <p:cNvPr id="42" name="Text Box 36"/>
               <p:cNvSpPr txBox="1">
                 <a:spLocks noRot="1" noChangeAspect="1" noMove="1" noResize="1" noEditPoints="1" noAdjustHandles="1" noChangeArrowheads="1" noChangeShapeType="1" noTextEdit="1"/>
               </p:cNvSpPr>
@@ -8650,10 +8640,10 @@
               <a:prstGeom prst="rect">
                 <a:avLst/>
               </a:prstGeom>
-              <a:blipFill>
-                <a:blip r:embed="rId8"/>
+              <a:blipFill rotWithShape="1">
+                <a:blip r:embed="rId1"/>
                 <a:stretch>
-                  <a:fillRect/>
+                  <a:fillRect l="-554" t="-1415" r="-499" b="-1369"/>
                 </a:stretch>
               </a:blipFill>
               <a:ln w="9525">
@@ -8661,8 +8651,6 @@
                   <a:schemeClr val="bg1"/>
                 </a:solidFill>
                 <a:miter lim="800000"/>
-                <a:headEnd/>
-                <a:tailEnd/>
               </a:ln>
               <a:extLst>
                 <a:ext uri="{909E8E84-426E-40DD-AFC4-6F175D3DCCD1}">
@@ -8689,17 +8677,11 @@
           </p:sp>
         </mc:Fallback>
       </mc:AlternateContent>
-      <mc:AlternateContent xmlns:mc="http://schemas.openxmlformats.org/markup-compatibility/2006" xmlns:a14="http://schemas.microsoft.com/office/drawing/2010/main">
-        <mc:Choice Requires="a14">
+      <mc:AlternateContent xmlns:mc="http://schemas.openxmlformats.org/markup-compatibility/2006">
+        <mc:Choice xmlns:a14="http://schemas.microsoft.com/office/drawing/2010/main" Requires="a14">
           <p:sp>
             <p:nvSpPr>
-              <p:cNvPr id="43" name="Text Box 36">
-                <a:extLst>
-                  <a:ext uri="{FF2B5EF4-FFF2-40B4-BE49-F238E27FC236}">
-                    <a16:creationId xmlns:a16="http://schemas.microsoft.com/office/drawing/2014/main" id="{E4EAFBEF-1820-F5DD-84B8-CE331D88D011}"/>
-                  </a:ext>
-                </a:extLst>
-              </p:cNvPr>
+              <p:cNvPr id="43" name="Text Box 36"/>
               <p:cNvSpPr txBox="1">
                 <a:spLocks noChangeArrowheads="1"/>
               </p:cNvSpPr>
@@ -8719,12 +8701,10 @@
                   <a:schemeClr val="bg1"/>
                 </a:solidFill>
                 <a:miter lim="800000"/>
-                <a:headEnd/>
-                <a:tailEnd/>
               </a:ln>
               <a:extLst>
                 <a:ext uri="{909E8E84-426E-40DD-AFC4-6F175D3DCCD1}">
-                  <a14:hiddenFill>
+                  <a14:hiddenFill xmlns:a14="http://schemas.microsoft.com/office/drawing/2010/main">
                     <a:solidFill>
                       <a:srgbClr val="FFFFFF"/>
                     </a:solidFill>
@@ -8815,7 +8795,6 @@
                 </a:lvl9pPr>
               </a:lstStyle>
               <a:p>
-                <a:pPr/>
                 <a14:m>
                   <m:oMathPara xmlns:m="http://schemas.openxmlformats.org/officeDocument/2006/math">
                     <m:oMathParaPr>
@@ -8856,16 +8835,10 @@
             </p:txBody>
           </p:sp>
         </mc:Choice>
-        <mc:Fallback xmlns="">
+        <mc:Fallback>
           <p:sp>
             <p:nvSpPr>
-              <p:cNvPr id="43" name="Text Box 36">
-                <a:extLst>
-                  <a:ext uri="{FF2B5EF4-FFF2-40B4-BE49-F238E27FC236}">
-                    <a16:creationId xmlns:a16="http://schemas.microsoft.com/office/drawing/2014/main" id="{E4EAFBEF-1820-F5DD-84B8-CE331D88D011}"/>
-                  </a:ext>
-                </a:extLst>
-              </p:cNvPr>
+              <p:cNvPr id="43" name="Text Box 36"/>
               <p:cNvSpPr txBox="1">
                 <a:spLocks noRot="1" noChangeAspect="1" noMove="1" noResize="1" noEditPoints="1" noAdjustHandles="1" noChangeArrowheads="1" noChangeShapeType="1" noTextEdit="1"/>
               </p:cNvSpPr>
@@ -8879,10 +8852,10 @@
               <a:prstGeom prst="rect">
                 <a:avLst/>
               </a:prstGeom>
-              <a:blipFill>
-                <a:blip r:embed="rId9"/>
+              <a:blipFill rotWithShape="1">
+                <a:blip r:embed="rId1"/>
                 <a:stretch>
-                  <a:fillRect/>
+                  <a:fillRect l="-504" t="-1456" r="-481" b="-1328"/>
                 </a:stretch>
               </a:blipFill>
               <a:ln w="9525">
@@ -8890,8 +8863,6 @@
                   <a:schemeClr val="bg1"/>
                 </a:solidFill>
                 <a:miter lim="800000"/>
-                <a:headEnd/>
-                <a:tailEnd/>
               </a:ln>
               <a:extLst>
                 <a:ext uri="{909E8E84-426E-40DD-AFC4-6F175D3DCCD1}">
@@ -8919,11 +8890,6 @@
         </mc:Fallback>
       </mc:AlternateContent>
     </p:spTree>
-    <p:extLst>
-      <p:ext uri="{BB962C8B-B14F-4D97-AF65-F5344CB8AC3E}">
-        <p14:creationId xmlns:p14="http://schemas.microsoft.com/office/powerpoint/2010/main" val="708081010"/>
-      </p:ext>
-    </p:extLst>
   </p:cSld>
   <p:clrMapOvr>
     <a:masterClrMapping/>
@@ -8950,13 +8916,7 @@
       </p:grpSpPr>
       <p:grpSp>
         <p:nvGrpSpPr>
-          <p:cNvPr id="7" name="组合 6">
-            <a:extLst>
-              <a:ext uri="{FF2B5EF4-FFF2-40B4-BE49-F238E27FC236}">
-                <a16:creationId xmlns:a16="http://schemas.microsoft.com/office/drawing/2014/main" id="{FB10D45C-769C-2B47-D9C9-99EC36D15745}"/>
-              </a:ext>
-            </a:extLst>
-          </p:cNvPr>
+          <p:cNvPr id="7" name="组合 6"/>
           <p:cNvGrpSpPr/>
           <p:nvPr/>
         </p:nvGrpSpPr>
@@ -8970,13 +8930,7 @@
         </p:grpSpPr>
         <p:sp>
           <p:nvSpPr>
-            <p:cNvPr id="5" name="椭圆 4">
-              <a:extLst>
-                <a:ext uri="{FF2B5EF4-FFF2-40B4-BE49-F238E27FC236}">
-                  <a16:creationId xmlns:a16="http://schemas.microsoft.com/office/drawing/2014/main" id="{A8519659-60E1-1DD3-A39F-A9B728CB9082}"/>
-                </a:ext>
-              </a:extLst>
-            </p:cNvPr>
+            <p:cNvPr id="5" name="椭圆 4"/>
             <p:cNvSpPr/>
             <p:nvPr/>
           </p:nvSpPr>
@@ -9019,13 +8973,7 @@
         </p:sp>
         <p:sp>
           <p:nvSpPr>
-            <p:cNvPr id="19" name="任意多边形: 形状 18">
-              <a:extLst>
-                <a:ext uri="{FF2B5EF4-FFF2-40B4-BE49-F238E27FC236}">
-                  <a16:creationId xmlns:a16="http://schemas.microsoft.com/office/drawing/2014/main" id="{04231A20-1BEA-D8F3-894D-4C5ECE32D9B7}"/>
-                </a:ext>
-              </a:extLst>
-            </p:cNvPr>
+            <p:cNvPr id="19" name="任意多边形: 形状 18"/>
             <p:cNvSpPr/>
             <p:nvPr/>
           </p:nvSpPr>
@@ -9131,13 +9079,7 @@
         </p:sp>
         <p:sp>
           <p:nvSpPr>
-            <p:cNvPr id="20" name="椭圆 19">
-              <a:extLst>
-                <a:ext uri="{FF2B5EF4-FFF2-40B4-BE49-F238E27FC236}">
-                  <a16:creationId xmlns:a16="http://schemas.microsoft.com/office/drawing/2014/main" id="{6E544E54-9F06-A60E-9190-C3EA78623840}"/>
-                </a:ext>
-              </a:extLst>
-            </p:cNvPr>
+            <p:cNvPr id="20" name="椭圆 19"/>
             <p:cNvSpPr/>
             <p:nvPr/>
           </p:nvSpPr>
@@ -9183,13 +9125,7 @@
         </p:sp>
         <p:sp>
           <p:nvSpPr>
-            <p:cNvPr id="4" name="椭圆 3">
-              <a:extLst>
-                <a:ext uri="{FF2B5EF4-FFF2-40B4-BE49-F238E27FC236}">
-                  <a16:creationId xmlns:a16="http://schemas.microsoft.com/office/drawing/2014/main" id="{F2B7C750-6C7E-8217-F286-AD6ABEB01BC8}"/>
-                </a:ext>
-              </a:extLst>
-            </p:cNvPr>
+            <p:cNvPr id="4" name="椭圆 3"/>
             <p:cNvSpPr/>
             <p:nvPr/>
           </p:nvSpPr>
@@ -9232,13 +9168,7 @@
         </p:sp>
         <p:cxnSp>
           <p:nvCxnSpPr>
-            <p:cNvPr id="25" name="直接箭头连接符 24">
-              <a:extLst>
-                <a:ext uri="{FF2B5EF4-FFF2-40B4-BE49-F238E27FC236}">
-                  <a16:creationId xmlns:a16="http://schemas.microsoft.com/office/drawing/2014/main" id="{19A87B37-7CCB-6353-DB80-0012E9B5E4DA}"/>
-                </a:ext>
-              </a:extLst>
-            </p:cNvPr>
+            <p:cNvPr id="25" name="直接箭头连接符 24"/>
             <p:cNvCxnSpPr>
               <a:stCxn id="4" idx="1"/>
             </p:cNvCxnSpPr>
@@ -9277,13 +9207,7 @@
       </p:grpSp>
       <p:grpSp>
         <p:nvGrpSpPr>
-          <p:cNvPr id="8" name="组合 7">
-            <a:extLst>
-              <a:ext uri="{FF2B5EF4-FFF2-40B4-BE49-F238E27FC236}">
-                <a16:creationId xmlns:a16="http://schemas.microsoft.com/office/drawing/2014/main" id="{0C6335BC-7D79-B2E7-C772-800E097EBC4C}"/>
-              </a:ext>
-            </a:extLst>
-          </p:cNvPr>
+          <p:cNvPr id="8" name="组合 7"/>
           <p:cNvGrpSpPr/>
           <p:nvPr/>
         </p:nvGrpSpPr>
@@ -9297,13 +9221,7 @@
         </p:grpSpPr>
         <p:grpSp>
           <p:nvGrpSpPr>
-            <p:cNvPr id="11" name="组合 10">
-              <a:extLst>
-                <a:ext uri="{FF2B5EF4-FFF2-40B4-BE49-F238E27FC236}">
-                  <a16:creationId xmlns:a16="http://schemas.microsoft.com/office/drawing/2014/main" id="{05915A08-C458-DEF4-298F-8F9F2B4CB1AA}"/>
-                </a:ext>
-              </a:extLst>
-            </p:cNvPr>
+            <p:cNvPr id="11" name="组合 10"/>
             <p:cNvGrpSpPr/>
             <p:nvPr/>
           </p:nvGrpSpPr>
@@ -9317,13 +9235,7 @@
           </p:grpSpPr>
           <p:sp>
             <p:nvSpPr>
-              <p:cNvPr id="12" name="椭圆 11">
-                <a:extLst>
-                  <a:ext uri="{FF2B5EF4-FFF2-40B4-BE49-F238E27FC236}">
-                    <a16:creationId xmlns:a16="http://schemas.microsoft.com/office/drawing/2014/main" id="{56280392-C461-28EF-D60C-C9ED70733BA9}"/>
-                  </a:ext>
-                </a:extLst>
-              </p:cNvPr>
+              <p:cNvPr id="12" name="椭圆 11"/>
               <p:cNvSpPr/>
               <p:nvPr/>
             </p:nvSpPr>
@@ -9366,13 +9278,7 @@
           </p:sp>
           <p:sp>
             <p:nvSpPr>
-              <p:cNvPr id="13" name="任意多边形: 形状 12">
-                <a:extLst>
-                  <a:ext uri="{FF2B5EF4-FFF2-40B4-BE49-F238E27FC236}">
-                    <a16:creationId xmlns:a16="http://schemas.microsoft.com/office/drawing/2014/main" id="{7E85B39F-96F2-C7CC-1D21-241E12161D90}"/>
-                  </a:ext>
-                </a:extLst>
-              </p:cNvPr>
+              <p:cNvPr id="13" name="任意多边形: 形状 12"/>
               <p:cNvSpPr/>
               <p:nvPr/>
             </p:nvSpPr>
@@ -9478,13 +9384,7 @@
           </p:sp>
           <p:sp>
             <p:nvSpPr>
-              <p:cNvPr id="14" name="椭圆 13">
-                <a:extLst>
-                  <a:ext uri="{FF2B5EF4-FFF2-40B4-BE49-F238E27FC236}">
-                    <a16:creationId xmlns:a16="http://schemas.microsoft.com/office/drawing/2014/main" id="{3E99F9CA-C55D-802B-B94C-377118AE2D5C}"/>
-                  </a:ext>
-                </a:extLst>
-              </p:cNvPr>
+              <p:cNvPr id="14" name="椭圆 13"/>
               <p:cNvSpPr/>
               <p:nvPr/>
             </p:nvSpPr>
@@ -9530,13 +9430,7 @@
           </p:sp>
           <p:sp>
             <p:nvSpPr>
-              <p:cNvPr id="15" name="椭圆 14">
-                <a:extLst>
-                  <a:ext uri="{FF2B5EF4-FFF2-40B4-BE49-F238E27FC236}">
-                    <a16:creationId xmlns:a16="http://schemas.microsoft.com/office/drawing/2014/main" id="{F741AA17-CC23-FEA9-852E-87EA20719A85}"/>
-                  </a:ext>
-                </a:extLst>
-              </p:cNvPr>
+              <p:cNvPr id="15" name="椭圆 14"/>
               <p:cNvSpPr/>
               <p:nvPr/>
             </p:nvSpPr>
@@ -9579,13 +9473,7 @@
           </p:sp>
           <p:cxnSp>
             <p:nvCxnSpPr>
-              <p:cNvPr id="16" name="直接箭头连接符 15">
-                <a:extLst>
-                  <a:ext uri="{FF2B5EF4-FFF2-40B4-BE49-F238E27FC236}">
-                    <a16:creationId xmlns:a16="http://schemas.microsoft.com/office/drawing/2014/main" id="{CD7C5BF1-33B2-037A-12F2-6F070EAFB75C}"/>
-                  </a:ext>
-                </a:extLst>
-              </p:cNvPr>
+              <p:cNvPr id="16" name="直接箭头连接符 15"/>
               <p:cNvCxnSpPr>
                 <a:stCxn id="15" idx="1"/>
               </p:cNvCxnSpPr>
@@ -9624,13 +9512,7 @@
         </p:grpSp>
         <p:sp>
           <p:nvSpPr>
-            <p:cNvPr id="17" name="任意多边形: 形状 16">
-              <a:extLst>
-                <a:ext uri="{FF2B5EF4-FFF2-40B4-BE49-F238E27FC236}">
-                  <a16:creationId xmlns:a16="http://schemas.microsoft.com/office/drawing/2014/main" id="{A576C939-6D38-C772-73B7-6430116F123E}"/>
-                </a:ext>
-              </a:extLst>
-            </p:cNvPr>
+            <p:cNvPr id="17" name="任意多边形: 形状 16"/>
             <p:cNvSpPr/>
             <p:nvPr/>
           </p:nvSpPr>
@@ -10061,13 +9943,7 @@
       </p:grpSp>
       <p:grpSp>
         <p:nvGrpSpPr>
-          <p:cNvPr id="61" name="组合 60">
-            <a:extLst>
-              <a:ext uri="{FF2B5EF4-FFF2-40B4-BE49-F238E27FC236}">
-                <a16:creationId xmlns:a16="http://schemas.microsoft.com/office/drawing/2014/main" id="{5A995A93-22EE-59B2-EECE-5BFDF0651769}"/>
-              </a:ext>
-            </a:extLst>
-          </p:cNvPr>
+          <p:cNvPr id="61" name="组合 60"/>
           <p:cNvGrpSpPr/>
           <p:nvPr/>
         </p:nvGrpSpPr>
@@ -10081,13 +9957,7 @@
         </p:grpSpPr>
         <p:grpSp>
           <p:nvGrpSpPr>
-            <p:cNvPr id="45" name="组合 44">
-              <a:extLst>
-                <a:ext uri="{FF2B5EF4-FFF2-40B4-BE49-F238E27FC236}">
-                  <a16:creationId xmlns:a16="http://schemas.microsoft.com/office/drawing/2014/main" id="{2FB3738E-D9DD-7731-BDC9-6ADBEE825559}"/>
-                </a:ext>
-              </a:extLst>
-            </p:cNvPr>
+            <p:cNvPr id="45" name="组合 44"/>
             <p:cNvGrpSpPr/>
             <p:nvPr/>
           </p:nvGrpSpPr>
@@ -10101,13 +9971,7 @@
           </p:grpSpPr>
           <p:sp>
             <p:nvSpPr>
-              <p:cNvPr id="2" name="椭圆 1">
-                <a:extLst>
-                  <a:ext uri="{FF2B5EF4-FFF2-40B4-BE49-F238E27FC236}">
-                    <a16:creationId xmlns:a16="http://schemas.microsoft.com/office/drawing/2014/main" id="{BD877C11-6056-87AB-4BFE-A52F97A89272}"/>
-                  </a:ext>
-                </a:extLst>
-              </p:cNvPr>
+              <p:cNvPr id="2" name="椭圆 1"/>
               <p:cNvSpPr/>
               <p:nvPr/>
             </p:nvSpPr>
@@ -10155,16 +10019,8 @@
           </p:sp>
           <p:cxnSp>
             <p:nvCxnSpPr>
-              <p:cNvPr id="21" name="直接连接符 20">
-                <a:extLst>
-                  <a:ext uri="{FF2B5EF4-FFF2-40B4-BE49-F238E27FC236}">
-                    <a16:creationId xmlns:a16="http://schemas.microsoft.com/office/drawing/2014/main" id="{9D5B13DB-7FB6-1BBC-64AA-6E0AB2D98DDA}"/>
-                  </a:ext>
-                </a:extLst>
-              </p:cNvPr>
-              <p:cNvCxnSpPr>
-                <a:cxnSpLocks/>
-              </p:cNvCxnSpPr>
+              <p:cNvPr id="21" name="直接连接符 20"/>
+              <p:cNvCxnSpPr/>
               <p:nvPr/>
             </p:nvCxnSpPr>
             <p:spPr>
@@ -10199,16 +10055,8 @@
           </p:cxnSp>
           <p:cxnSp>
             <p:nvCxnSpPr>
-              <p:cNvPr id="28" name="直接箭头连接符 27">
-                <a:extLst>
-                  <a:ext uri="{FF2B5EF4-FFF2-40B4-BE49-F238E27FC236}">
-                    <a16:creationId xmlns:a16="http://schemas.microsoft.com/office/drawing/2014/main" id="{AA2C9214-7993-FD8F-CE39-2DA3A93373D4}"/>
-                  </a:ext>
-                </a:extLst>
-              </p:cNvPr>
-              <p:cNvCxnSpPr>
-                <a:cxnSpLocks/>
-              </p:cNvCxnSpPr>
+              <p:cNvPr id="28" name="直接箭头连接符 27"/>
+              <p:cNvCxnSpPr/>
               <p:nvPr/>
             </p:nvCxnSpPr>
             <p:spPr>
@@ -10243,13 +10091,7 @@
           </p:cxnSp>
           <p:cxnSp>
             <p:nvCxnSpPr>
-              <p:cNvPr id="34" name="直接箭头连接符 33">
-                <a:extLst>
-                  <a:ext uri="{FF2B5EF4-FFF2-40B4-BE49-F238E27FC236}">
-                    <a16:creationId xmlns:a16="http://schemas.microsoft.com/office/drawing/2014/main" id="{0F8C45CE-6DF0-3C2B-CFB5-3FAFB2B222D9}"/>
-                  </a:ext>
-                </a:extLst>
-              </p:cNvPr>
+              <p:cNvPr id="34" name="直接箭头连接符 33"/>
               <p:cNvCxnSpPr/>
               <p:nvPr/>
             </p:nvCxnSpPr>
@@ -10285,13 +10127,7 @@
           </p:cxnSp>
           <p:cxnSp>
             <p:nvCxnSpPr>
-              <p:cNvPr id="36" name="直接箭头连接符 35">
-                <a:extLst>
-                  <a:ext uri="{FF2B5EF4-FFF2-40B4-BE49-F238E27FC236}">
-                    <a16:creationId xmlns:a16="http://schemas.microsoft.com/office/drawing/2014/main" id="{13BE860E-1351-B9C4-3F38-FD0ECD8B1553}"/>
-                  </a:ext>
-                </a:extLst>
-              </p:cNvPr>
+              <p:cNvPr id="36" name="直接箭头连接符 35"/>
               <p:cNvCxnSpPr/>
               <p:nvPr/>
             </p:nvCxnSpPr>
@@ -10327,13 +10163,7 @@
           </p:cxnSp>
           <p:cxnSp>
             <p:nvCxnSpPr>
-              <p:cNvPr id="40" name="直接连接符 39">
-                <a:extLst>
-                  <a:ext uri="{FF2B5EF4-FFF2-40B4-BE49-F238E27FC236}">
-                    <a16:creationId xmlns:a16="http://schemas.microsoft.com/office/drawing/2014/main" id="{0286D3F2-A130-1CF5-16ED-197A8DC826B4}"/>
-                  </a:ext>
-                </a:extLst>
-              </p:cNvPr>
+              <p:cNvPr id="40" name="直接连接符 39"/>
               <p:cNvCxnSpPr/>
               <p:nvPr/>
             </p:nvCxnSpPr>
@@ -10369,13 +10199,7 @@
           </p:cxnSp>
           <p:sp>
             <p:nvSpPr>
-              <p:cNvPr id="42" name="弧形 41">
-                <a:extLst>
-                  <a:ext uri="{FF2B5EF4-FFF2-40B4-BE49-F238E27FC236}">
-                    <a16:creationId xmlns:a16="http://schemas.microsoft.com/office/drawing/2014/main" id="{44E759AD-A038-6DDF-AB7F-4D41B1C94CD6}"/>
-                  </a:ext>
-                </a:extLst>
-              </p:cNvPr>
+              <p:cNvPr id="42" name="弧形 41"/>
               <p:cNvSpPr/>
               <p:nvPr/>
             </p:nvSpPr>
@@ -10422,16 +10246,8 @@
         </p:grpSp>
         <p:cxnSp>
           <p:nvCxnSpPr>
-            <p:cNvPr id="47" name="直接箭头连接符 46">
-              <a:extLst>
-                <a:ext uri="{FF2B5EF4-FFF2-40B4-BE49-F238E27FC236}">
-                  <a16:creationId xmlns:a16="http://schemas.microsoft.com/office/drawing/2014/main" id="{337B9450-69BB-CADF-75D8-F9D227854DC8}"/>
-                </a:ext>
-              </a:extLst>
-            </p:cNvPr>
-            <p:cNvCxnSpPr>
-              <a:cxnSpLocks/>
-            </p:cNvCxnSpPr>
+            <p:cNvPr id="47" name="直接箭头连接符 46"/>
+            <p:cNvCxnSpPr/>
             <p:nvPr/>
           </p:nvCxnSpPr>
           <p:spPr>
@@ -10464,17 +10280,11 @@
             </a:fontRef>
           </p:style>
         </p:cxnSp>
-        <mc:AlternateContent xmlns:mc="http://schemas.openxmlformats.org/markup-compatibility/2006" xmlns:a14="http://schemas.microsoft.com/office/drawing/2010/main">
-          <mc:Choice Requires="a14">
+        <mc:AlternateContent xmlns:mc="http://schemas.openxmlformats.org/markup-compatibility/2006">
+          <mc:Choice xmlns:a14="http://schemas.microsoft.com/office/drawing/2010/main" Requires="a14">
             <p:sp>
               <p:nvSpPr>
-                <p:cNvPr id="48" name="文本框 47">
-                  <a:extLst>
-                    <a:ext uri="{FF2B5EF4-FFF2-40B4-BE49-F238E27FC236}">
-                      <a16:creationId xmlns:a16="http://schemas.microsoft.com/office/drawing/2014/main" id="{51E95A62-6AA8-EBA9-8D50-42007CA7A310}"/>
-                    </a:ext>
-                  </a:extLst>
-                </p:cNvPr>
+                <p:cNvPr id="48" name="文本框 47"/>
                 <p:cNvSpPr txBox="1"/>
                 <p:nvPr/>
               </p:nvSpPr>
@@ -10494,7 +10304,6 @@
                 </a:bodyPr>
                 <a:lstStyle/>
                 <a:p>
-                  <a:pPr/>
                   <a14:m>
                     <m:oMathPara xmlns:m="http://schemas.openxmlformats.org/officeDocument/2006/math">
                       <m:oMathParaPr>
@@ -10550,16 +10359,10 @@
               </p:txBody>
             </p:sp>
           </mc:Choice>
-          <mc:Fallback xmlns="">
+          <mc:Fallback>
             <p:sp>
               <p:nvSpPr>
-                <p:cNvPr id="48" name="文本框 47">
-                  <a:extLst>
-                    <a:ext uri="{FF2B5EF4-FFF2-40B4-BE49-F238E27FC236}">
-                      <a16:creationId xmlns:a16="http://schemas.microsoft.com/office/drawing/2014/main" id="{51E95A62-6AA8-EBA9-8D50-42007CA7A310}"/>
-                    </a:ext>
-                  </a:extLst>
-                </p:cNvPr>
+                <p:cNvPr id="48" name="文本框 47"/>
                 <p:cNvSpPr txBox="1">
                   <a:spLocks noRot="1" noChangeAspect="1" noMove="1" noResize="1" noEditPoints="1" noAdjustHandles="1" noChangeArrowheads="1" noChangeShapeType="1" noTextEdit="1"/>
                 </p:cNvSpPr>
@@ -10573,11 +10376,8 @@
                 <a:prstGeom prst="rect">
                   <a:avLst/>
                 </a:prstGeom>
-                <a:blipFill>
-                  <a:blip r:embed="rId2"/>
-                  <a:stretch>
-                    <a:fillRect/>
-                  </a:stretch>
+                <a:blipFill rotWithShape="1">
+                  <a:blip r:embed="rId1"/>
                 </a:blipFill>
               </p:spPr>
               <p:txBody>
@@ -10597,13 +10397,7 @@
         </mc:AlternateContent>
         <p:sp>
           <p:nvSpPr>
-            <p:cNvPr id="50" name="弧形 49">
-              <a:extLst>
-                <a:ext uri="{FF2B5EF4-FFF2-40B4-BE49-F238E27FC236}">
-                  <a16:creationId xmlns:a16="http://schemas.microsoft.com/office/drawing/2014/main" id="{9F2A8C84-29D6-ABBF-7347-136048B28D7C}"/>
-                </a:ext>
-              </a:extLst>
-            </p:cNvPr>
+            <p:cNvPr id="50" name="弧形 49"/>
             <p:cNvSpPr/>
             <p:nvPr/>
           </p:nvSpPr>
@@ -10649,16 +10443,8 @@
         </p:sp>
         <p:cxnSp>
           <p:nvCxnSpPr>
-            <p:cNvPr id="52" name="直接箭头连接符 51">
-              <a:extLst>
-                <a:ext uri="{FF2B5EF4-FFF2-40B4-BE49-F238E27FC236}">
-                  <a16:creationId xmlns:a16="http://schemas.microsoft.com/office/drawing/2014/main" id="{27418F0E-8952-ED5F-5A31-5D2EA2496831}"/>
-                </a:ext>
-              </a:extLst>
-            </p:cNvPr>
-            <p:cNvCxnSpPr>
-              <a:cxnSpLocks/>
-            </p:cNvCxnSpPr>
+            <p:cNvPr id="52" name="直接箭头连接符 51"/>
+            <p:cNvCxnSpPr/>
             <p:nvPr/>
           </p:nvCxnSpPr>
           <p:spPr>
@@ -10693,13 +10479,7 @@
         </p:cxnSp>
         <p:sp>
           <p:nvSpPr>
-            <p:cNvPr id="58" name="弧形 57">
-              <a:extLst>
-                <a:ext uri="{FF2B5EF4-FFF2-40B4-BE49-F238E27FC236}">
-                  <a16:creationId xmlns:a16="http://schemas.microsoft.com/office/drawing/2014/main" id="{8952058E-FCE8-73E4-D95F-4392E266FBB4}"/>
-                </a:ext>
-              </a:extLst>
-            </p:cNvPr>
+            <p:cNvPr id="58" name="弧形 57"/>
             <p:cNvSpPr/>
             <p:nvPr/>
           </p:nvSpPr>
@@ -10743,17 +10523,11 @@
             </a:p>
           </p:txBody>
         </p:sp>
-        <mc:AlternateContent xmlns:mc="http://schemas.openxmlformats.org/markup-compatibility/2006" xmlns:a14="http://schemas.microsoft.com/office/drawing/2010/main">
-          <mc:Choice Requires="a14">
+        <mc:AlternateContent xmlns:mc="http://schemas.openxmlformats.org/markup-compatibility/2006">
+          <mc:Choice xmlns:a14="http://schemas.microsoft.com/office/drawing/2010/main" Requires="a14">
             <p:sp>
               <p:nvSpPr>
-                <p:cNvPr id="59" name="文本框 58">
-                  <a:extLst>
-                    <a:ext uri="{FF2B5EF4-FFF2-40B4-BE49-F238E27FC236}">
-                      <a16:creationId xmlns:a16="http://schemas.microsoft.com/office/drawing/2014/main" id="{C6A89DFD-DCA7-F30E-75EE-B2F288823882}"/>
-                    </a:ext>
-                  </a:extLst>
-                </p:cNvPr>
+                <p:cNvPr id="59" name="文本框 58"/>
                 <p:cNvSpPr txBox="1"/>
                 <p:nvPr/>
               </p:nvSpPr>
@@ -10773,7 +10547,6 @@
                 </a:bodyPr>
                 <a:lstStyle/>
                 <a:p>
-                  <a:pPr/>
                   <a14:m>
                     <m:oMathPara xmlns:m="http://schemas.openxmlformats.org/officeDocument/2006/math">
                       <m:oMathParaPr>
@@ -10829,16 +10602,10 @@
               </p:txBody>
             </p:sp>
           </mc:Choice>
-          <mc:Fallback xmlns="">
+          <mc:Fallback>
             <p:sp>
               <p:nvSpPr>
-                <p:cNvPr id="59" name="文本框 58">
-                  <a:extLst>
-                    <a:ext uri="{FF2B5EF4-FFF2-40B4-BE49-F238E27FC236}">
-                      <a16:creationId xmlns:a16="http://schemas.microsoft.com/office/drawing/2014/main" id="{C6A89DFD-DCA7-F30E-75EE-B2F288823882}"/>
-                    </a:ext>
-                  </a:extLst>
-                </p:cNvPr>
+                <p:cNvPr id="59" name="文本框 58"/>
                 <p:cNvSpPr txBox="1">
                   <a:spLocks noRot="1" noChangeAspect="1" noMove="1" noResize="1" noEditPoints="1" noAdjustHandles="1" noChangeArrowheads="1" noChangeShapeType="1" noTextEdit="1"/>
                 </p:cNvSpPr>
@@ -10852,11 +10619,8 @@
                 <a:prstGeom prst="rect">
                   <a:avLst/>
                 </a:prstGeom>
-                <a:blipFill>
-                  <a:blip r:embed="rId3"/>
-                  <a:stretch>
-                    <a:fillRect/>
-                  </a:stretch>
+                <a:blipFill rotWithShape="1">
+                  <a:blip r:embed="rId1"/>
                 </a:blipFill>
               </p:spPr>
               <p:txBody>
@@ -10874,17 +10638,11 @@
             </p:sp>
           </mc:Fallback>
         </mc:AlternateContent>
-        <mc:AlternateContent xmlns:mc="http://schemas.openxmlformats.org/markup-compatibility/2006" xmlns:a14="http://schemas.microsoft.com/office/drawing/2010/main">
-          <mc:Choice Requires="a14">
+        <mc:AlternateContent xmlns:mc="http://schemas.openxmlformats.org/markup-compatibility/2006">
+          <mc:Choice xmlns:a14="http://schemas.microsoft.com/office/drawing/2010/main" Requires="a14">
             <p:sp>
               <p:nvSpPr>
-                <p:cNvPr id="60" name="文本框 59">
-                  <a:extLst>
-                    <a:ext uri="{FF2B5EF4-FFF2-40B4-BE49-F238E27FC236}">
-                      <a16:creationId xmlns:a16="http://schemas.microsoft.com/office/drawing/2014/main" id="{71DBAD42-FFEF-94FE-CE76-99A805E5B9D5}"/>
-                    </a:ext>
-                  </a:extLst>
-                </p:cNvPr>
+                <p:cNvPr id="60" name="文本框 59"/>
                 <p:cNvSpPr txBox="1"/>
                 <p:nvPr/>
               </p:nvSpPr>
@@ -10904,7 +10662,6 @@
                 </a:bodyPr>
                 <a:lstStyle/>
                 <a:p>
-                  <a:pPr/>
                   <a14:m>
                     <m:oMathPara xmlns:m="http://schemas.openxmlformats.org/officeDocument/2006/math">
                       <m:oMathParaPr>
@@ -10960,16 +10717,10 @@
               </p:txBody>
             </p:sp>
           </mc:Choice>
-          <mc:Fallback xmlns="">
+          <mc:Fallback>
             <p:sp>
               <p:nvSpPr>
-                <p:cNvPr id="60" name="文本框 59">
-                  <a:extLst>
-                    <a:ext uri="{FF2B5EF4-FFF2-40B4-BE49-F238E27FC236}">
-                      <a16:creationId xmlns:a16="http://schemas.microsoft.com/office/drawing/2014/main" id="{71DBAD42-FFEF-94FE-CE76-99A805E5B9D5}"/>
-                    </a:ext>
-                  </a:extLst>
-                </p:cNvPr>
+                <p:cNvPr id="60" name="文本框 59"/>
                 <p:cNvSpPr txBox="1">
                   <a:spLocks noRot="1" noChangeAspect="1" noMove="1" noResize="1" noEditPoints="1" noAdjustHandles="1" noChangeArrowheads="1" noChangeShapeType="1" noTextEdit="1"/>
                 </p:cNvSpPr>
@@ -10983,11 +10734,8 @@
                 <a:prstGeom prst="rect">
                   <a:avLst/>
                 </a:prstGeom>
-                <a:blipFill>
-                  <a:blip r:embed="rId4"/>
-                  <a:stretch>
-                    <a:fillRect/>
-                  </a:stretch>
+                <a:blipFill rotWithShape="1">
+                  <a:blip r:embed="rId2"/>
                 </a:blipFill>
               </p:spPr>
               <p:txBody>
@@ -11008,13 +10756,7 @@
       </p:grpSp>
       <p:grpSp>
         <p:nvGrpSpPr>
-          <p:cNvPr id="27" name="组合 26">
-            <a:extLst>
-              <a:ext uri="{FF2B5EF4-FFF2-40B4-BE49-F238E27FC236}">
-                <a16:creationId xmlns:a16="http://schemas.microsoft.com/office/drawing/2014/main" id="{3C0AD7A1-3C26-0675-210B-BC7C3B8835CA}"/>
-              </a:ext>
-            </a:extLst>
-          </p:cNvPr>
+          <p:cNvPr id="27" name="组合 26"/>
           <p:cNvGrpSpPr/>
           <p:nvPr/>
         </p:nvGrpSpPr>
@@ -11028,13 +10770,7 @@
         </p:grpSpPr>
         <p:grpSp>
           <p:nvGrpSpPr>
-            <p:cNvPr id="9" name="组合 8">
-              <a:extLst>
-                <a:ext uri="{FF2B5EF4-FFF2-40B4-BE49-F238E27FC236}">
-                  <a16:creationId xmlns:a16="http://schemas.microsoft.com/office/drawing/2014/main" id="{69ECF0EE-F059-A40F-EC15-03ECA51931A5}"/>
-                </a:ext>
-              </a:extLst>
-            </p:cNvPr>
+            <p:cNvPr id="9" name="组合 8"/>
             <p:cNvGrpSpPr/>
             <p:nvPr/>
           </p:nvGrpSpPr>
@@ -11048,13 +10784,7 @@
           </p:grpSpPr>
           <p:sp>
             <p:nvSpPr>
-              <p:cNvPr id="18" name="椭圆 17">
-                <a:extLst>
-                  <a:ext uri="{FF2B5EF4-FFF2-40B4-BE49-F238E27FC236}">
-                    <a16:creationId xmlns:a16="http://schemas.microsoft.com/office/drawing/2014/main" id="{90E5CA62-592E-BFC5-1BA8-C67AE3652C32}"/>
-                  </a:ext>
-                </a:extLst>
-              </p:cNvPr>
+              <p:cNvPr id="18" name="椭圆 17"/>
               <p:cNvSpPr/>
               <p:nvPr/>
             </p:nvSpPr>
@@ -11097,15 +10827,8 @@
           </p:sp>
           <p:cxnSp>
             <p:nvCxnSpPr>
-              <p:cNvPr id="23" name="直接箭头连接符 22">
-                <a:extLst>
-                  <a:ext uri="{FF2B5EF4-FFF2-40B4-BE49-F238E27FC236}">
-                    <a16:creationId xmlns:a16="http://schemas.microsoft.com/office/drawing/2014/main" id="{B02AA1C5-D6A5-98D5-916B-5CB4E4558C06}"/>
-                  </a:ext>
-                </a:extLst>
-              </p:cNvPr>
+              <p:cNvPr id="23" name="直接箭头连接符 22"/>
               <p:cNvCxnSpPr>
-                <a:cxnSpLocks/>
                 <a:stCxn id="18" idx="0"/>
               </p:cNvCxnSpPr>
               <p:nvPr/>
@@ -11142,13 +10865,7 @@
           </p:cxnSp>
           <p:grpSp>
             <p:nvGrpSpPr>
-              <p:cNvPr id="39" name="组合 38">
-                <a:extLst>
-                  <a:ext uri="{FF2B5EF4-FFF2-40B4-BE49-F238E27FC236}">
-                    <a16:creationId xmlns:a16="http://schemas.microsoft.com/office/drawing/2014/main" id="{26F90324-2E4D-2474-8FC6-92D0F19B026E}"/>
-                  </a:ext>
-                </a:extLst>
-              </p:cNvPr>
+              <p:cNvPr id="39" name="组合 38"/>
               <p:cNvGrpSpPr/>
               <p:nvPr/>
             </p:nvGrpSpPr>
@@ -11162,13 +10879,7 @@
             </p:grpSpPr>
             <p:sp>
               <p:nvSpPr>
-                <p:cNvPr id="38" name="任意多边形: 形状 37">
-                  <a:extLst>
-                    <a:ext uri="{FF2B5EF4-FFF2-40B4-BE49-F238E27FC236}">
-                      <a16:creationId xmlns:a16="http://schemas.microsoft.com/office/drawing/2014/main" id="{A4A681FD-B330-FD52-314B-60C778EFAEBA}"/>
-                    </a:ext>
-                  </a:extLst>
-                </p:cNvPr>
+                <p:cNvPr id="38" name="任意多边形: 形状 37"/>
                 <p:cNvSpPr/>
                 <p:nvPr/>
               </p:nvSpPr>
@@ -11570,13 +11281,7 @@
             </p:sp>
             <p:grpSp>
               <p:nvGrpSpPr>
-                <p:cNvPr id="33" name="组合 32">
-                  <a:extLst>
-                    <a:ext uri="{FF2B5EF4-FFF2-40B4-BE49-F238E27FC236}">
-                      <a16:creationId xmlns:a16="http://schemas.microsoft.com/office/drawing/2014/main" id="{B9558AB9-88B8-E2EC-1743-6E87F765CCFD}"/>
-                    </a:ext>
-                  </a:extLst>
-                </p:cNvPr>
+                <p:cNvPr id="33" name="组合 32"/>
                 <p:cNvGrpSpPr/>
                 <p:nvPr/>
               </p:nvGrpSpPr>
@@ -11590,13 +11295,7 @@
               </p:grpSpPr>
               <p:sp>
                 <p:nvSpPr>
-                  <p:cNvPr id="30" name="任意多边形: 形状 29">
-                    <a:extLst>
-                      <a:ext uri="{FF2B5EF4-FFF2-40B4-BE49-F238E27FC236}">
-                        <a16:creationId xmlns:a16="http://schemas.microsoft.com/office/drawing/2014/main" id="{BF6A70B1-447B-9BD0-F56D-22FCDD8E10BD}"/>
-                      </a:ext>
-                    </a:extLst>
-                  </p:cNvPr>
+                  <p:cNvPr id="30" name="任意多边形: 形状 29"/>
                   <p:cNvSpPr/>
                   <p:nvPr/>
                 </p:nvSpPr>
@@ -11702,13 +11401,7 @@
               </p:sp>
               <p:sp>
                 <p:nvSpPr>
-                  <p:cNvPr id="31" name="椭圆 30">
-                    <a:extLst>
-                      <a:ext uri="{FF2B5EF4-FFF2-40B4-BE49-F238E27FC236}">
-                        <a16:creationId xmlns:a16="http://schemas.microsoft.com/office/drawing/2014/main" id="{578EACA2-9C64-E270-0E56-EEEB643C02DB}"/>
-                      </a:ext>
-                    </a:extLst>
-                  </p:cNvPr>
+                  <p:cNvPr id="31" name="椭圆 30"/>
                   <p:cNvSpPr/>
                   <p:nvPr/>
                 </p:nvSpPr>
@@ -11756,15 +11449,8 @@
           </p:grpSp>
           <p:cxnSp>
             <p:nvCxnSpPr>
-              <p:cNvPr id="41" name="直接箭头连接符 40">
-                <a:extLst>
-                  <a:ext uri="{FF2B5EF4-FFF2-40B4-BE49-F238E27FC236}">
-                    <a16:creationId xmlns:a16="http://schemas.microsoft.com/office/drawing/2014/main" id="{FBB3E4F5-9B5A-D535-9187-1987D30F63FE}"/>
-                  </a:ext>
-                </a:extLst>
-              </p:cNvPr>
+              <p:cNvPr id="41" name="直接箭头连接符 40"/>
               <p:cNvCxnSpPr>
-                <a:cxnSpLocks/>
                 <a:stCxn id="18" idx="6"/>
               </p:cNvCxnSpPr>
               <p:nvPr/>
@@ -11801,15 +11487,8 @@
           </p:cxnSp>
           <p:cxnSp>
             <p:nvCxnSpPr>
-              <p:cNvPr id="43" name="直接连接符 42">
-                <a:extLst>
-                  <a:ext uri="{FF2B5EF4-FFF2-40B4-BE49-F238E27FC236}">
-                    <a16:creationId xmlns:a16="http://schemas.microsoft.com/office/drawing/2014/main" id="{DEAB1BF2-B65D-F3DD-7E19-D614F9E92E66}"/>
-                  </a:ext>
-                </a:extLst>
-              </p:cNvPr>
+              <p:cNvPr id="43" name="直接连接符 42"/>
               <p:cNvCxnSpPr>
-                <a:cxnSpLocks/>
                 <a:stCxn id="18" idx="7"/>
               </p:cNvCxnSpPr>
               <p:nvPr/>
@@ -11845,16 +11524,8 @@
           </p:cxnSp>
           <p:cxnSp>
             <p:nvCxnSpPr>
-              <p:cNvPr id="51" name="直接箭头连接符 50">
-                <a:extLst>
-                  <a:ext uri="{FF2B5EF4-FFF2-40B4-BE49-F238E27FC236}">
-                    <a16:creationId xmlns:a16="http://schemas.microsoft.com/office/drawing/2014/main" id="{DA340670-74C8-666D-5262-50524FC59F71}"/>
-                  </a:ext>
-                </a:extLst>
-              </p:cNvPr>
-              <p:cNvCxnSpPr>
-                <a:cxnSpLocks/>
-              </p:cNvCxnSpPr>
+              <p:cNvPr id="51" name="直接箭头连接符 50"/>
+              <p:cNvCxnSpPr/>
               <p:nvPr/>
             </p:nvCxnSpPr>
             <p:spPr>
@@ -11890,13 +11561,7 @@
         </p:grpSp>
         <p:cxnSp>
           <p:nvCxnSpPr>
-            <p:cNvPr id="26" name="直接连接符 25">
-              <a:extLst>
-                <a:ext uri="{FF2B5EF4-FFF2-40B4-BE49-F238E27FC236}">
-                  <a16:creationId xmlns:a16="http://schemas.microsoft.com/office/drawing/2014/main" id="{0DBFF25B-6DA9-BA4B-E47B-559C002BE132}"/>
-                </a:ext>
-              </a:extLst>
-            </p:cNvPr>
+            <p:cNvPr id="26" name="直接连接符 25"/>
             <p:cNvCxnSpPr/>
             <p:nvPr/>
           </p:nvCxnSpPr>
@@ -11932,11 +11597,6 @@
         </p:cxnSp>
       </p:grpSp>
     </p:spTree>
-    <p:extLst>
-      <p:ext uri="{BB962C8B-B14F-4D97-AF65-F5344CB8AC3E}">
-        <p14:creationId xmlns:p14="http://schemas.microsoft.com/office/powerpoint/2010/main" val="1459974662"/>
-      </p:ext>
-    </p:extLst>
   </p:cSld>
   <p:clrMapOvr>
     <a:masterClrMapping/>
@@ -11949,13 +11609,7 @@
   <p:cSld>
     <p:spTree>
       <p:nvGrpSpPr>
-        <p:cNvPr id="1" name="">
-          <a:extLst>
-            <a:ext uri="{FF2B5EF4-FFF2-40B4-BE49-F238E27FC236}">
-              <a16:creationId xmlns:a16="http://schemas.microsoft.com/office/drawing/2014/main" id="{889DC87B-729F-8AAA-8405-51761201A7E6}"/>
-            </a:ext>
-          </a:extLst>
-        </p:cNvPr>
+        <p:cNvPr id="1" name=""/>
         <p:cNvGrpSpPr/>
         <p:nvPr/>
       </p:nvGrpSpPr>
@@ -11969,13 +11623,7 @@
       </p:grpSpPr>
       <p:grpSp>
         <p:nvGrpSpPr>
-          <p:cNvPr id="115" name="组合 114">
-            <a:extLst>
-              <a:ext uri="{FF2B5EF4-FFF2-40B4-BE49-F238E27FC236}">
-                <a16:creationId xmlns:a16="http://schemas.microsoft.com/office/drawing/2014/main" id="{E776C44C-204A-D51A-04E5-8544D52E2911}"/>
-              </a:ext>
-            </a:extLst>
-          </p:cNvPr>
+          <p:cNvPr id="115" name="组合 114"/>
           <p:cNvGrpSpPr/>
           <p:nvPr/>
         </p:nvGrpSpPr>
@@ -11989,13 +11637,7 @@
         </p:grpSpPr>
         <p:grpSp>
           <p:nvGrpSpPr>
-            <p:cNvPr id="72" name="组合 71">
-              <a:extLst>
-                <a:ext uri="{FF2B5EF4-FFF2-40B4-BE49-F238E27FC236}">
-                  <a16:creationId xmlns:a16="http://schemas.microsoft.com/office/drawing/2014/main" id="{F6CA35BF-E48D-1019-F5DF-45E608ED4907}"/>
-                </a:ext>
-              </a:extLst>
-            </p:cNvPr>
+            <p:cNvPr id="72" name="组合 71"/>
             <p:cNvGrpSpPr/>
             <p:nvPr/>
           </p:nvGrpSpPr>
@@ -12009,13 +11651,7 @@
           </p:grpSpPr>
           <p:sp>
             <p:nvSpPr>
-              <p:cNvPr id="73" name="椭圆 72">
-                <a:extLst>
-                  <a:ext uri="{FF2B5EF4-FFF2-40B4-BE49-F238E27FC236}">
-                    <a16:creationId xmlns:a16="http://schemas.microsoft.com/office/drawing/2014/main" id="{B7F168DD-DAE8-896E-C292-1192CD498F14}"/>
-                  </a:ext>
-                </a:extLst>
-              </p:cNvPr>
+              <p:cNvPr id="73" name="椭圆 72"/>
               <p:cNvSpPr/>
               <p:nvPr/>
             </p:nvSpPr>
@@ -12058,13 +11694,7 @@
           </p:sp>
           <p:sp>
             <p:nvSpPr>
-              <p:cNvPr id="74" name="任意多边形: 形状 73">
-                <a:extLst>
-                  <a:ext uri="{FF2B5EF4-FFF2-40B4-BE49-F238E27FC236}">
-                    <a16:creationId xmlns:a16="http://schemas.microsoft.com/office/drawing/2014/main" id="{22F2930E-87F5-45A1-DE3E-80A01B149DC6}"/>
-                  </a:ext>
-                </a:extLst>
-              </p:cNvPr>
+              <p:cNvPr id="74" name="任意多边形: 形状 73"/>
               <p:cNvSpPr/>
               <p:nvPr/>
             </p:nvSpPr>
@@ -12170,13 +11800,7 @@
           </p:sp>
           <p:sp>
             <p:nvSpPr>
-              <p:cNvPr id="75" name="椭圆 74">
-                <a:extLst>
-                  <a:ext uri="{FF2B5EF4-FFF2-40B4-BE49-F238E27FC236}">
-                    <a16:creationId xmlns:a16="http://schemas.microsoft.com/office/drawing/2014/main" id="{B7C5C0B4-F9FD-815B-1BF8-1A2ECB505E15}"/>
-                  </a:ext>
-                </a:extLst>
-              </p:cNvPr>
+              <p:cNvPr id="75" name="椭圆 74"/>
               <p:cNvSpPr/>
               <p:nvPr/>
             </p:nvSpPr>
@@ -12223,13 +11847,7 @@
         </p:grpSp>
         <p:sp>
           <p:nvSpPr>
-            <p:cNvPr id="78" name="椭圆 77">
-              <a:extLst>
-                <a:ext uri="{FF2B5EF4-FFF2-40B4-BE49-F238E27FC236}">
-                  <a16:creationId xmlns:a16="http://schemas.microsoft.com/office/drawing/2014/main" id="{92F7D91B-8955-5ABA-E325-2F37F5EACE88}"/>
-                </a:ext>
-              </a:extLst>
-            </p:cNvPr>
+            <p:cNvPr id="78" name="椭圆 77"/>
             <p:cNvSpPr/>
             <p:nvPr/>
           </p:nvSpPr>
@@ -12275,13 +11893,7 @@
         </p:sp>
         <p:sp>
           <p:nvSpPr>
-            <p:cNvPr id="79" name="乘号 78">
-              <a:extLst>
-                <a:ext uri="{FF2B5EF4-FFF2-40B4-BE49-F238E27FC236}">
-                  <a16:creationId xmlns:a16="http://schemas.microsoft.com/office/drawing/2014/main" id="{B09D4B75-8096-4ADD-A454-5CF7AE061259}"/>
-                </a:ext>
-              </a:extLst>
-            </p:cNvPr>
+            <p:cNvPr id="79" name="乘号 78"/>
             <p:cNvSpPr/>
             <p:nvPr/>
           </p:nvSpPr>
@@ -12328,13 +11940,7 @@
         </p:sp>
         <p:sp>
           <p:nvSpPr>
-            <p:cNvPr id="96" name="任意多边形: 形状 95">
-              <a:extLst>
-                <a:ext uri="{FF2B5EF4-FFF2-40B4-BE49-F238E27FC236}">
-                  <a16:creationId xmlns:a16="http://schemas.microsoft.com/office/drawing/2014/main" id="{3E9A56CB-DEBD-BBC5-9EC8-9C5116E6671F}"/>
-                </a:ext>
-              </a:extLst>
-            </p:cNvPr>
+            <p:cNvPr id="96" name="任意多边形: 形状 95"/>
             <p:cNvSpPr/>
             <p:nvPr/>
           </p:nvSpPr>
@@ -12463,13 +12069,7 @@
         </p:sp>
         <p:sp>
           <p:nvSpPr>
-            <p:cNvPr id="95" name="任意多边形: 形状 94">
-              <a:extLst>
-                <a:ext uri="{FF2B5EF4-FFF2-40B4-BE49-F238E27FC236}">
-                  <a16:creationId xmlns:a16="http://schemas.microsoft.com/office/drawing/2014/main" id="{4B958AAC-F76F-3E69-3851-CE8385E8F6B2}"/>
-                </a:ext>
-              </a:extLst>
-            </p:cNvPr>
+            <p:cNvPr id="95" name="任意多边形: 形状 94"/>
             <p:cNvSpPr/>
             <p:nvPr/>
           </p:nvSpPr>
@@ -12603,13 +12203,7 @@
         </p:sp>
         <p:sp>
           <p:nvSpPr>
-            <p:cNvPr id="114" name="椭圆 113">
-              <a:extLst>
-                <a:ext uri="{FF2B5EF4-FFF2-40B4-BE49-F238E27FC236}">
-                  <a16:creationId xmlns:a16="http://schemas.microsoft.com/office/drawing/2014/main" id="{F51A75D1-07DE-AACA-AB09-F191A8A37280}"/>
-                </a:ext>
-              </a:extLst>
-            </p:cNvPr>
+            <p:cNvPr id="114" name="椭圆 113"/>
             <p:cNvSpPr/>
             <p:nvPr/>
           </p:nvSpPr>
@@ -12653,11 +12247,6 @@
         </p:sp>
       </p:grpSp>
     </p:spTree>
-    <p:extLst>
-      <p:ext uri="{BB962C8B-B14F-4D97-AF65-F5344CB8AC3E}">
-        <p14:creationId xmlns:p14="http://schemas.microsoft.com/office/powerpoint/2010/main" val="3105097281"/>
-      </p:ext>
-    </p:extLst>
   </p:cSld>
   <p:clrMapOvr>
     <a:masterClrMapping/>
@@ -12684,13 +12273,7 @@
       </p:grpSpPr>
       <p:grpSp>
         <p:nvGrpSpPr>
-          <p:cNvPr id="12" name="组合 11">
-            <a:extLst>
-              <a:ext uri="{FF2B5EF4-FFF2-40B4-BE49-F238E27FC236}">
-                <a16:creationId xmlns:a16="http://schemas.microsoft.com/office/drawing/2014/main" id="{70363532-B06A-0C53-E339-6430255C0CED}"/>
-              </a:ext>
-            </a:extLst>
-          </p:cNvPr>
+          <p:cNvPr id="12" name="组合 11"/>
           <p:cNvGrpSpPr/>
           <p:nvPr/>
         </p:nvGrpSpPr>
@@ -12704,13 +12287,7 @@
         </p:grpSpPr>
         <p:sp>
           <p:nvSpPr>
-            <p:cNvPr id="4" name="椭圆 3">
-              <a:extLst>
-                <a:ext uri="{FF2B5EF4-FFF2-40B4-BE49-F238E27FC236}">
-                  <a16:creationId xmlns:a16="http://schemas.microsoft.com/office/drawing/2014/main" id="{F8542A11-C2F1-5070-BAA2-39B559ECAE79}"/>
-                </a:ext>
-              </a:extLst>
-            </p:cNvPr>
+            <p:cNvPr id="4" name="椭圆 3"/>
             <p:cNvSpPr/>
             <p:nvPr/>
           </p:nvSpPr>
@@ -12753,13 +12330,7 @@
         </p:sp>
         <p:sp>
           <p:nvSpPr>
-            <p:cNvPr id="5" name="椭圆 4">
-              <a:extLst>
-                <a:ext uri="{FF2B5EF4-FFF2-40B4-BE49-F238E27FC236}">
-                  <a16:creationId xmlns:a16="http://schemas.microsoft.com/office/drawing/2014/main" id="{23DC17EB-FEA3-664A-024D-AD5BECD70C5B}"/>
-                </a:ext>
-              </a:extLst>
-            </p:cNvPr>
+            <p:cNvPr id="5" name="椭圆 4"/>
             <p:cNvSpPr/>
             <p:nvPr/>
           </p:nvSpPr>
@@ -12802,15 +12373,8 @@
         </p:sp>
         <p:cxnSp>
           <p:nvCxnSpPr>
-            <p:cNvPr id="7" name="直接箭头连接符 6">
-              <a:extLst>
-                <a:ext uri="{FF2B5EF4-FFF2-40B4-BE49-F238E27FC236}">
-                  <a16:creationId xmlns:a16="http://schemas.microsoft.com/office/drawing/2014/main" id="{F5EEC050-6571-5A19-5A4C-D13AD3A3B001}"/>
-                </a:ext>
-              </a:extLst>
-            </p:cNvPr>
+            <p:cNvPr id="7" name="直接箭头连接符 6"/>
             <p:cNvCxnSpPr>
-              <a:cxnSpLocks/>
               <a:stCxn id="4" idx="6"/>
             </p:cNvCxnSpPr>
             <p:nvPr/>
@@ -12847,13 +12411,7 @@
         </p:cxnSp>
         <p:sp>
           <p:nvSpPr>
-            <p:cNvPr id="9" name="文本框 8">
-              <a:extLst>
-                <a:ext uri="{FF2B5EF4-FFF2-40B4-BE49-F238E27FC236}">
-                  <a16:creationId xmlns:a16="http://schemas.microsoft.com/office/drawing/2014/main" id="{911D3C76-85A1-3569-7770-4AA92E82D58D}"/>
-                </a:ext>
-              </a:extLst>
-            </p:cNvPr>
+            <p:cNvPr id="9" name="文本框 8"/>
             <p:cNvSpPr txBox="1"/>
             <p:nvPr/>
           </p:nvSpPr>
@@ -12890,13 +12448,7 @@
         </p:sp>
         <p:sp>
           <p:nvSpPr>
-            <p:cNvPr id="10" name="文本框 9">
-              <a:extLst>
-                <a:ext uri="{FF2B5EF4-FFF2-40B4-BE49-F238E27FC236}">
-                  <a16:creationId xmlns:a16="http://schemas.microsoft.com/office/drawing/2014/main" id="{54787157-AE75-C6B6-09E9-A1F180E65F82}"/>
-                </a:ext>
-              </a:extLst>
-            </p:cNvPr>
+            <p:cNvPr id="10" name="文本框 9"/>
             <p:cNvSpPr txBox="1"/>
             <p:nvPr/>
           </p:nvSpPr>
@@ -12933,13 +12485,7 @@
         </p:sp>
         <p:sp>
           <p:nvSpPr>
-            <p:cNvPr id="11" name="文本框 10">
-              <a:extLst>
-                <a:ext uri="{FF2B5EF4-FFF2-40B4-BE49-F238E27FC236}">
-                  <a16:creationId xmlns:a16="http://schemas.microsoft.com/office/drawing/2014/main" id="{8B11D420-ABA2-AFA0-BB21-36D7AA714FA2}"/>
-                </a:ext>
-              </a:extLst>
-            </p:cNvPr>
+            <p:cNvPr id="11" name="文本框 10"/>
             <p:cNvSpPr txBox="1"/>
             <p:nvPr/>
           </p:nvSpPr>
@@ -12976,11 +12522,6 @@
         </p:sp>
       </p:grpSp>
     </p:spTree>
-    <p:extLst>
-      <p:ext uri="{BB962C8B-B14F-4D97-AF65-F5344CB8AC3E}">
-        <p14:creationId xmlns:p14="http://schemas.microsoft.com/office/powerpoint/2010/main" val="3803397024"/>
-      </p:ext>
-    </p:extLst>
   </p:cSld>
   <p:clrMapOvr>
     <a:masterClrMapping/>
@@ -13007,13 +12548,7 @@
       </p:grpSpPr>
       <p:grpSp>
         <p:nvGrpSpPr>
-          <p:cNvPr id="164" name="组合 163">
-            <a:extLst>
-              <a:ext uri="{FF2B5EF4-FFF2-40B4-BE49-F238E27FC236}">
-                <a16:creationId xmlns:a16="http://schemas.microsoft.com/office/drawing/2014/main" id="{19B46C62-DD27-FA7F-ECCF-60EBBF25A0FC}"/>
-              </a:ext>
-            </a:extLst>
-          </p:cNvPr>
+          <p:cNvPr id="164" name="组合 163"/>
           <p:cNvGrpSpPr/>
           <p:nvPr/>
         </p:nvGrpSpPr>
@@ -13027,13 +12562,7 @@
         </p:grpSpPr>
         <p:sp>
           <p:nvSpPr>
-            <p:cNvPr id="4" name="椭圆 3">
-              <a:extLst>
-                <a:ext uri="{FF2B5EF4-FFF2-40B4-BE49-F238E27FC236}">
-                  <a16:creationId xmlns:a16="http://schemas.microsoft.com/office/drawing/2014/main" id="{ECDFF1E3-B3FC-6644-E9D7-900504C875B4}"/>
-                </a:ext>
-              </a:extLst>
-            </p:cNvPr>
+            <p:cNvPr id="4" name="椭圆 3"/>
             <p:cNvSpPr/>
             <p:nvPr/>
           </p:nvSpPr>
@@ -13079,13 +12608,7 @@
         </p:sp>
         <p:cxnSp>
           <p:nvCxnSpPr>
-            <p:cNvPr id="15" name="直接连接符 14">
-              <a:extLst>
-                <a:ext uri="{FF2B5EF4-FFF2-40B4-BE49-F238E27FC236}">
-                  <a16:creationId xmlns:a16="http://schemas.microsoft.com/office/drawing/2014/main" id="{65B21204-9641-7880-3668-1A4D59236F7A}"/>
-                </a:ext>
-              </a:extLst>
-            </p:cNvPr>
+            <p:cNvPr id="15" name="直接连接符 14"/>
             <p:cNvCxnSpPr>
               <a:stCxn id="4" idx="2"/>
               <a:endCxn id="4" idx="6"/>
@@ -13123,15 +12646,8 @@
         </p:cxnSp>
         <p:cxnSp>
           <p:nvCxnSpPr>
-            <p:cNvPr id="17" name="直接连接符 16">
-              <a:extLst>
-                <a:ext uri="{FF2B5EF4-FFF2-40B4-BE49-F238E27FC236}">
-                  <a16:creationId xmlns:a16="http://schemas.microsoft.com/office/drawing/2014/main" id="{257611F3-B0B1-6DE3-E4A8-0244527C29EF}"/>
-                </a:ext>
-              </a:extLst>
-            </p:cNvPr>
+            <p:cNvPr id="17" name="直接连接符 16"/>
             <p:cNvCxnSpPr>
-              <a:cxnSpLocks/>
               <a:stCxn id="4" idx="0"/>
               <a:endCxn id="4" idx="4"/>
             </p:cNvCxnSpPr>
@@ -13169,13 +12685,7 @@
       </p:grpSp>
       <p:grpSp>
         <p:nvGrpSpPr>
-          <p:cNvPr id="165" name="组合 164">
-            <a:extLst>
-              <a:ext uri="{FF2B5EF4-FFF2-40B4-BE49-F238E27FC236}">
-                <a16:creationId xmlns:a16="http://schemas.microsoft.com/office/drawing/2014/main" id="{9312E099-0B00-5FAD-CB85-E60F4B5C5E9B}"/>
-              </a:ext>
-            </a:extLst>
-          </p:cNvPr>
+          <p:cNvPr id="165" name="组合 164"/>
           <p:cNvGrpSpPr/>
           <p:nvPr/>
         </p:nvGrpSpPr>
@@ -13189,13 +12699,7 @@
         </p:grpSpPr>
         <p:sp>
           <p:nvSpPr>
-            <p:cNvPr id="5" name="椭圆 4">
-              <a:extLst>
-                <a:ext uri="{FF2B5EF4-FFF2-40B4-BE49-F238E27FC236}">
-                  <a16:creationId xmlns:a16="http://schemas.microsoft.com/office/drawing/2014/main" id="{1E254C08-9194-FC4F-1B77-0A80DD7A6FBA}"/>
-                </a:ext>
-              </a:extLst>
-            </p:cNvPr>
+            <p:cNvPr id="5" name="椭圆 4"/>
             <p:cNvSpPr/>
             <p:nvPr/>
           </p:nvSpPr>
@@ -13241,15 +12745,8 @@
         </p:sp>
         <p:cxnSp>
           <p:nvCxnSpPr>
-            <p:cNvPr id="20" name="直接连接符 19">
-              <a:extLst>
-                <a:ext uri="{FF2B5EF4-FFF2-40B4-BE49-F238E27FC236}">
-                  <a16:creationId xmlns:a16="http://schemas.microsoft.com/office/drawing/2014/main" id="{44543A7B-FFE0-3472-F844-F8C36A9B553D}"/>
-                </a:ext>
-              </a:extLst>
-            </p:cNvPr>
+            <p:cNvPr id="20" name="直接连接符 19"/>
             <p:cNvCxnSpPr>
-              <a:cxnSpLocks/>
               <a:stCxn id="5" idx="2"/>
               <a:endCxn id="5" idx="6"/>
             </p:cNvCxnSpPr>
@@ -13287,13 +12784,7 @@
       </p:grpSp>
       <p:grpSp>
         <p:nvGrpSpPr>
-          <p:cNvPr id="166" name="组合 165">
-            <a:extLst>
-              <a:ext uri="{FF2B5EF4-FFF2-40B4-BE49-F238E27FC236}">
-                <a16:creationId xmlns:a16="http://schemas.microsoft.com/office/drawing/2014/main" id="{68055D0F-C363-7D0F-FC77-7FF54FEEE83F}"/>
-              </a:ext>
-            </a:extLst>
-          </p:cNvPr>
+          <p:cNvPr id="166" name="组合 165"/>
           <p:cNvGrpSpPr/>
           <p:nvPr/>
         </p:nvGrpSpPr>
@@ -13307,13 +12798,7 @@
         </p:grpSpPr>
         <p:sp>
           <p:nvSpPr>
-            <p:cNvPr id="6" name="椭圆 5">
-              <a:extLst>
-                <a:ext uri="{FF2B5EF4-FFF2-40B4-BE49-F238E27FC236}">
-                  <a16:creationId xmlns:a16="http://schemas.microsoft.com/office/drawing/2014/main" id="{AA5EB3FD-6A08-D4DB-CB54-2A87FFC5DBD9}"/>
-                </a:ext>
-              </a:extLst>
-            </p:cNvPr>
+            <p:cNvPr id="6" name="椭圆 5"/>
             <p:cNvSpPr/>
             <p:nvPr/>
           </p:nvSpPr>
@@ -13359,16 +12844,8 @@
         </p:sp>
         <p:cxnSp>
           <p:nvCxnSpPr>
-            <p:cNvPr id="46" name="直接连接符 45">
-              <a:extLst>
-                <a:ext uri="{FF2B5EF4-FFF2-40B4-BE49-F238E27FC236}">
-                  <a16:creationId xmlns:a16="http://schemas.microsoft.com/office/drawing/2014/main" id="{830B33B0-AE7B-AFF5-C5BD-DFC87DD7B184}"/>
-                </a:ext>
-              </a:extLst>
-            </p:cNvPr>
-            <p:cNvCxnSpPr>
-              <a:cxnSpLocks/>
-            </p:cNvCxnSpPr>
+            <p:cNvPr id="46" name="直接连接符 45"/>
+            <p:cNvCxnSpPr/>
             <p:nvPr/>
           </p:nvCxnSpPr>
           <p:spPr>
@@ -13402,16 +12879,8 @@
         </p:cxnSp>
         <p:cxnSp>
           <p:nvCxnSpPr>
-            <p:cNvPr id="48" name="直接连接符 47">
-              <a:extLst>
-                <a:ext uri="{FF2B5EF4-FFF2-40B4-BE49-F238E27FC236}">
-                  <a16:creationId xmlns:a16="http://schemas.microsoft.com/office/drawing/2014/main" id="{5350CC2C-6C13-F1F9-526B-15020F494946}"/>
-                </a:ext>
-              </a:extLst>
-            </p:cNvPr>
-            <p:cNvCxnSpPr>
-              <a:cxnSpLocks/>
-            </p:cNvCxnSpPr>
+            <p:cNvPr id="48" name="直接连接符 47"/>
+            <p:cNvCxnSpPr/>
             <p:nvPr/>
           </p:nvCxnSpPr>
           <p:spPr>
@@ -13446,13 +12915,7 @@
       </p:grpSp>
       <p:grpSp>
         <p:nvGrpSpPr>
-          <p:cNvPr id="167" name="组合 166">
-            <a:extLst>
-              <a:ext uri="{FF2B5EF4-FFF2-40B4-BE49-F238E27FC236}">
-                <a16:creationId xmlns:a16="http://schemas.microsoft.com/office/drawing/2014/main" id="{FC38721E-2E9B-52A5-D919-13C598F37D44}"/>
-              </a:ext>
-            </a:extLst>
-          </p:cNvPr>
+          <p:cNvPr id="167" name="组合 166"/>
           <p:cNvGrpSpPr/>
           <p:nvPr/>
         </p:nvGrpSpPr>
@@ -13466,13 +12929,7 @@
         </p:grpSpPr>
         <p:sp>
           <p:nvSpPr>
-            <p:cNvPr id="51" name="椭圆 50">
-              <a:extLst>
-                <a:ext uri="{FF2B5EF4-FFF2-40B4-BE49-F238E27FC236}">
-                  <a16:creationId xmlns:a16="http://schemas.microsoft.com/office/drawing/2014/main" id="{83A733BC-ECE1-A82D-F477-16AA21A4B0A6}"/>
-                </a:ext>
-              </a:extLst>
-            </p:cNvPr>
+            <p:cNvPr id="51" name="椭圆 50"/>
             <p:cNvSpPr/>
             <p:nvPr/>
           </p:nvSpPr>
@@ -13518,16 +12975,8 @@
         </p:sp>
         <p:cxnSp>
           <p:nvCxnSpPr>
-            <p:cNvPr id="52" name="直接连接符 51">
-              <a:extLst>
-                <a:ext uri="{FF2B5EF4-FFF2-40B4-BE49-F238E27FC236}">
-                  <a16:creationId xmlns:a16="http://schemas.microsoft.com/office/drawing/2014/main" id="{4CCDA0E4-AB2B-FCA4-9F12-5630488C00F5}"/>
-                </a:ext>
-              </a:extLst>
-            </p:cNvPr>
-            <p:cNvCxnSpPr>
-              <a:cxnSpLocks/>
-            </p:cNvCxnSpPr>
+            <p:cNvPr id="52" name="直接连接符 51"/>
+            <p:cNvCxnSpPr/>
             <p:nvPr/>
           </p:nvCxnSpPr>
           <p:spPr>
@@ -13561,15 +13010,8 @@
         </p:cxnSp>
         <p:cxnSp>
           <p:nvCxnSpPr>
-            <p:cNvPr id="56" name="直接连接符 55">
-              <a:extLst>
-                <a:ext uri="{FF2B5EF4-FFF2-40B4-BE49-F238E27FC236}">
-                  <a16:creationId xmlns:a16="http://schemas.microsoft.com/office/drawing/2014/main" id="{5725799D-3120-2AE6-1807-512BB6E20350}"/>
-                </a:ext>
-              </a:extLst>
-            </p:cNvPr>
+            <p:cNvPr id="56" name="直接连接符 55"/>
             <p:cNvCxnSpPr>
-              <a:cxnSpLocks/>
               <a:endCxn id="51" idx="3"/>
             </p:cNvCxnSpPr>
             <p:nvPr/>
@@ -13605,15 +13047,8 @@
         </p:cxnSp>
         <p:cxnSp>
           <p:nvCxnSpPr>
-            <p:cNvPr id="58" name="直接连接符 57">
-              <a:extLst>
-                <a:ext uri="{FF2B5EF4-FFF2-40B4-BE49-F238E27FC236}">
-                  <a16:creationId xmlns:a16="http://schemas.microsoft.com/office/drawing/2014/main" id="{4E0EC406-04D7-4EF5-2B36-C62FBE5AA8E6}"/>
-                </a:ext>
-              </a:extLst>
-            </p:cNvPr>
+            <p:cNvPr id="58" name="直接连接符 57"/>
             <p:cNvCxnSpPr>
-              <a:cxnSpLocks/>
               <a:endCxn id="51" idx="5"/>
             </p:cNvCxnSpPr>
             <p:nvPr/>
@@ -13650,13 +13085,7 @@
       </p:grpSp>
       <p:grpSp>
         <p:nvGrpSpPr>
-          <p:cNvPr id="168" name="组合 167">
-            <a:extLst>
-              <a:ext uri="{FF2B5EF4-FFF2-40B4-BE49-F238E27FC236}">
-                <a16:creationId xmlns:a16="http://schemas.microsoft.com/office/drawing/2014/main" id="{F68A5560-4A5D-C4C7-79B2-0A46136BC7D0}"/>
-              </a:ext>
-            </a:extLst>
-          </p:cNvPr>
+          <p:cNvPr id="168" name="组合 167"/>
           <p:cNvGrpSpPr/>
           <p:nvPr/>
         </p:nvGrpSpPr>
@@ -13670,13 +13099,7 @@
         </p:grpSpPr>
         <p:sp>
           <p:nvSpPr>
-            <p:cNvPr id="8" name="椭圆 7">
-              <a:extLst>
-                <a:ext uri="{FF2B5EF4-FFF2-40B4-BE49-F238E27FC236}">
-                  <a16:creationId xmlns:a16="http://schemas.microsoft.com/office/drawing/2014/main" id="{02B720F0-71A6-5A89-8338-744A48B87862}"/>
-                </a:ext>
-              </a:extLst>
-            </p:cNvPr>
+            <p:cNvPr id="8" name="椭圆 7"/>
             <p:cNvSpPr/>
             <p:nvPr/>
           </p:nvSpPr>
@@ -13722,15 +13145,8 @@
         </p:sp>
         <p:cxnSp>
           <p:nvCxnSpPr>
-            <p:cNvPr id="61" name="直接连接符 60">
-              <a:extLst>
-                <a:ext uri="{FF2B5EF4-FFF2-40B4-BE49-F238E27FC236}">
-                  <a16:creationId xmlns:a16="http://schemas.microsoft.com/office/drawing/2014/main" id="{7F8EC5EF-47C2-DCFD-E80F-B6378B150146}"/>
-                </a:ext>
-              </a:extLst>
-            </p:cNvPr>
+            <p:cNvPr id="61" name="直接连接符 60"/>
             <p:cNvCxnSpPr>
-              <a:cxnSpLocks/>
               <a:stCxn id="8" idx="4"/>
               <a:endCxn id="8" idx="1"/>
             </p:cNvCxnSpPr>
@@ -13767,15 +13183,8 @@
         </p:cxnSp>
         <p:cxnSp>
           <p:nvCxnSpPr>
-            <p:cNvPr id="64" name="直接连接符 63">
-              <a:extLst>
-                <a:ext uri="{FF2B5EF4-FFF2-40B4-BE49-F238E27FC236}">
-                  <a16:creationId xmlns:a16="http://schemas.microsoft.com/office/drawing/2014/main" id="{3CC5FBD5-96D5-1556-0EE3-99D862D3FDBC}"/>
-                </a:ext>
-              </a:extLst>
-            </p:cNvPr>
+            <p:cNvPr id="64" name="直接连接符 63"/>
             <p:cNvCxnSpPr>
-              <a:cxnSpLocks/>
               <a:stCxn id="8" idx="4"/>
               <a:endCxn id="8" idx="7"/>
             </p:cNvCxnSpPr>
@@ -13813,13 +13222,7 @@
       </p:grpSp>
       <p:grpSp>
         <p:nvGrpSpPr>
-          <p:cNvPr id="169" name="组合 168">
-            <a:extLst>
-              <a:ext uri="{FF2B5EF4-FFF2-40B4-BE49-F238E27FC236}">
-                <a16:creationId xmlns:a16="http://schemas.microsoft.com/office/drawing/2014/main" id="{7D7C1E18-3821-54B3-35B5-294C6F61A7EA}"/>
-              </a:ext>
-            </a:extLst>
-          </p:cNvPr>
+          <p:cNvPr id="169" name="组合 168"/>
           <p:cNvGrpSpPr/>
           <p:nvPr/>
         </p:nvGrpSpPr>
@@ -13833,13 +13236,7 @@
         </p:grpSpPr>
         <p:sp>
           <p:nvSpPr>
-            <p:cNvPr id="9" name="椭圆 8">
-              <a:extLst>
-                <a:ext uri="{FF2B5EF4-FFF2-40B4-BE49-F238E27FC236}">
-                  <a16:creationId xmlns:a16="http://schemas.microsoft.com/office/drawing/2014/main" id="{3FFDA381-9FBF-3A06-B767-A70D2C7A1DB8}"/>
-                </a:ext>
-              </a:extLst>
-            </p:cNvPr>
+            <p:cNvPr id="9" name="椭圆 8"/>
             <p:cNvSpPr/>
             <p:nvPr/>
           </p:nvSpPr>
@@ -13885,16 +13282,8 @@
         </p:sp>
         <p:cxnSp>
           <p:nvCxnSpPr>
-            <p:cNvPr id="70" name="直接连接符 69">
-              <a:extLst>
-                <a:ext uri="{FF2B5EF4-FFF2-40B4-BE49-F238E27FC236}">
-                  <a16:creationId xmlns:a16="http://schemas.microsoft.com/office/drawing/2014/main" id="{5A03517B-AA15-4BAA-A463-BB8F92DA8748}"/>
-                </a:ext>
-              </a:extLst>
-            </p:cNvPr>
-            <p:cNvCxnSpPr>
-              <a:cxnSpLocks/>
-            </p:cNvCxnSpPr>
+            <p:cNvPr id="70" name="直接连接符 69"/>
+            <p:cNvCxnSpPr/>
             <p:nvPr/>
           </p:nvCxnSpPr>
           <p:spPr>
@@ -13928,15 +13317,8 @@
         </p:cxnSp>
         <p:cxnSp>
           <p:nvCxnSpPr>
-            <p:cNvPr id="73" name="直接连接符 72">
-              <a:extLst>
-                <a:ext uri="{FF2B5EF4-FFF2-40B4-BE49-F238E27FC236}">
-                  <a16:creationId xmlns:a16="http://schemas.microsoft.com/office/drawing/2014/main" id="{225C9FC1-27B7-4FAF-027E-F461B1891FEE}"/>
-                </a:ext>
-              </a:extLst>
-            </p:cNvPr>
+            <p:cNvPr id="73" name="直接连接符 72"/>
             <p:cNvCxnSpPr>
-              <a:cxnSpLocks/>
               <a:endCxn id="9" idx="7"/>
             </p:cNvCxnSpPr>
             <p:nvPr/>
@@ -13972,15 +13354,8 @@
         </p:cxnSp>
         <p:cxnSp>
           <p:nvCxnSpPr>
-            <p:cNvPr id="75" name="直接连接符 74">
-              <a:extLst>
-                <a:ext uri="{FF2B5EF4-FFF2-40B4-BE49-F238E27FC236}">
-                  <a16:creationId xmlns:a16="http://schemas.microsoft.com/office/drawing/2014/main" id="{067AD0F9-3063-5EAA-816B-13E2CB70EA3B}"/>
-                </a:ext>
-              </a:extLst>
-            </p:cNvPr>
+            <p:cNvPr id="75" name="直接连接符 74"/>
             <p:cNvCxnSpPr>
-              <a:cxnSpLocks/>
               <a:stCxn id="9" idx="1"/>
             </p:cNvCxnSpPr>
             <p:nvPr/>
@@ -14016,13 +13391,7 @@
         </p:cxnSp>
         <p:cxnSp>
           <p:nvCxnSpPr>
-            <p:cNvPr id="85" name="直接连接符 84">
-              <a:extLst>
-                <a:ext uri="{FF2B5EF4-FFF2-40B4-BE49-F238E27FC236}">
-                  <a16:creationId xmlns:a16="http://schemas.microsoft.com/office/drawing/2014/main" id="{C4F826D6-EE9E-5FBA-3F8D-D26125F055E4}"/>
-                </a:ext>
-              </a:extLst>
-            </p:cNvPr>
+            <p:cNvPr id="85" name="直接连接符 84"/>
             <p:cNvCxnSpPr/>
             <p:nvPr/>
           </p:nvCxnSpPr>
@@ -14058,13 +13427,7 @@
       </p:grpSp>
       <p:grpSp>
         <p:nvGrpSpPr>
-          <p:cNvPr id="170" name="组合 169">
-            <a:extLst>
-              <a:ext uri="{FF2B5EF4-FFF2-40B4-BE49-F238E27FC236}">
-                <a16:creationId xmlns:a16="http://schemas.microsoft.com/office/drawing/2014/main" id="{D5487A61-BB3E-CC10-2C9D-1E59E30F98BE}"/>
-              </a:ext>
-            </a:extLst>
-          </p:cNvPr>
+          <p:cNvPr id="170" name="组合 169"/>
           <p:cNvGrpSpPr/>
           <p:nvPr/>
         </p:nvGrpSpPr>
@@ -14078,13 +13441,7 @@
         </p:grpSpPr>
         <p:sp>
           <p:nvSpPr>
-            <p:cNvPr id="10" name="椭圆 9">
-              <a:extLst>
-                <a:ext uri="{FF2B5EF4-FFF2-40B4-BE49-F238E27FC236}">
-                  <a16:creationId xmlns:a16="http://schemas.microsoft.com/office/drawing/2014/main" id="{4E65A090-70D5-EB8F-A120-78A71553ED59}"/>
-                </a:ext>
-              </a:extLst>
-            </p:cNvPr>
+            <p:cNvPr id="10" name="椭圆 9"/>
             <p:cNvSpPr/>
             <p:nvPr/>
           </p:nvSpPr>
@@ -14130,15 +13487,8 @@
         </p:sp>
         <p:cxnSp>
           <p:nvCxnSpPr>
-            <p:cNvPr id="87" name="直接连接符 86">
-              <a:extLst>
-                <a:ext uri="{FF2B5EF4-FFF2-40B4-BE49-F238E27FC236}">
-                  <a16:creationId xmlns:a16="http://schemas.microsoft.com/office/drawing/2014/main" id="{22226F34-CCA3-EE66-8635-13759255388B}"/>
-                </a:ext>
-              </a:extLst>
-            </p:cNvPr>
+            <p:cNvPr id="87" name="直接连接符 86"/>
             <p:cNvCxnSpPr>
-              <a:cxnSpLocks/>
               <a:stCxn id="10" idx="1"/>
             </p:cNvCxnSpPr>
             <p:nvPr/>
@@ -14174,15 +13524,8 @@
         </p:cxnSp>
         <p:cxnSp>
           <p:nvCxnSpPr>
-            <p:cNvPr id="91" name="直接连接符 90">
-              <a:extLst>
-                <a:ext uri="{FF2B5EF4-FFF2-40B4-BE49-F238E27FC236}">
-                  <a16:creationId xmlns:a16="http://schemas.microsoft.com/office/drawing/2014/main" id="{751FED8A-8E28-E0F3-0F0D-723C73B331D2}"/>
-                </a:ext>
-              </a:extLst>
-            </p:cNvPr>
+            <p:cNvPr id="91" name="直接连接符 90"/>
             <p:cNvCxnSpPr>
-              <a:cxnSpLocks/>
               <a:endCxn id="10" idx="4"/>
             </p:cNvCxnSpPr>
             <p:nvPr/>
@@ -14218,13 +13561,7 @@
         </p:cxnSp>
         <p:cxnSp>
           <p:nvCxnSpPr>
-            <p:cNvPr id="94" name="直接连接符 93">
-              <a:extLst>
-                <a:ext uri="{FF2B5EF4-FFF2-40B4-BE49-F238E27FC236}">
-                  <a16:creationId xmlns:a16="http://schemas.microsoft.com/office/drawing/2014/main" id="{BD869C33-34E9-8901-81DF-3A25DDD682B7}"/>
-                </a:ext>
-              </a:extLst>
-            </p:cNvPr>
+            <p:cNvPr id="94" name="直接连接符 93"/>
             <p:cNvCxnSpPr>
               <a:stCxn id="10" idx="7"/>
             </p:cNvCxnSpPr>
@@ -14262,13 +13599,7 @@
       </p:grpSp>
       <p:grpSp>
         <p:nvGrpSpPr>
-          <p:cNvPr id="171" name="组合 170">
-            <a:extLst>
-              <a:ext uri="{FF2B5EF4-FFF2-40B4-BE49-F238E27FC236}">
-                <a16:creationId xmlns:a16="http://schemas.microsoft.com/office/drawing/2014/main" id="{2249468F-06D5-DF8C-7D89-98799ACFCEED}"/>
-              </a:ext>
-            </a:extLst>
-          </p:cNvPr>
+          <p:cNvPr id="171" name="组合 170"/>
           <p:cNvGrpSpPr/>
           <p:nvPr/>
         </p:nvGrpSpPr>
@@ -14282,13 +13613,7 @@
         </p:grpSpPr>
         <p:sp>
           <p:nvSpPr>
-            <p:cNvPr id="99" name="椭圆 98">
-              <a:extLst>
-                <a:ext uri="{FF2B5EF4-FFF2-40B4-BE49-F238E27FC236}">
-                  <a16:creationId xmlns:a16="http://schemas.microsoft.com/office/drawing/2014/main" id="{11EE524E-00CD-98B2-22E3-1315D1BE3C21}"/>
-                </a:ext>
-              </a:extLst>
-            </p:cNvPr>
+            <p:cNvPr id="99" name="椭圆 98"/>
             <p:cNvSpPr/>
             <p:nvPr/>
           </p:nvSpPr>
@@ -14334,16 +13659,8 @@
         </p:sp>
         <p:cxnSp>
           <p:nvCxnSpPr>
-            <p:cNvPr id="104" name="直接连接符 103">
-              <a:extLst>
-                <a:ext uri="{FF2B5EF4-FFF2-40B4-BE49-F238E27FC236}">
-                  <a16:creationId xmlns:a16="http://schemas.microsoft.com/office/drawing/2014/main" id="{BB83B806-1BD2-A94C-61E9-E0529E40FF4D}"/>
-                </a:ext>
-              </a:extLst>
-            </p:cNvPr>
-            <p:cNvCxnSpPr>
-              <a:cxnSpLocks/>
-            </p:cNvCxnSpPr>
+            <p:cNvPr id="104" name="直接连接符 103"/>
+            <p:cNvCxnSpPr/>
             <p:nvPr/>
           </p:nvCxnSpPr>
           <p:spPr>
@@ -14377,16 +13694,8 @@
         </p:cxnSp>
         <p:cxnSp>
           <p:nvCxnSpPr>
-            <p:cNvPr id="106" name="直接连接符 105">
-              <a:extLst>
-                <a:ext uri="{FF2B5EF4-FFF2-40B4-BE49-F238E27FC236}">
-                  <a16:creationId xmlns:a16="http://schemas.microsoft.com/office/drawing/2014/main" id="{756E1E7D-A27A-B715-307E-68B34C9E85A3}"/>
-                </a:ext>
-              </a:extLst>
-            </p:cNvPr>
-            <p:cNvCxnSpPr>
-              <a:cxnSpLocks/>
-            </p:cNvCxnSpPr>
+            <p:cNvPr id="106" name="直接连接符 105"/>
+            <p:cNvCxnSpPr/>
             <p:nvPr/>
           </p:nvCxnSpPr>
           <p:spPr>
@@ -14420,16 +13729,8 @@
         </p:cxnSp>
         <p:cxnSp>
           <p:nvCxnSpPr>
-            <p:cNvPr id="108" name="直接连接符 107">
-              <a:extLst>
-                <a:ext uri="{FF2B5EF4-FFF2-40B4-BE49-F238E27FC236}">
-                  <a16:creationId xmlns:a16="http://schemas.microsoft.com/office/drawing/2014/main" id="{98953008-370C-2F98-5A94-65652A00CBE3}"/>
-                </a:ext>
-              </a:extLst>
-            </p:cNvPr>
-            <p:cNvCxnSpPr>
-              <a:cxnSpLocks/>
-            </p:cNvCxnSpPr>
+            <p:cNvPr id="108" name="直接连接符 107"/>
+            <p:cNvCxnSpPr/>
             <p:nvPr/>
           </p:nvCxnSpPr>
           <p:spPr>
@@ -14464,13 +13765,7 @@
       </p:grpSp>
       <p:grpSp>
         <p:nvGrpSpPr>
-          <p:cNvPr id="172" name="组合 171">
-            <a:extLst>
-              <a:ext uri="{FF2B5EF4-FFF2-40B4-BE49-F238E27FC236}">
-                <a16:creationId xmlns:a16="http://schemas.microsoft.com/office/drawing/2014/main" id="{8552CD4E-CE81-AC1C-E008-B0FF01BD305E}"/>
-              </a:ext>
-            </a:extLst>
-          </p:cNvPr>
+          <p:cNvPr id="172" name="组合 171"/>
           <p:cNvGrpSpPr/>
           <p:nvPr/>
         </p:nvGrpSpPr>
@@ -14484,13 +13779,7 @@
         </p:grpSpPr>
         <p:sp>
           <p:nvSpPr>
-            <p:cNvPr id="12" name="椭圆 11">
-              <a:extLst>
-                <a:ext uri="{FF2B5EF4-FFF2-40B4-BE49-F238E27FC236}">
-                  <a16:creationId xmlns:a16="http://schemas.microsoft.com/office/drawing/2014/main" id="{46E2A46A-2DAC-BE5E-4CDA-6281AA318B4E}"/>
-                </a:ext>
-              </a:extLst>
-            </p:cNvPr>
+            <p:cNvPr id="12" name="椭圆 11"/>
             <p:cNvSpPr/>
             <p:nvPr/>
           </p:nvSpPr>
@@ -14536,13 +13825,7 @@
         </p:sp>
         <p:cxnSp>
           <p:nvCxnSpPr>
-            <p:cNvPr id="122" name="直接连接符 121">
-              <a:extLst>
-                <a:ext uri="{FF2B5EF4-FFF2-40B4-BE49-F238E27FC236}">
-                  <a16:creationId xmlns:a16="http://schemas.microsoft.com/office/drawing/2014/main" id="{C8DADD5C-D4CF-CFAB-437B-64A1F829BFBF}"/>
-                </a:ext>
-              </a:extLst>
-            </p:cNvPr>
+            <p:cNvPr id="122" name="直接连接符 121"/>
             <p:cNvCxnSpPr>
               <a:stCxn id="12" idx="2"/>
               <a:endCxn id="12" idx="6"/>
@@ -14580,13 +13863,7 @@
         </p:cxnSp>
         <p:cxnSp>
           <p:nvCxnSpPr>
-            <p:cNvPr id="124" name="直接连接符 123">
-              <a:extLst>
-                <a:ext uri="{FF2B5EF4-FFF2-40B4-BE49-F238E27FC236}">
-                  <a16:creationId xmlns:a16="http://schemas.microsoft.com/office/drawing/2014/main" id="{6AE3B6E4-E315-246B-02EA-9EB99C354A14}"/>
-                </a:ext>
-              </a:extLst>
-            </p:cNvPr>
+            <p:cNvPr id="124" name="直接连接符 123"/>
             <p:cNvCxnSpPr>
               <a:stCxn id="12" idx="0"/>
             </p:cNvCxnSpPr>
@@ -14624,13 +13901,7 @@
       </p:grpSp>
       <p:grpSp>
         <p:nvGrpSpPr>
-          <p:cNvPr id="173" name="组合 172">
-            <a:extLst>
-              <a:ext uri="{FF2B5EF4-FFF2-40B4-BE49-F238E27FC236}">
-                <a16:creationId xmlns:a16="http://schemas.microsoft.com/office/drawing/2014/main" id="{9F14E61E-C104-E85F-E389-E4E7464FA008}"/>
-              </a:ext>
-            </a:extLst>
-          </p:cNvPr>
+          <p:cNvPr id="173" name="组合 172"/>
           <p:cNvGrpSpPr/>
           <p:nvPr/>
         </p:nvGrpSpPr>
@@ -14644,13 +13915,7 @@
         </p:grpSpPr>
         <p:sp>
           <p:nvSpPr>
-            <p:cNvPr id="125" name="椭圆 124">
-              <a:extLst>
-                <a:ext uri="{FF2B5EF4-FFF2-40B4-BE49-F238E27FC236}">
-                  <a16:creationId xmlns:a16="http://schemas.microsoft.com/office/drawing/2014/main" id="{5863B3E8-5F24-B8CE-649E-60A275DCF27C}"/>
-                </a:ext>
-              </a:extLst>
-            </p:cNvPr>
+            <p:cNvPr id="125" name="椭圆 124"/>
             <p:cNvSpPr/>
             <p:nvPr/>
           </p:nvSpPr>
@@ -14696,15 +13961,8 @@
         </p:sp>
         <p:cxnSp>
           <p:nvCxnSpPr>
-            <p:cNvPr id="143" name="直接连接符 142">
-              <a:extLst>
-                <a:ext uri="{FF2B5EF4-FFF2-40B4-BE49-F238E27FC236}">
-                  <a16:creationId xmlns:a16="http://schemas.microsoft.com/office/drawing/2014/main" id="{7D4ACDC1-E9D2-C70E-7725-AD723CA55B25}"/>
-                </a:ext>
-              </a:extLst>
-            </p:cNvPr>
+            <p:cNvPr id="143" name="直接连接符 142"/>
             <p:cNvCxnSpPr>
-              <a:cxnSpLocks/>
               <a:stCxn id="125" idx="2"/>
             </p:cNvCxnSpPr>
             <p:nvPr/>
@@ -14740,16 +13998,8 @@
         </p:cxnSp>
         <p:cxnSp>
           <p:nvCxnSpPr>
-            <p:cNvPr id="145" name="直接连接符 144">
-              <a:extLst>
-                <a:ext uri="{FF2B5EF4-FFF2-40B4-BE49-F238E27FC236}">
-                  <a16:creationId xmlns:a16="http://schemas.microsoft.com/office/drawing/2014/main" id="{F9C35116-D787-34A8-BCFD-CB88939E41EE}"/>
-                </a:ext>
-              </a:extLst>
-            </p:cNvPr>
-            <p:cNvCxnSpPr>
-              <a:cxnSpLocks/>
-            </p:cNvCxnSpPr>
+            <p:cNvPr id="145" name="直接连接符 144"/>
+            <p:cNvCxnSpPr/>
             <p:nvPr/>
           </p:nvCxnSpPr>
           <p:spPr>
@@ -14783,16 +14033,8 @@
         </p:cxnSp>
         <p:cxnSp>
           <p:nvCxnSpPr>
-            <p:cNvPr id="151" name="直接连接符 150">
-              <a:extLst>
-                <a:ext uri="{FF2B5EF4-FFF2-40B4-BE49-F238E27FC236}">
-                  <a16:creationId xmlns:a16="http://schemas.microsoft.com/office/drawing/2014/main" id="{A1C1EBA6-4E05-4452-DE79-0651CA9E7144}"/>
-                </a:ext>
-              </a:extLst>
-            </p:cNvPr>
-            <p:cNvCxnSpPr>
-              <a:cxnSpLocks/>
-            </p:cNvCxnSpPr>
+            <p:cNvPr id="151" name="直接连接符 150"/>
+            <p:cNvCxnSpPr/>
             <p:nvPr/>
           </p:nvCxnSpPr>
           <p:spPr>
@@ -14826,13 +14068,7 @@
         </p:cxnSp>
         <p:cxnSp>
           <p:nvCxnSpPr>
-            <p:cNvPr id="154" name="直接连接符 153">
-              <a:extLst>
-                <a:ext uri="{FF2B5EF4-FFF2-40B4-BE49-F238E27FC236}">
-                  <a16:creationId xmlns:a16="http://schemas.microsoft.com/office/drawing/2014/main" id="{2B4399BF-ECD2-0F25-CFB2-014B6A80A866}"/>
-                </a:ext>
-              </a:extLst>
-            </p:cNvPr>
+            <p:cNvPr id="154" name="直接连接符 153"/>
             <p:cNvCxnSpPr/>
             <p:nvPr/>
           </p:nvCxnSpPr>
@@ -14867,16 +14103,8 @@
         </p:cxnSp>
         <p:cxnSp>
           <p:nvCxnSpPr>
-            <p:cNvPr id="156" name="直接连接符 155">
-              <a:extLst>
-                <a:ext uri="{FF2B5EF4-FFF2-40B4-BE49-F238E27FC236}">
-                  <a16:creationId xmlns:a16="http://schemas.microsoft.com/office/drawing/2014/main" id="{48AE77BB-3A97-0D3D-2433-9F823839BDB8}"/>
-                </a:ext>
-              </a:extLst>
-            </p:cNvPr>
-            <p:cNvCxnSpPr>
-              <a:cxnSpLocks/>
-            </p:cNvCxnSpPr>
+            <p:cNvPr id="156" name="直接连接符 155"/>
+            <p:cNvCxnSpPr/>
             <p:nvPr/>
           </p:nvCxnSpPr>
           <p:spPr>
@@ -14910,11 +14138,6 @@
         </p:cxnSp>
       </p:grpSp>
     </p:spTree>
-    <p:extLst>
-      <p:ext uri="{BB962C8B-B14F-4D97-AF65-F5344CB8AC3E}">
-        <p14:creationId xmlns:p14="http://schemas.microsoft.com/office/powerpoint/2010/main" val="2141899716"/>
-      </p:ext>
-    </p:extLst>
   </p:cSld>
   <p:clrMapOvr>
     <a:masterClrMapping/>
@@ -14941,13 +14164,7 @@
       </p:grpSpPr>
       <p:grpSp>
         <p:nvGrpSpPr>
-          <p:cNvPr id="21" name="组合 20">
-            <a:extLst>
-              <a:ext uri="{FF2B5EF4-FFF2-40B4-BE49-F238E27FC236}">
-                <a16:creationId xmlns:a16="http://schemas.microsoft.com/office/drawing/2014/main" id="{F5F79C27-6BA4-A48A-4A62-1878FA70D3DE}"/>
-              </a:ext>
-            </a:extLst>
-          </p:cNvPr>
+          <p:cNvPr id="21" name="组合 20"/>
           <p:cNvGrpSpPr/>
           <p:nvPr/>
         </p:nvGrpSpPr>
@@ -14961,16 +14178,8 @@
         </p:grpSpPr>
         <p:cxnSp>
           <p:nvCxnSpPr>
-            <p:cNvPr id="5" name="直接连接符 4">
-              <a:extLst>
-                <a:ext uri="{FF2B5EF4-FFF2-40B4-BE49-F238E27FC236}">
-                  <a16:creationId xmlns:a16="http://schemas.microsoft.com/office/drawing/2014/main" id="{D249A2B5-95A6-8B94-13BB-8BF1A8A67978}"/>
-                </a:ext>
-              </a:extLst>
-            </p:cNvPr>
-            <p:cNvCxnSpPr>
-              <a:cxnSpLocks/>
-            </p:cNvCxnSpPr>
+            <p:cNvPr id="5" name="直接连接符 4"/>
+            <p:cNvCxnSpPr/>
             <p:nvPr/>
           </p:nvCxnSpPr>
           <p:spPr>
@@ -15004,16 +14213,8 @@
         </p:cxnSp>
         <p:cxnSp>
           <p:nvCxnSpPr>
-            <p:cNvPr id="7" name="直接箭头连接符 6">
-              <a:extLst>
-                <a:ext uri="{FF2B5EF4-FFF2-40B4-BE49-F238E27FC236}">
-                  <a16:creationId xmlns:a16="http://schemas.microsoft.com/office/drawing/2014/main" id="{F0FCF3B6-446E-ED62-72FD-2B1962F63B82}"/>
-                </a:ext>
-              </a:extLst>
-            </p:cNvPr>
-            <p:cNvCxnSpPr>
-              <a:cxnSpLocks/>
-            </p:cNvCxnSpPr>
+            <p:cNvPr id="7" name="直接箭头连接符 6"/>
+            <p:cNvCxnSpPr/>
             <p:nvPr/>
           </p:nvCxnSpPr>
           <p:spPr>
@@ -15048,13 +14249,7 @@
         </p:cxnSp>
         <p:cxnSp>
           <p:nvCxnSpPr>
-            <p:cNvPr id="15" name="直接箭头连接符 14">
-              <a:extLst>
-                <a:ext uri="{FF2B5EF4-FFF2-40B4-BE49-F238E27FC236}">
-                  <a16:creationId xmlns:a16="http://schemas.microsoft.com/office/drawing/2014/main" id="{89A0172B-4B1D-D3AF-8B46-F4F2F6DFA0EC}"/>
-                </a:ext>
-              </a:extLst>
-            </p:cNvPr>
+            <p:cNvPr id="15" name="直接箭头连接符 14"/>
             <p:cNvCxnSpPr/>
             <p:nvPr/>
           </p:nvCxnSpPr>
@@ -15090,13 +14285,7 @@
         </p:cxnSp>
         <p:cxnSp>
           <p:nvCxnSpPr>
-            <p:cNvPr id="17" name="直接箭头连接符 16">
-              <a:extLst>
-                <a:ext uri="{FF2B5EF4-FFF2-40B4-BE49-F238E27FC236}">
-                  <a16:creationId xmlns:a16="http://schemas.microsoft.com/office/drawing/2014/main" id="{C1F4E261-D993-32B3-1224-85ECFEB4501F}"/>
-                </a:ext>
-              </a:extLst>
-            </p:cNvPr>
+            <p:cNvPr id="17" name="直接箭头连接符 16"/>
             <p:cNvCxnSpPr/>
             <p:nvPr/>
           </p:nvCxnSpPr>
@@ -15130,17 +14319,11 @@
             </a:fontRef>
           </p:style>
         </p:cxnSp>
-        <mc:AlternateContent xmlns:mc="http://schemas.openxmlformats.org/markup-compatibility/2006" xmlns:a14="http://schemas.microsoft.com/office/drawing/2010/main">
-          <mc:Choice Requires="a14">
+        <mc:AlternateContent xmlns:mc="http://schemas.openxmlformats.org/markup-compatibility/2006">
+          <mc:Choice xmlns:a14="http://schemas.microsoft.com/office/drawing/2010/main" Requires="a14">
             <p:sp>
               <p:nvSpPr>
-                <p:cNvPr id="18" name="文本框 17">
-                  <a:extLst>
-                    <a:ext uri="{FF2B5EF4-FFF2-40B4-BE49-F238E27FC236}">
-                      <a16:creationId xmlns:a16="http://schemas.microsoft.com/office/drawing/2014/main" id="{5D74A4DD-928E-6BB2-EEAA-F218A547D42B}"/>
-                    </a:ext>
-                  </a:extLst>
-                </p:cNvPr>
+                <p:cNvPr id="18" name="文本框 17"/>
                 <p:cNvSpPr txBox="1"/>
                 <p:nvPr/>
               </p:nvSpPr>
@@ -15160,7 +14343,6 @@
                 </a:bodyPr>
                 <a:lstStyle/>
                 <a:p>
-                  <a:pPr/>
                   <a14:m>
                     <m:oMathPara xmlns:m="http://schemas.openxmlformats.org/officeDocument/2006/math">
                       <m:oMathParaPr>
@@ -15239,16 +14421,10 @@
               </p:txBody>
             </p:sp>
           </mc:Choice>
-          <mc:Fallback xmlns="">
+          <mc:Fallback>
             <p:sp>
               <p:nvSpPr>
-                <p:cNvPr id="18" name="文本框 17">
-                  <a:extLst>
-                    <a:ext uri="{FF2B5EF4-FFF2-40B4-BE49-F238E27FC236}">
-                      <a16:creationId xmlns:a16="http://schemas.microsoft.com/office/drawing/2014/main" id="{5D74A4DD-928E-6BB2-EEAA-F218A547D42B}"/>
-                    </a:ext>
-                  </a:extLst>
-                </p:cNvPr>
+                <p:cNvPr id="18" name="文本框 17"/>
                 <p:cNvSpPr txBox="1">
                   <a:spLocks noRot="1" noChangeAspect="1" noMove="1" noResize="1" noEditPoints="1" noAdjustHandles="1" noChangeArrowheads="1" noChangeShapeType="1" noTextEdit="1"/>
                 </p:cNvSpPr>
@@ -15262,11 +14438,8 @@
                 <a:prstGeom prst="rect">
                   <a:avLst/>
                 </a:prstGeom>
-                <a:blipFill>
-                  <a:blip r:embed="rId2"/>
-                  <a:stretch>
-                    <a:fillRect b="-1370"/>
-                  </a:stretch>
+                <a:blipFill rotWithShape="1">
+                  <a:blip r:embed="rId1"/>
                 </a:blipFill>
               </p:spPr>
               <p:txBody>
@@ -15284,17 +14457,11 @@
             </p:sp>
           </mc:Fallback>
         </mc:AlternateContent>
-        <mc:AlternateContent xmlns:mc="http://schemas.openxmlformats.org/markup-compatibility/2006" xmlns:a14="http://schemas.microsoft.com/office/drawing/2010/main">
-          <mc:Choice Requires="a14">
+        <mc:AlternateContent xmlns:mc="http://schemas.openxmlformats.org/markup-compatibility/2006">
+          <mc:Choice xmlns:a14="http://schemas.microsoft.com/office/drawing/2010/main" Requires="a14">
             <p:sp>
               <p:nvSpPr>
-                <p:cNvPr id="19" name="文本框 18">
-                  <a:extLst>
-                    <a:ext uri="{FF2B5EF4-FFF2-40B4-BE49-F238E27FC236}">
-                      <a16:creationId xmlns:a16="http://schemas.microsoft.com/office/drawing/2014/main" id="{95F77259-DB98-11E0-90FB-4A821AABE9F1}"/>
-                    </a:ext>
-                  </a:extLst>
-                </p:cNvPr>
+                <p:cNvPr id="19" name="文本框 18"/>
                 <p:cNvSpPr txBox="1"/>
                 <p:nvPr/>
               </p:nvSpPr>
@@ -15314,7 +14481,6 @@
                 </a:bodyPr>
                 <a:lstStyle/>
                 <a:p>
-                  <a:pPr/>
                   <a14:m>
                     <m:oMathPara xmlns:m="http://schemas.openxmlformats.org/officeDocument/2006/math">
                       <m:oMathParaPr>
@@ -15393,16 +14559,10 @@
               </p:txBody>
             </p:sp>
           </mc:Choice>
-          <mc:Fallback xmlns="">
+          <mc:Fallback>
             <p:sp>
               <p:nvSpPr>
-                <p:cNvPr id="19" name="文本框 18">
-                  <a:extLst>
-                    <a:ext uri="{FF2B5EF4-FFF2-40B4-BE49-F238E27FC236}">
-                      <a16:creationId xmlns:a16="http://schemas.microsoft.com/office/drawing/2014/main" id="{95F77259-DB98-11E0-90FB-4A821AABE9F1}"/>
-                    </a:ext>
-                  </a:extLst>
-                </p:cNvPr>
+                <p:cNvPr id="19" name="文本框 18"/>
                 <p:cNvSpPr txBox="1">
                   <a:spLocks noRot="1" noChangeAspect="1" noMove="1" noResize="1" noEditPoints="1" noAdjustHandles="1" noChangeArrowheads="1" noChangeShapeType="1" noTextEdit="1"/>
                 </p:cNvSpPr>
@@ -15416,11 +14576,8 @@
                 <a:prstGeom prst="rect">
                   <a:avLst/>
                 </a:prstGeom>
-                <a:blipFill>
-                  <a:blip r:embed="rId3"/>
-                  <a:stretch>
-                    <a:fillRect b="-1471"/>
-                  </a:stretch>
+                <a:blipFill rotWithShape="1">
+                  <a:blip r:embed="rId2"/>
                 </a:blipFill>
               </p:spPr>
               <p:txBody>
@@ -15438,17 +14595,11 @@
             </p:sp>
           </mc:Fallback>
         </mc:AlternateContent>
-        <mc:AlternateContent xmlns:mc="http://schemas.openxmlformats.org/markup-compatibility/2006" xmlns:a14="http://schemas.microsoft.com/office/drawing/2010/main">
-          <mc:Choice Requires="a14">
+        <mc:AlternateContent xmlns:mc="http://schemas.openxmlformats.org/markup-compatibility/2006">
+          <mc:Choice xmlns:a14="http://schemas.microsoft.com/office/drawing/2010/main" Requires="a14">
             <p:sp>
               <p:nvSpPr>
-                <p:cNvPr id="20" name="文本框 19">
-                  <a:extLst>
-                    <a:ext uri="{FF2B5EF4-FFF2-40B4-BE49-F238E27FC236}">
-                      <a16:creationId xmlns:a16="http://schemas.microsoft.com/office/drawing/2014/main" id="{F438B0FA-288D-0525-DB1B-74EC28FE0356}"/>
-                    </a:ext>
-                  </a:extLst>
-                </p:cNvPr>
+                <p:cNvPr id="20" name="文本框 19"/>
                 <p:cNvSpPr txBox="1"/>
                 <p:nvPr/>
               </p:nvSpPr>
@@ -15468,7 +14619,6 @@
                 </a:bodyPr>
                 <a:lstStyle/>
                 <a:p>
-                  <a:pPr/>
                   <a14:m>
                     <m:oMathPara xmlns:m="http://schemas.openxmlformats.org/officeDocument/2006/math">
                       <m:oMathParaPr>
@@ -15605,16 +14755,10 @@
               </p:txBody>
             </p:sp>
           </mc:Choice>
-          <mc:Fallback xmlns="">
+          <mc:Fallback>
             <p:sp>
               <p:nvSpPr>
-                <p:cNvPr id="20" name="文本框 19">
-                  <a:extLst>
-                    <a:ext uri="{FF2B5EF4-FFF2-40B4-BE49-F238E27FC236}">
-                      <a16:creationId xmlns:a16="http://schemas.microsoft.com/office/drawing/2014/main" id="{F438B0FA-288D-0525-DB1B-74EC28FE0356}"/>
-                    </a:ext>
-                  </a:extLst>
-                </p:cNvPr>
+                <p:cNvPr id="20" name="文本框 19"/>
                 <p:cNvSpPr txBox="1">
                   <a:spLocks noRot="1" noChangeAspect="1" noMove="1" noResize="1" noEditPoints="1" noAdjustHandles="1" noChangeArrowheads="1" noChangeShapeType="1" noTextEdit="1"/>
                 </p:cNvSpPr>
@@ -15628,11 +14772,8 @@
                 <a:prstGeom prst="rect">
                   <a:avLst/>
                 </a:prstGeom>
-                <a:blipFill>
-                  <a:blip r:embed="rId4"/>
-                  <a:stretch>
-                    <a:fillRect b="-1370"/>
-                  </a:stretch>
+                <a:blipFill rotWithShape="1">
+                  <a:blip r:embed="rId3"/>
                 </a:blipFill>
               </p:spPr>
               <p:txBody>
@@ -15652,11 +14793,6 @@
         </mc:AlternateContent>
       </p:grpSp>
     </p:spTree>
-    <p:extLst>
-      <p:ext uri="{BB962C8B-B14F-4D97-AF65-F5344CB8AC3E}">
-        <p14:creationId xmlns:p14="http://schemas.microsoft.com/office/powerpoint/2010/main" val="3087387363"/>
-      </p:ext>
-    </p:extLst>
   </p:cSld>
   <p:clrMapOvr>
     <a:masterClrMapping/>
@@ -15683,13 +14819,7 @@
       </p:grpSpPr>
       <p:grpSp>
         <p:nvGrpSpPr>
-          <p:cNvPr id="39" name="组合 38">
-            <a:extLst>
-              <a:ext uri="{FF2B5EF4-FFF2-40B4-BE49-F238E27FC236}">
-                <a16:creationId xmlns:a16="http://schemas.microsoft.com/office/drawing/2014/main" id="{964BC400-938F-CB50-4630-BDAD02CC9B2D}"/>
-              </a:ext>
-            </a:extLst>
-          </p:cNvPr>
+          <p:cNvPr id="39" name="组合 38"/>
           <p:cNvGrpSpPr/>
           <p:nvPr/>
         </p:nvGrpSpPr>
@@ -15703,13 +14833,7 @@
         </p:grpSpPr>
         <p:sp>
           <p:nvSpPr>
-            <p:cNvPr id="4" name="椭圆 3">
-              <a:extLst>
-                <a:ext uri="{FF2B5EF4-FFF2-40B4-BE49-F238E27FC236}">
-                  <a16:creationId xmlns:a16="http://schemas.microsoft.com/office/drawing/2014/main" id="{36A36EA8-9702-167C-5110-0C6C6205B149}"/>
-                </a:ext>
-              </a:extLst>
-            </p:cNvPr>
+            <p:cNvPr id="4" name="椭圆 3"/>
             <p:cNvSpPr/>
             <p:nvPr/>
           </p:nvSpPr>
@@ -15755,13 +14879,7 @@
         </p:sp>
         <p:sp>
           <p:nvSpPr>
-            <p:cNvPr id="5" name="椭圆 4">
-              <a:extLst>
-                <a:ext uri="{FF2B5EF4-FFF2-40B4-BE49-F238E27FC236}">
-                  <a16:creationId xmlns:a16="http://schemas.microsoft.com/office/drawing/2014/main" id="{6DB4F7D8-09D3-CB1B-39EA-5D6958C20B6D}"/>
-                </a:ext>
-              </a:extLst>
-            </p:cNvPr>
+            <p:cNvPr id="5" name="椭圆 4"/>
             <p:cNvSpPr/>
             <p:nvPr/>
           </p:nvSpPr>
@@ -15807,16 +14925,8 @@
         </p:sp>
         <p:cxnSp>
           <p:nvCxnSpPr>
-            <p:cNvPr id="7" name="直接连接符 6">
-              <a:extLst>
-                <a:ext uri="{FF2B5EF4-FFF2-40B4-BE49-F238E27FC236}">
-                  <a16:creationId xmlns:a16="http://schemas.microsoft.com/office/drawing/2014/main" id="{0E085113-28BB-C16E-5D0B-DEC2C9349D87}"/>
-                </a:ext>
-              </a:extLst>
-            </p:cNvPr>
-            <p:cNvCxnSpPr>
-              <a:cxnSpLocks/>
-            </p:cNvCxnSpPr>
+            <p:cNvPr id="7" name="直接连接符 6"/>
+            <p:cNvCxnSpPr/>
             <p:nvPr/>
           </p:nvCxnSpPr>
           <p:spPr>
@@ -15851,16 +14961,8 @@
         </p:cxnSp>
         <p:cxnSp>
           <p:nvCxnSpPr>
-            <p:cNvPr id="9" name="直接连接符 8">
-              <a:extLst>
-                <a:ext uri="{FF2B5EF4-FFF2-40B4-BE49-F238E27FC236}">
-                  <a16:creationId xmlns:a16="http://schemas.microsoft.com/office/drawing/2014/main" id="{66DA19FE-DD41-CF8B-EB62-431E8D85C72B}"/>
-                </a:ext>
-              </a:extLst>
-            </p:cNvPr>
-            <p:cNvCxnSpPr>
-              <a:cxnSpLocks/>
-            </p:cNvCxnSpPr>
+            <p:cNvPr id="9" name="直接连接符 8"/>
+            <p:cNvCxnSpPr/>
             <p:nvPr/>
           </p:nvCxnSpPr>
           <p:spPr>
@@ -15895,16 +14997,8 @@
         </p:cxnSp>
         <p:cxnSp>
           <p:nvCxnSpPr>
-            <p:cNvPr id="16" name="直接箭头连接符 15">
-              <a:extLst>
-                <a:ext uri="{FF2B5EF4-FFF2-40B4-BE49-F238E27FC236}">
-                  <a16:creationId xmlns:a16="http://schemas.microsoft.com/office/drawing/2014/main" id="{0EC5D991-EC86-2B3D-FB39-20137F94B4DA}"/>
-                </a:ext>
-              </a:extLst>
-            </p:cNvPr>
-            <p:cNvCxnSpPr>
-              <a:cxnSpLocks/>
-            </p:cNvCxnSpPr>
+            <p:cNvPr id="16" name="直接箭头连接符 15"/>
+            <p:cNvCxnSpPr/>
             <p:nvPr/>
           </p:nvCxnSpPr>
           <p:spPr>
@@ -15940,13 +15034,7 @@
         </p:cxnSp>
         <p:sp>
           <p:nvSpPr>
-            <p:cNvPr id="18" name="弧形 17">
-              <a:extLst>
-                <a:ext uri="{FF2B5EF4-FFF2-40B4-BE49-F238E27FC236}">
-                  <a16:creationId xmlns:a16="http://schemas.microsoft.com/office/drawing/2014/main" id="{9938E944-C5BF-8FB8-D18A-985E1A09C836}"/>
-                </a:ext>
-              </a:extLst>
-            </p:cNvPr>
+            <p:cNvPr id="18" name="弧形 17"/>
             <p:cNvSpPr/>
             <p:nvPr/>
           </p:nvSpPr>
@@ -15992,16 +15080,8 @@
         </p:sp>
         <p:cxnSp>
           <p:nvCxnSpPr>
-            <p:cNvPr id="20" name="直接连接符 19">
-              <a:extLst>
-                <a:ext uri="{FF2B5EF4-FFF2-40B4-BE49-F238E27FC236}">
-                  <a16:creationId xmlns:a16="http://schemas.microsoft.com/office/drawing/2014/main" id="{D3FD957D-DEF6-57DA-30C1-841EA3935067}"/>
-                </a:ext>
-              </a:extLst>
-            </p:cNvPr>
-            <p:cNvCxnSpPr>
-              <a:cxnSpLocks/>
-            </p:cNvCxnSpPr>
+            <p:cNvPr id="20" name="直接连接符 19"/>
+            <p:cNvCxnSpPr/>
             <p:nvPr/>
           </p:nvCxnSpPr>
           <p:spPr>
@@ -16035,16 +15115,8 @@
         </p:cxnSp>
         <p:cxnSp>
           <p:nvCxnSpPr>
-            <p:cNvPr id="21" name="直接连接符 20">
-              <a:extLst>
-                <a:ext uri="{FF2B5EF4-FFF2-40B4-BE49-F238E27FC236}">
-                  <a16:creationId xmlns:a16="http://schemas.microsoft.com/office/drawing/2014/main" id="{2082B9AB-3673-575D-442E-6AF4CDBAEE9A}"/>
-                </a:ext>
-              </a:extLst>
-            </p:cNvPr>
-            <p:cNvCxnSpPr>
-              <a:cxnSpLocks/>
-            </p:cNvCxnSpPr>
+            <p:cNvPr id="21" name="直接连接符 20"/>
+            <p:cNvCxnSpPr/>
             <p:nvPr/>
           </p:nvCxnSpPr>
           <p:spPr>
@@ -16078,16 +15150,8 @@
         </p:cxnSp>
         <p:cxnSp>
           <p:nvCxnSpPr>
-            <p:cNvPr id="22" name="直接连接符 21">
-              <a:extLst>
-                <a:ext uri="{FF2B5EF4-FFF2-40B4-BE49-F238E27FC236}">
-                  <a16:creationId xmlns:a16="http://schemas.microsoft.com/office/drawing/2014/main" id="{34E23173-50D5-1AAA-C5CC-FCCA435FDE0F}"/>
-                </a:ext>
-              </a:extLst>
-            </p:cNvPr>
-            <p:cNvCxnSpPr>
-              <a:cxnSpLocks/>
-            </p:cNvCxnSpPr>
+            <p:cNvPr id="22" name="直接连接符 21"/>
+            <p:cNvCxnSpPr/>
             <p:nvPr/>
           </p:nvCxnSpPr>
           <p:spPr>
@@ -16121,16 +15185,8 @@
         </p:cxnSp>
         <p:cxnSp>
           <p:nvCxnSpPr>
-            <p:cNvPr id="23" name="直接箭头连接符 22">
-              <a:extLst>
-                <a:ext uri="{FF2B5EF4-FFF2-40B4-BE49-F238E27FC236}">
-                  <a16:creationId xmlns:a16="http://schemas.microsoft.com/office/drawing/2014/main" id="{F3BB5664-EB40-1C06-192E-DB5204FCA2AC}"/>
-                </a:ext>
-              </a:extLst>
-            </p:cNvPr>
-            <p:cNvCxnSpPr>
-              <a:cxnSpLocks/>
-            </p:cNvCxnSpPr>
+            <p:cNvPr id="23" name="直接箭头连接符 22"/>
+            <p:cNvCxnSpPr/>
             <p:nvPr/>
           </p:nvCxnSpPr>
           <p:spPr>
@@ -16166,16 +15222,8 @@
         </p:cxnSp>
         <p:cxnSp>
           <p:nvCxnSpPr>
-            <p:cNvPr id="26" name="直接箭头连接符 25">
-              <a:extLst>
-                <a:ext uri="{FF2B5EF4-FFF2-40B4-BE49-F238E27FC236}">
-                  <a16:creationId xmlns:a16="http://schemas.microsoft.com/office/drawing/2014/main" id="{DE54976A-DB65-E845-7D1A-AE3119479740}"/>
-                </a:ext>
-              </a:extLst>
-            </p:cNvPr>
-            <p:cNvCxnSpPr>
-              <a:cxnSpLocks/>
-            </p:cNvCxnSpPr>
+            <p:cNvPr id="26" name="直接箭头连接符 25"/>
+            <p:cNvCxnSpPr/>
             <p:nvPr/>
           </p:nvCxnSpPr>
           <p:spPr>
@@ -16209,17 +15257,11 @@
             </a:fontRef>
           </p:style>
         </p:cxnSp>
-        <mc:AlternateContent xmlns:mc="http://schemas.openxmlformats.org/markup-compatibility/2006" xmlns:a14="http://schemas.microsoft.com/office/drawing/2010/main">
-          <mc:Choice Requires="a14">
+        <mc:AlternateContent xmlns:mc="http://schemas.openxmlformats.org/markup-compatibility/2006">
+          <mc:Choice xmlns:a14="http://schemas.microsoft.com/office/drawing/2010/main" Requires="a14">
             <p:sp>
               <p:nvSpPr>
-                <p:cNvPr id="32" name="文本框 31">
-                  <a:extLst>
-                    <a:ext uri="{FF2B5EF4-FFF2-40B4-BE49-F238E27FC236}">
-                      <a16:creationId xmlns:a16="http://schemas.microsoft.com/office/drawing/2014/main" id="{027B24FF-D72B-A9F7-735F-6849A8EC5167}"/>
-                    </a:ext>
-                  </a:extLst>
-                </p:cNvPr>
+                <p:cNvPr id="32" name="文本框 31"/>
                 <p:cNvSpPr txBox="1"/>
                 <p:nvPr/>
               </p:nvSpPr>
@@ -16239,7 +15281,6 @@
                 </a:bodyPr>
                 <a:lstStyle/>
                 <a:p>
-                  <a:pPr/>
                   <a14:m>
                     <m:oMathPara xmlns:m="http://schemas.openxmlformats.org/officeDocument/2006/math">
                       <m:oMathParaPr>
@@ -16320,16 +15361,10 @@
               </p:txBody>
             </p:sp>
           </mc:Choice>
-          <mc:Fallback xmlns="">
+          <mc:Fallback>
             <p:sp>
               <p:nvSpPr>
-                <p:cNvPr id="32" name="文本框 31">
-                  <a:extLst>
-                    <a:ext uri="{FF2B5EF4-FFF2-40B4-BE49-F238E27FC236}">
-                      <a16:creationId xmlns:a16="http://schemas.microsoft.com/office/drawing/2014/main" id="{027B24FF-D72B-A9F7-735F-6849A8EC5167}"/>
-                    </a:ext>
-                  </a:extLst>
-                </p:cNvPr>
+                <p:cNvPr id="32" name="文本框 31"/>
                 <p:cNvSpPr txBox="1">
                   <a:spLocks noRot="1" noChangeAspect="1" noMove="1" noResize="1" noEditPoints="1" noAdjustHandles="1" noChangeArrowheads="1" noChangeShapeType="1" noTextEdit="1"/>
                 </p:cNvSpPr>
@@ -16343,11 +15378,8 @@
                 <a:prstGeom prst="rect">
                   <a:avLst/>
                 </a:prstGeom>
-                <a:blipFill>
-                  <a:blip r:embed="rId2"/>
-                  <a:stretch>
-                    <a:fillRect/>
-                  </a:stretch>
+                <a:blipFill rotWithShape="1">
+                  <a:blip r:embed="rId1"/>
                 </a:blipFill>
               </p:spPr>
               <p:txBody>
@@ -16365,17 +15397,11 @@
             </p:sp>
           </mc:Fallback>
         </mc:AlternateContent>
-        <mc:AlternateContent xmlns:mc="http://schemas.openxmlformats.org/markup-compatibility/2006" xmlns:a14="http://schemas.microsoft.com/office/drawing/2010/main">
-          <mc:Choice Requires="a14">
+        <mc:AlternateContent xmlns:mc="http://schemas.openxmlformats.org/markup-compatibility/2006">
+          <mc:Choice xmlns:a14="http://schemas.microsoft.com/office/drawing/2010/main" Requires="a14">
             <p:sp>
               <p:nvSpPr>
-                <p:cNvPr id="33" name="文本框 32">
-                  <a:extLst>
-                    <a:ext uri="{FF2B5EF4-FFF2-40B4-BE49-F238E27FC236}">
-                      <a16:creationId xmlns:a16="http://schemas.microsoft.com/office/drawing/2014/main" id="{25765882-E663-80BF-8549-F34E4348A74A}"/>
-                    </a:ext>
-                  </a:extLst>
-                </p:cNvPr>
+                <p:cNvPr id="33" name="文本框 32"/>
                 <p:cNvSpPr txBox="1"/>
                 <p:nvPr/>
               </p:nvSpPr>
@@ -16395,7 +15421,6 @@
                 </a:bodyPr>
                 <a:lstStyle/>
                 <a:p>
-                  <a:pPr/>
                   <a14:m>
                     <m:oMathPara xmlns:m="http://schemas.openxmlformats.org/officeDocument/2006/math">
                       <m:oMathParaPr>
@@ -16423,16 +15448,10 @@
               </p:txBody>
             </p:sp>
           </mc:Choice>
-          <mc:Fallback xmlns="">
+          <mc:Fallback>
             <p:sp>
               <p:nvSpPr>
-                <p:cNvPr id="33" name="文本框 32">
-                  <a:extLst>
-                    <a:ext uri="{FF2B5EF4-FFF2-40B4-BE49-F238E27FC236}">
-                      <a16:creationId xmlns:a16="http://schemas.microsoft.com/office/drawing/2014/main" id="{25765882-E663-80BF-8549-F34E4348A74A}"/>
-                    </a:ext>
-                  </a:extLst>
-                </p:cNvPr>
+                <p:cNvPr id="33" name="文本框 32"/>
                 <p:cNvSpPr txBox="1">
                   <a:spLocks noRot="1" noChangeAspect="1" noMove="1" noResize="1" noEditPoints="1" noAdjustHandles="1" noChangeArrowheads="1" noChangeShapeType="1" noTextEdit="1"/>
                 </p:cNvSpPr>
@@ -16446,11 +15465,8 @@
                 <a:prstGeom prst="rect">
                   <a:avLst/>
                 </a:prstGeom>
-                <a:blipFill>
-                  <a:blip r:embed="rId3"/>
-                  <a:stretch>
-                    <a:fillRect/>
-                  </a:stretch>
+                <a:blipFill rotWithShape="1">
+                  <a:blip r:embed="rId2"/>
                 </a:blipFill>
               </p:spPr>
               <p:txBody>
@@ -16468,17 +15484,11 @@
             </p:sp>
           </mc:Fallback>
         </mc:AlternateContent>
-        <mc:AlternateContent xmlns:mc="http://schemas.openxmlformats.org/markup-compatibility/2006" xmlns:a14="http://schemas.microsoft.com/office/drawing/2010/main">
-          <mc:Choice Requires="a14">
+        <mc:AlternateContent xmlns:mc="http://schemas.openxmlformats.org/markup-compatibility/2006">
+          <mc:Choice xmlns:a14="http://schemas.microsoft.com/office/drawing/2010/main" Requires="a14">
             <p:sp>
               <p:nvSpPr>
-                <p:cNvPr id="34" name="文本框 33">
-                  <a:extLst>
-                    <a:ext uri="{FF2B5EF4-FFF2-40B4-BE49-F238E27FC236}">
-                      <a16:creationId xmlns:a16="http://schemas.microsoft.com/office/drawing/2014/main" id="{3A853205-B35A-33DC-07FA-A236082841C0}"/>
-                    </a:ext>
-                  </a:extLst>
-                </p:cNvPr>
+                <p:cNvPr id="34" name="文本框 33"/>
                 <p:cNvSpPr txBox="1"/>
                 <p:nvPr/>
               </p:nvSpPr>
@@ -16498,7 +15508,6 @@
                 </a:bodyPr>
                 <a:lstStyle/>
                 <a:p>
-                  <a:pPr/>
                   <a14:m>
                     <m:oMathPara xmlns:m="http://schemas.openxmlformats.org/officeDocument/2006/math">
                       <m:oMathParaPr>
@@ -16526,16 +15535,10 @@
               </p:txBody>
             </p:sp>
           </mc:Choice>
-          <mc:Fallback xmlns="">
+          <mc:Fallback>
             <p:sp>
               <p:nvSpPr>
-                <p:cNvPr id="34" name="文本框 33">
-                  <a:extLst>
-                    <a:ext uri="{FF2B5EF4-FFF2-40B4-BE49-F238E27FC236}">
-                      <a16:creationId xmlns:a16="http://schemas.microsoft.com/office/drawing/2014/main" id="{3A853205-B35A-33DC-07FA-A236082841C0}"/>
-                    </a:ext>
-                  </a:extLst>
-                </p:cNvPr>
+                <p:cNvPr id="34" name="文本框 33"/>
                 <p:cNvSpPr txBox="1">
                   <a:spLocks noRot="1" noChangeAspect="1" noMove="1" noResize="1" noEditPoints="1" noAdjustHandles="1" noChangeArrowheads="1" noChangeShapeType="1" noTextEdit="1"/>
                 </p:cNvSpPr>
@@ -16549,11 +15552,8 @@
                 <a:prstGeom prst="rect">
                   <a:avLst/>
                 </a:prstGeom>
-                <a:blipFill>
-                  <a:blip r:embed="rId4"/>
-                  <a:stretch>
-                    <a:fillRect/>
-                  </a:stretch>
+                <a:blipFill rotWithShape="1">
+                  <a:blip r:embed="rId3"/>
                 </a:blipFill>
               </p:spPr>
               <p:txBody>
@@ -16571,17 +15571,11 @@
             </p:sp>
           </mc:Fallback>
         </mc:AlternateContent>
-        <mc:AlternateContent xmlns:mc="http://schemas.openxmlformats.org/markup-compatibility/2006" xmlns:a14="http://schemas.microsoft.com/office/drawing/2010/main">
-          <mc:Choice Requires="a14">
+        <mc:AlternateContent xmlns:mc="http://schemas.openxmlformats.org/markup-compatibility/2006">
+          <mc:Choice xmlns:a14="http://schemas.microsoft.com/office/drawing/2010/main" Requires="a14">
             <p:sp>
               <p:nvSpPr>
-                <p:cNvPr id="35" name="文本框 34">
-                  <a:extLst>
-                    <a:ext uri="{FF2B5EF4-FFF2-40B4-BE49-F238E27FC236}">
-                      <a16:creationId xmlns:a16="http://schemas.microsoft.com/office/drawing/2014/main" id="{18714B2F-B29F-E3D9-4128-C95D5082C34E}"/>
-                    </a:ext>
-                  </a:extLst>
-                </p:cNvPr>
+                <p:cNvPr id="35" name="文本框 34"/>
                 <p:cNvSpPr txBox="1"/>
                 <p:nvPr/>
               </p:nvSpPr>
@@ -16601,7 +15595,6 @@
                 </a:bodyPr>
                 <a:lstStyle/>
                 <a:p>
-                  <a:pPr/>
                   <a14:m>
                     <m:oMathPara xmlns:m="http://schemas.openxmlformats.org/officeDocument/2006/math">
                       <m:oMathParaPr>
@@ -16632,16 +15625,10 @@
               </p:txBody>
             </p:sp>
           </mc:Choice>
-          <mc:Fallback xmlns="">
+          <mc:Fallback>
             <p:sp>
               <p:nvSpPr>
-                <p:cNvPr id="35" name="文本框 34">
-                  <a:extLst>
-                    <a:ext uri="{FF2B5EF4-FFF2-40B4-BE49-F238E27FC236}">
-                      <a16:creationId xmlns:a16="http://schemas.microsoft.com/office/drawing/2014/main" id="{18714B2F-B29F-E3D9-4128-C95D5082C34E}"/>
-                    </a:ext>
-                  </a:extLst>
-                </p:cNvPr>
+                <p:cNvPr id="35" name="文本框 34"/>
                 <p:cNvSpPr txBox="1">
                   <a:spLocks noRot="1" noChangeAspect="1" noMove="1" noResize="1" noEditPoints="1" noAdjustHandles="1" noChangeArrowheads="1" noChangeShapeType="1" noTextEdit="1"/>
                 </p:cNvSpPr>
@@ -16655,11 +15642,8 @@
                 <a:prstGeom prst="rect">
                   <a:avLst/>
                 </a:prstGeom>
-                <a:blipFill>
-                  <a:blip r:embed="rId5"/>
-                  <a:stretch>
-                    <a:fillRect/>
-                  </a:stretch>
+                <a:blipFill rotWithShape="1">
+                  <a:blip r:embed="rId4"/>
                 </a:blipFill>
               </p:spPr>
               <p:txBody>
@@ -16680,13 +15664,7 @@
       </p:grpSp>
       <p:grpSp>
         <p:nvGrpSpPr>
-          <p:cNvPr id="75" name="组合 74">
-            <a:extLst>
-              <a:ext uri="{FF2B5EF4-FFF2-40B4-BE49-F238E27FC236}">
-                <a16:creationId xmlns:a16="http://schemas.microsoft.com/office/drawing/2014/main" id="{C75DF7E2-9FEA-FBC7-3EE1-504417B2B197}"/>
-              </a:ext>
-            </a:extLst>
-          </p:cNvPr>
+          <p:cNvPr id="75" name="组合 74"/>
           <p:cNvGrpSpPr/>
           <p:nvPr/>
         </p:nvGrpSpPr>
@@ -16700,13 +15678,7 @@
         </p:grpSpPr>
         <p:sp>
           <p:nvSpPr>
-            <p:cNvPr id="41" name="椭圆 40">
-              <a:extLst>
-                <a:ext uri="{FF2B5EF4-FFF2-40B4-BE49-F238E27FC236}">
-                  <a16:creationId xmlns:a16="http://schemas.microsoft.com/office/drawing/2014/main" id="{877A9511-0750-493A-339A-291F64645C2B}"/>
-                </a:ext>
-              </a:extLst>
-            </p:cNvPr>
+            <p:cNvPr id="41" name="椭圆 40"/>
             <p:cNvSpPr/>
             <p:nvPr/>
           </p:nvSpPr>
@@ -16752,13 +15724,7 @@
         </p:sp>
         <p:sp>
           <p:nvSpPr>
-            <p:cNvPr id="42" name="椭圆 41">
-              <a:extLst>
-                <a:ext uri="{FF2B5EF4-FFF2-40B4-BE49-F238E27FC236}">
-                  <a16:creationId xmlns:a16="http://schemas.microsoft.com/office/drawing/2014/main" id="{2F0381E8-3C8C-B024-95C7-AA725C44F5E1}"/>
-                </a:ext>
-              </a:extLst>
-            </p:cNvPr>
+            <p:cNvPr id="42" name="椭圆 41"/>
             <p:cNvSpPr/>
             <p:nvPr/>
           </p:nvSpPr>
@@ -16804,16 +15770,8 @@
         </p:sp>
         <p:cxnSp>
           <p:nvCxnSpPr>
-            <p:cNvPr id="43" name="直接连接符 42">
-              <a:extLst>
-                <a:ext uri="{FF2B5EF4-FFF2-40B4-BE49-F238E27FC236}">
-                  <a16:creationId xmlns:a16="http://schemas.microsoft.com/office/drawing/2014/main" id="{8276370F-1F01-E143-AAA0-3D56009412D7}"/>
-                </a:ext>
-              </a:extLst>
-            </p:cNvPr>
-            <p:cNvCxnSpPr>
-              <a:cxnSpLocks/>
-            </p:cNvCxnSpPr>
+            <p:cNvPr id="43" name="直接连接符 42"/>
+            <p:cNvCxnSpPr/>
             <p:nvPr/>
           </p:nvCxnSpPr>
           <p:spPr>
@@ -16848,16 +15806,8 @@
         </p:cxnSp>
         <p:cxnSp>
           <p:nvCxnSpPr>
-            <p:cNvPr id="44" name="直接连接符 43">
-              <a:extLst>
-                <a:ext uri="{FF2B5EF4-FFF2-40B4-BE49-F238E27FC236}">
-                  <a16:creationId xmlns:a16="http://schemas.microsoft.com/office/drawing/2014/main" id="{DDA4842E-9146-B335-259C-8A8239E954CB}"/>
-                </a:ext>
-              </a:extLst>
-            </p:cNvPr>
-            <p:cNvCxnSpPr>
-              <a:cxnSpLocks/>
-            </p:cNvCxnSpPr>
+            <p:cNvPr id="44" name="直接连接符 43"/>
+            <p:cNvCxnSpPr/>
             <p:nvPr/>
           </p:nvCxnSpPr>
           <p:spPr>
@@ -16892,16 +15842,8 @@
         </p:cxnSp>
         <p:cxnSp>
           <p:nvCxnSpPr>
-            <p:cNvPr id="45" name="直接箭头连接符 44">
-              <a:extLst>
-                <a:ext uri="{FF2B5EF4-FFF2-40B4-BE49-F238E27FC236}">
-                  <a16:creationId xmlns:a16="http://schemas.microsoft.com/office/drawing/2014/main" id="{989B1140-3DFE-7A2A-0481-0A884C57DC68}"/>
-                </a:ext>
-              </a:extLst>
-            </p:cNvPr>
-            <p:cNvCxnSpPr>
-              <a:cxnSpLocks/>
-            </p:cNvCxnSpPr>
+            <p:cNvPr id="45" name="直接箭头连接符 44"/>
+            <p:cNvCxnSpPr/>
             <p:nvPr/>
           </p:nvCxnSpPr>
           <p:spPr>
@@ -16937,13 +15879,7 @@
         </p:cxnSp>
         <p:sp>
           <p:nvSpPr>
-            <p:cNvPr id="46" name="弧形 45">
-              <a:extLst>
-                <a:ext uri="{FF2B5EF4-FFF2-40B4-BE49-F238E27FC236}">
-                  <a16:creationId xmlns:a16="http://schemas.microsoft.com/office/drawing/2014/main" id="{D12EBF98-E22F-034C-169B-74A6E1309627}"/>
-                </a:ext>
-              </a:extLst>
-            </p:cNvPr>
+            <p:cNvPr id="46" name="弧形 45"/>
             <p:cNvSpPr/>
             <p:nvPr/>
           </p:nvSpPr>
@@ -16989,16 +15925,8 @@
         </p:sp>
         <p:cxnSp>
           <p:nvCxnSpPr>
-            <p:cNvPr id="47" name="直接连接符 46">
-              <a:extLst>
-                <a:ext uri="{FF2B5EF4-FFF2-40B4-BE49-F238E27FC236}">
-                  <a16:creationId xmlns:a16="http://schemas.microsoft.com/office/drawing/2014/main" id="{EB6CDB86-0F77-7005-A693-30283CECD6E7}"/>
-                </a:ext>
-              </a:extLst>
-            </p:cNvPr>
-            <p:cNvCxnSpPr>
-              <a:cxnSpLocks/>
-            </p:cNvCxnSpPr>
+            <p:cNvPr id="47" name="直接连接符 46"/>
+            <p:cNvCxnSpPr/>
             <p:nvPr/>
           </p:nvCxnSpPr>
           <p:spPr>
@@ -17032,16 +15960,8 @@
         </p:cxnSp>
         <p:cxnSp>
           <p:nvCxnSpPr>
-            <p:cNvPr id="48" name="直接连接符 47">
-              <a:extLst>
-                <a:ext uri="{FF2B5EF4-FFF2-40B4-BE49-F238E27FC236}">
-                  <a16:creationId xmlns:a16="http://schemas.microsoft.com/office/drawing/2014/main" id="{EAE53894-6878-3404-E62B-1C5EBDB5337A}"/>
-                </a:ext>
-              </a:extLst>
-            </p:cNvPr>
-            <p:cNvCxnSpPr>
-              <a:cxnSpLocks/>
-            </p:cNvCxnSpPr>
+            <p:cNvPr id="48" name="直接连接符 47"/>
+            <p:cNvCxnSpPr/>
             <p:nvPr/>
           </p:nvCxnSpPr>
           <p:spPr>
@@ -17075,16 +15995,8 @@
         </p:cxnSp>
         <p:cxnSp>
           <p:nvCxnSpPr>
-            <p:cNvPr id="49" name="直接连接符 48">
-              <a:extLst>
-                <a:ext uri="{FF2B5EF4-FFF2-40B4-BE49-F238E27FC236}">
-                  <a16:creationId xmlns:a16="http://schemas.microsoft.com/office/drawing/2014/main" id="{AB108DF2-D86C-0B52-3F29-4DE060BF33FF}"/>
-                </a:ext>
-              </a:extLst>
-            </p:cNvPr>
-            <p:cNvCxnSpPr>
-              <a:cxnSpLocks/>
-            </p:cNvCxnSpPr>
+            <p:cNvPr id="49" name="直接连接符 48"/>
+            <p:cNvCxnSpPr/>
             <p:nvPr/>
           </p:nvCxnSpPr>
           <p:spPr>
@@ -17118,16 +16030,8 @@
         </p:cxnSp>
         <p:cxnSp>
           <p:nvCxnSpPr>
-            <p:cNvPr id="50" name="直接箭头连接符 49">
-              <a:extLst>
-                <a:ext uri="{FF2B5EF4-FFF2-40B4-BE49-F238E27FC236}">
-                  <a16:creationId xmlns:a16="http://schemas.microsoft.com/office/drawing/2014/main" id="{1C737440-32FA-2F63-8CAD-33ED472D4E3E}"/>
-                </a:ext>
-              </a:extLst>
-            </p:cNvPr>
-            <p:cNvCxnSpPr>
-              <a:cxnSpLocks/>
-            </p:cNvCxnSpPr>
+            <p:cNvPr id="50" name="直接箭头连接符 49"/>
+            <p:cNvCxnSpPr/>
             <p:nvPr/>
           </p:nvCxnSpPr>
           <p:spPr>
@@ -17163,16 +16067,8 @@
         </p:cxnSp>
         <p:cxnSp>
           <p:nvCxnSpPr>
-            <p:cNvPr id="51" name="直接箭头连接符 50">
-              <a:extLst>
-                <a:ext uri="{FF2B5EF4-FFF2-40B4-BE49-F238E27FC236}">
-                  <a16:creationId xmlns:a16="http://schemas.microsoft.com/office/drawing/2014/main" id="{653F8837-B84E-92F5-7E90-D83794112B01}"/>
-                </a:ext>
-              </a:extLst>
-            </p:cNvPr>
-            <p:cNvCxnSpPr>
-              <a:cxnSpLocks/>
-            </p:cNvCxnSpPr>
+            <p:cNvPr id="51" name="直接箭头连接符 50"/>
+            <p:cNvCxnSpPr/>
             <p:nvPr/>
           </p:nvCxnSpPr>
           <p:spPr>
@@ -17206,17 +16102,11 @@
             </a:fontRef>
           </p:style>
         </p:cxnSp>
-        <mc:AlternateContent xmlns:mc="http://schemas.openxmlformats.org/markup-compatibility/2006" xmlns:a14="http://schemas.microsoft.com/office/drawing/2010/main">
-          <mc:Choice Requires="a14">
+        <mc:AlternateContent xmlns:mc="http://schemas.openxmlformats.org/markup-compatibility/2006">
+          <mc:Choice xmlns:a14="http://schemas.microsoft.com/office/drawing/2010/main" Requires="a14">
             <p:sp>
               <p:nvSpPr>
-                <p:cNvPr id="52" name="文本框 51">
-                  <a:extLst>
-                    <a:ext uri="{FF2B5EF4-FFF2-40B4-BE49-F238E27FC236}">
-                      <a16:creationId xmlns:a16="http://schemas.microsoft.com/office/drawing/2014/main" id="{7DDF4262-13D2-7B7D-47F6-25581407F037}"/>
-                    </a:ext>
-                  </a:extLst>
-                </p:cNvPr>
+                <p:cNvPr id="52" name="文本框 51"/>
                 <p:cNvSpPr txBox="1"/>
                 <p:nvPr/>
               </p:nvSpPr>
@@ -17236,7 +16126,6 @@
                 </a:bodyPr>
                 <a:lstStyle/>
                 <a:p>
-                  <a:pPr/>
                   <a14:m>
                     <m:oMathPara xmlns:m="http://schemas.openxmlformats.org/officeDocument/2006/math">
                       <m:oMathParaPr>
@@ -17317,16 +16206,10 @@
               </p:txBody>
             </p:sp>
           </mc:Choice>
-          <mc:Fallback xmlns="">
+          <mc:Fallback>
             <p:sp>
               <p:nvSpPr>
-                <p:cNvPr id="52" name="文本框 51">
-                  <a:extLst>
-                    <a:ext uri="{FF2B5EF4-FFF2-40B4-BE49-F238E27FC236}">
-                      <a16:creationId xmlns:a16="http://schemas.microsoft.com/office/drawing/2014/main" id="{7DDF4262-13D2-7B7D-47F6-25581407F037}"/>
-                    </a:ext>
-                  </a:extLst>
-                </p:cNvPr>
+                <p:cNvPr id="52" name="文本框 51"/>
                 <p:cNvSpPr txBox="1">
                   <a:spLocks noRot="1" noChangeAspect="1" noMove="1" noResize="1" noEditPoints="1" noAdjustHandles="1" noChangeArrowheads="1" noChangeShapeType="1" noTextEdit="1"/>
                 </p:cNvSpPr>
@@ -17340,11 +16223,8 @@
                 <a:prstGeom prst="rect">
                   <a:avLst/>
                 </a:prstGeom>
-                <a:blipFill>
-                  <a:blip r:embed="rId6"/>
-                  <a:stretch>
-                    <a:fillRect/>
-                  </a:stretch>
+                <a:blipFill rotWithShape="1">
+                  <a:blip r:embed="rId1"/>
                 </a:blipFill>
               </p:spPr>
               <p:txBody>
@@ -17362,17 +16242,11 @@
             </p:sp>
           </mc:Fallback>
         </mc:AlternateContent>
-        <mc:AlternateContent xmlns:mc="http://schemas.openxmlformats.org/markup-compatibility/2006" xmlns:a14="http://schemas.microsoft.com/office/drawing/2010/main">
-          <mc:Choice Requires="a14">
+        <mc:AlternateContent xmlns:mc="http://schemas.openxmlformats.org/markup-compatibility/2006">
+          <mc:Choice xmlns:a14="http://schemas.microsoft.com/office/drawing/2010/main" Requires="a14">
             <p:sp>
               <p:nvSpPr>
-                <p:cNvPr id="53" name="文本框 52">
-                  <a:extLst>
-                    <a:ext uri="{FF2B5EF4-FFF2-40B4-BE49-F238E27FC236}">
-                      <a16:creationId xmlns:a16="http://schemas.microsoft.com/office/drawing/2014/main" id="{858AE386-F894-7E64-8CDC-79CF45994056}"/>
-                    </a:ext>
-                  </a:extLst>
-                </p:cNvPr>
+                <p:cNvPr id="53" name="文本框 52"/>
                 <p:cNvSpPr txBox="1"/>
                 <p:nvPr/>
               </p:nvSpPr>
@@ -17392,7 +16266,6 @@
                 </a:bodyPr>
                 <a:lstStyle/>
                 <a:p>
-                  <a:pPr/>
                   <a14:m>
                     <m:oMathPara xmlns:m="http://schemas.openxmlformats.org/officeDocument/2006/math">
                       <m:oMathParaPr>
@@ -17420,16 +16293,10 @@
               </p:txBody>
             </p:sp>
           </mc:Choice>
-          <mc:Fallback xmlns="">
+          <mc:Fallback>
             <p:sp>
               <p:nvSpPr>
-                <p:cNvPr id="53" name="文本框 52">
-                  <a:extLst>
-                    <a:ext uri="{FF2B5EF4-FFF2-40B4-BE49-F238E27FC236}">
-                      <a16:creationId xmlns:a16="http://schemas.microsoft.com/office/drawing/2014/main" id="{858AE386-F894-7E64-8CDC-79CF45994056}"/>
-                    </a:ext>
-                  </a:extLst>
-                </p:cNvPr>
+                <p:cNvPr id="53" name="文本框 52"/>
                 <p:cNvSpPr txBox="1">
                   <a:spLocks noRot="1" noChangeAspect="1" noMove="1" noResize="1" noEditPoints="1" noAdjustHandles="1" noChangeArrowheads="1" noChangeShapeType="1" noTextEdit="1"/>
                 </p:cNvSpPr>
@@ -17443,11 +16310,8 @@
                 <a:prstGeom prst="rect">
                   <a:avLst/>
                 </a:prstGeom>
-                <a:blipFill>
-                  <a:blip r:embed="rId7"/>
-                  <a:stretch>
-                    <a:fillRect/>
-                  </a:stretch>
+                <a:blipFill rotWithShape="1">
+                  <a:blip r:embed="rId2"/>
                 </a:blipFill>
               </p:spPr>
               <p:txBody>
@@ -17465,17 +16329,11 @@
             </p:sp>
           </mc:Fallback>
         </mc:AlternateContent>
-        <mc:AlternateContent xmlns:mc="http://schemas.openxmlformats.org/markup-compatibility/2006" xmlns:a14="http://schemas.microsoft.com/office/drawing/2010/main">
-          <mc:Choice Requires="a14">
+        <mc:AlternateContent xmlns:mc="http://schemas.openxmlformats.org/markup-compatibility/2006">
+          <mc:Choice xmlns:a14="http://schemas.microsoft.com/office/drawing/2010/main" Requires="a14">
             <p:sp>
               <p:nvSpPr>
-                <p:cNvPr id="54" name="文本框 53">
-                  <a:extLst>
-                    <a:ext uri="{FF2B5EF4-FFF2-40B4-BE49-F238E27FC236}">
-                      <a16:creationId xmlns:a16="http://schemas.microsoft.com/office/drawing/2014/main" id="{C059D8C4-ABA2-530C-B4F0-CADDB3ACB98A}"/>
-                    </a:ext>
-                  </a:extLst>
-                </p:cNvPr>
+                <p:cNvPr id="54" name="文本框 53"/>
                 <p:cNvSpPr txBox="1"/>
                 <p:nvPr/>
               </p:nvSpPr>
@@ -17495,7 +16353,6 @@
                 </a:bodyPr>
                 <a:lstStyle/>
                 <a:p>
-                  <a:pPr/>
                   <a14:m>
                     <m:oMathPara xmlns:m="http://schemas.openxmlformats.org/officeDocument/2006/math">
                       <m:oMathParaPr>
@@ -17523,16 +16380,10 @@
               </p:txBody>
             </p:sp>
           </mc:Choice>
-          <mc:Fallback xmlns="">
+          <mc:Fallback>
             <p:sp>
               <p:nvSpPr>
-                <p:cNvPr id="54" name="文本框 53">
-                  <a:extLst>
-                    <a:ext uri="{FF2B5EF4-FFF2-40B4-BE49-F238E27FC236}">
-                      <a16:creationId xmlns:a16="http://schemas.microsoft.com/office/drawing/2014/main" id="{C059D8C4-ABA2-530C-B4F0-CADDB3ACB98A}"/>
-                    </a:ext>
-                  </a:extLst>
-                </p:cNvPr>
+                <p:cNvPr id="54" name="文本框 53"/>
                 <p:cNvSpPr txBox="1">
                   <a:spLocks noRot="1" noChangeAspect="1" noMove="1" noResize="1" noEditPoints="1" noAdjustHandles="1" noChangeArrowheads="1" noChangeShapeType="1" noTextEdit="1"/>
                 </p:cNvSpPr>
@@ -17546,11 +16397,8 @@
                 <a:prstGeom prst="rect">
                   <a:avLst/>
                 </a:prstGeom>
-                <a:blipFill>
-                  <a:blip r:embed="rId4"/>
-                  <a:stretch>
-                    <a:fillRect/>
-                  </a:stretch>
+                <a:blipFill rotWithShape="1">
+                  <a:blip r:embed="rId3"/>
                 </a:blipFill>
               </p:spPr>
               <p:txBody>
@@ -17568,17 +16416,11 @@
             </p:sp>
           </mc:Fallback>
         </mc:AlternateContent>
-        <mc:AlternateContent xmlns:mc="http://schemas.openxmlformats.org/markup-compatibility/2006" xmlns:a14="http://schemas.microsoft.com/office/drawing/2010/main">
-          <mc:Choice Requires="a14">
+        <mc:AlternateContent xmlns:mc="http://schemas.openxmlformats.org/markup-compatibility/2006">
+          <mc:Choice xmlns:a14="http://schemas.microsoft.com/office/drawing/2010/main" Requires="a14">
             <p:sp>
               <p:nvSpPr>
-                <p:cNvPr id="55" name="文本框 54">
-                  <a:extLst>
-                    <a:ext uri="{FF2B5EF4-FFF2-40B4-BE49-F238E27FC236}">
-                      <a16:creationId xmlns:a16="http://schemas.microsoft.com/office/drawing/2014/main" id="{3730FED3-C335-791C-7EC5-2B15077E198E}"/>
-                    </a:ext>
-                  </a:extLst>
-                </p:cNvPr>
+                <p:cNvPr id="55" name="文本框 54"/>
                 <p:cNvSpPr txBox="1"/>
                 <p:nvPr/>
               </p:nvSpPr>
@@ -17598,7 +16440,6 @@
                 </a:bodyPr>
                 <a:lstStyle/>
                 <a:p>
-                  <a:pPr/>
                   <a14:m>
                     <m:oMathPara xmlns:m="http://schemas.openxmlformats.org/officeDocument/2006/math">
                       <m:oMathParaPr>
@@ -17629,16 +16470,10 @@
               </p:txBody>
             </p:sp>
           </mc:Choice>
-          <mc:Fallback xmlns="">
+          <mc:Fallback>
             <p:sp>
               <p:nvSpPr>
-                <p:cNvPr id="55" name="文本框 54">
-                  <a:extLst>
-                    <a:ext uri="{FF2B5EF4-FFF2-40B4-BE49-F238E27FC236}">
-                      <a16:creationId xmlns:a16="http://schemas.microsoft.com/office/drawing/2014/main" id="{3730FED3-C335-791C-7EC5-2B15077E198E}"/>
-                    </a:ext>
-                  </a:extLst>
-                </p:cNvPr>
+                <p:cNvPr id="55" name="文本框 54"/>
                 <p:cNvSpPr txBox="1">
                   <a:spLocks noRot="1" noChangeAspect="1" noMove="1" noResize="1" noEditPoints="1" noAdjustHandles="1" noChangeArrowheads="1" noChangeShapeType="1" noTextEdit="1"/>
                 </p:cNvSpPr>
@@ -17652,11 +16487,8 @@
                 <a:prstGeom prst="rect">
                   <a:avLst/>
                 </a:prstGeom>
-                <a:blipFill>
-                  <a:blip r:embed="rId8"/>
-                  <a:stretch>
-                    <a:fillRect/>
-                  </a:stretch>
+                <a:blipFill rotWithShape="1">
+                  <a:blip r:embed="rId4"/>
                 </a:blipFill>
               </p:spPr>
               <p:txBody>
@@ -17676,11 +16508,6 @@
         </mc:AlternateContent>
       </p:grpSp>
     </p:spTree>
-    <p:extLst>
-      <p:ext uri="{BB962C8B-B14F-4D97-AF65-F5344CB8AC3E}">
-        <p14:creationId xmlns:p14="http://schemas.microsoft.com/office/powerpoint/2010/main" val="2097771787"/>
-      </p:ext>
-    </p:extLst>
   </p:cSld>
   <p:clrMapOvr>
     <a:masterClrMapping/>
@@ -17697,57 +16524,583 @@
         <p:cNvGrpSpPr/>
         <p:nvPr/>
       </p:nvGrpSpPr>
-      <p:grpSpPr>
-        <a:xfrm>
-          <a:off x="0" y="0"/>
-          <a:ext cx="0" cy="0"/>
-          <a:chOff x="0" y="0"/>
-          <a:chExt cx="0" cy="0"/>
-        </a:xfrm>
-      </p:grpSpPr>
+      <p:grpSpPr/>
+      <p:sp>
+        <p:nvSpPr>
+          <p:cNvPr id="2" name="标题 1"/>
+          <p:cNvSpPr>
+            <a:spLocks noGrp="1"/>
+          </p:cNvSpPr>
+          <p:nvPr>
+            <p:ph type="title"/>
+          </p:nvPr>
+        </p:nvSpPr>
+        <p:spPr>
+          <a:xfrm>
+            <a:off x="838200" y="365125"/>
+            <a:ext cx="3208655" cy="1325880"/>
+          </a:xfrm>
+        </p:spPr>
+        <p:txBody>
+          <a:bodyPr/>
+          <a:p>
+            <a:r>
+              <a:rPr lang="zh-CN" altLang="en-US"/>
+              <a:t>未放入</a:t>
+            </a:r>
+            <a:r>
+              <a:rPr lang="en-US" altLang="zh-CN"/>
+              <a:t>HTML</a:t>
+            </a:r>
+            <a:endParaRPr lang="en-US" altLang="zh-CN"/>
+          </a:p>
+        </p:txBody>
+      </p:sp>
+      <p:sp>
+        <p:nvSpPr>
+          <p:cNvPr id="4" name="圆柱形 3"/>
+          <p:cNvSpPr/>
+          <p:nvPr/>
+        </p:nvSpPr>
+        <p:spPr>
+          <a:xfrm rot="16200000">
+            <a:off x="5011237" y="4063227"/>
+            <a:ext cx="2520000" cy="360000"/>
+          </a:xfrm>
+          <a:prstGeom prst="can">
+            <a:avLst/>
+          </a:prstGeom>
+          <a:solidFill>
+            <a:schemeClr val="accent5">
+              <a:lumMod val="60000"/>
+              <a:lumOff val="40000"/>
+            </a:schemeClr>
+          </a:solidFill>
+          <a:ln>
+            <a:solidFill>
+              <a:schemeClr val="tx1"/>
+            </a:solidFill>
+          </a:ln>
+        </p:spPr>
+        <p:style>
+          <a:lnRef idx="2">
+            <a:schemeClr val="accent1">
+              <a:lumMod val="75000"/>
+            </a:schemeClr>
+          </a:lnRef>
+          <a:fillRef idx="1">
+            <a:schemeClr val="accent1"/>
+          </a:fillRef>
+          <a:effectRef idx="0">
+            <a:srgbClr val="FFFFFF"/>
+          </a:effectRef>
+          <a:fontRef idx="minor">
+            <a:schemeClr val="lt1"/>
+          </a:fontRef>
+        </p:style>
+        <p:txBody>
+          <a:bodyPr rtlCol="0" anchor="ctr"/>
+          <a:p>
+            <a:pPr algn="ctr"/>
+            <a:endParaRPr lang="zh-CN" altLang="en-US"/>
+          </a:p>
+        </p:txBody>
+      </p:sp>
+      <p:sp>
+        <p:nvSpPr>
+          <p:cNvPr id="15" name="圆柱形 14"/>
+          <p:cNvSpPr/>
+          <p:nvPr/>
+        </p:nvSpPr>
+        <p:spPr>
+          <a:xfrm rot="16200000">
+            <a:off x="5457963" y="4063227"/>
+            <a:ext cx="2519680" cy="360000"/>
+          </a:xfrm>
+          <a:prstGeom prst="can">
+            <a:avLst/>
+          </a:prstGeom>
+          <a:solidFill>
+            <a:schemeClr val="accent5">
+              <a:lumMod val="75000"/>
+            </a:schemeClr>
+          </a:solidFill>
+          <a:ln>
+            <a:solidFill>
+              <a:schemeClr val="tx1"/>
+            </a:solidFill>
+          </a:ln>
+        </p:spPr>
+        <p:style>
+          <a:lnRef idx="2">
+            <a:schemeClr val="accent1">
+              <a:lumMod val="75000"/>
+            </a:schemeClr>
+          </a:lnRef>
+          <a:fillRef idx="1">
+            <a:schemeClr val="accent1"/>
+          </a:fillRef>
+          <a:effectRef idx="0">
+            <a:srgbClr val="FFFFFF"/>
+          </a:effectRef>
+          <a:fontRef idx="minor">
+            <a:schemeClr val="lt1"/>
+          </a:fontRef>
+        </p:style>
+        <p:txBody>
+          <a:bodyPr vertOverflow="overflow" horzOverflow="overflow" vert="horz" wrap="square" numCol="1" spcCol="0" rtlCol="0" fromWordArt="0" anchor="ctr" anchorCtr="0" forceAA="0" compatLnSpc="1">
+            <a:noAutofit/>
+          </a:bodyPr>
+          <a:p>
+            <a:pPr lvl="0" algn="ctr">
+              <a:buClrTx/>
+              <a:buSzTx/>
+              <a:buFontTx/>
+            </a:pPr>
+            <a:endParaRPr lang="zh-CN" altLang="en-US">
+              <a:sym typeface="+mn-ea"/>
+            </a:endParaRPr>
+          </a:p>
+        </p:txBody>
+      </p:sp>
+      <p:sp>
+        <p:nvSpPr>
+          <p:cNvPr id="16" name="圆柱形 15"/>
+          <p:cNvSpPr/>
+          <p:nvPr/>
+        </p:nvSpPr>
+        <p:spPr>
+          <a:xfrm rot="16200000">
+            <a:off x="1886088" y="4063227"/>
+            <a:ext cx="2519680" cy="360000"/>
+          </a:xfrm>
+          <a:prstGeom prst="can">
+            <a:avLst/>
+          </a:prstGeom>
+          <a:solidFill>
+            <a:schemeClr val="accent5">
+              <a:lumMod val="75000"/>
+            </a:schemeClr>
+          </a:solidFill>
+          <a:ln>
+            <a:solidFill>
+              <a:schemeClr val="tx1"/>
+            </a:solidFill>
+          </a:ln>
+        </p:spPr>
+        <p:style>
+          <a:lnRef idx="2">
+            <a:schemeClr val="accent1">
+              <a:lumMod val="75000"/>
+            </a:schemeClr>
+          </a:lnRef>
+          <a:fillRef idx="1">
+            <a:schemeClr val="accent1"/>
+          </a:fillRef>
+          <a:effectRef idx="0">
+            <a:srgbClr val="FFFFFF"/>
+          </a:effectRef>
+          <a:fontRef idx="minor">
+            <a:schemeClr val="lt1"/>
+          </a:fontRef>
+        </p:style>
+        <p:txBody>
+          <a:bodyPr vertOverflow="overflow" horzOverflow="overflow" vert="horz" wrap="square" numCol="1" spcCol="0" rtlCol="0" fromWordArt="0" anchor="ctr" anchorCtr="0" forceAA="0" compatLnSpc="1">
+            <a:noAutofit/>
+          </a:bodyPr>
+          <a:p>
+            <a:pPr lvl="0" algn="ctr">
+              <a:buClrTx/>
+              <a:buSzTx/>
+              <a:buFontTx/>
+            </a:pPr>
+            <a:endParaRPr lang="zh-CN" altLang="en-US">
+              <a:sym typeface="+mn-ea"/>
+            </a:endParaRPr>
+          </a:p>
+        </p:txBody>
+      </p:sp>
+      <p:sp>
+        <p:nvSpPr>
+          <p:cNvPr id="17" name="圆柱形 16"/>
+          <p:cNvSpPr/>
+          <p:nvPr/>
+        </p:nvSpPr>
+        <p:spPr>
+          <a:xfrm rot="16200000">
+            <a:off x="2332493" y="4063227"/>
+            <a:ext cx="2519680" cy="360000"/>
+          </a:xfrm>
+          <a:prstGeom prst="can">
+            <a:avLst/>
+          </a:prstGeom>
+          <a:solidFill>
+            <a:schemeClr val="accent5">
+              <a:lumMod val="60000"/>
+              <a:lumOff val="40000"/>
+            </a:schemeClr>
+          </a:solidFill>
+          <a:ln>
+            <a:solidFill>
+              <a:schemeClr val="tx1"/>
+            </a:solidFill>
+          </a:ln>
+        </p:spPr>
+        <p:style>
+          <a:lnRef idx="2">
+            <a:schemeClr val="accent1">
+              <a:lumMod val="75000"/>
+            </a:schemeClr>
+          </a:lnRef>
+          <a:fillRef idx="1">
+            <a:schemeClr val="accent1"/>
+          </a:fillRef>
+          <a:effectRef idx="0">
+            <a:srgbClr val="FFFFFF"/>
+          </a:effectRef>
+          <a:fontRef idx="minor">
+            <a:schemeClr val="lt1"/>
+          </a:fontRef>
+        </p:style>
+        <p:txBody>
+          <a:bodyPr vertOverflow="overflow" horzOverflow="overflow" vert="horz" wrap="square" numCol="1" spcCol="0" rtlCol="0" fromWordArt="0" anchor="ctr" anchorCtr="0" forceAA="0" compatLnSpc="1">
+            <a:noAutofit/>
+          </a:bodyPr>
+          <a:p>
+            <a:pPr lvl="0" algn="ctr">
+              <a:buClrTx/>
+              <a:buSzTx/>
+              <a:buFontTx/>
+            </a:pPr>
+            <a:endParaRPr lang="zh-CN" altLang="en-US">
+              <a:sym typeface="+mn-ea"/>
+            </a:endParaRPr>
+          </a:p>
+        </p:txBody>
+      </p:sp>
+      <p:sp>
+        <p:nvSpPr>
+          <p:cNvPr id="18" name="圆柱形 17"/>
+          <p:cNvSpPr/>
+          <p:nvPr/>
+        </p:nvSpPr>
+        <p:spPr>
+          <a:xfrm rot="16200000">
+            <a:off x="2778898" y="4063227"/>
+            <a:ext cx="2519680" cy="360000"/>
+          </a:xfrm>
+          <a:prstGeom prst="can">
+            <a:avLst/>
+          </a:prstGeom>
+          <a:solidFill>
+            <a:schemeClr val="accent5">
+              <a:lumMod val="20000"/>
+              <a:lumOff val="80000"/>
+            </a:schemeClr>
+          </a:solidFill>
+          <a:ln>
+            <a:solidFill>
+              <a:schemeClr val="tx1"/>
+            </a:solidFill>
+          </a:ln>
+        </p:spPr>
+        <p:style>
+          <a:lnRef idx="2">
+            <a:schemeClr val="accent1">
+              <a:lumMod val="75000"/>
+            </a:schemeClr>
+          </a:lnRef>
+          <a:fillRef idx="1">
+            <a:schemeClr val="accent1"/>
+          </a:fillRef>
+          <a:effectRef idx="0">
+            <a:srgbClr val="FFFFFF"/>
+          </a:effectRef>
+          <a:fontRef idx="minor">
+            <a:schemeClr val="lt1"/>
+          </a:fontRef>
+        </p:style>
+        <p:txBody>
+          <a:bodyPr vertOverflow="overflow" horzOverflow="overflow" vert="horz" wrap="square" numCol="1" spcCol="0" rtlCol="0" fromWordArt="0" anchor="ctr" anchorCtr="0" forceAA="0" compatLnSpc="1">
+            <a:noAutofit/>
+          </a:bodyPr>
+          <a:p>
+            <a:pPr lvl="0" algn="ctr">
+              <a:buClrTx/>
+              <a:buSzTx/>
+              <a:buFontTx/>
+            </a:pPr>
+            <a:endParaRPr lang="zh-CN" altLang="en-US">
+              <a:sym typeface="+mn-ea"/>
+            </a:endParaRPr>
+          </a:p>
+        </p:txBody>
+      </p:sp>
+      <p:sp>
+        <p:nvSpPr>
+          <p:cNvPr id="19" name="圆柱形 18"/>
+          <p:cNvSpPr/>
+          <p:nvPr/>
+        </p:nvSpPr>
+        <p:spPr>
+          <a:xfrm rot="16200000">
+            <a:off x="3225303" y="4063227"/>
+            <a:ext cx="2519680" cy="360000"/>
+          </a:xfrm>
+          <a:prstGeom prst="can">
+            <a:avLst/>
+          </a:prstGeom>
+          <a:solidFill>
+            <a:schemeClr val="accent5">
+              <a:lumMod val="60000"/>
+              <a:lumOff val="40000"/>
+            </a:schemeClr>
+          </a:solidFill>
+          <a:ln>
+            <a:solidFill>
+              <a:schemeClr val="tx1"/>
+            </a:solidFill>
+          </a:ln>
+        </p:spPr>
+        <p:style>
+          <a:lnRef idx="2">
+            <a:schemeClr val="accent1">
+              <a:lumMod val="75000"/>
+            </a:schemeClr>
+          </a:lnRef>
+          <a:fillRef idx="1">
+            <a:schemeClr val="accent1"/>
+          </a:fillRef>
+          <a:effectRef idx="0">
+            <a:srgbClr val="FFFFFF"/>
+          </a:effectRef>
+          <a:fontRef idx="minor">
+            <a:schemeClr val="lt1"/>
+          </a:fontRef>
+        </p:style>
+        <p:txBody>
+          <a:bodyPr vertOverflow="overflow" horzOverflow="overflow" vert="horz" wrap="square" numCol="1" spcCol="0" rtlCol="0" fromWordArt="0" anchor="ctr" anchorCtr="0" forceAA="0" compatLnSpc="1">
+            <a:noAutofit/>
+          </a:bodyPr>
+          <a:p>
+            <a:pPr lvl="0" algn="ctr">
+              <a:buClrTx/>
+              <a:buSzTx/>
+              <a:buFontTx/>
+            </a:pPr>
+            <a:endParaRPr lang="zh-CN" altLang="en-US">
+              <a:sym typeface="+mn-ea"/>
+            </a:endParaRPr>
+          </a:p>
+        </p:txBody>
+      </p:sp>
+      <p:sp>
+        <p:nvSpPr>
+          <p:cNvPr id="20" name="圆柱形 19"/>
+          <p:cNvSpPr/>
+          <p:nvPr/>
+        </p:nvSpPr>
+        <p:spPr>
+          <a:xfrm rot="16200000">
+            <a:off x="3671708" y="4063227"/>
+            <a:ext cx="2519680" cy="360000"/>
+          </a:xfrm>
+          <a:prstGeom prst="can">
+            <a:avLst/>
+          </a:prstGeom>
+          <a:solidFill>
+            <a:schemeClr val="accent5">
+              <a:lumMod val="75000"/>
+            </a:schemeClr>
+          </a:solidFill>
+          <a:ln>
+            <a:solidFill>
+              <a:schemeClr val="tx1"/>
+            </a:solidFill>
+          </a:ln>
+        </p:spPr>
+        <p:style>
+          <a:lnRef idx="2">
+            <a:schemeClr val="accent1">
+              <a:lumMod val="75000"/>
+            </a:schemeClr>
+          </a:lnRef>
+          <a:fillRef idx="1">
+            <a:schemeClr val="accent1"/>
+          </a:fillRef>
+          <a:effectRef idx="0">
+            <a:srgbClr val="FFFFFF"/>
+          </a:effectRef>
+          <a:fontRef idx="minor">
+            <a:schemeClr val="lt1"/>
+          </a:fontRef>
+        </p:style>
+        <p:txBody>
+          <a:bodyPr vertOverflow="overflow" horzOverflow="overflow" vert="horz" wrap="square" numCol="1" spcCol="0" rtlCol="0" fromWordArt="0" anchor="ctr" anchorCtr="0" forceAA="0" compatLnSpc="1">
+            <a:noAutofit/>
+          </a:bodyPr>
+          <a:p>
+            <a:pPr lvl="0" algn="ctr">
+              <a:buClrTx/>
+              <a:buSzTx/>
+              <a:buFontTx/>
+            </a:pPr>
+            <a:endParaRPr lang="zh-CN" altLang="en-US">
+              <a:sym typeface="+mn-ea"/>
+            </a:endParaRPr>
+          </a:p>
+        </p:txBody>
+      </p:sp>
+      <p:sp>
+        <p:nvSpPr>
+          <p:cNvPr id="21" name="圆柱形 20"/>
+          <p:cNvSpPr/>
+          <p:nvPr/>
+        </p:nvSpPr>
+        <p:spPr>
+          <a:xfrm rot="16200000">
+            <a:off x="4118113" y="4063227"/>
+            <a:ext cx="2519680" cy="360000"/>
+          </a:xfrm>
+          <a:prstGeom prst="can">
+            <a:avLst/>
+          </a:prstGeom>
+          <a:solidFill>
+            <a:schemeClr val="accent5">
+              <a:lumMod val="60000"/>
+              <a:lumOff val="40000"/>
+            </a:schemeClr>
+          </a:solidFill>
+          <a:ln>
+            <a:solidFill>
+              <a:schemeClr val="tx1"/>
+            </a:solidFill>
+          </a:ln>
+        </p:spPr>
+        <p:style>
+          <a:lnRef idx="2">
+            <a:schemeClr val="accent1">
+              <a:lumMod val="75000"/>
+            </a:schemeClr>
+          </a:lnRef>
+          <a:fillRef idx="1">
+            <a:schemeClr val="accent1"/>
+          </a:fillRef>
+          <a:effectRef idx="0">
+            <a:srgbClr val="FFFFFF"/>
+          </a:effectRef>
+          <a:fontRef idx="minor">
+            <a:schemeClr val="lt1"/>
+          </a:fontRef>
+        </p:style>
+        <p:txBody>
+          <a:bodyPr vertOverflow="overflow" horzOverflow="overflow" vert="horz" wrap="square" numCol="1" spcCol="0" rtlCol="0" fromWordArt="0" anchor="ctr" anchorCtr="0" forceAA="0" compatLnSpc="1">
+            <a:noAutofit/>
+          </a:bodyPr>
+          <a:p>
+            <a:pPr lvl="0" algn="ctr">
+              <a:buClrTx/>
+              <a:buSzTx/>
+              <a:buFontTx/>
+            </a:pPr>
+            <a:endParaRPr lang="zh-CN" altLang="en-US">
+              <a:sym typeface="+mn-ea"/>
+            </a:endParaRPr>
+          </a:p>
+        </p:txBody>
+      </p:sp>
+      <p:sp>
+        <p:nvSpPr>
+          <p:cNvPr id="22" name="圆柱形 21"/>
+          <p:cNvSpPr/>
+          <p:nvPr/>
+        </p:nvSpPr>
+        <p:spPr>
+          <a:xfrm rot="16200000">
+            <a:off x="4564518" y="4063227"/>
+            <a:ext cx="2519680" cy="360000"/>
+          </a:xfrm>
+          <a:prstGeom prst="can">
+            <a:avLst/>
+          </a:prstGeom>
+          <a:solidFill>
+            <a:schemeClr val="accent5">
+              <a:lumMod val="20000"/>
+              <a:lumOff val="80000"/>
+            </a:schemeClr>
+          </a:solidFill>
+          <a:ln>
+            <a:solidFill>
+              <a:schemeClr val="tx1"/>
+            </a:solidFill>
+          </a:ln>
+        </p:spPr>
+        <p:style>
+          <a:lnRef idx="2">
+            <a:schemeClr val="accent1">
+              <a:lumMod val="75000"/>
+            </a:schemeClr>
+          </a:lnRef>
+          <a:fillRef idx="1">
+            <a:schemeClr val="accent1"/>
+          </a:fillRef>
+          <a:effectRef idx="0">
+            <a:srgbClr val="FFFFFF"/>
+          </a:effectRef>
+          <a:fontRef idx="minor">
+            <a:schemeClr val="lt1"/>
+          </a:fontRef>
+        </p:style>
+        <p:txBody>
+          <a:bodyPr vertOverflow="overflow" horzOverflow="overflow" vert="horz" wrap="square" numCol="1" spcCol="0" rtlCol="0" fromWordArt="0" anchor="ctr" anchorCtr="0" forceAA="0" compatLnSpc="1">
+            <a:noAutofit/>
+          </a:bodyPr>
+          <a:p>
+            <a:pPr lvl="0" algn="ctr">
+              <a:buClrTx/>
+              <a:buSzTx/>
+              <a:buFontTx/>
+            </a:pPr>
+            <a:endParaRPr lang="zh-CN" altLang="en-US">
+              <a:sym typeface="+mn-ea"/>
+            </a:endParaRPr>
+          </a:p>
+        </p:txBody>
+      </p:sp>
       <p:grpSp>
         <p:nvGrpSpPr>
-          <p:cNvPr id="8" name="组合 7">
-            <a:extLst>
-              <a:ext uri="{FF2B5EF4-FFF2-40B4-BE49-F238E27FC236}">
-                <a16:creationId xmlns:a16="http://schemas.microsoft.com/office/drawing/2014/main" id="{FEC57DBE-BBB9-2444-7AC5-D114CCBB97B6}"/>
-              </a:ext>
-            </a:extLst>
-          </p:cNvPr>
+          <p:cNvPr id="26" name="组合 25"/>
           <p:cNvGrpSpPr/>
           <p:nvPr/>
         </p:nvGrpSpPr>
         <p:grpSpPr>
           <a:xfrm>
-            <a:off x="5190822" y="2135646"/>
-            <a:ext cx="1909101" cy="3663737"/>
-            <a:chOff x="5190822" y="2135646"/>
-            <a:chExt cx="1909101" cy="3663737"/>
+            <a:off x="3188335" y="3059430"/>
+            <a:ext cx="3569335" cy="2424430"/>
+            <a:chOff x="4685" y="4818"/>
+            <a:chExt cx="5621" cy="3818"/>
           </a:xfrm>
         </p:grpSpPr>
-        <p:cxnSp>
-          <p:nvCxnSpPr>
-            <p:cNvPr id="6" name="直接连接符 5">
-              <a:extLst>
-                <a:ext uri="{FF2B5EF4-FFF2-40B4-BE49-F238E27FC236}">
-                  <a16:creationId xmlns:a16="http://schemas.microsoft.com/office/drawing/2014/main" id="{3FF7E0E4-8871-ED45-13B0-6F48EBC053B0}"/>
-                </a:ext>
-              </a:extLst>
-            </p:cNvPr>
-            <p:cNvCxnSpPr/>
+        <p:sp>
+          <p:nvSpPr>
+            <p:cNvPr id="24" name="弧形 23"/>
+            <p:cNvSpPr/>
             <p:nvPr/>
-          </p:nvCxnSpPr>
+          </p:nvSpPr>
           <p:spPr>
             <a:xfrm>
-              <a:off x="5557485" y="3099138"/>
-              <a:ext cx="0" cy="2520000"/>
+              <a:off x="4685" y="5028"/>
+              <a:ext cx="2811" cy="3608"/>
             </a:xfrm>
-            <a:prstGeom prst="line">
-              <a:avLst/>
+            <a:prstGeom prst="arc">
+              <a:avLst>
+                <a:gd name="adj1" fmla="val 10727950"/>
+                <a:gd name="adj2" fmla="val 14045"/>
+              </a:avLst>
             </a:prstGeom>
-            <a:ln w="25400">
+            <a:ln w="50800">
               <a:solidFill>
-                <a:schemeClr val="tx1"/>
+                <a:schemeClr val="accent6"/>
               </a:solidFill>
             </a:ln>
           </p:spPr>
@@ -17765,30 +17118,33 @@
               <a:schemeClr val="tx1"/>
             </a:fontRef>
           </p:style>
-        </p:cxnSp>
-        <p:cxnSp>
-          <p:nvCxnSpPr>
-            <p:cNvPr id="7" name="直接连接符 6">
-              <a:extLst>
-                <a:ext uri="{FF2B5EF4-FFF2-40B4-BE49-F238E27FC236}">
-                  <a16:creationId xmlns:a16="http://schemas.microsoft.com/office/drawing/2014/main" id="{28C2DA7E-E142-BE5B-59BA-143833FA46EA}"/>
-                </a:ext>
-              </a:extLst>
-            </p:cNvPr>
-            <p:cNvCxnSpPr/>
+          <p:txBody>
+            <a:bodyPr/>
+            <a:p>
+              <a:endParaRPr lang="zh-CN" altLang="en-US"/>
+            </a:p>
+          </p:txBody>
+        </p:sp>
+        <p:sp>
+          <p:nvSpPr>
+            <p:cNvPr id="25" name="弧形 24"/>
+            <p:cNvSpPr/>
             <p:nvPr/>
-          </p:nvCxnSpPr>
+          </p:nvSpPr>
           <p:spPr>
-            <a:xfrm>
-              <a:off x="6635536" y="2379138"/>
-              <a:ext cx="0" cy="2520000"/>
+            <a:xfrm rot="10800000">
+              <a:off x="7496" y="4818"/>
+              <a:ext cx="2811" cy="3608"/>
             </a:xfrm>
-            <a:prstGeom prst="line">
-              <a:avLst/>
+            <a:prstGeom prst="arc">
+              <a:avLst>
+                <a:gd name="adj1" fmla="val 10707781"/>
+                <a:gd name="adj2" fmla="val 14045"/>
+              </a:avLst>
             </a:prstGeom>
-            <a:ln w="25400">
+            <a:ln w="50800">
               <a:solidFill>
-                <a:schemeClr val="tx1"/>
+                <a:schemeClr val="accent6"/>
               </a:solidFill>
             </a:ln>
           </p:spPr>
@@ -17806,544 +17162,15 @@
               <a:schemeClr val="tx1"/>
             </a:fontRef>
           </p:style>
-        </p:cxnSp>
-        <p:cxnSp>
-          <p:nvCxnSpPr>
-            <p:cNvPr id="9" name="直接连接符 8">
-              <a:extLst>
-                <a:ext uri="{FF2B5EF4-FFF2-40B4-BE49-F238E27FC236}">
-                  <a16:creationId xmlns:a16="http://schemas.microsoft.com/office/drawing/2014/main" id="{E85DA2BF-E4D0-CC56-09DD-0823CE398008}"/>
-                </a:ext>
-              </a:extLst>
-            </p:cNvPr>
-            <p:cNvCxnSpPr>
-              <a:cxnSpLocks/>
-            </p:cNvCxnSpPr>
-            <p:nvPr/>
-          </p:nvCxnSpPr>
-          <p:spPr>
-            <a:xfrm flipV="1">
-              <a:off x="5557485" y="4899138"/>
-              <a:ext cx="1079074" cy="720000"/>
-            </a:xfrm>
-            <a:prstGeom prst="line">
-              <a:avLst/>
-            </a:prstGeom>
-            <a:ln w="25400">
-              <a:solidFill>
-                <a:schemeClr val="tx1"/>
-              </a:solidFill>
-            </a:ln>
-          </p:spPr>
-          <p:style>
-            <a:lnRef idx="1">
-              <a:schemeClr val="accent1"/>
-            </a:lnRef>
-            <a:fillRef idx="0">
-              <a:schemeClr val="accent1"/>
-            </a:fillRef>
-            <a:effectRef idx="0">
-              <a:schemeClr val="accent1"/>
-            </a:effectRef>
-            <a:fontRef idx="minor">
-              <a:schemeClr val="tx1"/>
-            </a:fontRef>
-          </p:style>
-        </p:cxnSp>
-        <p:cxnSp>
-          <p:nvCxnSpPr>
-            <p:cNvPr id="12" name="直接连接符 11">
-              <a:extLst>
-                <a:ext uri="{FF2B5EF4-FFF2-40B4-BE49-F238E27FC236}">
-                  <a16:creationId xmlns:a16="http://schemas.microsoft.com/office/drawing/2014/main" id="{CAF4409C-A1CA-DC6B-9080-4570B8A97DE1}"/>
-                </a:ext>
-              </a:extLst>
-            </p:cNvPr>
-            <p:cNvCxnSpPr>
-              <a:cxnSpLocks/>
-            </p:cNvCxnSpPr>
-            <p:nvPr/>
-          </p:nvCxnSpPr>
-          <p:spPr>
-            <a:xfrm flipV="1">
-              <a:off x="5557485" y="2379138"/>
-              <a:ext cx="1079074" cy="720000"/>
-            </a:xfrm>
-            <a:prstGeom prst="line">
-              <a:avLst/>
-            </a:prstGeom>
-            <a:ln w="25400">
-              <a:solidFill>
-                <a:schemeClr val="tx1"/>
-              </a:solidFill>
-            </a:ln>
-          </p:spPr>
-          <p:style>
-            <a:lnRef idx="1">
-              <a:schemeClr val="accent1"/>
-            </a:lnRef>
-            <a:fillRef idx="0">
-              <a:schemeClr val="accent1"/>
-            </a:fillRef>
-            <a:effectRef idx="0">
-              <a:schemeClr val="accent1"/>
-            </a:effectRef>
-            <a:fontRef idx="minor">
-              <a:schemeClr val="tx1"/>
-            </a:fontRef>
-          </p:style>
-        </p:cxnSp>
-        <p:cxnSp>
-          <p:nvCxnSpPr>
-            <p:cNvPr id="16" name="直接连接符 15">
-              <a:extLst>
-                <a:ext uri="{FF2B5EF4-FFF2-40B4-BE49-F238E27FC236}">
-                  <a16:creationId xmlns:a16="http://schemas.microsoft.com/office/drawing/2014/main" id="{3946D192-8373-7F89-AD4A-C1011AE7ED5D}"/>
-                </a:ext>
-              </a:extLst>
-            </p:cNvPr>
-            <p:cNvCxnSpPr/>
-            <p:nvPr/>
-          </p:nvCxnSpPr>
-          <p:spPr>
-            <a:xfrm flipH="1" flipV="1">
-              <a:off x="5202104" y="3018442"/>
-              <a:ext cx="360000" cy="90000"/>
-            </a:xfrm>
-            <a:prstGeom prst="line">
-              <a:avLst/>
-            </a:prstGeom>
-            <a:ln w="25400">
-              <a:solidFill>
-                <a:schemeClr val="tx1"/>
-              </a:solidFill>
-            </a:ln>
-          </p:spPr>
-          <p:style>
-            <a:lnRef idx="1">
-              <a:schemeClr val="accent1"/>
-            </a:lnRef>
-            <a:fillRef idx="0">
-              <a:schemeClr val="accent1"/>
-            </a:fillRef>
-            <a:effectRef idx="0">
-              <a:schemeClr val="accent1"/>
-            </a:effectRef>
-            <a:fontRef idx="minor">
-              <a:schemeClr val="tx1"/>
-            </a:fontRef>
-          </p:style>
-        </p:cxnSp>
-        <p:cxnSp>
-          <p:nvCxnSpPr>
-            <p:cNvPr id="17" name="直接连接符 16">
-              <a:extLst>
-                <a:ext uri="{FF2B5EF4-FFF2-40B4-BE49-F238E27FC236}">
-                  <a16:creationId xmlns:a16="http://schemas.microsoft.com/office/drawing/2014/main" id="{0BD890D2-CC90-62C4-00A9-72A474B25FC5}"/>
-                </a:ext>
-              </a:extLst>
-            </p:cNvPr>
-            <p:cNvCxnSpPr/>
-            <p:nvPr/>
-          </p:nvCxnSpPr>
-          <p:spPr>
-            <a:xfrm flipH="1" flipV="1">
-              <a:off x="6274514" y="2289138"/>
-              <a:ext cx="360000" cy="90000"/>
-            </a:xfrm>
-            <a:prstGeom prst="line">
-              <a:avLst/>
-            </a:prstGeom>
-            <a:ln w="25400">
-              <a:solidFill>
-                <a:schemeClr val="tx1"/>
-              </a:solidFill>
-            </a:ln>
-          </p:spPr>
-          <p:style>
-            <a:lnRef idx="1">
-              <a:schemeClr val="accent1"/>
-            </a:lnRef>
-            <a:fillRef idx="0">
-              <a:schemeClr val="accent1"/>
-            </a:fillRef>
-            <a:effectRef idx="0">
-              <a:schemeClr val="accent1"/>
-            </a:effectRef>
-            <a:fontRef idx="minor">
-              <a:schemeClr val="tx1"/>
-            </a:fontRef>
-          </p:style>
-        </p:cxnSp>
-        <p:cxnSp>
-          <p:nvCxnSpPr>
-            <p:cNvPr id="18" name="直接连接符 17">
-              <a:extLst>
-                <a:ext uri="{FF2B5EF4-FFF2-40B4-BE49-F238E27FC236}">
-                  <a16:creationId xmlns:a16="http://schemas.microsoft.com/office/drawing/2014/main" id="{46C4CAA8-2A33-CC0C-C728-3DA4442BAB09}"/>
-                </a:ext>
-              </a:extLst>
-            </p:cNvPr>
-            <p:cNvCxnSpPr>
-              <a:cxnSpLocks/>
-            </p:cNvCxnSpPr>
-            <p:nvPr/>
-          </p:nvCxnSpPr>
-          <p:spPr>
-            <a:xfrm flipH="1" flipV="1">
-              <a:off x="5190822" y="5510530"/>
-              <a:ext cx="360000" cy="90000"/>
-            </a:xfrm>
-            <a:prstGeom prst="line">
-              <a:avLst/>
-            </a:prstGeom>
-            <a:ln w="25400">
-              <a:solidFill>
-                <a:schemeClr val="tx1"/>
-              </a:solidFill>
-            </a:ln>
-          </p:spPr>
-          <p:style>
-            <a:lnRef idx="1">
-              <a:schemeClr val="accent1"/>
-            </a:lnRef>
-            <a:fillRef idx="0">
-              <a:schemeClr val="accent1"/>
-            </a:fillRef>
-            <a:effectRef idx="0">
-              <a:schemeClr val="accent1"/>
-            </a:effectRef>
-            <a:fontRef idx="minor">
-              <a:schemeClr val="tx1"/>
-            </a:fontRef>
-          </p:style>
-        </p:cxnSp>
-        <p:cxnSp>
-          <p:nvCxnSpPr>
-            <p:cNvPr id="20" name="直接连接符 19">
-              <a:extLst>
-                <a:ext uri="{FF2B5EF4-FFF2-40B4-BE49-F238E27FC236}">
-                  <a16:creationId xmlns:a16="http://schemas.microsoft.com/office/drawing/2014/main" id="{F60BCAA1-8B20-587A-0D2D-907C459F6A2E}"/>
-                </a:ext>
-              </a:extLst>
-            </p:cNvPr>
-            <p:cNvCxnSpPr/>
-            <p:nvPr/>
-          </p:nvCxnSpPr>
-          <p:spPr>
-            <a:xfrm>
-              <a:off x="5202104" y="2990530"/>
-              <a:ext cx="0" cy="2520000"/>
-            </a:xfrm>
-            <a:prstGeom prst="line">
-              <a:avLst/>
-            </a:prstGeom>
-            <a:ln w="25400">
-              <a:solidFill>
-                <a:schemeClr val="tx1"/>
-              </a:solidFill>
-            </a:ln>
-          </p:spPr>
-          <p:style>
-            <a:lnRef idx="1">
-              <a:schemeClr val="accent1"/>
-            </a:lnRef>
-            <a:fillRef idx="0">
-              <a:schemeClr val="accent1"/>
-            </a:fillRef>
-            <a:effectRef idx="0">
-              <a:schemeClr val="accent1"/>
-            </a:effectRef>
-            <a:fontRef idx="minor">
-              <a:schemeClr val="tx1"/>
-            </a:fontRef>
-          </p:style>
-        </p:cxnSp>
-        <p:cxnSp>
-          <p:nvCxnSpPr>
-            <p:cNvPr id="21" name="直接连接符 20">
-              <a:extLst>
-                <a:ext uri="{FF2B5EF4-FFF2-40B4-BE49-F238E27FC236}">
-                  <a16:creationId xmlns:a16="http://schemas.microsoft.com/office/drawing/2014/main" id="{F15CA071-B6A4-EDE4-B8B6-8563143B5B9E}"/>
-                </a:ext>
-              </a:extLst>
-            </p:cNvPr>
-            <p:cNvCxnSpPr>
-              <a:cxnSpLocks/>
-            </p:cNvCxnSpPr>
-            <p:nvPr/>
-          </p:nvCxnSpPr>
-          <p:spPr>
-            <a:xfrm flipV="1">
-              <a:off x="5193395" y="2298442"/>
-              <a:ext cx="1079074" cy="720000"/>
-            </a:xfrm>
-            <a:prstGeom prst="line">
-              <a:avLst/>
-            </a:prstGeom>
-            <a:ln w="25400">
-              <a:solidFill>
-                <a:schemeClr val="tx1"/>
-              </a:solidFill>
-            </a:ln>
-          </p:spPr>
-          <p:style>
-            <a:lnRef idx="1">
-              <a:schemeClr val="accent1"/>
-            </a:lnRef>
-            <a:fillRef idx="0">
-              <a:schemeClr val="accent1"/>
-            </a:fillRef>
-            <a:effectRef idx="0">
-              <a:schemeClr val="accent1"/>
-            </a:effectRef>
-            <a:fontRef idx="minor">
-              <a:schemeClr val="tx1"/>
-            </a:fontRef>
-          </p:style>
-        </p:cxnSp>
-        <p:cxnSp>
-          <p:nvCxnSpPr>
-            <p:cNvPr id="25" name="直接箭头连接符 24">
-              <a:extLst>
-                <a:ext uri="{FF2B5EF4-FFF2-40B4-BE49-F238E27FC236}">
-                  <a16:creationId xmlns:a16="http://schemas.microsoft.com/office/drawing/2014/main" id="{7B5F31E8-438D-3DAE-7DC1-7247B91E3086}"/>
-                </a:ext>
-              </a:extLst>
-            </p:cNvPr>
-            <p:cNvCxnSpPr>
-              <a:cxnSpLocks/>
-            </p:cNvCxnSpPr>
-            <p:nvPr/>
-          </p:nvCxnSpPr>
-          <p:spPr>
-            <a:xfrm>
-              <a:off x="6096000" y="4050030"/>
-              <a:ext cx="992265" cy="265477"/>
-            </a:xfrm>
-            <a:prstGeom prst="straightConnector1">
-              <a:avLst/>
-            </a:prstGeom>
-            <a:ln w="25400">
-              <a:solidFill>
-                <a:schemeClr val="tx1"/>
-              </a:solidFill>
-              <a:tailEnd type="triangle"/>
-            </a:ln>
-          </p:spPr>
-          <p:style>
-            <a:lnRef idx="1">
-              <a:schemeClr val="accent1"/>
-            </a:lnRef>
-            <a:fillRef idx="0">
-              <a:schemeClr val="accent1"/>
-            </a:fillRef>
-            <a:effectRef idx="0">
-              <a:schemeClr val="accent1"/>
-            </a:effectRef>
-            <a:fontRef idx="minor">
-              <a:schemeClr val="tx1"/>
-            </a:fontRef>
-          </p:style>
-        </p:cxnSp>
-        <p:cxnSp>
-          <p:nvCxnSpPr>
-            <p:cNvPr id="29" name="直接连接符 28">
-              <a:extLst>
-                <a:ext uri="{FF2B5EF4-FFF2-40B4-BE49-F238E27FC236}">
-                  <a16:creationId xmlns:a16="http://schemas.microsoft.com/office/drawing/2014/main" id="{845D1BA2-7A1F-17B5-A9E2-B5790BD88F3F}"/>
-                </a:ext>
-              </a:extLst>
-            </p:cNvPr>
-            <p:cNvCxnSpPr>
-              <a:cxnSpLocks/>
-            </p:cNvCxnSpPr>
-            <p:nvPr/>
-          </p:nvCxnSpPr>
-          <p:spPr>
-            <a:xfrm>
-              <a:off x="6096000" y="2135646"/>
-              <a:ext cx="0" cy="3663737"/>
-            </a:xfrm>
-            <a:prstGeom prst="line">
-              <a:avLst/>
-            </a:prstGeom>
-            <a:ln w="25400">
-              <a:solidFill>
-                <a:srgbClr val="FF0000"/>
-              </a:solidFill>
-              <a:prstDash val="dash"/>
-            </a:ln>
-          </p:spPr>
-          <p:style>
-            <a:lnRef idx="1">
-              <a:schemeClr val="accent1"/>
-            </a:lnRef>
-            <a:fillRef idx="0">
-              <a:schemeClr val="accent1"/>
-            </a:fillRef>
-            <a:effectRef idx="0">
-              <a:schemeClr val="accent1"/>
-            </a:effectRef>
-            <a:fontRef idx="minor">
-              <a:schemeClr val="tx1"/>
-            </a:fontRef>
-          </p:style>
-        </p:cxnSp>
-        <mc:AlternateContent xmlns:mc="http://schemas.openxmlformats.org/markup-compatibility/2006">
-          <mc:Choice xmlns:a14="http://schemas.microsoft.com/office/drawing/2010/main" Requires="a14">
-            <p:sp>
-              <p:nvSpPr>
-                <p:cNvPr id="32" name="文本框 31">
-                  <a:extLst>
-                    <a:ext uri="{FF2B5EF4-FFF2-40B4-BE49-F238E27FC236}">
-                      <a16:creationId xmlns:a16="http://schemas.microsoft.com/office/drawing/2014/main" id="{F2D2D722-273E-31F6-33E5-82BDEC020C97}"/>
-                    </a:ext>
-                  </a:extLst>
-                </p:cNvPr>
-                <p:cNvSpPr txBox="1"/>
-                <p:nvPr/>
-              </p:nvSpPr>
-              <p:spPr>
-                <a:xfrm>
-                  <a:off x="6688228" y="3896459"/>
-                  <a:ext cx="262059" cy="553998"/>
-                </a:xfrm>
-                <a:prstGeom prst="rect">
-                  <a:avLst/>
-                </a:prstGeom>
-                <a:noFill/>
-              </p:spPr>
-              <p:txBody>
-                <a:bodyPr wrap="none" lIns="0" tIns="0" rIns="0" bIns="0" rtlCol="0">
-                  <a:spAutoFit/>
-                </a:bodyPr>
-                <a:lstStyle/>
-                <a:p>
-                  <a:pPr/>
-                  <a14:m>
-                    <m:oMathPara xmlns:m="http://schemas.openxmlformats.org/officeDocument/2006/math">
-                      <m:oMathParaPr>
-                        <m:jc m:val="centerGroup"/>
-                      </m:oMathParaPr>
-                      <m:oMath xmlns:m="http://schemas.openxmlformats.org/officeDocument/2006/math">
-                        <m:r>
-                          <a:rPr lang="en-US" altLang="zh-CN" b="0" i="1" smtClean="0">
-                            <a:latin typeface="Cambria Math" panose="02040503050406030204" pitchFamily="18" charset="0"/>
-                          </a:rPr>
-                          <m:t>𝐤</m:t>
-                        </m:r>
-                      </m:oMath>
-                    </m:oMathPara>
-                  </a14:m>
-                  <a:endParaRPr lang="en-US" altLang="zh-CN" b="0" dirty="0"/>
-                </a:p>
-                <a:p>
-                  <a:endParaRPr lang="zh-CN" altLang="en-US" dirty="0"/>
-                </a:p>
-              </p:txBody>
-            </p:sp>
-          </mc:Choice>
-          <mc:Fallback>
-            <p:sp>
-              <p:nvSpPr>
-                <p:cNvPr id="32" name="文本框 31">
-                  <a:extLst>
-                    <a:ext uri="{FF2B5EF4-FFF2-40B4-BE49-F238E27FC236}">
-                      <a16:creationId xmlns:a16="http://schemas.microsoft.com/office/drawing/2014/main" id="{F2D2D722-273E-31F6-33E5-82BDEC020C97}"/>
-                    </a:ext>
-                  </a:extLst>
-                </p:cNvPr>
-                <p:cNvSpPr txBox="1">
-                  <a:spLocks noRot="1" noChangeAspect="1" noMove="1" noResize="1" noEditPoints="1" noAdjustHandles="1" noChangeArrowheads="1" noChangeShapeType="1" noTextEdit="1"/>
-                </p:cNvSpPr>
-                <p:nvPr/>
-              </p:nvSpPr>
-              <p:spPr>
-                <a:xfrm>
-                  <a:off x="6688228" y="3896459"/>
-                  <a:ext cx="262059" cy="553998"/>
-                </a:xfrm>
-                <a:prstGeom prst="rect">
-                  <a:avLst/>
-                </a:prstGeom>
-                <a:blipFill>
-                  <a:blip r:embed="rId2"/>
-                  <a:stretch>
-                    <a:fillRect l="-9302" r="-11628"/>
-                  </a:stretch>
-                </a:blipFill>
-              </p:spPr>
-              <p:txBody>
-                <a:bodyPr/>
-                <a:lstStyle/>
-                <a:p>
-                  <a:r>
-                    <a:rPr lang="zh-CN" altLang="en-US">
-                      <a:noFill/>
-                    </a:rPr>
-                    <a:t> </a:t>
-                  </a:r>
-                </a:p>
-              </p:txBody>
-            </p:sp>
-          </mc:Fallback>
-        </mc:AlternateContent>
-        <p:sp>
-          <p:nvSpPr>
-            <p:cNvPr id="33" name="文本框 32">
-              <a:extLst>
-                <a:ext uri="{FF2B5EF4-FFF2-40B4-BE49-F238E27FC236}">
-                  <a16:creationId xmlns:a16="http://schemas.microsoft.com/office/drawing/2014/main" id="{06BB3025-07BB-19BB-9CEF-1B20898772F2}"/>
-                </a:ext>
-              </a:extLst>
-            </p:cNvPr>
-            <p:cNvSpPr txBox="1"/>
-            <p:nvPr/>
-          </p:nvSpPr>
-          <p:spPr>
-            <a:xfrm>
-              <a:off x="6173197" y="5370864"/>
-              <a:ext cx="926726" cy="369332"/>
-            </a:xfrm>
-            <a:prstGeom prst="rect">
-              <a:avLst/>
-            </a:prstGeom>
-            <a:noFill/>
-          </p:spPr>
           <p:txBody>
-            <a:bodyPr wrap="square" rtlCol="0">
-              <a:spAutoFit/>
-            </a:bodyPr>
-            <a:lstStyle/>
+            <a:bodyPr/>
             <a:p>
-              <a:r>
-                <a:rPr lang="zh-CN" altLang="en-US" dirty="0">
-                  <a:solidFill>
-                    <a:srgbClr val="FF0000"/>
-                  </a:solidFill>
-                  <a:latin typeface="楷体" panose="02010609060101010101" pitchFamily="49" charset="-122"/>
-                  <a:ea typeface="楷体" panose="02010609060101010101" pitchFamily="49" charset="-122"/>
-                </a:rPr>
-                <a:t>光轴</a:t>
-              </a:r>
-              <a:endParaRPr lang="en-US" altLang="zh-CN" dirty="0">
-                <a:solidFill>
-                  <a:srgbClr val="FF0000"/>
-                </a:solidFill>
-                <a:latin typeface="楷体" panose="02010609060101010101" pitchFamily="49" charset="-122"/>
-                <a:ea typeface="楷体" panose="02010609060101010101" pitchFamily="49" charset="-122"/>
-              </a:endParaRPr>
+              <a:endParaRPr lang="zh-CN" altLang="en-US"/>
             </a:p>
           </p:txBody>
         </p:sp>
       </p:grpSp>
     </p:spTree>
-    <p:extLst>
-      <p:ext uri="{BB962C8B-B14F-4D97-AF65-F5344CB8AC3E}">
-        <p14:creationId xmlns:p14="http://schemas.microsoft.com/office/powerpoint/2010/main" val="61691279"/>
-      </p:ext>
-    </p:extLst>
   </p:cSld>
   <p:clrMapOvr>
     <a:masterClrMapping/>
@@ -18352,7 +17179,7 @@
 </file>
 
 <file path=ppt/tags/tag1.xml><?xml version="1.0" encoding="utf-8"?>
-<p:tagLst xmlns:a="http://schemas.openxmlformats.org/drawingml/2006/main" xmlns:r="http://schemas.openxmlformats.org/officeDocument/2006/relationships" xmlns:p="http://schemas.openxmlformats.org/presentationml/2006/main">
+<p:tagLst xmlns:p="http://schemas.openxmlformats.org/presentationml/2006/main">
   <p:tag name="COMMONDATA" val="eyJoZGlkIjoiMWNkOTg5MjZlZjEzNTdlYjk5YTg3ZTczZTZlMGJkOGMifQ=="/>
 </p:tagLst>
 </file>
@@ -18627,7 +17454,6 @@
       </a:style>
     </a:lnDef>
   </a:objectDefaults>
-  <a:extraClrSchemeLst/>
   <a:extLst>
     <a:ext uri="{05A4C25C-085E-4340-85A3-A5531E510DB2}">
       <thm15:themeFamily xmlns:thm15="http://schemas.microsoft.com/office/thememl/2012/main" name="Office Theme" id="{62F939B6-93AF-4DB8-9C6B-D6C7DFDC589F}" vid="{4A3C46E8-61CC-4603-A589-7422A47A8E4A}"/>

--- a/PPT/optic.pptx
+++ b/PPT/optic.pptx
@@ -5,21 +5,22 @@
     <p:sldMasterId id="2147483648" r:id="rId1"/>
   </p:sldMasterIdLst>
   <p:sldIdLst>
-    <p:sldId id="256" r:id="rId3"/>
-    <p:sldId id="257" r:id="rId4"/>
-    <p:sldId id="258" r:id="rId5"/>
-    <p:sldId id="261" r:id="rId6"/>
-    <p:sldId id="260" r:id="rId7"/>
-    <p:sldId id="259" r:id="rId8"/>
-    <p:sldId id="262" r:id="rId9"/>
-    <p:sldId id="263" r:id="rId10"/>
-    <p:sldId id="265" r:id="rId11"/>
-    <p:sldId id="264" r:id="rId12"/>
+    <p:sldId id="256" r:id="rId2"/>
+    <p:sldId id="257" r:id="rId3"/>
+    <p:sldId id="258" r:id="rId4"/>
+    <p:sldId id="261" r:id="rId5"/>
+    <p:sldId id="260" r:id="rId6"/>
+    <p:sldId id="259" r:id="rId7"/>
+    <p:sldId id="262" r:id="rId8"/>
+    <p:sldId id="263" r:id="rId9"/>
+    <p:sldId id="265" r:id="rId10"/>
+    <p:sldId id="264" r:id="rId11"/>
+    <p:sldId id="266" r:id="rId12"/>
   </p:sldIdLst>
   <p:sldSz cx="12192000" cy="6858000"/>
   <p:notesSz cx="6858000" cy="9144000"/>
   <p:custDataLst>
-    <p:tags r:id="rId16"/>
+    <p:tags r:id="rId13"/>
   </p:custDataLst>
   <p:defaultTextStyle>
     <a:defPPr>
@@ -116,6 +117,11 @@
       </a:defRPr>
     </a:lvl9pPr>
   </p:defaultTextStyle>
+  <p:extLst>
+    <p:ext uri="{EFAFB233-063F-42B5-8137-9DF3F51BA10A}">
+      <p15:sldGuideLst xmlns:p15="http://schemas.microsoft.com/office/powerpoint/2012/main"/>
+    </p:ext>
+  </p:extLst>
 </p:presentation>
 </file>
 
@@ -164,7 +170,6 @@
               <a:rPr lang="zh-CN" altLang="en-US"/>
               <a:t>单击此处编辑母版标题样式</a:t>
             </a:r>
-            <a:endParaRPr lang="zh-CN" altLang="en-US"/>
           </a:p>
         </p:txBody>
       </p:sp>
@@ -229,7 +234,6 @@
               <a:rPr lang="zh-CN" altLang="en-US"/>
               <a:t>单击此处编辑母版副标题样式</a:t>
             </a:r>
-            <a:endParaRPr lang="zh-CN" altLang="en-US"/>
           </a:p>
         </p:txBody>
       </p:sp>
@@ -250,6 +254,7 @@
           <a:p>
             <a:fld id="{D997B5FA-0921-464F-AAE1-844C04324D75}" type="datetimeFigureOut">
               <a:rPr lang="zh-CN" altLang="en-US" smtClean="0"/>
+              <a:t>2026-07-24</a:t>
             </a:fld>
             <a:endParaRPr lang="zh-CN" altLang="en-US"/>
           </a:p>
@@ -291,6 +296,7 @@
           <a:p>
             <a:fld id="{565CE74E-AB26-4998-AD42-012C4C1AD076}" type="slidenum">
               <a:rPr lang="zh-CN" altLang="en-US" smtClean="0"/>
+              <a:t>‹#›</a:t>
             </a:fld>
             <a:endParaRPr lang="zh-CN" altLang="en-US"/>
           </a:p>
@@ -340,7 +346,6 @@
               <a:rPr lang="zh-CN" altLang="en-US"/>
               <a:t>单击此处编辑母版标题样式</a:t>
             </a:r>
-            <a:endParaRPr lang="zh-CN" altLang="en-US"/>
           </a:p>
         </p:txBody>
       </p:sp>
@@ -364,7 +369,6 @@
               <a:rPr lang="zh-CN" altLang="en-US"/>
               <a:t>单击此处编辑母版文本样式</a:t>
             </a:r>
-            <a:endParaRPr lang="zh-CN" altLang="en-US"/>
           </a:p>
           <a:p>
             <a:pPr lvl="1"/>
@@ -372,7 +376,6 @@
               <a:rPr lang="zh-CN" altLang="en-US"/>
               <a:t>第二级</a:t>
             </a:r>
-            <a:endParaRPr lang="zh-CN" altLang="en-US"/>
           </a:p>
           <a:p>
             <a:pPr lvl="2"/>
@@ -380,7 +383,6 @@
               <a:rPr lang="zh-CN" altLang="en-US"/>
               <a:t>第三级</a:t>
             </a:r>
-            <a:endParaRPr lang="zh-CN" altLang="en-US"/>
           </a:p>
           <a:p>
             <a:pPr lvl="3"/>
@@ -388,7 +390,6 @@
               <a:rPr lang="zh-CN" altLang="en-US"/>
               <a:t>第四级</a:t>
             </a:r>
-            <a:endParaRPr lang="zh-CN" altLang="en-US"/>
           </a:p>
           <a:p>
             <a:pPr lvl="4"/>
@@ -396,7 +397,6 @@
               <a:rPr lang="zh-CN" altLang="en-US"/>
               <a:t>第五级</a:t>
             </a:r>
-            <a:endParaRPr lang="zh-CN" altLang="en-US"/>
           </a:p>
         </p:txBody>
       </p:sp>
@@ -417,6 +417,7 @@
           <a:p>
             <a:fld id="{D997B5FA-0921-464F-AAE1-844C04324D75}" type="datetimeFigureOut">
               <a:rPr lang="zh-CN" altLang="en-US" smtClean="0"/>
+              <a:t>2026-07-24</a:t>
             </a:fld>
             <a:endParaRPr lang="zh-CN" altLang="en-US"/>
           </a:p>
@@ -458,6 +459,7 @@
           <a:p>
             <a:fld id="{565CE74E-AB26-4998-AD42-012C4C1AD076}" type="slidenum">
               <a:rPr lang="zh-CN" altLang="en-US" smtClean="0"/>
+              <a:t>‹#›</a:t>
             </a:fld>
             <a:endParaRPr lang="zh-CN" altLang="en-US"/>
           </a:p>
@@ -512,7 +514,6 @@
               <a:rPr lang="zh-CN" altLang="en-US"/>
               <a:t>单击此处编辑母版标题样式</a:t>
             </a:r>
-            <a:endParaRPr lang="zh-CN" altLang="en-US"/>
           </a:p>
         </p:txBody>
       </p:sp>
@@ -541,7 +542,6 @@
               <a:rPr lang="zh-CN" altLang="en-US"/>
               <a:t>单击此处编辑母版文本样式</a:t>
             </a:r>
-            <a:endParaRPr lang="zh-CN" altLang="en-US"/>
           </a:p>
           <a:p>
             <a:pPr lvl="1"/>
@@ -549,7 +549,6 @@
               <a:rPr lang="zh-CN" altLang="en-US"/>
               <a:t>第二级</a:t>
             </a:r>
-            <a:endParaRPr lang="zh-CN" altLang="en-US"/>
           </a:p>
           <a:p>
             <a:pPr lvl="2"/>
@@ -557,7 +556,6 @@
               <a:rPr lang="zh-CN" altLang="en-US"/>
               <a:t>第三级</a:t>
             </a:r>
-            <a:endParaRPr lang="zh-CN" altLang="en-US"/>
           </a:p>
           <a:p>
             <a:pPr lvl="3"/>
@@ -565,7 +563,6 @@
               <a:rPr lang="zh-CN" altLang="en-US"/>
               <a:t>第四级</a:t>
             </a:r>
-            <a:endParaRPr lang="zh-CN" altLang="en-US"/>
           </a:p>
           <a:p>
             <a:pPr lvl="4"/>
@@ -573,7 +570,6 @@
               <a:rPr lang="zh-CN" altLang="en-US"/>
               <a:t>第五级</a:t>
             </a:r>
-            <a:endParaRPr lang="zh-CN" altLang="en-US"/>
           </a:p>
         </p:txBody>
       </p:sp>
@@ -594,6 +590,7 @@
           <a:p>
             <a:fld id="{D997B5FA-0921-464F-AAE1-844C04324D75}" type="datetimeFigureOut">
               <a:rPr lang="zh-CN" altLang="en-US" smtClean="0"/>
+              <a:t>2026-07-24</a:t>
             </a:fld>
             <a:endParaRPr lang="zh-CN" altLang="en-US"/>
           </a:p>
@@ -635,6 +632,7 @@
           <a:p>
             <a:fld id="{565CE74E-AB26-4998-AD42-012C4C1AD076}" type="slidenum">
               <a:rPr lang="zh-CN" altLang="en-US" smtClean="0"/>
+              <a:t>‹#›</a:t>
             </a:fld>
             <a:endParaRPr lang="zh-CN" altLang="en-US"/>
           </a:p>
@@ -684,7 +682,6 @@
               <a:rPr lang="zh-CN" altLang="en-US"/>
               <a:t>单击此处编辑母版标题样式</a:t>
             </a:r>
-            <a:endParaRPr lang="zh-CN" altLang="en-US"/>
           </a:p>
         </p:txBody>
       </p:sp>
@@ -708,7 +705,6 @@
               <a:rPr lang="zh-CN" altLang="en-US"/>
               <a:t>单击此处编辑母版文本样式</a:t>
             </a:r>
-            <a:endParaRPr lang="zh-CN" altLang="en-US"/>
           </a:p>
           <a:p>
             <a:pPr lvl="1"/>
@@ -716,7 +712,6 @@
               <a:rPr lang="zh-CN" altLang="en-US"/>
               <a:t>第二级</a:t>
             </a:r>
-            <a:endParaRPr lang="zh-CN" altLang="en-US"/>
           </a:p>
           <a:p>
             <a:pPr lvl="2"/>
@@ -724,7 +719,6 @@
               <a:rPr lang="zh-CN" altLang="en-US"/>
               <a:t>第三级</a:t>
             </a:r>
-            <a:endParaRPr lang="zh-CN" altLang="en-US"/>
           </a:p>
           <a:p>
             <a:pPr lvl="3"/>
@@ -732,7 +726,6 @@
               <a:rPr lang="zh-CN" altLang="en-US"/>
               <a:t>第四级</a:t>
             </a:r>
-            <a:endParaRPr lang="zh-CN" altLang="en-US"/>
           </a:p>
           <a:p>
             <a:pPr lvl="4"/>
@@ -740,7 +733,6 @@
               <a:rPr lang="zh-CN" altLang="en-US"/>
               <a:t>第五级</a:t>
             </a:r>
-            <a:endParaRPr lang="zh-CN" altLang="en-US"/>
           </a:p>
         </p:txBody>
       </p:sp>
@@ -761,6 +753,7 @@
           <a:p>
             <a:fld id="{D997B5FA-0921-464F-AAE1-844C04324D75}" type="datetimeFigureOut">
               <a:rPr lang="zh-CN" altLang="en-US" smtClean="0"/>
+              <a:t>2026-07-24</a:t>
             </a:fld>
             <a:endParaRPr lang="zh-CN" altLang="en-US"/>
           </a:p>
@@ -802,6 +795,7 @@
           <a:p>
             <a:fld id="{565CE74E-AB26-4998-AD42-012C4C1AD076}" type="slidenum">
               <a:rPr lang="zh-CN" altLang="en-US" smtClean="0"/>
+              <a:t>‹#›</a:t>
             </a:fld>
             <a:endParaRPr lang="zh-CN" altLang="en-US"/>
           </a:p>
@@ -860,7 +854,6 @@
               <a:rPr lang="zh-CN" altLang="en-US"/>
               <a:t>单击此处编辑母版标题样式</a:t>
             </a:r>
-            <a:endParaRPr lang="zh-CN" altLang="en-US"/>
           </a:p>
         </p:txBody>
       </p:sp>
@@ -980,7 +973,6 @@
               <a:rPr lang="zh-CN" altLang="en-US"/>
               <a:t>单击此处编辑母版文本样式</a:t>
             </a:r>
-            <a:endParaRPr lang="zh-CN" altLang="en-US"/>
           </a:p>
         </p:txBody>
       </p:sp>
@@ -1001,6 +993,7 @@
           <a:p>
             <a:fld id="{D997B5FA-0921-464F-AAE1-844C04324D75}" type="datetimeFigureOut">
               <a:rPr lang="zh-CN" altLang="en-US" smtClean="0"/>
+              <a:t>2026-07-24</a:t>
             </a:fld>
             <a:endParaRPr lang="zh-CN" altLang="en-US"/>
           </a:p>
@@ -1042,6 +1035,7 @@
           <a:p>
             <a:fld id="{565CE74E-AB26-4998-AD42-012C4C1AD076}" type="slidenum">
               <a:rPr lang="zh-CN" altLang="en-US" smtClean="0"/>
+              <a:t>‹#›</a:t>
             </a:fld>
             <a:endParaRPr lang="zh-CN" altLang="en-US"/>
           </a:p>
@@ -1091,7 +1085,6 @@
               <a:rPr lang="zh-CN" altLang="en-US"/>
               <a:t>单击此处编辑母版标题样式</a:t>
             </a:r>
-            <a:endParaRPr lang="zh-CN" altLang="en-US"/>
           </a:p>
         </p:txBody>
       </p:sp>
@@ -1120,7 +1113,6 @@
               <a:rPr lang="zh-CN" altLang="en-US"/>
               <a:t>单击此处编辑母版文本样式</a:t>
             </a:r>
-            <a:endParaRPr lang="zh-CN" altLang="en-US"/>
           </a:p>
           <a:p>
             <a:pPr lvl="1"/>
@@ -1128,7 +1120,6 @@
               <a:rPr lang="zh-CN" altLang="en-US"/>
               <a:t>第二级</a:t>
             </a:r>
-            <a:endParaRPr lang="zh-CN" altLang="en-US"/>
           </a:p>
           <a:p>
             <a:pPr lvl="2"/>
@@ -1136,7 +1127,6 @@
               <a:rPr lang="zh-CN" altLang="en-US"/>
               <a:t>第三级</a:t>
             </a:r>
-            <a:endParaRPr lang="zh-CN" altLang="en-US"/>
           </a:p>
           <a:p>
             <a:pPr lvl="3"/>
@@ -1144,7 +1134,6 @@
               <a:rPr lang="zh-CN" altLang="en-US"/>
               <a:t>第四级</a:t>
             </a:r>
-            <a:endParaRPr lang="zh-CN" altLang="en-US"/>
           </a:p>
           <a:p>
             <a:pPr lvl="4"/>
@@ -1152,7 +1141,6 @@
               <a:rPr lang="zh-CN" altLang="en-US"/>
               <a:t>第五级</a:t>
             </a:r>
-            <a:endParaRPr lang="zh-CN" altLang="en-US"/>
           </a:p>
         </p:txBody>
       </p:sp>
@@ -1181,7 +1169,6 @@
               <a:rPr lang="zh-CN" altLang="en-US"/>
               <a:t>单击此处编辑母版文本样式</a:t>
             </a:r>
-            <a:endParaRPr lang="zh-CN" altLang="en-US"/>
           </a:p>
           <a:p>
             <a:pPr lvl="1"/>
@@ -1189,7 +1176,6 @@
               <a:rPr lang="zh-CN" altLang="en-US"/>
               <a:t>第二级</a:t>
             </a:r>
-            <a:endParaRPr lang="zh-CN" altLang="en-US"/>
           </a:p>
           <a:p>
             <a:pPr lvl="2"/>
@@ -1197,7 +1183,6 @@
               <a:rPr lang="zh-CN" altLang="en-US"/>
               <a:t>第三级</a:t>
             </a:r>
-            <a:endParaRPr lang="zh-CN" altLang="en-US"/>
           </a:p>
           <a:p>
             <a:pPr lvl="3"/>
@@ -1205,7 +1190,6 @@
               <a:rPr lang="zh-CN" altLang="en-US"/>
               <a:t>第四级</a:t>
             </a:r>
-            <a:endParaRPr lang="zh-CN" altLang="en-US"/>
           </a:p>
           <a:p>
             <a:pPr lvl="4"/>
@@ -1213,7 +1197,6 @@
               <a:rPr lang="zh-CN" altLang="en-US"/>
               <a:t>第五级</a:t>
             </a:r>
-            <a:endParaRPr lang="zh-CN" altLang="en-US"/>
           </a:p>
         </p:txBody>
       </p:sp>
@@ -1234,6 +1217,7 @@
           <a:p>
             <a:fld id="{D997B5FA-0921-464F-AAE1-844C04324D75}" type="datetimeFigureOut">
               <a:rPr lang="zh-CN" altLang="en-US" smtClean="0"/>
+              <a:t>2026-07-24</a:t>
             </a:fld>
             <a:endParaRPr lang="zh-CN" altLang="en-US"/>
           </a:p>
@@ -1275,6 +1259,7 @@
           <a:p>
             <a:fld id="{565CE74E-AB26-4998-AD42-012C4C1AD076}" type="slidenum">
               <a:rPr lang="zh-CN" altLang="en-US" smtClean="0"/>
+              <a:t>‹#›</a:t>
             </a:fld>
             <a:endParaRPr lang="zh-CN" altLang="en-US"/>
           </a:p>
@@ -1329,7 +1314,6 @@
               <a:rPr lang="zh-CN" altLang="en-US"/>
               <a:t>单击此处编辑母版标题样式</a:t>
             </a:r>
-            <a:endParaRPr lang="zh-CN" altLang="en-US"/>
           </a:p>
         </p:txBody>
       </p:sp>
@@ -1395,7 +1379,6 @@
               <a:rPr lang="zh-CN" altLang="en-US"/>
               <a:t>单击此处编辑母版文本样式</a:t>
             </a:r>
-            <a:endParaRPr lang="zh-CN" altLang="en-US"/>
           </a:p>
         </p:txBody>
       </p:sp>
@@ -1424,7 +1407,6 @@
               <a:rPr lang="zh-CN" altLang="en-US"/>
               <a:t>单击此处编辑母版文本样式</a:t>
             </a:r>
-            <a:endParaRPr lang="zh-CN" altLang="en-US"/>
           </a:p>
           <a:p>
             <a:pPr lvl="1"/>
@@ -1432,7 +1414,6 @@
               <a:rPr lang="zh-CN" altLang="en-US"/>
               <a:t>第二级</a:t>
             </a:r>
-            <a:endParaRPr lang="zh-CN" altLang="en-US"/>
           </a:p>
           <a:p>
             <a:pPr lvl="2"/>
@@ -1440,7 +1421,6 @@
               <a:rPr lang="zh-CN" altLang="en-US"/>
               <a:t>第三级</a:t>
             </a:r>
-            <a:endParaRPr lang="zh-CN" altLang="en-US"/>
           </a:p>
           <a:p>
             <a:pPr lvl="3"/>
@@ -1448,7 +1428,6 @@
               <a:rPr lang="zh-CN" altLang="en-US"/>
               <a:t>第四级</a:t>
             </a:r>
-            <a:endParaRPr lang="zh-CN" altLang="en-US"/>
           </a:p>
           <a:p>
             <a:pPr lvl="4"/>
@@ -1456,7 +1435,6 @@
               <a:rPr lang="zh-CN" altLang="en-US"/>
               <a:t>第五级</a:t>
             </a:r>
-            <a:endParaRPr lang="zh-CN" altLang="en-US"/>
           </a:p>
         </p:txBody>
       </p:sp>
@@ -1522,7 +1500,6 @@
               <a:rPr lang="zh-CN" altLang="en-US"/>
               <a:t>单击此处编辑母版文本样式</a:t>
             </a:r>
-            <a:endParaRPr lang="zh-CN" altLang="en-US"/>
           </a:p>
         </p:txBody>
       </p:sp>
@@ -1551,7 +1528,6 @@
               <a:rPr lang="zh-CN" altLang="en-US"/>
               <a:t>单击此处编辑母版文本样式</a:t>
             </a:r>
-            <a:endParaRPr lang="zh-CN" altLang="en-US"/>
           </a:p>
           <a:p>
             <a:pPr lvl="1"/>
@@ -1559,7 +1535,6 @@
               <a:rPr lang="zh-CN" altLang="en-US"/>
               <a:t>第二级</a:t>
             </a:r>
-            <a:endParaRPr lang="zh-CN" altLang="en-US"/>
           </a:p>
           <a:p>
             <a:pPr lvl="2"/>
@@ -1567,7 +1542,6 @@
               <a:rPr lang="zh-CN" altLang="en-US"/>
               <a:t>第三级</a:t>
             </a:r>
-            <a:endParaRPr lang="zh-CN" altLang="en-US"/>
           </a:p>
           <a:p>
             <a:pPr lvl="3"/>
@@ -1575,7 +1549,6 @@
               <a:rPr lang="zh-CN" altLang="en-US"/>
               <a:t>第四级</a:t>
             </a:r>
-            <a:endParaRPr lang="zh-CN" altLang="en-US"/>
           </a:p>
           <a:p>
             <a:pPr lvl="4"/>
@@ -1583,7 +1556,6 @@
               <a:rPr lang="zh-CN" altLang="en-US"/>
               <a:t>第五级</a:t>
             </a:r>
-            <a:endParaRPr lang="zh-CN" altLang="en-US"/>
           </a:p>
         </p:txBody>
       </p:sp>
@@ -1604,6 +1576,7 @@
           <a:p>
             <a:fld id="{D997B5FA-0921-464F-AAE1-844C04324D75}" type="datetimeFigureOut">
               <a:rPr lang="zh-CN" altLang="en-US" smtClean="0"/>
+              <a:t>2026-07-24</a:t>
             </a:fld>
             <a:endParaRPr lang="zh-CN" altLang="en-US"/>
           </a:p>
@@ -1645,6 +1618,7 @@
           <a:p>
             <a:fld id="{565CE74E-AB26-4998-AD42-012C4C1AD076}" type="slidenum">
               <a:rPr lang="zh-CN" altLang="en-US" smtClean="0"/>
+              <a:t>‹#›</a:t>
             </a:fld>
             <a:endParaRPr lang="zh-CN" altLang="en-US"/>
           </a:p>
@@ -1694,7 +1668,6 @@
               <a:rPr lang="zh-CN" altLang="en-US"/>
               <a:t>单击此处编辑母版标题样式</a:t>
             </a:r>
-            <a:endParaRPr lang="zh-CN" altLang="en-US"/>
           </a:p>
         </p:txBody>
       </p:sp>
@@ -1715,6 +1688,7 @@
           <a:p>
             <a:fld id="{D997B5FA-0921-464F-AAE1-844C04324D75}" type="datetimeFigureOut">
               <a:rPr lang="zh-CN" altLang="en-US" smtClean="0"/>
+              <a:t>2026-07-24</a:t>
             </a:fld>
             <a:endParaRPr lang="zh-CN" altLang="en-US"/>
           </a:p>
@@ -1756,6 +1730,7 @@
           <a:p>
             <a:fld id="{565CE74E-AB26-4998-AD42-012C4C1AD076}" type="slidenum">
               <a:rPr lang="zh-CN" altLang="en-US" smtClean="0"/>
+              <a:t>‹#›</a:t>
             </a:fld>
             <a:endParaRPr lang="zh-CN" altLang="en-US"/>
           </a:p>
@@ -1803,6 +1778,7 @@
           <a:p>
             <a:fld id="{D997B5FA-0921-464F-AAE1-844C04324D75}" type="datetimeFigureOut">
               <a:rPr lang="zh-CN" altLang="en-US" smtClean="0"/>
+              <a:t>2026-07-24</a:t>
             </a:fld>
             <a:endParaRPr lang="zh-CN" altLang="en-US"/>
           </a:p>
@@ -1844,6 +1820,7 @@
           <a:p>
             <a:fld id="{565CE74E-AB26-4998-AD42-012C4C1AD076}" type="slidenum">
               <a:rPr lang="zh-CN" altLang="en-US" smtClean="0"/>
+              <a:t>‹#›</a:t>
             </a:fld>
             <a:endParaRPr lang="zh-CN" altLang="en-US"/>
           </a:p>
@@ -1902,7 +1879,6 @@
               <a:rPr lang="zh-CN" altLang="en-US"/>
               <a:t>单击此处编辑母版标题样式</a:t>
             </a:r>
-            <a:endParaRPr lang="zh-CN" altLang="en-US"/>
           </a:p>
         </p:txBody>
       </p:sp>
@@ -1959,7 +1935,6 @@
               <a:rPr lang="zh-CN" altLang="en-US"/>
               <a:t>单击此处编辑母版文本样式</a:t>
             </a:r>
-            <a:endParaRPr lang="zh-CN" altLang="en-US"/>
           </a:p>
           <a:p>
             <a:pPr lvl="1"/>
@@ -1967,7 +1942,6 @@
               <a:rPr lang="zh-CN" altLang="en-US"/>
               <a:t>第二级</a:t>
             </a:r>
-            <a:endParaRPr lang="zh-CN" altLang="en-US"/>
           </a:p>
           <a:p>
             <a:pPr lvl="2"/>
@@ -1975,7 +1949,6 @@
               <a:rPr lang="zh-CN" altLang="en-US"/>
               <a:t>第三级</a:t>
             </a:r>
-            <a:endParaRPr lang="zh-CN" altLang="en-US"/>
           </a:p>
           <a:p>
             <a:pPr lvl="3"/>
@@ -1983,7 +1956,6 @@
               <a:rPr lang="zh-CN" altLang="en-US"/>
               <a:t>第四级</a:t>
             </a:r>
-            <a:endParaRPr lang="zh-CN" altLang="en-US"/>
           </a:p>
           <a:p>
             <a:pPr lvl="4"/>
@@ -1991,7 +1963,6 @@
               <a:rPr lang="zh-CN" altLang="en-US"/>
               <a:t>第五级</a:t>
             </a:r>
-            <a:endParaRPr lang="zh-CN" altLang="en-US"/>
           </a:p>
         </p:txBody>
       </p:sp>
@@ -2057,7 +2028,6 @@
               <a:rPr lang="zh-CN" altLang="en-US"/>
               <a:t>单击此处编辑母版文本样式</a:t>
             </a:r>
-            <a:endParaRPr lang="zh-CN" altLang="en-US"/>
           </a:p>
         </p:txBody>
       </p:sp>
@@ -2078,6 +2048,7 @@
           <a:p>
             <a:fld id="{D997B5FA-0921-464F-AAE1-844C04324D75}" type="datetimeFigureOut">
               <a:rPr lang="zh-CN" altLang="en-US" smtClean="0"/>
+              <a:t>2026-07-24</a:t>
             </a:fld>
             <a:endParaRPr lang="zh-CN" altLang="en-US"/>
           </a:p>
@@ -2119,6 +2090,7 @@
           <a:p>
             <a:fld id="{565CE74E-AB26-4998-AD42-012C4C1AD076}" type="slidenum">
               <a:rPr lang="zh-CN" altLang="en-US" smtClean="0"/>
+              <a:t>‹#›</a:t>
             </a:fld>
             <a:endParaRPr lang="zh-CN" altLang="en-US"/>
           </a:p>
@@ -2177,7 +2149,6 @@
               <a:rPr lang="zh-CN" altLang="en-US"/>
               <a:t>单击此处编辑母版标题样式</a:t>
             </a:r>
-            <a:endParaRPr lang="zh-CN" altLang="en-US"/>
           </a:p>
         </p:txBody>
       </p:sp>
@@ -2304,7 +2275,6 @@
               <a:rPr lang="zh-CN" altLang="en-US"/>
               <a:t>单击此处编辑母版文本样式</a:t>
             </a:r>
-            <a:endParaRPr lang="zh-CN" altLang="en-US"/>
           </a:p>
         </p:txBody>
       </p:sp>
@@ -2325,6 +2295,7 @@
           <a:p>
             <a:fld id="{D997B5FA-0921-464F-AAE1-844C04324D75}" type="datetimeFigureOut">
               <a:rPr lang="zh-CN" altLang="en-US" smtClean="0"/>
+              <a:t>2026-07-24</a:t>
             </a:fld>
             <a:endParaRPr lang="zh-CN" altLang="en-US"/>
           </a:p>
@@ -2366,6 +2337,7 @@
           <a:p>
             <a:fld id="{565CE74E-AB26-4998-AD42-012C4C1AD076}" type="slidenum">
               <a:rPr lang="zh-CN" altLang="en-US" smtClean="0"/>
+              <a:t>‹#›</a:t>
             </a:fld>
             <a:endParaRPr lang="zh-CN" altLang="en-US"/>
           </a:p>
@@ -2430,7 +2402,6 @@
               <a:rPr lang="zh-CN" altLang="en-US"/>
               <a:t>单击此处编辑母版标题样式</a:t>
             </a:r>
-            <a:endParaRPr lang="zh-CN" altLang="en-US"/>
           </a:p>
         </p:txBody>
       </p:sp>
@@ -2464,7 +2435,6 @@
               <a:rPr lang="zh-CN" altLang="en-US"/>
               <a:t>单击此处编辑母版文本样式</a:t>
             </a:r>
-            <a:endParaRPr lang="zh-CN" altLang="en-US"/>
           </a:p>
           <a:p>
             <a:pPr lvl="1"/>
@@ -2472,7 +2442,6 @@
               <a:rPr lang="zh-CN" altLang="en-US"/>
               <a:t>第二级</a:t>
             </a:r>
-            <a:endParaRPr lang="zh-CN" altLang="en-US"/>
           </a:p>
           <a:p>
             <a:pPr lvl="2"/>
@@ -2480,7 +2449,6 @@
               <a:rPr lang="zh-CN" altLang="en-US"/>
               <a:t>第三级</a:t>
             </a:r>
-            <a:endParaRPr lang="zh-CN" altLang="en-US"/>
           </a:p>
           <a:p>
             <a:pPr lvl="3"/>
@@ -2488,7 +2456,6 @@
               <a:rPr lang="zh-CN" altLang="en-US"/>
               <a:t>第四级</a:t>
             </a:r>
-            <a:endParaRPr lang="zh-CN" altLang="en-US"/>
           </a:p>
           <a:p>
             <a:pPr lvl="4"/>
@@ -2496,7 +2463,6 @@
               <a:rPr lang="zh-CN" altLang="en-US"/>
               <a:t>第五级</a:t>
             </a:r>
-            <a:endParaRPr lang="zh-CN" altLang="en-US"/>
           </a:p>
         </p:txBody>
       </p:sp>
@@ -2535,6 +2501,7 @@
           <a:p>
             <a:fld id="{D997B5FA-0921-464F-AAE1-844C04324D75}" type="datetimeFigureOut">
               <a:rPr lang="zh-CN" altLang="en-US" smtClean="0"/>
+              <a:t>2026-07-24</a:t>
             </a:fld>
             <a:endParaRPr lang="zh-CN" altLang="en-US"/>
           </a:p>
@@ -2612,6 +2579,7 @@
           <a:p>
             <a:fld id="{565CE74E-AB26-4998-AD42-012C4C1AD076}" type="slidenum">
               <a:rPr lang="zh-CN" altLang="en-US" smtClean="0"/>
+              <a:t>‹#›</a:t>
             </a:fld>
             <a:endParaRPr lang="zh-CN" altLang="en-US"/>
           </a:p>
@@ -3879,8 +3847,8 @@
           </a:p>
         </p:txBody>
       </p:sp>
-      <mc:AlternateContent xmlns:mc="http://schemas.openxmlformats.org/markup-compatibility/2006">
-        <mc:Choice xmlns:a14="http://schemas.microsoft.com/office/drawing/2010/main" Requires="a14">
+      <mc:AlternateContent xmlns:mc="http://schemas.openxmlformats.org/markup-compatibility/2006" xmlns:a14="http://schemas.microsoft.com/office/drawing/2010/main">
+        <mc:Choice Requires="a14">
           <p:sp>
             <p:nvSpPr>
               <p:cNvPr id="83" name="文本框 82"/>
@@ -3903,6 +3871,7 @@
               </a:bodyPr>
               <a:lstStyle/>
               <a:p>
+                <a:pPr/>
                 <a14:m>
                   <m:oMathPara xmlns:m="http://schemas.openxmlformats.org/officeDocument/2006/math">
                     <m:oMathParaPr>
@@ -3939,7 +3908,7 @@
             </p:txBody>
           </p:sp>
         </mc:Choice>
-        <mc:Fallback>
+        <mc:Fallback xmlns="">
           <p:sp>
             <p:nvSpPr>
               <p:cNvPr id="83" name="文本框 82"/>
@@ -3957,7 +3926,7 @@
                 <a:avLst/>
               </a:prstGeom>
               <a:blipFill rotWithShape="1">
-                <a:blip r:embed="rId1"/>
+                <a:blip r:embed="rId2"/>
                 <a:stretch>
                   <a:fillRect l="-209" t="-83" r="136" b="18"/>
                 </a:stretch>
@@ -3978,8 +3947,8 @@
           </p:sp>
         </mc:Fallback>
       </mc:AlternateContent>
-      <mc:AlternateContent xmlns:mc="http://schemas.openxmlformats.org/markup-compatibility/2006">
-        <mc:Choice xmlns:a14="http://schemas.microsoft.com/office/drawing/2010/main" Requires="a14">
+      <mc:AlternateContent xmlns:mc="http://schemas.openxmlformats.org/markup-compatibility/2006" xmlns:a14="http://schemas.microsoft.com/office/drawing/2010/main">
+        <mc:Choice Requires="a14">
           <p:sp>
             <p:nvSpPr>
               <p:cNvPr id="84" name="文本框 83"/>
@@ -4002,6 +3971,7 @@
               </a:bodyPr>
               <a:lstStyle/>
               <a:p>
+                <a:pPr/>
                 <a14:m>
                   <m:oMathPara xmlns:m="http://schemas.openxmlformats.org/officeDocument/2006/math">
                     <m:oMathParaPr>
@@ -4038,7 +4008,7 @@
             </p:txBody>
           </p:sp>
         </mc:Choice>
-        <mc:Fallback>
+        <mc:Fallback xmlns="">
           <p:sp>
             <p:nvSpPr>
               <p:cNvPr id="84" name="文本框 83"/>
@@ -4056,7 +4026,7 @@
                 <a:avLst/>
               </a:prstGeom>
               <a:blipFill rotWithShape="1">
-                <a:blip r:embed="rId1"/>
+                <a:blip r:embed="rId2"/>
                 <a:stretch>
                   <a:fillRect l="-195" t="-139" r="121" b="75"/>
                 </a:stretch>
@@ -4250,8 +4220,8 @@
           </a:p>
         </p:txBody>
       </p:sp>
-      <mc:AlternateContent xmlns:mc="http://schemas.openxmlformats.org/markup-compatibility/2006">
-        <mc:Choice xmlns:a14="http://schemas.microsoft.com/office/drawing/2010/main" Requires="a14">
+      <mc:AlternateContent xmlns:mc="http://schemas.openxmlformats.org/markup-compatibility/2006" xmlns:a14="http://schemas.microsoft.com/office/drawing/2010/main">
+        <mc:Choice Requires="a14">
           <p:sp>
             <p:nvSpPr>
               <p:cNvPr id="92" name="文本框 91"/>
@@ -4274,6 +4244,7 @@
               </a:bodyPr>
               <a:lstStyle/>
               <a:p>
+                <a:pPr/>
                 <a14:m>
                   <m:oMathPara xmlns:m="http://schemas.openxmlformats.org/officeDocument/2006/math">
                     <m:oMathParaPr>
@@ -4310,7 +4281,7 @@
             </p:txBody>
           </p:sp>
         </mc:Choice>
-        <mc:Fallback>
+        <mc:Fallback xmlns="">
           <p:sp>
             <p:nvSpPr>
               <p:cNvPr id="92" name="文本框 91"/>
@@ -4328,7 +4299,7 @@
                 <a:avLst/>
               </a:prstGeom>
               <a:blipFill rotWithShape="1">
-                <a:blip r:embed="rId2"/>
+                <a:blip r:embed="rId3"/>
                 <a:stretch>
                   <a:fillRect l="-83" t="-69" r="14" b="4"/>
                 </a:stretch>
@@ -4398,8 +4369,8 @@
           </a:p>
         </p:txBody>
       </p:sp>
-      <mc:AlternateContent xmlns:mc="http://schemas.openxmlformats.org/markup-compatibility/2006">
-        <mc:Choice xmlns:a14="http://schemas.microsoft.com/office/drawing/2010/main" Requires="a14">
+      <mc:AlternateContent xmlns:mc="http://schemas.openxmlformats.org/markup-compatibility/2006" xmlns:a14="http://schemas.microsoft.com/office/drawing/2010/main">
+        <mc:Choice Requires="a14">
           <p:sp>
             <p:nvSpPr>
               <p:cNvPr id="94" name="文本框 93"/>
@@ -4422,6 +4393,7 @@
               </a:bodyPr>
               <a:lstStyle/>
               <a:p>
+                <a:pPr/>
                 <a14:m>
                   <m:oMathPara xmlns:m="http://schemas.openxmlformats.org/officeDocument/2006/math">
                     <m:oMathParaPr>
@@ -4458,7 +4430,7 @@
             </p:txBody>
           </p:sp>
         </mc:Choice>
-        <mc:Fallback>
+        <mc:Fallback xmlns="">
           <p:sp>
             <p:nvSpPr>
               <p:cNvPr id="94" name="文本框 93"/>
@@ -4476,7 +4448,7 @@
                 <a:avLst/>
               </a:prstGeom>
               <a:blipFill rotWithShape="1">
-                <a:blip r:embed="rId1"/>
+                <a:blip r:embed="rId2"/>
                 <a:stretch>
                   <a:fillRect l="-107" t="-77" r="34" b="12"/>
                 </a:stretch>
@@ -4546,8 +4518,8 @@
           </a:p>
         </p:txBody>
       </p:sp>
-      <mc:AlternateContent xmlns:mc="http://schemas.openxmlformats.org/markup-compatibility/2006">
-        <mc:Choice xmlns:a14="http://schemas.microsoft.com/office/drawing/2010/main" Requires="a14">
+      <mc:AlternateContent xmlns:mc="http://schemas.openxmlformats.org/markup-compatibility/2006" xmlns:a14="http://schemas.microsoft.com/office/drawing/2010/main">
+        <mc:Choice Requires="a14">
           <p:sp>
             <p:nvSpPr>
               <p:cNvPr id="4" name="文本框 3"/>
@@ -4570,6 +4542,7 @@
               </a:bodyPr>
               <a:lstStyle/>
               <a:p>
+                <a:pPr/>
                 <a14:m>
                   <m:oMathPara xmlns:m="http://schemas.openxmlformats.org/officeDocument/2006/math">
                     <m:oMathParaPr>
@@ -4618,7 +4591,7 @@
             </p:txBody>
           </p:sp>
         </mc:Choice>
-        <mc:Fallback>
+        <mc:Fallback xmlns="">
           <p:sp>
             <p:nvSpPr>
               <p:cNvPr id="4" name="文本框 3"/>
@@ -4636,7 +4609,7 @@
                 <a:avLst/>
               </a:prstGeom>
               <a:blipFill rotWithShape="1">
-                <a:blip r:embed="rId3"/>
+                <a:blip r:embed="rId4"/>
                 <a:stretch>
                   <a:fillRect l="-80" t="-90" r="-23865" b="26"/>
                 </a:stretch>
@@ -5083,8 +5056,8 @@
             </a:fontRef>
           </p:style>
         </p:cxnSp>
-        <mc:AlternateContent xmlns:mc="http://schemas.openxmlformats.org/markup-compatibility/2006">
-          <mc:Choice xmlns:a14="http://schemas.microsoft.com/office/drawing/2010/main" Requires="a14">
+        <mc:AlternateContent xmlns:mc="http://schemas.openxmlformats.org/markup-compatibility/2006" xmlns:a14="http://schemas.microsoft.com/office/drawing/2010/main">
+          <mc:Choice Requires="a14">
             <p:sp>
               <p:nvSpPr>
                 <p:cNvPr id="32" name="文本框 31"/>
@@ -5107,6 +5080,7 @@
                 </a:bodyPr>
                 <a:lstStyle/>
                 <a:p>
+                  <a:pPr/>
                   <a14:m>
                     <m:oMathPara xmlns:m="http://schemas.openxmlformats.org/officeDocument/2006/math">
                       <m:oMathParaPr>
@@ -5130,7 +5104,7 @@
               </p:txBody>
             </p:sp>
           </mc:Choice>
-          <mc:Fallback>
+          <mc:Fallback xmlns="">
             <p:sp>
               <p:nvSpPr>
                 <p:cNvPr id="32" name="文本框 31"/>
@@ -5148,7 +5122,7 @@
                   <a:avLst/>
                 </a:prstGeom>
                 <a:blipFill rotWithShape="1">
-                  <a:blip r:embed="rId1"/>
+                  <a:blip r:embed="rId2"/>
                 </a:blipFill>
               </p:spPr>
               <p:txBody>
@@ -5210,6 +5184,1110 @@
         </p:sp>
       </p:grpSp>
     </p:spTree>
+  </p:cSld>
+  <p:clrMapOvr>
+    <a:masterClrMapping/>
+  </p:clrMapOvr>
+</p:sld>
+</file>
+
+<file path=ppt/slides/slide11.xml><?xml version="1.0" encoding="utf-8"?>
+<p:sld xmlns:a="http://schemas.openxmlformats.org/drawingml/2006/main" xmlns:r="http://schemas.openxmlformats.org/officeDocument/2006/relationships" xmlns:p="http://schemas.openxmlformats.org/presentationml/2006/main">
+  <p:cSld>
+    <p:spTree>
+      <p:nvGrpSpPr>
+        <p:cNvPr id="1" name="">
+          <a:extLst>
+            <a:ext uri="{FF2B5EF4-FFF2-40B4-BE49-F238E27FC236}">
+              <a16:creationId xmlns:a16="http://schemas.microsoft.com/office/drawing/2014/main" id="{BC78EDEA-2D77-A194-BA1B-6B32B9FC5038}"/>
+            </a:ext>
+          </a:extLst>
+        </p:cNvPr>
+        <p:cNvGrpSpPr/>
+        <p:nvPr/>
+      </p:nvGrpSpPr>
+      <p:grpSpPr>
+        <a:xfrm>
+          <a:off x="0" y="0"/>
+          <a:ext cx="0" cy="0"/>
+          <a:chOff x="0" y="0"/>
+          <a:chExt cx="0" cy="0"/>
+        </a:xfrm>
+      </p:grpSpPr>
+      <p:grpSp>
+        <p:nvGrpSpPr>
+          <p:cNvPr id="31" name="组合 30">
+            <a:extLst>
+              <a:ext uri="{FF2B5EF4-FFF2-40B4-BE49-F238E27FC236}">
+                <a16:creationId xmlns:a16="http://schemas.microsoft.com/office/drawing/2014/main" id="{41C19AF0-3824-819B-478D-D91446356DD0}"/>
+              </a:ext>
+            </a:extLst>
+          </p:cNvPr>
+          <p:cNvGrpSpPr/>
+          <p:nvPr/>
+        </p:nvGrpSpPr>
+        <p:grpSpPr>
+          <a:xfrm>
+            <a:off x="3821151" y="1149420"/>
+            <a:ext cx="3783320" cy="3877000"/>
+            <a:chOff x="3821151" y="1149420"/>
+            <a:chExt cx="3783320" cy="3877000"/>
+          </a:xfrm>
+        </p:grpSpPr>
+        <p:sp>
+          <p:nvSpPr>
+            <p:cNvPr id="30" name="矩形 29">
+              <a:extLst>
+                <a:ext uri="{FF2B5EF4-FFF2-40B4-BE49-F238E27FC236}">
+                  <a16:creationId xmlns:a16="http://schemas.microsoft.com/office/drawing/2014/main" id="{358C7E71-1909-F999-1AC9-7584F182D746}"/>
+                </a:ext>
+              </a:extLst>
+            </p:cNvPr>
+            <p:cNvSpPr/>
+            <p:nvPr/>
+          </p:nvSpPr>
+          <p:spPr>
+            <a:xfrm>
+              <a:off x="3821151" y="2326416"/>
+              <a:ext cx="3600000" cy="1800000"/>
+            </a:xfrm>
+            <a:prstGeom prst="rect">
+              <a:avLst/>
+            </a:prstGeom>
+            <a:solidFill>
+              <a:schemeClr val="accent5">
+                <a:lumMod val="20000"/>
+                <a:lumOff val="80000"/>
+              </a:schemeClr>
+            </a:solidFill>
+            <a:ln>
+              <a:noFill/>
+            </a:ln>
+          </p:spPr>
+          <p:style>
+            <a:lnRef idx="2">
+              <a:schemeClr val="accent1">
+                <a:shade val="15000"/>
+              </a:schemeClr>
+            </a:lnRef>
+            <a:fillRef idx="1">
+              <a:schemeClr val="accent1"/>
+            </a:fillRef>
+            <a:effectRef idx="0">
+              <a:schemeClr val="accent1"/>
+            </a:effectRef>
+            <a:fontRef idx="minor">
+              <a:schemeClr val="lt1"/>
+            </a:fontRef>
+          </p:style>
+          <p:txBody>
+            <a:bodyPr rtlCol="0" anchor="ctr"/>
+            <a:lstStyle/>
+            <a:p>
+              <a:pPr algn="ctr"/>
+              <a:endParaRPr lang="zh-CN" altLang="en-US"/>
+            </a:p>
+          </p:txBody>
+        </p:sp>
+        <p:cxnSp>
+          <p:nvCxnSpPr>
+            <p:cNvPr id="3" name="直接箭头连接符 2">
+              <a:extLst>
+                <a:ext uri="{FF2B5EF4-FFF2-40B4-BE49-F238E27FC236}">
+                  <a16:creationId xmlns:a16="http://schemas.microsoft.com/office/drawing/2014/main" id="{9BA9FA87-70D4-6A7B-C783-4EC6F58284F8}"/>
+                </a:ext>
+              </a:extLst>
+            </p:cNvPr>
+            <p:cNvCxnSpPr/>
+            <p:nvPr/>
+          </p:nvCxnSpPr>
+          <p:spPr>
+            <a:xfrm>
+              <a:off x="3821151" y="3226420"/>
+              <a:ext cx="3600000" cy="0"/>
+            </a:xfrm>
+            <a:prstGeom prst="straightConnector1">
+              <a:avLst/>
+            </a:prstGeom>
+            <a:ln w="25400">
+              <a:solidFill>
+                <a:schemeClr val="tx1"/>
+              </a:solidFill>
+              <a:tailEnd type="triangle"/>
+            </a:ln>
+          </p:spPr>
+          <p:style>
+            <a:lnRef idx="1">
+              <a:schemeClr val="accent1"/>
+            </a:lnRef>
+            <a:fillRef idx="0">
+              <a:schemeClr val="accent1"/>
+            </a:fillRef>
+            <a:effectRef idx="0">
+              <a:schemeClr val="accent1"/>
+            </a:effectRef>
+            <a:fontRef idx="minor">
+              <a:schemeClr val="tx1"/>
+            </a:fontRef>
+          </p:style>
+        </p:cxnSp>
+        <p:cxnSp>
+          <p:nvCxnSpPr>
+            <p:cNvPr id="4" name="直接箭头连接符 3">
+              <a:extLst>
+                <a:ext uri="{FF2B5EF4-FFF2-40B4-BE49-F238E27FC236}">
+                  <a16:creationId xmlns:a16="http://schemas.microsoft.com/office/drawing/2014/main" id="{EC7E2362-C843-068A-CABA-5CE86B28C5CF}"/>
+                </a:ext>
+              </a:extLst>
+            </p:cNvPr>
+            <p:cNvCxnSpPr>
+              <a:cxnSpLocks/>
+            </p:cNvCxnSpPr>
+            <p:nvPr/>
+          </p:nvCxnSpPr>
+          <p:spPr>
+            <a:xfrm rot="16200000">
+              <a:off x="3786760" y="3226420"/>
+              <a:ext cx="3600000" cy="0"/>
+            </a:xfrm>
+            <a:prstGeom prst="straightConnector1">
+              <a:avLst/>
+            </a:prstGeom>
+            <a:ln w="25400">
+              <a:solidFill>
+                <a:schemeClr val="tx1"/>
+              </a:solidFill>
+              <a:tailEnd type="triangle"/>
+            </a:ln>
+          </p:spPr>
+          <p:style>
+            <a:lnRef idx="1">
+              <a:schemeClr val="accent1"/>
+            </a:lnRef>
+            <a:fillRef idx="0">
+              <a:schemeClr val="accent1"/>
+            </a:fillRef>
+            <a:effectRef idx="0">
+              <a:schemeClr val="accent1"/>
+            </a:effectRef>
+            <a:fontRef idx="minor">
+              <a:schemeClr val="tx1"/>
+            </a:fontRef>
+          </p:style>
+        </p:cxnSp>
+        <mc:AlternateContent xmlns:mc="http://schemas.openxmlformats.org/markup-compatibility/2006">
+          <mc:Choice xmlns:a14="http://schemas.microsoft.com/office/drawing/2010/main" Requires="a14">
+            <p:sp>
+              <p:nvSpPr>
+                <p:cNvPr id="5" name="文本框 4">
+                  <a:extLst>
+                    <a:ext uri="{FF2B5EF4-FFF2-40B4-BE49-F238E27FC236}">
+                      <a16:creationId xmlns:a16="http://schemas.microsoft.com/office/drawing/2014/main" id="{6B6963A3-51D0-3573-FE7B-4910DAC73BFA}"/>
+                    </a:ext>
+                  </a:extLst>
+                </p:cNvPr>
+                <p:cNvSpPr txBox="1"/>
+                <p:nvPr/>
+              </p:nvSpPr>
+              <p:spPr>
+                <a:xfrm>
+                  <a:off x="7421151" y="3087919"/>
+                  <a:ext cx="183320" cy="276999"/>
+                </a:xfrm>
+                <a:prstGeom prst="rect">
+                  <a:avLst/>
+                </a:prstGeom>
+                <a:noFill/>
+              </p:spPr>
+              <p:txBody>
+                <a:bodyPr wrap="none" lIns="0" tIns="0" rIns="0" bIns="0" rtlCol="0">
+                  <a:spAutoFit/>
+                </a:bodyPr>
+                <a:lstStyle/>
+                <a:p>
+                  <a14:m>
+                    <m:oMathPara xmlns:m="http://schemas.openxmlformats.org/officeDocument/2006/math">
+                      <m:oMathParaPr>
+                        <m:jc m:val="centerGroup"/>
+                      </m:oMathParaPr>
+                      <m:oMath xmlns:m="http://schemas.openxmlformats.org/officeDocument/2006/math">
+                        <m:r>
+                          <a:rPr lang="en-US" altLang="zh-CN" b="0" i="1" smtClean="0">
+                            <a:latin typeface="Cambria Math" panose="02040503050406030204" pitchFamily="18" charset="0"/>
+                          </a:rPr>
+                          <m:t>𝑥</m:t>
+                        </m:r>
+                      </m:oMath>
+                    </m:oMathPara>
+                  </a14:m>
+                  <a:endParaRPr lang="en-US" altLang="zh-CN" b="0" dirty="0"/>
+                </a:p>
+              </p:txBody>
+            </p:sp>
+          </mc:Choice>
+          <mc:Fallback>
+            <p:sp>
+              <p:nvSpPr>
+                <p:cNvPr id="5" name="文本框 4">
+                  <a:extLst>
+                    <a:ext uri="{FF2B5EF4-FFF2-40B4-BE49-F238E27FC236}">
+                      <a16:creationId xmlns:a16="http://schemas.microsoft.com/office/drawing/2014/main" id="{6B6963A3-51D0-3573-FE7B-4910DAC73BFA}"/>
+                    </a:ext>
+                  </a:extLst>
+                </p:cNvPr>
+                <p:cNvSpPr txBox="1">
+                  <a:spLocks noRot="1" noChangeAspect="1" noMove="1" noResize="1" noEditPoints="1" noAdjustHandles="1" noChangeArrowheads="1" noChangeShapeType="1" noTextEdit="1"/>
+                </p:cNvSpPr>
+                <p:nvPr/>
+              </p:nvSpPr>
+              <p:spPr>
+                <a:xfrm>
+                  <a:off x="7421151" y="3087919"/>
+                  <a:ext cx="183320" cy="276999"/>
+                </a:xfrm>
+                <a:prstGeom prst="rect">
+                  <a:avLst/>
+                </a:prstGeom>
+                <a:blipFill>
+                  <a:blip r:embed="rId2"/>
+                  <a:stretch>
+                    <a:fillRect l="-20000" r="-13333"/>
+                  </a:stretch>
+                </a:blipFill>
+              </p:spPr>
+              <p:txBody>
+                <a:bodyPr/>
+                <a:lstStyle/>
+                <a:p>
+                  <a:r>
+                    <a:rPr lang="zh-CN" altLang="en-US">
+                      <a:noFill/>
+                    </a:rPr>
+                    <a:t> </a:t>
+                  </a:r>
+                </a:p>
+              </p:txBody>
+            </p:sp>
+          </mc:Fallback>
+        </mc:AlternateContent>
+        <mc:AlternateContent xmlns:mc="http://schemas.openxmlformats.org/markup-compatibility/2006">
+          <mc:Choice xmlns:a14="http://schemas.microsoft.com/office/drawing/2010/main" Requires="a14">
+            <p:sp>
+              <p:nvSpPr>
+                <p:cNvPr id="10" name="文本框 9">
+                  <a:extLst>
+                    <a:ext uri="{FF2B5EF4-FFF2-40B4-BE49-F238E27FC236}">
+                      <a16:creationId xmlns:a16="http://schemas.microsoft.com/office/drawing/2014/main" id="{94062454-4A2C-0789-D96F-146E4D368008}"/>
+                    </a:ext>
+                  </a:extLst>
+                </p:cNvPr>
+                <p:cNvSpPr txBox="1"/>
+                <p:nvPr/>
+              </p:nvSpPr>
+              <p:spPr>
+                <a:xfrm>
+                  <a:off x="5493401" y="1149420"/>
+                  <a:ext cx="186718" cy="276999"/>
+                </a:xfrm>
+                <a:prstGeom prst="rect">
+                  <a:avLst/>
+                </a:prstGeom>
+                <a:noFill/>
+              </p:spPr>
+              <p:txBody>
+                <a:bodyPr wrap="none" lIns="0" tIns="0" rIns="0" bIns="0" rtlCol="0">
+                  <a:spAutoFit/>
+                </a:bodyPr>
+                <a:lstStyle/>
+                <a:p>
+                  <a14:m>
+                    <m:oMathPara xmlns:m="http://schemas.openxmlformats.org/officeDocument/2006/math">
+                      <m:oMathParaPr>
+                        <m:jc m:val="centerGroup"/>
+                      </m:oMathParaPr>
+                      <m:oMath xmlns:m="http://schemas.openxmlformats.org/officeDocument/2006/math">
+                        <m:r>
+                          <a:rPr lang="en-US" altLang="zh-CN" b="0" i="1" smtClean="0">
+                            <a:latin typeface="Cambria Math" panose="02040503050406030204" pitchFamily="18" charset="0"/>
+                          </a:rPr>
+                          <m:t>𝑦</m:t>
+                        </m:r>
+                      </m:oMath>
+                    </m:oMathPara>
+                  </a14:m>
+                  <a:endParaRPr lang="en-US" altLang="zh-CN" b="0" dirty="0"/>
+                </a:p>
+              </p:txBody>
+            </p:sp>
+          </mc:Choice>
+          <mc:Fallback>
+            <p:sp>
+              <p:nvSpPr>
+                <p:cNvPr id="10" name="文本框 9">
+                  <a:extLst>
+                    <a:ext uri="{FF2B5EF4-FFF2-40B4-BE49-F238E27FC236}">
+                      <a16:creationId xmlns:a16="http://schemas.microsoft.com/office/drawing/2014/main" id="{94062454-4A2C-0789-D96F-146E4D368008}"/>
+                    </a:ext>
+                  </a:extLst>
+                </p:cNvPr>
+                <p:cNvSpPr txBox="1">
+                  <a:spLocks noRot="1" noChangeAspect="1" noMove="1" noResize="1" noEditPoints="1" noAdjustHandles="1" noChangeArrowheads="1" noChangeShapeType="1" noTextEdit="1"/>
+                </p:cNvSpPr>
+                <p:nvPr/>
+              </p:nvSpPr>
+              <p:spPr>
+                <a:xfrm>
+                  <a:off x="5493401" y="1149420"/>
+                  <a:ext cx="186718" cy="276999"/>
+                </a:xfrm>
+                <a:prstGeom prst="rect">
+                  <a:avLst/>
+                </a:prstGeom>
+                <a:blipFill>
+                  <a:blip r:embed="rId3"/>
+                  <a:stretch>
+                    <a:fillRect l="-32258" r="-25806" b="-26667"/>
+                  </a:stretch>
+                </a:blipFill>
+              </p:spPr>
+              <p:txBody>
+                <a:bodyPr/>
+                <a:lstStyle/>
+                <a:p>
+                  <a:r>
+                    <a:rPr lang="zh-CN" altLang="en-US">
+                      <a:noFill/>
+                    </a:rPr>
+                    <a:t> </a:t>
+                  </a:r>
+                </a:p>
+              </p:txBody>
+            </p:sp>
+          </mc:Fallback>
+        </mc:AlternateContent>
+        <mc:AlternateContent xmlns:mc="http://schemas.openxmlformats.org/markup-compatibility/2006">
+          <mc:Choice xmlns:a14="http://schemas.microsoft.com/office/drawing/2010/main" Requires="a14">
+            <p:sp>
+              <p:nvSpPr>
+                <p:cNvPr id="11" name="文本框 10">
+                  <a:extLst>
+                    <a:ext uri="{FF2B5EF4-FFF2-40B4-BE49-F238E27FC236}">
+                      <a16:creationId xmlns:a16="http://schemas.microsoft.com/office/drawing/2014/main" id="{9396881F-A803-C1A9-15A9-AE9F6E690FB9}"/>
+                    </a:ext>
+                  </a:extLst>
+                </p:cNvPr>
+                <p:cNvSpPr txBox="1"/>
+                <p:nvPr/>
+              </p:nvSpPr>
+              <p:spPr>
+                <a:xfrm>
+                  <a:off x="5368624" y="3226418"/>
+                  <a:ext cx="181396" cy="276999"/>
+                </a:xfrm>
+                <a:prstGeom prst="rect">
+                  <a:avLst/>
+                </a:prstGeom>
+                <a:noFill/>
+              </p:spPr>
+              <p:txBody>
+                <a:bodyPr wrap="none" lIns="0" tIns="0" rIns="0" bIns="0" rtlCol="0">
+                  <a:spAutoFit/>
+                </a:bodyPr>
+                <a:lstStyle/>
+                <a:p>
+                  <a14:m>
+                    <m:oMathPara xmlns:m="http://schemas.openxmlformats.org/officeDocument/2006/math">
+                      <m:oMathParaPr>
+                        <m:jc m:val="centerGroup"/>
+                      </m:oMathParaPr>
+                      <m:oMath xmlns:m="http://schemas.openxmlformats.org/officeDocument/2006/math">
+                        <m:r>
+                          <a:rPr lang="en-US" altLang="zh-CN" b="0" i="1" smtClean="0">
+                            <a:latin typeface="Cambria Math" panose="02040503050406030204" pitchFamily="18" charset="0"/>
+                          </a:rPr>
+                          <m:t>𝑜</m:t>
+                        </m:r>
+                      </m:oMath>
+                    </m:oMathPara>
+                  </a14:m>
+                  <a:endParaRPr lang="en-US" altLang="zh-CN" b="0" dirty="0"/>
+                </a:p>
+              </p:txBody>
+            </p:sp>
+          </mc:Choice>
+          <mc:Fallback>
+            <p:sp>
+              <p:nvSpPr>
+                <p:cNvPr id="11" name="文本框 10">
+                  <a:extLst>
+                    <a:ext uri="{FF2B5EF4-FFF2-40B4-BE49-F238E27FC236}">
+                      <a16:creationId xmlns:a16="http://schemas.microsoft.com/office/drawing/2014/main" id="{9396881F-A803-C1A9-15A9-AE9F6E690FB9}"/>
+                    </a:ext>
+                  </a:extLst>
+                </p:cNvPr>
+                <p:cNvSpPr txBox="1">
+                  <a:spLocks noRot="1" noChangeAspect="1" noMove="1" noResize="1" noEditPoints="1" noAdjustHandles="1" noChangeArrowheads="1" noChangeShapeType="1" noTextEdit="1"/>
+                </p:cNvSpPr>
+                <p:nvPr/>
+              </p:nvSpPr>
+              <p:spPr>
+                <a:xfrm>
+                  <a:off x="5368624" y="3226418"/>
+                  <a:ext cx="181396" cy="276999"/>
+                </a:xfrm>
+                <a:prstGeom prst="rect">
+                  <a:avLst/>
+                </a:prstGeom>
+                <a:blipFill>
+                  <a:blip r:embed="rId4"/>
+                  <a:stretch>
+                    <a:fillRect l="-20690" r="-17241"/>
+                  </a:stretch>
+                </a:blipFill>
+              </p:spPr>
+              <p:txBody>
+                <a:bodyPr/>
+                <a:lstStyle/>
+                <a:p>
+                  <a:r>
+                    <a:rPr lang="zh-CN" altLang="en-US">
+                      <a:noFill/>
+                    </a:rPr>
+                    <a:t> </a:t>
+                  </a:r>
+                </a:p>
+              </p:txBody>
+            </p:sp>
+          </mc:Fallback>
+        </mc:AlternateContent>
+        <p:cxnSp>
+          <p:nvCxnSpPr>
+            <p:cNvPr id="14" name="直接连接符 13">
+              <a:extLst>
+                <a:ext uri="{FF2B5EF4-FFF2-40B4-BE49-F238E27FC236}">
+                  <a16:creationId xmlns:a16="http://schemas.microsoft.com/office/drawing/2014/main" id="{0E199525-A378-928A-776D-01890AB03774}"/>
+                </a:ext>
+              </a:extLst>
+            </p:cNvPr>
+            <p:cNvCxnSpPr/>
+            <p:nvPr/>
+          </p:nvCxnSpPr>
+          <p:spPr>
+            <a:xfrm>
+              <a:off x="3821151" y="2326418"/>
+              <a:ext cx="3600000" cy="0"/>
+            </a:xfrm>
+            <a:prstGeom prst="line">
+              <a:avLst/>
+            </a:prstGeom>
+            <a:ln w="25400">
+              <a:solidFill>
+                <a:schemeClr val="tx1"/>
+              </a:solidFill>
+            </a:ln>
+          </p:spPr>
+          <p:style>
+            <a:lnRef idx="1">
+              <a:schemeClr val="accent1"/>
+            </a:lnRef>
+            <a:fillRef idx="0">
+              <a:schemeClr val="accent1"/>
+            </a:fillRef>
+            <a:effectRef idx="0">
+              <a:schemeClr val="accent1"/>
+            </a:effectRef>
+            <a:fontRef idx="minor">
+              <a:schemeClr val="tx1"/>
+            </a:fontRef>
+          </p:style>
+        </p:cxnSp>
+        <p:cxnSp>
+          <p:nvCxnSpPr>
+            <p:cNvPr id="15" name="直接连接符 14">
+              <a:extLst>
+                <a:ext uri="{FF2B5EF4-FFF2-40B4-BE49-F238E27FC236}">
+                  <a16:creationId xmlns:a16="http://schemas.microsoft.com/office/drawing/2014/main" id="{384C2079-E8BD-F03A-AC40-F84D3C619B9A}"/>
+                </a:ext>
+              </a:extLst>
+            </p:cNvPr>
+            <p:cNvCxnSpPr/>
+            <p:nvPr/>
+          </p:nvCxnSpPr>
+          <p:spPr>
+            <a:xfrm>
+              <a:off x="3821151" y="4126422"/>
+              <a:ext cx="3600000" cy="0"/>
+            </a:xfrm>
+            <a:prstGeom prst="line">
+              <a:avLst/>
+            </a:prstGeom>
+            <a:ln w="25400">
+              <a:solidFill>
+                <a:schemeClr val="tx1"/>
+              </a:solidFill>
+            </a:ln>
+          </p:spPr>
+          <p:style>
+            <a:lnRef idx="1">
+              <a:schemeClr val="accent1"/>
+            </a:lnRef>
+            <a:fillRef idx="0">
+              <a:schemeClr val="accent1"/>
+            </a:fillRef>
+            <a:effectRef idx="0">
+              <a:schemeClr val="accent1"/>
+            </a:effectRef>
+            <a:fontRef idx="minor">
+              <a:schemeClr val="tx1"/>
+            </a:fontRef>
+          </p:style>
+        </p:cxnSp>
+        <mc:AlternateContent xmlns:mc="http://schemas.openxmlformats.org/markup-compatibility/2006">
+          <mc:Choice xmlns:a14="http://schemas.microsoft.com/office/drawing/2010/main" Requires="a14">
+            <p:sp>
+              <p:nvSpPr>
+                <p:cNvPr id="22" name="文本框 21">
+                  <a:extLst>
+                    <a:ext uri="{FF2B5EF4-FFF2-40B4-BE49-F238E27FC236}">
+                      <a16:creationId xmlns:a16="http://schemas.microsoft.com/office/drawing/2014/main" id="{68FB5207-118F-6D81-5A1F-6B6919EF0287}"/>
+                    </a:ext>
+                  </a:extLst>
+                </p:cNvPr>
+                <p:cNvSpPr txBox="1"/>
+                <p:nvPr/>
+              </p:nvSpPr>
+              <p:spPr>
+                <a:xfrm>
+                  <a:off x="5381609" y="2049418"/>
+                  <a:ext cx="186781" cy="276999"/>
+                </a:xfrm>
+                <a:prstGeom prst="rect">
+                  <a:avLst/>
+                </a:prstGeom>
+                <a:noFill/>
+              </p:spPr>
+              <p:txBody>
+                <a:bodyPr wrap="none" lIns="0" tIns="0" rIns="0" bIns="0" rtlCol="0">
+                  <a:spAutoFit/>
+                </a:bodyPr>
+                <a:lstStyle/>
+                <a:p>
+                  <a14:m>
+                    <m:oMathPara xmlns:m="http://schemas.openxmlformats.org/officeDocument/2006/math">
+                      <m:oMathParaPr>
+                        <m:jc m:val="centerGroup"/>
+                      </m:oMathParaPr>
+                      <m:oMath xmlns:m="http://schemas.openxmlformats.org/officeDocument/2006/math">
+                        <m:r>
+                          <a:rPr lang="en-US" altLang="zh-CN" b="0" i="1" smtClean="0">
+                            <a:latin typeface="Cambria Math" panose="02040503050406030204" pitchFamily="18" charset="0"/>
+                          </a:rPr>
+                          <m:t>𝑎</m:t>
+                        </m:r>
+                      </m:oMath>
+                    </m:oMathPara>
+                  </a14:m>
+                  <a:endParaRPr lang="en-US" altLang="zh-CN" b="0" dirty="0"/>
+                </a:p>
+              </p:txBody>
+            </p:sp>
+          </mc:Choice>
+          <mc:Fallback>
+            <p:sp>
+              <p:nvSpPr>
+                <p:cNvPr id="22" name="文本框 21">
+                  <a:extLst>
+                    <a:ext uri="{FF2B5EF4-FFF2-40B4-BE49-F238E27FC236}">
+                      <a16:creationId xmlns:a16="http://schemas.microsoft.com/office/drawing/2014/main" id="{68FB5207-118F-6D81-5A1F-6B6919EF0287}"/>
+                    </a:ext>
+                  </a:extLst>
+                </p:cNvPr>
+                <p:cNvSpPr txBox="1">
+                  <a:spLocks noRot="1" noChangeAspect="1" noMove="1" noResize="1" noEditPoints="1" noAdjustHandles="1" noChangeArrowheads="1" noChangeShapeType="1" noTextEdit="1"/>
+                </p:cNvSpPr>
+                <p:nvPr/>
+              </p:nvSpPr>
+              <p:spPr>
+                <a:xfrm>
+                  <a:off x="5381609" y="2049418"/>
+                  <a:ext cx="186781" cy="276999"/>
+                </a:xfrm>
+                <a:prstGeom prst="rect">
+                  <a:avLst/>
+                </a:prstGeom>
+                <a:blipFill>
+                  <a:blip r:embed="rId5"/>
+                  <a:stretch>
+                    <a:fillRect l="-20000" r="-16667"/>
+                  </a:stretch>
+                </a:blipFill>
+              </p:spPr>
+              <p:txBody>
+                <a:bodyPr/>
+                <a:lstStyle/>
+                <a:p>
+                  <a:r>
+                    <a:rPr lang="zh-CN" altLang="en-US">
+                      <a:noFill/>
+                    </a:rPr>
+                    <a:t> </a:t>
+                  </a:r>
+                </a:p>
+              </p:txBody>
+            </p:sp>
+          </mc:Fallback>
+        </mc:AlternateContent>
+        <mc:AlternateContent xmlns:mc="http://schemas.openxmlformats.org/markup-compatibility/2006">
+          <mc:Choice xmlns:a14="http://schemas.microsoft.com/office/drawing/2010/main" Requires="a14">
+            <p:sp>
+              <p:nvSpPr>
+                <p:cNvPr id="23" name="文本框 22">
+                  <a:extLst>
+                    <a:ext uri="{FF2B5EF4-FFF2-40B4-BE49-F238E27FC236}">
+                      <a16:creationId xmlns:a16="http://schemas.microsoft.com/office/drawing/2014/main" id="{42C53DED-7ED2-4EE3-8060-3B37D68CB4A5}"/>
+                    </a:ext>
+                  </a:extLst>
+                </p:cNvPr>
+                <p:cNvSpPr txBox="1"/>
+                <p:nvPr/>
+              </p:nvSpPr>
+              <p:spPr>
+                <a:xfrm>
+                  <a:off x="5188671" y="4126422"/>
+                  <a:ext cx="359906" cy="276999"/>
+                </a:xfrm>
+                <a:prstGeom prst="rect">
+                  <a:avLst/>
+                </a:prstGeom>
+                <a:noFill/>
+              </p:spPr>
+              <p:txBody>
+                <a:bodyPr wrap="none" lIns="0" tIns="0" rIns="0" bIns="0" rtlCol="0">
+                  <a:spAutoFit/>
+                </a:bodyPr>
+                <a:lstStyle/>
+                <a:p>
+                  <a14:m>
+                    <m:oMathPara xmlns:m="http://schemas.openxmlformats.org/officeDocument/2006/math">
+                      <m:oMathParaPr>
+                        <m:jc m:val="centerGroup"/>
+                      </m:oMathParaPr>
+                      <m:oMath xmlns:m="http://schemas.openxmlformats.org/officeDocument/2006/math">
+                        <m:r>
+                          <a:rPr lang="en-US" altLang="zh-CN" b="0" i="1" smtClean="0">
+                            <a:latin typeface="Cambria Math" panose="02040503050406030204" pitchFamily="18" charset="0"/>
+                          </a:rPr>
+                          <m:t>−</m:t>
+                        </m:r>
+                        <m:r>
+                          <a:rPr lang="en-US" altLang="zh-CN" b="0" i="1" smtClean="0">
+                            <a:latin typeface="Cambria Math" panose="02040503050406030204" pitchFamily="18" charset="0"/>
+                          </a:rPr>
+                          <m:t>𝑎</m:t>
+                        </m:r>
+                      </m:oMath>
+                    </m:oMathPara>
+                  </a14:m>
+                  <a:endParaRPr lang="en-US" altLang="zh-CN" b="0" dirty="0"/>
+                </a:p>
+              </p:txBody>
+            </p:sp>
+          </mc:Choice>
+          <mc:Fallback>
+            <p:sp>
+              <p:nvSpPr>
+                <p:cNvPr id="23" name="文本框 22">
+                  <a:extLst>
+                    <a:ext uri="{FF2B5EF4-FFF2-40B4-BE49-F238E27FC236}">
+                      <a16:creationId xmlns:a16="http://schemas.microsoft.com/office/drawing/2014/main" id="{42C53DED-7ED2-4EE3-8060-3B37D68CB4A5}"/>
+                    </a:ext>
+                  </a:extLst>
+                </p:cNvPr>
+                <p:cNvSpPr txBox="1">
+                  <a:spLocks noRot="1" noChangeAspect="1" noMove="1" noResize="1" noEditPoints="1" noAdjustHandles="1" noChangeArrowheads="1" noChangeShapeType="1" noTextEdit="1"/>
+                </p:cNvSpPr>
+                <p:nvPr/>
+              </p:nvSpPr>
+              <p:spPr>
+                <a:xfrm>
+                  <a:off x="5188671" y="4126422"/>
+                  <a:ext cx="359906" cy="276999"/>
+                </a:xfrm>
+                <a:prstGeom prst="rect">
+                  <a:avLst/>
+                </a:prstGeom>
+                <a:blipFill>
+                  <a:blip r:embed="rId6"/>
+                  <a:stretch>
+                    <a:fillRect l="-3390" r="-8475"/>
+                  </a:stretch>
+                </a:blipFill>
+              </p:spPr>
+              <p:txBody>
+                <a:bodyPr/>
+                <a:lstStyle/>
+                <a:p>
+                  <a:r>
+                    <a:rPr lang="zh-CN" altLang="en-US">
+                      <a:noFill/>
+                    </a:rPr>
+                    <a:t> </a:t>
+                  </a:r>
+                </a:p>
+              </p:txBody>
+            </p:sp>
+          </mc:Fallback>
+        </mc:AlternateContent>
+        <mc:AlternateContent xmlns:mc="http://schemas.openxmlformats.org/markup-compatibility/2006">
+          <mc:Choice xmlns:a14="http://schemas.microsoft.com/office/drawing/2010/main" Requires="a14">
+            <p:sp>
+              <p:nvSpPr>
+                <p:cNvPr id="24" name="文本框 23">
+                  <a:extLst>
+                    <a:ext uri="{FF2B5EF4-FFF2-40B4-BE49-F238E27FC236}">
+                      <a16:creationId xmlns:a16="http://schemas.microsoft.com/office/drawing/2014/main" id="{697EE4C2-642D-D74F-7746-89E49B8C6266}"/>
+                    </a:ext>
+                  </a:extLst>
+                </p:cNvPr>
+                <p:cNvSpPr txBox="1"/>
+                <p:nvPr/>
+              </p:nvSpPr>
+              <p:spPr>
+                <a:xfrm>
+                  <a:off x="5949357" y="2672423"/>
+                  <a:ext cx="287963" cy="276999"/>
+                </a:xfrm>
+                <a:prstGeom prst="rect">
+                  <a:avLst/>
+                </a:prstGeom>
+                <a:noFill/>
+              </p:spPr>
+              <p:txBody>
+                <a:bodyPr wrap="none" lIns="0" tIns="0" rIns="0" bIns="0" rtlCol="0">
+                  <a:spAutoFit/>
+                </a:bodyPr>
+                <a:lstStyle/>
+                <a:p>
+                  <a14:m>
+                    <m:oMathPara xmlns:m="http://schemas.openxmlformats.org/officeDocument/2006/math">
+                      <m:oMathParaPr>
+                        <m:jc m:val="centerGroup"/>
+                      </m:oMathParaPr>
+                      <m:oMath xmlns:m="http://schemas.openxmlformats.org/officeDocument/2006/math">
+                        <m:sSub>
+                          <m:sSubPr>
+                            <m:ctrlPr>
+                              <a:rPr lang="en-US" altLang="zh-CN" b="0" i="1" smtClean="0">
+                                <a:latin typeface="Cambria Math" panose="02040503050406030204" pitchFamily="18" charset="0"/>
+                              </a:rPr>
+                            </m:ctrlPr>
+                          </m:sSubPr>
+                          <m:e>
+                            <m:r>
+                              <a:rPr lang="en-US" altLang="zh-CN" b="0" i="1" smtClean="0">
+                                <a:latin typeface="Cambria Math" panose="02040503050406030204" pitchFamily="18" charset="0"/>
+                              </a:rPr>
+                              <m:t>𝑛</m:t>
+                            </m:r>
+                          </m:e>
+                          <m:sub>
+                            <m:r>
+                              <a:rPr lang="en-US" altLang="zh-CN" b="0" i="1" smtClean="0">
+                                <a:latin typeface="Cambria Math" panose="02040503050406030204" pitchFamily="18" charset="0"/>
+                              </a:rPr>
+                              <m:t>1</m:t>
+                            </m:r>
+                          </m:sub>
+                        </m:sSub>
+                      </m:oMath>
+                    </m:oMathPara>
+                  </a14:m>
+                  <a:endParaRPr lang="en-US" altLang="zh-CN" b="0" dirty="0"/>
+                </a:p>
+              </p:txBody>
+            </p:sp>
+          </mc:Choice>
+          <mc:Fallback>
+            <p:sp>
+              <p:nvSpPr>
+                <p:cNvPr id="24" name="文本框 23">
+                  <a:extLst>
+                    <a:ext uri="{FF2B5EF4-FFF2-40B4-BE49-F238E27FC236}">
+                      <a16:creationId xmlns:a16="http://schemas.microsoft.com/office/drawing/2014/main" id="{697EE4C2-642D-D74F-7746-89E49B8C6266}"/>
+                    </a:ext>
+                  </a:extLst>
+                </p:cNvPr>
+                <p:cNvSpPr txBox="1">
+                  <a:spLocks noRot="1" noChangeAspect="1" noMove="1" noResize="1" noEditPoints="1" noAdjustHandles="1" noChangeArrowheads="1" noChangeShapeType="1" noTextEdit="1"/>
+                </p:cNvSpPr>
+                <p:nvPr/>
+              </p:nvSpPr>
+              <p:spPr>
+                <a:xfrm>
+                  <a:off x="5949357" y="2672423"/>
+                  <a:ext cx="287963" cy="276999"/>
+                </a:xfrm>
+                <a:prstGeom prst="rect">
+                  <a:avLst/>
+                </a:prstGeom>
+                <a:blipFill>
+                  <a:blip r:embed="rId7"/>
+                  <a:stretch>
+                    <a:fillRect l="-12766" r="-6383" b="-13043"/>
+                  </a:stretch>
+                </a:blipFill>
+              </p:spPr>
+              <p:txBody>
+                <a:bodyPr/>
+                <a:lstStyle/>
+                <a:p>
+                  <a:r>
+                    <a:rPr lang="zh-CN" altLang="en-US">
+                      <a:noFill/>
+                    </a:rPr>
+                    <a:t> </a:t>
+                  </a:r>
+                </a:p>
+              </p:txBody>
+            </p:sp>
+          </mc:Fallback>
+        </mc:AlternateContent>
+        <mc:AlternateContent xmlns:mc="http://schemas.openxmlformats.org/markup-compatibility/2006">
+          <mc:Choice xmlns:a14="http://schemas.microsoft.com/office/drawing/2010/main" Requires="a14">
+            <p:sp>
+              <p:nvSpPr>
+                <p:cNvPr id="26" name="文本框 25">
+                  <a:extLst>
+                    <a:ext uri="{FF2B5EF4-FFF2-40B4-BE49-F238E27FC236}">
+                      <a16:creationId xmlns:a16="http://schemas.microsoft.com/office/drawing/2014/main" id="{9FB88346-E684-02A0-7956-C100C0328859}"/>
+                    </a:ext>
+                  </a:extLst>
+                </p:cNvPr>
+                <p:cNvSpPr txBox="1"/>
+                <p:nvPr/>
+              </p:nvSpPr>
+              <p:spPr>
+                <a:xfrm>
+                  <a:off x="5949357" y="1807167"/>
+                  <a:ext cx="293285" cy="276999"/>
+                </a:xfrm>
+                <a:prstGeom prst="rect">
+                  <a:avLst/>
+                </a:prstGeom>
+                <a:noFill/>
+              </p:spPr>
+              <p:txBody>
+                <a:bodyPr wrap="none" lIns="0" tIns="0" rIns="0" bIns="0" rtlCol="0">
+                  <a:spAutoFit/>
+                </a:bodyPr>
+                <a:lstStyle/>
+                <a:p>
+                  <a14:m>
+                    <m:oMathPara xmlns:m="http://schemas.openxmlformats.org/officeDocument/2006/math">
+                      <m:oMathParaPr>
+                        <m:jc m:val="centerGroup"/>
+                      </m:oMathParaPr>
+                      <m:oMath xmlns:m="http://schemas.openxmlformats.org/officeDocument/2006/math">
+                        <m:sSub>
+                          <m:sSubPr>
+                            <m:ctrlPr>
+                              <a:rPr lang="en-US" altLang="zh-CN" b="0" i="1" smtClean="0">
+                                <a:latin typeface="Cambria Math" panose="02040503050406030204" pitchFamily="18" charset="0"/>
+                              </a:rPr>
+                            </m:ctrlPr>
+                          </m:sSubPr>
+                          <m:e>
+                            <m:r>
+                              <a:rPr lang="en-US" altLang="zh-CN" b="0" i="1" smtClean="0">
+                                <a:latin typeface="Cambria Math" panose="02040503050406030204" pitchFamily="18" charset="0"/>
+                              </a:rPr>
+                              <m:t>𝑛</m:t>
+                            </m:r>
+                          </m:e>
+                          <m:sub>
+                            <m:r>
+                              <a:rPr lang="en-US" altLang="zh-CN" b="0" i="1" smtClean="0">
+                                <a:latin typeface="Cambria Math" panose="02040503050406030204" pitchFamily="18" charset="0"/>
+                              </a:rPr>
+                              <m:t>2</m:t>
+                            </m:r>
+                          </m:sub>
+                        </m:sSub>
+                      </m:oMath>
+                    </m:oMathPara>
+                  </a14:m>
+                  <a:endParaRPr lang="en-US" altLang="zh-CN" b="0" dirty="0"/>
+                </a:p>
+              </p:txBody>
+            </p:sp>
+          </mc:Choice>
+          <mc:Fallback>
+            <p:sp>
+              <p:nvSpPr>
+                <p:cNvPr id="26" name="文本框 25">
+                  <a:extLst>
+                    <a:ext uri="{FF2B5EF4-FFF2-40B4-BE49-F238E27FC236}">
+                      <a16:creationId xmlns:a16="http://schemas.microsoft.com/office/drawing/2014/main" id="{9FB88346-E684-02A0-7956-C100C0328859}"/>
+                    </a:ext>
+                  </a:extLst>
+                </p:cNvPr>
+                <p:cNvSpPr txBox="1">
+                  <a:spLocks noRot="1" noChangeAspect="1" noMove="1" noResize="1" noEditPoints="1" noAdjustHandles="1" noChangeArrowheads="1" noChangeShapeType="1" noTextEdit="1"/>
+                </p:cNvSpPr>
+                <p:nvPr/>
+              </p:nvSpPr>
+              <p:spPr>
+                <a:xfrm>
+                  <a:off x="5949357" y="1807167"/>
+                  <a:ext cx="293285" cy="276999"/>
+                </a:xfrm>
+                <a:prstGeom prst="rect">
+                  <a:avLst/>
+                </a:prstGeom>
+                <a:blipFill>
+                  <a:blip r:embed="rId8"/>
+                  <a:stretch>
+                    <a:fillRect l="-12500" r="-6250" b="-13043"/>
+                  </a:stretch>
+                </a:blipFill>
+              </p:spPr>
+              <p:txBody>
+                <a:bodyPr/>
+                <a:lstStyle/>
+                <a:p>
+                  <a:r>
+                    <a:rPr lang="zh-CN" altLang="en-US">
+                      <a:noFill/>
+                    </a:rPr>
+                    <a:t> </a:t>
+                  </a:r>
+                </a:p>
+              </p:txBody>
+            </p:sp>
+          </mc:Fallback>
+        </mc:AlternateContent>
+        <mc:AlternateContent xmlns:mc="http://schemas.openxmlformats.org/markup-compatibility/2006">
+          <mc:Choice xmlns:a14="http://schemas.microsoft.com/office/drawing/2010/main" Requires="a14">
+            <p:sp>
+              <p:nvSpPr>
+                <p:cNvPr id="28" name="文本框 27">
+                  <a:extLst>
+                    <a:ext uri="{FF2B5EF4-FFF2-40B4-BE49-F238E27FC236}">
+                      <a16:creationId xmlns:a16="http://schemas.microsoft.com/office/drawing/2014/main" id="{441FBC52-71C3-24B7-F93C-5ADBF428FE31}"/>
+                    </a:ext>
+                  </a:extLst>
+                </p:cNvPr>
+                <p:cNvSpPr txBox="1"/>
+                <p:nvPr/>
+              </p:nvSpPr>
+              <p:spPr>
+                <a:xfrm>
+                  <a:off x="5949356" y="4403421"/>
+                  <a:ext cx="293285" cy="276999"/>
+                </a:xfrm>
+                <a:prstGeom prst="rect">
+                  <a:avLst/>
+                </a:prstGeom>
+                <a:noFill/>
+              </p:spPr>
+              <p:txBody>
+                <a:bodyPr wrap="none" lIns="0" tIns="0" rIns="0" bIns="0" rtlCol="0">
+                  <a:spAutoFit/>
+                </a:bodyPr>
+                <a:lstStyle/>
+                <a:p>
+                  <a:pPr/>
+                  <a14:m>
+                    <m:oMathPara xmlns:m="http://schemas.openxmlformats.org/officeDocument/2006/math">
+                      <m:oMathParaPr>
+                        <m:jc m:val="centerGroup"/>
+                      </m:oMathParaPr>
+                      <m:oMath xmlns:m="http://schemas.openxmlformats.org/officeDocument/2006/math">
+                        <m:sSub>
+                          <m:sSubPr>
+                            <m:ctrlPr>
+                              <a:rPr lang="en-US" altLang="zh-CN" b="0" i="1" smtClean="0">
+                                <a:latin typeface="Cambria Math" panose="02040503050406030204" pitchFamily="18" charset="0"/>
+                              </a:rPr>
+                            </m:ctrlPr>
+                          </m:sSubPr>
+                          <m:e>
+                            <m:r>
+                              <a:rPr lang="en-US" altLang="zh-CN" b="0" i="1" smtClean="0">
+                                <a:latin typeface="Cambria Math" panose="02040503050406030204" pitchFamily="18" charset="0"/>
+                              </a:rPr>
+                              <m:t>𝑛</m:t>
+                            </m:r>
+                          </m:e>
+                          <m:sub>
+                            <m:r>
+                              <a:rPr lang="en-US" altLang="zh-CN" b="0" i="1" smtClean="0">
+                                <a:latin typeface="Cambria Math" panose="02040503050406030204" pitchFamily="18" charset="0"/>
+                              </a:rPr>
+                              <m:t>2</m:t>
+                            </m:r>
+                          </m:sub>
+                        </m:sSub>
+                      </m:oMath>
+                    </m:oMathPara>
+                  </a14:m>
+                  <a:endParaRPr lang="en-US" altLang="zh-CN" b="0" dirty="0"/>
+                </a:p>
+              </p:txBody>
+            </p:sp>
+          </mc:Choice>
+          <mc:Fallback>
+            <p:sp>
+              <p:nvSpPr>
+                <p:cNvPr id="28" name="文本框 27">
+                  <a:extLst>
+                    <a:ext uri="{FF2B5EF4-FFF2-40B4-BE49-F238E27FC236}">
+                      <a16:creationId xmlns:a16="http://schemas.microsoft.com/office/drawing/2014/main" id="{441FBC52-71C3-24B7-F93C-5ADBF428FE31}"/>
+                    </a:ext>
+                  </a:extLst>
+                </p:cNvPr>
+                <p:cNvSpPr txBox="1">
+                  <a:spLocks noRot="1" noChangeAspect="1" noMove="1" noResize="1" noEditPoints="1" noAdjustHandles="1" noChangeArrowheads="1" noChangeShapeType="1" noTextEdit="1"/>
+                </p:cNvSpPr>
+                <p:nvPr/>
+              </p:nvSpPr>
+              <p:spPr>
+                <a:xfrm>
+                  <a:off x="5949356" y="4403421"/>
+                  <a:ext cx="293285" cy="276999"/>
+                </a:xfrm>
+                <a:prstGeom prst="rect">
+                  <a:avLst/>
+                </a:prstGeom>
+                <a:blipFill>
+                  <a:blip r:embed="rId9"/>
+                  <a:stretch>
+                    <a:fillRect l="-12500" r="-6250" b="-13043"/>
+                  </a:stretch>
+                </a:blipFill>
+              </p:spPr>
+              <p:txBody>
+                <a:bodyPr/>
+                <a:lstStyle/>
+                <a:p>
+                  <a:r>
+                    <a:rPr lang="zh-CN" altLang="en-US">
+                      <a:noFill/>
+                    </a:rPr>
+                    <a:t> </a:t>
+                  </a:r>
+                </a:p>
+              </p:txBody>
+            </p:sp>
+          </mc:Fallback>
+        </mc:AlternateContent>
+      </p:grpSp>
+    </p:spTree>
+    <p:extLst>
+      <p:ext uri="{BB962C8B-B14F-4D97-AF65-F5344CB8AC3E}">
+        <p14:creationId xmlns:p14="http://schemas.microsoft.com/office/powerpoint/2010/main" val="1901268386"/>
+      </p:ext>
+    </p:extLst>
   </p:cSld>
   <p:clrMapOvr>
     <a:masterClrMapping/>
@@ -6897,7 +7975,6 @@
               <a:rPr lang="el-GR" altLang="zh-CN" dirty="0"/>
               <a:t>λ</a:t>
             </a:r>
-            <a:endParaRPr lang="el-GR" altLang="zh-CN" dirty="0"/>
           </a:p>
         </p:txBody>
       </p:sp>
@@ -7021,7 +8098,6 @@
               <a:rPr lang="el-GR" altLang="zh-CN" dirty="0"/>
               <a:t>λ</a:t>
             </a:r>
-            <a:endParaRPr lang="el-GR" altLang="zh-CN" dirty="0"/>
           </a:p>
         </p:txBody>
       </p:sp>
@@ -7145,7 +8221,6 @@
               <a:rPr lang="el-GR" altLang="zh-CN" dirty="0"/>
               <a:t>λ</a:t>
             </a:r>
-            <a:endParaRPr lang="el-GR" altLang="zh-CN" dirty="0"/>
           </a:p>
         </p:txBody>
       </p:sp>
@@ -7269,12 +8344,11 @@
               <a:rPr lang="el-GR" altLang="zh-CN" dirty="0"/>
               <a:t>λ</a:t>
             </a:r>
-            <a:endParaRPr lang="el-GR" altLang="zh-CN" dirty="0"/>
           </a:p>
         </p:txBody>
       </p:sp>
-      <mc:AlternateContent xmlns:mc="http://schemas.openxmlformats.org/markup-compatibility/2006">
-        <mc:Choice xmlns:a14="http://schemas.microsoft.com/office/drawing/2010/main" Requires="a14">
+      <mc:AlternateContent xmlns:mc="http://schemas.openxmlformats.org/markup-compatibility/2006" xmlns:a14="http://schemas.microsoft.com/office/drawing/2010/main">
+        <mc:Choice Requires="a14">
           <p:sp>
             <p:nvSpPr>
               <p:cNvPr id="28" name="Text Box 36"/>
@@ -7300,7 +8374,7 @@
               </a:ln>
               <a:extLst>
                 <a:ext uri="{909E8E84-426E-40DD-AFC4-6F175D3DCCD1}">
-                  <a14:hiddenFill xmlns:a14="http://schemas.microsoft.com/office/drawing/2010/main">
+                  <a14:hiddenFill>
                     <a:solidFill>
                       <a:srgbClr val="FFFFFF"/>
                     </a:solidFill>
@@ -7391,6 +8465,7 @@
                 </a:lvl9pPr>
               </a:lstStyle>
               <a:p>
+                <a:pPr/>
                 <a14:m>
                   <m:oMathPara xmlns:m="http://schemas.openxmlformats.org/officeDocument/2006/math">
                     <m:oMathParaPr>
@@ -7431,7 +8506,7 @@
             </p:txBody>
           </p:sp>
         </mc:Choice>
-        <mc:Fallback>
+        <mc:Fallback xmlns="">
           <p:sp>
             <p:nvSpPr>
               <p:cNvPr id="28" name="Text Box 36"/>
@@ -7449,7 +8524,7 @@
                 <a:avLst/>
               </a:prstGeom>
               <a:blipFill rotWithShape="1">
-                <a:blip r:embed="rId1"/>
+                <a:blip r:embed="rId2"/>
                 <a:stretch>
                   <a:fillRect l="-564" t="-1462" r="-488" b="-1322"/>
                 </a:stretch>
@@ -7485,8 +8560,8 @@
           </p:sp>
         </mc:Fallback>
       </mc:AlternateContent>
-      <mc:AlternateContent xmlns:mc="http://schemas.openxmlformats.org/markup-compatibility/2006">
-        <mc:Choice xmlns:a14="http://schemas.microsoft.com/office/drawing/2010/main" Requires="a14">
+      <mc:AlternateContent xmlns:mc="http://schemas.openxmlformats.org/markup-compatibility/2006" xmlns:a14="http://schemas.microsoft.com/office/drawing/2010/main">
+        <mc:Choice Requires="a14">
           <p:sp>
             <p:nvSpPr>
               <p:cNvPr id="37" name="Text Box 30"/>
@@ -7512,7 +8587,7 @@
               </a:ln>
               <a:extLst>
                 <a:ext uri="{909E8E84-426E-40DD-AFC4-6F175D3DCCD1}">
-                  <a14:hiddenFill xmlns:a14="http://schemas.microsoft.com/office/drawing/2010/main">
+                  <a14:hiddenFill>
                     <a:solidFill>
                       <a:srgbClr val="FFFFFF"/>
                     </a:solidFill>
@@ -7603,6 +8678,7 @@
                 </a:lvl9pPr>
               </a:lstStyle>
               <a:p>
+                <a:pPr/>
                 <a14:m>
                   <m:oMathPara xmlns:m="http://schemas.openxmlformats.org/officeDocument/2006/math">
                     <m:oMathParaPr>
@@ -7623,7 +8699,7 @@
             </p:txBody>
           </p:sp>
         </mc:Choice>
-        <mc:Fallback>
+        <mc:Fallback xmlns="">
           <p:sp>
             <p:nvSpPr>
               <p:cNvPr id="37" name="Text Box 30"/>
@@ -7641,7 +8717,7 @@
                 <a:avLst/>
               </a:prstGeom>
               <a:blipFill rotWithShape="1">
-                <a:blip r:embed="rId2"/>
+                <a:blip r:embed="rId3"/>
                 <a:stretch>
                   <a:fillRect l="-657" t="-1454" r="-716" b="-1330"/>
                 </a:stretch>
@@ -7677,8 +8753,8 @@
           </p:sp>
         </mc:Fallback>
       </mc:AlternateContent>
-      <mc:AlternateContent xmlns:mc="http://schemas.openxmlformats.org/markup-compatibility/2006">
-        <mc:Choice xmlns:a14="http://schemas.microsoft.com/office/drawing/2010/main" Requires="a14">
+      <mc:AlternateContent xmlns:mc="http://schemas.openxmlformats.org/markup-compatibility/2006" xmlns:a14="http://schemas.microsoft.com/office/drawing/2010/main">
+        <mc:Choice Requires="a14">
           <p:sp>
             <p:nvSpPr>
               <p:cNvPr id="38" name="Text Box 30"/>
@@ -7704,7 +8780,7 @@
               </a:ln>
               <a:extLst>
                 <a:ext uri="{909E8E84-426E-40DD-AFC4-6F175D3DCCD1}">
-                  <a14:hiddenFill xmlns:a14="http://schemas.microsoft.com/office/drawing/2010/main">
+                  <a14:hiddenFill>
                     <a:solidFill>
                       <a:srgbClr val="FFFFFF"/>
                     </a:solidFill>
@@ -7795,6 +8871,7 @@
                 </a:lvl9pPr>
               </a:lstStyle>
               <a:p>
+                <a:pPr/>
                 <a14:m>
                   <m:oMathPara xmlns:m="http://schemas.openxmlformats.org/officeDocument/2006/math">
                     <m:oMathParaPr>
@@ -7815,7 +8892,7 @@
             </p:txBody>
           </p:sp>
         </mc:Choice>
-        <mc:Fallback>
+        <mc:Fallback xmlns="">
           <p:sp>
             <p:nvSpPr>
               <p:cNvPr id="38" name="Text Box 30"/>
@@ -7833,7 +8910,7 @@
                 <a:avLst/>
               </a:prstGeom>
               <a:blipFill rotWithShape="1">
-                <a:blip r:embed="rId2"/>
+                <a:blip r:embed="rId3"/>
                 <a:stretch>
                   <a:fillRect l="-745" t="-1581" r="-725" b="-1391"/>
                 </a:stretch>
@@ -7869,8 +8946,8 @@
           </p:sp>
         </mc:Fallback>
       </mc:AlternateContent>
-      <mc:AlternateContent xmlns:mc="http://schemas.openxmlformats.org/markup-compatibility/2006">
-        <mc:Choice xmlns:a14="http://schemas.microsoft.com/office/drawing/2010/main" Requires="a14">
+      <mc:AlternateContent xmlns:mc="http://schemas.openxmlformats.org/markup-compatibility/2006" xmlns:a14="http://schemas.microsoft.com/office/drawing/2010/main">
+        <mc:Choice Requires="a14">
           <p:sp>
             <p:nvSpPr>
               <p:cNvPr id="39" name="Text Box 30"/>
@@ -7896,7 +8973,7 @@
               </a:ln>
               <a:extLst>
                 <a:ext uri="{909E8E84-426E-40DD-AFC4-6F175D3DCCD1}">
-                  <a14:hiddenFill xmlns:a14="http://schemas.microsoft.com/office/drawing/2010/main">
+                  <a14:hiddenFill>
                     <a:solidFill>
                       <a:srgbClr val="FFFFFF"/>
                     </a:solidFill>
@@ -7987,6 +9064,7 @@
                 </a:lvl9pPr>
               </a:lstStyle>
               <a:p>
+                <a:pPr/>
                 <a14:m>
                   <m:oMathPara xmlns:m="http://schemas.openxmlformats.org/officeDocument/2006/math">
                     <m:oMathParaPr>
@@ -8007,7 +9085,7 @@
             </p:txBody>
           </p:sp>
         </mc:Choice>
-        <mc:Fallback>
+        <mc:Fallback xmlns="">
           <p:sp>
             <p:nvSpPr>
               <p:cNvPr id="39" name="Text Box 30"/>
@@ -8025,7 +9103,7 @@
                 <a:avLst/>
               </a:prstGeom>
               <a:blipFill rotWithShape="1">
-                <a:blip r:embed="rId2"/>
+                <a:blip r:embed="rId3"/>
                 <a:stretch>
                   <a:fillRect l="-824" t="-1445" r="-647" b="-1340"/>
                 </a:stretch>
@@ -8061,8 +9139,8 @@
           </p:sp>
         </mc:Fallback>
       </mc:AlternateContent>
-      <mc:AlternateContent xmlns:mc="http://schemas.openxmlformats.org/markup-compatibility/2006">
-        <mc:Choice xmlns:a14="http://schemas.microsoft.com/office/drawing/2010/main" Requires="a14">
+      <mc:AlternateContent xmlns:mc="http://schemas.openxmlformats.org/markup-compatibility/2006" xmlns:a14="http://schemas.microsoft.com/office/drawing/2010/main">
+        <mc:Choice Requires="a14">
           <p:sp>
             <p:nvSpPr>
               <p:cNvPr id="40" name="Text Box 30"/>
@@ -8088,7 +9166,7 @@
               </a:ln>
               <a:extLst>
                 <a:ext uri="{909E8E84-426E-40DD-AFC4-6F175D3DCCD1}">
-                  <a14:hiddenFill xmlns:a14="http://schemas.microsoft.com/office/drawing/2010/main">
+                  <a14:hiddenFill>
                     <a:solidFill>
                       <a:srgbClr val="FFFFFF"/>
                     </a:solidFill>
@@ -8179,6 +9257,7 @@
                 </a:lvl9pPr>
               </a:lstStyle>
               <a:p>
+                <a:pPr/>
                 <a14:m>
                   <m:oMathPara xmlns:m="http://schemas.openxmlformats.org/officeDocument/2006/math">
                     <m:oMathParaPr>
@@ -8199,7 +9278,7 @@
             </p:txBody>
           </p:sp>
         </mc:Choice>
-        <mc:Fallback>
+        <mc:Fallback xmlns="">
           <p:sp>
             <p:nvSpPr>
               <p:cNvPr id="40" name="Text Box 30"/>
@@ -8217,7 +9296,7 @@
                 <a:avLst/>
               </a:prstGeom>
               <a:blipFill rotWithShape="1">
-                <a:blip r:embed="rId2"/>
+                <a:blip r:embed="rId3"/>
                 <a:stretch>
                   <a:fillRect l="-815" t="-1425" r="-656" b="-1359"/>
                 </a:stretch>
@@ -8253,8 +9332,8 @@
           </p:sp>
         </mc:Fallback>
       </mc:AlternateContent>
-      <mc:AlternateContent xmlns:mc="http://schemas.openxmlformats.org/markup-compatibility/2006">
-        <mc:Choice xmlns:a14="http://schemas.microsoft.com/office/drawing/2010/main" Requires="a14">
+      <mc:AlternateContent xmlns:mc="http://schemas.openxmlformats.org/markup-compatibility/2006" xmlns:a14="http://schemas.microsoft.com/office/drawing/2010/main">
+        <mc:Choice Requires="a14">
           <p:sp>
             <p:nvSpPr>
               <p:cNvPr id="41" name="Text Box 36"/>
@@ -8280,7 +9359,7 @@
               </a:ln>
               <a:extLst>
                 <a:ext uri="{909E8E84-426E-40DD-AFC4-6F175D3DCCD1}">
-                  <a14:hiddenFill xmlns:a14="http://schemas.microsoft.com/office/drawing/2010/main">
+                  <a14:hiddenFill>
                     <a:solidFill>
                       <a:srgbClr val="FFFFFF"/>
                     </a:solidFill>
@@ -8371,6 +9450,7 @@
                 </a:lvl9pPr>
               </a:lstStyle>
               <a:p>
+                <a:pPr/>
                 <a14:m>
                   <m:oMathPara xmlns:m="http://schemas.openxmlformats.org/officeDocument/2006/math">
                     <m:oMathParaPr>
@@ -8411,7 +9491,7 @@
             </p:txBody>
           </p:sp>
         </mc:Choice>
-        <mc:Fallback>
+        <mc:Fallback xmlns="">
           <p:sp>
             <p:nvSpPr>
               <p:cNvPr id="41" name="Text Box 36"/>
@@ -8429,7 +9509,7 @@
                 <a:avLst/>
               </a:prstGeom>
               <a:blipFill rotWithShape="1">
-                <a:blip r:embed="rId1"/>
+                <a:blip r:embed="rId2"/>
                 <a:stretch>
                   <a:fillRect l="-526" t="-1509" r="-459" b="-1275"/>
                 </a:stretch>
@@ -8465,8 +9545,8 @@
           </p:sp>
         </mc:Fallback>
       </mc:AlternateContent>
-      <mc:AlternateContent xmlns:mc="http://schemas.openxmlformats.org/markup-compatibility/2006">
-        <mc:Choice xmlns:a14="http://schemas.microsoft.com/office/drawing/2010/main" Requires="a14">
+      <mc:AlternateContent xmlns:mc="http://schemas.openxmlformats.org/markup-compatibility/2006" xmlns:a14="http://schemas.microsoft.com/office/drawing/2010/main">
+        <mc:Choice Requires="a14">
           <p:sp>
             <p:nvSpPr>
               <p:cNvPr id="42" name="Text Box 36"/>
@@ -8492,7 +9572,7 @@
               </a:ln>
               <a:extLst>
                 <a:ext uri="{909E8E84-426E-40DD-AFC4-6F175D3DCCD1}">
-                  <a14:hiddenFill xmlns:a14="http://schemas.microsoft.com/office/drawing/2010/main">
+                  <a14:hiddenFill>
                     <a:solidFill>
                       <a:srgbClr val="FFFFFF"/>
                     </a:solidFill>
@@ -8583,6 +9663,7 @@
                 </a:lvl9pPr>
               </a:lstStyle>
               <a:p>
+                <a:pPr/>
                 <a14:m>
                   <m:oMathPara xmlns:m="http://schemas.openxmlformats.org/officeDocument/2006/math">
                     <m:oMathParaPr>
@@ -8623,7 +9704,7 @@
             </p:txBody>
           </p:sp>
         </mc:Choice>
-        <mc:Fallback>
+        <mc:Fallback xmlns="">
           <p:sp>
             <p:nvSpPr>
               <p:cNvPr id="42" name="Text Box 36"/>
@@ -8641,7 +9722,7 @@
                 <a:avLst/>
               </a:prstGeom>
               <a:blipFill rotWithShape="1">
-                <a:blip r:embed="rId1"/>
+                <a:blip r:embed="rId2"/>
                 <a:stretch>
                   <a:fillRect l="-554" t="-1415" r="-499" b="-1369"/>
                 </a:stretch>
@@ -8677,8 +9758,8 @@
           </p:sp>
         </mc:Fallback>
       </mc:AlternateContent>
-      <mc:AlternateContent xmlns:mc="http://schemas.openxmlformats.org/markup-compatibility/2006">
-        <mc:Choice xmlns:a14="http://schemas.microsoft.com/office/drawing/2010/main" Requires="a14">
+      <mc:AlternateContent xmlns:mc="http://schemas.openxmlformats.org/markup-compatibility/2006" xmlns:a14="http://schemas.microsoft.com/office/drawing/2010/main">
+        <mc:Choice Requires="a14">
           <p:sp>
             <p:nvSpPr>
               <p:cNvPr id="43" name="Text Box 36"/>
@@ -8704,7 +9785,7 @@
               </a:ln>
               <a:extLst>
                 <a:ext uri="{909E8E84-426E-40DD-AFC4-6F175D3DCCD1}">
-                  <a14:hiddenFill xmlns:a14="http://schemas.microsoft.com/office/drawing/2010/main">
+                  <a14:hiddenFill>
                     <a:solidFill>
                       <a:srgbClr val="FFFFFF"/>
                     </a:solidFill>
@@ -8795,6 +9876,7 @@
                 </a:lvl9pPr>
               </a:lstStyle>
               <a:p>
+                <a:pPr/>
                 <a14:m>
                   <m:oMathPara xmlns:m="http://schemas.openxmlformats.org/officeDocument/2006/math">
                     <m:oMathParaPr>
@@ -8835,7 +9917,7 @@
             </p:txBody>
           </p:sp>
         </mc:Choice>
-        <mc:Fallback>
+        <mc:Fallback xmlns="">
           <p:sp>
             <p:nvSpPr>
               <p:cNvPr id="43" name="Text Box 36"/>
@@ -8853,7 +9935,7 @@
                 <a:avLst/>
               </a:prstGeom>
               <a:blipFill rotWithShape="1">
-                <a:blip r:embed="rId1"/>
+                <a:blip r:embed="rId2"/>
                 <a:stretch>
                   <a:fillRect l="-504" t="-1456" r="-481" b="-1328"/>
                 </a:stretch>
@@ -10280,8 +11362,8 @@
             </a:fontRef>
           </p:style>
         </p:cxnSp>
-        <mc:AlternateContent xmlns:mc="http://schemas.openxmlformats.org/markup-compatibility/2006">
-          <mc:Choice xmlns:a14="http://schemas.microsoft.com/office/drawing/2010/main" Requires="a14">
+        <mc:AlternateContent xmlns:mc="http://schemas.openxmlformats.org/markup-compatibility/2006" xmlns:a14="http://schemas.microsoft.com/office/drawing/2010/main">
+          <mc:Choice Requires="a14">
             <p:sp>
               <p:nvSpPr>
                 <p:cNvPr id="48" name="文本框 47"/>
@@ -10304,6 +11386,7 @@
                 </a:bodyPr>
                 <a:lstStyle/>
                 <a:p>
+                  <a:pPr/>
                   <a14:m>
                     <m:oMathPara xmlns:m="http://schemas.openxmlformats.org/officeDocument/2006/math">
                       <m:oMathParaPr>
@@ -10359,7 +11442,7 @@
               </p:txBody>
             </p:sp>
           </mc:Choice>
-          <mc:Fallback>
+          <mc:Fallback xmlns="">
             <p:sp>
               <p:nvSpPr>
                 <p:cNvPr id="48" name="文本框 47"/>
@@ -10377,7 +11460,7 @@
                   <a:avLst/>
                 </a:prstGeom>
                 <a:blipFill rotWithShape="1">
-                  <a:blip r:embed="rId1"/>
+                  <a:blip r:embed="rId2"/>
                 </a:blipFill>
               </p:spPr>
               <p:txBody>
@@ -10523,8 +11606,8 @@
             </a:p>
           </p:txBody>
         </p:sp>
-        <mc:AlternateContent xmlns:mc="http://schemas.openxmlformats.org/markup-compatibility/2006">
-          <mc:Choice xmlns:a14="http://schemas.microsoft.com/office/drawing/2010/main" Requires="a14">
+        <mc:AlternateContent xmlns:mc="http://schemas.openxmlformats.org/markup-compatibility/2006" xmlns:a14="http://schemas.microsoft.com/office/drawing/2010/main">
+          <mc:Choice Requires="a14">
             <p:sp>
               <p:nvSpPr>
                 <p:cNvPr id="59" name="文本框 58"/>
@@ -10547,6 +11630,7 @@
                 </a:bodyPr>
                 <a:lstStyle/>
                 <a:p>
+                  <a:pPr/>
                   <a14:m>
                     <m:oMathPara xmlns:m="http://schemas.openxmlformats.org/officeDocument/2006/math">
                       <m:oMathParaPr>
@@ -10602,7 +11686,7 @@
               </p:txBody>
             </p:sp>
           </mc:Choice>
-          <mc:Fallback>
+          <mc:Fallback xmlns="">
             <p:sp>
               <p:nvSpPr>
                 <p:cNvPr id="59" name="文本框 58"/>
@@ -10620,7 +11704,7 @@
                   <a:avLst/>
                 </a:prstGeom>
                 <a:blipFill rotWithShape="1">
-                  <a:blip r:embed="rId1"/>
+                  <a:blip r:embed="rId2"/>
                 </a:blipFill>
               </p:spPr>
               <p:txBody>
@@ -10638,8 +11722,8 @@
             </p:sp>
           </mc:Fallback>
         </mc:AlternateContent>
-        <mc:AlternateContent xmlns:mc="http://schemas.openxmlformats.org/markup-compatibility/2006">
-          <mc:Choice xmlns:a14="http://schemas.microsoft.com/office/drawing/2010/main" Requires="a14">
+        <mc:AlternateContent xmlns:mc="http://schemas.openxmlformats.org/markup-compatibility/2006" xmlns:a14="http://schemas.microsoft.com/office/drawing/2010/main">
+          <mc:Choice Requires="a14">
             <p:sp>
               <p:nvSpPr>
                 <p:cNvPr id="60" name="文本框 59"/>
@@ -10662,6 +11746,7 @@
                 </a:bodyPr>
                 <a:lstStyle/>
                 <a:p>
+                  <a:pPr/>
                   <a14:m>
                     <m:oMathPara xmlns:m="http://schemas.openxmlformats.org/officeDocument/2006/math">
                       <m:oMathParaPr>
@@ -10717,7 +11802,7 @@
               </p:txBody>
             </p:sp>
           </mc:Choice>
-          <mc:Fallback>
+          <mc:Fallback xmlns="">
             <p:sp>
               <p:nvSpPr>
                 <p:cNvPr id="60" name="文本框 59"/>
@@ -10735,7 +11820,7 @@
                   <a:avLst/>
                 </a:prstGeom>
                 <a:blipFill rotWithShape="1">
-                  <a:blip r:embed="rId2"/>
+                  <a:blip r:embed="rId3"/>
                 </a:blipFill>
               </p:spPr>
               <p:txBody>
@@ -14319,8 +15404,8 @@
             </a:fontRef>
           </p:style>
         </p:cxnSp>
-        <mc:AlternateContent xmlns:mc="http://schemas.openxmlformats.org/markup-compatibility/2006">
-          <mc:Choice xmlns:a14="http://schemas.microsoft.com/office/drawing/2010/main" Requires="a14">
+        <mc:AlternateContent xmlns:mc="http://schemas.openxmlformats.org/markup-compatibility/2006" xmlns:a14="http://schemas.microsoft.com/office/drawing/2010/main">
+          <mc:Choice Requires="a14">
             <p:sp>
               <p:nvSpPr>
                 <p:cNvPr id="18" name="文本框 17"/>
@@ -14343,6 +15428,7 @@
                 </a:bodyPr>
                 <a:lstStyle/>
                 <a:p>
+                  <a:pPr/>
                   <a14:m>
                     <m:oMathPara xmlns:m="http://schemas.openxmlformats.org/officeDocument/2006/math">
                       <m:oMathParaPr>
@@ -14421,7 +15507,7 @@
               </p:txBody>
             </p:sp>
           </mc:Choice>
-          <mc:Fallback>
+          <mc:Fallback xmlns="">
             <p:sp>
               <p:nvSpPr>
                 <p:cNvPr id="18" name="文本框 17"/>
@@ -14439,7 +15525,7 @@
                   <a:avLst/>
                 </a:prstGeom>
                 <a:blipFill rotWithShape="1">
-                  <a:blip r:embed="rId1"/>
+                  <a:blip r:embed="rId2"/>
                 </a:blipFill>
               </p:spPr>
               <p:txBody>
@@ -14457,8 +15543,8 @@
             </p:sp>
           </mc:Fallback>
         </mc:AlternateContent>
-        <mc:AlternateContent xmlns:mc="http://schemas.openxmlformats.org/markup-compatibility/2006">
-          <mc:Choice xmlns:a14="http://schemas.microsoft.com/office/drawing/2010/main" Requires="a14">
+        <mc:AlternateContent xmlns:mc="http://schemas.openxmlformats.org/markup-compatibility/2006" xmlns:a14="http://schemas.microsoft.com/office/drawing/2010/main">
+          <mc:Choice Requires="a14">
             <p:sp>
               <p:nvSpPr>
                 <p:cNvPr id="19" name="文本框 18"/>
@@ -14481,6 +15567,7 @@
                 </a:bodyPr>
                 <a:lstStyle/>
                 <a:p>
+                  <a:pPr/>
                   <a14:m>
                     <m:oMathPara xmlns:m="http://schemas.openxmlformats.org/officeDocument/2006/math">
                       <m:oMathParaPr>
@@ -14559,7 +15646,7 @@
               </p:txBody>
             </p:sp>
           </mc:Choice>
-          <mc:Fallback>
+          <mc:Fallback xmlns="">
             <p:sp>
               <p:nvSpPr>
                 <p:cNvPr id="19" name="文本框 18"/>
@@ -14577,7 +15664,7 @@
                   <a:avLst/>
                 </a:prstGeom>
                 <a:blipFill rotWithShape="1">
-                  <a:blip r:embed="rId2"/>
+                  <a:blip r:embed="rId3"/>
                 </a:blipFill>
               </p:spPr>
               <p:txBody>
@@ -14595,8 +15682,8 @@
             </p:sp>
           </mc:Fallback>
         </mc:AlternateContent>
-        <mc:AlternateContent xmlns:mc="http://schemas.openxmlformats.org/markup-compatibility/2006">
-          <mc:Choice xmlns:a14="http://schemas.microsoft.com/office/drawing/2010/main" Requires="a14">
+        <mc:AlternateContent xmlns:mc="http://schemas.openxmlformats.org/markup-compatibility/2006" xmlns:a14="http://schemas.microsoft.com/office/drawing/2010/main">
+          <mc:Choice Requires="a14">
             <p:sp>
               <p:nvSpPr>
                 <p:cNvPr id="20" name="文本框 19"/>
@@ -14619,6 +15706,7 @@
                 </a:bodyPr>
                 <a:lstStyle/>
                 <a:p>
+                  <a:pPr/>
                   <a14:m>
                     <m:oMathPara xmlns:m="http://schemas.openxmlformats.org/officeDocument/2006/math">
                       <m:oMathParaPr>
@@ -14755,7 +15843,7 @@
               </p:txBody>
             </p:sp>
           </mc:Choice>
-          <mc:Fallback>
+          <mc:Fallback xmlns="">
             <p:sp>
               <p:nvSpPr>
                 <p:cNvPr id="20" name="文本框 19"/>
@@ -14773,7 +15861,7 @@
                   <a:avLst/>
                 </a:prstGeom>
                 <a:blipFill rotWithShape="1">
-                  <a:blip r:embed="rId3"/>
+                  <a:blip r:embed="rId4"/>
                 </a:blipFill>
               </p:spPr>
               <p:txBody>
@@ -15257,8 +16345,8 @@
             </a:fontRef>
           </p:style>
         </p:cxnSp>
-        <mc:AlternateContent xmlns:mc="http://schemas.openxmlformats.org/markup-compatibility/2006">
-          <mc:Choice xmlns:a14="http://schemas.microsoft.com/office/drawing/2010/main" Requires="a14">
+        <mc:AlternateContent xmlns:mc="http://schemas.openxmlformats.org/markup-compatibility/2006" xmlns:a14="http://schemas.microsoft.com/office/drawing/2010/main">
+          <mc:Choice Requires="a14">
             <p:sp>
               <p:nvSpPr>
                 <p:cNvPr id="32" name="文本框 31"/>
@@ -15281,6 +16369,7 @@
                 </a:bodyPr>
                 <a:lstStyle/>
                 <a:p>
+                  <a:pPr/>
                   <a14:m>
                     <m:oMathPara xmlns:m="http://schemas.openxmlformats.org/officeDocument/2006/math">
                       <m:oMathParaPr>
@@ -15361,7 +16450,7 @@
               </p:txBody>
             </p:sp>
           </mc:Choice>
-          <mc:Fallback>
+          <mc:Fallback xmlns="">
             <p:sp>
               <p:nvSpPr>
                 <p:cNvPr id="32" name="文本框 31"/>
@@ -15379,7 +16468,7 @@
                   <a:avLst/>
                 </a:prstGeom>
                 <a:blipFill rotWithShape="1">
-                  <a:blip r:embed="rId1"/>
+                  <a:blip r:embed="rId2"/>
                 </a:blipFill>
               </p:spPr>
               <p:txBody>
@@ -15397,8 +16486,8 @@
             </p:sp>
           </mc:Fallback>
         </mc:AlternateContent>
-        <mc:AlternateContent xmlns:mc="http://schemas.openxmlformats.org/markup-compatibility/2006">
-          <mc:Choice xmlns:a14="http://schemas.microsoft.com/office/drawing/2010/main" Requires="a14">
+        <mc:AlternateContent xmlns:mc="http://schemas.openxmlformats.org/markup-compatibility/2006" xmlns:a14="http://schemas.microsoft.com/office/drawing/2010/main">
+          <mc:Choice Requires="a14">
             <p:sp>
               <p:nvSpPr>
                 <p:cNvPr id="33" name="文本框 32"/>
@@ -15421,6 +16510,7 @@
                 </a:bodyPr>
                 <a:lstStyle/>
                 <a:p>
+                  <a:pPr/>
                   <a14:m>
                     <m:oMathPara xmlns:m="http://schemas.openxmlformats.org/officeDocument/2006/math">
                       <m:oMathParaPr>
@@ -15448,7 +16538,7 @@
               </p:txBody>
             </p:sp>
           </mc:Choice>
-          <mc:Fallback>
+          <mc:Fallback xmlns="">
             <p:sp>
               <p:nvSpPr>
                 <p:cNvPr id="33" name="文本框 32"/>
@@ -15466,7 +16556,7 @@
                   <a:avLst/>
                 </a:prstGeom>
                 <a:blipFill rotWithShape="1">
-                  <a:blip r:embed="rId2"/>
+                  <a:blip r:embed="rId3"/>
                 </a:blipFill>
               </p:spPr>
               <p:txBody>
@@ -15484,8 +16574,8 @@
             </p:sp>
           </mc:Fallback>
         </mc:AlternateContent>
-        <mc:AlternateContent xmlns:mc="http://schemas.openxmlformats.org/markup-compatibility/2006">
-          <mc:Choice xmlns:a14="http://schemas.microsoft.com/office/drawing/2010/main" Requires="a14">
+        <mc:AlternateContent xmlns:mc="http://schemas.openxmlformats.org/markup-compatibility/2006" xmlns:a14="http://schemas.microsoft.com/office/drawing/2010/main">
+          <mc:Choice Requires="a14">
             <p:sp>
               <p:nvSpPr>
                 <p:cNvPr id="34" name="文本框 33"/>
@@ -15508,6 +16598,7 @@
                 </a:bodyPr>
                 <a:lstStyle/>
                 <a:p>
+                  <a:pPr/>
                   <a14:m>
                     <m:oMathPara xmlns:m="http://schemas.openxmlformats.org/officeDocument/2006/math">
                       <m:oMathParaPr>
@@ -15535,7 +16626,7 @@
               </p:txBody>
             </p:sp>
           </mc:Choice>
-          <mc:Fallback>
+          <mc:Fallback xmlns="">
             <p:sp>
               <p:nvSpPr>
                 <p:cNvPr id="34" name="文本框 33"/>
@@ -15553,7 +16644,7 @@
                   <a:avLst/>
                 </a:prstGeom>
                 <a:blipFill rotWithShape="1">
-                  <a:blip r:embed="rId3"/>
+                  <a:blip r:embed="rId4"/>
                 </a:blipFill>
               </p:spPr>
               <p:txBody>
@@ -15571,8 +16662,8 @@
             </p:sp>
           </mc:Fallback>
         </mc:AlternateContent>
-        <mc:AlternateContent xmlns:mc="http://schemas.openxmlformats.org/markup-compatibility/2006">
-          <mc:Choice xmlns:a14="http://schemas.microsoft.com/office/drawing/2010/main" Requires="a14">
+        <mc:AlternateContent xmlns:mc="http://schemas.openxmlformats.org/markup-compatibility/2006" xmlns:a14="http://schemas.microsoft.com/office/drawing/2010/main">
+          <mc:Choice Requires="a14">
             <p:sp>
               <p:nvSpPr>
                 <p:cNvPr id="35" name="文本框 34"/>
@@ -15595,6 +16686,7 @@
                 </a:bodyPr>
                 <a:lstStyle/>
                 <a:p>
+                  <a:pPr/>
                   <a14:m>
                     <m:oMathPara xmlns:m="http://schemas.openxmlformats.org/officeDocument/2006/math">
                       <m:oMathParaPr>
@@ -15625,7 +16717,7 @@
               </p:txBody>
             </p:sp>
           </mc:Choice>
-          <mc:Fallback>
+          <mc:Fallback xmlns="">
             <p:sp>
               <p:nvSpPr>
                 <p:cNvPr id="35" name="文本框 34"/>
@@ -15643,7 +16735,7 @@
                   <a:avLst/>
                 </a:prstGeom>
                 <a:blipFill rotWithShape="1">
-                  <a:blip r:embed="rId4"/>
+                  <a:blip r:embed="rId5"/>
                 </a:blipFill>
               </p:spPr>
               <p:txBody>
@@ -16102,8 +17194,8 @@
             </a:fontRef>
           </p:style>
         </p:cxnSp>
-        <mc:AlternateContent xmlns:mc="http://schemas.openxmlformats.org/markup-compatibility/2006">
-          <mc:Choice xmlns:a14="http://schemas.microsoft.com/office/drawing/2010/main" Requires="a14">
+        <mc:AlternateContent xmlns:mc="http://schemas.openxmlformats.org/markup-compatibility/2006" xmlns:a14="http://schemas.microsoft.com/office/drawing/2010/main">
+          <mc:Choice Requires="a14">
             <p:sp>
               <p:nvSpPr>
                 <p:cNvPr id="52" name="文本框 51"/>
@@ -16126,6 +17218,7 @@
                 </a:bodyPr>
                 <a:lstStyle/>
                 <a:p>
+                  <a:pPr/>
                   <a14:m>
                     <m:oMathPara xmlns:m="http://schemas.openxmlformats.org/officeDocument/2006/math">
                       <m:oMathParaPr>
@@ -16206,7 +17299,7 @@
               </p:txBody>
             </p:sp>
           </mc:Choice>
-          <mc:Fallback>
+          <mc:Fallback xmlns="">
             <p:sp>
               <p:nvSpPr>
                 <p:cNvPr id="52" name="文本框 51"/>
@@ -16224,7 +17317,7 @@
                   <a:avLst/>
                 </a:prstGeom>
                 <a:blipFill rotWithShape="1">
-                  <a:blip r:embed="rId1"/>
+                  <a:blip r:embed="rId2"/>
                 </a:blipFill>
               </p:spPr>
               <p:txBody>
@@ -16242,8 +17335,8 @@
             </p:sp>
           </mc:Fallback>
         </mc:AlternateContent>
-        <mc:AlternateContent xmlns:mc="http://schemas.openxmlformats.org/markup-compatibility/2006">
-          <mc:Choice xmlns:a14="http://schemas.microsoft.com/office/drawing/2010/main" Requires="a14">
+        <mc:AlternateContent xmlns:mc="http://schemas.openxmlformats.org/markup-compatibility/2006" xmlns:a14="http://schemas.microsoft.com/office/drawing/2010/main">
+          <mc:Choice Requires="a14">
             <p:sp>
               <p:nvSpPr>
                 <p:cNvPr id="53" name="文本框 52"/>
@@ -16266,6 +17359,7 @@
                 </a:bodyPr>
                 <a:lstStyle/>
                 <a:p>
+                  <a:pPr/>
                   <a14:m>
                     <m:oMathPara xmlns:m="http://schemas.openxmlformats.org/officeDocument/2006/math">
                       <m:oMathParaPr>
@@ -16293,7 +17387,7 @@
               </p:txBody>
             </p:sp>
           </mc:Choice>
-          <mc:Fallback>
+          <mc:Fallback xmlns="">
             <p:sp>
               <p:nvSpPr>
                 <p:cNvPr id="53" name="文本框 52"/>
@@ -16311,7 +17405,7 @@
                   <a:avLst/>
                 </a:prstGeom>
                 <a:blipFill rotWithShape="1">
-                  <a:blip r:embed="rId2"/>
+                  <a:blip r:embed="rId3"/>
                 </a:blipFill>
               </p:spPr>
               <p:txBody>
@@ -16329,8 +17423,8 @@
             </p:sp>
           </mc:Fallback>
         </mc:AlternateContent>
-        <mc:AlternateContent xmlns:mc="http://schemas.openxmlformats.org/markup-compatibility/2006">
-          <mc:Choice xmlns:a14="http://schemas.microsoft.com/office/drawing/2010/main" Requires="a14">
+        <mc:AlternateContent xmlns:mc="http://schemas.openxmlformats.org/markup-compatibility/2006" xmlns:a14="http://schemas.microsoft.com/office/drawing/2010/main">
+          <mc:Choice Requires="a14">
             <p:sp>
               <p:nvSpPr>
                 <p:cNvPr id="54" name="文本框 53"/>
@@ -16353,6 +17447,7 @@
                 </a:bodyPr>
                 <a:lstStyle/>
                 <a:p>
+                  <a:pPr/>
                   <a14:m>
                     <m:oMathPara xmlns:m="http://schemas.openxmlformats.org/officeDocument/2006/math">
                       <m:oMathParaPr>
@@ -16380,7 +17475,7 @@
               </p:txBody>
             </p:sp>
           </mc:Choice>
-          <mc:Fallback>
+          <mc:Fallback xmlns="">
             <p:sp>
               <p:nvSpPr>
                 <p:cNvPr id="54" name="文本框 53"/>
@@ -16398,7 +17493,7 @@
                   <a:avLst/>
                 </a:prstGeom>
                 <a:blipFill rotWithShape="1">
-                  <a:blip r:embed="rId3"/>
+                  <a:blip r:embed="rId4"/>
                 </a:blipFill>
               </p:spPr>
               <p:txBody>
@@ -16416,8 +17511,8 @@
             </p:sp>
           </mc:Fallback>
         </mc:AlternateContent>
-        <mc:AlternateContent xmlns:mc="http://schemas.openxmlformats.org/markup-compatibility/2006">
-          <mc:Choice xmlns:a14="http://schemas.microsoft.com/office/drawing/2010/main" Requires="a14">
+        <mc:AlternateContent xmlns:mc="http://schemas.openxmlformats.org/markup-compatibility/2006" xmlns:a14="http://schemas.microsoft.com/office/drawing/2010/main">
+          <mc:Choice Requires="a14">
             <p:sp>
               <p:nvSpPr>
                 <p:cNvPr id="55" name="文本框 54"/>
@@ -16440,6 +17535,7 @@
                 </a:bodyPr>
                 <a:lstStyle/>
                 <a:p>
+                  <a:pPr/>
                   <a14:m>
                     <m:oMathPara xmlns:m="http://schemas.openxmlformats.org/officeDocument/2006/math">
                       <m:oMathParaPr>
@@ -16470,7 +17566,7 @@
               </p:txBody>
             </p:sp>
           </mc:Choice>
-          <mc:Fallback>
+          <mc:Fallback xmlns="">
             <p:sp>
               <p:nvSpPr>
                 <p:cNvPr id="55" name="文本框 54"/>
@@ -16488,7 +17584,7 @@
                   <a:avLst/>
                 </a:prstGeom>
                 <a:blipFill rotWithShape="1">
-                  <a:blip r:embed="rId4"/>
+                  <a:blip r:embed="rId5"/>
                 </a:blipFill>
               </p:spPr>
               <p:txBody>
@@ -16524,7 +17620,14 @@
         <p:cNvGrpSpPr/>
         <p:nvPr/>
       </p:nvGrpSpPr>
-      <p:grpSpPr/>
+      <p:grpSpPr>
+        <a:xfrm>
+          <a:off x="0" y="0"/>
+          <a:ext cx="0" cy="0"/>
+          <a:chOff x="0" y="0"/>
+          <a:chExt cx="0" cy="0"/>
+        </a:xfrm>
+      </p:grpSpPr>
       <p:sp>
         <p:nvSpPr>
           <p:cNvPr id="2" name="标题 1"/>
@@ -16543,6 +17646,7 @@
         </p:spPr>
         <p:txBody>
           <a:bodyPr/>
+          <a:lstStyle/>
           <a:p>
             <a:r>
               <a:rPr lang="zh-CN" altLang="en-US"/>
@@ -16552,7 +17656,6 @@
               <a:rPr lang="en-US" altLang="zh-CN"/>
               <a:t>HTML</a:t>
             </a:r>
-            <a:endParaRPr lang="en-US" altLang="zh-CN"/>
           </a:p>
         </p:txBody>
       </p:sp>
@@ -16600,6 +17703,7 @@
         </p:style>
         <p:txBody>
           <a:bodyPr rtlCol="0" anchor="ctr"/>
+          <a:lstStyle/>
           <a:p>
             <a:pPr algn="ctr"/>
             <a:endParaRPr lang="zh-CN" altLang="en-US"/>
@@ -16651,6 +17755,7 @@
           <a:bodyPr vertOverflow="overflow" horzOverflow="overflow" vert="horz" wrap="square" numCol="1" spcCol="0" rtlCol="0" fromWordArt="0" anchor="ctr" anchorCtr="0" forceAA="0" compatLnSpc="1">
             <a:noAutofit/>
           </a:bodyPr>
+          <a:lstStyle/>
           <a:p>
             <a:pPr lvl="0" algn="ctr">
               <a:buClrTx/>
@@ -16708,6 +17813,7 @@
           <a:bodyPr vertOverflow="overflow" horzOverflow="overflow" vert="horz" wrap="square" numCol="1" spcCol="0" rtlCol="0" fromWordArt="0" anchor="ctr" anchorCtr="0" forceAA="0" compatLnSpc="1">
             <a:noAutofit/>
           </a:bodyPr>
+          <a:lstStyle/>
           <a:p>
             <a:pPr lvl="0" algn="ctr">
               <a:buClrTx/>
@@ -16766,6 +17872,7 @@
           <a:bodyPr vertOverflow="overflow" horzOverflow="overflow" vert="horz" wrap="square" numCol="1" spcCol="0" rtlCol="0" fromWordArt="0" anchor="ctr" anchorCtr="0" forceAA="0" compatLnSpc="1">
             <a:noAutofit/>
           </a:bodyPr>
+          <a:lstStyle/>
           <a:p>
             <a:pPr lvl="0" algn="ctr">
               <a:buClrTx/>
@@ -16824,6 +17931,7 @@
           <a:bodyPr vertOverflow="overflow" horzOverflow="overflow" vert="horz" wrap="square" numCol="1" spcCol="0" rtlCol="0" fromWordArt="0" anchor="ctr" anchorCtr="0" forceAA="0" compatLnSpc="1">
             <a:noAutofit/>
           </a:bodyPr>
+          <a:lstStyle/>
           <a:p>
             <a:pPr lvl="0" algn="ctr">
               <a:buClrTx/>
@@ -16882,6 +17990,7 @@
           <a:bodyPr vertOverflow="overflow" horzOverflow="overflow" vert="horz" wrap="square" numCol="1" spcCol="0" rtlCol="0" fromWordArt="0" anchor="ctr" anchorCtr="0" forceAA="0" compatLnSpc="1">
             <a:noAutofit/>
           </a:bodyPr>
+          <a:lstStyle/>
           <a:p>
             <a:pPr lvl="0" algn="ctr">
               <a:buClrTx/>
@@ -16939,6 +18048,7 @@
           <a:bodyPr vertOverflow="overflow" horzOverflow="overflow" vert="horz" wrap="square" numCol="1" spcCol="0" rtlCol="0" fromWordArt="0" anchor="ctr" anchorCtr="0" forceAA="0" compatLnSpc="1">
             <a:noAutofit/>
           </a:bodyPr>
+          <a:lstStyle/>
           <a:p>
             <a:pPr lvl="0" algn="ctr">
               <a:buClrTx/>
@@ -16997,6 +18107,7 @@
           <a:bodyPr vertOverflow="overflow" horzOverflow="overflow" vert="horz" wrap="square" numCol="1" spcCol="0" rtlCol="0" fromWordArt="0" anchor="ctr" anchorCtr="0" forceAA="0" compatLnSpc="1">
             <a:noAutofit/>
           </a:bodyPr>
+          <a:lstStyle/>
           <a:p>
             <a:pPr lvl="0" algn="ctr">
               <a:buClrTx/>
@@ -17055,6 +18166,7 @@
           <a:bodyPr vertOverflow="overflow" horzOverflow="overflow" vert="horz" wrap="square" numCol="1" spcCol="0" rtlCol="0" fromWordArt="0" anchor="ctr" anchorCtr="0" forceAA="0" compatLnSpc="1">
             <a:noAutofit/>
           </a:bodyPr>
+          <a:lstStyle/>
           <a:p>
             <a:pPr lvl="0" algn="ctr">
               <a:buClrTx/>
@@ -17120,6 +18232,7 @@
           </p:style>
           <p:txBody>
             <a:bodyPr/>
+            <a:lstStyle/>
             <a:p>
               <a:endParaRPr lang="zh-CN" altLang="en-US"/>
             </a:p>
@@ -17164,6 +18277,7 @@
           </p:style>
           <p:txBody>
             <a:bodyPr/>
+            <a:lstStyle/>
             <a:p>
               <a:endParaRPr lang="zh-CN" altLang="en-US"/>
             </a:p>
@@ -17179,7 +18293,7 @@
 </file>
 
 <file path=ppt/tags/tag1.xml><?xml version="1.0" encoding="utf-8"?>
-<p:tagLst xmlns:p="http://schemas.openxmlformats.org/presentationml/2006/main">
+<p:tagLst xmlns:a="http://schemas.openxmlformats.org/drawingml/2006/main" xmlns:r="http://schemas.openxmlformats.org/officeDocument/2006/relationships" xmlns:p="http://schemas.openxmlformats.org/presentationml/2006/main">
   <p:tag name="COMMONDATA" val="eyJoZGlkIjoiMWNkOTg5MjZlZjEzNTdlYjk5YTg3ZTczZTZlMGJkOGMifQ=="/>
 </p:tagLst>
 </file>
@@ -17454,6 +18568,7 @@
       </a:style>
     </a:lnDef>
   </a:objectDefaults>
+  <a:extraClrSchemeLst/>
   <a:extLst>
     <a:ext uri="{05A4C25C-085E-4340-85A3-A5531E510DB2}">
       <thm15:themeFamily xmlns:thm15="http://schemas.microsoft.com/office/thememl/2012/main" name="Office Theme" id="{62F939B6-93AF-4DB8-9C6B-D6C7DFDC589F}" vid="{4A3C46E8-61CC-4603-A589-7422A47A8E4A}"/>

--- a/PPT/optic.pptx
+++ b/PPT/optic.pptx
@@ -16,11 +16,12 @@
     <p:sldId id="265" r:id="rId10"/>
     <p:sldId id="264" r:id="rId11"/>
     <p:sldId id="266" r:id="rId12"/>
+    <p:sldId id="267" r:id="rId13"/>
   </p:sldIdLst>
   <p:sldSz cx="12192000" cy="6858000"/>
   <p:notesSz cx="6858000" cy="9144000"/>
   <p:custDataLst>
-    <p:tags r:id="rId13"/>
+    <p:tags r:id="rId14"/>
   </p:custDataLst>
   <p:defaultTextStyle>
     <a:defPPr>
@@ -254,7 +255,7 @@
           <a:p>
             <a:fld id="{D997B5FA-0921-464F-AAE1-844C04324D75}" type="datetimeFigureOut">
               <a:rPr lang="zh-CN" altLang="en-US" smtClean="0"/>
-              <a:t>2026-07-24</a:t>
+              <a:t>2026-09-29</a:t>
             </a:fld>
             <a:endParaRPr lang="zh-CN" altLang="en-US"/>
           </a:p>
@@ -417,7 +418,7 @@
           <a:p>
             <a:fld id="{D997B5FA-0921-464F-AAE1-844C04324D75}" type="datetimeFigureOut">
               <a:rPr lang="zh-CN" altLang="en-US" smtClean="0"/>
-              <a:t>2026-07-24</a:t>
+              <a:t>2026-09-29</a:t>
             </a:fld>
             <a:endParaRPr lang="zh-CN" altLang="en-US"/>
           </a:p>
@@ -590,7 +591,7 @@
           <a:p>
             <a:fld id="{D997B5FA-0921-464F-AAE1-844C04324D75}" type="datetimeFigureOut">
               <a:rPr lang="zh-CN" altLang="en-US" smtClean="0"/>
-              <a:t>2026-07-24</a:t>
+              <a:t>2026-09-29</a:t>
             </a:fld>
             <a:endParaRPr lang="zh-CN" altLang="en-US"/>
           </a:p>
@@ -753,7 +754,7 @@
           <a:p>
             <a:fld id="{D997B5FA-0921-464F-AAE1-844C04324D75}" type="datetimeFigureOut">
               <a:rPr lang="zh-CN" altLang="en-US" smtClean="0"/>
-              <a:t>2026-07-24</a:t>
+              <a:t>2026-09-29</a:t>
             </a:fld>
             <a:endParaRPr lang="zh-CN" altLang="en-US"/>
           </a:p>
@@ -993,7 +994,7 @@
           <a:p>
             <a:fld id="{D997B5FA-0921-464F-AAE1-844C04324D75}" type="datetimeFigureOut">
               <a:rPr lang="zh-CN" altLang="en-US" smtClean="0"/>
-              <a:t>2026-07-24</a:t>
+              <a:t>2026-09-29</a:t>
             </a:fld>
             <a:endParaRPr lang="zh-CN" altLang="en-US"/>
           </a:p>
@@ -1217,7 +1218,7 @@
           <a:p>
             <a:fld id="{D997B5FA-0921-464F-AAE1-844C04324D75}" type="datetimeFigureOut">
               <a:rPr lang="zh-CN" altLang="en-US" smtClean="0"/>
-              <a:t>2026-07-24</a:t>
+              <a:t>2026-09-29</a:t>
             </a:fld>
             <a:endParaRPr lang="zh-CN" altLang="en-US"/>
           </a:p>
@@ -1576,7 +1577,7 @@
           <a:p>
             <a:fld id="{D997B5FA-0921-464F-AAE1-844C04324D75}" type="datetimeFigureOut">
               <a:rPr lang="zh-CN" altLang="en-US" smtClean="0"/>
-              <a:t>2026-07-24</a:t>
+              <a:t>2026-09-29</a:t>
             </a:fld>
             <a:endParaRPr lang="zh-CN" altLang="en-US"/>
           </a:p>
@@ -1688,7 +1689,7 @@
           <a:p>
             <a:fld id="{D997B5FA-0921-464F-AAE1-844C04324D75}" type="datetimeFigureOut">
               <a:rPr lang="zh-CN" altLang="en-US" smtClean="0"/>
-              <a:t>2026-07-24</a:t>
+              <a:t>2026-09-29</a:t>
             </a:fld>
             <a:endParaRPr lang="zh-CN" altLang="en-US"/>
           </a:p>
@@ -1778,7 +1779,7 @@
           <a:p>
             <a:fld id="{D997B5FA-0921-464F-AAE1-844C04324D75}" type="datetimeFigureOut">
               <a:rPr lang="zh-CN" altLang="en-US" smtClean="0"/>
-              <a:t>2026-07-24</a:t>
+              <a:t>2026-09-29</a:t>
             </a:fld>
             <a:endParaRPr lang="zh-CN" altLang="en-US"/>
           </a:p>
@@ -2048,7 +2049,7 @@
           <a:p>
             <a:fld id="{D997B5FA-0921-464F-AAE1-844C04324D75}" type="datetimeFigureOut">
               <a:rPr lang="zh-CN" altLang="en-US" smtClean="0"/>
-              <a:t>2026-07-24</a:t>
+              <a:t>2026-09-29</a:t>
             </a:fld>
             <a:endParaRPr lang="zh-CN" altLang="en-US"/>
           </a:p>
@@ -2295,7 +2296,7 @@
           <a:p>
             <a:fld id="{D997B5FA-0921-464F-AAE1-844C04324D75}" type="datetimeFigureOut">
               <a:rPr lang="zh-CN" altLang="en-US" smtClean="0"/>
-              <a:t>2026-07-24</a:t>
+              <a:t>2026-09-29</a:t>
             </a:fld>
             <a:endParaRPr lang="zh-CN" altLang="en-US"/>
           </a:p>
@@ -2501,7 +2502,7 @@
           <a:p>
             <a:fld id="{D997B5FA-0921-464F-AAE1-844C04324D75}" type="datetimeFigureOut">
               <a:rPr lang="zh-CN" altLang="en-US" smtClean="0"/>
-              <a:t>2026-07-24</a:t>
+              <a:t>2026-09-29</a:t>
             </a:fld>
             <a:endParaRPr lang="zh-CN" altLang="en-US"/>
           </a:p>
@@ -3874,10 +3875,7 @@
                 <a:pPr/>
                 <a14:m>
                   <m:oMathPara xmlns:m="http://schemas.openxmlformats.org/officeDocument/2006/math">
-                    <m:oMathParaPr>
-                      <m:jc m:val="centerGroup"/>
-                    </m:oMathParaPr>
-                    <m:oMath xmlns:m="http://schemas.openxmlformats.org/officeDocument/2006/math">
+                    <m:oMath>
                       <m:r>
                         <m:rPr>
                           <m:sty m:val="p"/>
@@ -3974,10 +3972,7 @@
                 <a:pPr/>
                 <a14:m>
                   <m:oMathPara xmlns:m="http://schemas.openxmlformats.org/officeDocument/2006/math">
-                    <m:oMathParaPr>
-                      <m:jc m:val="centerGroup"/>
-                    </m:oMathParaPr>
-                    <m:oMath xmlns:m="http://schemas.openxmlformats.org/officeDocument/2006/math">
+                    <m:oMath>
                       <m:r>
                         <m:rPr>
                           <m:sty m:val="p"/>
@@ -4247,10 +4242,7 @@
                 <a:pPr/>
                 <a14:m>
                   <m:oMathPara xmlns:m="http://schemas.openxmlformats.org/officeDocument/2006/math">
-                    <m:oMathParaPr>
-                      <m:jc m:val="centerGroup"/>
-                    </m:oMathParaPr>
-                    <m:oMath xmlns:m="http://schemas.openxmlformats.org/officeDocument/2006/math">
+                    <m:oMath>
                       <m:r>
                         <m:rPr>
                           <m:sty m:val="p"/>
@@ -4396,10 +4388,7 @@
                 <a:pPr/>
                 <a14:m>
                   <m:oMathPara xmlns:m="http://schemas.openxmlformats.org/officeDocument/2006/math">
-                    <m:oMathParaPr>
-                      <m:jc m:val="centerGroup"/>
-                    </m:oMathParaPr>
-                    <m:oMath xmlns:m="http://schemas.openxmlformats.org/officeDocument/2006/math">
+                    <m:oMath>
                       <m:r>
                         <m:rPr>
                           <m:sty m:val="p"/>
@@ -4545,10 +4534,7 @@
                 <a:pPr/>
                 <a14:m>
                   <m:oMathPara xmlns:m="http://schemas.openxmlformats.org/officeDocument/2006/math">
-                    <m:oMathParaPr>
-                      <m:jc m:val="centerGroup"/>
-                    </m:oMathParaPr>
-                    <m:oMath xmlns:m="http://schemas.openxmlformats.org/officeDocument/2006/math">
+                    <m:oMath>
                       <m:r>
                         <a:rPr lang="en-US" altLang="zh-CN" b="0" i="1" smtClean="0">
                           <a:solidFill>
@@ -5083,10 +5069,7 @@
                   <a:pPr/>
                   <a14:m>
                     <m:oMathPara xmlns:m="http://schemas.openxmlformats.org/officeDocument/2006/math">
-                      <m:oMathParaPr>
-                        <m:jc m:val="centerGroup"/>
-                      </m:oMathParaPr>
-                      <m:oMath xmlns:m="http://schemas.openxmlformats.org/officeDocument/2006/math">
+                      <m:oMath>
                         <m:r>
                           <a:rPr lang="en-US" altLang="zh-CN" b="0" i="1" smtClean="0">
                             <a:latin typeface="Cambria Math" panose="02040503050406030204" pitchFamily="18" charset="0"/>
@@ -5196,13 +5179,7 @@
   <p:cSld>
     <p:spTree>
       <p:nvGrpSpPr>
-        <p:cNvPr id="1" name="">
-          <a:extLst>
-            <a:ext uri="{FF2B5EF4-FFF2-40B4-BE49-F238E27FC236}">
-              <a16:creationId xmlns:a16="http://schemas.microsoft.com/office/drawing/2014/main" id="{BC78EDEA-2D77-A194-BA1B-6B32B9FC5038}"/>
-            </a:ext>
-          </a:extLst>
-        </p:cNvPr>
+        <p:cNvPr id="1" name=""/>
         <p:cNvGrpSpPr/>
         <p:nvPr/>
       </p:nvGrpSpPr>
@@ -5216,19 +5193,13 @@
       </p:grpSpPr>
       <p:grpSp>
         <p:nvGrpSpPr>
-          <p:cNvPr id="31" name="组合 30">
-            <a:extLst>
-              <a:ext uri="{FF2B5EF4-FFF2-40B4-BE49-F238E27FC236}">
-                <a16:creationId xmlns:a16="http://schemas.microsoft.com/office/drawing/2014/main" id="{41C19AF0-3824-819B-478D-D91446356DD0}"/>
-              </a:ext>
-            </a:extLst>
-          </p:cNvPr>
+          <p:cNvPr id="31" name="组合 30"/>
           <p:cNvGrpSpPr/>
           <p:nvPr/>
         </p:nvGrpSpPr>
         <p:grpSpPr>
           <a:xfrm>
-            <a:off x="3821151" y="1149420"/>
+            <a:off x="347659" y="216610"/>
             <a:ext cx="3783320" cy="3877000"/>
             <a:chOff x="3821151" y="1149420"/>
             <a:chExt cx="3783320" cy="3877000"/>
@@ -5236,13 +5207,7 @@
         </p:grpSpPr>
         <p:sp>
           <p:nvSpPr>
-            <p:cNvPr id="30" name="矩形 29">
-              <a:extLst>
-                <a:ext uri="{FF2B5EF4-FFF2-40B4-BE49-F238E27FC236}">
-                  <a16:creationId xmlns:a16="http://schemas.microsoft.com/office/drawing/2014/main" id="{358C7E71-1909-F999-1AC9-7584F182D746}"/>
-                </a:ext>
-              </a:extLst>
-            </p:cNvPr>
+            <p:cNvPr id="30" name="矩形 29"/>
             <p:cNvSpPr/>
             <p:nvPr/>
           </p:nvSpPr>
@@ -5291,13 +5256,7 @@
         </p:sp>
         <p:cxnSp>
           <p:nvCxnSpPr>
-            <p:cNvPr id="3" name="直接箭头连接符 2">
-              <a:extLst>
-                <a:ext uri="{FF2B5EF4-FFF2-40B4-BE49-F238E27FC236}">
-                  <a16:creationId xmlns:a16="http://schemas.microsoft.com/office/drawing/2014/main" id="{9BA9FA87-70D4-6A7B-C783-4EC6F58284F8}"/>
-                </a:ext>
-              </a:extLst>
-            </p:cNvPr>
+            <p:cNvPr id="3" name="直接箭头连接符 2"/>
             <p:cNvCxnSpPr/>
             <p:nvPr/>
           </p:nvCxnSpPr>
@@ -5333,16 +5292,8 @@
         </p:cxnSp>
         <p:cxnSp>
           <p:nvCxnSpPr>
-            <p:cNvPr id="4" name="直接箭头连接符 3">
-              <a:extLst>
-                <a:ext uri="{FF2B5EF4-FFF2-40B4-BE49-F238E27FC236}">
-                  <a16:creationId xmlns:a16="http://schemas.microsoft.com/office/drawing/2014/main" id="{EC7E2362-C843-068A-CABA-5CE86B28C5CF}"/>
-                </a:ext>
-              </a:extLst>
-            </p:cNvPr>
-            <p:cNvCxnSpPr>
-              <a:cxnSpLocks/>
-            </p:cNvCxnSpPr>
+            <p:cNvPr id="4" name="直接箭头连接符 3"/>
+            <p:cNvCxnSpPr/>
             <p:nvPr/>
           </p:nvCxnSpPr>
           <p:spPr>
@@ -5375,17 +5326,11 @@
             </a:fontRef>
           </p:style>
         </p:cxnSp>
-        <mc:AlternateContent xmlns:mc="http://schemas.openxmlformats.org/markup-compatibility/2006">
-          <mc:Choice xmlns:a14="http://schemas.microsoft.com/office/drawing/2010/main" Requires="a14">
+        <mc:AlternateContent xmlns:mc="http://schemas.openxmlformats.org/markup-compatibility/2006" xmlns:a14="http://schemas.microsoft.com/office/drawing/2010/main">
+          <mc:Choice Requires="a14">
             <p:sp>
               <p:nvSpPr>
-                <p:cNvPr id="5" name="文本框 4">
-                  <a:extLst>
-                    <a:ext uri="{FF2B5EF4-FFF2-40B4-BE49-F238E27FC236}">
-                      <a16:creationId xmlns:a16="http://schemas.microsoft.com/office/drawing/2014/main" id="{6B6963A3-51D0-3573-FE7B-4910DAC73BFA}"/>
-                    </a:ext>
-                  </a:extLst>
-                </p:cNvPr>
+                <p:cNvPr id="5" name="文本框 4"/>
                 <p:cNvSpPr txBox="1"/>
                 <p:nvPr/>
               </p:nvSpPr>
@@ -5405,12 +5350,10 @@
                 </a:bodyPr>
                 <a:lstStyle/>
                 <a:p>
+                  <a:pPr/>
                   <a14:m>
                     <m:oMathPara xmlns:m="http://schemas.openxmlformats.org/officeDocument/2006/math">
-                      <m:oMathParaPr>
-                        <m:jc m:val="centerGroup"/>
-                      </m:oMathParaPr>
-                      <m:oMath xmlns:m="http://schemas.openxmlformats.org/officeDocument/2006/math">
+                      <m:oMath>
                         <m:r>
                           <a:rPr lang="en-US" altLang="zh-CN" b="0" i="1" smtClean="0">
                             <a:latin typeface="Cambria Math" panose="02040503050406030204" pitchFamily="18" charset="0"/>
@@ -5425,16 +5368,10 @@
               </p:txBody>
             </p:sp>
           </mc:Choice>
-          <mc:Fallback>
+          <mc:Fallback xmlns="">
             <p:sp>
               <p:nvSpPr>
-                <p:cNvPr id="5" name="文本框 4">
-                  <a:extLst>
-                    <a:ext uri="{FF2B5EF4-FFF2-40B4-BE49-F238E27FC236}">
-                      <a16:creationId xmlns:a16="http://schemas.microsoft.com/office/drawing/2014/main" id="{6B6963A3-51D0-3573-FE7B-4910DAC73BFA}"/>
-                    </a:ext>
-                  </a:extLst>
-                </p:cNvPr>
+                <p:cNvPr id="5" name="文本框 4"/>
                 <p:cNvSpPr txBox="1">
                   <a:spLocks noRot="1" noChangeAspect="1" noMove="1" noResize="1" noEditPoints="1" noAdjustHandles="1" noChangeArrowheads="1" noChangeShapeType="1" noTextEdit="1"/>
                 </p:cNvSpPr>
@@ -5448,11 +5385,8 @@
                 <a:prstGeom prst="rect">
                   <a:avLst/>
                 </a:prstGeom>
-                <a:blipFill>
+                <a:blipFill rotWithShape="1">
                   <a:blip r:embed="rId2"/>
-                  <a:stretch>
-                    <a:fillRect l="-20000" r="-13333"/>
-                  </a:stretch>
                 </a:blipFill>
               </p:spPr>
               <p:txBody>
@@ -5470,17 +5404,11 @@
             </p:sp>
           </mc:Fallback>
         </mc:AlternateContent>
-        <mc:AlternateContent xmlns:mc="http://schemas.openxmlformats.org/markup-compatibility/2006">
-          <mc:Choice xmlns:a14="http://schemas.microsoft.com/office/drawing/2010/main" Requires="a14">
+        <mc:AlternateContent xmlns:mc="http://schemas.openxmlformats.org/markup-compatibility/2006" xmlns:a14="http://schemas.microsoft.com/office/drawing/2010/main">
+          <mc:Choice Requires="a14">
             <p:sp>
               <p:nvSpPr>
-                <p:cNvPr id="10" name="文本框 9">
-                  <a:extLst>
-                    <a:ext uri="{FF2B5EF4-FFF2-40B4-BE49-F238E27FC236}">
-                      <a16:creationId xmlns:a16="http://schemas.microsoft.com/office/drawing/2014/main" id="{94062454-4A2C-0789-D96F-146E4D368008}"/>
-                    </a:ext>
-                  </a:extLst>
-                </p:cNvPr>
+                <p:cNvPr id="10" name="文本框 9"/>
                 <p:cNvSpPr txBox="1"/>
                 <p:nvPr/>
               </p:nvSpPr>
@@ -5500,12 +5428,10 @@
                 </a:bodyPr>
                 <a:lstStyle/>
                 <a:p>
+                  <a:pPr/>
                   <a14:m>
                     <m:oMathPara xmlns:m="http://schemas.openxmlformats.org/officeDocument/2006/math">
-                      <m:oMathParaPr>
-                        <m:jc m:val="centerGroup"/>
-                      </m:oMathParaPr>
-                      <m:oMath xmlns:m="http://schemas.openxmlformats.org/officeDocument/2006/math">
+                      <m:oMath>
                         <m:r>
                           <a:rPr lang="en-US" altLang="zh-CN" b="0" i="1" smtClean="0">
                             <a:latin typeface="Cambria Math" panose="02040503050406030204" pitchFamily="18" charset="0"/>
@@ -5520,16 +5446,10 @@
               </p:txBody>
             </p:sp>
           </mc:Choice>
-          <mc:Fallback>
+          <mc:Fallback xmlns="">
             <p:sp>
               <p:nvSpPr>
-                <p:cNvPr id="10" name="文本框 9">
-                  <a:extLst>
-                    <a:ext uri="{FF2B5EF4-FFF2-40B4-BE49-F238E27FC236}">
-                      <a16:creationId xmlns:a16="http://schemas.microsoft.com/office/drawing/2014/main" id="{94062454-4A2C-0789-D96F-146E4D368008}"/>
-                    </a:ext>
-                  </a:extLst>
-                </p:cNvPr>
+                <p:cNvPr id="10" name="文本框 9"/>
                 <p:cNvSpPr txBox="1">
                   <a:spLocks noRot="1" noChangeAspect="1" noMove="1" noResize="1" noEditPoints="1" noAdjustHandles="1" noChangeArrowheads="1" noChangeShapeType="1" noTextEdit="1"/>
                 </p:cNvSpPr>
@@ -5543,11 +5463,8 @@
                 <a:prstGeom prst="rect">
                   <a:avLst/>
                 </a:prstGeom>
-                <a:blipFill>
+                <a:blipFill rotWithShape="1">
                   <a:blip r:embed="rId3"/>
-                  <a:stretch>
-                    <a:fillRect l="-32258" r="-25806" b="-26667"/>
-                  </a:stretch>
                 </a:blipFill>
               </p:spPr>
               <p:txBody>
@@ -5565,17 +5482,11 @@
             </p:sp>
           </mc:Fallback>
         </mc:AlternateContent>
-        <mc:AlternateContent xmlns:mc="http://schemas.openxmlformats.org/markup-compatibility/2006">
-          <mc:Choice xmlns:a14="http://schemas.microsoft.com/office/drawing/2010/main" Requires="a14">
+        <mc:AlternateContent xmlns:mc="http://schemas.openxmlformats.org/markup-compatibility/2006" xmlns:a14="http://schemas.microsoft.com/office/drawing/2010/main">
+          <mc:Choice Requires="a14">
             <p:sp>
               <p:nvSpPr>
-                <p:cNvPr id="11" name="文本框 10">
-                  <a:extLst>
-                    <a:ext uri="{FF2B5EF4-FFF2-40B4-BE49-F238E27FC236}">
-                      <a16:creationId xmlns:a16="http://schemas.microsoft.com/office/drawing/2014/main" id="{9396881F-A803-C1A9-15A9-AE9F6E690FB9}"/>
-                    </a:ext>
-                  </a:extLst>
-                </p:cNvPr>
+                <p:cNvPr id="11" name="文本框 10"/>
                 <p:cNvSpPr txBox="1"/>
                 <p:nvPr/>
               </p:nvSpPr>
@@ -5595,12 +5506,10 @@
                 </a:bodyPr>
                 <a:lstStyle/>
                 <a:p>
+                  <a:pPr/>
                   <a14:m>
                     <m:oMathPara xmlns:m="http://schemas.openxmlformats.org/officeDocument/2006/math">
-                      <m:oMathParaPr>
-                        <m:jc m:val="centerGroup"/>
-                      </m:oMathParaPr>
-                      <m:oMath xmlns:m="http://schemas.openxmlformats.org/officeDocument/2006/math">
+                      <m:oMath>
                         <m:r>
                           <a:rPr lang="en-US" altLang="zh-CN" b="0" i="1" smtClean="0">
                             <a:latin typeface="Cambria Math" panose="02040503050406030204" pitchFamily="18" charset="0"/>
@@ -5615,16 +5524,10 @@
               </p:txBody>
             </p:sp>
           </mc:Choice>
-          <mc:Fallback>
+          <mc:Fallback xmlns="">
             <p:sp>
               <p:nvSpPr>
-                <p:cNvPr id="11" name="文本框 10">
-                  <a:extLst>
-                    <a:ext uri="{FF2B5EF4-FFF2-40B4-BE49-F238E27FC236}">
-                      <a16:creationId xmlns:a16="http://schemas.microsoft.com/office/drawing/2014/main" id="{9396881F-A803-C1A9-15A9-AE9F6E690FB9}"/>
-                    </a:ext>
-                  </a:extLst>
-                </p:cNvPr>
+                <p:cNvPr id="11" name="文本框 10"/>
                 <p:cNvSpPr txBox="1">
                   <a:spLocks noRot="1" noChangeAspect="1" noMove="1" noResize="1" noEditPoints="1" noAdjustHandles="1" noChangeArrowheads="1" noChangeShapeType="1" noTextEdit="1"/>
                 </p:cNvSpPr>
@@ -5638,11 +5541,8 @@
                 <a:prstGeom prst="rect">
                   <a:avLst/>
                 </a:prstGeom>
-                <a:blipFill>
+                <a:blipFill rotWithShape="1">
                   <a:blip r:embed="rId4"/>
-                  <a:stretch>
-                    <a:fillRect l="-20690" r="-17241"/>
-                  </a:stretch>
                 </a:blipFill>
               </p:spPr>
               <p:txBody>
@@ -5662,13 +5562,7 @@
         </mc:AlternateContent>
         <p:cxnSp>
           <p:nvCxnSpPr>
-            <p:cNvPr id="14" name="直接连接符 13">
-              <a:extLst>
-                <a:ext uri="{FF2B5EF4-FFF2-40B4-BE49-F238E27FC236}">
-                  <a16:creationId xmlns:a16="http://schemas.microsoft.com/office/drawing/2014/main" id="{0E199525-A378-928A-776D-01890AB03774}"/>
-                </a:ext>
-              </a:extLst>
-            </p:cNvPr>
+            <p:cNvPr id="14" name="直接连接符 13"/>
             <p:cNvCxnSpPr/>
             <p:nvPr/>
           </p:nvCxnSpPr>
@@ -5703,13 +5597,7 @@
         </p:cxnSp>
         <p:cxnSp>
           <p:nvCxnSpPr>
-            <p:cNvPr id="15" name="直接连接符 14">
-              <a:extLst>
-                <a:ext uri="{FF2B5EF4-FFF2-40B4-BE49-F238E27FC236}">
-                  <a16:creationId xmlns:a16="http://schemas.microsoft.com/office/drawing/2014/main" id="{384C2079-E8BD-F03A-AC40-F84D3C619B9A}"/>
-                </a:ext>
-              </a:extLst>
-            </p:cNvPr>
+            <p:cNvPr id="15" name="直接连接符 14"/>
             <p:cNvCxnSpPr/>
             <p:nvPr/>
           </p:nvCxnSpPr>
@@ -5742,17 +5630,11 @@
             </a:fontRef>
           </p:style>
         </p:cxnSp>
-        <mc:AlternateContent xmlns:mc="http://schemas.openxmlformats.org/markup-compatibility/2006">
-          <mc:Choice xmlns:a14="http://schemas.microsoft.com/office/drawing/2010/main" Requires="a14">
+        <mc:AlternateContent xmlns:mc="http://schemas.openxmlformats.org/markup-compatibility/2006" xmlns:a14="http://schemas.microsoft.com/office/drawing/2010/main">
+          <mc:Choice Requires="a14">
             <p:sp>
               <p:nvSpPr>
-                <p:cNvPr id="22" name="文本框 21">
-                  <a:extLst>
-                    <a:ext uri="{FF2B5EF4-FFF2-40B4-BE49-F238E27FC236}">
-                      <a16:creationId xmlns:a16="http://schemas.microsoft.com/office/drawing/2014/main" id="{68FB5207-118F-6D81-5A1F-6B6919EF0287}"/>
-                    </a:ext>
-                  </a:extLst>
-                </p:cNvPr>
+                <p:cNvPr id="22" name="文本框 21"/>
                 <p:cNvSpPr txBox="1"/>
                 <p:nvPr/>
               </p:nvSpPr>
@@ -5772,12 +5654,10 @@
                 </a:bodyPr>
                 <a:lstStyle/>
                 <a:p>
+                  <a:pPr/>
                   <a14:m>
                     <m:oMathPara xmlns:m="http://schemas.openxmlformats.org/officeDocument/2006/math">
-                      <m:oMathParaPr>
-                        <m:jc m:val="centerGroup"/>
-                      </m:oMathParaPr>
-                      <m:oMath xmlns:m="http://schemas.openxmlformats.org/officeDocument/2006/math">
+                      <m:oMath>
                         <m:r>
                           <a:rPr lang="en-US" altLang="zh-CN" b="0" i="1" smtClean="0">
                             <a:latin typeface="Cambria Math" panose="02040503050406030204" pitchFamily="18" charset="0"/>
@@ -5792,16 +5672,10 @@
               </p:txBody>
             </p:sp>
           </mc:Choice>
-          <mc:Fallback>
+          <mc:Fallback xmlns="">
             <p:sp>
               <p:nvSpPr>
-                <p:cNvPr id="22" name="文本框 21">
-                  <a:extLst>
-                    <a:ext uri="{FF2B5EF4-FFF2-40B4-BE49-F238E27FC236}">
-                      <a16:creationId xmlns:a16="http://schemas.microsoft.com/office/drawing/2014/main" id="{68FB5207-118F-6D81-5A1F-6B6919EF0287}"/>
-                    </a:ext>
-                  </a:extLst>
-                </p:cNvPr>
+                <p:cNvPr id="22" name="文本框 21"/>
                 <p:cNvSpPr txBox="1">
                   <a:spLocks noRot="1" noChangeAspect="1" noMove="1" noResize="1" noEditPoints="1" noAdjustHandles="1" noChangeArrowheads="1" noChangeShapeType="1" noTextEdit="1"/>
                 </p:cNvSpPr>
@@ -5815,11 +5689,8 @@
                 <a:prstGeom prst="rect">
                   <a:avLst/>
                 </a:prstGeom>
-                <a:blipFill>
+                <a:blipFill rotWithShape="1">
                   <a:blip r:embed="rId5"/>
-                  <a:stretch>
-                    <a:fillRect l="-20000" r="-16667"/>
-                  </a:stretch>
                 </a:blipFill>
               </p:spPr>
               <p:txBody>
@@ -5837,17 +5708,11 @@
             </p:sp>
           </mc:Fallback>
         </mc:AlternateContent>
-        <mc:AlternateContent xmlns:mc="http://schemas.openxmlformats.org/markup-compatibility/2006">
-          <mc:Choice xmlns:a14="http://schemas.microsoft.com/office/drawing/2010/main" Requires="a14">
+        <mc:AlternateContent xmlns:mc="http://schemas.openxmlformats.org/markup-compatibility/2006" xmlns:a14="http://schemas.microsoft.com/office/drawing/2010/main">
+          <mc:Choice Requires="a14">
             <p:sp>
               <p:nvSpPr>
-                <p:cNvPr id="23" name="文本框 22">
-                  <a:extLst>
-                    <a:ext uri="{FF2B5EF4-FFF2-40B4-BE49-F238E27FC236}">
-                      <a16:creationId xmlns:a16="http://schemas.microsoft.com/office/drawing/2014/main" id="{42C53DED-7ED2-4EE3-8060-3B37D68CB4A5}"/>
-                    </a:ext>
-                  </a:extLst>
-                </p:cNvPr>
+                <p:cNvPr id="23" name="文本框 22"/>
                 <p:cNvSpPr txBox="1"/>
                 <p:nvPr/>
               </p:nvSpPr>
@@ -5867,12 +5732,10 @@
                 </a:bodyPr>
                 <a:lstStyle/>
                 <a:p>
+                  <a:pPr/>
                   <a14:m>
                     <m:oMathPara xmlns:m="http://schemas.openxmlformats.org/officeDocument/2006/math">
-                      <m:oMathParaPr>
-                        <m:jc m:val="centerGroup"/>
-                      </m:oMathParaPr>
-                      <m:oMath xmlns:m="http://schemas.openxmlformats.org/officeDocument/2006/math">
+                      <m:oMath>
                         <m:r>
                           <a:rPr lang="en-US" altLang="zh-CN" b="0" i="1" smtClean="0">
                             <a:latin typeface="Cambria Math" panose="02040503050406030204" pitchFamily="18" charset="0"/>
@@ -5893,16 +5756,10 @@
               </p:txBody>
             </p:sp>
           </mc:Choice>
-          <mc:Fallback>
+          <mc:Fallback xmlns="">
             <p:sp>
               <p:nvSpPr>
-                <p:cNvPr id="23" name="文本框 22">
-                  <a:extLst>
-                    <a:ext uri="{FF2B5EF4-FFF2-40B4-BE49-F238E27FC236}">
-                      <a16:creationId xmlns:a16="http://schemas.microsoft.com/office/drawing/2014/main" id="{42C53DED-7ED2-4EE3-8060-3B37D68CB4A5}"/>
-                    </a:ext>
-                  </a:extLst>
-                </p:cNvPr>
+                <p:cNvPr id="23" name="文本框 22"/>
                 <p:cNvSpPr txBox="1">
                   <a:spLocks noRot="1" noChangeAspect="1" noMove="1" noResize="1" noEditPoints="1" noAdjustHandles="1" noChangeArrowheads="1" noChangeShapeType="1" noTextEdit="1"/>
                 </p:cNvSpPr>
@@ -5916,11 +5773,8 @@
                 <a:prstGeom prst="rect">
                   <a:avLst/>
                 </a:prstGeom>
-                <a:blipFill>
+                <a:blipFill rotWithShape="1">
                   <a:blip r:embed="rId6"/>
-                  <a:stretch>
-                    <a:fillRect l="-3390" r="-8475"/>
-                  </a:stretch>
                 </a:blipFill>
               </p:spPr>
               <p:txBody>
@@ -5938,17 +5792,11 @@
             </p:sp>
           </mc:Fallback>
         </mc:AlternateContent>
-        <mc:AlternateContent xmlns:mc="http://schemas.openxmlformats.org/markup-compatibility/2006">
-          <mc:Choice xmlns:a14="http://schemas.microsoft.com/office/drawing/2010/main" Requires="a14">
+        <mc:AlternateContent xmlns:mc="http://schemas.openxmlformats.org/markup-compatibility/2006" xmlns:a14="http://schemas.microsoft.com/office/drawing/2010/main">
+          <mc:Choice Requires="a14">
             <p:sp>
               <p:nvSpPr>
-                <p:cNvPr id="24" name="文本框 23">
-                  <a:extLst>
-                    <a:ext uri="{FF2B5EF4-FFF2-40B4-BE49-F238E27FC236}">
-                      <a16:creationId xmlns:a16="http://schemas.microsoft.com/office/drawing/2014/main" id="{697EE4C2-642D-D74F-7746-89E49B8C6266}"/>
-                    </a:ext>
-                  </a:extLst>
-                </p:cNvPr>
+                <p:cNvPr id="24" name="文本框 23"/>
                 <p:cNvSpPr txBox="1"/>
                 <p:nvPr/>
               </p:nvSpPr>
@@ -5968,12 +5816,10 @@
                 </a:bodyPr>
                 <a:lstStyle/>
                 <a:p>
+                  <a:pPr/>
                   <a14:m>
                     <m:oMathPara xmlns:m="http://schemas.openxmlformats.org/officeDocument/2006/math">
-                      <m:oMathParaPr>
-                        <m:jc m:val="centerGroup"/>
-                      </m:oMathParaPr>
-                      <m:oMath xmlns:m="http://schemas.openxmlformats.org/officeDocument/2006/math">
+                      <m:oMath>
                         <m:sSub>
                           <m:sSubPr>
                             <m:ctrlPr>
@@ -6007,16 +5853,10 @@
               </p:txBody>
             </p:sp>
           </mc:Choice>
-          <mc:Fallback>
+          <mc:Fallback xmlns="">
             <p:sp>
               <p:nvSpPr>
-                <p:cNvPr id="24" name="文本框 23">
-                  <a:extLst>
-                    <a:ext uri="{FF2B5EF4-FFF2-40B4-BE49-F238E27FC236}">
-                      <a16:creationId xmlns:a16="http://schemas.microsoft.com/office/drawing/2014/main" id="{697EE4C2-642D-D74F-7746-89E49B8C6266}"/>
-                    </a:ext>
-                  </a:extLst>
-                </p:cNvPr>
+                <p:cNvPr id="24" name="文本框 23"/>
                 <p:cNvSpPr txBox="1">
                   <a:spLocks noRot="1" noChangeAspect="1" noMove="1" noResize="1" noEditPoints="1" noAdjustHandles="1" noChangeArrowheads="1" noChangeShapeType="1" noTextEdit="1"/>
                 </p:cNvSpPr>
@@ -6030,11 +5870,8 @@
                 <a:prstGeom prst="rect">
                   <a:avLst/>
                 </a:prstGeom>
-                <a:blipFill>
+                <a:blipFill rotWithShape="1">
                   <a:blip r:embed="rId7"/>
-                  <a:stretch>
-                    <a:fillRect l="-12766" r="-6383" b="-13043"/>
-                  </a:stretch>
                 </a:blipFill>
               </p:spPr>
               <p:txBody>
@@ -6052,17 +5889,11 @@
             </p:sp>
           </mc:Fallback>
         </mc:AlternateContent>
-        <mc:AlternateContent xmlns:mc="http://schemas.openxmlformats.org/markup-compatibility/2006">
-          <mc:Choice xmlns:a14="http://schemas.microsoft.com/office/drawing/2010/main" Requires="a14">
+        <mc:AlternateContent xmlns:mc="http://schemas.openxmlformats.org/markup-compatibility/2006" xmlns:a14="http://schemas.microsoft.com/office/drawing/2010/main">
+          <mc:Choice Requires="a14">
             <p:sp>
               <p:nvSpPr>
-                <p:cNvPr id="26" name="文本框 25">
-                  <a:extLst>
-                    <a:ext uri="{FF2B5EF4-FFF2-40B4-BE49-F238E27FC236}">
-                      <a16:creationId xmlns:a16="http://schemas.microsoft.com/office/drawing/2014/main" id="{9FB88346-E684-02A0-7956-C100C0328859}"/>
-                    </a:ext>
-                  </a:extLst>
-                </p:cNvPr>
+                <p:cNvPr id="26" name="文本框 25"/>
                 <p:cNvSpPr txBox="1"/>
                 <p:nvPr/>
               </p:nvSpPr>
@@ -6082,12 +5913,10 @@
                 </a:bodyPr>
                 <a:lstStyle/>
                 <a:p>
+                  <a:pPr/>
                   <a14:m>
                     <m:oMathPara xmlns:m="http://schemas.openxmlformats.org/officeDocument/2006/math">
-                      <m:oMathParaPr>
-                        <m:jc m:val="centerGroup"/>
-                      </m:oMathParaPr>
-                      <m:oMath xmlns:m="http://schemas.openxmlformats.org/officeDocument/2006/math">
+                      <m:oMath>
                         <m:sSub>
                           <m:sSubPr>
                             <m:ctrlPr>
@@ -6121,16 +5950,10 @@
               </p:txBody>
             </p:sp>
           </mc:Choice>
-          <mc:Fallback>
+          <mc:Fallback xmlns="">
             <p:sp>
               <p:nvSpPr>
-                <p:cNvPr id="26" name="文本框 25">
-                  <a:extLst>
-                    <a:ext uri="{FF2B5EF4-FFF2-40B4-BE49-F238E27FC236}">
-                      <a16:creationId xmlns:a16="http://schemas.microsoft.com/office/drawing/2014/main" id="{9FB88346-E684-02A0-7956-C100C0328859}"/>
-                    </a:ext>
-                  </a:extLst>
-                </p:cNvPr>
+                <p:cNvPr id="26" name="文本框 25"/>
                 <p:cNvSpPr txBox="1">
                   <a:spLocks noRot="1" noChangeAspect="1" noMove="1" noResize="1" noEditPoints="1" noAdjustHandles="1" noChangeArrowheads="1" noChangeShapeType="1" noTextEdit="1"/>
                 </p:cNvSpPr>
@@ -6144,11 +5967,8 @@
                 <a:prstGeom prst="rect">
                   <a:avLst/>
                 </a:prstGeom>
-                <a:blipFill>
+                <a:blipFill rotWithShape="1">
                   <a:blip r:embed="rId8"/>
-                  <a:stretch>
-                    <a:fillRect l="-12500" r="-6250" b="-13043"/>
-                  </a:stretch>
                 </a:blipFill>
               </p:spPr>
               <p:txBody>
@@ -6166,17 +5986,11 @@
             </p:sp>
           </mc:Fallback>
         </mc:AlternateContent>
-        <mc:AlternateContent xmlns:mc="http://schemas.openxmlformats.org/markup-compatibility/2006">
-          <mc:Choice xmlns:a14="http://schemas.microsoft.com/office/drawing/2010/main" Requires="a14">
+        <mc:AlternateContent xmlns:mc="http://schemas.openxmlformats.org/markup-compatibility/2006" xmlns:a14="http://schemas.microsoft.com/office/drawing/2010/main">
+          <mc:Choice Requires="a14">
             <p:sp>
               <p:nvSpPr>
-                <p:cNvPr id="28" name="文本框 27">
-                  <a:extLst>
-                    <a:ext uri="{FF2B5EF4-FFF2-40B4-BE49-F238E27FC236}">
-                      <a16:creationId xmlns:a16="http://schemas.microsoft.com/office/drawing/2014/main" id="{441FBC52-71C3-24B7-F93C-5ADBF428FE31}"/>
-                    </a:ext>
-                  </a:extLst>
-                </p:cNvPr>
+                <p:cNvPr id="28" name="文本框 27"/>
                 <p:cNvSpPr txBox="1"/>
                 <p:nvPr/>
               </p:nvSpPr>
@@ -6199,10 +6013,7 @@
                   <a:pPr/>
                   <a14:m>
                     <m:oMathPara xmlns:m="http://schemas.openxmlformats.org/officeDocument/2006/math">
-                      <m:oMathParaPr>
-                        <m:jc m:val="centerGroup"/>
-                      </m:oMathParaPr>
-                      <m:oMath xmlns:m="http://schemas.openxmlformats.org/officeDocument/2006/math">
+                      <m:oMath>
                         <m:sSub>
                           <m:sSubPr>
                             <m:ctrlPr>
@@ -6236,16 +6047,10 @@
               </p:txBody>
             </p:sp>
           </mc:Choice>
-          <mc:Fallback>
+          <mc:Fallback xmlns="">
             <p:sp>
               <p:nvSpPr>
-                <p:cNvPr id="28" name="文本框 27">
-                  <a:extLst>
-                    <a:ext uri="{FF2B5EF4-FFF2-40B4-BE49-F238E27FC236}">
-                      <a16:creationId xmlns:a16="http://schemas.microsoft.com/office/drawing/2014/main" id="{441FBC52-71C3-24B7-F93C-5ADBF428FE31}"/>
-                    </a:ext>
-                  </a:extLst>
-                </p:cNvPr>
+                <p:cNvPr id="28" name="文本框 27"/>
                 <p:cNvSpPr txBox="1">
                   <a:spLocks noRot="1" noChangeAspect="1" noMove="1" noResize="1" noEditPoints="1" noAdjustHandles="1" noChangeArrowheads="1" noChangeShapeType="1" noTextEdit="1"/>
                 </p:cNvSpPr>
@@ -6259,10 +6064,1224 @@
                 <a:prstGeom prst="rect">
                   <a:avLst/>
                 </a:prstGeom>
+                <a:blipFill rotWithShape="1">
+                  <a:blip r:embed="rId8"/>
+                </a:blipFill>
+              </p:spPr>
+              <p:txBody>
+                <a:bodyPr/>
+                <a:lstStyle/>
+                <a:p>
+                  <a:r>
+                    <a:rPr lang="zh-CN" altLang="en-US">
+                      <a:noFill/>
+                    </a:rPr>
+                    <a:t> </a:t>
+                  </a:r>
+                </a:p>
+              </p:txBody>
+            </p:sp>
+          </mc:Fallback>
+        </mc:AlternateContent>
+      </p:grpSp>
+      <p:grpSp>
+        <p:nvGrpSpPr>
+          <p:cNvPr id="82" name="组合 81">
+            <a:extLst>
+              <a:ext uri="{FF2B5EF4-FFF2-40B4-BE49-F238E27FC236}">
+                <a16:creationId xmlns:a16="http://schemas.microsoft.com/office/drawing/2014/main" id="{E808CD6E-8D7E-54AA-F11A-33A132742BAD}"/>
+              </a:ext>
+            </a:extLst>
+          </p:cNvPr>
+          <p:cNvGrpSpPr/>
+          <p:nvPr/>
+        </p:nvGrpSpPr>
+        <p:grpSpPr>
+          <a:xfrm>
+            <a:off x="5720715" y="2349666"/>
+            <a:ext cx="2702560" cy="1637391"/>
+            <a:chOff x="5720715" y="2349666"/>
+            <a:chExt cx="2702560" cy="1637391"/>
+          </a:xfrm>
+        </p:grpSpPr>
+        <p:sp>
+          <p:nvSpPr>
+            <p:cNvPr id="2" name="椭圆 1">
+              <a:extLst>
+                <a:ext uri="{FF2B5EF4-FFF2-40B4-BE49-F238E27FC236}">
+                  <a16:creationId xmlns:a16="http://schemas.microsoft.com/office/drawing/2014/main" id="{895964A3-D49E-E97F-FFE0-5BA3774A727C}"/>
+                </a:ext>
+              </a:extLst>
+            </p:cNvPr>
+            <p:cNvSpPr/>
+            <p:nvPr/>
+          </p:nvSpPr>
+          <p:spPr>
+            <a:xfrm>
+              <a:off x="6054510" y="2835254"/>
+              <a:ext cx="360000" cy="1080000"/>
+            </a:xfrm>
+            <a:prstGeom prst="ellipse">
+              <a:avLst/>
+            </a:prstGeom>
+            <a:noFill/>
+            <a:ln>
+              <a:solidFill>
+                <a:schemeClr val="tx1"/>
+              </a:solidFill>
+            </a:ln>
+          </p:spPr>
+          <p:style>
+            <a:lnRef idx="2">
+              <a:schemeClr val="accent1">
+                <a:shade val="15000"/>
+              </a:schemeClr>
+            </a:lnRef>
+            <a:fillRef idx="1">
+              <a:schemeClr val="accent1"/>
+            </a:fillRef>
+            <a:effectRef idx="0">
+              <a:schemeClr val="accent1"/>
+            </a:effectRef>
+            <a:fontRef idx="minor">
+              <a:schemeClr val="lt1"/>
+            </a:fontRef>
+          </p:style>
+          <p:txBody>
+            <a:bodyPr rtlCol="0" anchor="ctr"/>
+            <a:lstStyle/>
+            <a:p>
+              <a:pPr algn="ctr"/>
+              <a:endParaRPr lang="zh-CN" altLang="en-US"/>
+            </a:p>
+          </p:txBody>
+        </p:sp>
+        <p:cxnSp>
+          <p:nvCxnSpPr>
+            <p:cNvPr id="7" name="直接连接符 6">
+              <a:extLst>
+                <a:ext uri="{FF2B5EF4-FFF2-40B4-BE49-F238E27FC236}">
+                  <a16:creationId xmlns:a16="http://schemas.microsoft.com/office/drawing/2014/main" id="{5FBEE326-F31B-3318-1327-CF9824D47ABF}"/>
+                </a:ext>
+              </a:extLst>
+            </p:cNvPr>
+            <p:cNvCxnSpPr>
+              <a:stCxn id="2" idx="0"/>
+            </p:cNvCxnSpPr>
+            <p:nvPr/>
+          </p:nvCxnSpPr>
+          <p:spPr>
+            <a:xfrm>
+              <a:off x="6234509" y="2835254"/>
+              <a:ext cx="1800000" cy="0"/>
+            </a:xfrm>
+            <a:prstGeom prst="line">
+              <a:avLst/>
+            </a:prstGeom>
+            <a:ln w="12700">
+              <a:solidFill>
+                <a:schemeClr val="tx1"/>
+              </a:solidFill>
+            </a:ln>
+          </p:spPr>
+          <p:style>
+            <a:lnRef idx="1">
+              <a:schemeClr val="accent1"/>
+            </a:lnRef>
+            <a:fillRef idx="0">
+              <a:schemeClr val="accent1"/>
+            </a:fillRef>
+            <a:effectRef idx="0">
+              <a:schemeClr val="accent1"/>
+            </a:effectRef>
+            <a:fontRef idx="minor">
+              <a:schemeClr val="tx1"/>
+            </a:fontRef>
+          </p:style>
+        </p:cxnSp>
+        <p:cxnSp>
+          <p:nvCxnSpPr>
+            <p:cNvPr id="13" name="直接连接符 12">
+              <a:extLst>
+                <a:ext uri="{FF2B5EF4-FFF2-40B4-BE49-F238E27FC236}">
+                  <a16:creationId xmlns:a16="http://schemas.microsoft.com/office/drawing/2014/main" id="{EA1A56CC-E2CF-5E5F-A432-51DCFC8C145F}"/>
+                </a:ext>
+              </a:extLst>
+            </p:cNvPr>
+            <p:cNvCxnSpPr>
+              <a:cxnSpLocks/>
+            </p:cNvCxnSpPr>
+            <p:nvPr/>
+          </p:nvCxnSpPr>
+          <p:spPr>
+            <a:xfrm>
+              <a:off x="5873750" y="3375254"/>
+              <a:ext cx="2549525" cy="0"/>
+            </a:xfrm>
+            <a:prstGeom prst="line">
+              <a:avLst/>
+            </a:prstGeom>
+            <a:ln w="12700">
+              <a:solidFill>
+                <a:schemeClr val="tx1"/>
+              </a:solidFill>
+              <a:prstDash val="dash"/>
+            </a:ln>
+          </p:spPr>
+          <p:style>
+            <a:lnRef idx="1">
+              <a:schemeClr val="accent1"/>
+            </a:lnRef>
+            <a:fillRef idx="0">
+              <a:schemeClr val="accent1"/>
+            </a:fillRef>
+            <a:effectRef idx="0">
+              <a:schemeClr val="accent1"/>
+            </a:effectRef>
+            <a:fontRef idx="minor">
+              <a:schemeClr val="tx1"/>
+            </a:fontRef>
+          </p:style>
+        </p:cxnSp>
+        <p:cxnSp>
+          <p:nvCxnSpPr>
+            <p:cNvPr id="27" name="直接连接符 26">
+              <a:extLst>
+                <a:ext uri="{FF2B5EF4-FFF2-40B4-BE49-F238E27FC236}">
+                  <a16:creationId xmlns:a16="http://schemas.microsoft.com/office/drawing/2014/main" id="{98C76084-7711-BA7E-F350-6517B0B57334}"/>
+                </a:ext>
+              </a:extLst>
+            </p:cNvPr>
+            <p:cNvCxnSpPr>
+              <a:stCxn id="2" idx="0"/>
+              <a:endCxn id="2" idx="4"/>
+            </p:cNvCxnSpPr>
+            <p:nvPr/>
+          </p:nvCxnSpPr>
+          <p:spPr>
+            <a:xfrm>
+              <a:off x="6234510" y="2835254"/>
+              <a:ext cx="0" cy="1080000"/>
+            </a:xfrm>
+            <a:prstGeom prst="line">
+              <a:avLst/>
+            </a:prstGeom>
+            <a:ln w="12700">
+              <a:solidFill>
+                <a:schemeClr val="tx1"/>
+              </a:solidFill>
+            </a:ln>
+          </p:spPr>
+          <p:style>
+            <a:lnRef idx="1">
+              <a:schemeClr val="accent1"/>
+            </a:lnRef>
+            <a:fillRef idx="0">
+              <a:schemeClr val="accent1"/>
+            </a:fillRef>
+            <a:effectRef idx="0">
+              <a:schemeClr val="accent1"/>
+            </a:effectRef>
+            <a:fontRef idx="minor">
+              <a:schemeClr val="tx1"/>
+            </a:fontRef>
+          </p:style>
+        </p:cxnSp>
+        <p:cxnSp>
+          <p:nvCxnSpPr>
+            <p:cNvPr id="32" name="直接箭头连接符 31">
+              <a:extLst>
+                <a:ext uri="{FF2B5EF4-FFF2-40B4-BE49-F238E27FC236}">
+                  <a16:creationId xmlns:a16="http://schemas.microsoft.com/office/drawing/2014/main" id="{6E38D979-0822-E36C-C313-629D75312EFA}"/>
+                </a:ext>
+              </a:extLst>
+            </p:cNvPr>
+            <p:cNvCxnSpPr>
+              <a:cxnSpLocks/>
+            </p:cNvCxnSpPr>
+            <p:nvPr/>
+          </p:nvCxnSpPr>
+          <p:spPr>
+            <a:xfrm flipV="1">
+              <a:off x="5900335" y="3375254"/>
+              <a:ext cx="334174" cy="532528"/>
+            </a:xfrm>
+            <a:prstGeom prst="straightConnector1">
+              <a:avLst/>
+            </a:prstGeom>
+            <a:ln w="12700">
+              <a:solidFill>
+                <a:schemeClr val="tx1"/>
+              </a:solidFill>
+              <a:tailEnd type="stealth"/>
+            </a:ln>
+          </p:spPr>
+          <p:style>
+            <a:lnRef idx="1">
+              <a:schemeClr val="accent1"/>
+            </a:lnRef>
+            <a:fillRef idx="0">
+              <a:schemeClr val="accent1"/>
+            </a:fillRef>
+            <a:effectRef idx="0">
+              <a:schemeClr val="accent1"/>
+            </a:effectRef>
+            <a:fontRef idx="minor">
+              <a:schemeClr val="tx1"/>
+            </a:fontRef>
+          </p:style>
+        </p:cxnSp>
+        <p:cxnSp>
+          <p:nvCxnSpPr>
+            <p:cNvPr id="33" name="直接箭头连接符 32">
+              <a:extLst>
+                <a:ext uri="{FF2B5EF4-FFF2-40B4-BE49-F238E27FC236}">
+                  <a16:creationId xmlns:a16="http://schemas.microsoft.com/office/drawing/2014/main" id="{00C7D843-15AD-9354-D52F-61ED1A0E0101}"/>
+                </a:ext>
+              </a:extLst>
+            </p:cNvPr>
+            <p:cNvCxnSpPr>
+              <a:cxnSpLocks/>
+            </p:cNvCxnSpPr>
+            <p:nvPr/>
+          </p:nvCxnSpPr>
+          <p:spPr>
+            <a:xfrm flipV="1">
+              <a:off x="6234511" y="2835253"/>
+              <a:ext cx="671114" cy="537935"/>
+            </a:xfrm>
+            <a:prstGeom prst="straightConnector1">
+              <a:avLst/>
+            </a:prstGeom>
+            <a:ln w="12700">
+              <a:solidFill>
+                <a:schemeClr val="tx1"/>
+              </a:solidFill>
+              <a:tailEnd type="stealth"/>
+            </a:ln>
+          </p:spPr>
+          <p:style>
+            <a:lnRef idx="1">
+              <a:schemeClr val="accent1"/>
+            </a:lnRef>
+            <a:fillRef idx="0">
+              <a:schemeClr val="accent1"/>
+            </a:fillRef>
+            <a:effectRef idx="0">
+              <a:schemeClr val="accent1"/>
+            </a:effectRef>
+            <a:fontRef idx="minor">
+              <a:schemeClr val="tx1"/>
+            </a:fontRef>
+          </p:style>
+        </p:cxnSp>
+        <p:sp>
+          <p:nvSpPr>
+            <p:cNvPr id="40" name="弧形 39">
+              <a:extLst>
+                <a:ext uri="{FF2B5EF4-FFF2-40B4-BE49-F238E27FC236}">
+                  <a16:creationId xmlns:a16="http://schemas.microsoft.com/office/drawing/2014/main" id="{2E4DF5B1-C45E-BF60-E1F8-B4002C900CC2}"/>
+                </a:ext>
+              </a:extLst>
+            </p:cNvPr>
+            <p:cNvSpPr/>
+            <p:nvPr/>
+          </p:nvSpPr>
+          <p:spPr>
+            <a:xfrm>
+              <a:off x="6054510" y="2922825"/>
+              <a:ext cx="666263" cy="666263"/>
+            </a:xfrm>
+            <a:prstGeom prst="arc">
+              <a:avLst>
+                <a:gd name="adj1" fmla="val 8055764"/>
+                <a:gd name="adj2" fmla="val 9480252"/>
+              </a:avLst>
+            </a:prstGeom>
+            <a:ln w="12700">
+              <a:solidFill>
+                <a:schemeClr val="tx1"/>
+              </a:solidFill>
+            </a:ln>
+          </p:spPr>
+          <p:style>
+            <a:lnRef idx="1">
+              <a:schemeClr val="accent1"/>
+            </a:lnRef>
+            <a:fillRef idx="0">
+              <a:schemeClr val="accent1"/>
+            </a:fillRef>
+            <a:effectRef idx="0">
+              <a:schemeClr val="accent1"/>
+            </a:effectRef>
+            <a:fontRef idx="minor">
+              <a:schemeClr val="tx1"/>
+            </a:fontRef>
+          </p:style>
+          <p:txBody>
+            <a:bodyPr rtlCol="0" anchor="ctr"/>
+            <a:lstStyle/>
+            <a:p>
+              <a:pPr algn="ctr"/>
+              <a:endParaRPr lang="zh-CN" altLang="en-US" dirty="0"/>
+            </a:p>
+          </p:txBody>
+        </p:sp>
+        <mc:AlternateContent xmlns:mc="http://schemas.openxmlformats.org/markup-compatibility/2006">
+          <mc:Choice xmlns:a14="http://schemas.microsoft.com/office/drawing/2010/main" Requires="a14">
+            <p:sp>
+              <p:nvSpPr>
+                <p:cNvPr id="42" name="文本框 41">
+                  <a:extLst>
+                    <a:ext uri="{FF2B5EF4-FFF2-40B4-BE49-F238E27FC236}">
+                      <a16:creationId xmlns:a16="http://schemas.microsoft.com/office/drawing/2014/main" id="{6CE3D51E-6B73-30D2-B268-C115C3FAF91C}"/>
+                    </a:ext>
+                  </a:extLst>
+                </p:cNvPr>
+                <p:cNvSpPr txBox="1"/>
+                <p:nvPr/>
+              </p:nvSpPr>
+              <p:spPr>
+                <a:xfrm>
+                  <a:off x="5720715" y="3384450"/>
+                  <a:ext cx="323037" cy="153888"/>
+                </a:xfrm>
+                <a:prstGeom prst="rect">
+                  <a:avLst/>
+                </a:prstGeom>
+                <a:noFill/>
+              </p:spPr>
+              <p:txBody>
+                <a:bodyPr wrap="none" lIns="0" tIns="0" rIns="0" bIns="0" rtlCol="0">
+                  <a:spAutoFit/>
+                </a:bodyPr>
+                <a:lstStyle/>
+                <a:p>
+                  <a14:m>
+                    <m:oMathPara xmlns:m="http://schemas.openxmlformats.org/officeDocument/2006/math">
+                      <m:oMath>
+                        <m:sSub>
+                          <m:sSubPr>
+                            <m:ctrlPr>
+                              <a:rPr lang="en-US" altLang="zh-CN" sz="1000" b="0" i="1" smtClean="0">
+                                <a:latin typeface="Cambria Math" panose="02040503050406030204" pitchFamily="18" charset="0"/>
+                              </a:rPr>
+                            </m:ctrlPr>
+                          </m:sSubPr>
+                          <m:e>
+                            <m:r>
+                              <a:rPr lang="en-US" altLang="zh-CN" sz="1000" b="0" i="1" smtClean="0">
+                                <a:latin typeface="Cambria Math" panose="02040503050406030204" pitchFamily="18" charset="0"/>
+                              </a:rPr>
+                              <m:t>𝜃</m:t>
+                            </m:r>
+                          </m:e>
+                          <m:sub>
+                            <m:r>
+                              <a:rPr lang="en-US" altLang="zh-CN" sz="1000" b="0" i="1" smtClean="0">
+                                <a:latin typeface="Cambria Math" panose="02040503050406030204" pitchFamily="18" charset="0"/>
+                              </a:rPr>
+                              <m:t>𝑖</m:t>
+                            </m:r>
+                            <m:r>
+                              <m:rPr>
+                                <m:sty m:val="p"/>
+                              </m:rPr>
+                              <a:rPr lang="en-US" altLang="zh-CN" sz="1000" b="0" i="1" smtClean="0">
+                                <a:latin typeface="Cambria Math" panose="02040503050406030204" pitchFamily="18" charset="0"/>
+                              </a:rPr>
+                              <m:t>max</m:t>
+                            </m:r>
+                          </m:sub>
+                        </m:sSub>
+                      </m:oMath>
+                    </m:oMathPara>
+                  </a14:m>
+                  <a:endParaRPr lang="en-US" altLang="zh-CN" sz="1000" b="0" i="1" dirty="0">
+                    <a:latin typeface="Cambria Math" panose="02040503050406030204" pitchFamily="18" charset="0"/>
+                  </a:endParaRPr>
+                </a:p>
+              </p:txBody>
+            </p:sp>
+          </mc:Choice>
+          <mc:Fallback>
+            <p:sp>
+              <p:nvSpPr>
+                <p:cNvPr id="42" name="文本框 41">
+                  <a:extLst>
+                    <a:ext uri="{FF2B5EF4-FFF2-40B4-BE49-F238E27FC236}">
+                      <a16:creationId xmlns:a16="http://schemas.microsoft.com/office/drawing/2014/main" id="{6CE3D51E-6B73-30D2-B268-C115C3FAF91C}"/>
+                    </a:ext>
+                  </a:extLst>
+                </p:cNvPr>
+                <p:cNvSpPr txBox="1">
+                  <a:spLocks noRot="1" noChangeAspect="1" noMove="1" noResize="1" noEditPoints="1" noAdjustHandles="1" noChangeArrowheads="1" noChangeShapeType="1" noTextEdit="1"/>
+                </p:cNvSpPr>
+                <p:nvPr/>
+              </p:nvSpPr>
+              <p:spPr>
+                <a:xfrm>
+                  <a:off x="5720715" y="3384450"/>
+                  <a:ext cx="323037" cy="153888"/>
+                </a:xfrm>
+                <a:prstGeom prst="rect">
+                  <a:avLst/>
+                </a:prstGeom>
                 <a:blipFill>
                   <a:blip r:embed="rId9"/>
                   <a:stretch>
-                    <a:fillRect l="-12500" r="-6250" b="-13043"/>
+                    <a:fillRect l="-7547" r="-3774" b="-20000"/>
+                  </a:stretch>
+                </a:blipFill>
+              </p:spPr>
+              <p:txBody>
+                <a:bodyPr/>
+                <a:lstStyle/>
+                <a:p>
+                  <a:r>
+                    <a:rPr lang="zh-CN" altLang="en-US">
+                      <a:noFill/>
+                    </a:rPr>
+                    <a:t> </a:t>
+                  </a:r>
+                </a:p>
+              </p:txBody>
+            </p:sp>
+          </mc:Fallback>
+        </mc:AlternateContent>
+        <p:cxnSp>
+          <p:nvCxnSpPr>
+            <p:cNvPr id="46" name="直接箭头连接符 45">
+              <a:extLst>
+                <a:ext uri="{FF2B5EF4-FFF2-40B4-BE49-F238E27FC236}">
+                  <a16:creationId xmlns:a16="http://schemas.microsoft.com/office/drawing/2014/main" id="{5299FAA4-83A8-0E80-D150-04822DECCF40}"/>
+                </a:ext>
+              </a:extLst>
+            </p:cNvPr>
+            <p:cNvCxnSpPr>
+              <a:cxnSpLocks/>
+            </p:cNvCxnSpPr>
+            <p:nvPr/>
+          </p:nvCxnSpPr>
+          <p:spPr>
+            <a:xfrm flipV="1">
+              <a:off x="5978847" y="3370766"/>
+              <a:ext cx="255661" cy="616291"/>
+            </a:xfrm>
+            <a:prstGeom prst="straightConnector1">
+              <a:avLst/>
+            </a:prstGeom>
+            <a:ln>
+              <a:solidFill>
+                <a:srgbClr val="FF0000"/>
+              </a:solidFill>
+              <a:tailEnd type="stealth"/>
+            </a:ln>
+          </p:spPr>
+          <p:style>
+            <a:lnRef idx="1">
+              <a:schemeClr val="accent6"/>
+            </a:lnRef>
+            <a:fillRef idx="0">
+              <a:schemeClr val="accent6"/>
+            </a:fillRef>
+            <a:effectRef idx="0">
+              <a:schemeClr val="accent6"/>
+            </a:effectRef>
+            <a:fontRef idx="minor">
+              <a:schemeClr val="tx1"/>
+            </a:fontRef>
+          </p:style>
+        </p:cxnSp>
+        <p:cxnSp>
+          <p:nvCxnSpPr>
+            <p:cNvPr id="48" name="直接箭头连接符 47">
+              <a:extLst>
+                <a:ext uri="{FF2B5EF4-FFF2-40B4-BE49-F238E27FC236}">
+                  <a16:creationId xmlns:a16="http://schemas.microsoft.com/office/drawing/2014/main" id="{47835013-7C37-64FE-1866-6AE19E7EFF70}"/>
+                </a:ext>
+              </a:extLst>
+            </p:cNvPr>
+            <p:cNvCxnSpPr>
+              <a:cxnSpLocks/>
+            </p:cNvCxnSpPr>
+            <p:nvPr/>
+          </p:nvCxnSpPr>
+          <p:spPr>
+            <a:xfrm flipV="1">
+              <a:off x="6234508" y="2835253"/>
+              <a:ext cx="360003" cy="547130"/>
+            </a:xfrm>
+            <a:prstGeom prst="straightConnector1">
+              <a:avLst/>
+            </a:prstGeom>
+            <a:ln>
+              <a:solidFill>
+                <a:srgbClr val="FF0000"/>
+              </a:solidFill>
+              <a:tailEnd type="stealth"/>
+            </a:ln>
+          </p:spPr>
+          <p:style>
+            <a:lnRef idx="1">
+              <a:schemeClr val="accent6"/>
+            </a:lnRef>
+            <a:fillRef idx="0">
+              <a:schemeClr val="accent6"/>
+            </a:fillRef>
+            <a:effectRef idx="0">
+              <a:schemeClr val="accent6"/>
+            </a:effectRef>
+            <a:fontRef idx="minor">
+              <a:schemeClr val="tx1"/>
+            </a:fontRef>
+          </p:style>
+        </p:cxnSp>
+        <p:cxnSp>
+          <p:nvCxnSpPr>
+            <p:cNvPr id="52" name="直接箭头连接符 51">
+              <a:extLst>
+                <a:ext uri="{FF2B5EF4-FFF2-40B4-BE49-F238E27FC236}">
+                  <a16:creationId xmlns:a16="http://schemas.microsoft.com/office/drawing/2014/main" id="{F96ACDAE-9087-5A68-213B-A2DA80554185}"/>
+                </a:ext>
+              </a:extLst>
+            </p:cNvPr>
+            <p:cNvCxnSpPr>
+              <a:cxnSpLocks/>
+            </p:cNvCxnSpPr>
+            <p:nvPr/>
+          </p:nvCxnSpPr>
+          <p:spPr>
+            <a:xfrm flipV="1">
+              <a:off x="6590118" y="2570607"/>
+              <a:ext cx="111648" cy="269136"/>
+            </a:xfrm>
+            <a:prstGeom prst="straightConnector1">
+              <a:avLst/>
+            </a:prstGeom>
+            <a:ln>
+              <a:solidFill>
+                <a:srgbClr val="FF0000"/>
+              </a:solidFill>
+              <a:tailEnd type="stealth"/>
+            </a:ln>
+          </p:spPr>
+          <p:style>
+            <a:lnRef idx="1">
+              <a:schemeClr val="accent6"/>
+            </a:lnRef>
+            <a:fillRef idx="0">
+              <a:schemeClr val="accent6"/>
+            </a:fillRef>
+            <a:effectRef idx="0">
+              <a:schemeClr val="accent6"/>
+            </a:effectRef>
+            <a:fontRef idx="minor">
+              <a:schemeClr val="tx1"/>
+            </a:fontRef>
+          </p:style>
+        </p:cxnSp>
+        <p:cxnSp>
+          <p:nvCxnSpPr>
+            <p:cNvPr id="54" name="直接箭头连接符 53">
+              <a:extLst>
+                <a:ext uri="{FF2B5EF4-FFF2-40B4-BE49-F238E27FC236}">
+                  <a16:creationId xmlns:a16="http://schemas.microsoft.com/office/drawing/2014/main" id="{6273FD85-2A73-59EA-782B-1BD62CB03627}"/>
+                </a:ext>
+              </a:extLst>
+            </p:cNvPr>
+            <p:cNvCxnSpPr>
+              <a:cxnSpLocks/>
+            </p:cNvCxnSpPr>
+            <p:nvPr/>
+          </p:nvCxnSpPr>
+          <p:spPr>
+            <a:xfrm>
+              <a:off x="6896381" y="2839743"/>
+              <a:ext cx="992519" cy="725782"/>
+            </a:xfrm>
+            <a:prstGeom prst="straightConnector1">
+              <a:avLst/>
+            </a:prstGeom>
+            <a:ln w="12700">
+              <a:solidFill>
+                <a:schemeClr val="tx1"/>
+              </a:solidFill>
+              <a:tailEnd type="stealth"/>
+            </a:ln>
+          </p:spPr>
+          <p:style>
+            <a:lnRef idx="1">
+              <a:schemeClr val="accent1"/>
+            </a:lnRef>
+            <a:fillRef idx="0">
+              <a:schemeClr val="accent1"/>
+            </a:fillRef>
+            <a:effectRef idx="0">
+              <a:schemeClr val="accent1"/>
+            </a:effectRef>
+            <a:fontRef idx="minor">
+              <a:schemeClr val="tx1"/>
+            </a:fontRef>
+          </p:style>
+        </p:cxnSp>
+        <p:sp>
+          <p:nvSpPr>
+            <p:cNvPr id="63" name="弧形 62">
+              <a:extLst>
+                <a:ext uri="{FF2B5EF4-FFF2-40B4-BE49-F238E27FC236}">
+                  <a16:creationId xmlns:a16="http://schemas.microsoft.com/office/drawing/2014/main" id="{211D3C25-4913-E928-8669-57319CB21790}"/>
+                </a:ext>
+              </a:extLst>
+            </p:cNvPr>
+            <p:cNvSpPr/>
+            <p:nvPr/>
+          </p:nvSpPr>
+          <p:spPr>
+            <a:xfrm>
+              <a:off x="6383248" y="2465071"/>
+              <a:ext cx="666263" cy="666263"/>
+            </a:xfrm>
+            <a:prstGeom prst="arc">
+              <a:avLst>
+                <a:gd name="adj1" fmla="val 438986"/>
+                <a:gd name="adj2" fmla="val 1454179"/>
+              </a:avLst>
+            </a:prstGeom>
+            <a:ln w="12700">
+              <a:solidFill>
+                <a:schemeClr val="tx1"/>
+              </a:solidFill>
+            </a:ln>
+          </p:spPr>
+          <p:style>
+            <a:lnRef idx="1">
+              <a:schemeClr val="accent1"/>
+            </a:lnRef>
+            <a:fillRef idx="0">
+              <a:schemeClr val="accent1"/>
+            </a:fillRef>
+            <a:effectRef idx="0">
+              <a:schemeClr val="accent1"/>
+            </a:effectRef>
+            <a:fontRef idx="minor">
+              <a:schemeClr val="tx1"/>
+            </a:fontRef>
+          </p:style>
+          <p:txBody>
+            <a:bodyPr rtlCol="0" anchor="ctr"/>
+            <a:lstStyle/>
+            <a:p>
+              <a:pPr algn="ctr"/>
+              <a:endParaRPr lang="zh-CN" altLang="en-US" dirty="0"/>
+            </a:p>
+          </p:txBody>
+        </p:sp>
+        <mc:AlternateContent xmlns:mc="http://schemas.openxmlformats.org/markup-compatibility/2006">
+          <mc:Choice xmlns:a14="http://schemas.microsoft.com/office/drawing/2010/main" Requires="a14">
+            <p:sp>
+              <p:nvSpPr>
+                <p:cNvPr id="64" name="文本框 63">
+                  <a:extLst>
+                    <a:ext uri="{FF2B5EF4-FFF2-40B4-BE49-F238E27FC236}">
+                      <a16:creationId xmlns:a16="http://schemas.microsoft.com/office/drawing/2014/main" id="{D18C026E-56E2-BF3C-1E88-4001802C12EF}"/>
+                    </a:ext>
+                  </a:extLst>
+                </p:cNvPr>
+                <p:cNvSpPr txBox="1"/>
+                <p:nvPr/>
+              </p:nvSpPr>
+              <p:spPr>
+                <a:xfrm>
+                  <a:off x="7112495" y="2835253"/>
+                  <a:ext cx="150554" cy="153888"/>
+                </a:xfrm>
+                <a:prstGeom prst="rect">
+                  <a:avLst/>
+                </a:prstGeom>
+                <a:noFill/>
+              </p:spPr>
+              <p:txBody>
+                <a:bodyPr wrap="none" lIns="0" tIns="0" rIns="0" bIns="0" rtlCol="0">
+                  <a:spAutoFit/>
+                </a:bodyPr>
+                <a:lstStyle/>
+                <a:p>
+                  <a14:m>
+                    <m:oMathPara xmlns:m="http://schemas.openxmlformats.org/officeDocument/2006/math">
+                      <m:oMath>
+                        <m:sSub>
+                          <m:sSubPr>
+                            <m:ctrlPr>
+                              <a:rPr lang="en-US" altLang="zh-CN" sz="1000" b="0" i="1" smtClean="0">
+                                <a:latin typeface="Cambria Math" panose="02040503050406030204" pitchFamily="18" charset="0"/>
+                              </a:rPr>
+                            </m:ctrlPr>
+                          </m:sSubPr>
+                          <m:e>
+                            <m:r>
+                              <a:rPr lang="en-US" altLang="zh-CN" sz="1000" b="0" i="1" smtClean="0">
+                                <a:latin typeface="Cambria Math" panose="02040503050406030204" pitchFamily="18" charset="0"/>
+                              </a:rPr>
+                              <m:t>𝜃</m:t>
+                            </m:r>
+                          </m:e>
+                          <m:sub>
+                            <m:r>
+                              <a:rPr lang="en-US" altLang="zh-CN" sz="1000" b="0" i="1" smtClean="0">
+                                <a:latin typeface="Cambria Math" panose="02040503050406030204" pitchFamily="18" charset="0"/>
+                              </a:rPr>
+                              <m:t>𝑧</m:t>
+                            </m:r>
+                          </m:sub>
+                        </m:sSub>
+                      </m:oMath>
+                    </m:oMathPara>
+                  </a14:m>
+                  <a:endParaRPr lang="en-US" altLang="zh-CN" sz="1000" b="0" dirty="0"/>
+                </a:p>
+              </p:txBody>
+            </p:sp>
+          </mc:Choice>
+          <mc:Fallback>
+            <p:sp>
+              <p:nvSpPr>
+                <p:cNvPr id="64" name="文本框 63">
+                  <a:extLst>
+                    <a:ext uri="{FF2B5EF4-FFF2-40B4-BE49-F238E27FC236}">
+                      <a16:creationId xmlns:a16="http://schemas.microsoft.com/office/drawing/2014/main" id="{D18C026E-56E2-BF3C-1E88-4001802C12EF}"/>
+                    </a:ext>
+                  </a:extLst>
+                </p:cNvPr>
+                <p:cNvSpPr txBox="1">
+                  <a:spLocks noRot="1" noChangeAspect="1" noMove="1" noResize="1" noEditPoints="1" noAdjustHandles="1" noChangeArrowheads="1" noChangeShapeType="1" noTextEdit="1"/>
+                </p:cNvSpPr>
+                <p:nvPr/>
+              </p:nvSpPr>
+              <p:spPr>
+                <a:xfrm>
+                  <a:off x="7112495" y="2835253"/>
+                  <a:ext cx="150554" cy="153888"/>
+                </a:xfrm>
+                <a:prstGeom prst="rect">
+                  <a:avLst/>
+                </a:prstGeom>
+                <a:blipFill>
+                  <a:blip r:embed="rId10"/>
+                  <a:stretch>
+                    <a:fillRect l="-25000" r="-4167" b="-12000"/>
+                  </a:stretch>
+                </a:blipFill>
+              </p:spPr>
+              <p:txBody>
+                <a:bodyPr/>
+                <a:lstStyle/>
+                <a:p>
+                  <a:r>
+                    <a:rPr lang="zh-CN" altLang="en-US">
+                      <a:noFill/>
+                    </a:rPr>
+                    <a:t> </a:t>
+                  </a:r>
+                </a:p>
+              </p:txBody>
+            </p:sp>
+          </mc:Fallback>
+        </mc:AlternateContent>
+        <p:sp>
+          <p:nvSpPr>
+            <p:cNvPr id="66" name="弧形 65">
+              <a:extLst>
+                <a:ext uri="{FF2B5EF4-FFF2-40B4-BE49-F238E27FC236}">
+                  <a16:creationId xmlns:a16="http://schemas.microsoft.com/office/drawing/2014/main" id="{0ECE25DC-11FF-F26F-1BE9-AD426E9BEE35}"/>
+                </a:ext>
+              </a:extLst>
+            </p:cNvPr>
+            <p:cNvSpPr/>
+            <p:nvPr/>
+          </p:nvSpPr>
+          <p:spPr>
+            <a:xfrm>
+              <a:off x="5832342" y="3056723"/>
+              <a:ext cx="666263" cy="666263"/>
+            </a:xfrm>
+            <a:prstGeom prst="arc">
+              <a:avLst>
+                <a:gd name="adj1" fmla="val 19632627"/>
+                <a:gd name="adj2" fmla="val 21546465"/>
+              </a:avLst>
+            </a:prstGeom>
+            <a:ln w="12700">
+              <a:solidFill>
+                <a:schemeClr val="tx1"/>
+              </a:solidFill>
+            </a:ln>
+          </p:spPr>
+          <p:style>
+            <a:lnRef idx="1">
+              <a:schemeClr val="accent1"/>
+            </a:lnRef>
+            <a:fillRef idx="0">
+              <a:schemeClr val="accent1"/>
+            </a:fillRef>
+            <a:effectRef idx="0">
+              <a:schemeClr val="accent1"/>
+            </a:effectRef>
+            <a:fontRef idx="minor">
+              <a:schemeClr val="tx1"/>
+            </a:fontRef>
+          </p:style>
+          <p:txBody>
+            <a:bodyPr rtlCol="0" anchor="ctr"/>
+            <a:lstStyle/>
+            <a:p>
+              <a:pPr algn="ctr"/>
+              <a:endParaRPr lang="zh-CN" altLang="en-US" dirty="0"/>
+            </a:p>
+          </p:txBody>
+        </p:sp>
+        <mc:AlternateContent xmlns:mc="http://schemas.openxmlformats.org/markup-compatibility/2006">
+          <mc:Choice xmlns:a14="http://schemas.microsoft.com/office/drawing/2010/main" Requires="a14">
+            <p:sp>
+              <p:nvSpPr>
+                <p:cNvPr id="69" name="文本框 68">
+                  <a:extLst>
+                    <a:ext uri="{FF2B5EF4-FFF2-40B4-BE49-F238E27FC236}">
+                      <a16:creationId xmlns:a16="http://schemas.microsoft.com/office/drawing/2014/main" id="{1C2CB72C-4E77-DE88-4222-72B7ED5A2B8F}"/>
+                    </a:ext>
+                  </a:extLst>
+                </p:cNvPr>
+                <p:cNvSpPr txBox="1"/>
+                <p:nvPr/>
+              </p:nvSpPr>
+              <p:spPr>
+                <a:xfrm>
+                  <a:off x="6528049" y="3179012"/>
+                  <a:ext cx="150554" cy="153888"/>
+                </a:xfrm>
+                <a:prstGeom prst="rect">
+                  <a:avLst/>
+                </a:prstGeom>
+                <a:noFill/>
+              </p:spPr>
+              <p:txBody>
+                <a:bodyPr wrap="none" lIns="0" tIns="0" rIns="0" bIns="0" rtlCol="0">
+                  <a:spAutoFit/>
+                </a:bodyPr>
+                <a:lstStyle/>
+                <a:p>
+                  <a:pPr/>
+                  <a14:m>
+                    <m:oMathPara xmlns:m="http://schemas.openxmlformats.org/officeDocument/2006/math">
+                      <m:oMath>
+                        <m:sSub>
+                          <m:sSubPr>
+                            <m:ctrlPr>
+                              <a:rPr lang="en-US" altLang="zh-CN" sz="1000" b="0" i="1" smtClean="0">
+                                <a:latin typeface="Cambria Math" panose="02040503050406030204" pitchFamily="18" charset="0"/>
+                              </a:rPr>
+                            </m:ctrlPr>
+                          </m:sSubPr>
+                          <m:e>
+                            <m:r>
+                              <a:rPr lang="en-US" altLang="zh-CN" sz="1000" b="0" i="1" smtClean="0">
+                                <a:latin typeface="Cambria Math" panose="02040503050406030204" pitchFamily="18" charset="0"/>
+                              </a:rPr>
+                              <m:t>𝜃</m:t>
+                            </m:r>
+                          </m:e>
+                          <m:sub>
+                            <m:r>
+                              <a:rPr lang="en-US" altLang="zh-CN" sz="1000" b="0" i="1" smtClean="0">
+                                <a:latin typeface="Cambria Math" panose="02040503050406030204" pitchFamily="18" charset="0"/>
+                              </a:rPr>
+                              <m:t>𝑧</m:t>
+                            </m:r>
+                          </m:sub>
+                        </m:sSub>
+                      </m:oMath>
+                    </m:oMathPara>
+                  </a14:m>
+                  <a:endParaRPr lang="en-US" altLang="zh-CN" sz="1000" b="0" dirty="0"/>
+                </a:p>
+              </p:txBody>
+            </p:sp>
+          </mc:Choice>
+          <mc:Fallback>
+            <p:sp>
+              <p:nvSpPr>
+                <p:cNvPr id="69" name="文本框 68">
+                  <a:extLst>
+                    <a:ext uri="{FF2B5EF4-FFF2-40B4-BE49-F238E27FC236}">
+                      <a16:creationId xmlns:a16="http://schemas.microsoft.com/office/drawing/2014/main" id="{1C2CB72C-4E77-DE88-4222-72B7ED5A2B8F}"/>
+                    </a:ext>
+                  </a:extLst>
+                </p:cNvPr>
+                <p:cNvSpPr txBox="1">
+                  <a:spLocks noRot="1" noChangeAspect="1" noMove="1" noResize="1" noEditPoints="1" noAdjustHandles="1" noChangeArrowheads="1" noChangeShapeType="1" noTextEdit="1"/>
+                </p:cNvSpPr>
+                <p:nvPr/>
+              </p:nvSpPr>
+              <p:spPr>
+                <a:xfrm>
+                  <a:off x="6528049" y="3179012"/>
+                  <a:ext cx="150554" cy="153888"/>
+                </a:xfrm>
+                <a:prstGeom prst="rect">
+                  <a:avLst/>
+                </a:prstGeom>
+                <a:blipFill>
+                  <a:blip r:embed="rId11"/>
+                  <a:stretch>
+                    <a:fillRect l="-24000" b="-7692"/>
+                  </a:stretch>
+                </a:blipFill>
+              </p:spPr>
+              <p:txBody>
+                <a:bodyPr/>
+                <a:lstStyle/>
+                <a:p>
+                  <a:r>
+                    <a:rPr lang="zh-CN" altLang="en-US">
+                      <a:noFill/>
+                    </a:rPr>
+                    <a:t> </a:t>
+                  </a:r>
+                </a:p>
+              </p:txBody>
+            </p:sp>
+          </mc:Fallback>
+        </mc:AlternateContent>
+        <p:cxnSp>
+          <p:nvCxnSpPr>
+            <p:cNvPr id="72" name="直接连接符 71">
+              <a:extLst>
+                <a:ext uri="{FF2B5EF4-FFF2-40B4-BE49-F238E27FC236}">
+                  <a16:creationId xmlns:a16="http://schemas.microsoft.com/office/drawing/2014/main" id="{0EEB7617-F57C-6C48-3CC5-B08F270712C9}"/>
+                </a:ext>
+              </a:extLst>
+            </p:cNvPr>
+            <p:cNvCxnSpPr>
+              <a:stCxn id="2" idx="4"/>
+            </p:cNvCxnSpPr>
+            <p:nvPr/>
+          </p:nvCxnSpPr>
+          <p:spPr>
+            <a:xfrm>
+              <a:off x="6234510" y="3915254"/>
+              <a:ext cx="1799999" cy="0"/>
+            </a:xfrm>
+            <a:prstGeom prst="line">
+              <a:avLst/>
+            </a:prstGeom>
+            <a:ln w="12700">
+              <a:solidFill>
+                <a:schemeClr val="tx1"/>
+              </a:solidFill>
+            </a:ln>
+          </p:spPr>
+          <p:style>
+            <a:lnRef idx="1">
+              <a:schemeClr val="accent1"/>
+            </a:lnRef>
+            <a:fillRef idx="0">
+              <a:schemeClr val="accent1"/>
+            </a:fillRef>
+            <a:effectRef idx="0">
+              <a:schemeClr val="accent1"/>
+            </a:effectRef>
+            <a:fontRef idx="minor">
+              <a:schemeClr val="tx1"/>
+            </a:fontRef>
+          </p:style>
+        </p:cxnSp>
+        <p:cxnSp>
+          <p:nvCxnSpPr>
+            <p:cNvPr id="75" name="直接连接符 74">
+              <a:extLst>
+                <a:ext uri="{FF2B5EF4-FFF2-40B4-BE49-F238E27FC236}">
+                  <a16:creationId xmlns:a16="http://schemas.microsoft.com/office/drawing/2014/main" id="{5329C86B-8254-EE79-E949-0D87C47ECE52}"/>
+                </a:ext>
+              </a:extLst>
+            </p:cNvPr>
+            <p:cNvCxnSpPr/>
+            <p:nvPr/>
+          </p:nvCxnSpPr>
+          <p:spPr>
+            <a:xfrm>
+              <a:off x="6902450" y="2771334"/>
+              <a:ext cx="0" cy="360000"/>
+            </a:xfrm>
+            <a:prstGeom prst="line">
+              <a:avLst/>
+            </a:prstGeom>
+            <a:ln w="12700">
+              <a:solidFill>
+                <a:schemeClr val="tx1"/>
+              </a:solidFill>
+              <a:prstDash val="dash"/>
+            </a:ln>
+          </p:spPr>
+          <p:style>
+            <a:lnRef idx="1">
+              <a:schemeClr val="accent1"/>
+            </a:lnRef>
+            <a:fillRef idx="0">
+              <a:schemeClr val="accent1"/>
+            </a:fillRef>
+            <a:effectRef idx="0">
+              <a:schemeClr val="accent1"/>
+            </a:effectRef>
+            <a:fontRef idx="minor">
+              <a:schemeClr val="tx1"/>
+            </a:fontRef>
+          </p:style>
+        </p:cxnSp>
+        <p:sp>
+          <p:nvSpPr>
+            <p:cNvPr id="79" name="弧形 78">
+              <a:extLst>
+                <a:ext uri="{FF2B5EF4-FFF2-40B4-BE49-F238E27FC236}">
+                  <a16:creationId xmlns:a16="http://schemas.microsoft.com/office/drawing/2014/main" id="{7E24C2B1-7A56-A72C-3467-4B3D2376D924}"/>
+                </a:ext>
+              </a:extLst>
+            </p:cNvPr>
+            <p:cNvSpPr/>
+            <p:nvPr/>
+          </p:nvSpPr>
+          <p:spPr>
+            <a:xfrm>
+              <a:off x="6603326" y="2349666"/>
+              <a:ext cx="666263" cy="666263"/>
+            </a:xfrm>
+            <a:prstGeom prst="arc">
+              <a:avLst>
+                <a:gd name="adj1" fmla="val 5773880"/>
+                <a:gd name="adj2" fmla="val 7475108"/>
+              </a:avLst>
+            </a:prstGeom>
+            <a:ln w="12700">
+              <a:solidFill>
+                <a:schemeClr val="tx1"/>
+              </a:solidFill>
+            </a:ln>
+          </p:spPr>
+          <p:style>
+            <a:lnRef idx="1">
+              <a:schemeClr val="accent1"/>
+            </a:lnRef>
+            <a:fillRef idx="0">
+              <a:schemeClr val="accent1"/>
+            </a:fillRef>
+            <a:effectRef idx="0">
+              <a:schemeClr val="accent1"/>
+            </a:effectRef>
+            <a:fontRef idx="minor">
+              <a:schemeClr val="tx1"/>
+            </a:fontRef>
+          </p:style>
+          <p:txBody>
+            <a:bodyPr rtlCol="0" anchor="ctr"/>
+            <a:lstStyle/>
+            <a:p>
+              <a:pPr algn="ctr"/>
+              <a:endParaRPr lang="zh-CN" altLang="en-US" dirty="0"/>
+            </a:p>
+          </p:txBody>
+        </p:sp>
+        <mc:AlternateContent xmlns:mc="http://schemas.openxmlformats.org/markup-compatibility/2006">
+          <mc:Choice xmlns:a14="http://schemas.microsoft.com/office/drawing/2010/main" Requires="a14">
+            <p:sp>
+              <p:nvSpPr>
+                <p:cNvPr id="80" name="文本框 79">
+                  <a:extLst>
+                    <a:ext uri="{FF2B5EF4-FFF2-40B4-BE49-F238E27FC236}">
+                      <a16:creationId xmlns:a16="http://schemas.microsoft.com/office/drawing/2014/main" id="{D211C523-B3F4-0B04-AB1E-1790F285964F}"/>
+                    </a:ext>
+                  </a:extLst>
+                </p:cNvPr>
+                <p:cNvSpPr txBox="1"/>
+                <p:nvPr/>
+              </p:nvSpPr>
+              <p:spPr>
+                <a:xfrm>
+                  <a:off x="6718948" y="3013347"/>
+                  <a:ext cx="151452" cy="153888"/>
+                </a:xfrm>
+                <a:prstGeom prst="rect">
+                  <a:avLst/>
+                </a:prstGeom>
+                <a:noFill/>
+              </p:spPr>
+              <p:txBody>
+                <a:bodyPr wrap="none" lIns="0" tIns="0" rIns="0" bIns="0" rtlCol="0">
+                  <a:spAutoFit/>
+                </a:bodyPr>
+                <a:lstStyle/>
+                <a:p>
+                  <a14:m>
+                    <m:oMathPara xmlns:m="http://schemas.openxmlformats.org/officeDocument/2006/math">
+                      <m:oMath>
+                        <m:sSub>
+                          <m:sSubPr>
+                            <m:ctrlPr>
+                              <a:rPr lang="en-US" altLang="zh-CN" sz="1000" b="0" i="1" smtClean="0">
+                                <a:latin typeface="Cambria Math" panose="02040503050406030204" pitchFamily="18" charset="0"/>
+                              </a:rPr>
+                            </m:ctrlPr>
+                          </m:sSubPr>
+                          <m:e>
+                            <m:r>
+                              <a:rPr lang="en-US" altLang="zh-CN" sz="1000" b="0" i="1" smtClean="0">
+                                <a:latin typeface="Cambria Math" panose="02040503050406030204" pitchFamily="18" charset="0"/>
+                              </a:rPr>
+                              <m:t>𝜃</m:t>
+                            </m:r>
+                          </m:e>
+                          <m:sub>
+                            <m:r>
+                              <a:rPr lang="en-US" altLang="zh-CN" sz="1000" b="0" i="1" smtClean="0">
+                                <a:latin typeface="Cambria Math" panose="02040503050406030204" pitchFamily="18" charset="0"/>
+                              </a:rPr>
+                              <m:t>𝑟</m:t>
+                            </m:r>
+                          </m:sub>
+                        </m:sSub>
+                      </m:oMath>
+                    </m:oMathPara>
+                  </a14:m>
+                  <a:endParaRPr lang="en-US" altLang="zh-CN" sz="1000" b="0" dirty="0"/>
+                </a:p>
+              </p:txBody>
+            </p:sp>
+          </mc:Choice>
+          <mc:Fallback>
+            <p:sp>
+              <p:nvSpPr>
+                <p:cNvPr id="80" name="文本框 79">
+                  <a:extLst>
+                    <a:ext uri="{FF2B5EF4-FFF2-40B4-BE49-F238E27FC236}">
+                      <a16:creationId xmlns:a16="http://schemas.microsoft.com/office/drawing/2014/main" id="{D211C523-B3F4-0B04-AB1E-1790F285964F}"/>
+                    </a:ext>
+                  </a:extLst>
+                </p:cNvPr>
+                <p:cNvSpPr txBox="1">
+                  <a:spLocks noRot="1" noChangeAspect="1" noMove="1" noResize="1" noEditPoints="1" noAdjustHandles="1" noChangeArrowheads="1" noChangeShapeType="1" noTextEdit="1"/>
+                </p:cNvSpPr>
+                <p:nvPr/>
+              </p:nvSpPr>
+              <p:spPr>
+                <a:xfrm>
+                  <a:off x="6718948" y="3013347"/>
+                  <a:ext cx="151452" cy="153888"/>
+                </a:xfrm>
+                <a:prstGeom prst="rect">
+                  <a:avLst/>
+                </a:prstGeom>
+                <a:blipFill>
+                  <a:blip r:embed="rId12"/>
+                  <a:stretch>
+                    <a:fillRect l="-20000" b="-7692"/>
                   </a:stretch>
                 </a:blipFill>
               </p:spPr>
@@ -6283,11 +7302,31 @@
         </mc:AlternateContent>
       </p:grpSp>
     </p:spTree>
-    <p:extLst>
-      <p:ext uri="{BB962C8B-B14F-4D97-AF65-F5344CB8AC3E}">
-        <p14:creationId xmlns:p14="http://schemas.microsoft.com/office/powerpoint/2010/main" val="1901268386"/>
-      </p:ext>
-    </p:extLst>
+  </p:cSld>
+  <p:clrMapOvr>
+    <a:masterClrMapping/>
+  </p:clrMapOvr>
+</p:sld>
+</file>
+
+<file path=ppt/slides/slide12.xml><?xml version="1.0" encoding="utf-8"?>
+<p:sld xmlns:a="http://schemas.openxmlformats.org/drawingml/2006/main" xmlns:r="http://schemas.openxmlformats.org/officeDocument/2006/relationships" xmlns:p="http://schemas.openxmlformats.org/presentationml/2006/main">
+  <p:cSld>
+    <p:spTree>
+      <p:nvGrpSpPr>
+        <p:cNvPr id="1" name=""/>
+        <p:cNvGrpSpPr/>
+        <p:nvPr/>
+      </p:nvGrpSpPr>
+      <p:grpSpPr>
+        <a:xfrm>
+          <a:off x="0" y="0"/>
+          <a:ext cx="0" cy="0"/>
+          <a:chOff x="0" y="0"/>
+          <a:chExt cx="0" cy="0"/>
+        </a:xfrm>
+      </p:grpSpPr>
+    </p:spTree>
   </p:cSld>
   <p:clrMapOvr>
     <a:masterClrMapping/>
@@ -8468,10 +9507,7 @@
                 <a:pPr/>
                 <a14:m>
                   <m:oMathPara xmlns:m="http://schemas.openxmlformats.org/officeDocument/2006/math">
-                    <m:oMathParaPr>
-                      <m:jc m:val="centerGroup"/>
-                    </m:oMathParaPr>
-                    <m:oMath xmlns:m="http://schemas.openxmlformats.org/officeDocument/2006/math">
+                    <m:oMath>
                       <m:r>
                         <m:rPr>
                           <m:sty m:val="p"/>
@@ -8681,10 +9717,7 @@
                 <a:pPr/>
                 <a14:m>
                   <m:oMathPara xmlns:m="http://schemas.openxmlformats.org/officeDocument/2006/math">
-                    <m:oMathParaPr>
-                      <m:jc m:val="centerGroup"/>
-                    </m:oMathParaPr>
-                    <m:oMath xmlns:m="http://schemas.openxmlformats.org/officeDocument/2006/math">
+                    <m:oMath>
                       <m:r>
                         <a:rPr lang="en-US" altLang="zh-CN" b="0" i="1" smtClean="0">
                           <a:latin typeface="Cambria Math" panose="02040503050406030204" pitchFamily="18" charset="0"/>
@@ -8874,10 +9907,7 @@
                 <a:pPr/>
                 <a14:m>
                   <m:oMathPara xmlns:m="http://schemas.openxmlformats.org/officeDocument/2006/math">
-                    <m:oMathParaPr>
-                      <m:jc m:val="centerGroup"/>
-                    </m:oMathParaPr>
-                    <m:oMath xmlns:m="http://schemas.openxmlformats.org/officeDocument/2006/math">
+                    <m:oMath>
                       <m:r>
                         <a:rPr lang="en-US" altLang="zh-CN" b="0" i="1" smtClean="0">
                           <a:latin typeface="Cambria Math" panose="02040503050406030204" pitchFamily="18" charset="0"/>
@@ -9067,10 +10097,7 @@
                 <a:pPr/>
                 <a14:m>
                   <m:oMathPara xmlns:m="http://schemas.openxmlformats.org/officeDocument/2006/math">
-                    <m:oMathParaPr>
-                      <m:jc m:val="centerGroup"/>
-                    </m:oMathParaPr>
-                    <m:oMath xmlns:m="http://schemas.openxmlformats.org/officeDocument/2006/math">
+                    <m:oMath>
                       <m:r>
                         <a:rPr lang="en-US" altLang="zh-CN" b="0" i="1" smtClean="0">
                           <a:latin typeface="Cambria Math" panose="02040503050406030204" pitchFamily="18" charset="0"/>
@@ -9260,10 +10287,7 @@
                 <a:pPr/>
                 <a14:m>
                   <m:oMathPara xmlns:m="http://schemas.openxmlformats.org/officeDocument/2006/math">
-                    <m:oMathParaPr>
-                      <m:jc m:val="centerGroup"/>
-                    </m:oMathParaPr>
-                    <m:oMath xmlns:m="http://schemas.openxmlformats.org/officeDocument/2006/math">
+                    <m:oMath>
                       <m:r>
                         <a:rPr lang="en-US" altLang="zh-CN" b="0" i="1" smtClean="0">
                           <a:latin typeface="Cambria Math" panose="02040503050406030204" pitchFamily="18" charset="0"/>
@@ -9453,10 +10477,7 @@
                 <a:pPr/>
                 <a14:m>
                   <m:oMathPara xmlns:m="http://schemas.openxmlformats.org/officeDocument/2006/math">
-                    <m:oMathParaPr>
-                      <m:jc m:val="centerGroup"/>
-                    </m:oMathParaPr>
-                    <m:oMath xmlns:m="http://schemas.openxmlformats.org/officeDocument/2006/math">
+                    <m:oMath>
                       <m:r>
                         <m:rPr>
                           <m:sty m:val="p"/>
@@ -9666,10 +10687,7 @@
                 <a:pPr/>
                 <a14:m>
                   <m:oMathPara xmlns:m="http://schemas.openxmlformats.org/officeDocument/2006/math">
-                    <m:oMathParaPr>
-                      <m:jc m:val="centerGroup"/>
-                    </m:oMathParaPr>
-                    <m:oMath xmlns:m="http://schemas.openxmlformats.org/officeDocument/2006/math">
+                    <m:oMath>
                       <m:r>
                         <m:rPr>
                           <m:sty m:val="p"/>
@@ -9879,10 +10897,7 @@
                 <a:pPr/>
                 <a14:m>
                   <m:oMathPara xmlns:m="http://schemas.openxmlformats.org/officeDocument/2006/math">
-                    <m:oMathParaPr>
-                      <m:jc m:val="centerGroup"/>
-                    </m:oMathParaPr>
-                    <m:oMath xmlns:m="http://schemas.openxmlformats.org/officeDocument/2006/math">
+                    <m:oMath>
                       <m:r>
                         <m:rPr>
                           <m:sty m:val="p"/>
@@ -11389,10 +12404,7 @@
                   <a:pPr/>
                   <a14:m>
                     <m:oMathPara xmlns:m="http://schemas.openxmlformats.org/officeDocument/2006/math">
-                      <m:oMathParaPr>
-                        <m:jc m:val="centerGroup"/>
-                      </m:oMathParaPr>
-                      <m:oMath xmlns:m="http://schemas.openxmlformats.org/officeDocument/2006/math">
+                      <m:oMath>
                         <m:sSub>
                           <m:sSubPr>
                             <m:ctrlPr>
@@ -11633,10 +12645,7 @@
                   <a:pPr/>
                   <a14:m>
                     <m:oMathPara xmlns:m="http://schemas.openxmlformats.org/officeDocument/2006/math">
-                      <m:oMathParaPr>
-                        <m:jc m:val="centerGroup"/>
-                      </m:oMathParaPr>
-                      <m:oMath xmlns:m="http://schemas.openxmlformats.org/officeDocument/2006/math">
+                      <m:oMath>
                         <m:sSub>
                           <m:sSubPr>
                             <m:ctrlPr>
@@ -11749,10 +12758,7 @@
                   <a:pPr/>
                   <a14:m>
                     <m:oMathPara xmlns:m="http://schemas.openxmlformats.org/officeDocument/2006/math">
-                      <m:oMathParaPr>
-                        <m:jc m:val="centerGroup"/>
-                      </m:oMathParaPr>
-                      <m:oMath xmlns:m="http://schemas.openxmlformats.org/officeDocument/2006/math">
+                      <m:oMath>
                         <m:sSub>
                           <m:sSubPr>
                             <m:ctrlPr>
@@ -15431,10 +16437,7 @@
                   <a:pPr/>
                   <a14:m>
                     <m:oMathPara xmlns:m="http://schemas.openxmlformats.org/officeDocument/2006/math">
-                      <m:oMathParaPr>
-                        <m:jc m:val="centerGroup"/>
-                      </m:oMathParaPr>
-                      <m:oMath xmlns:m="http://schemas.openxmlformats.org/officeDocument/2006/math">
+                      <m:oMath>
                         <m:acc>
                           <m:accPr>
                             <m:chr m:val="⃗"/>
@@ -15570,10 +16573,7 @@
                   <a:pPr/>
                   <a14:m>
                     <m:oMathPara xmlns:m="http://schemas.openxmlformats.org/officeDocument/2006/math">
-                      <m:oMathParaPr>
-                        <m:jc m:val="centerGroup"/>
-                      </m:oMathParaPr>
-                      <m:oMath xmlns:m="http://schemas.openxmlformats.org/officeDocument/2006/math">
+                      <m:oMath>
                         <m:acc>
                           <m:accPr>
                             <m:chr m:val="⃗"/>
@@ -15709,10 +16709,7 @@
                   <a:pPr/>
                   <a14:m>
                     <m:oMathPara xmlns:m="http://schemas.openxmlformats.org/officeDocument/2006/math">
-                      <m:oMathParaPr>
-                        <m:jc m:val="centerGroup"/>
-                      </m:oMathParaPr>
-                      <m:oMath xmlns:m="http://schemas.openxmlformats.org/officeDocument/2006/math">
+                      <m:oMath>
                         <m:acc>
                           <m:accPr>
                             <m:chr m:val="⃗"/>
@@ -16372,10 +17369,7 @@
                   <a:pPr/>
                   <a14:m>
                     <m:oMathPara xmlns:m="http://schemas.openxmlformats.org/officeDocument/2006/math">
-                      <m:oMathParaPr>
-                        <m:jc m:val="centerGroup"/>
-                      </m:oMathParaPr>
-                      <m:oMath xmlns:m="http://schemas.openxmlformats.org/officeDocument/2006/math">
+                      <m:oMath>
                         <m:f>
                           <m:fPr>
                             <m:ctrlPr>
@@ -16513,10 +17507,7 @@
                   <a:pPr/>
                   <a14:m>
                     <m:oMathPara xmlns:m="http://schemas.openxmlformats.org/officeDocument/2006/math">
-                      <m:oMathParaPr>
-                        <m:jc m:val="centerGroup"/>
-                      </m:oMathParaPr>
-                      <m:oMath xmlns:m="http://schemas.openxmlformats.org/officeDocument/2006/math">
+                      <m:oMath>
                         <m:r>
                           <a:rPr lang="en-US" altLang="zh-CN" sz="800" b="0" i="1" smtClean="0">
                             <a:solidFill>
@@ -16601,10 +17592,7 @@
                   <a:pPr/>
                   <a14:m>
                     <m:oMathPara xmlns:m="http://schemas.openxmlformats.org/officeDocument/2006/math">
-                      <m:oMathParaPr>
-                        <m:jc m:val="centerGroup"/>
-                      </m:oMathParaPr>
-                      <m:oMath xmlns:m="http://schemas.openxmlformats.org/officeDocument/2006/math">
+                      <m:oMath>
                         <m:r>
                           <a:rPr lang="en-US" altLang="zh-CN" sz="800" b="0" i="1" smtClean="0">
                             <a:solidFill>
@@ -16689,10 +17677,7 @@
                   <a:pPr/>
                   <a14:m>
                     <m:oMathPara xmlns:m="http://schemas.openxmlformats.org/officeDocument/2006/math">
-                      <m:oMathParaPr>
-                        <m:jc m:val="centerGroup"/>
-                      </m:oMathParaPr>
-                      <m:oMath xmlns:m="http://schemas.openxmlformats.org/officeDocument/2006/math">
+                      <m:oMath>
                         <m:r>
                           <m:rPr>
                             <m:sty m:val="p"/>
@@ -17221,10 +18206,7 @@
                   <a:pPr/>
                   <a14:m>
                     <m:oMathPara xmlns:m="http://schemas.openxmlformats.org/officeDocument/2006/math">
-                      <m:oMathParaPr>
-                        <m:jc m:val="centerGroup"/>
-                      </m:oMathParaPr>
-                      <m:oMath xmlns:m="http://schemas.openxmlformats.org/officeDocument/2006/math">
+                      <m:oMath>
                         <m:f>
                           <m:fPr>
                             <m:ctrlPr>
@@ -17362,10 +18344,7 @@
                   <a:pPr/>
                   <a14:m>
                     <m:oMathPara xmlns:m="http://schemas.openxmlformats.org/officeDocument/2006/math">
-                      <m:oMathParaPr>
-                        <m:jc m:val="centerGroup"/>
-                      </m:oMathParaPr>
-                      <m:oMath xmlns:m="http://schemas.openxmlformats.org/officeDocument/2006/math">
+                      <m:oMath>
                         <m:r>
                           <a:rPr lang="en-US" altLang="zh-CN" sz="800" b="0" i="1" smtClean="0">
                             <a:solidFill>
@@ -17450,10 +18429,7 @@
                   <a:pPr/>
                   <a14:m>
                     <m:oMathPara xmlns:m="http://schemas.openxmlformats.org/officeDocument/2006/math">
-                      <m:oMathParaPr>
-                        <m:jc m:val="centerGroup"/>
-                      </m:oMathParaPr>
-                      <m:oMath xmlns:m="http://schemas.openxmlformats.org/officeDocument/2006/math">
+                      <m:oMath>
                         <m:r>
                           <a:rPr lang="en-US" altLang="zh-CN" sz="800" b="0" i="1" smtClean="0">
                             <a:solidFill>
@@ -17538,10 +18514,7 @@
                   <a:pPr/>
                   <a14:m>
                     <m:oMathPara xmlns:m="http://schemas.openxmlformats.org/officeDocument/2006/math">
-                      <m:oMathParaPr>
-                        <m:jc m:val="centerGroup"/>
-                      </m:oMathParaPr>
-                      <m:oMath xmlns:m="http://schemas.openxmlformats.org/officeDocument/2006/math">
+                      <m:oMath>
                         <m:r>
                           <m:rPr>
                             <m:sty m:val="p"/>

--- a/PPT/optic.pptx
+++ b/PPT/optic.pptx
@@ -255,7 +255,7 @@
           <a:p>
             <a:fld id="{D997B5FA-0921-464F-AAE1-844C04324D75}" type="datetimeFigureOut">
               <a:rPr lang="zh-CN" altLang="en-US" smtClean="0"/>
-              <a:t>2026-09-29</a:t>
+              <a:t>2026-10-02</a:t>
             </a:fld>
             <a:endParaRPr lang="zh-CN" altLang="en-US"/>
           </a:p>
@@ -418,7 +418,7 @@
           <a:p>
             <a:fld id="{D997B5FA-0921-464F-AAE1-844C04324D75}" type="datetimeFigureOut">
               <a:rPr lang="zh-CN" altLang="en-US" smtClean="0"/>
-              <a:t>2026-09-29</a:t>
+              <a:t>2026-10-02</a:t>
             </a:fld>
             <a:endParaRPr lang="zh-CN" altLang="en-US"/>
           </a:p>
@@ -591,7 +591,7 @@
           <a:p>
             <a:fld id="{D997B5FA-0921-464F-AAE1-844C04324D75}" type="datetimeFigureOut">
               <a:rPr lang="zh-CN" altLang="en-US" smtClean="0"/>
-              <a:t>2026-09-29</a:t>
+              <a:t>2026-10-02</a:t>
             </a:fld>
             <a:endParaRPr lang="zh-CN" altLang="en-US"/>
           </a:p>
@@ -754,7 +754,7 @@
           <a:p>
             <a:fld id="{D997B5FA-0921-464F-AAE1-844C04324D75}" type="datetimeFigureOut">
               <a:rPr lang="zh-CN" altLang="en-US" smtClean="0"/>
-              <a:t>2026-09-29</a:t>
+              <a:t>2026-10-02</a:t>
             </a:fld>
             <a:endParaRPr lang="zh-CN" altLang="en-US"/>
           </a:p>
@@ -994,7 +994,7 @@
           <a:p>
             <a:fld id="{D997B5FA-0921-464F-AAE1-844C04324D75}" type="datetimeFigureOut">
               <a:rPr lang="zh-CN" altLang="en-US" smtClean="0"/>
-              <a:t>2026-09-29</a:t>
+              <a:t>2026-10-02</a:t>
             </a:fld>
             <a:endParaRPr lang="zh-CN" altLang="en-US"/>
           </a:p>
@@ -1218,7 +1218,7 @@
           <a:p>
             <a:fld id="{D997B5FA-0921-464F-AAE1-844C04324D75}" type="datetimeFigureOut">
               <a:rPr lang="zh-CN" altLang="en-US" smtClean="0"/>
-              <a:t>2026-09-29</a:t>
+              <a:t>2026-10-02</a:t>
             </a:fld>
             <a:endParaRPr lang="zh-CN" altLang="en-US"/>
           </a:p>
@@ -1577,7 +1577,7 @@
           <a:p>
             <a:fld id="{D997B5FA-0921-464F-AAE1-844C04324D75}" type="datetimeFigureOut">
               <a:rPr lang="zh-CN" altLang="en-US" smtClean="0"/>
-              <a:t>2026-09-29</a:t>
+              <a:t>2026-10-02</a:t>
             </a:fld>
             <a:endParaRPr lang="zh-CN" altLang="en-US"/>
           </a:p>
@@ -1689,7 +1689,7 @@
           <a:p>
             <a:fld id="{D997B5FA-0921-464F-AAE1-844C04324D75}" type="datetimeFigureOut">
               <a:rPr lang="zh-CN" altLang="en-US" smtClean="0"/>
-              <a:t>2026-09-29</a:t>
+              <a:t>2026-10-02</a:t>
             </a:fld>
             <a:endParaRPr lang="zh-CN" altLang="en-US"/>
           </a:p>
@@ -1779,7 +1779,7 @@
           <a:p>
             <a:fld id="{D997B5FA-0921-464F-AAE1-844C04324D75}" type="datetimeFigureOut">
               <a:rPr lang="zh-CN" altLang="en-US" smtClean="0"/>
-              <a:t>2026-09-29</a:t>
+              <a:t>2026-10-02</a:t>
             </a:fld>
             <a:endParaRPr lang="zh-CN" altLang="en-US"/>
           </a:p>
@@ -2049,7 +2049,7 @@
           <a:p>
             <a:fld id="{D997B5FA-0921-464F-AAE1-844C04324D75}" type="datetimeFigureOut">
               <a:rPr lang="zh-CN" altLang="en-US" smtClean="0"/>
-              <a:t>2026-09-29</a:t>
+              <a:t>2026-10-02</a:t>
             </a:fld>
             <a:endParaRPr lang="zh-CN" altLang="en-US"/>
           </a:p>
@@ -2296,7 +2296,7 @@
           <a:p>
             <a:fld id="{D997B5FA-0921-464F-AAE1-844C04324D75}" type="datetimeFigureOut">
               <a:rPr lang="zh-CN" altLang="en-US" smtClean="0"/>
-              <a:t>2026-09-29</a:t>
+              <a:t>2026-10-02</a:t>
             </a:fld>
             <a:endParaRPr lang="zh-CN" altLang="en-US"/>
           </a:p>
@@ -2502,7 +2502,7 @@
           <a:p>
             <a:fld id="{D997B5FA-0921-464F-AAE1-844C04324D75}" type="datetimeFigureOut">
               <a:rPr lang="zh-CN" altLang="en-US" smtClean="0"/>
-              <a:t>2026-09-29</a:t>
+              <a:t>2026-10-02</a:t>
             </a:fld>
             <a:endParaRPr lang="zh-CN" altLang="en-US"/>
           </a:p>
@@ -6086,13 +6086,7 @@
       </p:grpSp>
       <p:grpSp>
         <p:nvGrpSpPr>
-          <p:cNvPr id="82" name="组合 81">
-            <a:extLst>
-              <a:ext uri="{FF2B5EF4-FFF2-40B4-BE49-F238E27FC236}">
-                <a16:creationId xmlns:a16="http://schemas.microsoft.com/office/drawing/2014/main" id="{E808CD6E-8D7E-54AA-F11A-33A132742BAD}"/>
-              </a:ext>
-            </a:extLst>
-          </p:cNvPr>
+          <p:cNvPr id="82" name="组合 81"/>
           <p:cNvGrpSpPr/>
           <p:nvPr/>
         </p:nvGrpSpPr>
@@ -6106,13 +6100,7 @@
         </p:grpSpPr>
         <p:sp>
           <p:nvSpPr>
-            <p:cNvPr id="2" name="椭圆 1">
-              <a:extLst>
-                <a:ext uri="{FF2B5EF4-FFF2-40B4-BE49-F238E27FC236}">
-                  <a16:creationId xmlns:a16="http://schemas.microsoft.com/office/drawing/2014/main" id="{895964A3-D49E-E97F-FFE0-5BA3774A727C}"/>
-                </a:ext>
-              </a:extLst>
-            </p:cNvPr>
+            <p:cNvPr id="2" name="椭圆 1"/>
             <p:cNvSpPr/>
             <p:nvPr/>
           </p:nvSpPr>
@@ -6158,13 +6146,7 @@
         </p:sp>
         <p:cxnSp>
           <p:nvCxnSpPr>
-            <p:cNvPr id="7" name="直接连接符 6">
-              <a:extLst>
-                <a:ext uri="{FF2B5EF4-FFF2-40B4-BE49-F238E27FC236}">
-                  <a16:creationId xmlns:a16="http://schemas.microsoft.com/office/drawing/2014/main" id="{5FBEE326-F31B-3318-1327-CF9824D47ABF}"/>
-                </a:ext>
-              </a:extLst>
-            </p:cNvPr>
+            <p:cNvPr id="7" name="直接连接符 6"/>
             <p:cNvCxnSpPr>
               <a:stCxn id="2" idx="0"/>
             </p:cNvCxnSpPr>
@@ -6201,16 +6183,8 @@
         </p:cxnSp>
         <p:cxnSp>
           <p:nvCxnSpPr>
-            <p:cNvPr id="13" name="直接连接符 12">
-              <a:extLst>
-                <a:ext uri="{FF2B5EF4-FFF2-40B4-BE49-F238E27FC236}">
-                  <a16:creationId xmlns:a16="http://schemas.microsoft.com/office/drawing/2014/main" id="{EA1A56CC-E2CF-5E5F-A432-51DCFC8C145F}"/>
-                </a:ext>
-              </a:extLst>
-            </p:cNvPr>
-            <p:cNvCxnSpPr>
-              <a:cxnSpLocks/>
-            </p:cNvCxnSpPr>
+            <p:cNvPr id="13" name="直接连接符 12"/>
+            <p:cNvCxnSpPr/>
             <p:nvPr/>
           </p:nvCxnSpPr>
           <p:spPr>
@@ -6245,13 +6219,7 @@
         </p:cxnSp>
         <p:cxnSp>
           <p:nvCxnSpPr>
-            <p:cNvPr id="27" name="直接连接符 26">
-              <a:extLst>
-                <a:ext uri="{FF2B5EF4-FFF2-40B4-BE49-F238E27FC236}">
-                  <a16:creationId xmlns:a16="http://schemas.microsoft.com/office/drawing/2014/main" id="{98C76084-7711-BA7E-F350-6517B0B57334}"/>
-                </a:ext>
-              </a:extLst>
-            </p:cNvPr>
+            <p:cNvPr id="27" name="直接连接符 26"/>
             <p:cNvCxnSpPr>
               <a:stCxn id="2" idx="0"/>
               <a:endCxn id="2" idx="4"/>
@@ -6289,16 +6257,8 @@
         </p:cxnSp>
         <p:cxnSp>
           <p:nvCxnSpPr>
-            <p:cNvPr id="32" name="直接箭头连接符 31">
-              <a:extLst>
-                <a:ext uri="{FF2B5EF4-FFF2-40B4-BE49-F238E27FC236}">
-                  <a16:creationId xmlns:a16="http://schemas.microsoft.com/office/drawing/2014/main" id="{6E38D979-0822-E36C-C313-629D75312EFA}"/>
-                </a:ext>
-              </a:extLst>
-            </p:cNvPr>
-            <p:cNvCxnSpPr>
-              <a:cxnSpLocks/>
-            </p:cNvCxnSpPr>
+            <p:cNvPr id="32" name="直接箭头连接符 31"/>
+            <p:cNvCxnSpPr/>
             <p:nvPr/>
           </p:nvCxnSpPr>
           <p:spPr>
@@ -6333,16 +6293,8 @@
         </p:cxnSp>
         <p:cxnSp>
           <p:nvCxnSpPr>
-            <p:cNvPr id="33" name="直接箭头连接符 32">
-              <a:extLst>
-                <a:ext uri="{FF2B5EF4-FFF2-40B4-BE49-F238E27FC236}">
-                  <a16:creationId xmlns:a16="http://schemas.microsoft.com/office/drawing/2014/main" id="{00C7D843-15AD-9354-D52F-61ED1A0E0101}"/>
-                </a:ext>
-              </a:extLst>
-            </p:cNvPr>
-            <p:cNvCxnSpPr>
-              <a:cxnSpLocks/>
-            </p:cNvCxnSpPr>
+            <p:cNvPr id="33" name="直接箭头连接符 32"/>
+            <p:cNvCxnSpPr/>
             <p:nvPr/>
           </p:nvCxnSpPr>
           <p:spPr>
@@ -6377,13 +6329,7 @@
         </p:cxnSp>
         <p:sp>
           <p:nvSpPr>
-            <p:cNvPr id="40" name="弧形 39">
-              <a:extLst>
-                <a:ext uri="{FF2B5EF4-FFF2-40B4-BE49-F238E27FC236}">
-                  <a16:creationId xmlns:a16="http://schemas.microsoft.com/office/drawing/2014/main" id="{2E4DF5B1-C45E-BF60-E1F8-B4002C900CC2}"/>
-                </a:ext>
-              </a:extLst>
-            </p:cNvPr>
+            <p:cNvPr id="40" name="弧形 39"/>
             <p:cNvSpPr/>
             <p:nvPr/>
           </p:nvSpPr>
@@ -6427,17 +6373,11 @@
             </a:p>
           </p:txBody>
         </p:sp>
-        <mc:AlternateContent xmlns:mc="http://schemas.openxmlformats.org/markup-compatibility/2006">
-          <mc:Choice xmlns:a14="http://schemas.microsoft.com/office/drawing/2010/main" Requires="a14">
+        <mc:AlternateContent xmlns:mc="http://schemas.openxmlformats.org/markup-compatibility/2006" xmlns:a14="http://schemas.microsoft.com/office/drawing/2010/main">
+          <mc:Choice Requires="a14">
             <p:sp>
               <p:nvSpPr>
-                <p:cNvPr id="42" name="文本框 41">
-                  <a:extLst>
-                    <a:ext uri="{FF2B5EF4-FFF2-40B4-BE49-F238E27FC236}">
-                      <a16:creationId xmlns:a16="http://schemas.microsoft.com/office/drawing/2014/main" id="{6CE3D51E-6B73-30D2-B268-C115C3FAF91C}"/>
-                    </a:ext>
-                  </a:extLst>
-                </p:cNvPr>
+                <p:cNvPr id="42" name="文本框 41"/>
                 <p:cNvSpPr txBox="1"/>
                 <p:nvPr/>
               </p:nvSpPr>
@@ -6457,6 +6397,7 @@
                 </a:bodyPr>
                 <a:lstStyle/>
                 <a:p>
+                  <a:pPr/>
                   <a14:m>
                     <m:oMathPara xmlns:m="http://schemas.openxmlformats.org/officeDocument/2006/math">
                       <m:oMath>
@@ -6504,16 +6445,10 @@
               </p:txBody>
             </p:sp>
           </mc:Choice>
-          <mc:Fallback>
+          <mc:Fallback xmlns="">
             <p:sp>
               <p:nvSpPr>
-                <p:cNvPr id="42" name="文本框 41">
-                  <a:extLst>
-                    <a:ext uri="{FF2B5EF4-FFF2-40B4-BE49-F238E27FC236}">
-                      <a16:creationId xmlns:a16="http://schemas.microsoft.com/office/drawing/2014/main" id="{6CE3D51E-6B73-30D2-B268-C115C3FAF91C}"/>
-                    </a:ext>
-                  </a:extLst>
-                </p:cNvPr>
+                <p:cNvPr id="42" name="文本框 41"/>
                 <p:cNvSpPr txBox="1">
                   <a:spLocks noRot="1" noChangeAspect="1" noMove="1" noResize="1" noEditPoints="1" noAdjustHandles="1" noChangeArrowheads="1" noChangeShapeType="1" noTextEdit="1"/>
                 </p:cNvSpPr>
@@ -6527,11 +6462,8 @@
                 <a:prstGeom prst="rect">
                   <a:avLst/>
                 </a:prstGeom>
-                <a:blipFill>
+                <a:blipFill rotWithShape="1">
                   <a:blip r:embed="rId9"/>
-                  <a:stretch>
-                    <a:fillRect l="-7547" r="-3774" b="-20000"/>
-                  </a:stretch>
                 </a:blipFill>
               </p:spPr>
               <p:txBody>
@@ -6551,16 +6483,8 @@
         </mc:AlternateContent>
         <p:cxnSp>
           <p:nvCxnSpPr>
-            <p:cNvPr id="46" name="直接箭头连接符 45">
-              <a:extLst>
-                <a:ext uri="{FF2B5EF4-FFF2-40B4-BE49-F238E27FC236}">
-                  <a16:creationId xmlns:a16="http://schemas.microsoft.com/office/drawing/2014/main" id="{5299FAA4-83A8-0E80-D150-04822DECCF40}"/>
-                </a:ext>
-              </a:extLst>
-            </p:cNvPr>
-            <p:cNvCxnSpPr>
-              <a:cxnSpLocks/>
-            </p:cNvCxnSpPr>
+            <p:cNvPr id="46" name="直接箭头连接符 45"/>
+            <p:cNvCxnSpPr/>
             <p:nvPr/>
           </p:nvCxnSpPr>
           <p:spPr>
@@ -6595,16 +6519,8 @@
         </p:cxnSp>
         <p:cxnSp>
           <p:nvCxnSpPr>
-            <p:cNvPr id="48" name="直接箭头连接符 47">
-              <a:extLst>
-                <a:ext uri="{FF2B5EF4-FFF2-40B4-BE49-F238E27FC236}">
-                  <a16:creationId xmlns:a16="http://schemas.microsoft.com/office/drawing/2014/main" id="{47835013-7C37-64FE-1866-6AE19E7EFF70}"/>
-                </a:ext>
-              </a:extLst>
-            </p:cNvPr>
-            <p:cNvCxnSpPr>
-              <a:cxnSpLocks/>
-            </p:cNvCxnSpPr>
+            <p:cNvPr id="48" name="直接箭头连接符 47"/>
+            <p:cNvCxnSpPr/>
             <p:nvPr/>
           </p:nvCxnSpPr>
           <p:spPr>
@@ -6639,16 +6555,8 @@
         </p:cxnSp>
         <p:cxnSp>
           <p:nvCxnSpPr>
-            <p:cNvPr id="52" name="直接箭头连接符 51">
-              <a:extLst>
-                <a:ext uri="{FF2B5EF4-FFF2-40B4-BE49-F238E27FC236}">
-                  <a16:creationId xmlns:a16="http://schemas.microsoft.com/office/drawing/2014/main" id="{F96ACDAE-9087-5A68-213B-A2DA80554185}"/>
-                </a:ext>
-              </a:extLst>
-            </p:cNvPr>
-            <p:cNvCxnSpPr>
-              <a:cxnSpLocks/>
-            </p:cNvCxnSpPr>
+            <p:cNvPr id="52" name="直接箭头连接符 51"/>
+            <p:cNvCxnSpPr/>
             <p:nvPr/>
           </p:nvCxnSpPr>
           <p:spPr>
@@ -6683,16 +6591,8 @@
         </p:cxnSp>
         <p:cxnSp>
           <p:nvCxnSpPr>
-            <p:cNvPr id="54" name="直接箭头连接符 53">
-              <a:extLst>
-                <a:ext uri="{FF2B5EF4-FFF2-40B4-BE49-F238E27FC236}">
-                  <a16:creationId xmlns:a16="http://schemas.microsoft.com/office/drawing/2014/main" id="{6273FD85-2A73-59EA-782B-1BD62CB03627}"/>
-                </a:ext>
-              </a:extLst>
-            </p:cNvPr>
-            <p:cNvCxnSpPr>
-              <a:cxnSpLocks/>
-            </p:cNvCxnSpPr>
+            <p:cNvPr id="54" name="直接箭头连接符 53"/>
+            <p:cNvCxnSpPr/>
             <p:nvPr/>
           </p:nvCxnSpPr>
           <p:spPr>
@@ -6727,13 +6627,7 @@
         </p:cxnSp>
         <p:sp>
           <p:nvSpPr>
-            <p:cNvPr id="63" name="弧形 62">
-              <a:extLst>
-                <a:ext uri="{FF2B5EF4-FFF2-40B4-BE49-F238E27FC236}">
-                  <a16:creationId xmlns:a16="http://schemas.microsoft.com/office/drawing/2014/main" id="{211D3C25-4913-E928-8669-57319CB21790}"/>
-                </a:ext>
-              </a:extLst>
-            </p:cNvPr>
+            <p:cNvPr id="63" name="弧形 62"/>
             <p:cNvSpPr/>
             <p:nvPr/>
           </p:nvSpPr>
@@ -6777,17 +6671,11 @@
             </a:p>
           </p:txBody>
         </p:sp>
-        <mc:AlternateContent xmlns:mc="http://schemas.openxmlformats.org/markup-compatibility/2006">
-          <mc:Choice xmlns:a14="http://schemas.microsoft.com/office/drawing/2010/main" Requires="a14">
+        <mc:AlternateContent xmlns:mc="http://schemas.openxmlformats.org/markup-compatibility/2006" xmlns:a14="http://schemas.microsoft.com/office/drawing/2010/main">
+          <mc:Choice Requires="a14">
             <p:sp>
               <p:nvSpPr>
-                <p:cNvPr id="64" name="文本框 63">
-                  <a:extLst>
-                    <a:ext uri="{FF2B5EF4-FFF2-40B4-BE49-F238E27FC236}">
-                      <a16:creationId xmlns:a16="http://schemas.microsoft.com/office/drawing/2014/main" id="{D18C026E-56E2-BF3C-1E88-4001802C12EF}"/>
-                    </a:ext>
-                  </a:extLst>
-                </p:cNvPr>
+                <p:cNvPr id="64" name="文本框 63"/>
                 <p:cNvSpPr txBox="1"/>
                 <p:nvPr/>
               </p:nvSpPr>
@@ -6807,6 +6695,7 @@
                 </a:bodyPr>
                 <a:lstStyle/>
                 <a:p>
+                  <a:pPr/>
                   <a14:m>
                     <m:oMathPara xmlns:m="http://schemas.openxmlformats.org/officeDocument/2006/math">
                       <m:oMath>
@@ -6843,16 +6732,10 @@
               </p:txBody>
             </p:sp>
           </mc:Choice>
-          <mc:Fallback>
+          <mc:Fallback xmlns="">
             <p:sp>
               <p:nvSpPr>
-                <p:cNvPr id="64" name="文本框 63">
-                  <a:extLst>
-                    <a:ext uri="{FF2B5EF4-FFF2-40B4-BE49-F238E27FC236}">
-                      <a16:creationId xmlns:a16="http://schemas.microsoft.com/office/drawing/2014/main" id="{D18C026E-56E2-BF3C-1E88-4001802C12EF}"/>
-                    </a:ext>
-                  </a:extLst>
-                </p:cNvPr>
+                <p:cNvPr id="64" name="文本框 63"/>
                 <p:cNvSpPr txBox="1">
                   <a:spLocks noRot="1" noChangeAspect="1" noMove="1" noResize="1" noEditPoints="1" noAdjustHandles="1" noChangeArrowheads="1" noChangeShapeType="1" noTextEdit="1"/>
                 </p:cNvSpPr>
@@ -6866,11 +6749,8 @@
                 <a:prstGeom prst="rect">
                   <a:avLst/>
                 </a:prstGeom>
-                <a:blipFill>
+                <a:blipFill rotWithShape="1">
                   <a:blip r:embed="rId10"/>
-                  <a:stretch>
-                    <a:fillRect l="-25000" r="-4167" b="-12000"/>
-                  </a:stretch>
                 </a:blipFill>
               </p:spPr>
               <p:txBody>
@@ -6890,13 +6770,7 @@
         </mc:AlternateContent>
         <p:sp>
           <p:nvSpPr>
-            <p:cNvPr id="66" name="弧形 65">
-              <a:extLst>
-                <a:ext uri="{FF2B5EF4-FFF2-40B4-BE49-F238E27FC236}">
-                  <a16:creationId xmlns:a16="http://schemas.microsoft.com/office/drawing/2014/main" id="{0ECE25DC-11FF-F26F-1BE9-AD426E9BEE35}"/>
-                </a:ext>
-              </a:extLst>
-            </p:cNvPr>
+            <p:cNvPr id="66" name="弧形 65"/>
             <p:cNvSpPr/>
             <p:nvPr/>
           </p:nvSpPr>
@@ -6940,17 +6814,11 @@
             </a:p>
           </p:txBody>
         </p:sp>
-        <mc:AlternateContent xmlns:mc="http://schemas.openxmlformats.org/markup-compatibility/2006">
-          <mc:Choice xmlns:a14="http://schemas.microsoft.com/office/drawing/2010/main" Requires="a14">
+        <mc:AlternateContent xmlns:mc="http://schemas.openxmlformats.org/markup-compatibility/2006" xmlns:a14="http://schemas.microsoft.com/office/drawing/2010/main">
+          <mc:Choice Requires="a14">
             <p:sp>
               <p:nvSpPr>
-                <p:cNvPr id="69" name="文本框 68">
-                  <a:extLst>
-                    <a:ext uri="{FF2B5EF4-FFF2-40B4-BE49-F238E27FC236}">
-                      <a16:creationId xmlns:a16="http://schemas.microsoft.com/office/drawing/2014/main" id="{1C2CB72C-4E77-DE88-4222-72B7ED5A2B8F}"/>
-                    </a:ext>
-                  </a:extLst>
-                </p:cNvPr>
+                <p:cNvPr id="69" name="文本框 68"/>
                 <p:cNvSpPr txBox="1"/>
                 <p:nvPr/>
               </p:nvSpPr>
@@ -7007,16 +6875,10 @@
               </p:txBody>
             </p:sp>
           </mc:Choice>
-          <mc:Fallback>
+          <mc:Fallback xmlns="">
             <p:sp>
               <p:nvSpPr>
-                <p:cNvPr id="69" name="文本框 68">
-                  <a:extLst>
-                    <a:ext uri="{FF2B5EF4-FFF2-40B4-BE49-F238E27FC236}">
-                      <a16:creationId xmlns:a16="http://schemas.microsoft.com/office/drawing/2014/main" id="{1C2CB72C-4E77-DE88-4222-72B7ED5A2B8F}"/>
-                    </a:ext>
-                  </a:extLst>
-                </p:cNvPr>
+                <p:cNvPr id="69" name="文本框 68"/>
                 <p:cNvSpPr txBox="1">
                   <a:spLocks noRot="1" noChangeAspect="1" noMove="1" noResize="1" noEditPoints="1" noAdjustHandles="1" noChangeArrowheads="1" noChangeShapeType="1" noTextEdit="1"/>
                 </p:cNvSpPr>
@@ -7030,11 +6892,8 @@
                 <a:prstGeom prst="rect">
                   <a:avLst/>
                 </a:prstGeom>
-                <a:blipFill>
-                  <a:blip r:embed="rId11"/>
-                  <a:stretch>
-                    <a:fillRect l="-24000" b="-7692"/>
-                  </a:stretch>
+                <a:blipFill rotWithShape="1">
+                  <a:blip r:embed="rId10"/>
                 </a:blipFill>
               </p:spPr>
               <p:txBody>
@@ -7054,13 +6913,7 @@
         </mc:AlternateContent>
         <p:cxnSp>
           <p:nvCxnSpPr>
-            <p:cNvPr id="72" name="直接连接符 71">
-              <a:extLst>
-                <a:ext uri="{FF2B5EF4-FFF2-40B4-BE49-F238E27FC236}">
-                  <a16:creationId xmlns:a16="http://schemas.microsoft.com/office/drawing/2014/main" id="{0EEB7617-F57C-6C48-3CC5-B08F270712C9}"/>
-                </a:ext>
-              </a:extLst>
-            </p:cNvPr>
+            <p:cNvPr id="72" name="直接连接符 71"/>
             <p:cNvCxnSpPr>
               <a:stCxn id="2" idx="4"/>
             </p:cNvCxnSpPr>
@@ -7097,13 +6950,7 @@
         </p:cxnSp>
         <p:cxnSp>
           <p:nvCxnSpPr>
-            <p:cNvPr id="75" name="直接连接符 74">
-              <a:extLst>
-                <a:ext uri="{FF2B5EF4-FFF2-40B4-BE49-F238E27FC236}">
-                  <a16:creationId xmlns:a16="http://schemas.microsoft.com/office/drawing/2014/main" id="{5329C86B-8254-EE79-E949-0D87C47ECE52}"/>
-                </a:ext>
-              </a:extLst>
-            </p:cNvPr>
+            <p:cNvPr id="75" name="直接连接符 74"/>
             <p:cNvCxnSpPr/>
             <p:nvPr/>
           </p:nvCxnSpPr>
@@ -7139,13 +6986,7 @@
         </p:cxnSp>
         <p:sp>
           <p:nvSpPr>
-            <p:cNvPr id="79" name="弧形 78">
-              <a:extLst>
-                <a:ext uri="{FF2B5EF4-FFF2-40B4-BE49-F238E27FC236}">
-                  <a16:creationId xmlns:a16="http://schemas.microsoft.com/office/drawing/2014/main" id="{7E24C2B1-7A56-A72C-3467-4B3D2376D924}"/>
-                </a:ext>
-              </a:extLst>
-            </p:cNvPr>
+            <p:cNvPr id="79" name="弧形 78"/>
             <p:cNvSpPr/>
             <p:nvPr/>
           </p:nvSpPr>
@@ -7189,17 +7030,11 @@
             </a:p>
           </p:txBody>
         </p:sp>
-        <mc:AlternateContent xmlns:mc="http://schemas.openxmlformats.org/markup-compatibility/2006">
-          <mc:Choice xmlns:a14="http://schemas.microsoft.com/office/drawing/2010/main" Requires="a14">
+        <mc:AlternateContent xmlns:mc="http://schemas.openxmlformats.org/markup-compatibility/2006" xmlns:a14="http://schemas.microsoft.com/office/drawing/2010/main">
+          <mc:Choice Requires="a14">
             <p:sp>
               <p:nvSpPr>
-                <p:cNvPr id="80" name="文本框 79">
-                  <a:extLst>
-                    <a:ext uri="{FF2B5EF4-FFF2-40B4-BE49-F238E27FC236}">
-                      <a16:creationId xmlns:a16="http://schemas.microsoft.com/office/drawing/2014/main" id="{D211C523-B3F4-0B04-AB1E-1790F285964F}"/>
-                    </a:ext>
-                  </a:extLst>
-                </p:cNvPr>
+                <p:cNvPr id="80" name="文本框 79"/>
                 <p:cNvSpPr txBox="1"/>
                 <p:nvPr/>
               </p:nvSpPr>
@@ -7219,6 +7054,7 @@
                 </a:bodyPr>
                 <a:lstStyle/>
                 <a:p>
+                  <a:pPr/>
                   <a14:m>
                     <m:oMathPara xmlns:m="http://schemas.openxmlformats.org/officeDocument/2006/math">
                       <m:oMath>
@@ -7255,16 +7091,10 @@
               </p:txBody>
             </p:sp>
           </mc:Choice>
-          <mc:Fallback>
+          <mc:Fallback xmlns="">
             <p:sp>
               <p:nvSpPr>
-                <p:cNvPr id="80" name="文本框 79">
-                  <a:extLst>
-                    <a:ext uri="{FF2B5EF4-FFF2-40B4-BE49-F238E27FC236}">
-                      <a16:creationId xmlns:a16="http://schemas.microsoft.com/office/drawing/2014/main" id="{D211C523-B3F4-0B04-AB1E-1790F285964F}"/>
-                    </a:ext>
-                  </a:extLst>
-                </p:cNvPr>
+                <p:cNvPr id="80" name="文本框 79"/>
                 <p:cNvSpPr txBox="1">
                   <a:spLocks noRot="1" noChangeAspect="1" noMove="1" noResize="1" noEditPoints="1" noAdjustHandles="1" noChangeArrowheads="1" noChangeShapeType="1" noTextEdit="1"/>
                 </p:cNvSpPr>
@@ -7278,11 +7108,8 @@
                 <a:prstGeom prst="rect">
                   <a:avLst/>
                 </a:prstGeom>
-                <a:blipFill>
-                  <a:blip r:embed="rId12"/>
-                  <a:stretch>
-                    <a:fillRect l="-20000" b="-7692"/>
-                  </a:stretch>
+                <a:blipFill rotWithShape="1">
+                  <a:blip r:embed="rId11"/>
                 </a:blipFill>
               </p:spPr>
               <p:txBody>
@@ -7326,6 +7153,2302 @@
           <a:chExt cx="0" cy="0"/>
         </a:xfrm>
       </p:grpSpPr>
+      <p:grpSp>
+        <p:nvGrpSpPr>
+          <p:cNvPr id="51" name="组合 50">
+            <a:extLst>
+              <a:ext uri="{FF2B5EF4-FFF2-40B4-BE49-F238E27FC236}">
+                <a16:creationId xmlns:a16="http://schemas.microsoft.com/office/drawing/2014/main" id="{054BF3F9-6364-1DA2-9132-8997C6BB91F6}"/>
+              </a:ext>
+            </a:extLst>
+          </p:cNvPr>
+          <p:cNvGrpSpPr/>
+          <p:nvPr/>
+        </p:nvGrpSpPr>
+        <p:grpSpPr>
+          <a:xfrm>
+            <a:off x="261058" y="414738"/>
+            <a:ext cx="2137410" cy="2707005"/>
+            <a:chOff x="3656330" y="1029335"/>
+            <a:chExt cx="2137410" cy="2707005"/>
+          </a:xfrm>
+        </p:grpSpPr>
+        <p:sp>
+          <p:nvSpPr>
+            <p:cNvPr id="4" name="任意多边形 3"/>
+            <p:cNvSpPr/>
+            <p:nvPr/>
+          </p:nvSpPr>
+          <p:spPr>
+            <a:xfrm>
+              <a:off x="3890645" y="1029335"/>
+              <a:ext cx="1903095" cy="2707005"/>
+            </a:xfrm>
+            <a:custGeom>
+              <a:avLst/>
+              <a:gdLst>
+                <a:gd name="connsiteX0" fmla="*/ 0 w 2997"/>
+                <a:gd name="connsiteY0" fmla="*/ 2418 h 4263"/>
+                <a:gd name="connsiteX1" fmla="*/ 881 w 2997"/>
+                <a:gd name="connsiteY1" fmla="*/ 0 h 4263"/>
+                <a:gd name="connsiteX2" fmla="*/ 2997 w 2997"/>
+                <a:gd name="connsiteY2" fmla="*/ 2418 h 4263"/>
+                <a:gd name="connsiteX3" fmla="*/ 1498 w 2997"/>
+                <a:gd name="connsiteY3" fmla="*/ 4263 h 4263"/>
+                <a:gd name="connsiteX4" fmla="*/ 0 w 2997"/>
+                <a:gd name="connsiteY4" fmla="*/ 2418 h 4263"/>
+              </a:gdLst>
+              <a:ahLst/>
+              <a:cxnLst>
+                <a:cxn ang="0">
+                  <a:pos x="connsiteX0" y="connsiteY0"/>
+                </a:cxn>
+                <a:cxn ang="0">
+                  <a:pos x="connsiteX1" y="connsiteY1"/>
+                </a:cxn>
+                <a:cxn ang="0">
+                  <a:pos x="connsiteX2" y="connsiteY2"/>
+                </a:cxn>
+                <a:cxn ang="0">
+                  <a:pos x="connsiteX3" y="connsiteY3"/>
+                </a:cxn>
+                <a:cxn ang="0">
+                  <a:pos x="connsiteX4" y="connsiteY4"/>
+                </a:cxn>
+              </a:cxnLst>
+              <a:rect l="l" t="t" r="r" b="b"/>
+              <a:pathLst>
+                <a:path w="2997" h="4263">
+                  <a:moveTo>
+                    <a:pt x="0" y="2418"/>
+                  </a:moveTo>
+                  <a:cubicBezTo>
+                    <a:pt x="0" y="1399"/>
+                    <a:pt x="54" y="0"/>
+                    <a:pt x="881" y="0"/>
+                  </a:cubicBezTo>
+                  <a:cubicBezTo>
+                    <a:pt x="1709" y="0"/>
+                    <a:pt x="2997" y="1399"/>
+                    <a:pt x="2997" y="2418"/>
+                  </a:cubicBezTo>
+                  <a:cubicBezTo>
+                    <a:pt x="2997" y="3437"/>
+                    <a:pt x="2326" y="4263"/>
+                    <a:pt x="1498" y="4263"/>
+                  </a:cubicBezTo>
+                  <a:cubicBezTo>
+                    <a:pt x="671" y="4263"/>
+                    <a:pt x="0" y="3437"/>
+                    <a:pt x="0" y="2418"/>
+                  </a:cubicBezTo>
+                  <a:close/>
+                </a:path>
+              </a:pathLst>
+            </a:custGeom>
+            <a:noFill/>
+            <a:ln>
+              <a:solidFill>
+                <a:schemeClr val="tx1"/>
+              </a:solidFill>
+            </a:ln>
+            <a:extLst>
+              <a:ext uri="{909E8E84-426E-40DD-AFC4-6F175D3DCCD1}">
+                <a14:hiddenFill xmlns:a14="http://schemas.microsoft.com/office/drawing/2010/main">
+                  <a:solidFill>
+                    <a:schemeClr val="accent1"/>
+                  </a:solidFill>
+                </a14:hiddenFill>
+              </a:ext>
+            </a:extLst>
+          </p:spPr>
+          <p:style>
+            <a:lnRef idx="2">
+              <a:schemeClr val="accent1">
+                <a:lumMod val="75000"/>
+              </a:schemeClr>
+            </a:lnRef>
+            <a:fillRef idx="1">
+              <a:schemeClr val="accent1"/>
+            </a:fillRef>
+            <a:effectRef idx="0">
+              <a:srgbClr val="FFFFFF"/>
+            </a:effectRef>
+            <a:fontRef idx="minor">
+              <a:schemeClr val="lt1"/>
+            </a:fontRef>
+          </p:style>
+          <p:txBody>
+            <a:bodyPr rtlCol="0" anchor="ctr"/>
+            <a:lstStyle/>
+            <a:p>
+              <a:pPr algn="ctr"/>
+              <a:endParaRPr lang="zh-CN" altLang="en-US"/>
+            </a:p>
+          </p:txBody>
+        </p:sp>
+        <p:sp>
+          <p:nvSpPr>
+            <p:cNvPr id="5" name="椭圆 4"/>
+            <p:cNvSpPr/>
+            <p:nvPr/>
+          </p:nvSpPr>
+          <p:spPr>
+            <a:xfrm>
+              <a:off x="4381500" y="1625600"/>
+              <a:ext cx="452755" cy="452755"/>
+            </a:xfrm>
+            <a:prstGeom prst="ellipse">
+              <a:avLst/>
+            </a:prstGeom>
+            <a:noFill/>
+            <a:ln>
+              <a:solidFill>
+                <a:schemeClr val="tx1"/>
+              </a:solidFill>
+            </a:ln>
+            <a:extLst>
+              <a:ext uri="{909E8E84-426E-40DD-AFC4-6F175D3DCCD1}">
+                <a14:hiddenFill xmlns:a14="http://schemas.microsoft.com/office/drawing/2010/main">
+                  <a:solidFill>
+                    <a:schemeClr val="accent1"/>
+                  </a:solidFill>
+                </a14:hiddenFill>
+              </a:ext>
+            </a:extLst>
+          </p:spPr>
+          <p:style>
+            <a:lnRef idx="2">
+              <a:schemeClr val="accent1">
+                <a:lumMod val="75000"/>
+              </a:schemeClr>
+            </a:lnRef>
+            <a:fillRef idx="1">
+              <a:schemeClr val="accent1"/>
+            </a:fillRef>
+            <a:effectRef idx="0">
+              <a:srgbClr val="FFFFFF"/>
+            </a:effectRef>
+            <a:fontRef idx="minor">
+              <a:schemeClr val="lt1"/>
+            </a:fontRef>
+          </p:style>
+          <p:txBody>
+            <a:bodyPr vertOverflow="overflow" horzOverflow="overflow" vert="horz" wrap="square" numCol="1" spcCol="0" rtlCol="0" fromWordArt="0" anchor="ctr" anchorCtr="0" forceAA="0" compatLnSpc="1">
+              <a:noAutofit/>
+            </a:bodyPr>
+            <a:lstStyle/>
+            <a:p>
+              <a:pPr lvl="0" algn="ctr">
+                <a:buClrTx/>
+                <a:buSzTx/>
+                <a:buFontTx/>
+              </a:pPr>
+              <a:endParaRPr lang="zh-CN" altLang="en-US">
+                <a:sym typeface="+mn-ea"/>
+              </a:endParaRPr>
+            </a:p>
+          </p:txBody>
+        </p:sp>
+        <p:sp>
+          <p:nvSpPr>
+            <p:cNvPr id="8" name="椭圆 7"/>
+            <p:cNvSpPr/>
+            <p:nvPr/>
+          </p:nvSpPr>
+          <p:spPr>
+            <a:xfrm>
+              <a:off x="4589780" y="1833880"/>
+              <a:ext cx="36000" cy="36000"/>
+            </a:xfrm>
+            <a:prstGeom prst="ellipse">
+              <a:avLst/>
+            </a:prstGeom>
+            <a:solidFill>
+              <a:schemeClr val="tx1"/>
+            </a:solidFill>
+            <a:ln>
+              <a:solidFill>
+                <a:schemeClr val="tx1"/>
+              </a:solidFill>
+            </a:ln>
+          </p:spPr>
+          <p:style>
+            <a:lnRef idx="2">
+              <a:schemeClr val="accent1">
+                <a:lumMod val="75000"/>
+              </a:schemeClr>
+            </a:lnRef>
+            <a:fillRef idx="1">
+              <a:schemeClr val="accent1"/>
+            </a:fillRef>
+            <a:effectRef idx="0">
+              <a:srgbClr val="FFFFFF"/>
+            </a:effectRef>
+            <a:fontRef idx="minor">
+              <a:schemeClr val="lt1"/>
+            </a:fontRef>
+          </p:style>
+          <p:txBody>
+            <a:bodyPr rtlCol="0" anchor="ctr"/>
+            <a:lstStyle/>
+            <a:p>
+              <a:pPr algn="ctr"/>
+              <a:endParaRPr lang="zh-CN" altLang="en-US"/>
+            </a:p>
+          </p:txBody>
+        </p:sp>
+        <p:sp>
+          <p:nvSpPr>
+            <p:cNvPr id="10" name="椭圆 9"/>
+            <p:cNvSpPr/>
+            <p:nvPr/>
+          </p:nvSpPr>
+          <p:spPr>
+            <a:xfrm>
+              <a:off x="4281805" y="3108960"/>
+              <a:ext cx="36000" cy="36000"/>
+            </a:xfrm>
+            <a:prstGeom prst="ellipse">
+              <a:avLst/>
+            </a:prstGeom>
+            <a:solidFill>
+              <a:schemeClr val="tx1"/>
+            </a:solidFill>
+            <a:ln>
+              <a:solidFill>
+                <a:schemeClr val="tx1"/>
+              </a:solidFill>
+            </a:ln>
+          </p:spPr>
+          <p:style>
+            <a:lnRef idx="2">
+              <a:schemeClr val="accent1">
+                <a:lumMod val="75000"/>
+              </a:schemeClr>
+            </a:lnRef>
+            <a:fillRef idx="1">
+              <a:schemeClr val="accent1"/>
+            </a:fillRef>
+            <a:effectRef idx="0">
+              <a:srgbClr val="FFFFFF"/>
+            </a:effectRef>
+            <a:fontRef idx="minor">
+              <a:schemeClr val="lt1"/>
+            </a:fontRef>
+          </p:style>
+          <p:txBody>
+            <a:bodyPr rtlCol="0" anchor="ctr"/>
+            <a:lstStyle/>
+            <a:p>
+              <a:pPr algn="ctr"/>
+              <a:endParaRPr lang="zh-CN" altLang="en-US"/>
+            </a:p>
+          </p:txBody>
+        </p:sp>
+        <p:cxnSp>
+          <p:nvCxnSpPr>
+            <p:cNvPr id="13" name="直接箭头连接符 12"/>
+            <p:cNvCxnSpPr/>
+            <p:nvPr/>
+          </p:nvCxnSpPr>
+          <p:spPr>
+            <a:xfrm flipH="1">
+              <a:off x="4300220" y="1870075"/>
+              <a:ext cx="299720" cy="1249045"/>
+            </a:xfrm>
+            <a:prstGeom prst="straightConnector1">
+              <a:avLst/>
+            </a:prstGeom>
+            <a:ln w="12700">
+              <a:solidFill>
+                <a:schemeClr val="tx1"/>
+              </a:solidFill>
+              <a:tailEnd type="arrow"/>
+            </a:ln>
+          </p:spPr>
+          <p:style>
+            <a:lnRef idx="1">
+              <a:schemeClr val="accent1"/>
+            </a:lnRef>
+            <a:fillRef idx="0">
+              <a:schemeClr val="accent1"/>
+            </a:fillRef>
+            <a:effectRef idx="0">
+              <a:schemeClr val="accent1"/>
+            </a:effectRef>
+            <a:fontRef idx="minor">
+              <a:schemeClr val="tx1"/>
+            </a:fontRef>
+          </p:style>
+        </p:cxnSp>
+        <p:cxnSp>
+          <p:nvCxnSpPr>
+            <p:cNvPr id="14" name="直接箭头连接符 13"/>
+            <p:cNvCxnSpPr>
+              <a:endCxn id="5" idx="6"/>
+            </p:cNvCxnSpPr>
+            <p:nvPr/>
+          </p:nvCxnSpPr>
+          <p:spPr>
+            <a:xfrm>
+              <a:off x="4599940" y="1847215"/>
+              <a:ext cx="234315" cy="5080"/>
+            </a:xfrm>
+            <a:prstGeom prst="straightConnector1">
+              <a:avLst/>
+            </a:prstGeom>
+            <a:ln w="12700">
+              <a:solidFill>
+                <a:schemeClr val="tx1"/>
+              </a:solidFill>
+              <a:tailEnd type="arrow"/>
+            </a:ln>
+          </p:spPr>
+          <p:style>
+            <a:lnRef idx="1">
+              <a:schemeClr val="accent1"/>
+            </a:lnRef>
+            <a:fillRef idx="0">
+              <a:schemeClr val="accent1"/>
+            </a:fillRef>
+            <a:effectRef idx="0">
+              <a:schemeClr val="accent1"/>
+            </a:effectRef>
+            <a:fontRef idx="minor">
+              <a:schemeClr val="tx1"/>
+            </a:fontRef>
+          </p:style>
+        </p:cxnSp>
+        <mc:AlternateContent xmlns:mc="http://schemas.openxmlformats.org/markup-compatibility/2006">
+          <mc:Choice xmlns:a14="http://schemas.microsoft.com/office/drawing/2010/main" Requires="a14">
+            <p:sp>
+              <p:nvSpPr>
+                <p:cNvPr id="2" name="文本框 1">
+                  <a:extLst>
+                    <a:ext uri="{FF2B5EF4-FFF2-40B4-BE49-F238E27FC236}">
+                      <a16:creationId xmlns:a16="http://schemas.microsoft.com/office/drawing/2014/main" id="{07450545-6706-B382-C93A-73AB17B238A8}"/>
+                    </a:ext>
+                  </a:extLst>
+                </p:cNvPr>
+                <p:cNvSpPr txBox="1"/>
+                <p:nvPr/>
+              </p:nvSpPr>
+              <p:spPr>
+                <a:xfrm>
+                  <a:off x="3674534" y="1608667"/>
+                  <a:ext cx="160300" cy="184666"/>
+                </a:xfrm>
+                <a:prstGeom prst="rect">
+                  <a:avLst/>
+                </a:prstGeom>
+                <a:noFill/>
+              </p:spPr>
+              <p:txBody>
+                <a:bodyPr wrap="none" lIns="0" tIns="0" rIns="0" bIns="0" rtlCol="0">
+                  <a:spAutoFit/>
+                </a:bodyPr>
+                <a:lstStyle/>
+                <a:p>
+                  <a14:m>
+                    <m:oMathPara xmlns:m="http://schemas.openxmlformats.org/officeDocument/2006/math">
+                      <m:oMath>
+                        <m:r>
+                          <m:rPr>
+                            <m:sty m:val="p"/>
+                          </m:rPr>
+                          <a:rPr lang="en-US" altLang="zh-CN" sz="1200" b="0" i="1" smtClean="0">
+                            <a:latin typeface="Cambria Math" panose="02040503050406030204" pitchFamily="18" charset="0"/>
+                          </a:rPr>
+                          <m:t>Σ</m:t>
+                        </m:r>
+                        <m:r>
+                          <a:rPr lang="en-US" altLang="zh-CN" sz="1200" b="0" i="1" smtClean="0">
+                            <a:latin typeface="Cambria Math" panose="02040503050406030204" pitchFamily="18" charset="0"/>
+                          </a:rPr>
+                          <m:t>′</m:t>
+                        </m:r>
+                      </m:oMath>
+                    </m:oMathPara>
+                  </a14:m>
+                  <a:endParaRPr lang="en-US" altLang="zh-CN" sz="1200" b="0" dirty="0"/>
+                </a:p>
+              </p:txBody>
+            </p:sp>
+          </mc:Choice>
+          <mc:Fallback>
+            <p:sp>
+              <p:nvSpPr>
+                <p:cNvPr id="2" name="文本框 1">
+                  <a:extLst>
+                    <a:ext uri="{FF2B5EF4-FFF2-40B4-BE49-F238E27FC236}">
+                      <a16:creationId xmlns:a16="http://schemas.microsoft.com/office/drawing/2014/main" id="{07450545-6706-B382-C93A-73AB17B238A8}"/>
+                    </a:ext>
+                  </a:extLst>
+                </p:cNvPr>
+                <p:cNvSpPr txBox="1">
+                  <a:spLocks noRot="1" noChangeAspect="1" noMove="1" noResize="1" noEditPoints="1" noAdjustHandles="1" noChangeArrowheads="1" noChangeShapeType="1" noTextEdit="1"/>
+                </p:cNvSpPr>
+                <p:nvPr/>
+              </p:nvSpPr>
+              <p:spPr>
+                <a:xfrm>
+                  <a:off x="3674534" y="1608667"/>
+                  <a:ext cx="160300" cy="184666"/>
+                </a:xfrm>
+                <a:prstGeom prst="rect">
+                  <a:avLst/>
+                </a:prstGeom>
+                <a:blipFill>
+                  <a:blip r:embed="rId2"/>
+                  <a:stretch>
+                    <a:fillRect l="-26923" t="-3333" r="-26923" b="-10000"/>
+                  </a:stretch>
+                </a:blipFill>
+              </p:spPr>
+              <p:txBody>
+                <a:bodyPr/>
+                <a:lstStyle/>
+                <a:p>
+                  <a:r>
+                    <a:rPr lang="zh-CN" altLang="en-US">
+                      <a:noFill/>
+                    </a:rPr>
+                    <a:t> </a:t>
+                  </a:r>
+                </a:p>
+              </p:txBody>
+            </p:sp>
+          </mc:Fallback>
+        </mc:AlternateContent>
+        <mc:AlternateContent xmlns:mc="http://schemas.openxmlformats.org/markup-compatibility/2006">
+          <mc:Choice xmlns:a14="http://schemas.microsoft.com/office/drawing/2010/main" Requires="a14">
+            <p:sp>
+              <p:nvSpPr>
+                <p:cNvPr id="3" name="文本框 2">
+                  <a:extLst>
+                    <a:ext uri="{FF2B5EF4-FFF2-40B4-BE49-F238E27FC236}">
+                      <a16:creationId xmlns:a16="http://schemas.microsoft.com/office/drawing/2014/main" id="{9EDFCFCC-D658-CEB3-FF6F-3B4F52701C65}"/>
+                    </a:ext>
+                  </a:extLst>
+                </p:cNvPr>
+                <p:cNvSpPr txBox="1"/>
+                <p:nvPr/>
+              </p:nvSpPr>
+              <p:spPr>
+                <a:xfrm>
+                  <a:off x="3656330" y="2244337"/>
+                  <a:ext cx="136319" cy="184666"/>
+                </a:xfrm>
+                <a:prstGeom prst="rect">
+                  <a:avLst/>
+                </a:prstGeom>
+                <a:noFill/>
+              </p:spPr>
+              <p:txBody>
+                <a:bodyPr wrap="none" lIns="0" tIns="0" rIns="0" bIns="0" rtlCol="0">
+                  <a:spAutoFit/>
+                </a:bodyPr>
+                <a:lstStyle/>
+                <a:p>
+                  <a14:m>
+                    <m:oMathPara xmlns:m="http://schemas.openxmlformats.org/officeDocument/2006/math">
+                      <m:oMath>
+                        <m:r>
+                          <a:rPr lang="en-US" altLang="zh-CN" sz="1200" b="0" i="1" smtClean="0">
+                            <a:latin typeface="Cambria Math" panose="02040503050406030204" pitchFamily="18" charset="0"/>
+                          </a:rPr>
+                          <m:t>𝑉</m:t>
+                        </m:r>
+                      </m:oMath>
+                    </m:oMathPara>
+                  </a14:m>
+                  <a:endParaRPr lang="en-US" altLang="zh-CN" sz="1200" b="0" dirty="0"/>
+                </a:p>
+              </p:txBody>
+            </p:sp>
+          </mc:Choice>
+          <mc:Fallback>
+            <p:sp>
+              <p:nvSpPr>
+                <p:cNvPr id="3" name="文本框 2">
+                  <a:extLst>
+                    <a:ext uri="{FF2B5EF4-FFF2-40B4-BE49-F238E27FC236}">
+                      <a16:creationId xmlns:a16="http://schemas.microsoft.com/office/drawing/2014/main" id="{9EDFCFCC-D658-CEB3-FF6F-3B4F52701C65}"/>
+                    </a:ext>
+                  </a:extLst>
+                </p:cNvPr>
+                <p:cNvSpPr txBox="1">
+                  <a:spLocks noRot="1" noChangeAspect="1" noMove="1" noResize="1" noEditPoints="1" noAdjustHandles="1" noChangeArrowheads="1" noChangeShapeType="1" noTextEdit="1"/>
+                </p:cNvSpPr>
+                <p:nvPr/>
+              </p:nvSpPr>
+              <p:spPr>
+                <a:xfrm>
+                  <a:off x="3656330" y="2244337"/>
+                  <a:ext cx="136319" cy="184666"/>
+                </a:xfrm>
+                <a:prstGeom prst="rect">
+                  <a:avLst/>
+                </a:prstGeom>
+                <a:blipFill>
+                  <a:blip r:embed="rId3"/>
+                  <a:stretch>
+                    <a:fillRect l="-27273" r="-27273" b="-3226"/>
+                  </a:stretch>
+                </a:blipFill>
+              </p:spPr>
+              <p:txBody>
+                <a:bodyPr/>
+                <a:lstStyle/>
+                <a:p>
+                  <a:r>
+                    <a:rPr lang="zh-CN" altLang="en-US">
+                      <a:noFill/>
+                    </a:rPr>
+                    <a:t> </a:t>
+                  </a:r>
+                </a:p>
+              </p:txBody>
+            </p:sp>
+          </mc:Fallback>
+        </mc:AlternateContent>
+        <mc:AlternateContent xmlns:mc="http://schemas.openxmlformats.org/markup-compatibility/2006">
+          <mc:Choice xmlns:a14="http://schemas.microsoft.com/office/drawing/2010/main" Requires="a14">
+            <p:sp>
+              <p:nvSpPr>
+                <p:cNvPr id="6" name="文本框 5">
+                  <a:extLst>
+                    <a:ext uri="{FF2B5EF4-FFF2-40B4-BE49-F238E27FC236}">
+                      <a16:creationId xmlns:a16="http://schemas.microsoft.com/office/drawing/2014/main" id="{7514F67E-6789-4F06-0331-746AEF674AE2}"/>
+                    </a:ext>
+                  </a:extLst>
+                </p:cNvPr>
+                <p:cNvSpPr txBox="1"/>
+                <p:nvPr/>
+              </p:nvSpPr>
+              <p:spPr>
+                <a:xfrm>
+                  <a:off x="4651724" y="1662549"/>
+                  <a:ext cx="110671" cy="184666"/>
+                </a:xfrm>
+                <a:prstGeom prst="rect">
+                  <a:avLst/>
+                </a:prstGeom>
+                <a:noFill/>
+              </p:spPr>
+              <p:txBody>
+                <a:bodyPr wrap="none" lIns="0" tIns="0" rIns="0" bIns="0" rtlCol="0">
+                  <a:spAutoFit/>
+                </a:bodyPr>
+                <a:lstStyle/>
+                <a:p>
+                  <a14:m>
+                    <m:oMathPara xmlns:m="http://schemas.openxmlformats.org/officeDocument/2006/math">
+                      <m:oMath>
+                        <m:r>
+                          <a:rPr lang="en-US" altLang="zh-CN" sz="1200" b="0" i="1" smtClean="0">
+                            <a:latin typeface="Cambria Math" panose="02040503050406030204" pitchFamily="18" charset="0"/>
+                          </a:rPr>
+                          <m:t>𝜀</m:t>
+                        </m:r>
+                      </m:oMath>
+                    </m:oMathPara>
+                  </a14:m>
+                  <a:endParaRPr lang="en-US" altLang="zh-CN" sz="1200" b="0" dirty="0"/>
+                </a:p>
+              </p:txBody>
+            </p:sp>
+          </mc:Choice>
+          <mc:Fallback>
+            <p:sp>
+              <p:nvSpPr>
+                <p:cNvPr id="6" name="文本框 5">
+                  <a:extLst>
+                    <a:ext uri="{FF2B5EF4-FFF2-40B4-BE49-F238E27FC236}">
+                      <a16:creationId xmlns:a16="http://schemas.microsoft.com/office/drawing/2014/main" id="{7514F67E-6789-4F06-0331-746AEF674AE2}"/>
+                    </a:ext>
+                  </a:extLst>
+                </p:cNvPr>
+                <p:cNvSpPr txBox="1">
+                  <a:spLocks noRot="1" noChangeAspect="1" noMove="1" noResize="1" noEditPoints="1" noAdjustHandles="1" noChangeArrowheads="1" noChangeShapeType="1" noTextEdit="1"/>
+                </p:cNvSpPr>
+                <p:nvPr/>
+              </p:nvSpPr>
+              <p:spPr>
+                <a:xfrm>
+                  <a:off x="4651724" y="1662549"/>
+                  <a:ext cx="110671" cy="184666"/>
+                </a:xfrm>
+                <a:prstGeom prst="rect">
+                  <a:avLst/>
+                </a:prstGeom>
+                <a:blipFill>
+                  <a:blip r:embed="rId4"/>
+                  <a:stretch>
+                    <a:fillRect l="-16667" r="-16667"/>
+                  </a:stretch>
+                </a:blipFill>
+              </p:spPr>
+              <p:txBody>
+                <a:bodyPr/>
+                <a:lstStyle/>
+                <a:p>
+                  <a:r>
+                    <a:rPr lang="zh-CN" altLang="en-US">
+                      <a:noFill/>
+                    </a:rPr>
+                    <a:t> </a:t>
+                  </a:r>
+                </a:p>
+              </p:txBody>
+            </p:sp>
+          </mc:Fallback>
+        </mc:AlternateContent>
+        <mc:AlternateContent xmlns:mc="http://schemas.openxmlformats.org/markup-compatibility/2006">
+          <mc:Choice xmlns:a14="http://schemas.microsoft.com/office/drawing/2010/main" Requires="a14">
+            <p:sp>
+              <p:nvSpPr>
+                <p:cNvPr id="12" name="文本框 11">
+                  <a:extLst>
+                    <a:ext uri="{FF2B5EF4-FFF2-40B4-BE49-F238E27FC236}">
+                      <a16:creationId xmlns:a16="http://schemas.microsoft.com/office/drawing/2014/main" id="{7909AD99-8EDA-51B8-F623-C155733AF418}"/>
+                    </a:ext>
+                  </a:extLst>
+                </p:cNvPr>
+                <p:cNvSpPr txBox="1"/>
+                <p:nvPr/>
+              </p:nvSpPr>
+              <p:spPr>
+                <a:xfrm>
+                  <a:off x="4337677" y="2290504"/>
+                  <a:ext cx="112403" cy="184666"/>
+                </a:xfrm>
+                <a:prstGeom prst="rect">
+                  <a:avLst/>
+                </a:prstGeom>
+                <a:noFill/>
+              </p:spPr>
+              <p:txBody>
+                <a:bodyPr wrap="none" lIns="0" tIns="0" rIns="0" bIns="0" rtlCol="0">
+                  <a:spAutoFit/>
+                </a:bodyPr>
+                <a:lstStyle/>
+                <a:p>
+                  <a14:m>
+                    <m:oMathPara xmlns:m="http://schemas.openxmlformats.org/officeDocument/2006/math">
+                      <m:oMath>
+                        <m:r>
+                          <a:rPr lang="en-US" altLang="zh-CN" sz="1200" b="0" i="1" smtClean="0">
+                            <a:latin typeface="Cambria Math" panose="02040503050406030204" pitchFamily="18" charset="0"/>
+                          </a:rPr>
+                          <m:t>𝑟</m:t>
+                        </m:r>
+                      </m:oMath>
+                    </m:oMathPara>
+                  </a14:m>
+                  <a:endParaRPr lang="en-US" altLang="zh-CN" sz="1200" b="0" dirty="0"/>
+                </a:p>
+              </p:txBody>
+            </p:sp>
+          </mc:Choice>
+          <mc:Fallback>
+            <p:sp>
+              <p:nvSpPr>
+                <p:cNvPr id="12" name="文本框 11">
+                  <a:extLst>
+                    <a:ext uri="{FF2B5EF4-FFF2-40B4-BE49-F238E27FC236}">
+                      <a16:creationId xmlns:a16="http://schemas.microsoft.com/office/drawing/2014/main" id="{7909AD99-8EDA-51B8-F623-C155733AF418}"/>
+                    </a:ext>
+                  </a:extLst>
+                </p:cNvPr>
+                <p:cNvSpPr txBox="1">
+                  <a:spLocks noRot="1" noChangeAspect="1" noMove="1" noResize="1" noEditPoints="1" noAdjustHandles="1" noChangeArrowheads="1" noChangeShapeType="1" noTextEdit="1"/>
+                </p:cNvSpPr>
+                <p:nvPr/>
+              </p:nvSpPr>
+              <p:spPr>
+                <a:xfrm>
+                  <a:off x="4337677" y="2290504"/>
+                  <a:ext cx="112403" cy="184666"/>
+                </a:xfrm>
+                <a:prstGeom prst="rect">
+                  <a:avLst/>
+                </a:prstGeom>
+                <a:blipFill>
+                  <a:blip r:embed="rId5"/>
+                  <a:stretch>
+                    <a:fillRect l="-22222" r="-16667"/>
+                  </a:stretch>
+                </a:blipFill>
+              </p:spPr>
+              <p:txBody>
+                <a:bodyPr/>
+                <a:lstStyle/>
+                <a:p>
+                  <a:r>
+                    <a:rPr lang="zh-CN" altLang="en-US">
+                      <a:noFill/>
+                    </a:rPr>
+                    <a:t> </a:t>
+                  </a:r>
+                </a:p>
+              </p:txBody>
+            </p:sp>
+          </mc:Fallback>
+        </mc:AlternateContent>
+        <mc:AlternateContent xmlns:mc="http://schemas.openxmlformats.org/markup-compatibility/2006">
+          <mc:Choice xmlns:a14="http://schemas.microsoft.com/office/drawing/2010/main" Requires="a14">
+            <p:sp>
+              <p:nvSpPr>
+                <p:cNvPr id="15" name="文本框 14">
+                  <a:extLst>
+                    <a:ext uri="{FF2B5EF4-FFF2-40B4-BE49-F238E27FC236}">
+                      <a16:creationId xmlns:a16="http://schemas.microsoft.com/office/drawing/2014/main" id="{B7C55FEE-13BA-295C-C9F2-4F5B4CCC87F5}"/>
+                    </a:ext>
+                  </a:extLst>
+                </p:cNvPr>
+                <p:cNvSpPr txBox="1"/>
+                <p:nvPr/>
+              </p:nvSpPr>
+              <p:spPr>
+                <a:xfrm>
+                  <a:off x="4776861" y="1981577"/>
+                  <a:ext cx="226409" cy="184666"/>
+                </a:xfrm>
+                <a:prstGeom prst="rect">
+                  <a:avLst/>
+                </a:prstGeom>
+                <a:noFill/>
+              </p:spPr>
+              <p:txBody>
+                <a:bodyPr wrap="none" lIns="0" tIns="0" rIns="0" bIns="0" rtlCol="0">
+                  <a:spAutoFit/>
+                </a:bodyPr>
+                <a:lstStyle/>
+                <a:p>
+                  <a14:m>
+                    <m:oMathPara xmlns:m="http://schemas.openxmlformats.org/officeDocument/2006/math">
+                      <m:oMath>
+                        <m:sSub>
+                          <m:sSubPr>
+                            <m:ctrlPr>
+                              <a:rPr lang="en-US" altLang="zh-CN" sz="1200" b="0" i="1" smtClean="0">
+                                <a:latin typeface="Cambria Math" panose="02040503050406030204" pitchFamily="18" charset="0"/>
+                              </a:rPr>
+                            </m:ctrlPr>
+                          </m:sSubPr>
+                          <m:e>
+                            <m:r>
+                              <m:rPr>
+                                <m:sty m:val="p"/>
+                              </m:rPr>
+                              <a:rPr lang="en-US" altLang="zh-CN" sz="1200" b="0" i="1" smtClean="0">
+                                <a:latin typeface="Cambria Math" panose="02040503050406030204" pitchFamily="18" charset="0"/>
+                              </a:rPr>
+                              <m:t>Σ</m:t>
+                            </m:r>
+                          </m:e>
+                          <m:sub>
+                            <m:r>
+                              <a:rPr lang="en-US" altLang="zh-CN" sz="1200" b="0" i="1" smtClean="0">
+                                <a:latin typeface="Cambria Math" panose="02040503050406030204" pitchFamily="18" charset="0"/>
+                              </a:rPr>
+                              <m:t>𝜀</m:t>
+                            </m:r>
+                          </m:sub>
+                        </m:sSub>
+                        <m:r>
+                          <a:rPr lang="en-US" altLang="zh-CN" sz="1200" b="0" i="1" smtClean="0">
+                            <a:latin typeface="Cambria Math" panose="02040503050406030204" pitchFamily="18" charset="0"/>
+                          </a:rPr>
+                          <m:t>′</m:t>
+                        </m:r>
+                      </m:oMath>
+                    </m:oMathPara>
+                  </a14:m>
+                  <a:endParaRPr lang="en-US" altLang="zh-CN" sz="1200" b="0" dirty="0"/>
+                </a:p>
+              </p:txBody>
+            </p:sp>
+          </mc:Choice>
+          <mc:Fallback>
+            <p:sp>
+              <p:nvSpPr>
+                <p:cNvPr id="15" name="文本框 14">
+                  <a:extLst>
+                    <a:ext uri="{FF2B5EF4-FFF2-40B4-BE49-F238E27FC236}">
+                      <a16:creationId xmlns:a16="http://schemas.microsoft.com/office/drawing/2014/main" id="{B7C55FEE-13BA-295C-C9F2-4F5B4CCC87F5}"/>
+                    </a:ext>
+                  </a:extLst>
+                </p:cNvPr>
+                <p:cNvSpPr txBox="1">
+                  <a:spLocks noRot="1" noChangeAspect="1" noMove="1" noResize="1" noEditPoints="1" noAdjustHandles="1" noChangeArrowheads="1" noChangeShapeType="1" noTextEdit="1"/>
+                </p:cNvSpPr>
+                <p:nvPr/>
+              </p:nvSpPr>
+              <p:spPr>
+                <a:xfrm>
+                  <a:off x="4776861" y="1981577"/>
+                  <a:ext cx="226409" cy="184666"/>
+                </a:xfrm>
+                <a:prstGeom prst="rect">
+                  <a:avLst/>
+                </a:prstGeom>
+                <a:blipFill>
+                  <a:blip r:embed="rId6"/>
+                  <a:stretch>
+                    <a:fillRect l="-16216" t="-3226" r="-18919" b="-6452"/>
+                  </a:stretch>
+                </a:blipFill>
+              </p:spPr>
+              <p:txBody>
+                <a:bodyPr/>
+                <a:lstStyle/>
+                <a:p>
+                  <a:r>
+                    <a:rPr lang="zh-CN" altLang="en-US">
+                      <a:noFill/>
+                    </a:rPr>
+                    <a:t> </a:t>
+                  </a:r>
+                </a:p>
+              </p:txBody>
+            </p:sp>
+          </mc:Fallback>
+        </mc:AlternateContent>
+      </p:grpSp>
+      <p:grpSp>
+        <p:nvGrpSpPr>
+          <p:cNvPr id="50" name="组合 49">
+            <a:extLst>
+              <a:ext uri="{FF2B5EF4-FFF2-40B4-BE49-F238E27FC236}">
+                <a16:creationId xmlns:a16="http://schemas.microsoft.com/office/drawing/2014/main" id="{881D92CE-C532-098C-1DB5-8FD16575CA56}"/>
+              </a:ext>
+            </a:extLst>
+          </p:cNvPr>
+          <p:cNvGrpSpPr/>
+          <p:nvPr/>
+        </p:nvGrpSpPr>
+        <p:grpSpPr>
+          <a:xfrm>
+            <a:off x="3481778" y="1237380"/>
+            <a:ext cx="688975" cy="452755"/>
+            <a:chOff x="6877050" y="1851977"/>
+            <a:chExt cx="688975" cy="452755"/>
+          </a:xfrm>
+        </p:grpSpPr>
+        <p:sp>
+          <p:nvSpPr>
+            <p:cNvPr id="24" name="椭圆 23">
+              <a:extLst>
+                <a:ext uri="{FF2B5EF4-FFF2-40B4-BE49-F238E27FC236}">
+                  <a16:creationId xmlns:a16="http://schemas.microsoft.com/office/drawing/2014/main" id="{EA939E51-50C2-2024-96FB-9D02A475A748}"/>
+                </a:ext>
+              </a:extLst>
+            </p:cNvPr>
+            <p:cNvSpPr/>
+            <p:nvPr/>
+          </p:nvSpPr>
+          <p:spPr>
+            <a:xfrm>
+              <a:off x="6877050" y="1851977"/>
+              <a:ext cx="452755" cy="452755"/>
+            </a:xfrm>
+            <a:prstGeom prst="ellipse">
+              <a:avLst/>
+            </a:prstGeom>
+            <a:noFill/>
+            <a:ln>
+              <a:solidFill>
+                <a:schemeClr val="tx1"/>
+              </a:solidFill>
+            </a:ln>
+            <a:extLst>
+              <a:ext uri="{909E8E84-426E-40DD-AFC4-6F175D3DCCD1}">
+                <a14:hiddenFill xmlns:a14="http://schemas.microsoft.com/office/drawing/2010/main">
+                  <a:solidFill>
+                    <a:schemeClr val="accent1"/>
+                  </a:solidFill>
+                </a14:hiddenFill>
+              </a:ext>
+            </a:extLst>
+          </p:spPr>
+          <p:style>
+            <a:lnRef idx="2">
+              <a:schemeClr val="accent1">
+                <a:lumMod val="75000"/>
+              </a:schemeClr>
+            </a:lnRef>
+            <a:fillRef idx="1">
+              <a:schemeClr val="accent1"/>
+            </a:fillRef>
+            <a:effectRef idx="0">
+              <a:srgbClr val="FFFFFF"/>
+            </a:effectRef>
+            <a:fontRef idx="minor">
+              <a:schemeClr val="lt1"/>
+            </a:fontRef>
+          </p:style>
+          <p:txBody>
+            <a:bodyPr vertOverflow="overflow" horzOverflow="overflow" vert="horz" wrap="square" numCol="1" spcCol="0" rtlCol="0" fromWordArt="0" anchor="ctr" anchorCtr="0" forceAA="0" compatLnSpc="1">
+              <a:noAutofit/>
+            </a:bodyPr>
+            <a:lstStyle/>
+            <a:p>
+              <a:pPr lvl="0" algn="ctr">
+                <a:buClrTx/>
+                <a:buSzTx/>
+                <a:buFontTx/>
+              </a:pPr>
+              <a:endParaRPr lang="zh-CN" altLang="en-US">
+                <a:sym typeface="+mn-ea"/>
+              </a:endParaRPr>
+            </a:p>
+          </p:txBody>
+        </p:sp>
+        <p:sp>
+          <p:nvSpPr>
+            <p:cNvPr id="25" name="椭圆 24">
+              <a:extLst>
+                <a:ext uri="{FF2B5EF4-FFF2-40B4-BE49-F238E27FC236}">
+                  <a16:creationId xmlns:a16="http://schemas.microsoft.com/office/drawing/2014/main" id="{E383A5E9-92E0-CA20-904C-A828F4D1C8B7}"/>
+                </a:ext>
+              </a:extLst>
+            </p:cNvPr>
+            <p:cNvSpPr/>
+            <p:nvPr/>
+          </p:nvSpPr>
+          <p:spPr>
+            <a:xfrm>
+              <a:off x="7085330" y="2060257"/>
+              <a:ext cx="36000" cy="36000"/>
+            </a:xfrm>
+            <a:prstGeom prst="ellipse">
+              <a:avLst/>
+            </a:prstGeom>
+            <a:solidFill>
+              <a:schemeClr val="tx1"/>
+            </a:solidFill>
+            <a:ln>
+              <a:solidFill>
+                <a:schemeClr val="tx1"/>
+              </a:solidFill>
+            </a:ln>
+          </p:spPr>
+          <p:style>
+            <a:lnRef idx="2">
+              <a:schemeClr val="accent1">
+                <a:lumMod val="75000"/>
+              </a:schemeClr>
+            </a:lnRef>
+            <a:fillRef idx="1">
+              <a:schemeClr val="accent1"/>
+            </a:fillRef>
+            <a:effectRef idx="0">
+              <a:srgbClr val="FFFFFF"/>
+            </a:effectRef>
+            <a:fontRef idx="minor">
+              <a:schemeClr val="lt1"/>
+            </a:fontRef>
+          </p:style>
+          <p:txBody>
+            <a:bodyPr rtlCol="0" anchor="ctr"/>
+            <a:lstStyle/>
+            <a:p>
+              <a:pPr algn="ctr"/>
+              <a:endParaRPr lang="zh-CN" altLang="en-US"/>
+            </a:p>
+          </p:txBody>
+        </p:sp>
+        <p:cxnSp>
+          <p:nvCxnSpPr>
+            <p:cNvPr id="39" name="直接箭头连接符 38">
+              <a:extLst>
+                <a:ext uri="{FF2B5EF4-FFF2-40B4-BE49-F238E27FC236}">
+                  <a16:creationId xmlns:a16="http://schemas.microsoft.com/office/drawing/2014/main" id="{D9BB89B2-ED70-4424-4F8E-22A981383B92}"/>
+                </a:ext>
+              </a:extLst>
+            </p:cNvPr>
+            <p:cNvCxnSpPr>
+              <a:stCxn id="25" idx="6"/>
+              <a:endCxn id="24" idx="6"/>
+            </p:cNvCxnSpPr>
+            <p:nvPr/>
+          </p:nvCxnSpPr>
+          <p:spPr>
+            <a:xfrm>
+              <a:off x="7121330" y="2078257"/>
+              <a:ext cx="208475" cy="98"/>
+            </a:xfrm>
+            <a:prstGeom prst="straightConnector1">
+              <a:avLst/>
+            </a:prstGeom>
+            <a:ln w="12700">
+              <a:solidFill>
+                <a:srgbClr val="FF0000">
+                  <a:alpha val="50000"/>
+                </a:srgbClr>
+              </a:solidFill>
+              <a:prstDash val="dash"/>
+              <a:tailEnd type="arrow"/>
+            </a:ln>
+          </p:spPr>
+          <p:style>
+            <a:lnRef idx="1">
+              <a:schemeClr val="accent1"/>
+            </a:lnRef>
+            <a:fillRef idx="0">
+              <a:schemeClr val="accent1"/>
+            </a:fillRef>
+            <a:effectRef idx="0">
+              <a:schemeClr val="accent1"/>
+            </a:effectRef>
+            <a:fontRef idx="minor">
+              <a:schemeClr val="tx1"/>
+            </a:fontRef>
+          </p:style>
+        </p:cxnSp>
+        <p:cxnSp>
+          <p:nvCxnSpPr>
+            <p:cNvPr id="46" name="直接箭头连接符 45">
+              <a:extLst>
+                <a:ext uri="{FF2B5EF4-FFF2-40B4-BE49-F238E27FC236}">
+                  <a16:creationId xmlns:a16="http://schemas.microsoft.com/office/drawing/2014/main" id="{5AD068A2-8349-2189-E372-BFFCB1905503}"/>
+                </a:ext>
+              </a:extLst>
+            </p:cNvPr>
+            <p:cNvCxnSpPr>
+              <a:cxnSpLocks/>
+            </p:cNvCxnSpPr>
+            <p:nvPr/>
+          </p:nvCxnSpPr>
+          <p:spPr>
+            <a:xfrm flipH="1">
+              <a:off x="7121330" y="2078257"/>
+              <a:ext cx="444695" cy="0"/>
+            </a:xfrm>
+            <a:prstGeom prst="straightConnector1">
+              <a:avLst/>
+            </a:prstGeom>
+            <a:ln w="12700">
+              <a:solidFill>
+                <a:srgbClr val="92D050">
+                  <a:alpha val="50000"/>
+                </a:srgbClr>
+              </a:solidFill>
+              <a:prstDash val="dash"/>
+              <a:tailEnd type="arrow"/>
+            </a:ln>
+          </p:spPr>
+          <p:style>
+            <a:lnRef idx="1">
+              <a:schemeClr val="accent1"/>
+            </a:lnRef>
+            <a:fillRef idx="0">
+              <a:schemeClr val="accent1"/>
+            </a:fillRef>
+            <a:effectRef idx="0">
+              <a:schemeClr val="accent1"/>
+            </a:effectRef>
+            <a:fontRef idx="minor">
+              <a:schemeClr val="tx1"/>
+            </a:fontRef>
+          </p:style>
+        </p:cxnSp>
+        <mc:AlternateContent xmlns:mc="http://schemas.openxmlformats.org/markup-compatibility/2006">
+          <mc:Choice xmlns:a14="http://schemas.microsoft.com/office/drawing/2010/main" Requires="a14">
+            <p:sp>
+              <p:nvSpPr>
+                <p:cNvPr id="48" name="文本框 47">
+                  <a:extLst>
+                    <a:ext uri="{FF2B5EF4-FFF2-40B4-BE49-F238E27FC236}">
+                      <a16:creationId xmlns:a16="http://schemas.microsoft.com/office/drawing/2014/main" id="{10FB0E0C-2545-17FA-425F-002A63ABCEE8}"/>
+                    </a:ext>
+                  </a:extLst>
+                </p:cNvPr>
+                <p:cNvSpPr txBox="1"/>
+                <p:nvPr/>
+              </p:nvSpPr>
+              <p:spPr>
+                <a:xfrm>
+                  <a:off x="7403832" y="2104687"/>
+                  <a:ext cx="88165" cy="123111"/>
+                </a:xfrm>
+                <a:prstGeom prst="rect">
+                  <a:avLst/>
+                </a:prstGeom>
+                <a:noFill/>
+              </p:spPr>
+              <p:txBody>
+                <a:bodyPr wrap="none" lIns="0" tIns="0" rIns="0" bIns="0" rtlCol="0">
+                  <a:spAutoFit/>
+                </a:bodyPr>
+                <a:lstStyle/>
+                <a:p>
+                  <a14:m>
+                    <m:oMathPara xmlns:m="http://schemas.openxmlformats.org/officeDocument/2006/math">
+                      <m:oMath>
+                        <m:r>
+                          <a:rPr lang="en-US" altLang="zh-CN" sz="800" b="0" i="1" smtClean="0">
+                            <a:solidFill>
+                              <a:srgbClr val="92D050"/>
+                            </a:solidFill>
+                            <a:latin typeface="Cambria Math" panose="02040503050406030204" pitchFamily="18" charset="0"/>
+                          </a:rPr>
+                          <m:t>𝒏</m:t>
+                        </m:r>
+                      </m:oMath>
+                    </m:oMathPara>
+                  </a14:m>
+                  <a:endParaRPr lang="en-US" altLang="zh-CN" sz="800" b="0" dirty="0">
+                    <a:solidFill>
+                      <a:srgbClr val="92D050"/>
+                    </a:solidFill>
+                  </a:endParaRPr>
+                </a:p>
+              </p:txBody>
+            </p:sp>
+          </mc:Choice>
+          <mc:Fallback>
+            <p:sp>
+              <p:nvSpPr>
+                <p:cNvPr id="48" name="文本框 47">
+                  <a:extLst>
+                    <a:ext uri="{FF2B5EF4-FFF2-40B4-BE49-F238E27FC236}">
+                      <a16:creationId xmlns:a16="http://schemas.microsoft.com/office/drawing/2014/main" id="{10FB0E0C-2545-17FA-425F-002A63ABCEE8}"/>
+                    </a:ext>
+                  </a:extLst>
+                </p:cNvPr>
+                <p:cNvSpPr txBox="1">
+                  <a:spLocks noRot="1" noChangeAspect="1" noMove="1" noResize="1" noEditPoints="1" noAdjustHandles="1" noChangeArrowheads="1" noChangeShapeType="1" noTextEdit="1"/>
+                </p:cNvSpPr>
+                <p:nvPr/>
+              </p:nvSpPr>
+              <p:spPr>
+                <a:xfrm>
+                  <a:off x="7403832" y="2104687"/>
+                  <a:ext cx="88165" cy="123111"/>
+                </a:xfrm>
+                <a:prstGeom prst="rect">
+                  <a:avLst/>
+                </a:prstGeom>
+                <a:blipFill>
+                  <a:blip r:embed="rId7"/>
+                  <a:stretch>
+                    <a:fillRect l="-21429" r="-21429"/>
+                  </a:stretch>
+                </a:blipFill>
+              </p:spPr>
+              <p:txBody>
+                <a:bodyPr/>
+                <a:lstStyle/>
+                <a:p>
+                  <a:r>
+                    <a:rPr lang="zh-CN" altLang="en-US">
+                      <a:noFill/>
+                    </a:rPr>
+                    <a:t> </a:t>
+                  </a:r>
+                </a:p>
+              </p:txBody>
+            </p:sp>
+          </mc:Fallback>
+        </mc:AlternateContent>
+        <mc:AlternateContent xmlns:mc="http://schemas.openxmlformats.org/markup-compatibility/2006">
+          <mc:Choice xmlns:a14="http://schemas.microsoft.com/office/drawing/2010/main" Requires="a14">
+            <p:sp>
+              <p:nvSpPr>
+                <p:cNvPr id="49" name="文本框 48">
+                  <a:extLst>
+                    <a:ext uri="{FF2B5EF4-FFF2-40B4-BE49-F238E27FC236}">
+                      <a16:creationId xmlns:a16="http://schemas.microsoft.com/office/drawing/2014/main" id="{B266AA19-CA6A-3F2F-881F-C52637A1CD67}"/>
+                    </a:ext>
+                  </a:extLst>
+                </p:cNvPr>
+                <p:cNvSpPr txBox="1"/>
+                <p:nvPr/>
+              </p:nvSpPr>
+              <p:spPr>
+                <a:xfrm>
+                  <a:off x="7192523" y="1937146"/>
+                  <a:ext cx="76944" cy="123111"/>
+                </a:xfrm>
+                <a:prstGeom prst="rect">
+                  <a:avLst/>
+                </a:prstGeom>
+                <a:noFill/>
+              </p:spPr>
+              <p:txBody>
+                <a:bodyPr wrap="none" lIns="0" tIns="0" rIns="0" bIns="0" rtlCol="0">
+                  <a:spAutoFit/>
+                </a:bodyPr>
+                <a:lstStyle/>
+                <a:p>
+                  <a14:m>
+                    <m:oMathPara xmlns:m="http://schemas.openxmlformats.org/officeDocument/2006/math">
+                      <m:oMath>
+                        <m:r>
+                          <a:rPr lang="en-US" altLang="zh-CN" sz="800" b="0" i="1" smtClean="0">
+                            <a:solidFill>
+                              <a:srgbClr val="FF0000"/>
+                            </a:solidFill>
+                            <a:latin typeface="Cambria Math" panose="02040503050406030204" pitchFamily="18" charset="0"/>
+                          </a:rPr>
+                          <m:t>𝒓</m:t>
+                        </m:r>
+                      </m:oMath>
+                    </m:oMathPara>
+                  </a14:m>
+                  <a:endParaRPr lang="en-US" altLang="zh-CN" sz="800" b="0" dirty="0">
+                    <a:solidFill>
+                      <a:srgbClr val="FF0000"/>
+                    </a:solidFill>
+                  </a:endParaRPr>
+                </a:p>
+              </p:txBody>
+            </p:sp>
+          </mc:Choice>
+          <mc:Fallback>
+            <p:sp>
+              <p:nvSpPr>
+                <p:cNvPr id="49" name="文本框 48">
+                  <a:extLst>
+                    <a:ext uri="{FF2B5EF4-FFF2-40B4-BE49-F238E27FC236}">
+                      <a16:creationId xmlns:a16="http://schemas.microsoft.com/office/drawing/2014/main" id="{B266AA19-CA6A-3F2F-881F-C52637A1CD67}"/>
+                    </a:ext>
+                  </a:extLst>
+                </p:cNvPr>
+                <p:cNvSpPr txBox="1">
+                  <a:spLocks noRot="1" noChangeAspect="1" noMove="1" noResize="1" noEditPoints="1" noAdjustHandles="1" noChangeArrowheads="1" noChangeShapeType="1" noTextEdit="1"/>
+                </p:cNvSpPr>
+                <p:nvPr/>
+              </p:nvSpPr>
+              <p:spPr>
+                <a:xfrm>
+                  <a:off x="7192523" y="1937146"/>
+                  <a:ext cx="76944" cy="123111"/>
+                </a:xfrm>
+                <a:prstGeom prst="rect">
+                  <a:avLst/>
+                </a:prstGeom>
+                <a:blipFill>
+                  <a:blip r:embed="rId8"/>
+                  <a:stretch>
+                    <a:fillRect l="-23077" r="-15385"/>
+                  </a:stretch>
+                </a:blipFill>
+              </p:spPr>
+              <p:txBody>
+                <a:bodyPr/>
+                <a:lstStyle/>
+                <a:p>
+                  <a:r>
+                    <a:rPr lang="zh-CN" altLang="en-US">
+                      <a:noFill/>
+                    </a:rPr>
+                    <a:t> </a:t>
+                  </a:r>
+                </a:p>
+              </p:txBody>
+            </p:sp>
+          </mc:Fallback>
+        </mc:AlternateContent>
+      </p:grpSp>
+      <p:grpSp>
+        <p:nvGrpSpPr>
+          <p:cNvPr id="77" name="组合 76">
+            <a:extLst>
+              <a:ext uri="{FF2B5EF4-FFF2-40B4-BE49-F238E27FC236}">
+                <a16:creationId xmlns:a16="http://schemas.microsoft.com/office/drawing/2014/main" id="{24CF8062-5BB7-9CDA-02FC-7743DFC20241}"/>
+              </a:ext>
+            </a:extLst>
+          </p:cNvPr>
+          <p:cNvGrpSpPr/>
+          <p:nvPr/>
+        </p:nvGrpSpPr>
+        <p:grpSpPr>
+          <a:xfrm>
+            <a:off x="2808043" y="2134363"/>
+            <a:ext cx="857636" cy="720000"/>
+            <a:chOff x="7491997" y="3600450"/>
+            <a:chExt cx="857636" cy="720000"/>
+          </a:xfrm>
+        </p:grpSpPr>
+        <p:sp>
+          <p:nvSpPr>
+            <p:cNvPr id="52" name="椭圆 51">
+              <a:extLst>
+                <a:ext uri="{FF2B5EF4-FFF2-40B4-BE49-F238E27FC236}">
+                  <a16:creationId xmlns:a16="http://schemas.microsoft.com/office/drawing/2014/main" id="{7A5F6A85-51C3-C0CD-0E82-30F0986505F5}"/>
+                </a:ext>
+              </a:extLst>
+            </p:cNvPr>
+            <p:cNvSpPr/>
+            <p:nvPr/>
+          </p:nvSpPr>
+          <p:spPr>
+            <a:xfrm>
+              <a:off x="7491997" y="3600450"/>
+              <a:ext cx="720000" cy="720000"/>
+            </a:xfrm>
+            <a:prstGeom prst="ellipse">
+              <a:avLst/>
+            </a:prstGeom>
+            <a:noFill/>
+            <a:ln>
+              <a:solidFill>
+                <a:schemeClr val="tx1"/>
+              </a:solidFill>
+            </a:ln>
+          </p:spPr>
+          <p:style>
+            <a:lnRef idx="2">
+              <a:schemeClr val="accent1">
+                <a:lumMod val="75000"/>
+              </a:schemeClr>
+            </a:lnRef>
+            <a:fillRef idx="1">
+              <a:schemeClr val="accent1"/>
+            </a:fillRef>
+            <a:effectRef idx="0">
+              <a:srgbClr val="FFFFFF"/>
+            </a:effectRef>
+            <a:fontRef idx="minor">
+              <a:schemeClr val="lt1"/>
+            </a:fontRef>
+          </p:style>
+          <p:txBody>
+            <a:bodyPr rtlCol="0" anchor="ctr"/>
+            <a:lstStyle/>
+            <a:p>
+              <a:pPr algn="ctr"/>
+              <a:endParaRPr lang="zh-CN" altLang="en-US"/>
+            </a:p>
+          </p:txBody>
+        </p:sp>
+        <p:cxnSp>
+          <p:nvCxnSpPr>
+            <p:cNvPr id="58" name="直接连接符 57">
+              <a:extLst>
+                <a:ext uri="{FF2B5EF4-FFF2-40B4-BE49-F238E27FC236}">
+                  <a16:creationId xmlns:a16="http://schemas.microsoft.com/office/drawing/2014/main" id="{F3A2F87D-0DA5-FDA3-603A-C0D5A82735F8}"/>
+                </a:ext>
+              </a:extLst>
+            </p:cNvPr>
+            <p:cNvCxnSpPr>
+              <a:cxnSpLocks/>
+              <a:stCxn id="66" idx="7"/>
+              <a:endCxn id="52" idx="7"/>
+            </p:cNvCxnSpPr>
+            <p:nvPr/>
+          </p:nvCxnSpPr>
+          <p:spPr>
+            <a:xfrm flipV="1">
+              <a:off x="7864725" y="3705892"/>
+              <a:ext cx="241830" cy="241830"/>
+            </a:xfrm>
+            <a:prstGeom prst="line">
+              <a:avLst/>
+            </a:prstGeom>
+            <a:ln w="12700">
+              <a:solidFill>
+                <a:schemeClr val="tx1"/>
+              </a:solidFill>
+            </a:ln>
+          </p:spPr>
+          <p:style>
+            <a:lnRef idx="1">
+              <a:schemeClr val="accent1"/>
+            </a:lnRef>
+            <a:fillRef idx="0">
+              <a:schemeClr val="accent1"/>
+            </a:fillRef>
+            <a:effectRef idx="0">
+              <a:schemeClr val="accent1"/>
+            </a:effectRef>
+            <a:fontRef idx="minor">
+              <a:schemeClr val="tx1"/>
+            </a:fontRef>
+          </p:style>
+        </p:cxnSp>
+        <p:sp>
+          <p:nvSpPr>
+            <p:cNvPr id="66" name="椭圆 65">
+              <a:extLst>
+                <a:ext uri="{FF2B5EF4-FFF2-40B4-BE49-F238E27FC236}">
+                  <a16:creationId xmlns:a16="http://schemas.microsoft.com/office/drawing/2014/main" id="{9CBC1B51-6100-BBFA-D95D-F362A00EDE5E}"/>
+                </a:ext>
+              </a:extLst>
+            </p:cNvPr>
+            <p:cNvSpPr/>
+            <p:nvPr/>
+          </p:nvSpPr>
+          <p:spPr>
+            <a:xfrm>
+              <a:off x="7833997" y="3942450"/>
+              <a:ext cx="36000" cy="36000"/>
+            </a:xfrm>
+            <a:prstGeom prst="ellipse">
+              <a:avLst/>
+            </a:prstGeom>
+            <a:solidFill>
+              <a:schemeClr val="tx1"/>
+            </a:solidFill>
+            <a:ln>
+              <a:solidFill>
+                <a:schemeClr val="tx1"/>
+              </a:solidFill>
+            </a:ln>
+          </p:spPr>
+          <p:style>
+            <a:lnRef idx="2">
+              <a:schemeClr val="accent1">
+                <a:lumMod val="75000"/>
+              </a:schemeClr>
+            </a:lnRef>
+            <a:fillRef idx="1">
+              <a:schemeClr val="accent1"/>
+            </a:fillRef>
+            <a:effectRef idx="0">
+              <a:srgbClr val="FFFFFF"/>
+            </a:effectRef>
+            <a:fontRef idx="minor">
+              <a:schemeClr val="lt1"/>
+            </a:fontRef>
+          </p:style>
+          <p:txBody>
+            <a:bodyPr rtlCol="0" anchor="ctr"/>
+            <a:lstStyle/>
+            <a:p>
+              <a:pPr algn="ctr"/>
+              <a:endParaRPr lang="zh-CN" altLang="en-US"/>
+            </a:p>
+          </p:txBody>
+        </p:sp>
+        <p:cxnSp>
+          <p:nvCxnSpPr>
+            <p:cNvPr id="69" name="直接连接符 68">
+              <a:extLst>
+                <a:ext uri="{FF2B5EF4-FFF2-40B4-BE49-F238E27FC236}">
+                  <a16:creationId xmlns:a16="http://schemas.microsoft.com/office/drawing/2014/main" id="{F313D70A-31F5-E25E-C583-CB69E637FD03}"/>
+                </a:ext>
+              </a:extLst>
+            </p:cNvPr>
+            <p:cNvCxnSpPr>
+              <a:cxnSpLocks/>
+              <a:stCxn id="66" idx="6"/>
+              <a:endCxn id="52" idx="6"/>
+            </p:cNvCxnSpPr>
+            <p:nvPr/>
+          </p:nvCxnSpPr>
+          <p:spPr>
+            <a:xfrm>
+              <a:off x="7869997" y="3960450"/>
+              <a:ext cx="342000" cy="0"/>
+            </a:xfrm>
+            <a:prstGeom prst="line">
+              <a:avLst/>
+            </a:prstGeom>
+            <a:ln w="12700">
+              <a:solidFill>
+                <a:schemeClr val="tx1"/>
+              </a:solidFill>
+            </a:ln>
+          </p:spPr>
+          <p:style>
+            <a:lnRef idx="1">
+              <a:schemeClr val="accent1"/>
+            </a:lnRef>
+            <a:fillRef idx="0">
+              <a:schemeClr val="accent1"/>
+            </a:fillRef>
+            <a:effectRef idx="0">
+              <a:schemeClr val="accent1"/>
+            </a:effectRef>
+            <a:fontRef idx="minor">
+              <a:schemeClr val="tx1"/>
+            </a:fontRef>
+          </p:style>
+        </p:cxnSp>
+        <p:sp>
+          <p:nvSpPr>
+            <p:cNvPr id="70" name="弧形 69">
+              <a:extLst>
+                <a:ext uri="{FF2B5EF4-FFF2-40B4-BE49-F238E27FC236}">
+                  <a16:creationId xmlns:a16="http://schemas.microsoft.com/office/drawing/2014/main" id="{FC7D1D42-DE18-0E36-91FA-C665FC6EDAB9}"/>
+                </a:ext>
+              </a:extLst>
+            </p:cNvPr>
+            <p:cNvSpPr/>
+            <p:nvPr/>
+          </p:nvSpPr>
+          <p:spPr>
+            <a:xfrm>
+              <a:off x="7756725" y="3870450"/>
+              <a:ext cx="180000" cy="180000"/>
+            </a:xfrm>
+            <a:prstGeom prst="arc">
+              <a:avLst>
+                <a:gd name="adj1" fmla="val 19092745"/>
+                <a:gd name="adj2" fmla="val 200608"/>
+              </a:avLst>
+            </a:prstGeom>
+            <a:ln w="6350">
+              <a:solidFill>
+                <a:schemeClr val="tx1"/>
+              </a:solidFill>
+            </a:ln>
+          </p:spPr>
+          <p:style>
+            <a:lnRef idx="1">
+              <a:schemeClr val="accent1"/>
+            </a:lnRef>
+            <a:fillRef idx="0">
+              <a:schemeClr val="accent1"/>
+            </a:fillRef>
+            <a:effectRef idx="0">
+              <a:schemeClr val="accent1"/>
+            </a:effectRef>
+            <a:fontRef idx="minor">
+              <a:schemeClr val="tx1"/>
+            </a:fontRef>
+          </p:style>
+          <p:txBody>
+            <a:bodyPr rtlCol="0" anchor="ctr"/>
+            <a:lstStyle/>
+            <a:p>
+              <a:pPr algn="ctr"/>
+              <a:endParaRPr lang="zh-CN" altLang="en-US" dirty="0"/>
+            </a:p>
+          </p:txBody>
+        </p:sp>
+        <mc:AlternateContent xmlns:mc="http://schemas.openxmlformats.org/markup-compatibility/2006">
+          <mc:Choice xmlns:a14="http://schemas.microsoft.com/office/drawing/2010/main" Requires="a14">
+            <p:sp>
+              <p:nvSpPr>
+                <p:cNvPr id="73" name="文本框 72">
+                  <a:extLst>
+                    <a:ext uri="{FF2B5EF4-FFF2-40B4-BE49-F238E27FC236}">
+                      <a16:creationId xmlns:a16="http://schemas.microsoft.com/office/drawing/2014/main" id="{DBDCA877-F3BB-FB03-ED8C-6F337E615E8C}"/>
+                    </a:ext>
+                  </a:extLst>
+                </p:cNvPr>
+                <p:cNvSpPr txBox="1"/>
+                <p:nvPr/>
+              </p:nvSpPr>
+              <p:spPr>
+                <a:xfrm>
+                  <a:off x="7843751" y="3960450"/>
+                  <a:ext cx="185948" cy="153888"/>
+                </a:xfrm>
+                <a:prstGeom prst="rect">
+                  <a:avLst/>
+                </a:prstGeom>
+                <a:noFill/>
+              </p:spPr>
+              <p:txBody>
+                <a:bodyPr wrap="none" lIns="0" tIns="0" rIns="0" bIns="0" rtlCol="0">
+                  <a:spAutoFit/>
+                </a:bodyPr>
+                <a:lstStyle/>
+                <a:p>
+                  <a14:m>
+                    <m:oMathPara xmlns:m="http://schemas.openxmlformats.org/officeDocument/2006/math">
+                      <m:oMath>
+                        <m:r>
+                          <m:rPr>
+                            <m:sty m:val="p"/>
+                          </m:rPr>
+                          <a:rPr lang="en-US" altLang="zh-CN" sz="1000" b="0" i="1" smtClean="0">
+                            <a:latin typeface="Cambria Math" panose="02040503050406030204" pitchFamily="18" charset="0"/>
+                          </a:rPr>
+                          <m:t>dΩ</m:t>
+                        </m:r>
+                      </m:oMath>
+                    </m:oMathPara>
+                  </a14:m>
+                  <a:endParaRPr lang="en-US" altLang="zh-CN" sz="1000" b="0" dirty="0"/>
+                </a:p>
+              </p:txBody>
+            </p:sp>
+          </mc:Choice>
+          <mc:Fallback>
+            <p:sp>
+              <p:nvSpPr>
+                <p:cNvPr id="73" name="文本框 72">
+                  <a:extLst>
+                    <a:ext uri="{FF2B5EF4-FFF2-40B4-BE49-F238E27FC236}">
+                      <a16:creationId xmlns:a16="http://schemas.microsoft.com/office/drawing/2014/main" id="{DBDCA877-F3BB-FB03-ED8C-6F337E615E8C}"/>
+                    </a:ext>
+                  </a:extLst>
+                </p:cNvPr>
+                <p:cNvSpPr txBox="1">
+                  <a:spLocks noRot="1" noChangeAspect="1" noMove="1" noResize="1" noEditPoints="1" noAdjustHandles="1" noChangeArrowheads="1" noChangeShapeType="1" noTextEdit="1"/>
+                </p:cNvSpPr>
+                <p:nvPr/>
+              </p:nvSpPr>
+              <p:spPr>
+                <a:xfrm>
+                  <a:off x="7843751" y="3960450"/>
+                  <a:ext cx="185948" cy="153888"/>
+                </a:xfrm>
+                <a:prstGeom prst="rect">
+                  <a:avLst/>
+                </a:prstGeom>
+                <a:blipFill>
+                  <a:blip r:embed="rId9"/>
+                  <a:stretch>
+                    <a:fillRect l="-19355" r="-16129" b="-12000"/>
+                  </a:stretch>
+                </a:blipFill>
+              </p:spPr>
+              <p:txBody>
+                <a:bodyPr/>
+                <a:lstStyle/>
+                <a:p>
+                  <a:r>
+                    <a:rPr lang="zh-CN" altLang="en-US">
+                      <a:noFill/>
+                    </a:rPr>
+                    <a:t> </a:t>
+                  </a:r>
+                </a:p>
+              </p:txBody>
+            </p:sp>
+          </mc:Fallback>
+        </mc:AlternateContent>
+        <mc:AlternateContent xmlns:mc="http://schemas.openxmlformats.org/markup-compatibility/2006">
+          <mc:Choice xmlns:a14="http://schemas.microsoft.com/office/drawing/2010/main" Requires="a14">
+            <p:sp>
+              <p:nvSpPr>
+                <p:cNvPr id="75" name="文本框 74">
+                  <a:extLst>
+                    <a:ext uri="{FF2B5EF4-FFF2-40B4-BE49-F238E27FC236}">
+                      <a16:creationId xmlns:a16="http://schemas.microsoft.com/office/drawing/2014/main" id="{E1540223-95FB-6000-EDFA-E8BA774F1C82}"/>
+                    </a:ext>
+                  </a:extLst>
+                </p:cNvPr>
+                <p:cNvSpPr txBox="1"/>
+                <p:nvPr/>
+              </p:nvSpPr>
+              <p:spPr>
+                <a:xfrm>
+                  <a:off x="7895038" y="3710198"/>
+                  <a:ext cx="90602" cy="153888"/>
+                </a:xfrm>
+                <a:prstGeom prst="rect">
+                  <a:avLst/>
+                </a:prstGeom>
+                <a:noFill/>
+              </p:spPr>
+              <p:txBody>
+                <a:bodyPr wrap="none" lIns="0" tIns="0" rIns="0" bIns="0" rtlCol="0">
+                  <a:spAutoFit/>
+                </a:bodyPr>
+                <a:lstStyle/>
+                <a:p>
+                  <a14:m>
+                    <m:oMathPara xmlns:m="http://schemas.openxmlformats.org/officeDocument/2006/math">
+                      <m:oMath>
+                        <m:r>
+                          <a:rPr lang="en-US" altLang="zh-CN" sz="1000" b="0" i="1" smtClean="0">
+                            <a:latin typeface="Cambria Math" panose="02040503050406030204" pitchFamily="18" charset="0"/>
+                          </a:rPr>
+                          <m:t>𝜀</m:t>
+                        </m:r>
+                      </m:oMath>
+                    </m:oMathPara>
+                  </a14:m>
+                  <a:endParaRPr lang="en-US" altLang="zh-CN" sz="1000" b="0" dirty="0"/>
+                </a:p>
+              </p:txBody>
+            </p:sp>
+          </mc:Choice>
+          <mc:Fallback>
+            <p:sp>
+              <p:nvSpPr>
+                <p:cNvPr id="75" name="文本框 74">
+                  <a:extLst>
+                    <a:ext uri="{FF2B5EF4-FFF2-40B4-BE49-F238E27FC236}">
+                      <a16:creationId xmlns:a16="http://schemas.microsoft.com/office/drawing/2014/main" id="{E1540223-95FB-6000-EDFA-E8BA774F1C82}"/>
+                    </a:ext>
+                  </a:extLst>
+                </p:cNvPr>
+                <p:cNvSpPr txBox="1">
+                  <a:spLocks noRot="1" noChangeAspect="1" noMove="1" noResize="1" noEditPoints="1" noAdjustHandles="1" noChangeArrowheads="1" noChangeShapeType="1" noTextEdit="1"/>
+                </p:cNvSpPr>
+                <p:nvPr/>
+              </p:nvSpPr>
+              <p:spPr>
+                <a:xfrm>
+                  <a:off x="7895038" y="3710198"/>
+                  <a:ext cx="90602" cy="153888"/>
+                </a:xfrm>
+                <a:prstGeom prst="rect">
+                  <a:avLst/>
+                </a:prstGeom>
+                <a:blipFill>
+                  <a:blip r:embed="rId10"/>
+                  <a:stretch>
+                    <a:fillRect l="-26667" r="-13333" b="-4000"/>
+                  </a:stretch>
+                </a:blipFill>
+              </p:spPr>
+              <p:txBody>
+                <a:bodyPr/>
+                <a:lstStyle/>
+                <a:p>
+                  <a:r>
+                    <a:rPr lang="zh-CN" altLang="en-US">
+                      <a:noFill/>
+                    </a:rPr>
+                    <a:t> </a:t>
+                  </a:r>
+                </a:p>
+              </p:txBody>
+            </p:sp>
+          </mc:Fallback>
+        </mc:AlternateContent>
+        <mc:AlternateContent xmlns:mc="http://schemas.openxmlformats.org/markup-compatibility/2006">
+          <mc:Choice xmlns:a14="http://schemas.microsoft.com/office/drawing/2010/main" Requires="a14">
+            <p:sp>
+              <p:nvSpPr>
+                <p:cNvPr id="76" name="文本框 75">
+                  <a:extLst>
+                    <a:ext uri="{FF2B5EF4-FFF2-40B4-BE49-F238E27FC236}">
+                      <a16:creationId xmlns:a16="http://schemas.microsoft.com/office/drawing/2014/main" id="{53EB1D0A-3E82-22D2-6975-B2A754447789}"/>
+                    </a:ext>
+                  </a:extLst>
+                </p:cNvPr>
+                <p:cNvSpPr txBox="1"/>
+                <p:nvPr/>
+              </p:nvSpPr>
+              <p:spPr>
+                <a:xfrm>
+                  <a:off x="8188307" y="3749863"/>
+                  <a:ext cx="161326" cy="153888"/>
+                </a:xfrm>
+                <a:prstGeom prst="rect">
+                  <a:avLst/>
+                </a:prstGeom>
+                <a:noFill/>
+              </p:spPr>
+              <p:txBody>
+                <a:bodyPr wrap="none" lIns="0" tIns="0" rIns="0" bIns="0" rtlCol="0">
+                  <a:spAutoFit/>
+                </a:bodyPr>
+                <a:lstStyle/>
+                <a:p>
+                  <a14:m>
+                    <m:oMathPara xmlns:m="http://schemas.openxmlformats.org/officeDocument/2006/math">
+                      <m:oMath>
+                        <m:r>
+                          <m:rPr>
+                            <m:sty m:val="p"/>
+                          </m:rPr>
+                          <a:rPr lang="en-US" altLang="zh-CN" sz="1000" b="0" i="1" smtClean="0">
+                            <a:latin typeface="Cambria Math" panose="02040503050406030204" pitchFamily="18" charset="0"/>
+                          </a:rPr>
+                          <m:t>d</m:t>
+                        </m:r>
+                        <m:r>
+                          <a:rPr lang="en-US" altLang="zh-CN" sz="1000" b="0" i="1" smtClean="0">
+                            <a:latin typeface="Cambria Math" panose="02040503050406030204" pitchFamily="18" charset="0"/>
+                          </a:rPr>
+                          <m:t>𝑠</m:t>
+                        </m:r>
+                      </m:oMath>
+                    </m:oMathPara>
+                  </a14:m>
+                  <a:endParaRPr lang="en-US" altLang="zh-CN" sz="1000" b="0" dirty="0"/>
+                </a:p>
+              </p:txBody>
+            </p:sp>
+          </mc:Choice>
+          <mc:Fallback>
+            <p:sp>
+              <p:nvSpPr>
+                <p:cNvPr id="76" name="文本框 75">
+                  <a:extLst>
+                    <a:ext uri="{FF2B5EF4-FFF2-40B4-BE49-F238E27FC236}">
+                      <a16:creationId xmlns:a16="http://schemas.microsoft.com/office/drawing/2014/main" id="{53EB1D0A-3E82-22D2-6975-B2A754447789}"/>
+                    </a:ext>
+                  </a:extLst>
+                </p:cNvPr>
+                <p:cNvSpPr txBox="1">
+                  <a:spLocks noRot="1" noChangeAspect="1" noMove="1" noResize="1" noEditPoints="1" noAdjustHandles="1" noChangeArrowheads="1" noChangeShapeType="1" noTextEdit="1"/>
+                </p:cNvSpPr>
+                <p:nvPr/>
+              </p:nvSpPr>
+              <p:spPr>
+                <a:xfrm>
+                  <a:off x="8188307" y="3749863"/>
+                  <a:ext cx="161326" cy="153888"/>
+                </a:xfrm>
+                <a:prstGeom prst="rect">
+                  <a:avLst/>
+                </a:prstGeom>
+                <a:blipFill>
+                  <a:blip r:embed="rId11"/>
+                  <a:stretch>
+                    <a:fillRect l="-23077" r="-23077" b="-12000"/>
+                  </a:stretch>
+                </a:blipFill>
+              </p:spPr>
+              <p:txBody>
+                <a:bodyPr/>
+                <a:lstStyle/>
+                <a:p>
+                  <a:r>
+                    <a:rPr lang="zh-CN" altLang="en-US">
+                      <a:noFill/>
+                    </a:rPr>
+                    <a:t> </a:t>
+                  </a:r>
+                </a:p>
+              </p:txBody>
+            </p:sp>
+          </mc:Fallback>
+        </mc:AlternateContent>
+      </p:grpSp>
+      <p:grpSp>
+        <p:nvGrpSpPr>
+          <p:cNvPr id="80" name="组合 79">
+            <a:extLst>
+              <a:ext uri="{FF2B5EF4-FFF2-40B4-BE49-F238E27FC236}">
+                <a16:creationId xmlns:a16="http://schemas.microsoft.com/office/drawing/2014/main" id="{B778AF27-10AC-7472-F798-B3599E070C99}"/>
+              </a:ext>
+            </a:extLst>
+          </p:cNvPr>
+          <p:cNvGrpSpPr/>
+          <p:nvPr/>
+        </p:nvGrpSpPr>
+        <p:grpSpPr>
+          <a:xfrm>
+            <a:off x="6179525" y="1463757"/>
+            <a:ext cx="688975" cy="452755"/>
+            <a:chOff x="6877050" y="1851977"/>
+            <a:chExt cx="688975" cy="452755"/>
+          </a:xfrm>
+        </p:grpSpPr>
+        <p:sp>
+          <p:nvSpPr>
+            <p:cNvPr id="81" name="椭圆 80">
+              <a:extLst>
+                <a:ext uri="{FF2B5EF4-FFF2-40B4-BE49-F238E27FC236}">
+                  <a16:creationId xmlns:a16="http://schemas.microsoft.com/office/drawing/2014/main" id="{97C67AE7-D4E6-1BF1-CBCA-1C47E82AFA0A}"/>
+                </a:ext>
+              </a:extLst>
+            </p:cNvPr>
+            <p:cNvSpPr/>
+            <p:nvPr/>
+          </p:nvSpPr>
+          <p:spPr>
+            <a:xfrm>
+              <a:off x="6877050" y="1851977"/>
+              <a:ext cx="452755" cy="452755"/>
+            </a:xfrm>
+            <a:prstGeom prst="ellipse">
+              <a:avLst/>
+            </a:prstGeom>
+            <a:noFill/>
+            <a:ln>
+              <a:solidFill>
+                <a:schemeClr val="tx1"/>
+              </a:solidFill>
+            </a:ln>
+            <a:extLst>
+              <a:ext uri="{909E8E84-426E-40DD-AFC4-6F175D3DCCD1}">
+                <a14:hiddenFill xmlns:a14="http://schemas.microsoft.com/office/drawing/2010/main">
+                  <a:solidFill>
+                    <a:schemeClr val="accent1"/>
+                  </a:solidFill>
+                </a14:hiddenFill>
+              </a:ext>
+            </a:extLst>
+          </p:spPr>
+          <p:style>
+            <a:lnRef idx="2">
+              <a:schemeClr val="accent1">
+                <a:lumMod val="75000"/>
+              </a:schemeClr>
+            </a:lnRef>
+            <a:fillRef idx="1">
+              <a:schemeClr val="accent1"/>
+            </a:fillRef>
+            <a:effectRef idx="0">
+              <a:srgbClr val="FFFFFF"/>
+            </a:effectRef>
+            <a:fontRef idx="minor">
+              <a:schemeClr val="lt1"/>
+            </a:fontRef>
+          </p:style>
+          <p:txBody>
+            <a:bodyPr vertOverflow="overflow" horzOverflow="overflow" vert="horz" wrap="square" numCol="1" spcCol="0" rtlCol="0" fromWordArt="0" anchor="ctr" anchorCtr="0" forceAA="0" compatLnSpc="1">
+              <a:noAutofit/>
+            </a:bodyPr>
+            <a:lstStyle/>
+            <a:p>
+              <a:pPr lvl="0" algn="ctr">
+                <a:buClrTx/>
+                <a:buSzTx/>
+                <a:buFontTx/>
+              </a:pPr>
+              <a:endParaRPr lang="zh-CN" altLang="en-US">
+                <a:sym typeface="+mn-ea"/>
+              </a:endParaRPr>
+            </a:p>
+          </p:txBody>
+        </p:sp>
+        <p:sp>
+          <p:nvSpPr>
+            <p:cNvPr id="82" name="椭圆 81">
+              <a:extLst>
+                <a:ext uri="{FF2B5EF4-FFF2-40B4-BE49-F238E27FC236}">
+                  <a16:creationId xmlns:a16="http://schemas.microsoft.com/office/drawing/2014/main" id="{36D6D113-9717-6522-A5C9-A45AD78E2197}"/>
+                </a:ext>
+              </a:extLst>
+            </p:cNvPr>
+            <p:cNvSpPr/>
+            <p:nvPr/>
+          </p:nvSpPr>
+          <p:spPr>
+            <a:xfrm>
+              <a:off x="7085330" y="2060257"/>
+              <a:ext cx="36000" cy="36000"/>
+            </a:xfrm>
+            <a:prstGeom prst="ellipse">
+              <a:avLst/>
+            </a:prstGeom>
+            <a:solidFill>
+              <a:schemeClr val="tx1"/>
+            </a:solidFill>
+            <a:ln>
+              <a:solidFill>
+                <a:schemeClr val="tx1"/>
+              </a:solidFill>
+            </a:ln>
+          </p:spPr>
+          <p:style>
+            <a:lnRef idx="2">
+              <a:schemeClr val="accent1">
+                <a:lumMod val="75000"/>
+              </a:schemeClr>
+            </a:lnRef>
+            <a:fillRef idx="1">
+              <a:schemeClr val="accent1"/>
+            </a:fillRef>
+            <a:effectRef idx="0">
+              <a:srgbClr val="FFFFFF"/>
+            </a:effectRef>
+            <a:fontRef idx="minor">
+              <a:schemeClr val="lt1"/>
+            </a:fontRef>
+          </p:style>
+          <p:txBody>
+            <a:bodyPr rtlCol="0" anchor="ctr"/>
+            <a:lstStyle/>
+            <a:p>
+              <a:pPr algn="ctr"/>
+              <a:endParaRPr lang="zh-CN" altLang="en-US"/>
+            </a:p>
+          </p:txBody>
+        </p:sp>
+        <p:cxnSp>
+          <p:nvCxnSpPr>
+            <p:cNvPr id="83" name="直接箭头连接符 82">
+              <a:extLst>
+                <a:ext uri="{FF2B5EF4-FFF2-40B4-BE49-F238E27FC236}">
+                  <a16:creationId xmlns:a16="http://schemas.microsoft.com/office/drawing/2014/main" id="{FA8ED95C-A070-8760-0033-C9752D1D7288}"/>
+                </a:ext>
+              </a:extLst>
+            </p:cNvPr>
+            <p:cNvCxnSpPr>
+              <a:stCxn id="82" idx="6"/>
+              <a:endCxn id="81" idx="6"/>
+            </p:cNvCxnSpPr>
+            <p:nvPr/>
+          </p:nvCxnSpPr>
+          <p:spPr>
+            <a:xfrm>
+              <a:off x="7121330" y="2078257"/>
+              <a:ext cx="208475" cy="98"/>
+            </a:xfrm>
+            <a:prstGeom prst="straightConnector1">
+              <a:avLst/>
+            </a:prstGeom>
+            <a:ln w="12700">
+              <a:solidFill>
+                <a:srgbClr val="FF0000">
+                  <a:alpha val="50000"/>
+                </a:srgbClr>
+              </a:solidFill>
+              <a:prstDash val="dash"/>
+              <a:tailEnd type="arrow"/>
+            </a:ln>
+          </p:spPr>
+          <p:style>
+            <a:lnRef idx="1">
+              <a:schemeClr val="accent1"/>
+            </a:lnRef>
+            <a:fillRef idx="0">
+              <a:schemeClr val="accent1"/>
+            </a:fillRef>
+            <a:effectRef idx="0">
+              <a:schemeClr val="accent1"/>
+            </a:effectRef>
+            <a:fontRef idx="minor">
+              <a:schemeClr val="tx1"/>
+            </a:fontRef>
+          </p:style>
+        </p:cxnSp>
+        <p:cxnSp>
+          <p:nvCxnSpPr>
+            <p:cNvPr id="84" name="直接箭头连接符 83">
+              <a:extLst>
+                <a:ext uri="{FF2B5EF4-FFF2-40B4-BE49-F238E27FC236}">
+                  <a16:creationId xmlns:a16="http://schemas.microsoft.com/office/drawing/2014/main" id="{2627CF22-EFFC-6E69-153C-B00FDB4F814E}"/>
+                </a:ext>
+              </a:extLst>
+            </p:cNvPr>
+            <p:cNvCxnSpPr>
+              <a:cxnSpLocks/>
+            </p:cNvCxnSpPr>
+            <p:nvPr/>
+          </p:nvCxnSpPr>
+          <p:spPr>
+            <a:xfrm rot="10800000" flipH="1">
+              <a:off x="7121330" y="2078257"/>
+              <a:ext cx="444695" cy="0"/>
+            </a:xfrm>
+            <a:prstGeom prst="straightConnector1">
+              <a:avLst/>
+            </a:prstGeom>
+            <a:ln w="12700">
+              <a:solidFill>
+                <a:srgbClr val="92D050">
+                  <a:alpha val="50000"/>
+                </a:srgbClr>
+              </a:solidFill>
+              <a:prstDash val="dash"/>
+              <a:tailEnd type="arrow"/>
+            </a:ln>
+          </p:spPr>
+          <p:style>
+            <a:lnRef idx="1">
+              <a:schemeClr val="accent1"/>
+            </a:lnRef>
+            <a:fillRef idx="0">
+              <a:schemeClr val="accent1"/>
+            </a:fillRef>
+            <a:effectRef idx="0">
+              <a:schemeClr val="accent1"/>
+            </a:effectRef>
+            <a:fontRef idx="minor">
+              <a:schemeClr val="tx1"/>
+            </a:fontRef>
+          </p:style>
+        </p:cxnSp>
+        <mc:AlternateContent xmlns:mc="http://schemas.openxmlformats.org/markup-compatibility/2006">
+          <mc:Choice xmlns:a14="http://schemas.microsoft.com/office/drawing/2010/main" Requires="a14">
+            <p:sp>
+              <p:nvSpPr>
+                <p:cNvPr id="85" name="文本框 84">
+                  <a:extLst>
+                    <a:ext uri="{FF2B5EF4-FFF2-40B4-BE49-F238E27FC236}">
+                      <a16:creationId xmlns:a16="http://schemas.microsoft.com/office/drawing/2014/main" id="{94FBFEE0-BB22-16EF-C997-03B9569FA853}"/>
+                    </a:ext>
+                  </a:extLst>
+                </p:cNvPr>
+                <p:cNvSpPr txBox="1"/>
+                <p:nvPr/>
+              </p:nvSpPr>
+              <p:spPr>
+                <a:xfrm>
+                  <a:off x="7403832" y="2104687"/>
+                  <a:ext cx="88165" cy="123111"/>
+                </a:xfrm>
+                <a:prstGeom prst="rect">
+                  <a:avLst/>
+                </a:prstGeom>
+                <a:noFill/>
+              </p:spPr>
+              <p:txBody>
+                <a:bodyPr wrap="none" lIns="0" tIns="0" rIns="0" bIns="0" rtlCol="0">
+                  <a:spAutoFit/>
+                </a:bodyPr>
+                <a:lstStyle/>
+                <a:p>
+                  <a14:m>
+                    <m:oMathPara xmlns:m="http://schemas.openxmlformats.org/officeDocument/2006/math">
+                      <m:oMath>
+                        <m:r>
+                          <a:rPr lang="en-US" altLang="zh-CN" sz="800" b="0" i="1" smtClean="0">
+                            <a:solidFill>
+                              <a:srgbClr val="92D050"/>
+                            </a:solidFill>
+                            <a:latin typeface="Cambria Math" panose="02040503050406030204" pitchFamily="18" charset="0"/>
+                          </a:rPr>
+                          <m:t>𝒏</m:t>
+                        </m:r>
+                      </m:oMath>
+                    </m:oMathPara>
+                  </a14:m>
+                  <a:endParaRPr lang="en-US" altLang="zh-CN" sz="800" b="0" dirty="0">
+                    <a:solidFill>
+                      <a:srgbClr val="92D050"/>
+                    </a:solidFill>
+                  </a:endParaRPr>
+                </a:p>
+              </p:txBody>
+            </p:sp>
+          </mc:Choice>
+          <mc:Fallback>
+            <p:sp>
+              <p:nvSpPr>
+                <p:cNvPr id="85" name="文本框 84">
+                  <a:extLst>
+                    <a:ext uri="{FF2B5EF4-FFF2-40B4-BE49-F238E27FC236}">
+                      <a16:creationId xmlns:a16="http://schemas.microsoft.com/office/drawing/2014/main" id="{94FBFEE0-BB22-16EF-C997-03B9569FA853}"/>
+                    </a:ext>
+                  </a:extLst>
+                </p:cNvPr>
+                <p:cNvSpPr txBox="1">
+                  <a:spLocks noRot="1" noChangeAspect="1" noMove="1" noResize="1" noEditPoints="1" noAdjustHandles="1" noChangeArrowheads="1" noChangeShapeType="1" noTextEdit="1"/>
+                </p:cNvSpPr>
+                <p:nvPr/>
+              </p:nvSpPr>
+              <p:spPr>
+                <a:xfrm>
+                  <a:off x="7403832" y="2104687"/>
+                  <a:ext cx="88165" cy="123111"/>
+                </a:xfrm>
+                <a:prstGeom prst="rect">
+                  <a:avLst/>
+                </a:prstGeom>
+                <a:blipFill>
+                  <a:blip r:embed="rId12"/>
+                  <a:stretch>
+                    <a:fillRect l="-13333" r="-20000"/>
+                  </a:stretch>
+                </a:blipFill>
+              </p:spPr>
+              <p:txBody>
+                <a:bodyPr/>
+                <a:lstStyle/>
+                <a:p>
+                  <a:r>
+                    <a:rPr lang="zh-CN" altLang="en-US">
+                      <a:noFill/>
+                    </a:rPr>
+                    <a:t> </a:t>
+                  </a:r>
+                </a:p>
+              </p:txBody>
+            </p:sp>
+          </mc:Fallback>
+        </mc:AlternateContent>
+        <mc:AlternateContent xmlns:mc="http://schemas.openxmlformats.org/markup-compatibility/2006">
+          <mc:Choice xmlns:a14="http://schemas.microsoft.com/office/drawing/2010/main" Requires="a14">
+            <p:sp>
+              <p:nvSpPr>
+                <p:cNvPr id="86" name="文本框 85">
+                  <a:extLst>
+                    <a:ext uri="{FF2B5EF4-FFF2-40B4-BE49-F238E27FC236}">
+                      <a16:creationId xmlns:a16="http://schemas.microsoft.com/office/drawing/2014/main" id="{063098ED-7867-4DF2-2B6D-E144169CEC69}"/>
+                    </a:ext>
+                  </a:extLst>
+                </p:cNvPr>
+                <p:cNvSpPr txBox="1"/>
+                <p:nvPr/>
+              </p:nvSpPr>
+              <p:spPr>
+                <a:xfrm>
+                  <a:off x="7192523" y="1937146"/>
+                  <a:ext cx="76944" cy="123111"/>
+                </a:xfrm>
+                <a:prstGeom prst="rect">
+                  <a:avLst/>
+                </a:prstGeom>
+                <a:noFill/>
+              </p:spPr>
+              <p:txBody>
+                <a:bodyPr wrap="none" lIns="0" tIns="0" rIns="0" bIns="0" rtlCol="0">
+                  <a:spAutoFit/>
+                </a:bodyPr>
+                <a:lstStyle/>
+                <a:p>
+                  <a14:m>
+                    <m:oMathPara xmlns:m="http://schemas.openxmlformats.org/officeDocument/2006/math">
+                      <m:oMath>
+                        <m:r>
+                          <a:rPr lang="en-US" altLang="zh-CN" sz="800" b="0" i="1" smtClean="0">
+                            <a:solidFill>
+                              <a:srgbClr val="FF0000"/>
+                            </a:solidFill>
+                            <a:latin typeface="Cambria Math" panose="02040503050406030204" pitchFamily="18" charset="0"/>
+                          </a:rPr>
+                          <m:t>𝒓</m:t>
+                        </m:r>
+                      </m:oMath>
+                    </m:oMathPara>
+                  </a14:m>
+                  <a:endParaRPr lang="en-US" altLang="zh-CN" sz="800" b="0" dirty="0">
+                    <a:solidFill>
+                      <a:srgbClr val="FF0000"/>
+                    </a:solidFill>
+                  </a:endParaRPr>
+                </a:p>
+              </p:txBody>
+            </p:sp>
+          </mc:Choice>
+          <mc:Fallback>
+            <p:sp>
+              <p:nvSpPr>
+                <p:cNvPr id="86" name="文本框 85">
+                  <a:extLst>
+                    <a:ext uri="{FF2B5EF4-FFF2-40B4-BE49-F238E27FC236}">
+                      <a16:creationId xmlns:a16="http://schemas.microsoft.com/office/drawing/2014/main" id="{063098ED-7867-4DF2-2B6D-E144169CEC69}"/>
+                    </a:ext>
+                  </a:extLst>
+                </p:cNvPr>
+                <p:cNvSpPr txBox="1">
+                  <a:spLocks noRot="1" noChangeAspect="1" noMove="1" noResize="1" noEditPoints="1" noAdjustHandles="1" noChangeArrowheads="1" noChangeShapeType="1" noTextEdit="1"/>
+                </p:cNvSpPr>
+                <p:nvPr/>
+              </p:nvSpPr>
+              <p:spPr>
+                <a:xfrm>
+                  <a:off x="7192523" y="1937146"/>
+                  <a:ext cx="76944" cy="123111"/>
+                </a:xfrm>
+                <a:prstGeom prst="rect">
+                  <a:avLst/>
+                </a:prstGeom>
+                <a:blipFill>
+                  <a:blip r:embed="rId13"/>
+                  <a:stretch>
+                    <a:fillRect l="-15385" r="-23077" b="-5000"/>
+                  </a:stretch>
+                </a:blipFill>
+              </p:spPr>
+              <p:txBody>
+                <a:bodyPr/>
+                <a:lstStyle/>
+                <a:p>
+                  <a:r>
+                    <a:rPr lang="zh-CN" altLang="en-US">
+                      <a:noFill/>
+                    </a:rPr>
+                    <a:t> </a:t>
+                  </a:r>
+                </a:p>
+              </p:txBody>
+            </p:sp>
+          </mc:Fallback>
+        </mc:AlternateContent>
+      </p:grpSp>
     </p:spTree>
   </p:cSld>
   <p:clrMapOvr>
@@ -7355,7 +9478,11 @@
         <p:nvGrpSpPr>
           <p:cNvPr id="5" name="Group 5"/>
           <p:cNvGrpSpPr/>
-          <p:nvPr/>
+          <p:nvPr>
+            <p:custDataLst>
+              <p:tags r:id="rId1"/>
+            </p:custDataLst>
+          </p:nvPr>
         </p:nvGrpSpPr>
         <p:grpSpPr bwMode="auto">
           <a:xfrm>
@@ -7371,7 +9498,11 @@
             <p:cNvSpPr>
               <a:spLocks noChangeShapeType="1"/>
             </p:cNvSpPr>
-            <p:nvPr/>
+            <p:nvPr>
+              <p:custDataLst>
+                <p:tags r:id="rId35"/>
+              </p:custDataLst>
+            </p:nvPr>
           </p:nvSpPr>
           <p:spPr bwMode="auto">
             <a:xfrm>
@@ -7411,7 +9542,11 @@
             <p:cNvSpPr>
               <a:spLocks noChangeShapeType="1"/>
             </p:cNvSpPr>
-            <p:nvPr/>
+            <p:nvPr>
+              <p:custDataLst>
+                <p:tags r:id="rId36"/>
+              </p:custDataLst>
+            </p:nvPr>
           </p:nvSpPr>
           <p:spPr bwMode="auto">
             <a:xfrm rot="5400000">
@@ -7450,7 +9585,11 @@
         <p:nvGrpSpPr>
           <p:cNvPr id="6" name="Group 8"/>
           <p:cNvGrpSpPr/>
-          <p:nvPr/>
+          <p:nvPr>
+            <p:custDataLst>
+              <p:tags r:id="rId2"/>
+            </p:custDataLst>
+          </p:nvPr>
         </p:nvGrpSpPr>
         <p:grpSpPr bwMode="auto">
           <a:xfrm>
@@ -7466,7 +9605,11 @@
             <p:cNvSpPr>
               <a:spLocks noChangeShapeType="1"/>
             </p:cNvSpPr>
-            <p:nvPr/>
+            <p:nvPr>
+              <p:custDataLst>
+                <p:tags r:id="rId33"/>
+              </p:custDataLst>
+            </p:nvPr>
           </p:nvSpPr>
           <p:spPr bwMode="auto">
             <a:xfrm>
@@ -7506,7 +9649,11 @@
             <p:cNvSpPr>
               <a:spLocks noChangeShapeType="1"/>
             </p:cNvSpPr>
-            <p:nvPr/>
+            <p:nvPr>
+              <p:custDataLst>
+                <p:tags r:id="rId34"/>
+              </p:custDataLst>
+            </p:nvPr>
           </p:nvSpPr>
           <p:spPr bwMode="auto">
             <a:xfrm rot="5400000">
@@ -7545,7 +9692,11 @@
         <p:nvGrpSpPr>
           <p:cNvPr id="7" name="Group 11"/>
           <p:cNvGrpSpPr/>
-          <p:nvPr/>
+          <p:nvPr>
+            <p:custDataLst>
+              <p:tags r:id="rId3"/>
+            </p:custDataLst>
+          </p:nvPr>
         </p:nvGrpSpPr>
         <p:grpSpPr bwMode="auto">
           <a:xfrm>
@@ -7561,7 +9712,11 @@
             <p:cNvSpPr>
               <a:spLocks noChangeShapeType="1"/>
             </p:cNvSpPr>
-            <p:nvPr/>
+            <p:nvPr>
+              <p:custDataLst>
+                <p:tags r:id="rId31"/>
+              </p:custDataLst>
+            </p:nvPr>
           </p:nvSpPr>
           <p:spPr bwMode="auto">
             <a:xfrm>
@@ -7601,7 +9756,11 @@
             <p:cNvSpPr>
               <a:spLocks noChangeShapeType="1"/>
             </p:cNvSpPr>
-            <p:nvPr/>
+            <p:nvPr>
+              <p:custDataLst>
+                <p:tags r:id="rId32"/>
+              </p:custDataLst>
+            </p:nvPr>
           </p:nvSpPr>
           <p:spPr bwMode="auto">
             <a:xfrm rot="5400000">
@@ -7640,7 +9799,11 @@
         <p:nvGrpSpPr>
           <p:cNvPr id="8" name="Group 14"/>
           <p:cNvGrpSpPr/>
-          <p:nvPr/>
+          <p:nvPr>
+            <p:custDataLst>
+              <p:tags r:id="rId4"/>
+            </p:custDataLst>
+          </p:nvPr>
         </p:nvGrpSpPr>
         <p:grpSpPr bwMode="auto">
           <a:xfrm>
@@ -7656,7 +9819,11 @@
             <p:cNvSpPr>
               <a:spLocks noChangeShapeType="1"/>
             </p:cNvSpPr>
-            <p:nvPr/>
+            <p:nvPr>
+              <p:custDataLst>
+                <p:tags r:id="rId29"/>
+              </p:custDataLst>
+            </p:nvPr>
           </p:nvSpPr>
           <p:spPr bwMode="auto">
             <a:xfrm>
@@ -7696,7 +9863,11 @@
             <p:cNvSpPr>
               <a:spLocks noChangeShapeType="1"/>
             </p:cNvSpPr>
-            <p:nvPr/>
+            <p:nvPr>
+              <p:custDataLst>
+                <p:tags r:id="rId30"/>
+              </p:custDataLst>
+            </p:nvPr>
           </p:nvSpPr>
           <p:spPr bwMode="auto">
             <a:xfrm rot="5400000">
@@ -7737,7 +9908,11 @@
           <p:cNvSpPr>
             <a:spLocks noChangeShapeType="1"/>
           </p:cNvSpPr>
-          <p:nvPr/>
+          <p:nvPr>
+            <p:custDataLst>
+              <p:tags r:id="rId5"/>
+            </p:custDataLst>
+          </p:nvPr>
         </p:nvSpPr>
         <p:spPr bwMode="auto">
           <a:xfrm>
@@ -7776,7 +9951,11 @@
           <p:cNvSpPr>
             <a:spLocks noChangeShapeType="1"/>
           </p:cNvSpPr>
-          <p:nvPr/>
+          <p:nvPr>
+            <p:custDataLst>
+              <p:tags r:id="rId6"/>
+            </p:custDataLst>
+          </p:nvPr>
         </p:nvSpPr>
         <p:spPr bwMode="auto">
           <a:xfrm>
@@ -7815,7 +9994,11 @@
           <p:cNvSpPr>
             <a:spLocks noChangeShapeType="1"/>
           </p:cNvSpPr>
-          <p:nvPr/>
+          <p:nvPr>
+            <p:custDataLst>
+              <p:tags r:id="rId7"/>
+            </p:custDataLst>
+          </p:nvPr>
         </p:nvSpPr>
         <p:spPr bwMode="auto">
           <a:xfrm>
@@ -7854,7 +10037,11 @@
           <p:cNvSpPr>
             <a:spLocks noChangeArrowheads="1"/>
           </p:cNvSpPr>
-          <p:nvPr/>
+          <p:nvPr>
+            <p:custDataLst>
+              <p:tags r:id="rId8"/>
+            </p:custDataLst>
+          </p:nvPr>
         </p:nvSpPr>
         <p:spPr bwMode="auto">
           <a:xfrm>
@@ -8026,7 +10213,11 @@
           <p:cNvSpPr>
             <a:spLocks noChangeArrowheads="1"/>
           </p:cNvSpPr>
-          <p:nvPr/>
+          <p:nvPr>
+            <p:custDataLst>
+              <p:tags r:id="rId9"/>
+            </p:custDataLst>
+          </p:nvPr>
         </p:nvSpPr>
         <p:spPr bwMode="auto">
           <a:xfrm>
@@ -8196,7 +10387,11 @@
         <p:nvSpPr>
           <p:cNvPr id="14" name="Freeform 22"/>
           <p:cNvSpPr/>
-          <p:nvPr/>
+          <p:nvPr>
+            <p:custDataLst>
+              <p:tags r:id="rId10"/>
+            </p:custDataLst>
+          </p:nvPr>
         </p:nvSpPr>
         <p:spPr bwMode="auto">
           <a:xfrm>
@@ -8435,7 +10630,11 @@
           <p:cNvSpPr>
             <a:spLocks noChangeShapeType="1"/>
           </p:cNvSpPr>
-          <p:nvPr/>
+          <p:nvPr>
+            <p:custDataLst>
+              <p:tags r:id="rId11"/>
+            </p:custDataLst>
+          </p:nvPr>
         </p:nvSpPr>
         <p:spPr bwMode="auto">
           <a:xfrm>
@@ -8474,7 +10673,11 @@
           <p:cNvSpPr>
             <a:spLocks noChangeShapeType="1"/>
           </p:cNvSpPr>
-          <p:nvPr/>
+          <p:nvPr>
+            <p:custDataLst>
+              <p:tags r:id="rId12"/>
+            </p:custDataLst>
+          </p:nvPr>
         </p:nvSpPr>
         <p:spPr bwMode="auto">
           <a:xfrm>
@@ -8513,7 +10716,11 @@
           <p:cNvSpPr>
             <a:spLocks noChangeShapeType="1"/>
           </p:cNvSpPr>
-          <p:nvPr/>
+          <p:nvPr>
+            <p:custDataLst>
+              <p:tags r:id="rId13"/>
+            </p:custDataLst>
+          </p:nvPr>
         </p:nvSpPr>
         <p:spPr bwMode="auto">
           <a:xfrm flipV="1">
@@ -8552,7 +10759,11 @@
           <p:cNvSpPr>
             <a:spLocks noChangeShapeType="1"/>
           </p:cNvSpPr>
-          <p:nvPr/>
+          <p:nvPr>
+            <p:custDataLst>
+              <p:tags r:id="rId14"/>
+            </p:custDataLst>
+          </p:nvPr>
         </p:nvSpPr>
         <p:spPr bwMode="auto">
           <a:xfrm>
@@ -8591,7 +10802,11 @@
           <p:cNvSpPr>
             <a:spLocks noChangeShapeType="1"/>
           </p:cNvSpPr>
-          <p:nvPr/>
+          <p:nvPr>
+            <p:custDataLst>
+              <p:tags r:id="rId15"/>
+            </p:custDataLst>
+          </p:nvPr>
         </p:nvSpPr>
         <p:spPr bwMode="auto">
           <a:xfrm>
@@ -8628,7 +10843,11 @@
         <p:nvSpPr>
           <p:cNvPr id="20" name="Freeform 28"/>
           <p:cNvSpPr/>
-          <p:nvPr/>
+          <p:nvPr>
+            <p:custDataLst>
+              <p:tags r:id="rId16"/>
+            </p:custDataLst>
+          </p:nvPr>
         </p:nvSpPr>
         <p:spPr bwMode="auto">
           <a:xfrm>
@@ -8900,7 +11119,11 @@
           <p:cNvSpPr txBox="1">
             <a:spLocks noChangeArrowheads="1"/>
           </p:cNvSpPr>
-          <p:nvPr/>
+          <p:nvPr>
+            <p:custDataLst>
+              <p:tags r:id="rId17"/>
+            </p:custDataLst>
+          </p:nvPr>
         </p:nvSpPr>
         <p:spPr bwMode="auto">
           <a:xfrm>
@@ -9023,7 +11246,11 @@
           <p:cNvSpPr txBox="1">
             <a:spLocks noChangeArrowheads="1"/>
           </p:cNvSpPr>
-          <p:nvPr/>
+          <p:nvPr>
+            <p:custDataLst>
+              <p:tags r:id="rId18"/>
+            </p:custDataLst>
+          </p:nvPr>
         </p:nvSpPr>
         <p:spPr bwMode="auto">
           <a:xfrm>
@@ -9146,7 +11373,11 @@
           <p:cNvSpPr txBox="1">
             <a:spLocks noChangeArrowheads="1"/>
           </p:cNvSpPr>
-          <p:nvPr/>
+          <p:nvPr>
+            <p:custDataLst>
+              <p:tags r:id="rId19"/>
+            </p:custDataLst>
+          </p:nvPr>
         </p:nvSpPr>
         <p:spPr bwMode="auto">
           <a:xfrm>
@@ -9269,7 +11500,11 @@
           <p:cNvSpPr txBox="1">
             <a:spLocks noChangeArrowheads="1"/>
           </p:cNvSpPr>
-          <p:nvPr/>
+          <p:nvPr>
+            <p:custDataLst>
+              <p:tags r:id="rId20"/>
+            </p:custDataLst>
+          </p:nvPr>
         </p:nvSpPr>
         <p:spPr bwMode="auto">
           <a:xfrm>
@@ -9394,7 +11629,11 @@
               <p:cNvSpPr txBox="1">
                 <a:spLocks noChangeArrowheads="1"/>
               </p:cNvSpPr>
-              <p:nvPr/>
+              <p:nvPr>
+                <p:custDataLst>
+                  <p:tags r:id="rId21"/>
+                </p:custDataLst>
+              </p:nvPr>
             </p:nvSpPr>
             <p:spPr bwMode="auto">
               <a:xfrm>
@@ -9549,7 +11788,11 @@
               <p:cNvSpPr txBox="1">
                 <a:spLocks noRot="1" noChangeAspect="1" noMove="1" noResize="1" noEditPoints="1" noAdjustHandles="1" noChangeArrowheads="1" noChangeShapeType="1" noTextEdit="1"/>
               </p:cNvSpPr>
-              <p:nvPr/>
+              <p:nvPr>
+                <p:custDataLst>
+                  <p:tags r:id="rId38"/>
+                </p:custDataLst>
+              </p:nvPr>
             </p:nvSpPr>
             <p:spPr bwMode="auto">
               <a:xfrm>
@@ -9560,7 +11803,7 @@
                 <a:avLst/>
               </a:prstGeom>
               <a:blipFill rotWithShape="1">
-                <a:blip r:embed="rId2"/>
+                <a:blip r:embed="rId39"/>
                 <a:stretch>
                   <a:fillRect l="-564" t="-1462" r="-488" b="-1322"/>
                 </a:stretch>
@@ -9604,7 +11847,11 @@
               <p:cNvSpPr txBox="1">
                 <a:spLocks noChangeArrowheads="1"/>
               </p:cNvSpPr>
-              <p:nvPr/>
+              <p:nvPr>
+                <p:custDataLst>
+                  <p:tags r:id="rId22"/>
+                </p:custDataLst>
+              </p:nvPr>
             </p:nvSpPr>
             <p:spPr bwMode="auto">
               <a:xfrm>
@@ -9616,9 +11863,7 @@
               </a:prstGeom>
               <a:noFill/>
               <a:ln w="9525">
-                <a:solidFill>
-                  <a:schemeClr val="bg1"/>
-                </a:solidFill>
+                <a:noFill/>
                 <a:miter lim="800000"/>
               </a:ln>
               <a:extLst>
@@ -9739,7 +11984,11 @@
               <p:cNvSpPr txBox="1">
                 <a:spLocks noRot="1" noChangeAspect="1" noMove="1" noResize="1" noEditPoints="1" noAdjustHandles="1" noChangeArrowheads="1" noChangeShapeType="1" noTextEdit="1"/>
               </p:cNvSpPr>
-              <p:nvPr/>
+              <p:nvPr>
+                <p:custDataLst>
+                  <p:tags r:id="rId40"/>
+                </p:custDataLst>
+              </p:nvPr>
             </p:nvSpPr>
             <p:spPr bwMode="auto">
               <a:xfrm>
@@ -9750,15 +11999,13 @@
                 <a:avLst/>
               </a:prstGeom>
               <a:blipFill rotWithShape="1">
-                <a:blip r:embed="rId3"/>
+                <a:blip r:embed="rId41"/>
                 <a:stretch>
-                  <a:fillRect l="-657" t="-1454" r="-716" b="-1330"/>
+                  <a:fillRect l="30" t="-141" r="68" b="170"/>
                 </a:stretch>
               </a:blipFill>
               <a:ln w="9525">
-                <a:solidFill>
-                  <a:schemeClr val="bg1"/>
-                </a:solidFill>
+                <a:noFill/>
                 <a:miter lim="800000"/>
               </a:ln>
               <a:extLst>
@@ -9794,7 +12041,11 @@
               <p:cNvSpPr txBox="1">
                 <a:spLocks noChangeArrowheads="1"/>
               </p:cNvSpPr>
-              <p:nvPr/>
+              <p:nvPr>
+                <p:custDataLst>
+                  <p:tags r:id="rId23"/>
+                </p:custDataLst>
+              </p:nvPr>
             </p:nvSpPr>
             <p:spPr bwMode="auto">
               <a:xfrm>
@@ -9806,9 +12057,7 @@
               </a:prstGeom>
               <a:noFill/>
               <a:ln w="9525">
-                <a:solidFill>
-                  <a:schemeClr val="bg1"/>
-                </a:solidFill>
+                <a:noFill/>
                 <a:miter lim="800000"/>
               </a:ln>
               <a:extLst>
@@ -9929,7 +12178,11 @@
               <p:cNvSpPr txBox="1">
                 <a:spLocks noRot="1" noChangeAspect="1" noMove="1" noResize="1" noEditPoints="1" noAdjustHandles="1" noChangeArrowheads="1" noChangeShapeType="1" noTextEdit="1"/>
               </p:cNvSpPr>
-              <p:nvPr/>
+              <p:nvPr>
+                <p:custDataLst>
+                  <p:tags r:id="rId42"/>
+                </p:custDataLst>
+              </p:nvPr>
             </p:nvSpPr>
             <p:spPr bwMode="auto">
               <a:xfrm>
@@ -9940,15 +12193,13 @@
                 <a:avLst/>
               </a:prstGeom>
               <a:blipFill rotWithShape="1">
-                <a:blip r:embed="rId3"/>
+                <a:blip r:embed="rId41"/>
                 <a:stretch>
-                  <a:fillRect l="-745" t="-1581" r="-725" b="-1391"/>
+                  <a:fillRect l="-59" t="-80" r="59" b="109"/>
                 </a:stretch>
               </a:blipFill>
               <a:ln w="9525">
-                <a:solidFill>
-                  <a:schemeClr val="bg1"/>
-                </a:solidFill>
+                <a:noFill/>
                 <a:miter lim="800000"/>
               </a:ln>
               <a:extLst>
@@ -9984,7 +12235,11 @@
               <p:cNvSpPr txBox="1">
                 <a:spLocks noChangeArrowheads="1"/>
               </p:cNvSpPr>
-              <p:nvPr/>
+              <p:nvPr>
+                <p:custDataLst>
+                  <p:tags r:id="rId24"/>
+                </p:custDataLst>
+              </p:nvPr>
             </p:nvSpPr>
             <p:spPr bwMode="auto">
               <a:xfrm>
@@ -9996,9 +12251,7 @@
               </a:prstGeom>
               <a:noFill/>
               <a:ln w="9525">
-                <a:solidFill>
-                  <a:schemeClr val="bg1"/>
-                </a:solidFill>
+                <a:noFill/>
                 <a:miter lim="800000"/>
               </a:ln>
               <a:extLst>
@@ -10119,7 +12372,11 @@
               <p:cNvSpPr txBox="1">
                 <a:spLocks noRot="1" noChangeAspect="1" noMove="1" noResize="1" noEditPoints="1" noAdjustHandles="1" noChangeArrowheads="1" noChangeShapeType="1" noTextEdit="1"/>
               </p:cNvSpPr>
-              <p:nvPr/>
+              <p:nvPr>
+                <p:custDataLst>
+                  <p:tags r:id="rId43"/>
+                </p:custDataLst>
+              </p:nvPr>
             </p:nvSpPr>
             <p:spPr bwMode="auto">
               <a:xfrm>
@@ -10130,15 +12387,13 @@
                 <a:avLst/>
               </a:prstGeom>
               <a:blipFill rotWithShape="1">
-                <a:blip r:embed="rId3"/>
+                <a:blip r:embed="rId41"/>
                 <a:stretch>
-                  <a:fillRect l="-824" t="-1445" r="-647" b="-1340"/>
+                  <a:fillRect l="-40" t="-132" r="40" b="161"/>
                 </a:stretch>
               </a:blipFill>
               <a:ln w="9525">
-                <a:solidFill>
-                  <a:schemeClr val="bg1"/>
-                </a:solidFill>
+                <a:noFill/>
                 <a:miter lim="800000"/>
               </a:ln>
               <a:extLst>
@@ -10174,7 +12429,11 @@
               <p:cNvSpPr txBox="1">
                 <a:spLocks noChangeArrowheads="1"/>
               </p:cNvSpPr>
-              <p:nvPr/>
+              <p:nvPr>
+                <p:custDataLst>
+                  <p:tags r:id="rId25"/>
+                </p:custDataLst>
+              </p:nvPr>
             </p:nvSpPr>
             <p:spPr bwMode="auto">
               <a:xfrm>
@@ -10186,9 +12445,7 @@
               </a:prstGeom>
               <a:noFill/>
               <a:ln w="9525">
-                <a:solidFill>
-                  <a:schemeClr val="bg1"/>
-                </a:solidFill>
+                <a:noFill/>
                 <a:miter lim="800000"/>
               </a:ln>
               <a:extLst>
@@ -10309,7 +12566,11 @@
               <p:cNvSpPr txBox="1">
                 <a:spLocks noRot="1" noChangeAspect="1" noMove="1" noResize="1" noEditPoints="1" noAdjustHandles="1" noChangeArrowheads="1" noChangeShapeType="1" noTextEdit="1"/>
               </p:cNvSpPr>
-              <p:nvPr/>
+              <p:nvPr>
+                <p:custDataLst>
+                  <p:tags r:id="rId44"/>
+                </p:custDataLst>
+              </p:nvPr>
             </p:nvSpPr>
             <p:spPr bwMode="auto">
               <a:xfrm>
@@ -10320,15 +12581,13 @@
                 <a:avLst/>
               </a:prstGeom>
               <a:blipFill rotWithShape="1">
-                <a:blip r:embed="rId3"/>
+                <a:blip r:embed="rId41"/>
                 <a:stretch>
-                  <a:fillRect l="-815" t="-1425" r="-656" b="-1359"/>
+                  <a:fillRect l="-30" t="-113" r="30" b="142"/>
                 </a:stretch>
               </a:blipFill>
               <a:ln w="9525">
-                <a:solidFill>
-                  <a:schemeClr val="bg1"/>
-                </a:solidFill>
+                <a:noFill/>
                 <a:miter lim="800000"/>
               </a:ln>
               <a:extLst>
@@ -10364,7 +12623,11 @@
               <p:cNvSpPr txBox="1">
                 <a:spLocks noChangeArrowheads="1"/>
               </p:cNvSpPr>
-              <p:nvPr/>
+              <p:nvPr>
+                <p:custDataLst>
+                  <p:tags r:id="rId26"/>
+                </p:custDataLst>
+              </p:nvPr>
             </p:nvSpPr>
             <p:spPr bwMode="auto">
               <a:xfrm>
@@ -10519,7 +12782,11 @@
               <p:cNvSpPr txBox="1">
                 <a:spLocks noRot="1" noChangeAspect="1" noMove="1" noResize="1" noEditPoints="1" noAdjustHandles="1" noChangeArrowheads="1" noChangeShapeType="1" noTextEdit="1"/>
               </p:cNvSpPr>
-              <p:nvPr/>
+              <p:nvPr>
+                <p:custDataLst>
+                  <p:tags r:id="rId45"/>
+                </p:custDataLst>
+              </p:nvPr>
             </p:nvSpPr>
             <p:spPr bwMode="auto">
               <a:xfrm>
@@ -10530,7 +12797,7 @@
                 <a:avLst/>
               </a:prstGeom>
               <a:blipFill rotWithShape="1">
-                <a:blip r:embed="rId2"/>
+                <a:blip r:embed="rId39"/>
                 <a:stretch>
                   <a:fillRect l="-526" t="-1509" r="-459" b="-1275"/>
                 </a:stretch>
@@ -10574,7 +12841,11 @@
               <p:cNvSpPr txBox="1">
                 <a:spLocks noChangeArrowheads="1"/>
               </p:cNvSpPr>
-              <p:nvPr/>
+              <p:nvPr>
+                <p:custDataLst>
+                  <p:tags r:id="rId27"/>
+                </p:custDataLst>
+              </p:nvPr>
             </p:nvSpPr>
             <p:spPr bwMode="auto">
               <a:xfrm>
@@ -10729,7 +13000,11 @@
               <p:cNvSpPr txBox="1">
                 <a:spLocks noRot="1" noChangeAspect="1" noMove="1" noResize="1" noEditPoints="1" noAdjustHandles="1" noChangeArrowheads="1" noChangeShapeType="1" noTextEdit="1"/>
               </p:cNvSpPr>
-              <p:nvPr/>
+              <p:nvPr>
+                <p:custDataLst>
+                  <p:tags r:id="rId46"/>
+                </p:custDataLst>
+              </p:nvPr>
             </p:nvSpPr>
             <p:spPr bwMode="auto">
               <a:xfrm>
@@ -10740,7 +13015,7 @@
                 <a:avLst/>
               </a:prstGeom>
               <a:blipFill rotWithShape="1">
-                <a:blip r:embed="rId2"/>
+                <a:blip r:embed="rId39"/>
                 <a:stretch>
                   <a:fillRect l="-554" t="-1415" r="-499" b="-1369"/>
                 </a:stretch>
@@ -10784,7 +13059,11 @@
               <p:cNvSpPr txBox="1">
                 <a:spLocks noChangeArrowheads="1"/>
               </p:cNvSpPr>
-              <p:nvPr/>
+              <p:nvPr>
+                <p:custDataLst>
+                  <p:tags r:id="rId28"/>
+                </p:custDataLst>
+              </p:nvPr>
             </p:nvSpPr>
             <p:spPr bwMode="auto">
               <a:xfrm>
@@ -10939,7 +13218,11 @@
               <p:cNvSpPr txBox="1">
                 <a:spLocks noRot="1" noChangeAspect="1" noMove="1" noResize="1" noEditPoints="1" noAdjustHandles="1" noChangeArrowheads="1" noChangeShapeType="1" noTextEdit="1"/>
               </p:cNvSpPr>
-              <p:nvPr/>
+              <p:nvPr>
+                <p:custDataLst>
+                  <p:tags r:id="rId47"/>
+                </p:custDataLst>
+              </p:nvPr>
             </p:nvSpPr>
             <p:spPr bwMode="auto">
               <a:xfrm>
@@ -10950,7 +13233,7 @@
                 <a:avLst/>
               </a:prstGeom>
               <a:blipFill rotWithShape="1">
-                <a:blip r:embed="rId2"/>
+                <a:blip r:embed="rId39"/>
                 <a:stretch>
                   <a:fillRect l="-504" t="-1456" r="-481" b="-1328"/>
                 </a:stretch>
@@ -18632,630 +20915,645 @@
           </a:p>
         </p:txBody>
       </p:sp>
-      <p:sp>
-        <p:nvSpPr>
-          <p:cNvPr id="4" name="圆柱形 3"/>
-          <p:cNvSpPr/>
-          <p:nvPr/>
-        </p:nvSpPr>
-        <p:spPr>
-          <a:xfrm rot="16200000">
-            <a:off x="5011237" y="4063227"/>
-            <a:ext cx="2520000" cy="360000"/>
-          </a:xfrm>
-          <a:prstGeom prst="can">
-            <a:avLst/>
-          </a:prstGeom>
-          <a:solidFill>
-            <a:schemeClr val="accent5">
-              <a:lumMod val="60000"/>
-              <a:lumOff val="40000"/>
-            </a:schemeClr>
-          </a:solidFill>
-          <a:ln>
-            <a:solidFill>
-              <a:schemeClr val="tx1"/>
-            </a:solidFill>
-          </a:ln>
-        </p:spPr>
-        <p:style>
-          <a:lnRef idx="2">
-            <a:schemeClr val="accent1">
-              <a:lumMod val="75000"/>
-            </a:schemeClr>
-          </a:lnRef>
-          <a:fillRef idx="1">
-            <a:schemeClr val="accent1"/>
-          </a:fillRef>
-          <a:effectRef idx="0">
-            <a:srgbClr val="FFFFFF"/>
-          </a:effectRef>
-          <a:fontRef idx="minor">
-            <a:schemeClr val="lt1"/>
-          </a:fontRef>
-        </p:style>
-        <p:txBody>
-          <a:bodyPr rtlCol="0" anchor="ctr"/>
-          <a:lstStyle/>
-          <a:p>
-            <a:pPr algn="ctr"/>
-            <a:endParaRPr lang="zh-CN" altLang="en-US"/>
-          </a:p>
-        </p:txBody>
-      </p:sp>
-      <p:sp>
-        <p:nvSpPr>
-          <p:cNvPr id="15" name="圆柱形 14"/>
-          <p:cNvSpPr/>
-          <p:nvPr/>
-        </p:nvSpPr>
-        <p:spPr>
-          <a:xfrm rot="16200000">
-            <a:off x="5457963" y="4063227"/>
-            <a:ext cx="2519680" cy="360000"/>
-          </a:xfrm>
-          <a:prstGeom prst="can">
-            <a:avLst/>
-          </a:prstGeom>
-          <a:solidFill>
-            <a:schemeClr val="accent5">
-              <a:lumMod val="75000"/>
-            </a:schemeClr>
-          </a:solidFill>
-          <a:ln>
-            <a:solidFill>
-              <a:schemeClr val="tx1"/>
-            </a:solidFill>
-          </a:ln>
-        </p:spPr>
-        <p:style>
-          <a:lnRef idx="2">
-            <a:schemeClr val="accent1">
-              <a:lumMod val="75000"/>
-            </a:schemeClr>
-          </a:lnRef>
-          <a:fillRef idx="1">
-            <a:schemeClr val="accent1"/>
-          </a:fillRef>
-          <a:effectRef idx="0">
-            <a:srgbClr val="FFFFFF"/>
-          </a:effectRef>
-          <a:fontRef idx="minor">
-            <a:schemeClr val="lt1"/>
-          </a:fontRef>
-        </p:style>
-        <p:txBody>
-          <a:bodyPr vertOverflow="overflow" horzOverflow="overflow" vert="horz" wrap="square" numCol="1" spcCol="0" rtlCol="0" fromWordArt="0" anchor="ctr" anchorCtr="0" forceAA="0" compatLnSpc="1">
-            <a:noAutofit/>
-          </a:bodyPr>
-          <a:lstStyle/>
-          <a:p>
-            <a:pPr lvl="0" algn="ctr">
-              <a:buClrTx/>
-              <a:buSzTx/>
-              <a:buFontTx/>
-            </a:pPr>
-            <a:endParaRPr lang="zh-CN" altLang="en-US">
-              <a:sym typeface="+mn-ea"/>
-            </a:endParaRPr>
-          </a:p>
-        </p:txBody>
-      </p:sp>
-      <p:sp>
-        <p:nvSpPr>
-          <p:cNvPr id="16" name="圆柱形 15"/>
-          <p:cNvSpPr/>
-          <p:nvPr/>
-        </p:nvSpPr>
-        <p:spPr>
-          <a:xfrm rot="16200000">
-            <a:off x="1886088" y="4063227"/>
-            <a:ext cx="2519680" cy="360000"/>
-          </a:xfrm>
-          <a:prstGeom prst="can">
-            <a:avLst/>
-          </a:prstGeom>
-          <a:solidFill>
-            <a:schemeClr val="accent5">
-              <a:lumMod val="75000"/>
-            </a:schemeClr>
-          </a:solidFill>
-          <a:ln>
-            <a:solidFill>
-              <a:schemeClr val="tx1"/>
-            </a:solidFill>
-          </a:ln>
-        </p:spPr>
-        <p:style>
-          <a:lnRef idx="2">
-            <a:schemeClr val="accent1">
-              <a:lumMod val="75000"/>
-            </a:schemeClr>
-          </a:lnRef>
-          <a:fillRef idx="1">
-            <a:schemeClr val="accent1"/>
-          </a:fillRef>
-          <a:effectRef idx="0">
-            <a:srgbClr val="FFFFFF"/>
-          </a:effectRef>
-          <a:fontRef idx="minor">
-            <a:schemeClr val="lt1"/>
-          </a:fontRef>
-        </p:style>
-        <p:txBody>
-          <a:bodyPr vertOverflow="overflow" horzOverflow="overflow" vert="horz" wrap="square" numCol="1" spcCol="0" rtlCol="0" fromWordArt="0" anchor="ctr" anchorCtr="0" forceAA="0" compatLnSpc="1">
-            <a:noAutofit/>
-          </a:bodyPr>
-          <a:lstStyle/>
-          <a:p>
-            <a:pPr lvl="0" algn="ctr">
-              <a:buClrTx/>
-              <a:buSzTx/>
-              <a:buFontTx/>
-            </a:pPr>
-            <a:endParaRPr lang="zh-CN" altLang="en-US">
-              <a:sym typeface="+mn-ea"/>
-            </a:endParaRPr>
-          </a:p>
-        </p:txBody>
-      </p:sp>
-      <p:sp>
-        <p:nvSpPr>
-          <p:cNvPr id="17" name="圆柱形 16"/>
-          <p:cNvSpPr/>
-          <p:nvPr/>
-        </p:nvSpPr>
-        <p:spPr>
-          <a:xfrm rot="16200000">
-            <a:off x="2332493" y="4063227"/>
-            <a:ext cx="2519680" cy="360000"/>
-          </a:xfrm>
-          <a:prstGeom prst="can">
-            <a:avLst/>
-          </a:prstGeom>
-          <a:solidFill>
-            <a:schemeClr val="accent5">
-              <a:lumMod val="60000"/>
-              <a:lumOff val="40000"/>
-            </a:schemeClr>
-          </a:solidFill>
-          <a:ln>
-            <a:solidFill>
-              <a:schemeClr val="tx1"/>
-            </a:solidFill>
-          </a:ln>
-        </p:spPr>
-        <p:style>
-          <a:lnRef idx="2">
-            <a:schemeClr val="accent1">
-              <a:lumMod val="75000"/>
-            </a:schemeClr>
-          </a:lnRef>
-          <a:fillRef idx="1">
-            <a:schemeClr val="accent1"/>
-          </a:fillRef>
-          <a:effectRef idx="0">
-            <a:srgbClr val="FFFFFF"/>
-          </a:effectRef>
-          <a:fontRef idx="minor">
-            <a:schemeClr val="lt1"/>
-          </a:fontRef>
-        </p:style>
-        <p:txBody>
-          <a:bodyPr vertOverflow="overflow" horzOverflow="overflow" vert="horz" wrap="square" numCol="1" spcCol="0" rtlCol="0" fromWordArt="0" anchor="ctr" anchorCtr="0" forceAA="0" compatLnSpc="1">
-            <a:noAutofit/>
-          </a:bodyPr>
-          <a:lstStyle/>
-          <a:p>
-            <a:pPr lvl="0" algn="ctr">
-              <a:buClrTx/>
-              <a:buSzTx/>
-              <a:buFontTx/>
-            </a:pPr>
-            <a:endParaRPr lang="zh-CN" altLang="en-US">
-              <a:sym typeface="+mn-ea"/>
-            </a:endParaRPr>
-          </a:p>
-        </p:txBody>
-      </p:sp>
-      <p:sp>
-        <p:nvSpPr>
-          <p:cNvPr id="18" name="圆柱形 17"/>
-          <p:cNvSpPr/>
-          <p:nvPr/>
-        </p:nvSpPr>
-        <p:spPr>
-          <a:xfrm rot="16200000">
-            <a:off x="2778898" y="4063227"/>
-            <a:ext cx="2519680" cy="360000"/>
-          </a:xfrm>
-          <a:prstGeom prst="can">
-            <a:avLst/>
-          </a:prstGeom>
-          <a:solidFill>
-            <a:schemeClr val="accent5">
-              <a:lumMod val="20000"/>
-              <a:lumOff val="80000"/>
-            </a:schemeClr>
-          </a:solidFill>
-          <a:ln>
-            <a:solidFill>
-              <a:schemeClr val="tx1"/>
-            </a:solidFill>
-          </a:ln>
-        </p:spPr>
-        <p:style>
-          <a:lnRef idx="2">
-            <a:schemeClr val="accent1">
-              <a:lumMod val="75000"/>
-            </a:schemeClr>
-          </a:lnRef>
-          <a:fillRef idx="1">
-            <a:schemeClr val="accent1"/>
-          </a:fillRef>
-          <a:effectRef idx="0">
-            <a:srgbClr val="FFFFFF"/>
-          </a:effectRef>
-          <a:fontRef idx="minor">
-            <a:schemeClr val="lt1"/>
-          </a:fontRef>
-        </p:style>
-        <p:txBody>
-          <a:bodyPr vertOverflow="overflow" horzOverflow="overflow" vert="horz" wrap="square" numCol="1" spcCol="0" rtlCol="0" fromWordArt="0" anchor="ctr" anchorCtr="0" forceAA="0" compatLnSpc="1">
-            <a:noAutofit/>
-          </a:bodyPr>
-          <a:lstStyle/>
-          <a:p>
-            <a:pPr lvl="0" algn="ctr">
-              <a:buClrTx/>
-              <a:buSzTx/>
-              <a:buFontTx/>
-            </a:pPr>
-            <a:endParaRPr lang="zh-CN" altLang="en-US">
-              <a:sym typeface="+mn-ea"/>
-            </a:endParaRPr>
-          </a:p>
-        </p:txBody>
-      </p:sp>
-      <p:sp>
-        <p:nvSpPr>
-          <p:cNvPr id="19" name="圆柱形 18"/>
-          <p:cNvSpPr/>
-          <p:nvPr/>
-        </p:nvSpPr>
-        <p:spPr>
-          <a:xfrm rot="16200000">
-            <a:off x="3225303" y="4063227"/>
-            <a:ext cx="2519680" cy="360000"/>
-          </a:xfrm>
-          <a:prstGeom prst="can">
-            <a:avLst/>
-          </a:prstGeom>
-          <a:solidFill>
-            <a:schemeClr val="accent5">
-              <a:lumMod val="60000"/>
-              <a:lumOff val="40000"/>
-            </a:schemeClr>
-          </a:solidFill>
-          <a:ln>
-            <a:solidFill>
-              <a:schemeClr val="tx1"/>
-            </a:solidFill>
-          </a:ln>
-        </p:spPr>
-        <p:style>
-          <a:lnRef idx="2">
-            <a:schemeClr val="accent1">
-              <a:lumMod val="75000"/>
-            </a:schemeClr>
-          </a:lnRef>
-          <a:fillRef idx="1">
-            <a:schemeClr val="accent1"/>
-          </a:fillRef>
-          <a:effectRef idx="0">
-            <a:srgbClr val="FFFFFF"/>
-          </a:effectRef>
-          <a:fontRef idx="minor">
-            <a:schemeClr val="lt1"/>
-          </a:fontRef>
-        </p:style>
-        <p:txBody>
-          <a:bodyPr vertOverflow="overflow" horzOverflow="overflow" vert="horz" wrap="square" numCol="1" spcCol="0" rtlCol="0" fromWordArt="0" anchor="ctr" anchorCtr="0" forceAA="0" compatLnSpc="1">
-            <a:noAutofit/>
-          </a:bodyPr>
-          <a:lstStyle/>
-          <a:p>
-            <a:pPr lvl="0" algn="ctr">
-              <a:buClrTx/>
-              <a:buSzTx/>
-              <a:buFontTx/>
-            </a:pPr>
-            <a:endParaRPr lang="zh-CN" altLang="en-US">
-              <a:sym typeface="+mn-ea"/>
-            </a:endParaRPr>
-          </a:p>
-        </p:txBody>
-      </p:sp>
-      <p:sp>
-        <p:nvSpPr>
-          <p:cNvPr id="20" name="圆柱形 19"/>
-          <p:cNvSpPr/>
-          <p:nvPr/>
-        </p:nvSpPr>
-        <p:spPr>
-          <a:xfrm rot="16200000">
-            <a:off x="3671708" y="4063227"/>
-            <a:ext cx="2519680" cy="360000"/>
-          </a:xfrm>
-          <a:prstGeom prst="can">
-            <a:avLst/>
-          </a:prstGeom>
-          <a:solidFill>
-            <a:schemeClr val="accent5">
-              <a:lumMod val="75000"/>
-            </a:schemeClr>
-          </a:solidFill>
-          <a:ln>
-            <a:solidFill>
-              <a:schemeClr val="tx1"/>
-            </a:solidFill>
-          </a:ln>
-        </p:spPr>
-        <p:style>
-          <a:lnRef idx="2">
-            <a:schemeClr val="accent1">
-              <a:lumMod val="75000"/>
-            </a:schemeClr>
-          </a:lnRef>
-          <a:fillRef idx="1">
-            <a:schemeClr val="accent1"/>
-          </a:fillRef>
-          <a:effectRef idx="0">
-            <a:srgbClr val="FFFFFF"/>
-          </a:effectRef>
-          <a:fontRef idx="minor">
-            <a:schemeClr val="lt1"/>
-          </a:fontRef>
-        </p:style>
-        <p:txBody>
-          <a:bodyPr vertOverflow="overflow" horzOverflow="overflow" vert="horz" wrap="square" numCol="1" spcCol="0" rtlCol="0" fromWordArt="0" anchor="ctr" anchorCtr="0" forceAA="0" compatLnSpc="1">
-            <a:noAutofit/>
-          </a:bodyPr>
-          <a:lstStyle/>
-          <a:p>
-            <a:pPr lvl="0" algn="ctr">
-              <a:buClrTx/>
-              <a:buSzTx/>
-              <a:buFontTx/>
-            </a:pPr>
-            <a:endParaRPr lang="zh-CN" altLang="en-US">
-              <a:sym typeface="+mn-ea"/>
-            </a:endParaRPr>
-          </a:p>
-        </p:txBody>
-      </p:sp>
-      <p:sp>
-        <p:nvSpPr>
-          <p:cNvPr id="21" name="圆柱形 20"/>
-          <p:cNvSpPr/>
-          <p:nvPr/>
-        </p:nvSpPr>
-        <p:spPr>
-          <a:xfrm rot="16200000">
-            <a:off x="4118113" y="4063227"/>
-            <a:ext cx="2519680" cy="360000"/>
-          </a:xfrm>
-          <a:prstGeom prst="can">
-            <a:avLst/>
-          </a:prstGeom>
-          <a:solidFill>
-            <a:schemeClr val="accent5">
-              <a:lumMod val="60000"/>
-              <a:lumOff val="40000"/>
-            </a:schemeClr>
-          </a:solidFill>
-          <a:ln>
-            <a:solidFill>
-              <a:schemeClr val="tx1"/>
-            </a:solidFill>
-          </a:ln>
-        </p:spPr>
-        <p:style>
-          <a:lnRef idx="2">
-            <a:schemeClr val="accent1">
-              <a:lumMod val="75000"/>
-            </a:schemeClr>
-          </a:lnRef>
-          <a:fillRef idx="1">
-            <a:schemeClr val="accent1"/>
-          </a:fillRef>
-          <a:effectRef idx="0">
-            <a:srgbClr val="FFFFFF"/>
-          </a:effectRef>
-          <a:fontRef idx="minor">
-            <a:schemeClr val="lt1"/>
-          </a:fontRef>
-        </p:style>
-        <p:txBody>
-          <a:bodyPr vertOverflow="overflow" horzOverflow="overflow" vert="horz" wrap="square" numCol="1" spcCol="0" rtlCol="0" fromWordArt="0" anchor="ctr" anchorCtr="0" forceAA="0" compatLnSpc="1">
-            <a:noAutofit/>
-          </a:bodyPr>
-          <a:lstStyle/>
-          <a:p>
-            <a:pPr lvl="0" algn="ctr">
-              <a:buClrTx/>
-              <a:buSzTx/>
-              <a:buFontTx/>
-            </a:pPr>
-            <a:endParaRPr lang="zh-CN" altLang="en-US">
-              <a:sym typeface="+mn-ea"/>
-            </a:endParaRPr>
-          </a:p>
-        </p:txBody>
-      </p:sp>
-      <p:sp>
-        <p:nvSpPr>
-          <p:cNvPr id="22" name="圆柱形 21"/>
-          <p:cNvSpPr/>
-          <p:nvPr/>
-        </p:nvSpPr>
-        <p:spPr>
-          <a:xfrm rot="16200000">
-            <a:off x="4564518" y="4063227"/>
-            <a:ext cx="2519680" cy="360000"/>
-          </a:xfrm>
-          <a:prstGeom prst="can">
-            <a:avLst/>
-          </a:prstGeom>
-          <a:solidFill>
-            <a:schemeClr val="accent5">
-              <a:lumMod val="20000"/>
-              <a:lumOff val="80000"/>
-            </a:schemeClr>
-          </a:solidFill>
-          <a:ln>
-            <a:solidFill>
-              <a:schemeClr val="tx1"/>
-            </a:solidFill>
-          </a:ln>
-        </p:spPr>
-        <p:style>
-          <a:lnRef idx="2">
-            <a:schemeClr val="accent1">
-              <a:lumMod val="75000"/>
-            </a:schemeClr>
-          </a:lnRef>
-          <a:fillRef idx="1">
-            <a:schemeClr val="accent1"/>
-          </a:fillRef>
-          <a:effectRef idx="0">
-            <a:srgbClr val="FFFFFF"/>
-          </a:effectRef>
-          <a:fontRef idx="minor">
-            <a:schemeClr val="lt1"/>
-          </a:fontRef>
-        </p:style>
-        <p:txBody>
-          <a:bodyPr vertOverflow="overflow" horzOverflow="overflow" vert="horz" wrap="square" numCol="1" spcCol="0" rtlCol="0" fromWordArt="0" anchor="ctr" anchorCtr="0" forceAA="0" compatLnSpc="1">
-            <a:noAutofit/>
-          </a:bodyPr>
-          <a:lstStyle/>
-          <a:p>
-            <a:pPr lvl="0" algn="ctr">
-              <a:buClrTx/>
-              <a:buSzTx/>
-              <a:buFontTx/>
-            </a:pPr>
-            <a:endParaRPr lang="zh-CN" altLang="en-US">
-              <a:sym typeface="+mn-ea"/>
-            </a:endParaRPr>
-          </a:p>
-        </p:txBody>
-      </p:sp>
       <p:grpSp>
         <p:nvGrpSpPr>
-          <p:cNvPr id="26" name="组合 25"/>
+          <p:cNvPr id="3" name="组合 2"/>
           <p:cNvGrpSpPr/>
           <p:nvPr/>
         </p:nvGrpSpPr>
         <p:grpSpPr>
           <a:xfrm>
-            <a:off x="3188335" y="3059430"/>
-            <a:ext cx="3569335" cy="2424430"/>
-            <a:chOff x="4685" y="4818"/>
-            <a:chExt cx="5621" cy="3818"/>
+            <a:off x="636905" y="1880235"/>
+            <a:ext cx="3931285" cy="2519680"/>
+            <a:chOff x="4671" y="4698"/>
+            <a:chExt cx="6191" cy="3968"/>
           </a:xfrm>
         </p:grpSpPr>
         <p:sp>
           <p:nvSpPr>
-            <p:cNvPr id="24" name="弧形 23"/>
+            <p:cNvPr id="4" name="圆柱形 3"/>
             <p:cNvSpPr/>
             <p:nvPr/>
           </p:nvSpPr>
           <p:spPr>
-            <a:xfrm>
-              <a:off x="4685" y="5028"/>
-              <a:ext cx="2811" cy="3608"/>
+            <a:xfrm rot="16200000">
+              <a:off x="7892" y="6399"/>
+              <a:ext cx="3969" cy="567"/>
             </a:xfrm>
-            <a:prstGeom prst="arc">
-              <a:avLst>
-                <a:gd name="adj1" fmla="val 10727950"/>
-                <a:gd name="adj2" fmla="val 14045"/>
-              </a:avLst>
+            <a:prstGeom prst="can">
+              <a:avLst/>
             </a:prstGeom>
-            <a:ln w="50800">
+            <a:solidFill>
+              <a:schemeClr val="accent5">
+                <a:lumMod val="60000"/>
+                <a:lumOff val="40000"/>
+              </a:schemeClr>
+            </a:solidFill>
+            <a:ln>
               <a:solidFill>
-                <a:schemeClr val="accent6"/>
+                <a:schemeClr val="tx1"/>
               </a:solidFill>
             </a:ln>
           </p:spPr>
           <p:style>
-            <a:lnRef idx="1">
-              <a:schemeClr val="accent1"/>
+            <a:lnRef idx="2">
+              <a:schemeClr val="accent1">
+                <a:lumMod val="75000"/>
+              </a:schemeClr>
             </a:lnRef>
-            <a:fillRef idx="0">
+            <a:fillRef idx="1">
               <a:schemeClr val="accent1"/>
             </a:fillRef>
             <a:effectRef idx="0">
-              <a:schemeClr val="accent1"/>
+              <a:srgbClr val="FFFFFF"/>
             </a:effectRef>
             <a:fontRef idx="minor">
-              <a:schemeClr val="tx1"/>
+              <a:schemeClr val="lt1"/>
             </a:fontRef>
           </p:style>
           <p:txBody>
-            <a:bodyPr/>
+            <a:bodyPr rtlCol="0" anchor="ctr"/>
             <a:lstStyle/>
             <a:p>
+              <a:pPr algn="ctr"/>
               <a:endParaRPr lang="zh-CN" altLang="en-US"/>
             </a:p>
           </p:txBody>
         </p:sp>
         <p:sp>
           <p:nvSpPr>
-            <p:cNvPr id="25" name="弧形 24"/>
+            <p:cNvPr id="15" name="圆柱形 14"/>
             <p:cNvSpPr/>
             <p:nvPr/>
           </p:nvSpPr>
           <p:spPr>
-            <a:xfrm rot="10800000">
-              <a:off x="7496" y="4818"/>
-              <a:ext cx="2811" cy="3608"/>
+            <a:xfrm rot="16200000">
+              <a:off x="8595" y="6399"/>
+              <a:ext cx="3968" cy="567"/>
             </a:xfrm>
-            <a:prstGeom prst="arc">
-              <a:avLst>
-                <a:gd name="adj1" fmla="val 10707781"/>
-                <a:gd name="adj2" fmla="val 14045"/>
-              </a:avLst>
+            <a:prstGeom prst="can">
+              <a:avLst/>
             </a:prstGeom>
-            <a:ln w="50800">
+            <a:solidFill>
+              <a:schemeClr val="accent5">
+                <a:lumMod val="75000"/>
+              </a:schemeClr>
+            </a:solidFill>
+            <a:ln>
               <a:solidFill>
-                <a:schemeClr val="accent6"/>
+                <a:schemeClr val="tx1"/>
               </a:solidFill>
             </a:ln>
           </p:spPr>
           <p:style>
-            <a:lnRef idx="1">
-              <a:schemeClr val="accent1"/>
+            <a:lnRef idx="2">
+              <a:schemeClr val="accent1">
+                <a:lumMod val="75000"/>
+              </a:schemeClr>
             </a:lnRef>
-            <a:fillRef idx="0">
+            <a:fillRef idx="1">
               <a:schemeClr val="accent1"/>
             </a:fillRef>
             <a:effectRef idx="0">
-              <a:schemeClr val="accent1"/>
+              <a:srgbClr val="FFFFFF"/>
             </a:effectRef>
             <a:fontRef idx="minor">
-              <a:schemeClr val="tx1"/>
+              <a:schemeClr val="lt1"/>
             </a:fontRef>
           </p:style>
           <p:txBody>
-            <a:bodyPr/>
+            <a:bodyPr vertOverflow="overflow" horzOverflow="overflow" vert="horz" wrap="square" numCol="1" spcCol="0" rtlCol="0" fromWordArt="0" anchor="ctr" anchorCtr="0" forceAA="0" compatLnSpc="1">
+              <a:noAutofit/>
+            </a:bodyPr>
             <a:lstStyle/>
             <a:p>
-              <a:endParaRPr lang="zh-CN" altLang="en-US"/>
+              <a:pPr lvl="0" algn="ctr">
+                <a:buClrTx/>
+                <a:buSzTx/>
+                <a:buFontTx/>
+              </a:pPr>
+              <a:endParaRPr lang="zh-CN" altLang="en-US">
+                <a:sym typeface="+mn-ea"/>
+              </a:endParaRPr>
             </a:p>
           </p:txBody>
         </p:sp>
+        <p:sp>
+          <p:nvSpPr>
+            <p:cNvPr id="16" name="圆柱形 15"/>
+            <p:cNvSpPr/>
+            <p:nvPr/>
+          </p:nvSpPr>
+          <p:spPr>
+            <a:xfrm rot="16200000">
+              <a:off x="2970" y="6399"/>
+              <a:ext cx="3968" cy="567"/>
+            </a:xfrm>
+            <a:prstGeom prst="can">
+              <a:avLst/>
+            </a:prstGeom>
+            <a:solidFill>
+              <a:schemeClr val="accent5">
+                <a:lumMod val="75000"/>
+              </a:schemeClr>
+            </a:solidFill>
+            <a:ln>
+              <a:solidFill>
+                <a:schemeClr val="tx1"/>
+              </a:solidFill>
+            </a:ln>
+          </p:spPr>
+          <p:style>
+            <a:lnRef idx="2">
+              <a:schemeClr val="accent1">
+                <a:lumMod val="75000"/>
+              </a:schemeClr>
+            </a:lnRef>
+            <a:fillRef idx="1">
+              <a:schemeClr val="accent1"/>
+            </a:fillRef>
+            <a:effectRef idx="0">
+              <a:srgbClr val="FFFFFF"/>
+            </a:effectRef>
+            <a:fontRef idx="minor">
+              <a:schemeClr val="lt1"/>
+            </a:fontRef>
+          </p:style>
+          <p:txBody>
+            <a:bodyPr vertOverflow="overflow" horzOverflow="overflow" vert="horz" wrap="square" numCol="1" spcCol="0" rtlCol="0" fromWordArt="0" anchor="ctr" anchorCtr="0" forceAA="0" compatLnSpc="1">
+              <a:noAutofit/>
+            </a:bodyPr>
+            <a:lstStyle/>
+            <a:p>
+              <a:pPr lvl="0" algn="ctr">
+                <a:buClrTx/>
+                <a:buSzTx/>
+                <a:buFontTx/>
+              </a:pPr>
+              <a:endParaRPr lang="zh-CN" altLang="en-US">
+                <a:sym typeface="+mn-ea"/>
+              </a:endParaRPr>
+            </a:p>
+          </p:txBody>
+        </p:sp>
+        <p:sp>
+          <p:nvSpPr>
+            <p:cNvPr id="17" name="圆柱形 16"/>
+            <p:cNvSpPr/>
+            <p:nvPr/>
+          </p:nvSpPr>
+          <p:spPr>
+            <a:xfrm rot="16200000">
+              <a:off x="3673" y="6399"/>
+              <a:ext cx="3968" cy="567"/>
+            </a:xfrm>
+            <a:prstGeom prst="can">
+              <a:avLst/>
+            </a:prstGeom>
+            <a:solidFill>
+              <a:schemeClr val="accent5">
+                <a:lumMod val="60000"/>
+                <a:lumOff val="40000"/>
+              </a:schemeClr>
+            </a:solidFill>
+            <a:ln>
+              <a:solidFill>
+                <a:schemeClr val="tx1"/>
+              </a:solidFill>
+            </a:ln>
+          </p:spPr>
+          <p:style>
+            <a:lnRef idx="2">
+              <a:schemeClr val="accent1">
+                <a:lumMod val="75000"/>
+              </a:schemeClr>
+            </a:lnRef>
+            <a:fillRef idx="1">
+              <a:schemeClr val="accent1"/>
+            </a:fillRef>
+            <a:effectRef idx="0">
+              <a:srgbClr val="FFFFFF"/>
+            </a:effectRef>
+            <a:fontRef idx="minor">
+              <a:schemeClr val="lt1"/>
+            </a:fontRef>
+          </p:style>
+          <p:txBody>
+            <a:bodyPr vertOverflow="overflow" horzOverflow="overflow" vert="horz" wrap="square" numCol="1" spcCol="0" rtlCol="0" fromWordArt="0" anchor="ctr" anchorCtr="0" forceAA="0" compatLnSpc="1">
+              <a:noAutofit/>
+            </a:bodyPr>
+            <a:lstStyle/>
+            <a:p>
+              <a:pPr lvl="0" algn="ctr">
+                <a:buClrTx/>
+                <a:buSzTx/>
+                <a:buFontTx/>
+              </a:pPr>
+              <a:endParaRPr lang="zh-CN" altLang="en-US">
+                <a:sym typeface="+mn-ea"/>
+              </a:endParaRPr>
+            </a:p>
+          </p:txBody>
+        </p:sp>
+        <p:sp>
+          <p:nvSpPr>
+            <p:cNvPr id="18" name="圆柱形 17"/>
+            <p:cNvSpPr/>
+            <p:nvPr/>
+          </p:nvSpPr>
+          <p:spPr>
+            <a:xfrm rot="16200000">
+              <a:off x="4376" y="6399"/>
+              <a:ext cx="3968" cy="567"/>
+            </a:xfrm>
+            <a:prstGeom prst="can">
+              <a:avLst/>
+            </a:prstGeom>
+            <a:solidFill>
+              <a:schemeClr val="accent5">
+                <a:lumMod val="20000"/>
+                <a:lumOff val="80000"/>
+              </a:schemeClr>
+            </a:solidFill>
+            <a:ln>
+              <a:solidFill>
+                <a:schemeClr val="tx1"/>
+              </a:solidFill>
+            </a:ln>
+          </p:spPr>
+          <p:style>
+            <a:lnRef idx="2">
+              <a:schemeClr val="accent1">
+                <a:lumMod val="75000"/>
+              </a:schemeClr>
+            </a:lnRef>
+            <a:fillRef idx="1">
+              <a:schemeClr val="accent1"/>
+            </a:fillRef>
+            <a:effectRef idx="0">
+              <a:srgbClr val="FFFFFF"/>
+            </a:effectRef>
+            <a:fontRef idx="minor">
+              <a:schemeClr val="lt1"/>
+            </a:fontRef>
+          </p:style>
+          <p:txBody>
+            <a:bodyPr vertOverflow="overflow" horzOverflow="overflow" vert="horz" wrap="square" numCol="1" spcCol="0" rtlCol="0" fromWordArt="0" anchor="ctr" anchorCtr="0" forceAA="0" compatLnSpc="1">
+              <a:noAutofit/>
+            </a:bodyPr>
+            <a:lstStyle/>
+            <a:p>
+              <a:pPr lvl="0" algn="ctr">
+                <a:buClrTx/>
+                <a:buSzTx/>
+                <a:buFontTx/>
+              </a:pPr>
+              <a:endParaRPr lang="zh-CN" altLang="en-US">
+                <a:sym typeface="+mn-ea"/>
+              </a:endParaRPr>
+            </a:p>
+          </p:txBody>
+        </p:sp>
+        <p:sp>
+          <p:nvSpPr>
+            <p:cNvPr id="19" name="圆柱形 18"/>
+            <p:cNvSpPr/>
+            <p:nvPr/>
+          </p:nvSpPr>
+          <p:spPr>
+            <a:xfrm rot="16200000">
+              <a:off x="5079" y="6399"/>
+              <a:ext cx="3968" cy="567"/>
+            </a:xfrm>
+            <a:prstGeom prst="can">
+              <a:avLst/>
+            </a:prstGeom>
+            <a:solidFill>
+              <a:schemeClr val="accent5">
+                <a:lumMod val="60000"/>
+                <a:lumOff val="40000"/>
+              </a:schemeClr>
+            </a:solidFill>
+            <a:ln>
+              <a:solidFill>
+                <a:schemeClr val="tx1"/>
+              </a:solidFill>
+            </a:ln>
+          </p:spPr>
+          <p:style>
+            <a:lnRef idx="2">
+              <a:schemeClr val="accent1">
+                <a:lumMod val="75000"/>
+              </a:schemeClr>
+            </a:lnRef>
+            <a:fillRef idx="1">
+              <a:schemeClr val="accent1"/>
+            </a:fillRef>
+            <a:effectRef idx="0">
+              <a:srgbClr val="FFFFFF"/>
+            </a:effectRef>
+            <a:fontRef idx="minor">
+              <a:schemeClr val="lt1"/>
+            </a:fontRef>
+          </p:style>
+          <p:txBody>
+            <a:bodyPr vertOverflow="overflow" horzOverflow="overflow" vert="horz" wrap="square" numCol="1" spcCol="0" rtlCol="0" fromWordArt="0" anchor="ctr" anchorCtr="0" forceAA="0" compatLnSpc="1">
+              <a:noAutofit/>
+            </a:bodyPr>
+            <a:lstStyle/>
+            <a:p>
+              <a:pPr lvl="0" algn="ctr">
+                <a:buClrTx/>
+                <a:buSzTx/>
+                <a:buFontTx/>
+              </a:pPr>
+              <a:endParaRPr lang="zh-CN" altLang="en-US">
+                <a:sym typeface="+mn-ea"/>
+              </a:endParaRPr>
+            </a:p>
+          </p:txBody>
+        </p:sp>
+        <p:sp>
+          <p:nvSpPr>
+            <p:cNvPr id="20" name="圆柱形 19"/>
+            <p:cNvSpPr/>
+            <p:nvPr/>
+          </p:nvSpPr>
+          <p:spPr>
+            <a:xfrm rot="16200000">
+              <a:off x="5782" y="6399"/>
+              <a:ext cx="3968" cy="567"/>
+            </a:xfrm>
+            <a:prstGeom prst="can">
+              <a:avLst/>
+            </a:prstGeom>
+            <a:solidFill>
+              <a:schemeClr val="accent5">
+                <a:lumMod val="75000"/>
+              </a:schemeClr>
+            </a:solidFill>
+            <a:ln>
+              <a:solidFill>
+                <a:schemeClr val="tx1"/>
+              </a:solidFill>
+            </a:ln>
+          </p:spPr>
+          <p:style>
+            <a:lnRef idx="2">
+              <a:schemeClr val="accent1">
+                <a:lumMod val="75000"/>
+              </a:schemeClr>
+            </a:lnRef>
+            <a:fillRef idx="1">
+              <a:schemeClr val="accent1"/>
+            </a:fillRef>
+            <a:effectRef idx="0">
+              <a:srgbClr val="FFFFFF"/>
+            </a:effectRef>
+            <a:fontRef idx="minor">
+              <a:schemeClr val="lt1"/>
+            </a:fontRef>
+          </p:style>
+          <p:txBody>
+            <a:bodyPr vertOverflow="overflow" horzOverflow="overflow" vert="horz" wrap="square" numCol="1" spcCol="0" rtlCol="0" fromWordArt="0" anchor="ctr" anchorCtr="0" forceAA="0" compatLnSpc="1">
+              <a:noAutofit/>
+            </a:bodyPr>
+            <a:lstStyle/>
+            <a:p>
+              <a:pPr lvl="0" algn="ctr">
+                <a:buClrTx/>
+                <a:buSzTx/>
+                <a:buFontTx/>
+              </a:pPr>
+              <a:endParaRPr lang="zh-CN" altLang="en-US">
+                <a:sym typeface="+mn-ea"/>
+              </a:endParaRPr>
+            </a:p>
+          </p:txBody>
+        </p:sp>
+        <p:sp>
+          <p:nvSpPr>
+            <p:cNvPr id="21" name="圆柱形 20"/>
+            <p:cNvSpPr/>
+            <p:nvPr/>
+          </p:nvSpPr>
+          <p:spPr>
+            <a:xfrm rot="16200000">
+              <a:off x="6485" y="6399"/>
+              <a:ext cx="3968" cy="567"/>
+            </a:xfrm>
+            <a:prstGeom prst="can">
+              <a:avLst/>
+            </a:prstGeom>
+            <a:solidFill>
+              <a:schemeClr val="accent5">
+                <a:lumMod val="60000"/>
+                <a:lumOff val="40000"/>
+              </a:schemeClr>
+            </a:solidFill>
+            <a:ln>
+              <a:solidFill>
+                <a:schemeClr val="tx1"/>
+              </a:solidFill>
+            </a:ln>
+          </p:spPr>
+          <p:style>
+            <a:lnRef idx="2">
+              <a:schemeClr val="accent1">
+                <a:lumMod val="75000"/>
+              </a:schemeClr>
+            </a:lnRef>
+            <a:fillRef idx="1">
+              <a:schemeClr val="accent1"/>
+            </a:fillRef>
+            <a:effectRef idx="0">
+              <a:srgbClr val="FFFFFF"/>
+            </a:effectRef>
+            <a:fontRef idx="minor">
+              <a:schemeClr val="lt1"/>
+            </a:fontRef>
+          </p:style>
+          <p:txBody>
+            <a:bodyPr vertOverflow="overflow" horzOverflow="overflow" vert="horz" wrap="square" numCol="1" spcCol="0" rtlCol="0" fromWordArt="0" anchor="ctr" anchorCtr="0" forceAA="0" compatLnSpc="1">
+              <a:noAutofit/>
+            </a:bodyPr>
+            <a:lstStyle/>
+            <a:p>
+              <a:pPr lvl="0" algn="ctr">
+                <a:buClrTx/>
+                <a:buSzTx/>
+                <a:buFontTx/>
+              </a:pPr>
+              <a:endParaRPr lang="zh-CN" altLang="en-US">
+                <a:sym typeface="+mn-ea"/>
+              </a:endParaRPr>
+            </a:p>
+          </p:txBody>
+        </p:sp>
+        <p:sp>
+          <p:nvSpPr>
+            <p:cNvPr id="22" name="圆柱形 21"/>
+            <p:cNvSpPr/>
+            <p:nvPr/>
+          </p:nvSpPr>
+          <p:spPr>
+            <a:xfrm rot="16200000">
+              <a:off x="7188" y="6399"/>
+              <a:ext cx="3968" cy="567"/>
+            </a:xfrm>
+            <a:prstGeom prst="can">
+              <a:avLst/>
+            </a:prstGeom>
+            <a:solidFill>
+              <a:schemeClr val="accent5">
+                <a:lumMod val="20000"/>
+                <a:lumOff val="80000"/>
+              </a:schemeClr>
+            </a:solidFill>
+            <a:ln>
+              <a:solidFill>
+                <a:schemeClr val="tx1"/>
+              </a:solidFill>
+            </a:ln>
+          </p:spPr>
+          <p:style>
+            <a:lnRef idx="2">
+              <a:schemeClr val="accent1">
+                <a:lumMod val="75000"/>
+              </a:schemeClr>
+            </a:lnRef>
+            <a:fillRef idx="1">
+              <a:schemeClr val="accent1"/>
+            </a:fillRef>
+            <a:effectRef idx="0">
+              <a:srgbClr val="FFFFFF"/>
+            </a:effectRef>
+            <a:fontRef idx="minor">
+              <a:schemeClr val="lt1"/>
+            </a:fontRef>
+          </p:style>
+          <p:txBody>
+            <a:bodyPr vertOverflow="overflow" horzOverflow="overflow" vert="horz" wrap="square" numCol="1" spcCol="0" rtlCol="0" fromWordArt="0" anchor="ctr" anchorCtr="0" forceAA="0" compatLnSpc="1">
+              <a:noAutofit/>
+            </a:bodyPr>
+            <a:lstStyle/>
+            <a:p>
+              <a:pPr lvl="0" algn="ctr">
+                <a:buClrTx/>
+                <a:buSzTx/>
+                <a:buFontTx/>
+              </a:pPr>
+              <a:endParaRPr lang="zh-CN" altLang="en-US">
+                <a:sym typeface="+mn-ea"/>
+              </a:endParaRPr>
+            </a:p>
+          </p:txBody>
+        </p:sp>
+        <p:grpSp>
+          <p:nvGrpSpPr>
+            <p:cNvPr id="26" name="组合 25"/>
+            <p:cNvGrpSpPr/>
+            <p:nvPr/>
+          </p:nvGrpSpPr>
+          <p:grpSpPr>
+            <a:xfrm>
+              <a:off x="5021" y="4818"/>
+              <a:ext cx="5621" cy="3818"/>
+              <a:chOff x="4685" y="4818"/>
+              <a:chExt cx="5621" cy="3818"/>
+            </a:xfrm>
+          </p:grpSpPr>
+          <p:sp>
+            <p:nvSpPr>
+              <p:cNvPr id="24" name="弧形 23"/>
+              <p:cNvSpPr/>
+              <p:nvPr/>
+            </p:nvSpPr>
+            <p:spPr>
+              <a:xfrm>
+                <a:off x="4685" y="5028"/>
+                <a:ext cx="2811" cy="3608"/>
+              </a:xfrm>
+              <a:prstGeom prst="arc">
+                <a:avLst>
+                  <a:gd name="adj1" fmla="val 10727950"/>
+                  <a:gd name="adj2" fmla="val 14045"/>
+                </a:avLst>
+              </a:prstGeom>
+              <a:ln w="50800">
+                <a:solidFill>
+                  <a:schemeClr val="accent6"/>
+                </a:solidFill>
+              </a:ln>
+            </p:spPr>
+            <p:style>
+              <a:lnRef idx="1">
+                <a:schemeClr val="accent1"/>
+              </a:lnRef>
+              <a:fillRef idx="0">
+                <a:schemeClr val="accent1"/>
+              </a:fillRef>
+              <a:effectRef idx="0">
+                <a:schemeClr val="accent1"/>
+              </a:effectRef>
+              <a:fontRef idx="minor">
+                <a:schemeClr val="tx1"/>
+              </a:fontRef>
+            </p:style>
+            <p:txBody>
+              <a:bodyPr/>
+              <a:lstStyle/>
+              <a:p>
+                <a:endParaRPr lang="zh-CN" altLang="en-US"/>
+              </a:p>
+            </p:txBody>
+          </p:sp>
+          <p:sp>
+            <p:nvSpPr>
+              <p:cNvPr id="25" name="弧形 24"/>
+              <p:cNvSpPr/>
+              <p:nvPr/>
+            </p:nvSpPr>
+            <p:spPr>
+              <a:xfrm rot="10800000">
+                <a:off x="7496" y="4818"/>
+                <a:ext cx="2811" cy="3608"/>
+              </a:xfrm>
+              <a:prstGeom prst="arc">
+                <a:avLst>
+                  <a:gd name="adj1" fmla="val 10707781"/>
+                  <a:gd name="adj2" fmla="val 14045"/>
+                </a:avLst>
+              </a:prstGeom>
+              <a:ln w="50800">
+                <a:solidFill>
+                  <a:schemeClr val="accent6"/>
+                </a:solidFill>
+              </a:ln>
+            </p:spPr>
+            <p:style>
+              <a:lnRef idx="1">
+                <a:schemeClr val="accent1"/>
+              </a:lnRef>
+              <a:fillRef idx="0">
+                <a:schemeClr val="accent1"/>
+              </a:fillRef>
+              <a:effectRef idx="0">
+                <a:schemeClr val="accent1"/>
+              </a:effectRef>
+              <a:fontRef idx="minor">
+                <a:schemeClr val="tx1"/>
+              </a:fontRef>
+            </p:style>
+            <p:txBody>
+              <a:bodyPr/>
+              <a:lstStyle/>
+              <a:p>
+                <a:endParaRPr lang="zh-CN" altLang="en-US"/>
+              </a:p>
+            </p:txBody>
+          </p:sp>
+        </p:grpSp>
       </p:grpSp>
     </p:spTree>
   </p:cSld>
@@ -19268,6 +21566,270 @@
 <file path=ppt/tags/tag1.xml><?xml version="1.0" encoding="utf-8"?>
 <p:tagLst xmlns:a="http://schemas.openxmlformats.org/drawingml/2006/main" xmlns:r="http://schemas.openxmlformats.org/officeDocument/2006/relationships" xmlns:p="http://schemas.openxmlformats.org/presentationml/2006/main">
   <p:tag name="COMMONDATA" val="eyJoZGlkIjoiMWNkOTg5MjZlZjEzNTdlYjk5YTg3ZTczZTZlMGJkOGMifQ=="/>
+</p:tagLst>
+</file>
+
+<file path=ppt/tags/tag10.xml><?xml version="1.0" encoding="utf-8"?>
+<p:tagLst xmlns:a="http://schemas.openxmlformats.org/drawingml/2006/main" xmlns:r="http://schemas.openxmlformats.org/officeDocument/2006/relationships" xmlns:p="http://schemas.openxmlformats.org/presentationml/2006/main">
+  <p:tag name="KSO_WM_DIAGRAM_VIRTUALLY_FRAME" val="{&quot;height&quot;:234.13275590551183,&quot;left&quot;:-10.51511811023622,&quot;top&quot;:71.90220472440944,&quot;width&quot;:926.3902362204724}"/>
+</p:tagLst>
+</file>
+
+<file path=ppt/tags/tag11.xml><?xml version="1.0" encoding="utf-8"?>
+<p:tagLst xmlns:a="http://schemas.openxmlformats.org/drawingml/2006/main" xmlns:r="http://schemas.openxmlformats.org/officeDocument/2006/relationships" xmlns:p="http://schemas.openxmlformats.org/presentationml/2006/main">
+  <p:tag name="KSO_WM_DIAGRAM_VIRTUALLY_FRAME" val="{&quot;height&quot;:234.13275590551183,&quot;left&quot;:-10.51511811023622,&quot;top&quot;:71.90220472440944,&quot;width&quot;:926.3902362204724}"/>
+</p:tagLst>
+</file>
+
+<file path=ppt/tags/tag12.xml><?xml version="1.0" encoding="utf-8"?>
+<p:tagLst xmlns:a="http://schemas.openxmlformats.org/drawingml/2006/main" xmlns:r="http://schemas.openxmlformats.org/officeDocument/2006/relationships" xmlns:p="http://schemas.openxmlformats.org/presentationml/2006/main">
+  <p:tag name="KSO_WM_DIAGRAM_VIRTUALLY_FRAME" val="{&quot;height&quot;:234.13275590551183,&quot;left&quot;:-10.51511811023622,&quot;top&quot;:71.90220472440944,&quot;width&quot;:926.3902362204724}"/>
+</p:tagLst>
+</file>
+
+<file path=ppt/tags/tag13.xml><?xml version="1.0" encoding="utf-8"?>
+<p:tagLst xmlns:a="http://schemas.openxmlformats.org/drawingml/2006/main" xmlns:r="http://schemas.openxmlformats.org/officeDocument/2006/relationships" xmlns:p="http://schemas.openxmlformats.org/presentationml/2006/main">
+  <p:tag name="KSO_WM_DIAGRAM_VIRTUALLY_FRAME" val="{&quot;height&quot;:234.13275590551183,&quot;left&quot;:-10.51511811023622,&quot;top&quot;:71.90220472440944,&quot;width&quot;:926.3902362204724}"/>
+</p:tagLst>
+</file>
+
+<file path=ppt/tags/tag14.xml><?xml version="1.0" encoding="utf-8"?>
+<p:tagLst xmlns:a="http://schemas.openxmlformats.org/drawingml/2006/main" xmlns:r="http://schemas.openxmlformats.org/officeDocument/2006/relationships" xmlns:p="http://schemas.openxmlformats.org/presentationml/2006/main">
+  <p:tag name="KSO_WM_DIAGRAM_VIRTUALLY_FRAME" val="{&quot;height&quot;:234.13275590551183,&quot;left&quot;:-10.51511811023622,&quot;top&quot;:71.90220472440944,&quot;width&quot;:926.3902362204724}"/>
+</p:tagLst>
+</file>
+
+<file path=ppt/tags/tag15.xml><?xml version="1.0" encoding="utf-8"?>
+<p:tagLst xmlns:a="http://schemas.openxmlformats.org/drawingml/2006/main" xmlns:r="http://schemas.openxmlformats.org/officeDocument/2006/relationships" xmlns:p="http://schemas.openxmlformats.org/presentationml/2006/main">
+  <p:tag name="KSO_WM_DIAGRAM_VIRTUALLY_FRAME" val="{&quot;height&quot;:234.13275590551183,&quot;left&quot;:-10.51511811023622,&quot;top&quot;:71.90220472440944,&quot;width&quot;:926.3902362204724}"/>
+</p:tagLst>
+</file>
+
+<file path=ppt/tags/tag16.xml><?xml version="1.0" encoding="utf-8"?>
+<p:tagLst xmlns:a="http://schemas.openxmlformats.org/drawingml/2006/main" xmlns:r="http://schemas.openxmlformats.org/officeDocument/2006/relationships" xmlns:p="http://schemas.openxmlformats.org/presentationml/2006/main">
+  <p:tag name="KSO_WM_DIAGRAM_VIRTUALLY_FRAME" val="{&quot;height&quot;:234.13275590551183,&quot;left&quot;:-10.51511811023622,&quot;top&quot;:71.90220472440944,&quot;width&quot;:926.3902362204724}"/>
+</p:tagLst>
+</file>
+
+<file path=ppt/tags/tag17.xml><?xml version="1.0" encoding="utf-8"?>
+<p:tagLst xmlns:a="http://schemas.openxmlformats.org/drawingml/2006/main" xmlns:r="http://schemas.openxmlformats.org/officeDocument/2006/relationships" xmlns:p="http://schemas.openxmlformats.org/presentationml/2006/main">
+  <p:tag name="KSO_WM_DIAGRAM_VIRTUALLY_FRAME" val="{&quot;height&quot;:234.13275590551183,&quot;left&quot;:-10.51511811023622,&quot;top&quot;:71.90220472440944,&quot;width&quot;:926.3902362204724}"/>
+</p:tagLst>
+</file>
+
+<file path=ppt/tags/tag18.xml><?xml version="1.0" encoding="utf-8"?>
+<p:tagLst xmlns:a="http://schemas.openxmlformats.org/drawingml/2006/main" xmlns:r="http://schemas.openxmlformats.org/officeDocument/2006/relationships" xmlns:p="http://schemas.openxmlformats.org/presentationml/2006/main">
+  <p:tag name="KSO_WM_DIAGRAM_VIRTUALLY_FRAME" val="{&quot;height&quot;:234.13275590551183,&quot;left&quot;:-10.51511811023622,&quot;top&quot;:71.90220472440944,&quot;width&quot;:926.3902362204724}"/>
+</p:tagLst>
+</file>
+
+<file path=ppt/tags/tag19.xml><?xml version="1.0" encoding="utf-8"?>
+<p:tagLst xmlns:a="http://schemas.openxmlformats.org/drawingml/2006/main" xmlns:r="http://schemas.openxmlformats.org/officeDocument/2006/relationships" xmlns:p="http://schemas.openxmlformats.org/presentationml/2006/main">
+  <p:tag name="KSO_WM_DIAGRAM_VIRTUALLY_FRAME" val="{&quot;height&quot;:234.13275590551183,&quot;left&quot;:-10.51511811023622,&quot;top&quot;:71.90220472440944,&quot;width&quot;:926.3902362204724}"/>
+</p:tagLst>
+</file>
+
+<file path=ppt/tags/tag2.xml><?xml version="1.0" encoding="utf-8"?>
+<p:tagLst xmlns:a="http://schemas.openxmlformats.org/drawingml/2006/main" xmlns:r="http://schemas.openxmlformats.org/officeDocument/2006/relationships" xmlns:p="http://schemas.openxmlformats.org/presentationml/2006/main">
+  <p:tag name="KSO_WM_DIAGRAM_VIRTUALLY_FRAME" val="{&quot;height&quot;:234.13275590551183,&quot;left&quot;:-10.51511811023622,&quot;top&quot;:71.90220472440944,&quot;width&quot;:926.3902362204724}"/>
+</p:tagLst>
+</file>
+
+<file path=ppt/tags/tag20.xml><?xml version="1.0" encoding="utf-8"?>
+<p:tagLst xmlns:a="http://schemas.openxmlformats.org/drawingml/2006/main" xmlns:r="http://schemas.openxmlformats.org/officeDocument/2006/relationships" xmlns:p="http://schemas.openxmlformats.org/presentationml/2006/main">
+  <p:tag name="KSO_WM_DIAGRAM_VIRTUALLY_FRAME" val="{&quot;height&quot;:234.13275590551183,&quot;left&quot;:-10.51511811023622,&quot;top&quot;:71.90220472440944,&quot;width&quot;:926.3902362204724}"/>
+</p:tagLst>
+</file>
+
+<file path=ppt/tags/tag21.xml><?xml version="1.0" encoding="utf-8"?>
+<p:tagLst xmlns:a="http://schemas.openxmlformats.org/drawingml/2006/main" xmlns:r="http://schemas.openxmlformats.org/officeDocument/2006/relationships" xmlns:p="http://schemas.openxmlformats.org/presentationml/2006/main">
+  <p:tag name="KSO_WM_DIAGRAM_VIRTUALLY_FRAME" val="{&quot;height&quot;:234.13275590551183,&quot;left&quot;:-10.51511811023622,&quot;top&quot;:71.90220472440944,&quot;width&quot;:926.3902362204724}"/>
+</p:tagLst>
+</file>
+
+<file path=ppt/tags/tag22.xml><?xml version="1.0" encoding="utf-8"?>
+<p:tagLst xmlns:a="http://schemas.openxmlformats.org/drawingml/2006/main" xmlns:r="http://schemas.openxmlformats.org/officeDocument/2006/relationships" xmlns:p="http://schemas.openxmlformats.org/presentationml/2006/main">
+  <p:tag name="KSO_WM_DIAGRAM_VIRTUALLY_FRAME" val="{&quot;height&quot;:234.13275590551183,&quot;left&quot;:-10.51511811023622,&quot;top&quot;:71.90220472440944,&quot;width&quot;:926.3902362204724}"/>
+</p:tagLst>
+</file>
+
+<file path=ppt/tags/tag23.xml><?xml version="1.0" encoding="utf-8"?>
+<p:tagLst xmlns:a="http://schemas.openxmlformats.org/drawingml/2006/main" xmlns:r="http://schemas.openxmlformats.org/officeDocument/2006/relationships" xmlns:p="http://schemas.openxmlformats.org/presentationml/2006/main">
+  <p:tag name="KSO_WM_DIAGRAM_VIRTUALLY_FRAME" val="{&quot;height&quot;:234.13275590551183,&quot;left&quot;:-10.51511811023622,&quot;top&quot;:71.90220472440944,&quot;width&quot;:926.3902362204724}"/>
+</p:tagLst>
+</file>
+
+<file path=ppt/tags/tag24.xml><?xml version="1.0" encoding="utf-8"?>
+<p:tagLst xmlns:a="http://schemas.openxmlformats.org/drawingml/2006/main" xmlns:r="http://schemas.openxmlformats.org/officeDocument/2006/relationships" xmlns:p="http://schemas.openxmlformats.org/presentationml/2006/main">
+  <p:tag name="KSO_WM_DIAGRAM_VIRTUALLY_FRAME" val="{&quot;height&quot;:234.13275590551183,&quot;left&quot;:-10.51511811023622,&quot;top&quot;:71.90220472440944,&quot;width&quot;:926.3902362204724}"/>
+</p:tagLst>
+</file>
+
+<file path=ppt/tags/tag25.xml><?xml version="1.0" encoding="utf-8"?>
+<p:tagLst xmlns:a="http://schemas.openxmlformats.org/drawingml/2006/main" xmlns:r="http://schemas.openxmlformats.org/officeDocument/2006/relationships" xmlns:p="http://schemas.openxmlformats.org/presentationml/2006/main">
+  <p:tag name="KSO_WM_DIAGRAM_VIRTUALLY_FRAME" val="{&quot;height&quot;:234.13275590551183,&quot;left&quot;:-10.51511811023622,&quot;top&quot;:71.90220472440944,&quot;width&quot;:926.3902362204724}"/>
+</p:tagLst>
+</file>
+
+<file path=ppt/tags/tag26.xml><?xml version="1.0" encoding="utf-8"?>
+<p:tagLst xmlns:a="http://schemas.openxmlformats.org/drawingml/2006/main" xmlns:r="http://schemas.openxmlformats.org/officeDocument/2006/relationships" xmlns:p="http://schemas.openxmlformats.org/presentationml/2006/main">
+  <p:tag name="KSO_WM_DIAGRAM_VIRTUALLY_FRAME" val="{&quot;height&quot;:234.13275590551183,&quot;left&quot;:-10.51511811023622,&quot;top&quot;:71.90220472440944,&quot;width&quot;:926.3902362204724}"/>
+</p:tagLst>
+</file>
+
+<file path=ppt/tags/tag27.xml><?xml version="1.0" encoding="utf-8"?>
+<p:tagLst xmlns:a="http://schemas.openxmlformats.org/drawingml/2006/main" xmlns:r="http://schemas.openxmlformats.org/officeDocument/2006/relationships" xmlns:p="http://schemas.openxmlformats.org/presentationml/2006/main">
+  <p:tag name="KSO_WM_DIAGRAM_VIRTUALLY_FRAME" val="{&quot;height&quot;:234.13275590551183,&quot;left&quot;:-10.51511811023622,&quot;top&quot;:71.90220472440944,&quot;width&quot;:926.3902362204724}"/>
+</p:tagLst>
+</file>
+
+<file path=ppt/tags/tag28.xml><?xml version="1.0" encoding="utf-8"?>
+<p:tagLst xmlns:a="http://schemas.openxmlformats.org/drawingml/2006/main" xmlns:r="http://schemas.openxmlformats.org/officeDocument/2006/relationships" xmlns:p="http://schemas.openxmlformats.org/presentationml/2006/main">
+  <p:tag name="KSO_WM_DIAGRAM_VIRTUALLY_FRAME" val="{&quot;height&quot;:234.13275590551183,&quot;left&quot;:-10.51511811023622,&quot;top&quot;:71.90220472440944,&quot;width&quot;:926.3902362204724}"/>
+</p:tagLst>
+</file>
+
+<file path=ppt/tags/tag29.xml><?xml version="1.0" encoding="utf-8"?>
+<p:tagLst xmlns:a="http://schemas.openxmlformats.org/drawingml/2006/main" xmlns:r="http://schemas.openxmlformats.org/officeDocument/2006/relationships" xmlns:p="http://schemas.openxmlformats.org/presentationml/2006/main">
+  <p:tag name="KSO_WM_DIAGRAM_VIRTUALLY_FRAME" val="{&quot;height&quot;:234.13275590551183,&quot;left&quot;:-10.51511811023622,&quot;top&quot;:71.90220472440944,&quot;width&quot;:926.3902362204724}"/>
+</p:tagLst>
+</file>
+
+<file path=ppt/tags/tag3.xml><?xml version="1.0" encoding="utf-8"?>
+<p:tagLst xmlns:a="http://schemas.openxmlformats.org/drawingml/2006/main" xmlns:r="http://schemas.openxmlformats.org/officeDocument/2006/relationships" xmlns:p="http://schemas.openxmlformats.org/presentationml/2006/main">
+  <p:tag name="KSO_WM_DIAGRAM_VIRTUALLY_FRAME" val="{&quot;height&quot;:234.13275590551183,&quot;left&quot;:-10.51511811023622,&quot;top&quot;:71.90220472440944,&quot;width&quot;:926.3902362204724}"/>
+</p:tagLst>
+</file>
+
+<file path=ppt/tags/tag30.xml><?xml version="1.0" encoding="utf-8"?>
+<p:tagLst xmlns:a="http://schemas.openxmlformats.org/drawingml/2006/main" xmlns:r="http://schemas.openxmlformats.org/officeDocument/2006/relationships" xmlns:p="http://schemas.openxmlformats.org/presentationml/2006/main">
+  <p:tag name="KSO_WM_DIAGRAM_VIRTUALLY_FRAME" val="{&quot;height&quot;:234.13275590551183,&quot;left&quot;:-10.51511811023622,&quot;top&quot;:71.90220472440944,&quot;width&quot;:926.3902362204724}"/>
+</p:tagLst>
+</file>
+
+<file path=ppt/tags/tag300.xml><?xml version="1.0" encoding="utf-8"?>
+<p:tagLst xmlns:p="http://schemas.openxmlformats.org/presentationml/2006/main">
+  <p:tag name="KSO_WM_DIAGRAM_VIRTUALLY_FRAME" val="{&quot;height&quot;:234.13275590551183,&quot;left&quot;:-10.51511811023622,&quot;top&quot;:71.90220472440944,&quot;width&quot;:926.3902362204724}"/>
+</p:tagLst>
+</file>
+
+<file path=ppt/tags/tag31.xml><?xml version="1.0" encoding="utf-8"?>
+<p:tagLst xmlns:a="http://schemas.openxmlformats.org/drawingml/2006/main" xmlns:r="http://schemas.openxmlformats.org/officeDocument/2006/relationships" xmlns:p="http://schemas.openxmlformats.org/presentationml/2006/main">
+  <p:tag name="KSO_WM_DIAGRAM_VIRTUALLY_FRAME" val="{&quot;height&quot;:234.13275590551183,&quot;left&quot;:-10.51511811023622,&quot;top&quot;:71.90220472440944,&quot;width&quot;:926.3902362204724}"/>
+</p:tagLst>
+</file>
+
+<file path=ppt/tags/tag32.xml><?xml version="1.0" encoding="utf-8"?>
+<p:tagLst xmlns:a="http://schemas.openxmlformats.org/drawingml/2006/main" xmlns:r="http://schemas.openxmlformats.org/officeDocument/2006/relationships" xmlns:p="http://schemas.openxmlformats.org/presentationml/2006/main">
+  <p:tag name="KSO_WM_DIAGRAM_VIRTUALLY_FRAME" val="{&quot;height&quot;:234.13275590551183,&quot;left&quot;:-10.51511811023622,&quot;top&quot;:71.90220472440944,&quot;width&quot;:926.3902362204724}"/>
+</p:tagLst>
+</file>
+
+<file path=ppt/tags/tag320.xml><?xml version="1.0" encoding="utf-8"?>
+<p:tagLst xmlns:p="http://schemas.openxmlformats.org/presentationml/2006/main">
+  <p:tag name="KSO_WM_DIAGRAM_VIRTUALLY_FRAME" val="{&quot;height&quot;:234.13275590551183,&quot;left&quot;:-10.51511811023622,&quot;top&quot;:71.90220472440944,&quot;width&quot;:926.3902362204724}"/>
+</p:tagLst>
+</file>
+
+<file path=ppt/tags/tag33.xml><?xml version="1.0" encoding="utf-8"?>
+<p:tagLst xmlns:a="http://schemas.openxmlformats.org/drawingml/2006/main" xmlns:r="http://schemas.openxmlformats.org/officeDocument/2006/relationships" xmlns:p="http://schemas.openxmlformats.org/presentationml/2006/main">
+  <p:tag name="KSO_WM_DIAGRAM_VIRTUALLY_FRAME" val="{&quot;height&quot;:234.13275590551183,&quot;left&quot;:-10.51511811023622,&quot;top&quot;:71.90220472440944,&quot;width&quot;:926.3902362204724}"/>
+</p:tagLst>
+</file>
+
+<file path=ppt/tags/tag34.xml><?xml version="1.0" encoding="utf-8"?>
+<p:tagLst xmlns:a="http://schemas.openxmlformats.org/drawingml/2006/main" xmlns:r="http://schemas.openxmlformats.org/officeDocument/2006/relationships" xmlns:p="http://schemas.openxmlformats.org/presentationml/2006/main">
+  <p:tag name="KSO_WM_DIAGRAM_VIRTUALLY_FRAME" val="{&quot;height&quot;:234.13275590551183,&quot;left&quot;:-10.51511811023622,&quot;top&quot;:71.90220472440944,&quot;width&quot;:926.3902362204724}"/>
+</p:tagLst>
+</file>
+
+<file path=ppt/tags/tag340.xml><?xml version="1.0" encoding="utf-8"?>
+<p:tagLst xmlns:p="http://schemas.openxmlformats.org/presentationml/2006/main">
+  <p:tag name="KSO_WM_DIAGRAM_VIRTUALLY_FRAME" val="{&quot;height&quot;:234.13275590551183,&quot;left&quot;:-10.51511811023622,&quot;top&quot;:71.90220472440944,&quot;width&quot;:926.3902362204724}"/>
+</p:tagLst>
+</file>
+
+<file path=ppt/tags/tag35.xml><?xml version="1.0" encoding="utf-8"?>
+<p:tagLst xmlns:a="http://schemas.openxmlformats.org/drawingml/2006/main" xmlns:r="http://schemas.openxmlformats.org/officeDocument/2006/relationships" xmlns:p="http://schemas.openxmlformats.org/presentationml/2006/main">
+  <p:tag name="KSO_WM_DIAGRAM_VIRTUALLY_FRAME" val="{&quot;height&quot;:234.13275590551183,&quot;left&quot;:-10.51511811023622,&quot;top&quot;:71.90220472440944,&quot;width&quot;:926.3902362204724}"/>
+</p:tagLst>
+</file>
+
+<file path=ppt/tags/tag36.xml><?xml version="1.0" encoding="utf-8"?>
+<p:tagLst xmlns:a="http://schemas.openxmlformats.org/drawingml/2006/main" xmlns:r="http://schemas.openxmlformats.org/officeDocument/2006/relationships" xmlns:p="http://schemas.openxmlformats.org/presentationml/2006/main">
+  <p:tag name="KSO_WM_DIAGRAM_VIRTUALLY_FRAME" val="{&quot;height&quot;:234.13275590551183,&quot;left&quot;:-10.51511811023622,&quot;top&quot;:71.90220472440944,&quot;width&quot;:926.3902362204724}"/>
+</p:tagLst>
+</file>
+
+<file path=ppt/tags/tag360.xml><?xml version="1.0" encoding="utf-8"?>
+<p:tagLst xmlns:p="http://schemas.openxmlformats.org/presentationml/2006/main">
+  <p:tag name="KSO_WM_DIAGRAM_VIRTUALLY_FRAME" val="{&quot;height&quot;:234.13275590551183,&quot;left&quot;:-10.51511811023622,&quot;top&quot;:71.90220472440944,&quot;width&quot;:926.3902362204724}"/>
+</p:tagLst>
+</file>
+
+<file path=ppt/tags/tag37.xml><?xml version="1.0" encoding="utf-8"?>
+<p:tagLst xmlns:a="http://schemas.openxmlformats.org/drawingml/2006/main" xmlns:r="http://schemas.openxmlformats.org/officeDocument/2006/relationships" xmlns:p="http://schemas.openxmlformats.org/presentationml/2006/main">
+  <p:tag name="KSO_WM_DIAGRAM_VIRTUALLY_FRAME" val="{&quot;height&quot;:234.13275590551183,&quot;left&quot;:-10.51511811023622,&quot;top&quot;:71.90220472440944,&quot;width&quot;:926.3902362204724}"/>
+</p:tagLst>
+</file>
+
+<file path=ppt/tags/tag38.xml><?xml version="1.0" encoding="utf-8"?>
+<p:tagLst xmlns:p="http://schemas.openxmlformats.org/presentationml/2006/main">
+  <p:tag name="KSO_WM_DIAGRAM_VIRTUALLY_FRAME" val="{&quot;height&quot;:234.13275590551183,&quot;left&quot;:-10.51511811023622,&quot;top&quot;:71.90220472440944,&quot;width&quot;:926.3902362204724}"/>
+</p:tagLst>
+</file>
+
+<file path=ppt/tags/tag4.xml><?xml version="1.0" encoding="utf-8"?>
+<p:tagLst xmlns:a="http://schemas.openxmlformats.org/drawingml/2006/main" xmlns:r="http://schemas.openxmlformats.org/officeDocument/2006/relationships" xmlns:p="http://schemas.openxmlformats.org/presentationml/2006/main">
+  <p:tag name="KSO_WM_DIAGRAM_VIRTUALLY_FRAME" val="{&quot;height&quot;:234.13275590551183,&quot;left&quot;:-10.51511811023622,&quot;top&quot;:71.90220472440944,&quot;width&quot;:926.3902362204724}"/>
+</p:tagLst>
+</file>
+
+<file path=ppt/tags/tag40.xml><?xml version="1.0" encoding="utf-8"?>
+<p:tagLst xmlns:p="http://schemas.openxmlformats.org/presentationml/2006/main">
+  <p:tag name="KSO_WM_DIAGRAM_VIRTUALLY_FRAME" val="{&quot;height&quot;:234.13275590551183,&quot;left&quot;:-10.51511811023622,&quot;top&quot;:71.90220472440944,&quot;width&quot;:926.3902362204724}"/>
+</p:tagLst>
+</file>
+
+<file path=ppt/tags/tag42.xml><?xml version="1.0" encoding="utf-8"?>
+<p:tagLst xmlns:p="http://schemas.openxmlformats.org/presentationml/2006/main">
+  <p:tag name="KSO_WM_DIAGRAM_VIRTUALLY_FRAME" val="{&quot;height&quot;:234.13275590551183,&quot;left&quot;:-10.51511811023622,&quot;top&quot;:71.90220472440944,&quot;width&quot;:926.3902362204724}"/>
+</p:tagLst>
+</file>
+
+<file path=ppt/tags/tag44.xml><?xml version="1.0" encoding="utf-8"?>
+<p:tagLst xmlns:p="http://schemas.openxmlformats.org/presentationml/2006/main">
+  <p:tag name="KSO_WM_DIAGRAM_VIRTUALLY_FRAME" val="{&quot;height&quot;:234.13275590551183,&quot;left&quot;:-10.51511811023622,&quot;top&quot;:71.90220472440944,&quot;width&quot;:926.3902362204724}"/>
+</p:tagLst>
+</file>
+
+<file path=ppt/tags/tag5.xml><?xml version="1.0" encoding="utf-8"?>
+<p:tagLst xmlns:a="http://schemas.openxmlformats.org/drawingml/2006/main" xmlns:r="http://schemas.openxmlformats.org/officeDocument/2006/relationships" xmlns:p="http://schemas.openxmlformats.org/presentationml/2006/main">
+  <p:tag name="KSO_WM_DIAGRAM_VIRTUALLY_FRAME" val="{&quot;height&quot;:234.13275590551183,&quot;left&quot;:-10.51511811023622,&quot;top&quot;:71.90220472440944,&quot;width&quot;:926.3902362204724}"/>
+</p:tagLst>
+</file>
+
+<file path=ppt/tags/tag6.xml><?xml version="1.0" encoding="utf-8"?>
+<p:tagLst xmlns:a="http://schemas.openxmlformats.org/drawingml/2006/main" xmlns:r="http://schemas.openxmlformats.org/officeDocument/2006/relationships" xmlns:p="http://schemas.openxmlformats.org/presentationml/2006/main">
+  <p:tag name="KSO_WM_DIAGRAM_VIRTUALLY_FRAME" val="{&quot;height&quot;:234.13275590551183,&quot;left&quot;:-10.51511811023622,&quot;top&quot;:71.90220472440944,&quot;width&quot;:926.3902362204724}"/>
+</p:tagLst>
+</file>
+
+<file path=ppt/tags/tag7.xml><?xml version="1.0" encoding="utf-8"?>
+<p:tagLst xmlns:a="http://schemas.openxmlformats.org/drawingml/2006/main" xmlns:r="http://schemas.openxmlformats.org/officeDocument/2006/relationships" xmlns:p="http://schemas.openxmlformats.org/presentationml/2006/main">
+  <p:tag name="KSO_WM_DIAGRAM_VIRTUALLY_FRAME" val="{&quot;height&quot;:234.13275590551183,&quot;left&quot;:-10.51511811023622,&quot;top&quot;:71.90220472440944,&quot;width&quot;:926.3902362204724}"/>
+</p:tagLst>
+</file>
+
+<file path=ppt/tags/tag8.xml><?xml version="1.0" encoding="utf-8"?>
+<p:tagLst xmlns:a="http://schemas.openxmlformats.org/drawingml/2006/main" xmlns:r="http://schemas.openxmlformats.org/officeDocument/2006/relationships" xmlns:p="http://schemas.openxmlformats.org/presentationml/2006/main">
+  <p:tag name="KSO_WM_DIAGRAM_VIRTUALLY_FRAME" val="{&quot;height&quot;:234.13275590551183,&quot;left&quot;:-10.51511811023622,&quot;top&quot;:71.90220472440944,&quot;width&quot;:926.3902362204724}"/>
+</p:tagLst>
+</file>
+
+<file path=ppt/tags/tag9.xml><?xml version="1.0" encoding="utf-8"?>
+<p:tagLst xmlns:a="http://schemas.openxmlformats.org/drawingml/2006/main" xmlns:r="http://schemas.openxmlformats.org/officeDocument/2006/relationships" xmlns:p="http://schemas.openxmlformats.org/presentationml/2006/main">
+  <p:tag name="KSO_WM_DIAGRAM_VIRTUALLY_FRAME" val="{&quot;height&quot;:234.13275590551183,&quot;left&quot;:-10.51511811023622,&quot;top&quot;:71.90220472440944,&quot;width&quot;:926.3902362204724}"/>
 </p:tagLst>
 </file>
 
@@ -19515,6 +22077,38 @@
     </a:fmtScheme>
   </a:themeElements>
   <a:objectDefaults>
+    <a:spDef>
+      <a:spPr>
+        <a:noFill/>
+        <a:ln>
+          <a:solidFill>
+            <a:schemeClr val="tx1"/>
+          </a:solidFill>
+        </a:ln>
+      </a:spPr>
+      <a:bodyPr rtlCol="0" anchor="ctr"/>
+      <a:lstStyle>
+        <a:defPPr algn="ctr">
+          <a:defRPr/>
+        </a:defPPr>
+      </a:lstStyle>
+      <a:style>
+        <a:lnRef idx="2">
+          <a:schemeClr val="accent1">
+            <a:lumMod val="75000"/>
+          </a:schemeClr>
+        </a:lnRef>
+        <a:fillRef idx="1">
+          <a:schemeClr val="accent1"/>
+        </a:fillRef>
+        <a:effectRef idx="0">
+          <a:srgbClr val="FFFFFF"/>
+        </a:effectRef>
+        <a:fontRef idx="minor">
+          <a:schemeClr val="lt1"/>
+        </a:fontRef>
+      </a:style>
+    </a:spDef>
     <a:lnDef>
       <a:spPr>
         <a:ln w="25400">
